--- a/day2-deck/decks/Op Code Missed Opportunity - Review.pptx
+++ b/day2-deck/decks/Op Code Missed Opportunity - Review.pptx
@@ -2323,8 +2323,8 @@
         </p:nvSpPr>
         <p:spPr>
           <a:xfrm>
-            <a:off x="457200" y="5961888"/>
-            <a:ext cx="11274552" cy="548640"/>
+            <a:off x="457200" y="6126480"/>
+            <a:ext cx="11274552" cy="371856"/>
           </a:xfrm>
           <a:prstGeom prst="rect">
             <a:avLst/>
@@ -2343,8 +2343,8 @@
         </p:nvSpPr>
         <p:spPr>
           <a:xfrm>
-            <a:off x="658368" y="5980176"/>
-            <a:ext cx="10927080" cy="512064"/>
+            <a:off x="658368" y="6144768"/>
+            <a:ext cx="10927080" cy="335280"/>
           </a:xfrm>
           <a:prstGeom prst="rect">
             <a:avLst/>
@@ -2513,7 +2513,7 @@
         <p:spPr>
           <a:xfrm>
             <a:off x="457200" y="1207008"/>
-            <a:ext cx="11274552" cy="4645152"/>
+            <a:ext cx="11274552" cy="4782312"/>
           </a:xfrm>
           <a:prstGeom prst="rect">
             <a:avLst/>
@@ -2767,7 +2767,7 @@
         <p:spPr>
           <a:xfrm>
             <a:off x="658368" y="1700784"/>
-            <a:ext cx="1938528" cy="251460"/>
+            <a:ext cx="1938528" cy="264033"/>
           </a:xfrm>
           <a:prstGeom prst="rect">
             <a:avLst/>
@@ -2805,8 +2805,8 @@
         </p:nvSpPr>
         <p:spPr>
           <a:xfrm>
-            <a:off x="2670048" y="1757363"/>
-            <a:ext cx="804672" cy="138303"/>
+            <a:off x="2670048" y="1760191"/>
+            <a:ext cx="804672" cy="145218"/>
           </a:xfrm>
           <a:prstGeom prst="rect">
             <a:avLst/>
@@ -2826,7 +2826,7 @@
         <p:spPr>
           <a:xfrm>
             <a:off x="3529584" y="1700784"/>
-            <a:ext cx="896112" cy="251460"/>
+            <a:ext cx="896112" cy="264033"/>
           </a:xfrm>
           <a:prstGeom prst="rect">
             <a:avLst/>
@@ -2865,7 +2865,7 @@
         <p:spPr>
           <a:xfrm>
             <a:off x="4425696" y="1700784"/>
-            <a:ext cx="603504" cy="251460"/>
+            <a:ext cx="603504" cy="264033"/>
           </a:xfrm>
           <a:prstGeom prst="rect">
             <a:avLst/>
@@ -2904,7 +2904,7 @@
         <p:spPr>
           <a:xfrm>
             <a:off x="5029200" y="1700784"/>
-            <a:ext cx="841248" cy="251460"/>
+            <a:ext cx="841248" cy="264033"/>
           </a:xfrm>
           <a:prstGeom prst="rect">
             <a:avLst/>
@@ -2942,8 +2942,8 @@
         </p:nvSpPr>
         <p:spPr>
           <a:xfrm>
-            <a:off x="658368" y="1952244"/>
-            <a:ext cx="1938528" cy="251460"/>
+            <a:off x="658368" y="1964817"/>
+            <a:ext cx="1938528" cy="264033"/>
           </a:xfrm>
           <a:prstGeom prst="rect">
             <a:avLst/>
@@ -2981,8 +2981,8 @@
         </p:nvSpPr>
         <p:spPr>
           <a:xfrm>
-            <a:off x="2670048" y="2008823"/>
-            <a:ext cx="706276" cy="138303"/>
+            <a:off x="2670048" y="2024224"/>
+            <a:ext cx="706276" cy="145218"/>
           </a:xfrm>
           <a:prstGeom prst="rect">
             <a:avLst/>
@@ -3001,8 +3001,8 @@
         </p:nvSpPr>
         <p:spPr>
           <a:xfrm>
-            <a:off x="3529584" y="1952244"/>
-            <a:ext cx="896112" cy="251460"/>
+            <a:off x="3529584" y="1964817"/>
+            <a:ext cx="896112" cy="264033"/>
           </a:xfrm>
           <a:prstGeom prst="rect">
             <a:avLst/>
@@ -3040,8 +3040,8 @@
         </p:nvSpPr>
         <p:spPr>
           <a:xfrm>
-            <a:off x="4425696" y="1952244"/>
-            <a:ext cx="603504" cy="251460"/>
+            <a:off x="4425696" y="1964817"/>
+            <a:ext cx="603504" cy="264033"/>
           </a:xfrm>
           <a:prstGeom prst="rect">
             <a:avLst/>
@@ -3079,8 +3079,8 @@
         </p:nvSpPr>
         <p:spPr>
           <a:xfrm>
-            <a:off x="5029200" y="1952244"/>
-            <a:ext cx="841248" cy="251460"/>
+            <a:off x="5029200" y="1964817"/>
+            <a:ext cx="841248" cy="264033"/>
           </a:xfrm>
           <a:prstGeom prst="rect">
             <a:avLst/>
@@ -3118,8 +3118,8 @@
         </p:nvSpPr>
         <p:spPr>
           <a:xfrm>
-            <a:off x="658368" y="2203704"/>
-            <a:ext cx="1938528" cy="251460"/>
+            <a:off x="658368" y="2228850"/>
+            <a:ext cx="1938528" cy="264033"/>
           </a:xfrm>
           <a:prstGeom prst="rect">
             <a:avLst/>
@@ -3157,8 +3157,8 @@
         </p:nvSpPr>
         <p:spPr>
           <a:xfrm>
-            <a:off x="2670048" y="2260283"/>
-            <a:ext cx="528954" cy="138303"/>
+            <a:off x="2670048" y="2288257"/>
+            <a:ext cx="528954" cy="145218"/>
           </a:xfrm>
           <a:prstGeom prst="rect">
             <a:avLst/>
@@ -3177,8 +3177,8 @@
         </p:nvSpPr>
         <p:spPr>
           <a:xfrm>
-            <a:off x="3529584" y="2203704"/>
-            <a:ext cx="896112" cy="251460"/>
+            <a:off x="3529584" y="2228850"/>
+            <a:ext cx="896112" cy="264033"/>
           </a:xfrm>
           <a:prstGeom prst="rect">
             <a:avLst/>
@@ -3216,8 +3216,8 @@
         </p:nvSpPr>
         <p:spPr>
           <a:xfrm>
-            <a:off x="4425696" y="2203704"/>
-            <a:ext cx="603504" cy="251460"/>
+            <a:off x="4425696" y="2228850"/>
+            <a:ext cx="603504" cy="264033"/>
           </a:xfrm>
           <a:prstGeom prst="rect">
             <a:avLst/>
@@ -3255,8 +3255,8 @@
         </p:nvSpPr>
         <p:spPr>
           <a:xfrm>
-            <a:off x="5029200" y="2203704"/>
-            <a:ext cx="841248" cy="251460"/>
+            <a:off x="5029200" y="2228850"/>
+            <a:ext cx="841248" cy="264033"/>
           </a:xfrm>
           <a:prstGeom prst="rect">
             <a:avLst/>
@@ -3294,8 +3294,8 @@
         </p:nvSpPr>
         <p:spPr>
           <a:xfrm>
-            <a:off x="658368" y="2455164"/>
-            <a:ext cx="1938528" cy="251460"/>
+            <a:off x="658368" y="2492883"/>
+            <a:ext cx="1938528" cy="264033"/>
           </a:xfrm>
           <a:prstGeom prst="rect">
             <a:avLst/>
@@ -3333,8 +3333,8 @@
         </p:nvSpPr>
         <p:spPr>
           <a:xfrm>
-            <a:off x="2670048" y="2511743"/>
-            <a:ext cx="459669" cy="138303"/>
+            <a:off x="2670048" y="2552290"/>
+            <a:ext cx="459669" cy="145218"/>
           </a:xfrm>
           <a:prstGeom prst="rect">
             <a:avLst/>
@@ -3353,8 +3353,8 @@
         </p:nvSpPr>
         <p:spPr>
           <a:xfrm>
-            <a:off x="3529584" y="2455164"/>
-            <a:ext cx="896112" cy="251460"/>
+            <a:off x="3529584" y="2492883"/>
+            <a:ext cx="896112" cy="264033"/>
           </a:xfrm>
           <a:prstGeom prst="rect">
             <a:avLst/>
@@ -3392,8 +3392,8 @@
         </p:nvSpPr>
         <p:spPr>
           <a:xfrm>
-            <a:off x="4425696" y="2455164"/>
-            <a:ext cx="603504" cy="251460"/>
+            <a:off x="4425696" y="2492883"/>
+            <a:ext cx="603504" cy="264033"/>
           </a:xfrm>
           <a:prstGeom prst="rect">
             <a:avLst/>
@@ -3431,8 +3431,8 @@
         </p:nvSpPr>
         <p:spPr>
           <a:xfrm>
-            <a:off x="5029200" y="2455164"/>
-            <a:ext cx="841248" cy="251460"/>
+            <a:off x="5029200" y="2492883"/>
+            <a:ext cx="841248" cy="264033"/>
           </a:xfrm>
           <a:prstGeom prst="rect">
             <a:avLst/>
@@ -3470,8 +3470,8 @@
         </p:nvSpPr>
         <p:spPr>
           <a:xfrm>
-            <a:off x="658368" y="2706624"/>
-            <a:ext cx="1938528" cy="251460"/>
+            <a:off x="658368" y="2756916"/>
+            <a:ext cx="1938528" cy="264033"/>
           </a:xfrm>
           <a:prstGeom prst="rect">
             <a:avLst/>
@@ -3509,8 +3509,8 @@
         </p:nvSpPr>
         <p:spPr>
           <a:xfrm>
-            <a:off x="2670048" y="2763203"/>
-            <a:ext cx="366701" cy="138303"/>
+            <a:off x="2670048" y="2816323"/>
+            <a:ext cx="366701" cy="145218"/>
           </a:xfrm>
           <a:prstGeom prst="rect">
             <a:avLst/>
@@ -3529,8 +3529,8 @@
         </p:nvSpPr>
         <p:spPr>
           <a:xfrm>
-            <a:off x="3529584" y="2706624"/>
-            <a:ext cx="896112" cy="251460"/>
+            <a:off x="3529584" y="2756916"/>
+            <a:ext cx="896112" cy="264033"/>
           </a:xfrm>
           <a:prstGeom prst="rect">
             <a:avLst/>
@@ -3568,8 +3568,8 @@
         </p:nvSpPr>
         <p:spPr>
           <a:xfrm>
-            <a:off x="4425696" y="2706624"/>
-            <a:ext cx="603504" cy="251460"/>
+            <a:off x="4425696" y="2756916"/>
+            <a:ext cx="603504" cy="264033"/>
           </a:xfrm>
           <a:prstGeom prst="rect">
             <a:avLst/>
@@ -3607,8 +3607,8 @@
         </p:nvSpPr>
         <p:spPr>
           <a:xfrm>
-            <a:off x="5029200" y="2706624"/>
-            <a:ext cx="841248" cy="251460"/>
+            <a:off x="5029200" y="2756916"/>
+            <a:ext cx="841248" cy="264033"/>
           </a:xfrm>
           <a:prstGeom prst="rect">
             <a:avLst/>
@@ -3646,8 +3646,8 @@
         </p:nvSpPr>
         <p:spPr>
           <a:xfrm>
-            <a:off x="658368" y="2958084"/>
-            <a:ext cx="1938528" cy="251460"/>
+            <a:off x="658368" y="3020949"/>
+            <a:ext cx="1938528" cy="264033"/>
           </a:xfrm>
           <a:prstGeom prst="rect">
             <a:avLst/>
@@ -3685,8 +3685,8 @@
         </p:nvSpPr>
         <p:spPr>
           <a:xfrm>
-            <a:off x="2670048" y="3014663"/>
-            <a:ext cx="363983" cy="138303"/>
+            <a:off x="2670048" y="3080356"/>
+            <a:ext cx="363983" cy="145218"/>
           </a:xfrm>
           <a:prstGeom prst="rect">
             <a:avLst/>
@@ -3705,8 +3705,8 @@
         </p:nvSpPr>
         <p:spPr>
           <a:xfrm>
-            <a:off x="3529584" y="2958084"/>
-            <a:ext cx="896112" cy="251460"/>
+            <a:off x="3529584" y="3020949"/>
+            <a:ext cx="896112" cy="264033"/>
           </a:xfrm>
           <a:prstGeom prst="rect">
             <a:avLst/>
@@ -3744,8 +3744,8 @@
         </p:nvSpPr>
         <p:spPr>
           <a:xfrm>
-            <a:off x="4425696" y="2958084"/>
-            <a:ext cx="603504" cy="251460"/>
+            <a:off x="4425696" y="3020949"/>
+            <a:ext cx="603504" cy="264033"/>
           </a:xfrm>
           <a:prstGeom prst="rect">
             <a:avLst/>
@@ -3783,8 +3783,8 @@
         </p:nvSpPr>
         <p:spPr>
           <a:xfrm>
-            <a:off x="5029200" y="2958084"/>
-            <a:ext cx="841248" cy="251460"/>
+            <a:off x="5029200" y="3020949"/>
+            <a:ext cx="841248" cy="264033"/>
           </a:xfrm>
           <a:prstGeom prst="rect">
             <a:avLst/>
@@ -3822,8 +3822,8 @@
         </p:nvSpPr>
         <p:spPr>
           <a:xfrm>
-            <a:off x="658368" y="3209544"/>
-            <a:ext cx="1938528" cy="251460"/>
+            <a:off x="658368" y="3284982"/>
+            <a:ext cx="1938528" cy="264033"/>
           </a:xfrm>
           <a:prstGeom prst="rect">
             <a:avLst/>
@@ -3861,8 +3861,8 @@
         </p:nvSpPr>
         <p:spPr>
           <a:xfrm>
-            <a:off x="2670048" y="3266123"/>
-            <a:ext cx="346113" cy="138303"/>
+            <a:off x="2670048" y="3344389"/>
+            <a:ext cx="346113" cy="145218"/>
           </a:xfrm>
           <a:prstGeom prst="rect">
             <a:avLst/>
@@ -3881,8 +3881,8 @@
         </p:nvSpPr>
         <p:spPr>
           <a:xfrm>
-            <a:off x="3529584" y="3209544"/>
-            <a:ext cx="896112" cy="251460"/>
+            <a:off x="3529584" y="3284982"/>
+            <a:ext cx="896112" cy="264033"/>
           </a:xfrm>
           <a:prstGeom prst="rect">
             <a:avLst/>
@@ -3920,8 +3920,8 @@
         </p:nvSpPr>
         <p:spPr>
           <a:xfrm>
-            <a:off x="4425696" y="3209544"/>
-            <a:ext cx="603504" cy="251460"/>
+            <a:off x="4425696" y="3284982"/>
+            <a:ext cx="603504" cy="264033"/>
           </a:xfrm>
           <a:prstGeom prst="rect">
             <a:avLst/>
@@ -3959,8 +3959,8 @@
         </p:nvSpPr>
         <p:spPr>
           <a:xfrm>
-            <a:off x="5029200" y="3209544"/>
-            <a:ext cx="841248" cy="251460"/>
+            <a:off x="5029200" y="3284982"/>
+            <a:ext cx="841248" cy="264033"/>
           </a:xfrm>
           <a:prstGeom prst="rect">
             <a:avLst/>
@@ -3998,8 +3998,8 @@
         </p:nvSpPr>
         <p:spPr>
           <a:xfrm>
-            <a:off x="658368" y="3461004"/>
-            <a:ext cx="1938528" cy="251460"/>
+            <a:off x="658368" y="3549015"/>
+            <a:ext cx="1938528" cy="264033"/>
           </a:xfrm>
           <a:prstGeom prst="rect">
             <a:avLst/>
@@ -4037,8 +4037,8 @@
         </p:nvSpPr>
         <p:spPr>
           <a:xfrm>
-            <a:off x="2670048" y="3517583"/>
-            <a:ext cx="332201" cy="138303"/>
+            <a:off x="2670048" y="3608422"/>
+            <a:ext cx="332201" cy="145218"/>
           </a:xfrm>
           <a:prstGeom prst="rect">
             <a:avLst/>
@@ -4057,8 +4057,8 @@
         </p:nvSpPr>
         <p:spPr>
           <a:xfrm>
-            <a:off x="3529584" y="3461004"/>
-            <a:ext cx="896112" cy="251460"/>
+            <a:off x="3529584" y="3549015"/>
+            <a:ext cx="896112" cy="264033"/>
           </a:xfrm>
           <a:prstGeom prst="rect">
             <a:avLst/>
@@ -4096,8 +4096,8 @@
         </p:nvSpPr>
         <p:spPr>
           <a:xfrm>
-            <a:off x="4425696" y="3461004"/>
-            <a:ext cx="603504" cy="251460"/>
+            <a:off x="4425696" y="3549015"/>
+            <a:ext cx="603504" cy="264033"/>
           </a:xfrm>
           <a:prstGeom prst="rect">
             <a:avLst/>
@@ -4135,8 +4135,8 @@
         </p:nvSpPr>
         <p:spPr>
           <a:xfrm>
-            <a:off x="5029200" y="3461004"/>
-            <a:ext cx="841248" cy="251460"/>
+            <a:off x="5029200" y="3549015"/>
+            <a:ext cx="841248" cy="264033"/>
           </a:xfrm>
           <a:prstGeom prst="rect">
             <a:avLst/>
@@ -4174,8 +4174,8 @@
         </p:nvSpPr>
         <p:spPr>
           <a:xfrm>
-            <a:off x="658368" y="3712464"/>
-            <a:ext cx="1938528" cy="251460"/>
+            <a:off x="658368" y="3813048"/>
+            <a:ext cx="1938528" cy="264033"/>
           </a:xfrm>
           <a:prstGeom prst="rect">
             <a:avLst/>
@@ -4213,8 +4213,8 @@
         </p:nvSpPr>
         <p:spPr>
           <a:xfrm>
-            <a:off x="2670048" y="3769042"/>
-            <a:ext cx="320639" cy="138303"/>
+            <a:off x="2670048" y="3872455"/>
+            <a:ext cx="320639" cy="145218"/>
           </a:xfrm>
           <a:prstGeom prst="rect">
             <a:avLst/>
@@ -4233,8 +4233,8 @@
         </p:nvSpPr>
         <p:spPr>
           <a:xfrm>
-            <a:off x="3529584" y="3712464"/>
-            <a:ext cx="896112" cy="251460"/>
+            <a:off x="3529584" y="3813048"/>
+            <a:ext cx="896112" cy="264033"/>
           </a:xfrm>
           <a:prstGeom prst="rect">
             <a:avLst/>
@@ -4272,8 +4272,8 @@
         </p:nvSpPr>
         <p:spPr>
           <a:xfrm>
-            <a:off x="4425696" y="3712464"/>
-            <a:ext cx="603504" cy="251460"/>
+            <a:off x="4425696" y="3813048"/>
+            <a:ext cx="603504" cy="264033"/>
           </a:xfrm>
           <a:prstGeom prst="rect">
             <a:avLst/>
@@ -4311,8 +4311,8 @@
         </p:nvSpPr>
         <p:spPr>
           <a:xfrm>
-            <a:off x="5029200" y="3712464"/>
-            <a:ext cx="841248" cy="251460"/>
+            <a:off x="5029200" y="3813048"/>
+            <a:ext cx="841248" cy="264033"/>
           </a:xfrm>
           <a:prstGeom prst="rect">
             <a:avLst/>
@@ -4350,8 +4350,8 @@
         </p:nvSpPr>
         <p:spPr>
           <a:xfrm>
-            <a:off x="658368" y="3963924"/>
-            <a:ext cx="1938528" cy="251460"/>
+            <a:off x="658368" y="4077081"/>
+            <a:ext cx="1938528" cy="264033"/>
           </a:xfrm>
           <a:prstGeom prst="rect">
             <a:avLst/>
@@ -4389,8 +4389,8 @@
         </p:nvSpPr>
         <p:spPr>
           <a:xfrm>
-            <a:off x="2670048" y="4020502"/>
-            <a:ext cx="297413" cy="138303"/>
+            <a:off x="2670048" y="4136488"/>
+            <a:ext cx="297413" cy="145218"/>
           </a:xfrm>
           <a:prstGeom prst="rect">
             <a:avLst/>
@@ -4409,8 +4409,8 @@
         </p:nvSpPr>
         <p:spPr>
           <a:xfrm>
-            <a:off x="3529584" y="3963924"/>
-            <a:ext cx="896112" cy="251460"/>
+            <a:off x="3529584" y="4077081"/>
+            <a:ext cx="896112" cy="264033"/>
           </a:xfrm>
           <a:prstGeom prst="rect">
             <a:avLst/>
@@ -4448,8 +4448,8 @@
         </p:nvSpPr>
         <p:spPr>
           <a:xfrm>
-            <a:off x="4425696" y="3963924"/>
-            <a:ext cx="603504" cy="251460"/>
+            <a:off x="4425696" y="4077081"/>
+            <a:ext cx="603504" cy="264033"/>
           </a:xfrm>
           <a:prstGeom prst="rect">
             <a:avLst/>
@@ -4487,8 +4487,8 @@
         </p:nvSpPr>
         <p:spPr>
           <a:xfrm>
-            <a:off x="5029200" y="3963924"/>
-            <a:ext cx="841248" cy="251460"/>
+            <a:off x="5029200" y="4077081"/>
+            <a:ext cx="841248" cy="264033"/>
           </a:xfrm>
           <a:prstGeom prst="rect">
             <a:avLst/>
@@ -4526,8 +4526,8 @@
         </p:nvSpPr>
         <p:spPr>
           <a:xfrm>
-            <a:off x="658368" y="4215384"/>
-            <a:ext cx="1938528" cy="251460"/>
+            <a:off x="658368" y="4341114"/>
+            <a:ext cx="1938528" cy="264033"/>
           </a:xfrm>
           <a:prstGeom prst="rect">
             <a:avLst/>
@@ -4565,8 +4565,8 @@
         </p:nvSpPr>
         <p:spPr>
           <a:xfrm>
-            <a:off x="2670048" y="4271962"/>
-            <a:ext cx="286859" cy="138303"/>
+            <a:off x="2670048" y="4400521"/>
+            <a:ext cx="286859" cy="145218"/>
           </a:xfrm>
           <a:prstGeom prst="rect">
             <a:avLst/>
@@ -4585,8 +4585,8 @@
         </p:nvSpPr>
         <p:spPr>
           <a:xfrm>
-            <a:off x="3529584" y="4215384"/>
-            <a:ext cx="896112" cy="251460"/>
+            <a:off x="3529584" y="4341114"/>
+            <a:ext cx="896112" cy="264033"/>
           </a:xfrm>
           <a:prstGeom prst="rect">
             <a:avLst/>
@@ -4624,8 +4624,8 @@
         </p:nvSpPr>
         <p:spPr>
           <a:xfrm>
-            <a:off x="4425696" y="4215384"/>
-            <a:ext cx="603504" cy="251460"/>
+            <a:off x="4425696" y="4341114"/>
+            <a:ext cx="603504" cy="264033"/>
           </a:xfrm>
           <a:prstGeom prst="rect">
             <a:avLst/>
@@ -4663,8 +4663,8 @@
         </p:nvSpPr>
         <p:spPr>
           <a:xfrm>
-            <a:off x="5029200" y="4215384"/>
-            <a:ext cx="841248" cy="251460"/>
+            <a:off x="5029200" y="4341114"/>
+            <a:ext cx="841248" cy="264033"/>
           </a:xfrm>
           <a:prstGeom prst="rect">
             <a:avLst/>
@@ -4702,8 +4702,8 @@
         </p:nvSpPr>
         <p:spPr>
           <a:xfrm>
-            <a:off x="658368" y="4466844"/>
-            <a:ext cx="1938528" cy="251460"/>
+            <a:off x="658368" y="4605147"/>
+            <a:ext cx="1938528" cy="264033"/>
           </a:xfrm>
           <a:prstGeom prst="rect">
             <a:avLst/>
@@ -4741,8 +4741,8 @@
         </p:nvSpPr>
         <p:spPr>
           <a:xfrm>
-            <a:off x="2670048" y="4523422"/>
-            <a:ext cx="284748" cy="138303"/>
+            <a:off x="2670048" y="4664554"/>
+            <a:ext cx="284748" cy="145218"/>
           </a:xfrm>
           <a:prstGeom prst="rect">
             <a:avLst/>
@@ -4761,8 +4761,8 @@
         </p:nvSpPr>
         <p:spPr>
           <a:xfrm>
-            <a:off x="3529584" y="4466844"/>
-            <a:ext cx="896112" cy="251460"/>
+            <a:off x="3529584" y="4605147"/>
+            <a:ext cx="896112" cy="264033"/>
           </a:xfrm>
           <a:prstGeom prst="rect">
             <a:avLst/>
@@ -4800,8 +4800,8 @@
         </p:nvSpPr>
         <p:spPr>
           <a:xfrm>
-            <a:off x="4425696" y="4466844"/>
-            <a:ext cx="603504" cy="251460"/>
+            <a:off x="4425696" y="4605147"/>
+            <a:ext cx="603504" cy="264033"/>
           </a:xfrm>
           <a:prstGeom prst="rect">
             <a:avLst/>
@@ -4839,8 +4839,8 @@
         </p:nvSpPr>
         <p:spPr>
           <a:xfrm>
-            <a:off x="5029200" y="4466844"/>
-            <a:ext cx="841248" cy="251460"/>
+            <a:off x="5029200" y="4605147"/>
+            <a:ext cx="841248" cy="264033"/>
           </a:xfrm>
           <a:prstGeom prst="rect">
             <a:avLst/>
@@ -4878,8 +4878,8 @@
         </p:nvSpPr>
         <p:spPr>
           <a:xfrm>
-            <a:off x="658368" y="4718304"/>
-            <a:ext cx="1938528" cy="251460"/>
+            <a:off x="658368" y="4869180"/>
+            <a:ext cx="1938528" cy="264033"/>
           </a:xfrm>
           <a:prstGeom prst="rect">
             <a:avLst/>
@@ -4917,8 +4917,8 @@
         </p:nvSpPr>
         <p:spPr>
           <a:xfrm>
-            <a:off x="2670048" y="4774883"/>
-            <a:ext cx="219428" cy="138303"/>
+            <a:off x="2670048" y="4928587"/>
+            <a:ext cx="219428" cy="145218"/>
           </a:xfrm>
           <a:prstGeom prst="rect">
             <a:avLst/>
@@ -4937,8 +4937,8 @@
         </p:nvSpPr>
         <p:spPr>
           <a:xfrm>
-            <a:off x="3529584" y="4718304"/>
-            <a:ext cx="896112" cy="251460"/>
+            <a:off x="3529584" y="4869180"/>
+            <a:ext cx="896112" cy="264033"/>
           </a:xfrm>
           <a:prstGeom prst="rect">
             <a:avLst/>
@@ -4976,8 +4976,8 @@
         </p:nvSpPr>
         <p:spPr>
           <a:xfrm>
-            <a:off x="4425696" y="4718304"/>
-            <a:ext cx="603504" cy="251460"/>
+            <a:off x="4425696" y="4869180"/>
+            <a:ext cx="603504" cy="264033"/>
           </a:xfrm>
           <a:prstGeom prst="rect">
             <a:avLst/>
@@ -5015,8 +5015,8 @@
         </p:nvSpPr>
         <p:spPr>
           <a:xfrm>
-            <a:off x="5029200" y="4718304"/>
-            <a:ext cx="841248" cy="251460"/>
+            <a:off x="5029200" y="4869180"/>
+            <a:ext cx="841248" cy="264033"/>
           </a:xfrm>
           <a:prstGeom prst="rect">
             <a:avLst/>
@@ -5054,8 +5054,8 @@
         </p:nvSpPr>
         <p:spPr>
           <a:xfrm>
-            <a:off x="658368" y="4969764"/>
-            <a:ext cx="1938528" cy="251460"/>
+            <a:off x="658368" y="5133213"/>
+            <a:ext cx="1938528" cy="264033"/>
           </a:xfrm>
           <a:prstGeom prst="rect">
             <a:avLst/>
@@ -5093,8 +5093,8 @@
         </p:nvSpPr>
         <p:spPr>
           <a:xfrm>
-            <a:off x="2670048" y="5026342"/>
-            <a:ext cx="208978" cy="138303"/>
+            <a:off x="2670048" y="5192620"/>
+            <a:ext cx="208978" cy="145218"/>
           </a:xfrm>
           <a:prstGeom prst="rect">
             <a:avLst/>
@@ -5113,8 +5113,8 @@
         </p:nvSpPr>
         <p:spPr>
           <a:xfrm>
-            <a:off x="3529584" y="4969764"/>
-            <a:ext cx="896112" cy="251460"/>
+            <a:off x="3529584" y="5133213"/>
+            <a:ext cx="896112" cy="264033"/>
           </a:xfrm>
           <a:prstGeom prst="rect">
             <a:avLst/>
@@ -5152,8 +5152,8 @@
         </p:nvSpPr>
         <p:spPr>
           <a:xfrm>
-            <a:off x="4425696" y="4969764"/>
-            <a:ext cx="603504" cy="251460"/>
+            <a:off x="4425696" y="5133213"/>
+            <a:ext cx="603504" cy="264033"/>
           </a:xfrm>
           <a:prstGeom prst="rect">
             <a:avLst/>
@@ -5191,8 +5191,8 @@
         </p:nvSpPr>
         <p:spPr>
           <a:xfrm>
-            <a:off x="5029200" y="4969764"/>
-            <a:ext cx="841248" cy="251460"/>
+            <a:off x="5029200" y="5133213"/>
+            <a:ext cx="841248" cy="264033"/>
           </a:xfrm>
           <a:prstGeom prst="rect">
             <a:avLst/>
@@ -5230,8 +5230,8 @@
         </p:nvSpPr>
         <p:spPr>
           <a:xfrm>
-            <a:off x="658368" y="5221224"/>
-            <a:ext cx="1938528" cy="251460"/>
+            <a:off x="658368" y="5397246"/>
+            <a:ext cx="1938528" cy="264033"/>
           </a:xfrm>
           <a:prstGeom prst="rect">
             <a:avLst/>
@@ -5269,8 +5269,8 @@
         </p:nvSpPr>
         <p:spPr>
           <a:xfrm>
-            <a:off x="2670048" y="5277803"/>
-            <a:ext cx="207980" cy="138303"/>
+            <a:off x="2670048" y="5456653"/>
+            <a:ext cx="207980" cy="145218"/>
           </a:xfrm>
           <a:prstGeom prst="rect">
             <a:avLst/>
@@ -5289,8 +5289,8 @@
         </p:nvSpPr>
         <p:spPr>
           <a:xfrm>
-            <a:off x="3529584" y="5221224"/>
-            <a:ext cx="896112" cy="251460"/>
+            <a:off x="3529584" y="5397246"/>
+            <a:ext cx="896112" cy="264033"/>
           </a:xfrm>
           <a:prstGeom prst="rect">
             <a:avLst/>
@@ -5328,8 +5328,8 @@
         </p:nvSpPr>
         <p:spPr>
           <a:xfrm>
-            <a:off x="4425696" y="5221224"/>
-            <a:ext cx="603504" cy="251460"/>
+            <a:off x="4425696" y="5397246"/>
+            <a:ext cx="603504" cy="264033"/>
           </a:xfrm>
           <a:prstGeom prst="rect">
             <a:avLst/>
@@ -5367,8 +5367,8 @@
         </p:nvSpPr>
         <p:spPr>
           <a:xfrm>
-            <a:off x="5029200" y="5221224"/>
-            <a:ext cx="841248" cy="251460"/>
+            <a:off x="5029200" y="5397246"/>
+            <a:ext cx="841248" cy="264033"/>
           </a:xfrm>
           <a:prstGeom prst="rect">
             <a:avLst/>
@@ -5406,8 +5406,8 @@
         </p:nvSpPr>
         <p:spPr>
           <a:xfrm>
-            <a:off x="658368" y="5472684"/>
-            <a:ext cx="1938528" cy="251460"/>
+            <a:off x="658368" y="5661279"/>
+            <a:ext cx="1938528" cy="264033"/>
           </a:xfrm>
           <a:prstGeom prst="rect">
             <a:avLst/>
@@ -5445,8 +5445,8 @@
         </p:nvSpPr>
         <p:spPr>
           <a:xfrm>
-            <a:off x="2670048" y="5529262"/>
-            <a:ext cx="197393" cy="138303"/>
+            <a:off x="2670048" y="5720686"/>
+            <a:ext cx="197393" cy="145218"/>
           </a:xfrm>
           <a:prstGeom prst="rect">
             <a:avLst/>
@@ -5465,8 +5465,8 @@
         </p:nvSpPr>
         <p:spPr>
           <a:xfrm>
-            <a:off x="3529584" y="5472684"/>
-            <a:ext cx="896112" cy="251460"/>
+            <a:off x="3529584" y="5661279"/>
+            <a:ext cx="896112" cy="264033"/>
           </a:xfrm>
           <a:prstGeom prst="rect">
             <a:avLst/>
@@ -5504,8 +5504,8 @@
         </p:nvSpPr>
         <p:spPr>
           <a:xfrm>
-            <a:off x="4425696" y="5472684"/>
-            <a:ext cx="603504" cy="251460"/>
+            <a:off x="4425696" y="5661279"/>
+            <a:ext cx="603504" cy="264033"/>
           </a:xfrm>
           <a:prstGeom prst="rect">
             <a:avLst/>
@@ -5543,8 +5543,8 @@
         </p:nvSpPr>
         <p:spPr>
           <a:xfrm>
-            <a:off x="5029200" y="5472684"/>
-            <a:ext cx="841248" cy="251460"/>
+            <a:off x="5029200" y="5661279"/>
+            <a:ext cx="841248" cy="264033"/>
           </a:xfrm>
           <a:prstGeom prst="rect">
             <a:avLst/>
@@ -5583,7 +5583,7 @@
         <p:spPr>
           <a:xfrm>
             <a:off x="6208776" y="1700784"/>
-            <a:ext cx="1938528" cy="251460"/>
+            <a:ext cx="1938528" cy="264033"/>
           </a:xfrm>
           <a:prstGeom prst="rect">
             <a:avLst/>
@@ -5621,8 +5621,8 @@
         </p:nvSpPr>
         <p:spPr>
           <a:xfrm>
-            <a:off x="8220456" y="1757363"/>
-            <a:ext cx="187318" cy="138303"/>
+            <a:off x="8220456" y="1760191"/>
+            <a:ext cx="187318" cy="145218"/>
           </a:xfrm>
           <a:prstGeom prst="rect">
             <a:avLst/>
@@ -5642,7 +5642,7 @@
         <p:spPr>
           <a:xfrm>
             <a:off x="9079992" y="1700784"/>
-            <a:ext cx="896112" cy="251460"/>
+            <a:ext cx="896112" cy="264033"/>
           </a:xfrm>
           <a:prstGeom prst="rect">
             <a:avLst/>
@@ -5681,7 +5681,7 @@
         <p:spPr>
           <a:xfrm>
             <a:off x="9976104" y="1700784"/>
-            <a:ext cx="603504" cy="251460"/>
+            <a:ext cx="603504" cy="264033"/>
           </a:xfrm>
           <a:prstGeom prst="rect">
             <a:avLst/>
@@ -5720,7 +5720,7 @@
         <p:spPr>
           <a:xfrm>
             <a:off x="10579608" y="1700784"/>
-            <a:ext cx="841248" cy="251460"/>
+            <a:ext cx="841248" cy="264033"/>
           </a:xfrm>
           <a:prstGeom prst="rect">
             <a:avLst/>
@@ -5758,8 +5758,8 @@
         </p:nvSpPr>
         <p:spPr>
           <a:xfrm>
-            <a:off x="6208776" y="1952244"/>
-            <a:ext cx="1938528" cy="251460"/>
+            <a:off x="6208776" y="1964817"/>
+            <a:ext cx="1938528" cy="264033"/>
           </a:xfrm>
           <a:prstGeom prst="rect">
             <a:avLst/>
@@ -5797,8 +5797,8 @@
         </p:nvSpPr>
         <p:spPr>
           <a:xfrm>
-            <a:off x="8220456" y="2008823"/>
-            <a:ext cx="130556" cy="138303"/>
+            <a:off x="8220456" y="2024224"/>
+            <a:ext cx="130556" cy="145218"/>
           </a:xfrm>
           <a:prstGeom prst="rect">
             <a:avLst/>
@@ -5817,8 +5817,8 @@
         </p:nvSpPr>
         <p:spPr>
           <a:xfrm>
-            <a:off x="9079992" y="1952244"/>
-            <a:ext cx="896112" cy="251460"/>
+            <a:off x="9079992" y="1964817"/>
+            <a:ext cx="896112" cy="264033"/>
           </a:xfrm>
           <a:prstGeom prst="rect">
             <a:avLst/>
@@ -5856,8 +5856,8 @@
         </p:nvSpPr>
         <p:spPr>
           <a:xfrm>
-            <a:off x="9976104" y="1952244"/>
-            <a:ext cx="603504" cy="251460"/>
+            <a:off x="9976104" y="1964817"/>
+            <a:ext cx="603504" cy="264033"/>
           </a:xfrm>
           <a:prstGeom prst="rect">
             <a:avLst/>
@@ -5895,8 +5895,8 @@
         </p:nvSpPr>
         <p:spPr>
           <a:xfrm>
-            <a:off x="10579608" y="1952244"/>
-            <a:ext cx="841248" cy="251460"/>
+            <a:off x="10579608" y="1964817"/>
+            <a:ext cx="841248" cy="264033"/>
           </a:xfrm>
           <a:prstGeom prst="rect">
             <a:avLst/>
@@ -5934,8 +5934,8 @@
         </p:nvSpPr>
         <p:spPr>
           <a:xfrm>
-            <a:off x="6208776" y="2203704"/>
-            <a:ext cx="1938528" cy="251460"/>
+            <a:off x="6208776" y="2228850"/>
+            <a:ext cx="1938528" cy="264033"/>
           </a:xfrm>
           <a:prstGeom prst="rect">
             <a:avLst/>
@@ -5973,8 +5973,8 @@
         </p:nvSpPr>
         <p:spPr>
           <a:xfrm>
-            <a:off x="8220456" y="2260283"/>
-            <a:ext cx="130163" cy="138303"/>
+            <a:off x="8220456" y="2288257"/>
+            <a:ext cx="130163" cy="145218"/>
           </a:xfrm>
           <a:prstGeom prst="rect">
             <a:avLst/>
@@ -5993,8 +5993,8 @@
         </p:nvSpPr>
         <p:spPr>
           <a:xfrm>
-            <a:off x="9079992" y="2203704"/>
-            <a:ext cx="896112" cy="251460"/>
+            <a:off x="9079992" y="2228850"/>
+            <a:ext cx="896112" cy="264033"/>
           </a:xfrm>
           <a:prstGeom prst="rect">
             <a:avLst/>
@@ -6032,8 +6032,8 @@
         </p:nvSpPr>
         <p:spPr>
           <a:xfrm>
-            <a:off x="9976104" y="2203704"/>
-            <a:ext cx="603504" cy="251460"/>
+            <a:off x="9976104" y="2228850"/>
+            <a:ext cx="603504" cy="264033"/>
           </a:xfrm>
           <a:prstGeom prst="rect">
             <a:avLst/>
@@ -6071,8 +6071,8 @@
         </p:nvSpPr>
         <p:spPr>
           <a:xfrm>
-            <a:off x="10579608" y="2203704"/>
-            <a:ext cx="841248" cy="251460"/>
+            <a:off x="10579608" y="2228850"/>
+            <a:ext cx="841248" cy="264033"/>
           </a:xfrm>
           <a:prstGeom prst="rect">
             <a:avLst/>
@@ -6110,8 +6110,8 @@
         </p:nvSpPr>
         <p:spPr>
           <a:xfrm>
-            <a:off x="6208776" y="2455164"/>
-            <a:ext cx="1938528" cy="251460"/>
+            <a:off x="6208776" y="2492883"/>
+            <a:ext cx="1938528" cy="264033"/>
           </a:xfrm>
           <a:prstGeom prst="rect">
             <a:avLst/>
@@ -6149,8 +6149,8 @@
         </p:nvSpPr>
         <p:spPr>
           <a:xfrm>
-            <a:off x="8220456" y="2511743"/>
-            <a:ext cx="121390" cy="138303"/>
+            <a:off x="8220456" y="2552290"/>
+            <a:ext cx="121390" cy="145218"/>
           </a:xfrm>
           <a:prstGeom prst="rect">
             <a:avLst/>
@@ -6169,8 +6169,8 @@
         </p:nvSpPr>
         <p:spPr>
           <a:xfrm>
-            <a:off x="9079992" y="2455164"/>
-            <a:ext cx="896112" cy="251460"/>
+            <a:off x="9079992" y="2492883"/>
+            <a:ext cx="896112" cy="264033"/>
           </a:xfrm>
           <a:prstGeom prst="rect">
             <a:avLst/>
@@ -6208,8 +6208,8 @@
         </p:nvSpPr>
         <p:spPr>
           <a:xfrm>
-            <a:off x="9976104" y="2455164"/>
-            <a:ext cx="603504" cy="251460"/>
+            <a:off x="9976104" y="2492883"/>
+            <a:ext cx="603504" cy="264033"/>
           </a:xfrm>
           <a:prstGeom prst="rect">
             <a:avLst/>
@@ -6247,8 +6247,8 @@
         </p:nvSpPr>
         <p:spPr>
           <a:xfrm>
-            <a:off x="10579608" y="2455164"/>
-            <a:ext cx="841248" cy="251460"/>
+            <a:off x="10579608" y="2492883"/>
+            <a:ext cx="841248" cy="264033"/>
           </a:xfrm>
           <a:prstGeom prst="rect">
             <a:avLst/>
@@ -6286,8 +6286,8 @@
         </p:nvSpPr>
         <p:spPr>
           <a:xfrm>
-            <a:off x="6208776" y="2706624"/>
-            <a:ext cx="1938528" cy="251460"/>
+            <a:off x="6208776" y="2756916"/>
+            <a:ext cx="1938528" cy="264033"/>
           </a:xfrm>
           <a:prstGeom prst="rect">
             <a:avLst/>
@@ -6325,8 +6325,8 @@
         </p:nvSpPr>
         <p:spPr>
           <a:xfrm>
-            <a:off x="8220456" y="2763203"/>
-            <a:ext cx="120162" cy="138303"/>
+            <a:off x="8220456" y="2816323"/>
+            <a:ext cx="120162" cy="145218"/>
           </a:xfrm>
           <a:prstGeom prst="rect">
             <a:avLst/>
@@ -6345,8 +6345,8 @@
         </p:nvSpPr>
         <p:spPr>
           <a:xfrm>
-            <a:off x="9079992" y="2706624"/>
-            <a:ext cx="896112" cy="251460"/>
+            <a:off x="9079992" y="2756916"/>
+            <a:ext cx="896112" cy="264033"/>
           </a:xfrm>
           <a:prstGeom prst="rect">
             <a:avLst/>
@@ -6384,8 +6384,8 @@
         </p:nvSpPr>
         <p:spPr>
           <a:xfrm>
-            <a:off x="9976104" y="2706624"/>
-            <a:ext cx="603504" cy="251460"/>
+            <a:off x="9976104" y="2756916"/>
+            <a:ext cx="603504" cy="264033"/>
           </a:xfrm>
           <a:prstGeom prst="rect">
             <a:avLst/>
@@ -6423,8 +6423,8 @@
         </p:nvSpPr>
         <p:spPr>
           <a:xfrm>
-            <a:off x="10579608" y="2706624"/>
-            <a:ext cx="841248" cy="251460"/>
+            <a:off x="10579608" y="2756916"/>
+            <a:ext cx="841248" cy="264033"/>
           </a:xfrm>
           <a:prstGeom prst="rect">
             <a:avLst/>
@@ -6462,8 +6462,8 @@
         </p:nvSpPr>
         <p:spPr>
           <a:xfrm>
-            <a:off x="6208776" y="2958084"/>
-            <a:ext cx="1938528" cy="251460"/>
+            <a:off x="6208776" y="3020949"/>
+            <a:ext cx="1938528" cy="264033"/>
           </a:xfrm>
           <a:prstGeom prst="rect">
             <a:avLst/>
@@ -6501,8 +6501,8 @@
         </p:nvSpPr>
         <p:spPr>
           <a:xfrm>
-            <a:off x="8220456" y="3014663"/>
-            <a:ext cx="119265" cy="138303"/>
+            <a:off x="8220456" y="3080356"/>
+            <a:ext cx="119265" cy="145218"/>
           </a:xfrm>
           <a:prstGeom prst="rect">
             <a:avLst/>
@@ -6521,8 +6521,8 @@
         </p:nvSpPr>
         <p:spPr>
           <a:xfrm>
-            <a:off x="9079992" y="2958084"/>
-            <a:ext cx="896112" cy="251460"/>
+            <a:off x="9079992" y="3020949"/>
+            <a:ext cx="896112" cy="264033"/>
           </a:xfrm>
           <a:prstGeom prst="rect">
             <a:avLst/>
@@ -6560,8 +6560,8 @@
         </p:nvSpPr>
         <p:spPr>
           <a:xfrm>
-            <a:off x="9976104" y="2958084"/>
-            <a:ext cx="603504" cy="251460"/>
+            <a:off x="9976104" y="3020949"/>
+            <a:ext cx="603504" cy="264033"/>
           </a:xfrm>
           <a:prstGeom prst="rect">
             <a:avLst/>
@@ -6599,8 +6599,8 @@
         </p:nvSpPr>
         <p:spPr>
           <a:xfrm>
-            <a:off x="10579608" y="2958084"/>
-            <a:ext cx="841248" cy="251460"/>
+            <a:off x="10579608" y="3020949"/>
+            <a:ext cx="841248" cy="264033"/>
           </a:xfrm>
           <a:prstGeom prst="rect">
             <a:avLst/>
@@ -6638,8 +6638,8 @@
         </p:nvSpPr>
         <p:spPr>
           <a:xfrm>
-            <a:off x="6208776" y="3209544"/>
-            <a:ext cx="1938528" cy="251460"/>
+            <a:off x="6208776" y="3284982"/>
+            <a:ext cx="1938528" cy="264033"/>
           </a:xfrm>
           <a:prstGeom prst="rect">
             <a:avLst/>
@@ -6677,8 +6677,8 @@
         </p:nvSpPr>
         <p:spPr>
           <a:xfrm>
-            <a:off x="8220456" y="3266123"/>
-            <a:ext cx="105199" cy="138303"/>
+            <a:off x="8220456" y="3344389"/>
+            <a:ext cx="105199" cy="145218"/>
           </a:xfrm>
           <a:prstGeom prst="rect">
             <a:avLst/>
@@ -6697,8 +6697,8 @@
         </p:nvSpPr>
         <p:spPr>
           <a:xfrm>
-            <a:off x="9079992" y="3209544"/>
-            <a:ext cx="896112" cy="251460"/>
+            <a:off x="9079992" y="3284982"/>
+            <a:ext cx="896112" cy="264033"/>
           </a:xfrm>
           <a:prstGeom prst="rect">
             <a:avLst/>
@@ -6736,8 +6736,8 @@
         </p:nvSpPr>
         <p:spPr>
           <a:xfrm>
-            <a:off x="9976104" y="3209544"/>
-            <a:ext cx="603504" cy="251460"/>
+            <a:off x="9976104" y="3284982"/>
+            <a:ext cx="603504" cy="264033"/>
           </a:xfrm>
           <a:prstGeom prst="rect">
             <a:avLst/>
@@ -6775,8 +6775,8 @@
         </p:nvSpPr>
         <p:spPr>
           <a:xfrm>
-            <a:off x="10579608" y="3209544"/>
-            <a:ext cx="841248" cy="251460"/>
+            <a:off x="10579608" y="3284982"/>
+            <a:ext cx="841248" cy="264033"/>
           </a:xfrm>
           <a:prstGeom prst="rect">
             <a:avLst/>
@@ -6814,8 +6814,8 @@
         </p:nvSpPr>
         <p:spPr>
           <a:xfrm>
-            <a:off x="6208776" y="3461004"/>
-            <a:ext cx="1938528" cy="251460"/>
+            <a:off x="6208776" y="3549015"/>
+            <a:ext cx="1938528" cy="264033"/>
           </a:xfrm>
           <a:prstGeom prst="rect">
             <a:avLst/>
@@ -6853,8 +6853,8 @@
         </p:nvSpPr>
         <p:spPr>
           <a:xfrm>
-            <a:off x="8220456" y="3517583"/>
-            <a:ext cx="101209" cy="138303"/>
+            <a:off x="8220456" y="3608422"/>
+            <a:ext cx="101209" cy="145218"/>
           </a:xfrm>
           <a:prstGeom prst="rect">
             <a:avLst/>
@@ -6873,8 +6873,8 @@
         </p:nvSpPr>
         <p:spPr>
           <a:xfrm>
-            <a:off x="9079992" y="3461004"/>
-            <a:ext cx="896112" cy="251460"/>
+            <a:off x="9079992" y="3549015"/>
+            <a:ext cx="896112" cy="264033"/>
           </a:xfrm>
           <a:prstGeom prst="rect">
             <a:avLst/>
@@ -6912,8 +6912,8 @@
         </p:nvSpPr>
         <p:spPr>
           <a:xfrm>
-            <a:off x="9976104" y="3461004"/>
-            <a:ext cx="603504" cy="251460"/>
+            <a:off x="9976104" y="3549015"/>
+            <a:ext cx="603504" cy="264033"/>
           </a:xfrm>
           <a:prstGeom prst="rect">
             <a:avLst/>
@@ -6951,8 +6951,8 @@
         </p:nvSpPr>
         <p:spPr>
           <a:xfrm>
-            <a:off x="10579608" y="3461004"/>
-            <a:ext cx="841248" cy="251460"/>
+            <a:off x="10579608" y="3549015"/>
+            <a:ext cx="841248" cy="264033"/>
           </a:xfrm>
           <a:prstGeom prst="rect">
             <a:avLst/>
@@ -6990,8 +6990,8 @@
         </p:nvSpPr>
         <p:spPr>
           <a:xfrm>
-            <a:off x="6208776" y="3712464"/>
-            <a:ext cx="1938528" cy="251460"/>
+            <a:off x="6208776" y="3813048"/>
+            <a:ext cx="1938528" cy="264033"/>
           </a:xfrm>
           <a:prstGeom prst="rect">
             <a:avLst/>
@@ -7029,8 +7029,8 @@
         </p:nvSpPr>
         <p:spPr>
           <a:xfrm>
-            <a:off x="8220456" y="3769042"/>
-            <a:ext cx="81242" cy="138303"/>
+            <a:off x="8220456" y="3872455"/>
+            <a:ext cx="81242" cy="145218"/>
           </a:xfrm>
           <a:prstGeom prst="rect">
             <a:avLst/>
@@ -7049,8 +7049,8 @@
         </p:nvSpPr>
         <p:spPr>
           <a:xfrm>
-            <a:off x="9079992" y="3712464"/>
-            <a:ext cx="896112" cy="251460"/>
+            <a:off x="9079992" y="3813048"/>
+            <a:ext cx="896112" cy="264033"/>
           </a:xfrm>
           <a:prstGeom prst="rect">
             <a:avLst/>
@@ -7088,8 +7088,8 @@
         </p:nvSpPr>
         <p:spPr>
           <a:xfrm>
-            <a:off x="9976104" y="3712464"/>
-            <a:ext cx="603504" cy="251460"/>
+            <a:off x="9976104" y="3813048"/>
+            <a:ext cx="603504" cy="264033"/>
           </a:xfrm>
           <a:prstGeom prst="rect">
             <a:avLst/>
@@ -7127,8 +7127,8 @@
         </p:nvSpPr>
         <p:spPr>
           <a:xfrm>
-            <a:off x="10579608" y="3712464"/>
-            <a:ext cx="841248" cy="251460"/>
+            <a:off x="10579608" y="3813048"/>
+            <a:ext cx="841248" cy="264033"/>
           </a:xfrm>
           <a:prstGeom prst="rect">
             <a:avLst/>
@@ -7166,8 +7166,8 @@
         </p:nvSpPr>
         <p:spPr>
           <a:xfrm>
-            <a:off x="6208776" y="3963924"/>
-            <a:ext cx="1938528" cy="251460"/>
+            <a:off x="6208776" y="4077081"/>
+            <a:ext cx="1938528" cy="264033"/>
           </a:xfrm>
           <a:prstGeom prst="rect">
             <a:avLst/>
@@ -7205,8 +7205,8 @@
         </p:nvSpPr>
         <p:spPr>
           <a:xfrm>
-            <a:off x="8220456" y="4020502"/>
-            <a:ext cx="71870" cy="138303"/>
+            <a:off x="8220456" y="4136488"/>
+            <a:ext cx="71870" cy="145218"/>
           </a:xfrm>
           <a:prstGeom prst="rect">
             <a:avLst/>
@@ -7225,8 +7225,8 @@
         </p:nvSpPr>
         <p:spPr>
           <a:xfrm>
-            <a:off x="9079992" y="3963924"/>
-            <a:ext cx="896112" cy="251460"/>
+            <a:off x="9079992" y="4077081"/>
+            <a:ext cx="896112" cy="264033"/>
           </a:xfrm>
           <a:prstGeom prst="rect">
             <a:avLst/>
@@ -7264,8 +7264,8 @@
         </p:nvSpPr>
         <p:spPr>
           <a:xfrm>
-            <a:off x="9976104" y="3963924"/>
-            <a:ext cx="603504" cy="251460"/>
+            <a:off x="9976104" y="4077081"/>
+            <a:ext cx="603504" cy="264033"/>
           </a:xfrm>
           <a:prstGeom prst="rect">
             <a:avLst/>
@@ -7303,8 +7303,8 @@
         </p:nvSpPr>
         <p:spPr>
           <a:xfrm>
-            <a:off x="10579608" y="3963924"/>
-            <a:ext cx="841248" cy="251460"/>
+            <a:off x="10579608" y="4077081"/>
+            <a:ext cx="841248" cy="264033"/>
           </a:xfrm>
           <a:prstGeom prst="rect">
             <a:avLst/>
@@ -7342,8 +7342,8 @@
         </p:nvSpPr>
         <p:spPr>
           <a:xfrm>
-            <a:off x="6208776" y="4215384"/>
-            <a:ext cx="1938528" cy="251460"/>
+            <a:off x="6208776" y="4341114"/>
+            <a:ext cx="1938528" cy="264033"/>
           </a:xfrm>
           <a:prstGeom prst="rect">
             <a:avLst/>
@@ -7381,8 +7381,8 @@
         </p:nvSpPr>
         <p:spPr>
           <a:xfrm>
-            <a:off x="8220456" y="4271962"/>
-            <a:ext cx="56913" cy="138303"/>
+            <a:off x="8220456" y="4400521"/>
+            <a:ext cx="56913" cy="145218"/>
           </a:xfrm>
           <a:prstGeom prst="rect">
             <a:avLst/>
@@ -7401,8 +7401,8 @@
         </p:nvSpPr>
         <p:spPr>
           <a:xfrm>
-            <a:off x="9079992" y="4215384"/>
-            <a:ext cx="896112" cy="251460"/>
+            <a:off x="9079992" y="4341114"/>
+            <a:ext cx="896112" cy="264033"/>
           </a:xfrm>
           <a:prstGeom prst="rect">
             <a:avLst/>
@@ -7440,8 +7440,8 @@
         </p:nvSpPr>
         <p:spPr>
           <a:xfrm>
-            <a:off x="9976104" y="4215384"/>
-            <a:ext cx="603504" cy="251460"/>
+            <a:off x="9976104" y="4341114"/>
+            <a:ext cx="603504" cy="264033"/>
           </a:xfrm>
           <a:prstGeom prst="rect">
             <a:avLst/>
@@ -7479,8 +7479,8 @@
         </p:nvSpPr>
         <p:spPr>
           <a:xfrm>
-            <a:off x="10579608" y="4215384"/>
-            <a:ext cx="841248" cy="251460"/>
+            <a:off x="10579608" y="4341114"/>
+            <a:ext cx="841248" cy="264033"/>
           </a:xfrm>
           <a:prstGeom prst="rect">
             <a:avLst/>
@@ -7518,8 +7518,8 @@
         </p:nvSpPr>
         <p:spPr>
           <a:xfrm>
-            <a:off x="6208776" y="4466844"/>
-            <a:ext cx="1938528" cy="251460"/>
+            <a:off x="6208776" y="4605147"/>
+            <a:ext cx="1938528" cy="264033"/>
           </a:xfrm>
           <a:prstGeom prst="rect">
             <a:avLst/>
@@ -7557,8 +7557,8 @@
         </p:nvSpPr>
         <p:spPr>
           <a:xfrm>
-            <a:off x="8220456" y="4523422"/>
-            <a:ext cx="50188" cy="138303"/>
+            <a:off x="8220456" y="4664554"/>
+            <a:ext cx="50188" cy="145218"/>
           </a:xfrm>
           <a:prstGeom prst="rect">
             <a:avLst/>
@@ -7577,8 +7577,8 @@
         </p:nvSpPr>
         <p:spPr>
           <a:xfrm>
-            <a:off x="9079992" y="4466844"/>
-            <a:ext cx="896112" cy="251460"/>
+            <a:off x="9079992" y="4605147"/>
+            <a:ext cx="896112" cy="264033"/>
           </a:xfrm>
           <a:prstGeom prst="rect">
             <a:avLst/>
@@ -7616,8 +7616,8 @@
         </p:nvSpPr>
         <p:spPr>
           <a:xfrm>
-            <a:off x="9976104" y="4466844"/>
-            <a:ext cx="603504" cy="251460"/>
+            <a:off x="9976104" y="4605147"/>
+            <a:ext cx="603504" cy="264033"/>
           </a:xfrm>
           <a:prstGeom prst="rect">
             <a:avLst/>
@@ -7655,8 +7655,8 @@
         </p:nvSpPr>
         <p:spPr>
           <a:xfrm>
-            <a:off x="10579608" y="4466844"/>
-            <a:ext cx="841248" cy="251460"/>
+            <a:off x="10579608" y="4605147"/>
+            <a:ext cx="841248" cy="264033"/>
           </a:xfrm>
           <a:prstGeom prst="rect">
             <a:avLst/>
@@ -7694,8 +7694,8 @@
         </p:nvSpPr>
         <p:spPr>
           <a:xfrm>
-            <a:off x="6208776" y="4718304"/>
-            <a:ext cx="1938528" cy="251460"/>
+            <a:off x="6208776" y="4869180"/>
+            <a:ext cx="1938528" cy="264033"/>
           </a:xfrm>
           <a:prstGeom prst="rect">
             <a:avLst/>
@@ -7733,8 +7733,8 @@
         </p:nvSpPr>
         <p:spPr>
           <a:xfrm>
-            <a:off x="8220456" y="4774883"/>
-            <a:ext cx="35445" cy="138303"/>
+            <a:off x="8220456" y="4928587"/>
+            <a:ext cx="35445" cy="145218"/>
           </a:xfrm>
           <a:prstGeom prst="rect">
             <a:avLst/>
@@ -7753,8 +7753,8 @@
         </p:nvSpPr>
         <p:spPr>
           <a:xfrm>
-            <a:off x="9079992" y="4718304"/>
-            <a:ext cx="896112" cy="251460"/>
+            <a:off x="9079992" y="4869180"/>
+            <a:ext cx="896112" cy="264033"/>
           </a:xfrm>
           <a:prstGeom prst="rect">
             <a:avLst/>
@@ -7792,8 +7792,8 @@
         </p:nvSpPr>
         <p:spPr>
           <a:xfrm>
-            <a:off x="9976104" y="4718304"/>
-            <a:ext cx="603504" cy="251460"/>
+            <a:off x="9976104" y="4869180"/>
+            <a:ext cx="603504" cy="264033"/>
           </a:xfrm>
           <a:prstGeom prst="rect">
             <a:avLst/>
@@ -7831,8 +7831,8 @@
         </p:nvSpPr>
         <p:spPr>
           <a:xfrm>
-            <a:off x="10579608" y="4718304"/>
-            <a:ext cx="841248" cy="251460"/>
+            <a:off x="10579608" y="4869180"/>
+            <a:ext cx="841248" cy="264033"/>
           </a:xfrm>
           <a:prstGeom prst="rect">
             <a:avLst/>
@@ -7870,8 +7870,8 @@
         </p:nvSpPr>
         <p:spPr>
           <a:xfrm>
-            <a:off x="6208776" y="4969764"/>
-            <a:ext cx="1938528" cy="251460"/>
+            <a:off x="6208776" y="5133213"/>
+            <a:ext cx="1938528" cy="264033"/>
           </a:xfrm>
           <a:prstGeom prst="rect">
             <a:avLst/>
@@ -7909,8 +7909,8 @@
         </p:nvSpPr>
         <p:spPr>
           <a:xfrm>
-            <a:off x="8220456" y="5026342"/>
-            <a:ext cx="18288" cy="138303"/>
+            <a:off x="8220456" y="5192620"/>
+            <a:ext cx="18288" cy="145218"/>
           </a:xfrm>
           <a:prstGeom prst="rect">
             <a:avLst/>
@@ -7929,8 +7929,8 @@
         </p:nvSpPr>
         <p:spPr>
           <a:xfrm>
-            <a:off x="9079992" y="4969764"/>
-            <a:ext cx="896112" cy="251460"/>
+            <a:off x="9079992" y="5133213"/>
+            <a:ext cx="896112" cy="264033"/>
           </a:xfrm>
           <a:prstGeom prst="rect">
             <a:avLst/>
@@ -7968,8 +7968,8 @@
         </p:nvSpPr>
         <p:spPr>
           <a:xfrm>
-            <a:off x="9976104" y="4969764"/>
-            <a:ext cx="603504" cy="251460"/>
+            <a:off x="9976104" y="5133213"/>
+            <a:ext cx="603504" cy="264033"/>
           </a:xfrm>
           <a:prstGeom prst="rect">
             <a:avLst/>
@@ -8007,8 +8007,8 @@
         </p:nvSpPr>
         <p:spPr>
           <a:xfrm>
-            <a:off x="10579608" y="4969764"/>
-            <a:ext cx="841248" cy="251460"/>
+            <a:off x="10579608" y="5133213"/>
+            <a:ext cx="841248" cy="264033"/>
           </a:xfrm>
           <a:prstGeom prst="rect">
             <a:avLst/>
@@ -8046,8 +8046,8 @@
         </p:nvSpPr>
         <p:spPr>
           <a:xfrm>
-            <a:off x="6208776" y="5221224"/>
-            <a:ext cx="1938528" cy="251460"/>
+            <a:off x="6208776" y="5397246"/>
+            <a:ext cx="1938528" cy="264033"/>
           </a:xfrm>
           <a:prstGeom prst="rect">
             <a:avLst/>
@@ -8085,8 +8085,8 @@
         </p:nvSpPr>
         <p:spPr>
           <a:xfrm>
-            <a:off x="8220456" y="5277803"/>
-            <a:ext cx="18288" cy="138303"/>
+            <a:off x="8220456" y="5456653"/>
+            <a:ext cx="18288" cy="145218"/>
           </a:xfrm>
           <a:prstGeom prst="rect">
             <a:avLst/>
@@ -8105,8 +8105,8 @@
         </p:nvSpPr>
         <p:spPr>
           <a:xfrm>
-            <a:off x="9079992" y="5221224"/>
-            <a:ext cx="896112" cy="251460"/>
+            <a:off x="9079992" y="5397246"/>
+            <a:ext cx="896112" cy="264033"/>
           </a:xfrm>
           <a:prstGeom prst="rect">
             <a:avLst/>
@@ -8144,8 +8144,8 @@
         </p:nvSpPr>
         <p:spPr>
           <a:xfrm>
-            <a:off x="9976104" y="5221224"/>
-            <a:ext cx="603504" cy="251460"/>
+            <a:off x="9976104" y="5397246"/>
+            <a:ext cx="603504" cy="264033"/>
           </a:xfrm>
           <a:prstGeom prst="rect">
             <a:avLst/>
@@ -8183,8 +8183,8 @@
         </p:nvSpPr>
         <p:spPr>
           <a:xfrm>
-            <a:off x="10579608" y="5221224"/>
-            <a:ext cx="841248" cy="251460"/>
+            <a:off x="10579608" y="5397246"/>
+            <a:ext cx="841248" cy="264033"/>
           </a:xfrm>
           <a:prstGeom prst="rect">
             <a:avLst/>
@@ -8222,8 +8222,8 @@
         </p:nvSpPr>
         <p:spPr>
           <a:xfrm>
-            <a:off x="6208776" y="5472684"/>
-            <a:ext cx="1938528" cy="251460"/>
+            <a:off x="6208776" y="5661279"/>
+            <a:ext cx="1938528" cy="264033"/>
           </a:xfrm>
           <a:prstGeom prst="rect">
             <a:avLst/>
@@ -8261,8 +8261,8 @@
         </p:nvSpPr>
         <p:spPr>
           <a:xfrm>
-            <a:off x="8220456" y="5529262"/>
-            <a:ext cx="18288" cy="138303"/>
+            <a:off x="8220456" y="5720686"/>
+            <a:ext cx="18288" cy="145218"/>
           </a:xfrm>
           <a:prstGeom prst="rect">
             <a:avLst/>
@@ -8281,8 +8281,8 @@
         </p:nvSpPr>
         <p:spPr>
           <a:xfrm>
-            <a:off x="9079992" y="5472684"/>
-            <a:ext cx="896112" cy="251460"/>
+            <a:off x="9079992" y="5661279"/>
+            <a:ext cx="896112" cy="264033"/>
           </a:xfrm>
           <a:prstGeom prst="rect">
             <a:avLst/>
@@ -8320,8 +8320,8 @@
         </p:nvSpPr>
         <p:spPr>
           <a:xfrm>
-            <a:off x="9976104" y="5472684"/>
-            <a:ext cx="603504" cy="251460"/>
+            <a:off x="9976104" y="5661279"/>
+            <a:ext cx="603504" cy="264033"/>
           </a:xfrm>
           <a:prstGeom prst="rect">
             <a:avLst/>
@@ -8359,8 +8359,8 @@
         </p:nvSpPr>
         <p:spPr>
           <a:xfrm>
-            <a:off x="10579608" y="5472684"/>
-            <a:ext cx="841248" cy="251460"/>
+            <a:off x="10579608" y="5661279"/>
+            <a:ext cx="841248" cy="264033"/>
           </a:xfrm>
           <a:prstGeom prst="rect">
             <a:avLst/>
@@ -8398,8 +8398,8 @@
         </p:nvSpPr>
         <p:spPr>
           <a:xfrm>
-            <a:off x="457200" y="5961888"/>
-            <a:ext cx="11274552" cy="548640"/>
+            <a:off x="457200" y="6126480"/>
+            <a:ext cx="11274552" cy="371856"/>
           </a:xfrm>
           <a:prstGeom prst="rect">
             <a:avLst/>
@@ -8418,8 +8418,8 @@
         </p:nvSpPr>
         <p:spPr>
           <a:xfrm>
-            <a:off x="658368" y="5980176"/>
-            <a:ext cx="10927080" cy="512064"/>
+            <a:off x="658368" y="6144768"/>
+            <a:ext cx="10927080" cy="335280"/>
           </a:xfrm>
           <a:prstGeom prst="rect">
             <a:avLst/>
@@ -8443,7 +8443,7 @@
                 <a:ea typeface="Inter" pitchFamily="34" charset="-122"/>
                 <a:cs typeface="Inter" pitchFamily="34" charset="-120"/>
               </a:rPr>
-              <a:t>TOYOTA SPOKANE leaves the most at $541,039 a year. 15 stores are under all four benchmarks.</a:t>
+              <a:t>Toyota Spokane leaves the most at $541,039 a year. 15 stores are under all four benchmarks.</a:t>
             </a:r>
             <a:endParaRPr lang="en-US" sz="1600" dirty="0"/>
           </a:p>
@@ -8588,7 +8588,7 @@
         <p:spPr>
           <a:xfrm>
             <a:off x="457200" y="1207008"/>
-            <a:ext cx="11274552" cy="4645152"/>
+            <a:ext cx="11274552" cy="4782312"/>
           </a:xfrm>
           <a:prstGeom prst="rect">
             <a:avLst/>
@@ -8842,7 +8842,7 @@
         <p:spPr>
           <a:xfrm>
             <a:off x="658368" y="1700784"/>
-            <a:ext cx="1938528" cy="309489"/>
+            <a:ext cx="1938528" cy="324964"/>
           </a:xfrm>
           <a:prstGeom prst="rect">
             <a:avLst/>
@@ -8880,8 +8880,8 @@
         </p:nvSpPr>
         <p:spPr>
           <a:xfrm>
-            <a:off x="2670048" y="1770419"/>
-            <a:ext cx="804672" cy="170219"/>
+            <a:off x="2670048" y="1773901"/>
+            <a:ext cx="804672" cy="178730"/>
           </a:xfrm>
           <a:prstGeom prst="rect">
             <a:avLst/>
@@ -8901,7 +8901,7 @@
         <p:spPr>
           <a:xfrm>
             <a:off x="3529584" y="1700784"/>
-            <a:ext cx="896112" cy="309489"/>
+            <a:ext cx="896112" cy="324964"/>
           </a:xfrm>
           <a:prstGeom prst="rect">
             <a:avLst/>
@@ -8940,7 +8940,7 @@
         <p:spPr>
           <a:xfrm>
             <a:off x="4425696" y="1700784"/>
-            <a:ext cx="566928" cy="309489"/>
+            <a:ext cx="566928" cy="324964"/>
           </a:xfrm>
           <a:prstGeom prst="rect">
             <a:avLst/>
@@ -8979,7 +8979,7 @@
         <p:spPr>
           <a:xfrm>
             <a:off x="4992624" y="1700784"/>
-            <a:ext cx="877824" cy="309489"/>
+            <a:ext cx="877824" cy="324964"/>
           </a:xfrm>
           <a:prstGeom prst="rect">
             <a:avLst/>
@@ -9017,8 +9017,8 @@
         </p:nvSpPr>
         <p:spPr>
           <a:xfrm>
-            <a:off x="658368" y="2010273"/>
-            <a:ext cx="1938528" cy="309489"/>
+            <a:off x="658368" y="2025748"/>
+            <a:ext cx="1938528" cy="324964"/>
           </a:xfrm>
           <a:prstGeom prst="rect">
             <a:avLst/>
@@ -9056,8 +9056,8 @@
         </p:nvSpPr>
         <p:spPr>
           <a:xfrm>
-            <a:off x="2670048" y="2079908"/>
-            <a:ext cx="321286" cy="170219"/>
+            <a:off x="2670048" y="2098865"/>
+            <a:ext cx="321286" cy="178730"/>
           </a:xfrm>
           <a:prstGeom prst="rect">
             <a:avLst/>
@@ -9076,8 +9076,8 @@
         </p:nvSpPr>
         <p:spPr>
           <a:xfrm>
-            <a:off x="3529584" y="2010273"/>
-            <a:ext cx="896112" cy="309489"/>
+            <a:off x="3529584" y="2025748"/>
+            <a:ext cx="896112" cy="324964"/>
           </a:xfrm>
           <a:prstGeom prst="rect">
             <a:avLst/>
@@ -9115,8 +9115,8 @@
         </p:nvSpPr>
         <p:spPr>
           <a:xfrm>
-            <a:off x="4425696" y="2010273"/>
-            <a:ext cx="566928" cy="309489"/>
+            <a:off x="4425696" y="2025748"/>
+            <a:ext cx="566928" cy="324964"/>
           </a:xfrm>
           <a:prstGeom prst="rect">
             <a:avLst/>
@@ -9154,8 +9154,8 @@
         </p:nvSpPr>
         <p:spPr>
           <a:xfrm>
-            <a:off x="4992624" y="2010273"/>
-            <a:ext cx="877824" cy="309489"/>
+            <a:off x="4992624" y="2025748"/>
+            <a:ext cx="877824" cy="324964"/>
           </a:xfrm>
           <a:prstGeom prst="rect">
             <a:avLst/>
@@ -9193,8 +9193,8 @@
         </p:nvSpPr>
         <p:spPr>
           <a:xfrm>
-            <a:off x="658368" y="2319762"/>
-            <a:ext cx="1938528" cy="309489"/>
+            <a:off x="658368" y="2350711"/>
+            <a:ext cx="1938528" cy="324964"/>
           </a:xfrm>
           <a:prstGeom prst="rect">
             <a:avLst/>
@@ -9232,8 +9232,8 @@
         </p:nvSpPr>
         <p:spPr>
           <a:xfrm>
-            <a:off x="2670048" y="2389398"/>
-            <a:ext cx="296891" cy="170219"/>
+            <a:off x="2670048" y="2423828"/>
+            <a:ext cx="296891" cy="178730"/>
           </a:xfrm>
           <a:prstGeom prst="rect">
             <a:avLst/>
@@ -9252,8 +9252,8 @@
         </p:nvSpPr>
         <p:spPr>
           <a:xfrm>
-            <a:off x="3529584" y="2319762"/>
-            <a:ext cx="896112" cy="309489"/>
+            <a:off x="3529584" y="2350711"/>
+            <a:ext cx="896112" cy="324964"/>
           </a:xfrm>
           <a:prstGeom prst="rect">
             <a:avLst/>
@@ -9291,8 +9291,8 @@
         </p:nvSpPr>
         <p:spPr>
           <a:xfrm>
-            <a:off x="4425696" y="2319762"/>
-            <a:ext cx="566928" cy="309489"/>
+            <a:off x="4425696" y="2350711"/>
+            <a:ext cx="566928" cy="324964"/>
           </a:xfrm>
           <a:prstGeom prst="rect">
             <a:avLst/>
@@ -9330,8 +9330,8 @@
         </p:nvSpPr>
         <p:spPr>
           <a:xfrm>
-            <a:off x="4992624" y="2319762"/>
-            <a:ext cx="877824" cy="309489"/>
+            <a:off x="4992624" y="2350711"/>
+            <a:ext cx="877824" cy="324964"/>
           </a:xfrm>
           <a:prstGeom prst="rect">
             <a:avLst/>
@@ -9369,8 +9369,8 @@
         </p:nvSpPr>
         <p:spPr>
           <a:xfrm>
-            <a:off x="658368" y="2629252"/>
-            <a:ext cx="1938528" cy="309489"/>
+            <a:off x="658368" y="2675675"/>
+            <a:ext cx="1938528" cy="324964"/>
           </a:xfrm>
           <a:prstGeom prst="rect">
             <a:avLst/>
@@ -9408,8 +9408,8 @@
         </p:nvSpPr>
         <p:spPr>
           <a:xfrm>
-            <a:off x="2670048" y="2698887"/>
-            <a:ext cx="274266" cy="170219"/>
+            <a:off x="2670048" y="2748792"/>
+            <a:ext cx="274266" cy="178730"/>
           </a:xfrm>
           <a:prstGeom prst="rect">
             <a:avLst/>
@@ -9428,8 +9428,8 @@
         </p:nvSpPr>
         <p:spPr>
           <a:xfrm>
-            <a:off x="3529584" y="2629252"/>
-            <a:ext cx="896112" cy="309489"/>
+            <a:off x="3529584" y="2675675"/>
+            <a:ext cx="896112" cy="324964"/>
           </a:xfrm>
           <a:prstGeom prst="rect">
             <a:avLst/>
@@ -9467,8 +9467,8 @@
         </p:nvSpPr>
         <p:spPr>
           <a:xfrm>
-            <a:off x="4425696" y="2629252"/>
-            <a:ext cx="566928" cy="309489"/>
+            <a:off x="4425696" y="2675675"/>
+            <a:ext cx="566928" cy="324964"/>
           </a:xfrm>
           <a:prstGeom prst="rect">
             <a:avLst/>
@@ -9506,8 +9506,8 @@
         </p:nvSpPr>
         <p:spPr>
           <a:xfrm>
-            <a:off x="4992624" y="2629252"/>
-            <a:ext cx="877824" cy="309489"/>
+            <a:off x="4992624" y="2675675"/>
+            <a:ext cx="877824" cy="324964"/>
           </a:xfrm>
           <a:prstGeom prst="rect">
             <a:avLst/>
@@ -9545,8 +9545,8 @@
         </p:nvSpPr>
         <p:spPr>
           <a:xfrm>
-            <a:off x="658368" y="2938741"/>
-            <a:ext cx="1938528" cy="309489"/>
+            <a:off x="658368" y="3000639"/>
+            <a:ext cx="1938528" cy="324964"/>
           </a:xfrm>
           <a:prstGeom prst="rect">
             <a:avLst/>
@@ -9584,8 +9584,8 @@
         </p:nvSpPr>
         <p:spPr>
           <a:xfrm>
-            <a:off x="2670048" y="3008376"/>
-            <a:ext cx="269526" cy="170219"/>
+            <a:off x="2670048" y="3073756"/>
+            <a:ext cx="269526" cy="178730"/>
           </a:xfrm>
           <a:prstGeom prst="rect">
             <a:avLst/>
@@ -9604,8 +9604,8 @@
         </p:nvSpPr>
         <p:spPr>
           <a:xfrm>
-            <a:off x="3529584" y="2938741"/>
-            <a:ext cx="896112" cy="309489"/>
+            <a:off x="3529584" y="3000639"/>
+            <a:ext cx="896112" cy="324964"/>
           </a:xfrm>
           <a:prstGeom prst="rect">
             <a:avLst/>
@@ -9643,8 +9643,8 @@
         </p:nvSpPr>
         <p:spPr>
           <a:xfrm>
-            <a:off x="4425696" y="2938741"/>
-            <a:ext cx="566928" cy="309489"/>
+            <a:off x="4425696" y="3000639"/>
+            <a:ext cx="566928" cy="324964"/>
           </a:xfrm>
           <a:prstGeom prst="rect">
             <a:avLst/>
@@ -9682,8 +9682,8 @@
         </p:nvSpPr>
         <p:spPr>
           <a:xfrm>
-            <a:off x="4992624" y="2938741"/>
-            <a:ext cx="877824" cy="309489"/>
+            <a:off x="4992624" y="3000639"/>
+            <a:ext cx="877824" cy="324964"/>
           </a:xfrm>
           <a:prstGeom prst="rect">
             <a:avLst/>
@@ -9721,8 +9721,8 @@
         </p:nvSpPr>
         <p:spPr>
           <a:xfrm>
-            <a:off x="658368" y="3248230"/>
-            <a:ext cx="1938528" cy="309489"/>
+            <a:off x="658368" y="3325602"/>
+            <a:ext cx="1938528" cy="324964"/>
           </a:xfrm>
           <a:prstGeom prst="rect">
             <a:avLst/>
@@ -9760,8 +9760,8 @@
         </p:nvSpPr>
         <p:spPr>
           <a:xfrm>
-            <a:off x="2670048" y="3317865"/>
-            <a:ext cx="204151" cy="170219"/>
+            <a:off x="2670048" y="3398719"/>
+            <a:ext cx="204151" cy="178730"/>
           </a:xfrm>
           <a:prstGeom prst="rect">
             <a:avLst/>
@@ -9780,8 +9780,8 @@
         </p:nvSpPr>
         <p:spPr>
           <a:xfrm>
-            <a:off x="3529584" y="3248230"/>
-            <a:ext cx="896112" cy="309489"/>
+            <a:off x="3529584" y="3325602"/>
+            <a:ext cx="896112" cy="324964"/>
           </a:xfrm>
           <a:prstGeom prst="rect">
             <a:avLst/>
@@ -9819,8 +9819,8 @@
         </p:nvSpPr>
         <p:spPr>
           <a:xfrm>
-            <a:off x="4425696" y="3248230"/>
-            <a:ext cx="566928" cy="309489"/>
+            <a:off x="4425696" y="3325602"/>
+            <a:ext cx="566928" cy="324964"/>
           </a:xfrm>
           <a:prstGeom prst="rect">
             <a:avLst/>
@@ -9858,8 +9858,8 @@
         </p:nvSpPr>
         <p:spPr>
           <a:xfrm>
-            <a:off x="4992624" y="3248230"/>
-            <a:ext cx="877824" cy="309489"/>
+            <a:off x="4992624" y="3325602"/>
+            <a:ext cx="877824" cy="324964"/>
           </a:xfrm>
           <a:prstGeom prst="rect">
             <a:avLst/>
@@ -9897,8 +9897,8 @@
         </p:nvSpPr>
         <p:spPr>
           <a:xfrm>
-            <a:off x="658368" y="3557719"/>
-            <a:ext cx="1938528" cy="309489"/>
+            <a:off x="658368" y="3650566"/>
+            <a:ext cx="1938528" cy="324964"/>
           </a:xfrm>
           <a:prstGeom prst="rect">
             <a:avLst/>
@@ -9936,8 +9936,8 @@
         </p:nvSpPr>
         <p:spPr>
           <a:xfrm>
-            <a:off x="2670048" y="3627354"/>
-            <a:ext cx="176388" cy="170219"/>
+            <a:off x="2670048" y="3723683"/>
+            <a:ext cx="176388" cy="178730"/>
           </a:xfrm>
           <a:prstGeom prst="rect">
             <a:avLst/>
@@ -9956,8 +9956,8 @@
         </p:nvSpPr>
         <p:spPr>
           <a:xfrm>
-            <a:off x="3529584" y="3557719"/>
-            <a:ext cx="896112" cy="309489"/>
+            <a:off x="3529584" y="3650566"/>
+            <a:ext cx="896112" cy="324964"/>
           </a:xfrm>
           <a:prstGeom prst="rect">
             <a:avLst/>
@@ -9995,8 +9995,8 @@
         </p:nvSpPr>
         <p:spPr>
           <a:xfrm>
-            <a:off x="4425696" y="3557719"/>
-            <a:ext cx="566928" cy="309489"/>
+            <a:off x="4425696" y="3650566"/>
+            <a:ext cx="566928" cy="324964"/>
           </a:xfrm>
           <a:prstGeom prst="rect">
             <a:avLst/>
@@ -10034,8 +10034,8 @@
         </p:nvSpPr>
         <p:spPr>
           <a:xfrm>
-            <a:off x="4992624" y="3557719"/>
-            <a:ext cx="877824" cy="309489"/>
+            <a:off x="4992624" y="3650566"/>
+            <a:ext cx="877824" cy="324964"/>
           </a:xfrm>
           <a:prstGeom prst="rect">
             <a:avLst/>
@@ -10073,8 +10073,8 @@
         </p:nvSpPr>
         <p:spPr>
           <a:xfrm>
-            <a:off x="658368" y="3867209"/>
-            <a:ext cx="1938528" cy="309489"/>
+            <a:off x="658368" y="3975530"/>
+            <a:ext cx="1938528" cy="324964"/>
           </a:xfrm>
           <a:prstGeom prst="rect">
             <a:avLst/>
@@ -10112,8 +10112,8 @@
         </p:nvSpPr>
         <p:spPr>
           <a:xfrm>
-            <a:off x="2670048" y="3936844"/>
-            <a:ext cx="136485" cy="170219"/>
+            <a:off x="2670048" y="4048647"/>
+            <a:ext cx="136485" cy="178730"/>
           </a:xfrm>
           <a:prstGeom prst="rect">
             <a:avLst/>
@@ -10132,8 +10132,8 @@
         </p:nvSpPr>
         <p:spPr>
           <a:xfrm>
-            <a:off x="3529584" y="3867209"/>
-            <a:ext cx="896112" cy="309489"/>
+            <a:off x="3529584" y="3975530"/>
+            <a:ext cx="896112" cy="324964"/>
           </a:xfrm>
           <a:prstGeom prst="rect">
             <a:avLst/>
@@ -10171,8 +10171,8 @@
         </p:nvSpPr>
         <p:spPr>
           <a:xfrm>
-            <a:off x="4425696" y="3867209"/>
-            <a:ext cx="566928" cy="309489"/>
+            <a:off x="4425696" y="3975530"/>
+            <a:ext cx="566928" cy="324964"/>
           </a:xfrm>
           <a:prstGeom prst="rect">
             <a:avLst/>
@@ -10210,8 +10210,8 @@
         </p:nvSpPr>
         <p:spPr>
           <a:xfrm>
-            <a:off x="4992624" y="3867209"/>
-            <a:ext cx="877824" cy="309489"/>
+            <a:off x="4992624" y="3975530"/>
+            <a:ext cx="877824" cy="324964"/>
           </a:xfrm>
           <a:prstGeom prst="rect">
             <a:avLst/>
@@ -10249,8 +10249,8 @@
         </p:nvSpPr>
         <p:spPr>
           <a:xfrm>
-            <a:off x="658368" y="4176698"/>
-            <a:ext cx="1938528" cy="309489"/>
+            <a:off x="658368" y="4300494"/>
+            <a:ext cx="1938528" cy="324964"/>
           </a:xfrm>
           <a:prstGeom prst="rect">
             <a:avLst/>
@@ -10288,8 +10288,8 @@
         </p:nvSpPr>
         <p:spPr>
           <a:xfrm>
-            <a:off x="2670048" y="4246333"/>
-            <a:ext cx="129744" cy="170219"/>
+            <a:off x="2670048" y="4373610"/>
+            <a:ext cx="129744" cy="178730"/>
           </a:xfrm>
           <a:prstGeom prst="rect">
             <a:avLst/>
@@ -10308,8 +10308,8 @@
         </p:nvSpPr>
         <p:spPr>
           <a:xfrm>
-            <a:off x="3529584" y="4176698"/>
-            <a:ext cx="896112" cy="309489"/>
+            <a:off x="3529584" y="4300494"/>
+            <a:ext cx="896112" cy="324964"/>
           </a:xfrm>
           <a:prstGeom prst="rect">
             <a:avLst/>
@@ -10347,8 +10347,8 @@
         </p:nvSpPr>
         <p:spPr>
           <a:xfrm>
-            <a:off x="4425696" y="4176698"/>
-            <a:ext cx="566928" cy="309489"/>
+            <a:off x="4425696" y="4300494"/>
+            <a:ext cx="566928" cy="324964"/>
           </a:xfrm>
           <a:prstGeom prst="rect">
             <a:avLst/>
@@ -10386,8 +10386,8 @@
         </p:nvSpPr>
         <p:spPr>
           <a:xfrm>
-            <a:off x="4992624" y="4176698"/>
-            <a:ext cx="877824" cy="309489"/>
+            <a:off x="4992624" y="4300494"/>
+            <a:ext cx="877824" cy="324964"/>
           </a:xfrm>
           <a:prstGeom prst="rect">
             <a:avLst/>
@@ -10425,8 +10425,8 @@
         </p:nvSpPr>
         <p:spPr>
           <a:xfrm>
-            <a:off x="658368" y="4486187"/>
-            <a:ext cx="1938528" cy="309489"/>
+            <a:off x="658368" y="4625457"/>
+            <a:ext cx="1938528" cy="324964"/>
           </a:xfrm>
           <a:prstGeom prst="rect">
             <a:avLst/>
@@ -10464,8 +10464,8 @@
         </p:nvSpPr>
         <p:spPr>
           <a:xfrm>
-            <a:off x="2670048" y="4555822"/>
-            <a:ext cx="122649" cy="170219"/>
+            <a:off x="2670048" y="4698574"/>
+            <a:ext cx="122649" cy="178730"/>
           </a:xfrm>
           <a:prstGeom prst="rect">
             <a:avLst/>
@@ -10484,8 +10484,8 @@
         </p:nvSpPr>
         <p:spPr>
           <a:xfrm>
-            <a:off x="3529584" y="4486187"/>
-            <a:ext cx="896112" cy="309489"/>
+            <a:off x="3529584" y="4625457"/>
+            <a:ext cx="896112" cy="324964"/>
           </a:xfrm>
           <a:prstGeom prst="rect">
             <a:avLst/>
@@ -10523,8 +10523,8 @@
         </p:nvSpPr>
         <p:spPr>
           <a:xfrm>
-            <a:off x="4425696" y="4486187"/>
-            <a:ext cx="566928" cy="309489"/>
+            <a:off x="4425696" y="4625457"/>
+            <a:ext cx="566928" cy="324964"/>
           </a:xfrm>
           <a:prstGeom prst="rect">
             <a:avLst/>
@@ -10562,8 +10562,8 @@
         </p:nvSpPr>
         <p:spPr>
           <a:xfrm>
-            <a:off x="4992624" y="4486187"/>
-            <a:ext cx="877824" cy="309489"/>
+            <a:off x="4992624" y="4625457"/>
+            <a:ext cx="877824" cy="324964"/>
           </a:xfrm>
           <a:prstGeom prst="rect">
             <a:avLst/>
@@ -10601,8 +10601,8 @@
         </p:nvSpPr>
         <p:spPr>
           <a:xfrm>
-            <a:off x="658368" y="4795676"/>
-            <a:ext cx="1938528" cy="309489"/>
+            <a:off x="658368" y="4950421"/>
+            <a:ext cx="1938528" cy="324964"/>
           </a:xfrm>
           <a:prstGeom prst="rect">
             <a:avLst/>
@@ -10640,8 +10640,8 @@
         </p:nvSpPr>
         <p:spPr>
           <a:xfrm>
-            <a:off x="2670048" y="4865311"/>
-            <a:ext cx="118396" cy="170219"/>
+            <a:off x="2670048" y="5023538"/>
+            <a:ext cx="118396" cy="178730"/>
           </a:xfrm>
           <a:prstGeom prst="rect">
             <a:avLst/>
@@ -10660,8 +10660,8 @@
         </p:nvSpPr>
         <p:spPr>
           <a:xfrm>
-            <a:off x="3529584" y="4795676"/>
-            <a:ext cx="896112" cy="309489"/>
+            <a:off x="3529584" y="4950421"/>
+            <a:ext cx="896112" cy="324964"/>
           </a:xfrm>
           <a:prstGeom prst="rect">
             <a:avLst/>
@@ -10699,8 +10699,8 @@
         </p:nvSpPr>
         <p:spPr>
           <a:xfrm>
-            <a:off x="4425696" y="4795676"/>
-            <a:ext cx="566928" cy="309489"/>
+            <a:off x="4425696" y="4950421"/>
+            <a:ext cx="566928" cy="324964"/>
           </a:xfrm>
           <a:prstGeom prst="rect">
             <a:avLst/>
@@ -10738,8 +10738,8 @@
         </p:nvSpPr>
         <p:spPr>
           <a:xfrm>
-            <a:off x="4992624" y="4795676"/>
-            <a:ext cx="877824" cy="309489"/>
+            <a:off x="4992624" y="4950421"/>
+            <a:ext cx="877824" cy="324964"/>
           </a:xfrm>
           <a:prstGeom prst="rect">
             <a:avLst/>
@@ -10777,8 +10777,8 @@
         </p:nvSpPr>
         <p:spPr>
           <a:xfrm>
-            <a:off x="658368" y="5105166"/>
-            <a:ext cx="1938528" cy="309489"/>
+            <a:off x="658368" y="5275385"/>
+            <a:ext cx="1938528" cy="324964"/>
           </a:xfrm>
           <a:prstGeom prst="rect">
             <a:avLst/>
@@ -10816,8 +10816,8 @@
         </p:nvSpPr>
         <p:spPr>
           <a:xfrm>
-            <a:off x="2670048" y="5174801"/>
-            <a:ext cx="116594" cy="170219"/>
+            <a:off x="2670048" y="5348501"/>
+            <a:ext cx="116594" cy="178730"/>
           </a:xfrm>
           <a:prstGeom prst="rect">
             <a:avLst/>
@@ -10836,8 +10836,8 @@
         </p:nvSpPr>
         <p:spPr>
           <a:xfrm>
-            <a:off x="3529584" y="5105166"/>
-            <a:ext cx="896112" cy="309489"/>
+            <a:off x="3529584" y="5275385"/>
+            <a:ext cx="896112" cy="324964"/>
           </a:xfrm>
           <a:prstGeom prst="rect">
             <a:avLst/>
@@ -10875,8 +10875,8 @@
         </p:nvSpPr>
         <p:spPr>
           <a:xfrm>
-            <a:off x="4425696" y="5105166"/>
-            <a:ext cx="566928" cy="309489"/>
+            <a:off x="4425696" y="5275385"/>
+            <a:ext cx="566928" cy="324964"/>
           </a:xfrm>
           <a:prstGeom prst="rect">
             <a:avLst/>
@@ -10914,8 +10914,8 @@
         </p:nvSpPr>
         <p:spPr>
           <a:xfrm>
-            <a:off x="4992624" y="5105166"/>
-            <a:ext cx="877824" cy="309489"/>
+            <a:off x="4992624" y="5275385"/>
+            <a:ext cx="877824" cy="324964"/>
           </a:xfrm>
           <a:prstGeom prst="rect">
             <a:avLst/>
@@ -10953,8 +10953,8 @@
         </p:nvSpPr>
         <p:spPr>
           <a:xfrm>
-            <a:off x="658368" y="5414655"/>
-            <a:ext cx="1938528" cy="309489"/>
+            <a:off x="658368" y="5600348"/>
+            <a:ext cx="1938528" cy="324964"/>
           </a:xfrm>
           <a:prstGeom prst="rect">
             <a:avLst/>
@@ -10992,8 +10992,8 @@
         </p:nvSpPr>
         <p:spPr>
           <a:xfrm>
-            <a:off x="2670048" y="5484290"/>
-            <a:ext cx="93943" cy="170219"/>
+            <a:off x="2670048" y="5673465"/>
+            <a:ext cx="93943" cy="178730"/>
           </a:xfrm>
           <a:prstGeom prst="rect">
             <a:avLst/>
@@ -11012,8 +11012,8 @@
         </p:nvSpPr>
         <p:spPr>
           <a:xfrm>
-            <a:off x="3529584" y="5414655"/>
-            <a:ext cx="896112" cy="309489"/>
+            <a:off x="3529584" y="5600348"/>
+            <a:ext cx="896112" cy="324964"/>
           </a:xfrm>
           <a:prstGeom prst="rect">
             <a:avLst/>
@@ -11051,8 +11051,8 @@
         </p:nvSpPr>
         <p:spPr>
           <a:xfrm>
-            <a:off x="4425696" y="5414655"/>
-            <a:ext cx="566928" cy="309489"/>
+            <a:off x="4425696" y="5600348"/>
+            <a:ext cx="566928" cy="324964"/>
           </a:xfrm>
           <a:prstGeom prst="rect">
             <a:avLst/>
@@ -11090,8 +11090,8 @@
         </p:nvSpPr>
         <p:spPr>
           <a:xfrm>
-            <a:off x="4992624" y="5414655"/>
-            <a:ext cx="877824" cy="309489"/>
+            <a:off x="4992624" y="5600348"/>
+            <a:ext cx="877824" cy="324964"/>
           </a:xfrm>
           <a:prstGeom prst="rect">
             <a:avLst/>
@@ -11130,7 +11130,7 @@
         <p:spPr>
           <a:xfrm>
             <a:off x="6208776" y="1700784"/>
-            <a:ext cx="1938528" cy="309489"/>
+            <a:ext cx="1938528" cy="324964"/>
           </a:xfrm>
           <a:prstGeom prst="rect">
             <a:avLst/>
@@ -11168,8 +11168,8 @@
         </p:nvSpPr>
         <p:spPr>
           <a:xfrm>
-            <a:off x="8220456" y="1770419"/>
-            <a:ext cx="90559" cy="170219"/>
+            <a:off x="8220456" y="1773901"/>
+            <a:ext cx="90559" cy="178730"/>
           </a:xfrm>
           <a:prstGeom prst="rect">
             <a:avLst/>
@@ -11189,7 +11189,7 @@
         <p:spPr>
           <a:xfrm>
             <a:off x="9079992" y="1700784"/>
-            <a:ext cx="896112" cy="309489"/>
+            <a:ext cx="896112" cy="324964"/>
           </a:xfrm>
           <a:prstGeom prst="rect">
             <a:avLst/>
@@ -11228,7 +11228,7 @@
         <p:spPr>
           <a:xfrm>
             <a:off x="9976104" y="1700784"/>
-            <a:ext cx="566928" cy="309489"/>
+            <a:ext cx="566928" cy="324964"/>
           </a:xfrm>
           <a:prstGeom prst="rect">
             <a:avLst/>
@@ -11267,7 +11267,7 @@
         <p:spPr>
           <a:xfrm>
             <a:off x="10543032" y="1700784"/>
-            <a:ext cx="877824" cy="309489"/>
+            <a:ext cx="877824" cy="324964"/>
           </a:xfrm>
           <a:prstGeom prst="rect">
             <a:avLst/>
@@ -11305,8 +11305,8 @@
         </p:nvSpPr>
         <p:spPr>
           <a:xfrm>
-            <a:off x="6208776" y="2010273"/>
-            <a:ext cx="1938528" cy="309489"/>
+            <a:off x="6208776" y="2025748"/>
+            <a:ext cx="1938528" cy="324964"/>
           </a:xfrm>
           <a:prstGeom prst="rect">
             <a:avLst/>
@@ -11344,8 +11344,8 @@
         </p:nvSpPr>
         <p:spPr>
           <a:xfrm>
-            <a:off x="8220456" y="2079908"/>
-            <a:ext cx="83744" cy="170219"/>
+            <a:off x="8220456" y="2098865"/>
+            <a:ext cx="83744" cy="178730"/>
           </a:xfrm>
           <a:prstGeom prst="rect">
             <a:avLst/>
@@ -11364,8 +11364,8 @@
         </p:nvSpPr>
         <p:spPr>
           <a:xfrm>
-            <a:off x="9079992" y="2010273"/>
-            <a:ext cx="896112" cy="309489"/>
+            <a:off x="9079992" y="2025748"/>
+            <a:ext cx="896112" cy="324964"/>
           </a:xfrm>
           <a:prstGeom prst="rect">
             <a:avLst/>
@@ -11403,8 +11403,8 @@
         </p:nvSpPr>
         <p:spPr>
           <a:xfrm>
-            <a:off x="9976104" y="2010273"/>
-            <a:ext cx="566928" cy="309489"/>
+            <a:off x="9976104" y="2025748"/>
+            <a:ext cx="566928" cy="324964"/>
           </a:xfrm>
           <a:prstGeom prst="rect">
             <a:avLst/>
@@ -11442,8 +11442,8 @@
         </p:nvSpPr>
         <p:spPr>
           <a:xfrm>
-            <a:off x="10543032" y="2010273"/>
-            <a:ext cx="877824" cy="309489"/>
+            <a:off x="10543032" y="2025748"/>
+            <a:ext cx="877824" cy="324964"/>
           </a:xfrm>
           <a:prstGeom prst="rect">
             <a:avLst/>
@@ -11481,8 +11481,8 @@
         </p:nvSpPr>
         <p:spPr>
           <a:xfrm>
-            <a:off x="6208776" y="2319762"/>
-            <a:ext cx="1938528" cy="309489"/>
+            <a:off x="6208776" y="2350711"/>
+            <a:ext cx="1938528" cy="324964"/>
           </a:xfrm>
           <a:prstGeom prst="rect">
             <a:avLst/>
@@ -11520,8 +11520,8 @@
         </p:nvSpPr>
         <p:spPr>
           <a:xfrm>
-            <a:off x="8220456" y="2389398"/>
-            <a:ext cx="80843" cy="170219"/>
+            <a:off x="8220456" y="2423828"/>
+            <a:ext cx="80843" cy="178730"/>
           </a:xfrm>
           <a:prstGeom prst="rect">
             <a:avLst/>
@@ -11540,8 +11540,8 @@
         </p:nvSpPr>
         <p:spPr>
           <a:xfrm>
-            <a:off x="9079992" y="2319762"/>
-            <a:ext cx="896112" cy="309489"/>
+            <a:off x="9079992" y="2350711"/>
+            <a:ext cx="896112" cy="324964"/>
           </a:xfrm>
           <a:prstGeom prst="rect">
             <a:avLst/>
@@ -11579,8 +11579,8 @@
         </p:nvSpPr>
         <p:spPr>
           <a:xfrm>
-            <a:off x="9976104" y="2319762"/>
-            <a:ext cx="566928" cy="309489"/>
+            <a:off x="9976104" y="2350711"/>
+            <a:ext cx="566928" cy="324964"/>
           </a:xfrm>
           <a:prstGeom prst="rect">
             <a:avLst/>
@@ -11618,8 +11618,8 @@
         </p:nvSpPr>
         <p:spPr>
           <a:xfrm>
-            <a:off x="10543032" y="2319762"/>
-            <a:ext cx="877824" cy="309489"/>
+            <a:off x="10543032" y="2350711"/>
+            <a:ext cx="877824" cy="324964"/>
           </a:xfrm>
           <a:prstGeom prst="rect">
             <a:avLst/>
@@ -11657,8 +11657,8 @@
         </p:nvSpPr>
         <p:spPr>
           <a:xfrm>
-            <a:off x="6208776" y="2629252"/>
-            <a:ext cx="1938528" cy="309489"/>
+            <a:off x="6208776" y="2675675"/>
+            <a:ext cx="1938528" cy="324964"/>
           </a:xfrm>
           <a:prstGeom prst="rect">
             <a:avLst/>
@@ -11696,8 +11696,8 @@
         </p:nvSpPr>
         <p:spPr>
           <a:xfrm>
-            <a:off x="8220456" y="2698887"/>
-            <a:ext cx="74808" cy="170219"/>
+            <a:off x="8220456" y="2748792"/>
+            <a:ext cx="74808" cy="178730"/>
           </a:xfrm>
           <a:prstGeom prst="rect">
             <a:avLst/>
@@ -11716,8 +11716,8 @@
         </p:nvSpPr>
         <p:spPr>
           <a:xfrm>
-            <a:off x="9079992" y="2629252"/>
-            <a:ext cx="896112" cy="309489"/>
+            <a:off x="9079992" y="2675675"/>
+            <a:ext cx="896112" cy="324964"/>
           </a:xfrm>
           <a:prstGeom prst="rect">
             <a:avLst/>
@@ -11755,8 +11755,8 @@
         </p:nvSpPr>
         <p:spPr>
           <a:xfrm>
-            <a:off x="9976104" y="2629252"/>
-            <a:ext cx="566928" cy="309489"/>
+            <a:off x="9976104" y="2675675"/>
+            <a:ext cx="566928" cy="324964"/>
           </a:xfrm>
           <a:prstGeom prst="rect">
             <a:avLst/>
@@ -11794,8 +11794,8 @@
         </p:nvSpPr>
         <p:spPr>
           <a:xfrm>
-            <a:off x="10543032" y="2629252"/>
-            <a:ext cx="877824" cy="309489"/>
+            <a:off x="10543032" y="2675675"/>
+            <a:ext cx="877824" cy="324964"/>
           </a:xfrm>
           <a:prstGeom prst="rect">
             <a:avLst/>
@@ -11833,8 +11833,8 @@
         </p:nvSpPr>
         <p:spPr>
           <a:xfrm>
-            <a:off x="6208776" y="2938741"/>
-            <a:ext cx="1938528" cy="309489"/>
+            <a:off x="6208776" y="3000639"/>
+            <a:ext cx="1938528" cy="324964"/>
           </a:xfrm>
           <a:prstGeom prst="rect">
             <a:avLst/>
@@ -11872,8 +11872,8 @@
         </p:nvSpPr>
         <p:spPr>
           <a:xfrm>
-            <a:off x="8220456" y="3008376"/>
-            <a:ext cx="63460" cy="170219"/>
+            <a:off x="8220456" y="3073756"/>
+            <a:ext cx="63460" cy="178730"/>
           </a:xfrm>
           <a:prstGeom prst="rect">
             <a:avLst/>
@@ -11892,8 +11892,8 @@
         </p:nvSpPr>
         <p:spPr>
           <a:xfrm>
-            <a:off x="9079992" y="2938741"/>
-            <a:ext cx="896112" cy="309489"/>
+            <a:off x="9079992" y="3000639"/>
+            <a:ext cx="896112" cy="324964"/>
           </a:xfrm>
           <a:prstGeom prst="rect">
             <a:avLst/>
@@ -11931,8 +11931,8 @@
         </p:nvSpPr>
         <p:spPr>
           <a:xfrm>
-            <a:off x="9976104" y="2938741"/>
-            <a:ext cx="566928" cy="309489"/>
+            <a:off x="9976104" y="3000639"/>
+            <a:ext cx="566928" cy="324964"/>
           </a:xfrm>
           <a:prstGeom prst="rect">
             <a:avLst/>
@@ -11970,8 +11970,8 @@
         </p:nvSpPr>
         <p:spPr>
           <a:xfrm>
-            <a:off x="10543032" y="2938741"/>
-            <a:ext cx="877824" cy="309489"/>
+            <a:off x="10543032" y="3000639"/>
+            <a:ext cx="877824" cy="324964"/>
           </a:xfrm>
           <a:prstGeom prst="rect">
             <a:avLst/>
@@ -12009,8 +12009,8 @@
         </p:nvSpPr>
         <p:spPr>
           <a:xfrm>
-            <a:off x="6208776" y="3248230"/>
-            <a:ext cx="1938528" cy="309489"/>
+            <a:off x="6208776" y="3325602"/>
+            <a:ext cx="1938528" cy="324964"/>
           </a:xfrm>
           <a:prstGeom prst="rect">
             <a:avLst/>
@@ -12048,8 +12048,8 @@
         </p:nvSpPr>
         <p:spPr>
           <a:xfrm>
-            <a:off x="8220456" y="3317865"/>
-            <a:ext cx="43158" cy="170219"/>
+            <a:off x="8220456" y="3398719"/>
+            <a:ext cx="43158" cy="178730"/>
           </a:xfrm>
           <a:prstGeom prst="rect">
             <a:avLst/>
@@ -12068,8 +12068,8 @@
         </p:nvSpPr>
         <p:spPr>
           <a:xfrm>
-            <a:off x="9079992" y="3248230"/>
-            <a:ext cx="896112" cy="309489"/>
+            <a:off x="9079992" y="3325602"/>
+            <a:ext cx="896112" cy="324964"/>
           </a:xfrm>
           <a:prstGeom prst="rect">
             <a:avLst/>
@@ -12107,8 +12107,8 @@
         </p:nvSpPr>
         <p:spPr>
           <a:xfrm>
-            <a:off x="9976104" y="3248230"/>
-            <a:ext cx="566928" cy="309489"/>
+            <a:off x="9976104" y="3325602"/>
+            <a:ext cx="566928" cy="324964"/>
           </a:xfrm>
           <a:prstGeom prst="rect">
             <a:avLst/>
@@ -12146,8 +12146,8 @@
         </p:nvSpPr>
         <p:spPr>
           <a:xfrm>
-            <a:off x="10543032" y="3248230"/>
-            <a:ext cx="877824" cy="309489"/>
+            <a:off x="10543032" y="3325602"/>
+            <a:ext cx="877824" cy="324964"/>
           </a:xfrm>
           <a:prstGeom prst="rect">
             <a:avLst/>
@@ -12185,8 +12185,8 @@
         </p:nvSpPr>
         <p:spPr>
           <a:xfrm>
-            <a:off x="6208776" y="3557719"/>
-            <a:ext cx="1938528" cy="309489"/>
+            <a:off x="6208776" y="3650566"/>
+            <a:ext cx="1938528" cy="324964"/>
           </a:xfrm>
           <a:prstGeom prst="rect">
             <a:avLst/>
@@ -12224,8 +12224,8 @@
         </p:nvSpPr>
         <p:spPr>
           <a:xfrm>
-            <a:off x="8220456" y="3627354"/>
-            <a:ext cx="41054" cy="170219"/>
+            <a:off x="8220456" y="3723683"/>
+            <a:ext cx="41054" cy="178730"/>
           </a:xfrm>
           <a:prstGeom prst="rect">
             <a:avLst/>
@@ -12244,8 +12244,8 @@
         </p:nvSpPr>
         <p:spPr>
           <a:xfrm>
-            <a:off x="9079992" y="3557719"/>
-            <a:ext cx="896112" cy="309489"/>
+            <a:off x="9079992" y="3650566"/>
+            <a:ext cx="896112" cy="324964"/>
           </a:xfrm>
           <a:prstGeom prst="rect">
             <a:avLst/>
@@ -12283,8 +12283,8 @@
         </p:nvSpPr>
         <p:spPr>
           <a:xfrm>
-            <a:off x="9976104" y="3557719"/>
-            <a:ext cx="566928" cy="309489"/>
+            <a:off x="9976104" y="3650566"/>
+            <a:ext cx="566928" cy="324964"/>
           </a:xfrm>
           <a:prstGeom prst="rect">
             <a:avLst/>
@@ -12322,8 +12322,8 @@
         </p:nvSpPr>
         <p:spPr>
           <a:xfrm>
-            <a:off x="10543032" y="3557719"/>
-            <a:ext cx="877824" cy="309489"/>
+            <a:off x="10543032" y="3650566"/>
+            <a:ext cx="877824" cy="324964"/>
           </a:xfrm>
           <a:prstGeom prst="rect">
             <a:avLst/>
@@ -12361,8 +12361,8 @@
         </p:nvSpPr>
         <p:spPr>
           <a:xfrm>
-            <a:off x="6208776" y="3867209"/>
-            <a:ext cx="1938528" cy="309489"/>
+            <a:off x="6208776" y="3975530"/>
+            <a:ext cx="1938528" cy="324964"/>
           </a:xfrm>
           <a:prstGeom prst="rect">
             <a:avLst/>
@@ -12400,8 +12400,8 @@
         </p:nvSpPr>
         <p:spPr>
           <a:xfrm>
-            <a:off x="8220456" y="3936844"/>
-            <a:ext cx="37178" cy="170219"/>
+            <a:off x="8220456" y="4048647"/>
+            <a:ext cx="37178" cy="178730"/>
           </a:xfrm>
           <a:prstGeom prst="rect">
             <a:avLst/>
@@ -12420,8 +12420,8 @@
         </p:nvSpPr>
         <p:spPr>
           <a:xfrm>
-            <a:off x="9079992" y="3867209"/>
-            <a:ext cx="896112" cy="309489"/>
+            <a:off x="9079992" y="3975530"/>
+            <a:ext cx="896112" cy="324964"/>
           </a:xfrm>
           <a:prstGeom prst="rect">
             <a:avLst/>
@@ -12459,8 +12459,8 @@
         </p:nvSpPr>
         <p:spPr>
           <a:xfrm>
-            <a:off x="9976104" y="3867209"/>
-            <a:ext cx="566928" cy="309489"/>
+            <a:off x="9976104" y="3975530"/>
+            <a:ext cx="566928" cy="324964"/>
           </a:xfrm>
           <a:prstGeom prst="rect">
             <a:avLst/>
@@ -12498,8 +12498,8 @@
         </p:nvSpPr>
         <p:spPr>
           <a:xfrm>
-            <a:off x="10543032" y="3867209"/>
-            <a:ext cx="877824" cy="309489"/>
+            <a:off x="10543032" y="3975530"/>
+            <a:ext cx="877824" cy="324964"/>
           </a:xfrm>
           <a:prstGeom prst="rect">
             <a:avLst/>
@@ -12537,8 +12537,8 @@
         </p:nvSpPr>
         <p:spPr>
           <a:xfrm>
-            <a:off x="6208776" y="4176698"/>
-            <a:ext cx="1938528" cy="309489"/>
+            <a:off x="6208776" y="4300494"/>
+            <a:ext cx="1938528" cy="324964"/>
           </a:xfrm>
           <a:prstGeom prst="rect">
             <a:avLst/>
@@ -12576,8 +12576,8 @@
         </p:nvSpPr>
         <p:spPr>
           <a:xfrm>
-            <a:off x="8220456" y="4246333"/>
-            <a:ext cx="34892" cy="170219"/>
+            <a:off x="8220456" y="4373610"/>
+            <a:ext cx="34892" cy="178730"/>
           </a:xfrm>
           <a:prstGeom prst="rect">
             <a:avLst/>
@@ -12596,8 +12596,8 @@
         </p:nvSpPr>
         <p:spPr>
           <a:xfrm>
-            <a:off x="9079992" y="4176698"/>
-            <a:ext cx="896112" cy="309489"/>
+            <a:off x="9079992" y="4300494"/>
+            <a:ext cx="896112" cy="324964"/>
           </a:xfrm>
           <a:prstGeom prst="rect">
             <a:avLst/>
@@ -12635,8 +12635,8 @@
         </p:nvSpPr>
         <p:spPr>
           <a:xfrm>
-            <a:off x="9976104" y="4176698"/>
-            <a:ext cx="566928" cy="309489"/>
+            <a:off x="9976104" y="4300494"/>
+            <a:ext cx="566928" cy="324964"/>
           </a:xfrm>
           <a:prstGeom prst="rect">
             <a:avLst/>
@@ -12674,8 +12674,8 @@
         </p:nvSpPr>
         <p:spPr>
           <a:xfrm>
-            <a:off x="10543032" y="4176698"/>
-            <a:ext cx="877824" cy="309489"/>
+            <a:off x="10543032" y="4300494"/>
+            <a:ext cx="877824" cy="324964"/>
           </a:xfrm>
           <a:prstGeom prst="rect">
             <a:avLst/>
@@ -12713,8 +12713,8 @@
         </p:nvSpPr>
         <p:spPr>
           <a:xfrm>
-            <a:off x="6208776" y="4486187"/>
-            <a:ext cx="1938528" cy="309489"/>
+            <a:off x="6208776" y="4625457"/>
+            <a:ext cx="1938528" cy="324964"/>
           </a:xfrm>
           <a:prstGeom prst="rect">
             <a:avLst/>
@@ -12752,8 +12752,8 @@
         </p:nvSpPr>
         <p:spPr>
           <a:xfrm>
-            <a:off x="8220456" y="4555822"/>
-            <a:ext cx="32614" cy="170219"/>
+            <a:off x="8220456" y="4698574"/>
+            <a:ext cx="32614" cy="178730"/>
           </a:xfrm>
           <a:prstGeom prst="rect">
             <a:avLst/>
@@ -12772,8 +12772,8 @@
         </p:nvSpPr>
         <p:spPr>
           <a:xfrm>
-            <a:off x="9079992" y="4486187"/>
-            <a:ext cx="896112" cy="309489"/>
+            <a:off x="9079992" y="4625457"/>
+            <a:ext cx="896112" cy="324964"/>
           </a:xfrm>
           <a:prstGeom prst="rect">
             <a:avLst/>
@@ -12811,8 +12811,8 @@
         </p:nvSpPr>
         <p:spPr>
           <a:xfrm>
-            <a:off x="9976104" y="4486187"/>
-            <a:ext cx="566928" cy="309489"/>
+            <a:off x="9976104" y="4625457"/>
+            <a:ext cx="566928" cy="324964"/>
           </a:xfrm>
           <a:prstGeom prst="rect">
             <a:avLst/>
@@ -12850,8 +12850,8 @@
         </p:nvSpPr>
         <p:spPr>
           <a:xfrm>
-            <a:off x="10543032" y="4486187"/>
-            <a:ext cx="877824" cy="309489"/>
+            <a:off x="10543032" y="4625457"/>
+            <a:ext cx="877824" cy="324964"/>
           </a:xfrm>
           <a:prstGeom prst="rect">
             <a:avLst/>
@@ -12889,8 +12889,8 @@
         </p:nvSpPr>
         <p:spPr>
           <a:xfrm>
-            <a:off x="6208776" y="4795676"/>
-            <a:ext cx="1938528" cy="309489"/>
+            <a:off x="6208776" y="4950421"/>
+            <a:ext cx="1938528" cy="324964"/>
           </a:xfrm>
           <a:prstGeom prst="rect">
             <a:avLst/>
@@ -12928,8 +12928,8 @@
         </p:nvSpPr>
         <p:spPr>
           <a:xfrm>
-            <a:off x="8220456" y="4865311"/>
-            <a:ext cx="25924" cy="170219"/>
+            <a:off x="8220456" y="5023538"/>
+            <a:ext cx="25924" cy="178730"/>
           </a:xfrm>
           <a:prstGeom prst="rect">
             <a:avLst/>
@@ -12948,8 +12948,8 @@
         </p:nvSpPr>
         <p:spPr>
           <a:xfrm>
-            <a:off x="9079992" y="4795676"/>
-            <a:ext cx="896112" cy="309489"/>
+            <a:off x="9079992" y="4950421"/>
+            <a:ext cx="896112" cy="324964"/>
           </a:xfrm>
           <a:prstGeom prst="rect">
             <a:avLst/>
@@ -12987,8 +12987,8 @@
         </p:nvSpPr>
         <p:spPr>
           <a:xfrm>
-            <a:off x="9976104" y="4795676"/>
-            <a:ext cx="566928" cy="309489"/>
+            <a:off x="9976104" y="4950421"/>
+            <a:ext cx="566928" cy="324964"/>
           </a:xfrm>
           <a:prstGeom prst="rect">
             <a:avLst/>
@@ -13026,8 +13026,8 @@
         </p:nvSpPr>
         <p:spPr>
           <a:xfrm>
-            <a:off x="10543032" y="4795676"/>
-            <a:ext cx="877824" cy="309489"/>
+            <a:off x="10543032" y="4950421"/>
+            <a:ext cx="877824" cy="324964"/>
           </a:xfrm>
           <a:prstGeom prst="rect">
             <a:avLst/>
@@ -13065,8 +13065,8 @@
         </p:nvSpPr>
         <p:spPr>
           <a:xfrm>
-            <a:off x="6208776" y="5105166"/>
-            <a:ext cx="1938528" cy="309489"/>
+            <a:off x="6208776" y="5275385"/>
+            <a:ext cx="1938528" cy="324964"/>
           </a:xfrm>
           <a:prstGeom prst="rect">
             <a:avLst/>
@@ -13104,8 +13104,8 @@
         </p:nvSpPr>
         <p:spPr>
           <a:xfrm>
-            <a:off x="8220456" y="5174801"/>
-            <a:ext cx="18288" cy="170219"/>
+            <a:off x="8220456" y="5348501"/>
+            <a:ext cx="18288" cy="178730"/>
           </a:xfrm>
           <a:prstGeom prst="rect">
             <a:avLst/>
@@ -13124,8 +13124,8 @@
         </p:nvSpPr>
         <p:spPr>
           <a:xfrm>
-            <a:off x="9079992" y="5105166"/>
-            <a:ext cx="896112" cy="309489"/>
+            <a:off x="9079992" y="5275385"/>
+            <a:ext cx="896112" cy="324964"/>
           </a:xfrm>
           <a:prstGeom prst="rect">
             <a:avLst/>
@@ -13163,8 +13163,8 @@
         </p:nvSpPr>
         <p:spPr>
           <a:xfrm>
-            <a:off x="9976104" y="5105166"/>
-            <a:ext cx="566928" cy="309489"/>
+            <a:off x="9976104" y="5275385"/>
+            <a:ext cx="566928" cy="324964"/>
           </a:xfrm>
           <a:prstGeom prst="rect">
             <a:avLst/>
@@ -13202,8 +13202,8 @@
         </p:nvSpPr>
         <p:spPr>
           <a:xfrm>
-            <a:off x="10543032" y="5105166"/>
-            <a:ext cx="877824" cy="309489"/>
+            <a:off x="10543032" y="5275385"/>
+            <a:ext cx="877824" cy="324964"/>
           </a:xfrm>
           <a:prstGeom prst="rect">
             <a:avLst/>
@@ -13241,8 +13241,8 @@
         </p:nvSpPr>
         <p:spPr>
           <a:xfrm>
-            <a:off x="457200" y="5961888"/>
-            <a:ext cx="11274552" cy="548640"/>
+            <a:off x="457200" y="6126480"/>
+            <a:ext cx="11274552" cy="364236"/>
           </a:xfrm>
           <a:prstGeom prst="rect">
             <a:avLst/>
@@ -13261,8 +13261,8 @@
         </p:nvSpPr>
         <p:spPr>
           <a:xfrm>
-            <a:off x="658368" y="5980176"/>
-            <a:ext cx="10927080" cy="512064"/>
+            <a:off x="658368" y="6144768"/>
+            <a:ext cx="10927080" cy="327660"/>
           </a:xfrm>
           <a:prstGeom prst="rect">
             <a:avLst/>
@@ -13278,7 +13278,7 @@
               <a:buNone/>
             </a:pPr>
             <a:r>
-              <a:rPr lang="en-US" sz="1600" b="1" dirty="0">
+              <a:rPr lang="en-US" sz="1550" b="1" dirty="0">
                 <a:solidFill>
                   <a:srgbClr val="A82B26"/>
                 </a:solidFill>
@@ -13286,9 +13286,9 @@
                 <a:ea typeface="Inter" pitchFamily="34" charset="-122"/>
                 <a:cs typeface="Inter" pitchFamily="34" charset="-120"/>
               </a:rPr>
-              <a:t>25 stores under 15% leave $1,029,276 a year: 9,935 services. TOYOTA SPOKANE has the most at $225,288.</a:t>
-            </a:r>
-            <a:endParaRPr lang="en-US" sz="1600" dirty="0"/>
+              <a:t>25 stores under 15% leave $1,029,276 a year: 9,935 services. Toyota Spokane has the most at $225,288.</a:t>
+            </a:r>
+            <a:endParaRPr lang="en-US" sz="1550" dirty="0"/>
           </a:p>
         </p:txBody>
       </p:sp>
@@ -13431,7 +13431,7 @@
         <p:spPr>
           <a:xfrm>
             <a:off x="457200" y="1207008"/>
-            <a:ext cx="11274552" cy="4645152"/>
+            <a:ext cx="11274552" cy="4782312"/>
           </a:xfrm>
           <a:prstGeom prst="rect">
             <a:avLst/>
@@ -13685,7 +13685,7 @@
         <p:spPr>
           <a:xfrm>
             <a:off x="658368" y="1700784"/>
-            <a:ext cx="1938528" cy="268224"/>
+            <a:ext cx="1938528" cy="281635"/>
           </a:xfrm>
           <a:prstGeom prst="rect">
             <a:avLst/>
@@ -13723,8 +13723,8 @@
         </p:nvSpPr>
         <p:spPr>
           <a:xfrm>
-            <a:off x="2670048" y="1761134"/>
-            <a:ext cx="804672" cy="147523"/>
+            <a:off x="2670048" y="1764152"/>
+            <a:ext cx="804672" cy="154899"/>
           </a:xfrm>
           <a:prstGeom prst="rect">
             <a:avLst/>
@@ -13744,7 +13744,7 @@
         <p:spPr>
           <a:xfrm>
             <a:off x="3529584" y="1700784"/>
-            <a:ext cx="896112" cy="268224"/>
+            <a:ext cx="896112" cy="281635"/>
           </a:xfrm>
           <a:prstGeom prst="rect">
             <a:avLst/>
@@ -13783,7 +13783,7 @@
         <p:spPr>
           <a:xfrm>
             <a:off x="4425696" y="1700784"/>
-            <a:ext cx="566928" cy="268224"/>
+            <a:ext cx="566928" cy="281635"/>
           </a:xfrm>
           <a:prstGeom prst="rect">
             <a:avLst/>
@@ -13822,7 +13822,7 @@
         <p:spPr>
           <a:xfrm>
             <a:off x="4992624" y="1700784"/>
-            <a:ext cx="877824" cy="268224"/>
+            <a:ext cx="877824" cy="281635"/>
           </a:xfrm>
           <a:prstGeom prst="rect">
             <a:avLst/>
@@ -13860,8 +13860,8 @@
         </p:nvSpPr>
         <p:spPr>
           <a:xfrm>
-            <a:off x="658368" y="1969008"/>
-            <a:ext cx="1938528" cy="268224"/>
+            <a:off x="658368" y="1982419"/>
+            <a:ext cx="1938528" cy="281635"/>
           </a:xfrm>
           <a:prstGeom prst="rect">
             <a:avLst/>
@@ -13899,8 +13899,8 @@
         </p:nvSpPr>
         <p:spPr>
           <a:xfrm>
-            <a:off x="2670048" y="2029358"/>
-            <a:ext cx="659813" cy="147523"/>
+            <a:off x="2670048" y="2045787"/>
+            <a:ext cx="659813" cy="154899"/>
           </a:xfrm>
           <a:prstGeom prst="rect">
             <a:avLst/>
@@ -13919,8 +13919,8 @@
         </p:nvSpPr>
         <p:spPr>
           <a:xfrm>
-            <a:off x="3529584" y="1969008"/>
-            <a:ext cx="896112" cy="268224"/>
+            <a:off x="3529584" y="1982419"/>
+            <a:ext cx="896112" cy="281635"/>
           </a:xfrm>
           <a:prstGeom prst="rect">
             <a:avLst/>
@@ -13958,8 +13958,8 @@
         </p:nvSpPr>
         <p:spPr>
           <a:xfrm>
-            <a:off x="4425696" y="1969008"/>
-            <a:ext cx="566928" cy="268224"/>
+            <a:off x="4425696" y="1982419"/>
+            <a:ext cx="566928" cy="281635"/>
           </a:xfrm>
           <a:prstGeom prst="rect">
             <a:avLst/>
@@ -13997,8 +13997,8 @@
         </p:nvSpPr>
         <p:spPr>
           <a:xfrm>
-            <a:off x="4992624" y="1969008"/>
-            <a:ext cx="877824" cy="268224"/>
+            <a:off x="4992624" y="1982419"/>
+            <a:ext cx="877824" cy="281635"/>
           </a:xfrm>
           <a:prstGeom prst="rect">
             <a:avLst/>
@@ -14036,8 +14036,8 @@
         </p:nvSpPr>
         <p:spPr>
           <a:xfrm>
-            <a:off x="658368" y="2237232"/>
-            <a:ext cx="1938528" cy="268224"/>
+            <a:off x="658368" y="2264054"/>
+            <a:ext cx="1938528" cy="281635"/>
           </a:xfrm>
           <a:prstGeom prst="rect">
             <a:avLst/>
@@ -14075,8 +14075,8 @@
         </p:nvSpPr>
         <p:spPr>
           <a:xfrm>
-            <a:off x="2670048" y="2297582"/>
-            <a:ext cx="592487" cy="147523"/>
+            <a:off x="2670048" y="2327422"/>
+            <a:ext cx="592487" cy="154899"/>
           </a:xfrm>
           <a:prstGeom prst="rect">
             <a:avLst/>
@@ -14095,8 +14095,8 @@
         </p:nvSpPr>
         <p:spPr>
           <a:xfrm>
-            <a:off x="3529584" y="2237232"/>
-            <a:ext cx="896112" cy="268224"/>
+            <a:off x="3529584" y="2264054"/>
+            <a:ext cx="896112" cy="281635"/>
           </a:xfrm>
           <a:prstGeom prst="rect">
             <a:avLst/>
@@ -14134,8 +14134,8 @@
         </p:nvSpPr>
         <p:spPr>
           <a:xfrm>
-            <a:off x="4425696" y="2237232"/>
-            <a:ext cx="566928" cy="268224"/>
+            <a:off x="4425696" y="2264054"/>
+            <a:ext cx="566928" cy="281635"/>
           </a:xfrm>
           <a:prstGeom prst="rect">
             <a:avLst/>
@@ -14173,8 +14173,8 @@
         </p:nvSpPr>
         <p:spPr>
           <a:xfrm>
-            <a:off x="4992624" y="2237232"/>
-            <a:ext cx="877824" cy="268224"/>
+            <a:off x="4992624" y="2264054"/>
+            <a:ext cx="877824" cy="281635"/>
           </a:xfrm>
           <a:prstGeom prst="rect">
             <a:avLst/>
@@ -14212,8 +14212,8 @@
         </p:nvSpPr>
         <p:spPr>
           <a:xfrm>
-            <a:off x="658368" y="2505456"/>
-            <a:ext cx="1938528" cy="268224"/>
+            <a:off x="658368" y="2545690"/>
+            <a:ext cx="1938528" cy="281635"/>
           </a:xfrm>
           <a:prstGeom prst="rect">
             <a:avLst/>
@@ -14251,8 +14251,8 @@
         </p:nvSpPr>
         <p:spPr>
           <a:xfrm>
-            <a:off x="2670048" y="2565806"/>
-            <a:ext cx="559295" cy="147523"/>
+            <a:off x="2670048" y="2609058"/>
+            <a:ext cx="559295" cy="154899"/>
           </a:xfrm>
           <a:prstGeom prst="rect">
             <a:avLst/>
@@ -14271,8 +14271,8 @@
         </p:nvSpPr>
         <p:spPr>
           <a:xfrm>
-            <a:off x="3529584" y="2505456"/>
-            <a:ext cx="896112" cy="268224"/>
+            <a:off x="3529584" y="2545690"/>
+            <a:ext cx="896112" cy="281635"/>
           </a:xfrm>
           <a:prstGeom prst="rect">
             <a:avLst/>
@@ -14310,8 +14310,8 @@
         </p:nvSpPr>
         <p:spPr>
           <a:xfrm>
-            <a:off x="4425696" y="2505456"/>
-            <a:ext cx="566928" cy="268224"/>
+            <a:off x="4425696" y="2545690"/>
+            <a:ext cx="566928" cy="281635"/>
           </a:xfrm>
           <a:prstGeom prst="rect">
             <a:avLst/>
@@ -14349,8 +14349,8 @@
         </p:nvSpPr>
         <p:spPr>
           <a:xfrm>
-            <a:off x="4992624" y="2505456"/>
-            <a:ext cx="877824" cy="268224"/>
+            <a:off x="4992624" y="2545690"/>
+            <a:ext cx="877824" cy="281635"/>
           </a:xfrm>
           <a:prstGeom prst="rect">
             <a:avLst/>
@@ -14388,8 +14388,8 @@
         </p:nvSpPr>
         <p:spPr>
           <a:xfrm>
-            <a:off x="658368" y="2773680"/>
-            <a:ext cx="1938528" cy="268224"/>
+            <a:off x="658368" y="2827325"/>
+            <a:ext cx="1938528" cy="281635"/>
           </a:xfrm>
           <a:prstGeom prst="rect">
             <a:avLst/>
@@ -14427,8 +14427,8 @@
         </p:nvSpPr>
         <p:spPr>
           <a:xfrm>
-            <a:off x="2670048" y="2834030"/>
-            <a:ext cx="488325" cy="147523"/>
+            <a:off x="2670048" y="2890693"/>
+            <a:ext cx="488325" cy="154899"/>
           </a:xfrm>
           <a:prstGeom prst="rect">
             <a:avLst/>
@@ -14447,8 +14447,8 @@
         </p:nvSpPr>
         <p:spPr>
           <a:xfrm>
-            <a:off x="3529584" y="2773680"/>
-            <a:ext cx="896112" cy="268224"/>
+            <a:off x="3529584" y="2827325"/>
+            <a:ext cx="896112" cy="281635"/>
           </a:xfrm>
           <a:prstGeom prst="rect">
             <a:avLst/>
@@ -14486,8 +14486,8 @@
         </p:nvSpPr>
         <p:spPr>
           <a:xfrm>
-            <a:off x="4425696" y="2773680"/>
-            <a:ext cx="566928" cy="268224"/>
+            <a:off x="4425696" y="2827325"/>
+            <a:ext cx="566928" cy="281635"/>
           </a:xfrm>
           <a:prstGeom prst="rect">
             <a:avLst/>
@@ -14525,8 +14525,8 @@
         </p:nvSpPr>
         <p:spPr>
           <a:xfrm>
-            <a:off x="4992624" y="2773680"/>
-            <a:ext cx="877824" cy="268224"/>
+            <a:off x="4992624" y="2827325"/>
+            <a:ext cx="877824" cy="281635"/>
           </a:xfrm>
           <a:prstGeom prst="rect">
             <a:avLst/>
@@ -14564,8 +14564,8 @@
         </p:nvSpPr>
         <p:spPr>
           <a:xfrm>
-            <a:off x="658368" y="3041904"/>
-            <a:ext cx="1938528" cy="268224"/>
+            <a:off x="658368" y="3108960"/>
+            <a:ext cx="1938528" cy="281635"/>
           </a:xfrm>
           <a:prstGeom prst="rect">
             <a:avLst/>
@@ -14603,8 +14603,8 @@
         </p:nvSpPr>
         <p:spPr>
           <a:xfrm>
-            <a:off x="2670048" y="3102254"/>
-            <a:ext cx="475963" cy="147523"/>
+            <a:off x="2670048" y="3172328"/>
+            <a:ext cx="475963" cy="154899"/>
           </a:xfrm>
           <a:prstGeom prst="rect">
             <a:avLst/>
@@ -14623,8 +14623,8 @@
         </p:nvSpPr>
         <p:spPr>
           <a:xfrm>
-            <a:off x="3529584" y="3041904"/>
-            <a:ext cx="896112" cy="268224"/>
+            <a:off x="3529584" y="3108960"/>
+            <a:ext cx="896112" cy="281635"/>
           </a:xfrm>
           <a:prstGeom prst="rect">
             <a:avLst/>
@@ -14662,8 +14662,8 @@
         </p:nvSpPr>
         <p:spPr>
           <a:xfrm>
-            <a:off x="4425696" y="3041904"/>
-            <a:ext cx="566928" cy="268224"/>
+            <a:off x="4425696" y="3108960"/>
+            <a:ext cx="566928" cy="281635"/>
           </a:xfrm>
           <a:prstGeom prst="rect">
             <a:avLst/>
@@ -14701,8 +14701,8 @@
         </p:nvSpPr>
         <p:spPr>
           <a:xfrm>
-            <a:off x="4992624" y="3041904"/>
-            <a:ext cx="877824" cy="268224"/>
+            <a:off x="4992624" y="3108960"/>
+            <a:ext cx="877824" cy="281635"/>
           </a:xfrm>
           <a:prstGeom prst="rect">
             <a:avLst/>
@@ -14740,8 +14740,8 @@
         </p:nvSpPr>
         <p:spPr>
           <a:xfrm>
-            <a:off x="658368" y="3310128"/>
-            <a:ext cx="1938528" cy="268224"/>
+            <a:off x="658368" y="3390595"/>
+            <a:ext cx="1938528" cy="281635"/>
           </a:xfrm>
           <a:prstGeom prst="rect">
             <a:avLst/>
@@ -14779,8 +14779,8 @@
         </p:nvSpPr>
         <p:spPr>
           <a:xfrm>
-            <a:off x="2670048" y="3370478"/>
-            <a:ext cx="358495" cy="147523"/>
+            <a:off x="2670048" y="3453963"/>
+            <a:ext cx="358495" cy="154899"/>
           </a:xfrm>
           <a:prstGeom prst="rect">
             <a:avLst/>
@@ -14799,8 +14799,8 @@
         </p:nvSpPr>
         <p:spPr>
           <a:xfrm>
-            <a:off x="3529584" y="3310128"/>
-            <a:ext cx="896112" cy="268224"/>
+            <a:off x="3529584" y="3390595"/>
+            <a:ext cx="896112" cy="281635"/>
           </a:xfrm>
           <a:prstGeom prst="rect">
             <a:avLst/>
@@ -14838,8 +14838,8 @@
         </p:nvSpPr>
         <p:spPr>
           <a:xfrm>
-            <a:off x="4425696" y="3310128"/>
-            <a:ext cx="566928" cy="268224"/>
+            <a:off x="4425696" y="3390595"/>
+            <a:ext cx="566928" cy="281635"/>
           </a:xfrm>
           <a:prstGeom prst="rect">
             <a:avLst/>
@@ -14877,8 +14877,8 @@
         </p:nvSpPr>
         <p:spPr>
           <a:xfrm>
-            <a:off x="4992624" y="3310128"/>
-            <a:ext cx="877824" cy="268224"/>
+            <a:off x="4992624" y="3390595"/>
+            <a:ext cx="877824" cy="281635"/>
           </a:xfrm>
           <a:prstGeom prst="rect">
             <a:avLst/>
@@ -14916,8 +14916,8 @@
         </p:nvSpPr>
         <p:spPr>
           <a:xfrm>
-            <a:off x="658368" y="3578352"/>
-            <a:ext cx="1938528" cy="268224"/>
+            <a:off x="658368" y="3672230"/>
+            <a:ext cx="1938528" cy="281635"/>
           </a:xfrm>
           <a:prstGeom prst="rect">
             <a:avLst/>
@@ -14955,8 +14955,8 @@
         </p:nvSpPr>
         <p:spPr>
           <a:xfrm>
-            <a:off x="2670048" y="3638702"/>
-            <a:ext cx="343305" cy="147523"/>
+            <a:off x="2670048" y="3735598"/>
+            <a:ext cx="343305" cy="154899"/>
           </a:xfrm>
           <a:prstGeom prst="rect">
             <a:avLst/>
@@ -14975,8 +14975,8 @@
         </p:nvSpPr>
         <p:spPr>
           <a:xfrm>
-            <a:off x="3529584" y="3578352"/>
-            <a:ext cx="896112" cy="268224"/>
+            <a:off x="3529584" y="3672230"/>
+            <a:ext cx="896112" cy="281635"/>
           </a:xfrm>
           <a:prstGeom prst="rect">
             <a:avLst/>
@@ -15014,8 +15014,8 @@
         </p:nvSpPr>
         <p:spPr>
           <a:xfrm>
-            <a:off x="4425696" y="3578352"/>
-            <a:ext cx="566928" cy="268224"/>
+            <a:off x="4425696" y="3672230"/>
+            <a:ext cx="566928" cy="281635"/>
           </a:xfrm>
           <a:prstGeom prst="rect">
             <a:avLst/>
@@ -15053,8 +15053,8 @@
         </p:nvSpPr>
         <p:spPr>
           <a:xfrm>
-            <a:off x="4992624" y="3578352"/>
-            <a:ext cx="877824" cy="268224"/>
+            <a:off x="4992624" y="3672230"/>
+            <a:ext cx="877824" cy="281635"/>
           </a:xfrm>
           <a:prstGeom prst="rect">
             <a:avLst/>
@@ -15092,8 +15092,8 @@
         </p:nvSpPr>
         <p:spPr>
           <a:xfrm>
-            <a:off x="658368" y="3846576"/>
-            <a:ext cx="1938528" cy="268224"/>
+            <a:off x="658368" y="3953866"/>
+            <a:ext cx="1938528" cy="281635"/>
           </a:xfrm>
           <a:prstGeom prst="rect">
             <a:avLst/>
@@ -15131,8 +15131,8 @@
         </p:nvSpPr>
         <p:spPr>
           <a:xfrm>
-            <a:off x="2670048" y="3906926"/>
-            <a:ext cx="328186" cy="147523"/>
+            <a:off x="2670048" y="4017234"/>
+            <a:ext cx="328186" cy="154899"/>
           </a:xfrm>
           <a:prstGeom prst="rect">
             <a:avLst/>
@@ -15151,8 +15151,8 @@
         </p:nvSpPr>
         <p:spPr>
           <a:xfrm>
-            <a:off x="3529584" y="3846576"/>
-            <a:ext cx="896112" cy="268224"/>
+            <a:off x="3529584" y="3953866"/>
+            <a:ext cx="896112" cy="281635"/>
           </a:xfrm>
           <a:prstGeom prst="rect">
             <a:avLst/>
@@ -15190,8 +15190,8 @@
         </p:nvSpPr>
         <p:spPr>
           <a:xfrm>
-            <a:off x="4425696" y="3846576"/>
-            <a:ext cx="566928" cy="268224"/>
+            <a:off x="4425696" y="3953866"/>
+            <a:ext cx="566928" cy="281635"/>
           </a:xfrm>
           <a:prstGeom prst="rect">
             <a:avLst/>
@@ -15229,8 +15229,8 @@
         </p:nvSpPr>
         <p:spPr>
           <a:xfrm>
-            <a:off x="4992624" y="3846576"/>
-            <a:ext cx="877824" cy="268224"/>
+            <a:off x="4992624" y="3953866"/>
+            <a:ext cx="877824" cy="281635"/>
           </a:xfrm>
           <a:prstGeom prst="rect">
             <a:avLst/>
@@ -15268,8 +15268,8 @@
         </p:nvSpPr>
         <p:spPr>
           <a:xfrm>
-            <a:off x="658368" y="4114800"/>
-            <a:ext cx="1938528" cy="268224"/>
+            <a:off x="658368" y="4235501"/>
+            <a:ext cx="1938528" cy="281635"/>
           </a:xfrm>
           <a:prstGeom prst="rect">
             <a:avLst/>
@@ -15307,8 +15307,8 @@
         </p:nvSpPr>
         <p:spPr>
           <a:xfrm>
-            <a:off x="2670048" y="4175150"/>
-            <a:ext cx="321360" cy="147523"/>
+            <a:off x="2670048" y="4298869"/>
+            <a:ext cx="321360" cy="154899"/>
           </a:xfrm>
           <a:prstGeom prst="rect">
             <a:avLst/>
@@ -15327,8 +15327,8 @@
         </p:nvSpPr>
         <p:spPr>
           <a:xfrm>
-            <a:off x="3529584" y="4114800"/>
-            <a:ext cx="896112" cy="268224"/>
+            <a:off x="3529584" y="4235501"/>
+            <a:ext cx="896112" cy="281635"/>
           </a:xfrm>
           <a:prstGeom prst="rect">
             <a:avLst/>
@@ -15366,8 +15366,8 @@
         </p:nvSpPr>
         <p:spPr>
           <a:xfrm>
-            <a:off x="4425696" y="4114800"/>
-            <a:ext cx="566928" cy="268224"/>
+            <a:off x="4425696" y="4235501"/>
+            <a:ext cx="566928" cy="281635"/>
           </a:xfrm>
           <a:prstGeom prst="rect">
             <a:avLst/>
@@ -15405,8 +15405,8 @@
         </p:nvSpPr>
         <p:spPr>
           <a:xfrm>
-            <a:off x="4992624" y="4114800"/>
-            <a:ext cx="877824" cy="268224"/>
+            <a:off x="4992624" y="4235501"/>
+            <a:ext cx="877824" cy="281635"/>
           </a:xfrm>
           <a:prstGeom prst="rect">
             <a:avLst/>
@@ -15444,8 +15444,8 @@
         </p:nvSpPr>
         <p:spPr>
           <a:xfrm>
-            <a:off x="658368" y="4383024"/>
-            <a:ext cx="1938528" cy="268224"/>
+            <a:off x="658368" y="4517136"/>
+            <a:ext cx="1938528" cy="281635"/>
           </a:xfrm>
           <a:prstGeom prst="rect">
             <a:avLst/>
@@ -15483,8 +15483,8 @@
         </p:nvSpPr>
         <p:spPr>
           <a:xfrm>
-            <a:off x="2670048" y="4443374"/>
-            <a:ext cx="303740" cy="147523"/>
+            <a:off x="2670048" y="4580504"/>
+            <a:ext cx="303740" cy="154899"/>
           </a:xfrm>
           <a:prstGeom prst="rect">
             <a:avLst/>
@@ -15503,8 +15503,8 @@
         </p:nvSpPr>
         <p:spPr>
           <a:xfrm>
-            <a:off x="3529584" y="4383024"/>
-            <a:ext cx="896112" cy="268224"/>
+            <a:off x="3529584" y="4517136"/>
+            <a:ext cx="896112" cy="281635"/>
           </a:xfrm>
           <a:prstGeom prst="rect">
             <a:avLst/>
@@ -15542,8 +15542,8 @@
         </p:nvSpPr>
         <p:spPr>
           <a:xfrm>
-            <a:off x="4425696" y="4383024"/>
-            <a:ext cx="566928" cy="268224"/>
+            <a:off x="4425696" y="4517136"/>
+            <a:ext cx="566928" cy="281635"/>
           </a:xfrm>
           <a:prstGeom prst="rect">
             <a:avLst/>
@@ -15581,8 +15581,8 @@
         </p:nvSpPr>
         <p:spPr>
           <a:xfrm>
-            <a:off x="4992624" y="4383024"/>
-            <a:ext cx="877824" cy="268224"/>
+            <a:off x="4992624" y="4517136"/>
+            <a:ext cx="877824" cy="281635"/>
           </a:xfrm>
           <a:prstGeom prst="rect">
             <a:avLst/>
@@ -15620,8 +15620,8 @@
         </p:nvSpPr>
         <p:spPr>
           <a:xfrm>
-            <a:off x="658368" y="4651248"/>
-            <a:ext cx="1938528" cy="268224"/>
+            <a:off x="658368" y="4798771"/>
+            <a:ext cx="1938528" cy="281635"/>
           </a:xfrm>
           <a:prstGeom prst="rect">
             <a:avLst/>
@@ -15659,8 +15659,8 @@
         </p:nvSpPr>
         <p:spPr>
           <a:xfrm>
-            <a:off x="2670048" y="4711598"/>
-            <a:ext cx="303633" cy="147523"/>
+            <a:off x="2670048" y="4862139"/>
+            <a:ext cx="303633" cy="154899"/>
           </a:xfrm>
           <a:prstGeom prst="rect">
             <a:avLst/>
@@ -15679,8 +15679,8 @@
         </p:nvSpPr>
         <p:spPr>
           <a:xfrm>
-            <a:off x="3529584" y="4651248"/>
-            <a:ext cx="896112" cy="268224"/>
+            <a:off x="3529584" y="4798771"/>
+            <a:ext cx="896112" cy="281635"/>
           </a:xfrm>
           <a:prstGeom prst="rect">
             <a:avLst/>
@@ -15718,8 +15718,8 @@
         </p:nvSpPr>
         <p:spPr>
           <a:xfrm>
-            <a:off x="4425696" y="4651248"/>
-            <a:ext cx="566928" cy="268224"/>
+            <a:off x="4425696" y="4798771"/>
+            <a:ext cx="566928" cy="281635"/>
           </a:xfrm>
           <a:prstGeom prst="rect">
             <a:avLst/>
@@ -15757,8 +15757,8 @@
         </p:nvSpPr>
         <p:spPr>
           <a:xfrm>
-            <a:off x="4992624" y="4651248"/>
-            <a:ext cx="877824" cy="268224"/>
+            <a:off x="4992624" y="4798771"/>
+            <a:ext cx="877824" cy="281635"/>
           </a:xfrm>
           <a:prstGeom prst="rect">
             <a:avLst/>
@@ -15796,8 +15796,8 @@
         </p:nvSpPr>
         <p:spPr>
           <a:xfrm>
-            <a:off x="658368" y="4919472"/>
-            <a:ext cx="1938528" cy="268224"/>
+            <a:off x="658368" y="5080406"/>
+            <a:ext cx="1938528" cy="281635"/>
           </a:xfrm>
           <a:prstGeom prst="rect">
             <a:avLst/>
@@ -15835,8 +15835,8 @@
         </p:nvSpPr>
         <p:spPr>
           <a:xfrm>
-            <a:off x="2670048" y="4979822"/>
-            <a:ext cx="251992" cy="147523"/>
+            <a:off x="2670048" y="5143774"/>
+            <a:ext cx="251992" cy="154899"/>
           </a:xfrm>
           <a:prstGeom prst="rect">
             <a:avLst/>
@@ -15855,8 +15855,8 @@
         </p:nvSpPr>
         <p:spPr>
           <a:xfrm>
-            <a:off x="3529584" y="4919472"/>
-            <a:ext cx="896112" cy="268224"/>
+            <a:off x="3529584" y="5080406"/>
+            <a:ext cx="896112" cy="281635"/>
           </a:xfrm>
           <a:prstGeom prst="rect">
             <a:avLst/>
@@ -15894,8 +15894,8 @@
         </p:nvSpPr>
         <p:spPr>
           <a:xfrm>
-            <a:off x="4425696" y="4919472"/>
-            <a:ext cx="566928" cy="268224"/>
+            <a:off x="4425696" y="5080406"/>
+            <a:ext cx="566928" cy="281635"/>
           </a:xfrm>
           <a:prstGeom prst="rect">
             <a:avLst/>
@@ -15933,8 +15933,8 @@
         </p:nvSpPr>
         <p:spPr>
           <a:xfrm>
-            <a:off x="4992624" y="4919472"/>
-            <a:ext cx="877824" cy="268224"/>
+            <a:off x="4992624" y="5080406"/>
+            <a:ext cx="877824" cy="281635"/>
           </a:xfrm>
           <a:prstGeom prst="rect">
             <a:avLst/>
@@ -15972,8 +15972,8 @@
         </p:nvSpPr>
         <p:spPr>
           <a:xfrm>
-            <a:off x="658368" y="5187696"/>
-            <a:ext cx="1938528" cy="268224"/>
+            <a:off x="658368" y="5362042"/>
+            <a:ext cx="1938528" cy="281635"/>
           </a:xfrm>
           <a:prstGeom prst="rect">
             <a:avLst/>
@@ -16011,8 +16011,8 @@
         </p:nvSpPr>
         <p:spPr>
           <a:xfrm>
-            <a:off x="2670048" y="5248046"/>
-            <a:ext cx="232442" cy="147523"/>
+            <a:off x="2670048" y="5425410"/>
+            <a:ext cx="232442" cy="154899"/>
           </a:xfrm>
           <a:prstGeom prst="rect">
             <a:avLst/>
@@ -16031,8 +16031,8 @@
         </p:nvSpPr>
         <p:spPr>
           <a:xfrm>
-            <a:off x="3529584" y="5187696"/>
-            <a:ext cx="896112" cy="268224"/>
+            <a:off x="3529584" y="5362042"/>
+            <a:ext cx="896112" cy="281635"/>
           </a:xfrm>
           <a:prstGeom prst="rect">
             <a:avLst/>
@@ -16070,8 +16070,8 @@
         </p:nvSpPr>
         <p:spPr>
           <a:xfrm>
-            <a:off x="4425696" y="5187696"/>
-            <a:ext cx="566928" cy="268224"/>
+            <a:off x="4425696" y="5362042"/>
+            <a:ext cx="566928" cy="281635"/>
           </a:xfrm>
           <a:prstGeom prst="rect">
             <a:avLst/>
@@ -16109,8 +16109,8 @@
         </p:nvSpPr>
         <p:spPr>
           <a:xfrm>
-            <a:off x="4992624" y="5187696"/>
-            <a:ext cx="877824" cy="268224"/>
+            <a:off x="4992624" y="5362042"/>
+            <a:ext cx="877824" cy="281635"/>
           </a:xfrm>
           <a:prstGeom prst="rect">
             <a:avLst/>
@@ -16148,8 +16148,8 @@
         </p:nvSpPr>
         <p:spPr>
           <a:xfrm>
-            <a:off x="658368" y="5455920"/>
-            <a:ext cx="1938528" cy="268224"/>
+            <a:off x="658368" y="5643677"/>
+            <a:ext cx="1938528" cy="281635"/>
           </a:xfrm>
           <a:prstGeom prst="rect">
             <a:avLst/>
@@ -16187,8 +16187,8 @@
         </p:nvSpPr>
         <p:spPr>
           <a:xfrm>
-            <a:off x="2670048" y="5516270"/>
-            <a:ext cx="231742" cy="147523"/>
+            <a:off x="2670048" y="5707045"/>
+            <a:ext cx="231742" cy="154899"/>
           </a:xfrm>
           <a:prstGeom prst="rect">
             <a:avLst/>
@@ -16207,8 +16207,8 @@
         </p:nvSpPr>
         <p:spPr>
           <a:xfrm>
-            <a:off x="3529584" y="5455920"/>
-            <a:ext cx="896112" cy="268224"/>
+            <a:off x="3529584" y="5643677"/>
+            <a:ext cx="896112" cy="281635"/>
           </a:xfrm>
           <a:prstGeom prst="rect">
             <a:avLst/>
@@ -16246,8 +16246,8 @@
         </p:nvSpPr>
         <p:spPr>
           <a:xfrm>
-            <a:off x="4425696" y="5455920"/>
-            <a:ext cx="566928" cy="268224"/>
+            <a:off x="4425696" y="5643677"/>
+            <a:ext cx="566928" cy="281635"/>
           </a:xfrm>
           <a:prstGeom prst="rect">
             <a:avLst/>
@@ -16285,8 +16285,8 @@
         </p:nvSpPr>
         <p:spPr>
           <a:xfrm>
-            <a:off x="4992624" y="5455920"/>
-            <a:ext cx="877824" cy="268224"/>
+            <a:off x="4992624" y="5643677"/>
+            <a:ext cx="877824" cy="281635"/>
           </a:xfrm>
           <a:prstGeom prst="rect">
             <a:avLst/>
@@ -16325,7 +16325,7 @@
         <p:spPr>
           <a:xfrm>
             <a:off x="6208776" y="1700784"/>
-            <a:ext cx="1938528" cy="268224"/>
+            <a:ext cx="1938528" cy="281635"/>
           </a:xfrm>
           <a:prstGeom prst="rect">
             <a:avLst/>
@@ -16363,8 +16363,8 @@
         </p:nvSpPr>
         <p:spPr>
           <a:xfrm>
-            <a:off x="8220456" y="1761134"/>
-            <a:ext cx="171351" cy="147523"/>
+            <a:off x="8220456" y="1764152"/>
+            <a:ext cx="171351" cy="154899"/>
           </a:xfrm>
           <a:prstGeom prst="rect">
             <a:avLst/>
@@ -16384,7 +16384,7 @@
         <p:spPr>
           <a:xfrm>
             <a:off x="9079992" y="1700784"/>
-            <a:ext cx="896112" cy="268224"/>
+            <a:ext cx="896112" cy="281635"/>
           </a:xfrm>
           <a:prstGeom prst="rect">
             <a:avLst/>
@@ -16423,7 +16423,7 @@
         <p:spPr>
           <a:xfrm>
             <a:off x="9976104" y="1700784"/>
-            <a:ext cx="566928" cy="268224"/>
+            <a:ext cx="566928" cy="281635"/>
           </a:xfrm>
           <a:prstGeom prst="rect">
             <a:avLst/>
@@ -16462,7 +16462,7 @@
         <p:spPr>
           <a:xfrm>
             <a:off x="10543032" y="1700784"/>
-            <a:ext cx="877824" cy="268224"/>
+            <a:ext cx="877824" cy="281635"/>
           </a:xfrm>
           <a:prstGeom prst="rect">
             <a:avLst/>
@@ -16500,8 +16500,8 @@
         </p:nvSpPr>
         <p:spPr>
           <a:xfrm>
-            <a:off x="6208776" y="1969008"/>
-            <a:ext cx="1938528" cy="268224"/>
+            <a:off x="6208776" y="1982419"/>
+            <a:ext cx="1938528" cy="281635"/>
           </a:xfrm>
           <a:prstGeom prst="rect">
             <a:avLst/>
@@ -16539,8 +16539,8 @@
         </p:nvSpPr>
         <p:spPr>
           <a:xfrm>
-            <a:off x="8220456" y="2029358"/>
-            <a:ext cx="159786" cy="147523"/>
+            <a:off x="8220456" y="2045787"/>
+            <a:ext cx="159786" cy="154899"/>
           </a:xfrm>
           <a:prstGeom prst="rect">
             <a:avLst/>
@@ -16559,8 +16559,8 @@
         </p:nvSpPr>
         <p:spPr>
           <a:xfrm>
-            <a:off x="9079992" y="1969008"/>
-            <a:ext cx="896112" cy="268224"/>
+            <a:off x="9079992" y="1982419"/>
+            <a:ext cx="896112" cy="281635"/>
           </a:xfrm>
           <a:prstGeom prst="rect">
             <a:avLst/>
@@ -16598,8 +16598,8 @@
         </p:nvSpPr>
         <p:spPr>
           <a:xfrm>
-            <a:off x="9976104" y="1969008"/>
-            <a:ext cx="566928" cy="268224"/>
+            <a:off x="9976104" y="1982419"/>
+            <a:ext cx="566928" cy="281635"/>
           </a:xfrm>
           <a:prstGeom prst="rect">
             <a:avLst/>
@@ -16637,8 +16637,8 @@
         </p:nvSpPr>
         <p:spPr>
           <a:xfrm>
-            <a:off x="10543032" y="1969008"/>
-            <a:ext cx="877824" cy="268224"/>
+            <a:off x="10543032" y="1982419"/>
+            <a:ext cx="877824" cy="281635"/>
           </a:xfrm>
           <a:prstGeom prst="rect">
             <a:avLst/>
@@ -16676,8 +16676,8 @@
         </p:nvSpPr>
         <p:spPr>
           <a:xfrm>
-            <a:off x="6208776" y="2237232"/>
-            <a:ext cx="1938528" cy="268224"/>
+            <a:off x="6208776" y="2264054"/>
+            <a:ext cx="1938528" cy="281635"/>
           </a:xfrm>
           <a:prstGeom prst="rect">
             <a:avLst/>
@@ -16715,8 +16715,8 @@
         </p:nvSpPr>
         <p:spPr>
           <a:xfrm>
-            <a:off x="8220456" y="2297582"/>
-            <a:ext cx="138080" cy="147523"/>
+            <a:off x="8220456" y="2327422"/>
+            <a:ext cx="138080" cy="154899"/>
           </a:xfrm>
           <a:prstGeom prst="rect">
             <a:avLst/>
@@ -16735,8 +16735,8 @@
         </p:nvSpPr>
         <p:spPr>
           <a:xfrm>
-            <a:off x="9079992" y="2237232"/>
-            <a:ext cx="896112" cy="268224"/>
+            <a:off x="9079992" y="2264054"/>
+            <a:ext cx="896112" cy="281635"/>
           </a:xfrm>
           <a:prstGeom prst="rect">
             <a:avLst/>
@@ -16774,8 +16774,8 @@
         </p:nvSpPr>
         <p:spPr>
           <a:xfrm>
-            <a:off x="9976104" y="2237232"/>
-            <a:ext cx="566928" cy="268224"/>
+            <a:off x="9976104" y="2264054"/>
+            <a:ext cx="566928" cy="281635"/>
           </a:xfrm>
           <a:prstGeom prst="rect">
             <a:avLst/>
@@ -16813,8 +16813,8 @@
         </p:nvSpPr>
         <p:spPr>
           <a:xfrm>
-            <a:off x="10543032" y="2237232"/>
-            <a:ext cx="877824" cy="268224"/>
+            <a:off x="10543032" y="2264054"/>
+            <a:ext cx="877824" cy="281635"/>
           </a:xfrm>
           <a:prstGeom prst="rect">
             <a:avLst/>
@@ -16852,8 +16852,8 @@
         </p:nvSpPr>
         <p:spPr>
           <a:xfrm>
-            <a:off x="6208776" y="2505456"/>
-            <a:ext cx="1938528" cy="268224"/>
+            <a:off x="6208776" y="2545690"/>
+            <a:ext cx="1938528" cy="281635"/>
           </a:xfrm>
           <a:prstGeom prst="rect">
             <a:avLst/>
@@ -16891,8 +16891,8 @@
         </p:nvSpPr>
         <p:spPr>
           <a:xfrm>
-            <a:off x="8220456" y="2565806"/>
-            <a:ext cx="124627" cy="147523"/>
+            <a:off x="8220456" y="2609058"/>
+            <a:ext cx="124627" cy="154899"/>
           </a:xfrm>
           <a:prstGeom prst="rect">
             <a:avLst/>
@@ -16911,8 +16911,8 @@
         </p:nvSpPr>
         <p:spPr>
           <a:xfrm>
-            <a:off x="9079992" y="2505456"/>
-            <a:ext cx="896112" cy="268224"/>
+            <a:off x="9079992" y="2545690"/>
+            <a:ext cx="896112" cy="281635"/>
           </a:xfrm>
           <a:prstGeom prst="rect">
             <a:avLst/>
@@ -16950,8 +16950,8 @@
         </p:nvSpPr>
         <p:spPr>
           <a:xfrm>
-            <a:off x="9976104" y="2505456"/>
-            <a:ext cx="566928" cy="268224"/>
+            <a:off x="9976104" y="2545690"/>
+            <a:ext cx="566928" cy="281635"/>
           </a:xfrm>
           <a:prstGeom prst="rect">
             <a:avLst/>
@@ -16989,8 +16989,8 @@
         </p:nvSpPr>
         <p:spPr>
           <a:xfrm>
-            <a:off x="10543032" y="2505456"/>
-            <a:ext cx="877824" cy="268224"/>
+            <a:off x="10543032" y="2545690"/>
+            <a:ext cx="877824" cy="281635"/>
           </a:xfrm>
           <a:prstGeom prst="rect">
             <a:avLst/>
@@ -17028,8 +17028,8 @@
         </p:nvSpPr>
         <p:spPr>
           <a:xfrm>
-            <a:off x="6208776" y="2773680"/>
-            <a:ext cx="1938528" cy="268224"/>
+            <a:off x="6208776" y="2827325"/>
+            <a:ext cx="1938528" cy="281635"/>
           </a:xfrm>
           <a:prstGeom prst="rect">
             <a:avLst/>
@@ -17067,8 +17067,8 @@
         </p:nvSpPr>
         <p:spPr>
           <a:xfrm>
-            <a:off x="8220456" y="2834030"/>
-            <a:ext cx="122580" cy="147523"/>
+            <a:off x="8220456" y="2890693"/>
+            <a:ext cx="122580" cy="154899"/>
           </a:xfrm>
           <a:prstGeom prst="rect">
             <a:avLst/>
@@ -17087,8 +17087,8 @@
         </p:nvSpPr>
         <p:spPr>
           <a:xfrm>
-            <a:off x="9079992" y="2773680"/>
-            <a:ext cx="896112" cy="268224"/>
+            <a:off x="9079992" y="2827325"/>
+            <a:ext cx="896112" cy="281635"/>
           </a:xfrm>
           <a:prstGeom prst="rect">
             <a:avLst/>
@@ -17126,8 +17126,8 @@
         </p:nvSpPr>
         <p:spPr>
           <a:xfrm>
-            <a:off x="9976104" y="2773680"/>
-            <a:ext cx="566928" cy="268224"/>
+            <a:off x="9976104" y="2827325"/>
+            <a:ext cx="566928" cy="281635"/>
           </a:xfrm>
           <a:prstGeom prst="rect">
             <a:avLst/>
@@ -17165,8 +17165,8 @@
         </p:nvSpPr>
         <p:spPr>
           <a:xfrm>
-            <a:off x="10543032" y="2773680"/>
-            <a:ext cx="877824" cy="268224"/>
+            <a:off x="10543032" y="2827325"/>
+            <a:ext cx="877824" cy="281635"/>
           </a:xfrm>
           <a:prstGeom prst="rect">
             <a:avLst/>
@@ -17204,8 +17204,8 @@
         </p:nvSpPr>
         <p:spPr>
           <a:xfrm>
-            <a:off x="6208776" y="3041904"/>
-            <a:ext cx="1938528" cy="268224"/>
+            <a:off x="6208776" y="3108960"/>
+            <a:ext cx="1938528" cy="281635"/>
           </a:xfrm>
           <a:prstGeom prst="rect">
             <a:avLst/>
@@ -17243,8 +17243,8 @@
         </p:nvSpPr>
         <p:spPr>
           <a:xfrm>
-            <a:off x="8220456" y="3102254"/>
-            <a:ext cx="120258" cy="147523"/>
+            <a:off x="8220456" y="3172328"/>
+            <a:ext cx="120258" cy="154899"/>
           </a:xfrm>
           <a:prstGeom prst="rect">
             <a:avLst/>
@@ -17263,8 +17263,8 @@
         </p:nvSpPr>
         <p:spPr>
           <a:xfrm>
-            <a:off x="9079992" y="3041904"/>
-            <a:ext cx="896112" cy="268224"/>
+            <a:off x="9079992" y="3108960"/>
+            <a:ext cx="896112" cy="281635"/>
           </a:xfrm>
           <a:prstGeom prst="rect">
             <a:avLst/>
@@ -17302,8 +17302,8 @@
         </p:nvSpPr>
         <p:spPr>
           <a:xfrm>
-            <a:off x="9976104" y="3041904"/>
-            <a:ext cx="566928" cy="268224"/>
+            <a:off x="9976104" y="3108960"/>
+            <a:ext cx="566928" cy="281635"/>
           </a:xfrm>
           <a:prstGeom prst="rect">
             <a:avLst/>
@@ -17341,8 +17341,8 @@
         </p:nvSpPr>
         <p:spPr>
           <a:xfrm>
-            <a:off x="10543032" y="3041904"/>
-            <a:ext cx="877824" cy="268224"/>
+            <a:off x="10543032" y="3108960"/>
+            <a:ext cx="877824" cy="281635"/>
           </a:xfrm>
           <a:prstGeom prst="rect">
             <a:avLst/>
@@ -17380,8 +17380,8 @@
         </p:nvSpPr>
         <p:spPr>
           <a:xfrm>
-            <a:off x="6208776" y="3310128"/>
-            <a:ext cx="1938528" cy="268224"/>
+            <a:off x="6208776" y="3390595"/>
+            <a:ext cx="1938528" cy="281635"/>
           </a:xfrm>
           <a:prstGeom prst="rect">
             <a:avLst/>
@@ -17419,8 +17419,8 @@
         </p:nvSpPr>
         <p:spPr>
           <a:xfrm>
-            <a:off x="8220456" y="3370478"/>
-            <a:ext cx="93422" cy="147523"/>
+            <a:off x="8220456" y="3453963"/>
+            <a:ext cx="93422" cy="154899"/>
           </a:xfrm>
           <a:prstGeom prst="rect">
             <a:avLst/>
@@ -17439,8 +17439,8 @@
         </p:nvSpPr>
         <p:spPr>
           <a:xfrm>
-            <a:off x="9079992" y="3310128"/>
-            <a:ext cx="896112" cy="268224"/>
+            <a:off x="9079992" y="3390595"/>
+            <a:ext cx="896112" cy="281635"/>
           </a:xfrm>
           <a:prstGeom prst="rect">
             <a:avLst/>
@@ -17478,8 +17478,8 @@
         </p:nvSpPr>
         <p:spPr>
           <a:xfrm>
-            <a:off x="9976104" y="3310128"/>
-            <a:ext cx="566928" cy="268224"/>
+            <a:off x="9976104" y="3390595"/>
+            <a:ext cx="566928" cy="281635"/>
           </a:xfrm>
           <a:prstGeom prst="rect">
             <a:avLst/>
@@ -17517,8 +17517,8 @@
         </p:nvSpPr>
         <p:spPr>
           <a:xfrm>
-            <a:off x="10543032" y="3310128"/>
-            <a:ext cx="877824" cy="268224"/>
+            <a:off x="10543032" y="3390595"/>
+            <a:ext cx="877824" cy="281635"/>
           </a:xfrm>
           <a:prstGeom prst="rect">
             <a:avLst/>
@@ -17556,8 +17556,8 @@
         </p:nvSpPr>
         <p:spPr>
           <a:xfrm>
-            <a:off x="6208776" y="3578352"/>
-            <a:ext cx="1938528" cy="268224"/>
+            <a:off x="6208776" y="3672230"/>
+            <a:ext cx="1938528" cy="281635"/>
           </a:xfrm>
           <a:prstGeom prst="rect">
             <a:avLst/>
@@ -17595,8 +17595,8 @@
         </p:nvSpPr>
         <p:spPr>
           <a:xfrm>
-            <a:off x="8220456" y="3638702"/>
-            <a:ext cx="82255" cy="147523"/>
+            <a:off x="8220456" y="3735598"/>
+            <a:ext cx="82255" cy="154899"/>
           </a:xfrm>
           <a:prstGeom prst="rect">
             <a:avLst/>
@@ -17615,8 +17615,8 @@
         </p:nvSpPr>
         <p:spPr>
           <a:xfrm>
-            <a:off x="9079992" y="3578352"/>
-            <a:ext cx="896112" cy="268224"/>
+            <a:off x="9079992" y="3672230"/>
+            <a:ext cx="896112" cy="281635"/>
           </a:xfrm>
           <a:prstGeom prst="rect">
             <a:avLst/>
@@ -17654,8 +17654,8 @@
         </p:nvSpPr>
         <p:spPr>
           <a:xfrm>
-            <a:off x="9976104" y="3578352"/>
-            <a:ext cx="566928" cy="268224"/>
+            <a:off x="9976104" y="3672230"/>
+            <a:ext cx="566928" cy="281635"/>
           </a:xfrm>
           <a:prstGeom prst="rect">
             <a:avLst/>
@@ -17693,8 +17693,8 @@
         </p:nvSpPr>
         <p:spPr>
           <a:xfrm>
-            <a:off x="10543032" y="3578352"/>
-            <a:ext cx="877824" cy="268224"/>
+            <a:off x="10543032" y="3672230"/>
+            <a:ext cx="877824" cy="281635"/>
           </a:xfrm>
           <a:prstGeom prst="rect">
             <a:avLst/>
@@ -17732,8 +17732,8 @@
         </p:nvSpPr>
         <p:spPr>
           <a:xfrm>
-            <a:off x="6208776" y="3846576"/>
-            <a:ext cx="1938528" cy="268224"/>
+            <a:off x="6208776" y="3953866"/>
+            <a:ext cx="1938528" cy="281635"/>
           </a:xfrm>
           <a:prstGeom prst="rect">
             <a:avLst/>
@@ -17771,8 +17771,8 @@
         </p:nvSpPr>
         <p:spPr>
           <a:xfrm>
-            <a:off x="8220456" y="3906926"/>
-            <a:ext cx="63920" cy="147523"/>
+            <a:off x="8220456" y="4017234"/>
+            <a:ext cx="63920" cy="154899"/>
           </a:xfrm>
           <a:prstGeom prst="rect">
             <a:avLst/>
@@ -17791,8 +17791,8 @@
         </p:nvSpPr>
         <p:spPr>
           <a:xfrm>
-            <a:off x="9079992" y="3846576"/>
-            <a:ext cx="896112" cy="268224"/>
+            <a:off x="9079992" y="3953866"/>
+            <a:ext cx="896112" cy="281635"/>
           </a:xfrm>
           <a:prstGeom prst="rect">
             <a:avLst/>
@@ -17830,8 +17830,8 @@
         </p:nvSpPr>
         <p:spPr>
           <a:xfrm>
-            <a:off x="9976104" y="3846576"/>
-            <a:ext cx="566928" cy="268224"/>
+            <a:off x="9976104" y="3953866"/>
+            <a:ext cx="566928" cy="281635"/>
           </a:xfrm>
           <a:prstGeom prst="rect">
             <a:avLst/>
@@ -17869,8 +17869,8 @@
         </p:nvSpPr>
         <p:spPr>
           <a:xfrm>
-            <a:off x="10543032" y="3846576"/>
-            <a:ext cx="877824" cy="268224"/>
+            <a:off x="10543032" y="3953866"/>
+            <a:ext cx="877824" cy="281635"/>
           </a:xfrm>
           <a:prstGeom prst="rect">
             <a:avLst/>
@@ -17908,8 +17908,8 @@
         </p:nvSpPr>
         <p:spPr>
           <a:xfrm>
-            <a:off x="6208776" y="4114800"/>
-            <a:ext cx="1938528" cy="268224"/>
+            <a:off x="6208776" y="4235501"/>
+            <a:ext cx="1938528" cy="281635"/>
           </a:xfrm>
           <a:prstGeom prst="rect">
             <a:avLst/>
@@ -17947,8 +17947,8 @@
         </p:nvSpPr>
         <p:spPr>
           <a:xfrm>
-            <a:off x="8220456" y="4175150"/>
-            <a:ext cx="48675" cy="147523"/>
+            <a:off x="8220456" y="4298869"/>
+            <a:ext cx="48675" cy="154899"/>
           </a:xfrm>
           <a:prstGeom prst="rect">
             <a:avLst/>
@@ -17967,8 +17967,8 @@
         </p:nvSpPr>
         <p:spPr>
           <a:xfrm>
-            <a:off x="9079992" y="4114800"/>
-            <a:ext cx="896112" cy="268224"/>
+            <a:off x="9079992" y="4235501"/>
+            <a:ext cx="896112" cy="281635"/>
           </a:xfrm>
           <a:prstGeom prst="rect">
             <a:avLst/>
@@ -18006,8 +18006,8 @@
         </p:nvSpPr>
         <p:spPr>
           <a:xfrm>
-            <a:off x="9976104" y="4114800"/>
-            <a:ext cx="566928" cy="268224"/>
+            <a:off x="9976104" y="4235501"/>
+            <a:ext cx="566928" cy="281635"/>
           </a:xfrm>
           <a:prstGeom prst="rect">
             <a:avLst/>
@@ -18045,8 +18045,8 @@
         </p:nvSpPr>
         <p:spPr>
           <a:xfrm>
-            <a:off x="10543032" y="4114800"/>
-            <a:ext cx="877824" cy="268224"/>
+            <a:off x="10543032" y="4235501"/>
+            <a:ext cx="877824" cy="281635"/>
           </a:xfrm>
           <a:prstGeom prst="rect">
             <a:avLst/>
@@ -18084,8 +18084,8 @@
         </p:nvSpPr>
         <p:spPr>
           <a:xfrm>
-            <a:off x="6208776" y="4383024"/>
-            <a:ext cx="1938528" cy="268224"/>
+            <a:off x="6208776" y="4517136"/>
+            <a:ext cx="1938528" cy="281635"/>
           </a:xfrm>
           <a:prstGeom prst="rect">
             <a:avLst/>
@@ -18123,8 +18123,8 @@
         </p:nvSpPr>
         <p:spPr>
           <a:xfrm>
-            <a:off x="8220456" y="4443374"/>
-            <a:ext cx="33634" cy="147523"/>
+            <a:off x="8220456" y="4580504"/>
+            <a:ext cx="33634" cy="154899"/>
           </a:xfrm>
           <a:prstGeom prst="rect">
             <a:avLst/>
@@ -18143,8 +18143,8 @@
         </p:nvSpPr>
         <p:spPr>
           <a:xfrm>
-            <a:off x="9079992" y="4383024"/>
-            <a:ext cx="896112" cy="268224"/>
+            <a:off x="9079992" y="4517136"/>
+            <a:ext cx="896112" cy="281635"/>
           </a:xfrm>
           <a:prstGeom prst="rect">
             <a:avLst/>
@@ -18182,8 +18182,8 @@
         </p:nvSpPr>
         <p:spPr>
           <a:xfrm>
-            <a:off x="9976104" y="4383024"/>
-            <a:ext cx="566928" cy="268224"/>
+            <a:off x="9976104" y="4517136"/>
+            <a:ext cx="566928" cy="281635"/>
           </a:xfrm>
           <a:prstGeom prst="rect">
             <a:avLst/>
@@ -18221,8 +18221,8 @@
         </p:nvSpPr>
         <p:spPr>
           <a:xfrm>
-            <a:off x="10543032" y="4383024"/>
-            <a:ext cx="877824" cy="268224"/>
+            <a:off x="10543032" y="4517136"/>
+            <a:ext cx="877824" cy="281635"/>
           </a:xfrm>
           <a:prstGeom prst="rect">
             <a:avLst/>
@@ -18260,8 +18260,8 @@
         </p:nvSpPr>
         <p:spPr>
           <a:xfrm>
-            <a:off x="6208776" y="4651248"/>
-            <a:ext cx="1938528" cy="268224"/>
+            <a:off x="6208776" y="4798771"/>
+            <a:ext cx="1938528" cy="281635"/>
           </a:xfrm>
           <a:prstGeom prst="rect">
             <a:avLst/>
@@ -18299,8 +18299,8 @@
         </p:nvSpPr>
         <p:spPr>
           <a:xfrm>
-            <a:off x="8220456" y="4711598"/>
-            <a:ext cx="26275" cy="147523"/>
+            <a:off x="8220456" y="4862139"/>
+            <a:ext cx="26275" cy="154899"/>
           </a:xfrm>
           <a:prstGeom prst="rect">
             <a:avLst/>
@@ -18319,8 +18319,8 @@
         </p:nvSpPr>
         <p:spPr>
           <a:xfrm>
-            <a:off x="9079992" y="4651248"/>
-            <a:ext cx="896112" cy="268224"/>
+            <a:off x="9079992" y="4798771"/>
+            <a:ext cx="896112" cy="281635"/>
           </a:xfrm>
           <a:prstGeom prst="rect">
             <a:avLst/>
@@ -18358,8 +18358,8 @@
         </p:nvSpPr>
         <p:spPr>
           <a:xfrm>
-            <a:off x="9976104" y="4651248"/>
-            <a:ext cx="566928" cy="268224"/>
+            <a:off x="9976104" y="4798771"/>
+            <a:ext cx="566928" cy="281635"/>
           </a:xfrm>
           <a:prstGeom prst="rect">
             <a:avLst/>
@@ -18397,8 +18397,8 @@
         </p:nvSpPr>
         <p:spPr>
           <a:xfrm>
-            <a:off x="10543032" y="4651248"/>
-            <a:ext cx="877824" cy="268224"/>
+            <a:off x="10543032" y="4798771"/>
+            <a:ext cx="877824" cy="281635"/>
           </a:xfrm>
           <a:prstGeom prst="rect">
             <a:avLst/>
@@ -18436,8 +18436,8 @@
         </p:nvSpPr>
         <p:spPr>
           <a:xfrm>
-            <a:off x="6208776" y="4919472"/>
-            <a:ext cx="1938528" cy="268224"/>
+            <a:off x="6208776" y="5080406"/>
+            <a:ext cx="1938528" cy="281635"/>
           </a:xfrm>
           <a:prstGeom prst="rect">
             <a:avLst/>
@@ -18475,8 +18475,8 @@
         </p:nvSpPr>
         <p:spPr>
           <a:xfrm>
-            <a:off x="8220456" y="4979822"/>
-            <a:ext cx="18288" cy="147523"/>
+            <a:off x="8220456" y="5143774"/>
+            <a:ext cx="18288" cy="154899"/>
           </a:xfrm>
           <a:prstGeom prst="rect">
             <a:avLst/>
@@ -18495,8 +18495,8 @@
         </p:nvSpPr>
         <p:spPr>
           <a:xfrm>
-            <a:off x="9079992" y="4919472"/>
-            <a:ext cx="896112" cy="268224"/>
+            <a:off x="9079992" y="5080406"/>
+            <a:ext cx="896112" cy="281635"/>
           </a:xfrm>
           <a:prstGeom prst="rect">
             <a:avLst/>
@@ -18534,8 +18534,8 @@
         </p:nvSpPr>
         <p:spPr>
           <a:xfrm>
-            <a:off x="9976104" y="4919472"/>
-            <a:ext cx="566928" cy="268224"/>
+            <a:off x="9976104" y="5080406"/>
+            <a:ext cx="566928" cy="281635"/>
           </a:xfrm>
           <a:prstGeom prst="rect">
             <a:avLst/>
@@ -18573,8 +18573,8 @@
         </p:nvSpPr>
         <p:spPr>
           <a:xfrm>
-            <a:off x="10543032" y="4919472"/>
-            <a:ext cx="877824" cy="268224"/>
+            <a:off x="10543032" y="5080406"/>
+            <a:ext cx="877824" cy="281635"/>
           </a:xfrm>
           <a:prstGeom prst="rect">
             <a:avLst/>
@@ -18612,8 +18612,8 @@
         </p:nvSpPr>
         <p:spPr>
           <a:xfrm>
-            <a:off x="6208776" y="5187696"/>
-            <a:ext cx="1938528" cy="268224"/>
+            <a:off x="6208776" y="5362042"/>
+            <a:ext cx="1938528" cy="281635"/>
           </a:xfrm>
           <a:prstGeom prst="rect">
             <a:avLst/>
@@ -18651,8 +18651,8 @@
         </p:nvSpPr>
         <p:spPr>
           <a:xfrm>
-            <a:off x="8220456" y="5248046"/>
-            <a:ext cx="18288" cy="147523"/>
+            <a:off x="8220456" y="5425410"/>
+            <a:ext cx="18288" cy="154899"/>
           </a:xfrm>
           <a:prstGeom prst="rect">
             <a:avLst/>
@@ -18671,8 +18671,8 @@
         </p:nvSpPr>
         <p:spPr>
           <a:xfrm>
-            <a:off x="9079992" y="5187696"/>
-            <a:ext cx="896112" cy="268224"/>
+            <a:off x="9079992" y="5362042"/>
+            <a:ext cx="896112" cy="281635"/>
           </a:xfrm>
           <a:prstGeom prst="rect">
             <a:avLst/>
@@ -18710,8 +18710,8 @@
         </p:nvSpPr>
         <p:spPr>
           <a:xfrm>
-            <a:off x="9976104" y="5187696"/>
-            <a:ext cx="566928" cy="268224"/>
+            <a:off x="9976104" y="5362042"/>
+            <a:ext cx="566928" cy="281635"/>
           </a:xfrm>
           <a:prstGeom prst="rect">
             <a:avLst/>
@@ -18749,8 +18749,8 @@
         </p:nvSpPr>
         <p:spPr>
           <a:xfrm>
-            <a:off x="10543032" y="5187696"/>
-            <a:ext cx="877824" cy="268224"/>
+            <a:off x="10543032" y="5362042"/>
+            <a:ext cx="877824" cy="281635"/>
           </a:xfrm>
           <a:prstGeom prst="rect">
             <a:avLst/>
@@ -18788,8 +18788,8 @@
         </p:nvSpPr>
         <p:spPr>
           <a:xfrm>
-            <a:off x="457200" y="5961888"/>
-            <a:ext cx="11274552" cy="548640"/>
+            <a:off x="457200" y="6126480"/>
+            <a:ext cx="11274552" cy="364236"/>
           </a:xfrm>
           <a:prstGeom prst="rect">
             <a:avLst/>
@@ -18808,8 +18808,8 @@
         </p:nvSpPr>
         <p:spPr>
           <a:xfrm>
-            <a:off x="658368" y="5980176"/>
-            <a:ext cx="10927080" cy="512064"/>
+            <a:off x="658368" y="6144768"/>
+            <a:ext cx="10927080" cy="327660"/>
           </a:xfrm>
           <a:prstGeom prst="rect">
             <a:avLst/>
@@ -18825,7 +18825,7 @@
               <a:buNone/>
             </a:pPr>
             <a:r>
-              <a:rPr lang="en-US" sz="1600" b="1" dirty="0">
+              <a:rPr lang="en-US" sz="1550" b="1" dirty="0">
                 <a:solidFill>
                   <a:srgbClr val="A82B26"/>
                 </a:solidFill>
@@ -18833,9 +18833,9 @@
                 <a:ea typeface="Inter" pitchFamily="34" charset="-122"/>
                 <a:cs typeface="Inter" pitchFamily="34" charset="-120"/>
               </a:rPr>
-              <a:t>29 stores under 15% leave $1,664,385 a year: 26,062 services. TOYOTA SPOKANE has the most at $179,701.</a:t>
-            </a:r>
-            <a:endParaRPr lang="en-US" sz="1600" dirty="0"/>
+              <a:t>29 stores under 15% leave $1,664,385 a year: 26,062 services. Toyota Spokane has the most at $179,701.</a:t>
+            </a:r>
+            <a:endParaRPr lang="en-US" sz="1550" dirty="0"/>
           </a:p>
         </p:txBody>
       </p:sp>
@@ -18978,7 +18978,7 @@
         <p:spPr>
           <a:xfrm>
             <a:off x="457200" y="1207008"/>
-            <a:ext cx="11274552" cy="4645152"/>
+            <a:ext cx="11274552" cy="4782312"/>
           </a:xfrm>
           <a:prstGeom prst="rect">
             <a:avLst/>
@@ -19232,7 +19232,7 @@
         <p:spPr>
           <a:xfrm>
             <a:off x="658368" y="1700784"/>
-            <a:ext cx="1938528" cy="365760"/>
+            <a:ext cx="1938528" cy="384048"/>
           </a:xfrm>
           <a:prstGeom prst="rect">
             <a:avLst/>
@@ -19270,8 +19270,8 @@
         </p:nvSpPr>
         <p:spPr>
           <a:xfrm>
-            <a:off x="2670048" y="1783080"/>
-            <a:ext cx="804672" cy="201168"/>
+            <a:off x="2670048" y="1787195"/>
+            <a:ext cx="804672" cy="211226"/>
           </a:xfrm>
           <a:prstGeom prst="rect">
             <a:avLst/>
@@ -19291,7 +19291,7 @@
         <p:spPr>
           <a:xfrm>
             <a:off x="3529584" y="1700784"/>
-            <a:ext cx="896112" cy="365760"/>
+            <a:ext cx="896112" cy="384048"/>
           </a:xfrm>
           <a:prstGeom prst="rect">
             <a:avLst/>
@@ -19330,7 +19330,7 @@
         <p:spPr>
           <a:xfrm>
             <a:off x="4425696" y="1700784"/>
-            <a:ext cx="566928" cy="365760"/>
+            <a:ext cx="566928" cy="384048"/>
           </a:xfrm>
           <a:prstGeom prst="rect">
             <a:avLst/>
@@ -19369,7 +19369,7 @@
         <p:spPr>
           <a:xfrm>
             <a:off x="4992624" y="1700784"/>
-            <a:ext cx="877824" cy="365760"/>
+            <a:ext cx="877824" cy="384048"/>
           </a:xfrm>
           <a:prstGeom prst="rect">
             <a:avLst/>
@@ -19407,8 +19407,8 @@
         </p:nvSpPr>
         <p:spPr>
           <a:xfrm>
-            <a:off x="658368" y="2066544"/>
-            <a:ext cx="1938528" cy="365760"/>
+            <a:off x="658368" y="2084832"/>
+            <a:ext cx="1938528" cy="384048"/>
           </a:xfrm>
           <a:prstGeom prst="rect">
             <a:avLst/>
@@ -19446,8 +19446,8 @@
         </p:nvSpPr>
         <p:spPr>
           <a:xfrm>
-            <a:off x="2670048" y="2148840"/>
-            <a:ext cx="426590" cy="201168"/>
+            <a:off x="2670048" y="2171243"/>
+            <a:ext cx="426590" cy="211226"/>
           </a:xfrm>
           <a:prstGeom prst="rect">
             <a:avLst/>
@@ -19466,8 +19466,8 @@
         </p:nvSpPr>
         <p:spPr>
           <a:xfrm>
-            <a:off x="3529584" y="2066544"/>
-            <a:ext cx="896112" cy="365760"/>
+            <a:off x="3529584" y="2084832"/>
+            <a:ext cx="896112" cy="384048"/>
           </a:xfrm>
           <a:prstGeom prst="rect">
             <a:avLst/>
@@ -19505,8 +19505,8 @@
         </p:nvSpPr>
         <p:spPr>
           <a:xfrm>
-            <a:off x="4425696" y="2066544"/>
-            <a:ext cx="566928" cy="365760"/>
+            <a:off x="4425696" y="2084832"/>
+            <a:ext cx="566928" cy="384048"/>
           </a:xfrm>
           <a:prstGeom prst="rect">
             <a:avLst/>
@@ -19544,8 +19544,8 @@
         </p:nvSpPr>
         <p:spPr>
           <a:xfrm>
-            <a:off x="4992624" y="2066544"/>
-            <a:ext cx="877824" cy="365760"/>
+            <a:off x="4992624" y="2084832"/>
+            <a:ext cx="877824" cy="384048"/>
           </a:xfrm>
           <a:prstGeom prst="rect">
             <a:avLst/>
@@ -19583,8 +19583,8 @@
         </p:nvSpPr>
         <p:spPr>
           <a:xfrm>
-            <a:off x="658368" y="2432304"/>
-            <a:ext cx="1938528" cy="365760"/>
+            <a:off x="658368" y="2468880"/>
+            <a:ext cx="1938528" cy="384048"/>
           </a:xfrm>
           <a:prstGeom prst="rect">
             <a:avLst/>
@@ -19622,8 +19622,8 @@
         </p:nvSpPr>
         <p:spPr>
           <a:xfrm>
-            <a:off x="2670048" y="2514600"/>
-            <a:ext cx="415637" cy="201168"/>
+            <a:off x="2670048" y="2555291"/>
+            <a:ext cx="415637" cy="211226"/>
           </a:xfrm>
           <a:prstGeom prst="rect">
             <a:avLst/>
@@ -19642,8 +19642,8 @@
         </p:nvSpPr>
         <p:spPr>
           <a:xfrm>
-            <a:off x="3529584" y="2432304"/>
-            <a:ext cx="896112" cy="365760"/>
+            <a:off x="3529584" y="2468880"/>
+            <a:ext cx="896112" cy="384048"/>
           </a:xfrm>
           <a:prstGeom prst="rect">
             <a:avLst/>
@@ -19681,8 +19681,8 @@
         </p:nvSpPr>
         <p:spPr>
           <a:xfrm>
-            <a:off x="4425696" y="2432304"/>
-            <a:ext cx="566928" cy="365760"/>
+            <a:off x="4425696" y="2468880"/>
+            <a:ext cx="566928" cy="384048"/>
           </a:xfrm>
           <a:prstGeom prst="rect">
             <a:avLst/>
@@ -19720,8 +19720,8 @@
         </p:nvSpPr>
         <p:spPr>
           <a:xfrm>
-            <a:off x="4992624" y="2432304"/>
-            <a:ext cx="877824" cy="365760"/>
+            <a:off x="4992624" y="2468880"/>
+            <a:ext cx="877824" cy="384048"/>
           </a:xfrm>
           <a:prstGeom prst="rect">
             <a:avLst/>
@@ -19759,8 +19759,8 @@
         </p:nvSpPr>
         <p:spPr>
           <a:xfrm>
-            <a:off x="658368" y="2798064"/>
-            <a:ext cx="1938528" cy="365760"/>
+            <a:off x="658368" y="2852928"/>
+            <a:ext cx="1938528" cy="384048"/>
           </a:xfrm>
           <a:prstGeom prst="rect">
             <a:avLst/>
@@ -19798,8 +19798,8 @@
         </p:nvSpPr>
         <p:spPr>
           <a:xfrm>
-            <a:off x="2670048" y="2880360"/>
-            <a:ext cx="397090" cy="201168"/>
+            <a:off x="2670048" y="2939339"/>
+            <a:ext cx="397090" cy="211226"/>
           </a:xfrm>
           <a:prstGeom prst="rect">
             <a:avLst/>
@@ -19818,8 +19818,8 @@
         </p:nvSpPr>
         <p:spPr>
           <a:xfrm>
-            <a:off x="3529584" y="2798064"/>
-            <a:ext cx="896112" cy="365760"/>
+            <a:off x="3529584" y="2852928"/>
+            <a:ext cx="896112" cy="384048"/>
           </a:xfrm>
           <a:prstGeom prst="rect">
             <a:avLst/>
@@ -19857,8 +19857,8 @@
         </p:nvSpPr>
         <p:spPr>
           <a:xfrm>
-            <a:off x="4425696" y="2798064"/>
-            <a:ext cx="566928" cy="365760"/>
+            <a:off x="4425696" y="2852928"/>
+            <a:ext cx="566928" cy="384048"/>
           </a:xfrm>
           <a:prstGeom prst="rect">
             <a:avLst/>
@@ -19896,8 +19896,8 @@
         </p:nvSpPr>
         <p:spPr>
           <a:xfrm>
-            <a:off x="4992624" y="2798064"/>
-            <a:ext cx="877824" cy="365760"/>
+            <a:off x="4992624" y="2852928"/>
+            <a:ext cx="877824" cy="384048"/>
           </a:xfrm>
           <a:prstGeom prst="rect">
             <a:avLst/>
@@ -19935,8 +19935,8 @@
         </p:nvSpPr>
         <p:spPr>
           <a:xfrm>
-            <a:off x="658368" y="3163824"/>
-            <a:ext cx="1938528" cy="365760"/>
+            <a:off x="658368" y="3236976"/>
+            <a:ext cx="1938528" cy="384048"/>
           </a:xfrm>
           <a:prstGeom prst="rect">
             <a:avLst/>
@@ -19974,8 +19974,8 @@
         </p:nvSpPr>
         <p:spPr>
           <a:xfrm>
-            <a:off x="2670048" y="3246120"/>
-            <a:ext cx="359248" cy="201168"/>
+            <a:off x="2670048" y="3323387"/>
+            <a:ext cx="359248" cy="211226"/>
           </a:xfrm>
           <a:prstGeom prst="rect">
             <a:avLst/>
@@ -19994,8 +19994,8 @@
         </p:nvSpPr>
         <p:spPr>
           <a:xfrm>
-            <a:off x="3529584" y="3163824"/>
-            <a:ext cx="896112" cy="365760"/>
+            <a:off x="3529584" y="3236976"/>
+            <a:ext cx="896112" cy="384048"/>
           </a:xfrm>
           <a:prstGeom prst="rect">
             <a:avLst/>
@@ -20033,8 +20033,8 @@
         </p:nvSpPr>
         <p:spPr>
           <a:xfrm>
-            <a:off x="4425696" y="3163824"/>
-            <a:ext cx="566928" cy="365760"/>
+            <a:off x="4425696" y="3236976"/>
+            <a:ext cx="566928" cy="384048"/>
           </a:xfrm>
           <a:prstGeom prst="rect">
             <a:avLst/>
@@ -20072,8 +20072,8 @@
         </p:nvSpPr>
         <p:spPr>
           <a:xfrm>
-            <a:off x="4992624" y="3163824"/>
-            <a:ext cx="877824" cy="365760"/>
+            <a:off x="4992624" y="3236976"/>
+            <a:ext cx="877824" cy="384048"/>
           </a:xfrm>
           <a:prstGeom prst="rect">
             <a:avLst/>
@@ -20111,8 +20111,8 @@
         </p:nvSpPr>
         <p:spPr>
           <a:xfrm>
-            <a:off x="658368" y="3529584"/>
-            <a:ext cx="1938528" cy="365760"/>
+            <a:off x="658368" y="3621024"/>
+            <a:ext cx="1938528" cy="384048"/>
           </a:xfrm>
           <a:prstGeom prst="rect">
             <a:avLst/>
@@ -20150,8 +20150,8 @@
         </p:nvSpPr>
         <p:spPr>
           <a:xfrm>
-            <a:off x="2670048" y="3611880"/>
-            <a:ext cx="302564" cy="201168"/>
+            <a:off x="2670048" y="3707435"/>
+            <a:ext cx="302564" cy="211226"/>
           </a:xfrm>
           <a:prstGeom prst="rect">
             <a:avLst/>
@@ -20170,8 +20170,8 @@
         </p:nvSpPr>
         <p:spPr>
           <a:xfrm>
-            <a:off x="3529584" y="3529584"/>
-            <a:ext cx="896112" cy="365760"/>
+            <a:off x="3529584" y="3621024"/>
+            <a:ext cx="896112" cy="384048"/>
           </a:xfrm>
           <a:prstGeom prst="rect">
             <a:avLst/>
@@ -20209,8 +20209,8 @@
         </p:nvSpPr>
         <p:spPr>
           <a:xfrm>
-            <a:off x="4425696" y="3529584"/>
-            <a:ext cx="566928" cy="365760"/>
+            <a:off x="4425696" y="3621024"/>
+            <a:ext cx="566928" cy="384048"/>
           </a:xfrm>
           <a:prstGeom prst="rect">
             <a:avLst/>
@@ -20248,8 +20248,8 @@
         </p:nvSpPr>
         <p:spPr>
           <a:xfrm>
-            <a:off x="4992624" y="3529584"/>
-            <a:ext cx="877824" cy="365760"/>
+            <a:off x="4992624" y="3621024"/>
+            <a:ext cx="877824" cy="384048"/>
           </a:xfrm>
           <a:prstGeom prst="rect">
             <a:avLst/>
@@ -20287,8 +20287,8 @@
         </p:nvSpPr>
         <p:spPr>
           <a:xfrm>
-            <a:off x="658368" y="3895344"/>
-            <a:ext cx="1938528" cy="365760"/>
+            <a:off x="658368" y="4005072"/>
+            <a:ext cx="1938528" cy="384048"/>
           </a:xfrm>
           <a:prstGeom prst="rect">
             <a:avLst/>
@@ -20326,8 +20326,8 @@
         </p:nvSpPr>
         <p:spPr>
           <a:xfrm>
-            <a:off x="2670048" y="3977640"/>
-            <a:ext cx="280206" cy="201168"/>
+            <a:off x="2670048" y="4091483"/>
+            <a:ext cx="280206" cy="211226"/>
           </a:xfrm>
           <a:prstGeom prst="rect">
             <a:avLst/>
@@ -20346,8 +20346,8 @@
         </p:nvSpPr>
         <p:spPr>
           <a:xfrm>
-            <a:off x="3529584" y="3895344"/>
-            <a:ext cx="896112" cy="365760"/>
+            <a:off x="3529584" y="4005072"/>
+            <a:ext cx="896112" cy="384048"/>
           </a:xfrm>
           <a:prstGeom prst="rect">
             <a:avLst/>
@@ -20385,8 +20385,8 @@
         </p:nvSpPr>
         <p:spPr>
           <a:xfrm>
-            <a:off x="4425696" y="3895344"/>
-            <a:ext cx="566928" cy="365760"/>
+            <a:off x="4425696" y="4005072"/>
+            <a:ext cx="566928" cy="384048"/>
           </a:xfrm>
           <a:prstGeom prst="rect">
             <a:avLst/>
@@ -20424,8 +20424,8 @@
         </p:nvSpPr>
         <p:spPr>
           <a:xfrm>
-            <a:off x="4992624" y="3895344"/>
-            <a:ext cx="877824" cy="365760"/>
+            <a:off x="4992624" y="4005072"/>
+            <a:ext cx="877824" cy="384048"/>
           </a:xfrm>
           <a:prstGeom prst="rect">
             <a:avLst/>
@@ -20463,8 +20463,8 @@
         </p:nvSpPr>
         <p:spPr>
           <a:xfrm>
-            <a:off x="658368" y="4261104"/>
-            <a:ext cx="1938528" cy="365760"/>
+            <a:off x="658368" y="4389120"/>
+            <a:ext cx="1938528" cy="384048"/>
           </a:xfrm>
           <a:prstGeom prst="rect">
             <a:avLst/>
@@ -20502,8 +20502,8 @@
         </p:nvSpPr>
         <p:spPr>
           <a:xfrm>
-            <a:off x="2670048" y="4343400"/>
-            <a:ext cx="254835" cy="201168"/>
+            <a:off x="2670048" y="4475531"/>
+            <a:ext cx="254835" cy="211226"/>
           </a:xfrm>
           <a:prstGeom prst="rect">
             <a:avLst/>
@@ -20522,8 +20522,8 @@
         </p:nvSpPr>
         <p:spPr>
           <a:xfrm>
-            <a:off x="3529584" y="4261104"/>
-            <a:ext cx="896112" cy="365760"/>
+            <a:off x="3529584" y="4389120"/>
+            <a:ext cx="896112" cy="384048"/>
           </a:xfrm>
           <a:prstGeom prst="rect">
             <a:avLst/>
@@ -20561,8 +20561,8 @@
         </p:nvSpPr>
         <p:spPr>
           <a:xfrm>
-            <a:off x="4425696" y="4261104"/>
-            <a:ext cx="566928" cy="365760"/>
+            <a:off x="4425696" y="4389120"/>
+            <a:ext cx="566928" cy="384048"/>
           </a:xfrm>
           <a:prstGeom prst="rect">
             <a:avLst/>
@@ -20600,8 +20600,8 @@
         </p:nvSpPr>
         <p:spPr>
           <a:xfrm>
-            <a:off x="4992624" y="4261104"/>
-            <a:ext cx="877824" cy="365760"/>
+            <a:off x="4992624" y="4389120"/>
+            <a:ext cx="877824" cy="384048"/>
           </a:xfrm>
           <a:prstGeom prst="rect">
             <a:avLst/>
@@ -20639,8 +20639,8 @@
         </p:nvSpPr>
         <p:spPr>
           <a:xfrm>
-            <a:off x="658368" y="4626864"/>
-            <a:ext cx="1938528" cy="365760"/>
+            <a:off x="658368" y="4773168"/>
+            <a:ext cx="1938528" cy="384048"/>
           </a:xfrm>
           <a:prstGeom prst="rect">
             <a:avLst/>
@@ -20678,8 +20678,8 @@
         </p:nvSpPr>
         <p:spPr>
           <a:xfrm>
-            <a:off x="2670048" y="4709160"/>
-            <a:ext cx="171431" cy="201168"/>
+            <a:off x="2670048" y="4859579"/>
+            <a:ext cx="171431" cy="211226"/>
           </a:xfrm>
           <a:prstGeom prst="rect">
             <a:avLst/>
@@ -20698,8 +20698,8 @@
         </p:nvSpPr>
         <p:spPr>
           <a:xfrm>
-            <a:off x="3529584" y="4626864"/>
-            <a:ext cx="896112" cy="365760"/>
+            <a:off x="3529584" y="4773168"/>
+            <a:ext cx="896112" cy="384048"/>
           </a:xfrm>
           <a:prstGeom prst="rect">
             <a:avLst/>
@@ -20737,8 +20737,8 @@
         </p:nvSpPr>
         <p:spPr>
           <a:xfrm>
-            <a:off x="4425696" y="4626864"/>
-            <a:ext cx="566928" cy="365760"/>
+            <a:off x="4425696" y="4773168"/>
+            <a:ext cx="566928" cy="384048"/>
           </a:xfrm>
           <a:prstGeom prst="rect">
             <a:avLst/>
@@ -20776,8 +20776,8 @@
         </p:nvSpPr>
         <p:spPr>
           <a:xfrm>
-            <a:off x="4992624" y="4626864"/>
-            <a:ext cx="877824" cy="365760"/>
+            <a:off x="4992624" y="4773168"/>
+            <a:ext cx="877824" cy="384048"/>
           </a:xfrm>
           <a:prstGeom prst="rect">
             <a:avLst/>
@@ -20815,8 +20815,8 @@
         </p:nvSpPr>
         <p:spPr>
           <a:xfrm>
-            <a:off x="658368" y="4992624"/>
-            <a:ext cx="1938528" cy="365760"/>
+            <a:off x="658368" y="5157216"/>
+            <a:ext cx="1938528" cy="384048"/>
           </a:xfrm>
           <a:prstGeom prst="rect">
             <a:avLst/>
@@ -20854,8 +20854,8 @@
         </p:nvSpPr>
         <p:spPr>
           <a:xfrm>
-            <a:off x="2670048" y="5074920"/>
-            <a:ext cx="168143" cy="201168"/>
+            <a:off x="2670048" y="5243627"/>
+            <a:ext cx="168143" cy="211226"/>
           </a:xfrm>
           <a:prstGeom prst="rect">
             <a:avLst/>
@@ -20874,8 +20874,8 @@
         </p:nvSpPr>
         <p:spPr>
           <a:xfrm>
-            <a:off x="3529584" y="4992624"/>
-            <a:ext cx="896112" cy="365760"/>
+            <a:off x="3529584" y="5157216"/>
+            <a:ext cx="896112" cy="384048"/>
           </a:xfrm>
           <a:prstGeom prst="rect">
             <a:avLst/>
@@ -20913,8 +20913,8 @@
         </p:nvSpPr>
         <p:spPr>
           <a:xfrm>
-            <a:off x="4425696" y="4992624"/>
-            <a:ext cx="566928" cy="365760"/>
+            <a:off x="4425696" y="5157216"/>
+            <a:ext cx="566928" cy="384048"/>
           </a:xfrm>
           <a:prstGeom prst="rect">
             <a:avLst/>
@@ -20952,8 +20952,8 @@
         </p:nvSpPr>
         <p:spPr>
           <a:xfrm>
-            <a:off x="4992624" y="4992624"/>
-            <a:ext cx="877824" cy="365760"/>
+            <a:off x="4992624" y="5157216"/>
+            <a:ext cx="877824" cy="384048"/>
           </a:xfrm>
           <a:prstGeom prst="rect">
             <a:avLst/>
@@ -20991,8 +20991,8 @@
         </p:nvSpPr>
         <p:spPr>
           <a:xfrm>
-            <a:off x="658368" y="5358384"/>
-            <a:ext cx="1938528" cy="365760"/>
+            <a:off x="658368" y="5541264"/>
+            <a:ext cx="1938528" cy="384048"/>
           </a:xfrm>
           <a:prstGeom prst="rect">
             <a:avLst/>
@@ -21030,8 +21030,8 @@
         </p:nvSpPr>
         <p:spPr>
           <a:xfrm>
-            <a:off x="2670048" y="5440680"/>
-            <a:ext cx="133568" cy="201168"/>
+            <a:off x="2670048" y="5627675"/>
+            <a:ext cx="133568" cy="211226"/>
           </a:xfrm>
           <a:prstGeom prst="rect">
             <a:avLst/>
@@ -21050,8 +21050,8 @@
         </p:nvSpPr>
         <p:spPr>
           <a:xfrm>
-            <a:off x="3529584" y="5358384"/>
-            <a:ext cx="896112" cy="365760"/>
+            <a:off x="3529584" y="5541264"/>
+            <a:ext cx="896112" cy="384048"/>
           </a:xfrm>
           <a:prstGeom prst="rect">
             <a:avLst/>
@@ -21089,8 +21089,8 @@
         </p:nvSpPr>
         <p:spPr>
           <a:xfrm>
-            <a:off x="4425696" y="5358384"/>
-            <a:ext cx="566928" cy="365760"/>
+            <a:off x="4425696" y="5541264"/>
+            <a:ext cx="566928" cy="384048"/>
           </a:xfrm>
           <a:prstGeom prst="rect">
             <a:avLst/>
@@ -21128,8 +21128,8 @@
         </p:nvSpPr>
         <p:spPr>
           <a:xfrm>
-            <a:off x="4992624" y="5358384"/>
-            <a:ext cx="877824" cy="365760"/>
+            <a:off x="4992624" y="5541264"/>
+            <a:ext cx="877824" cy="384048"/>
           </a:xfrm>
           <a:prstGeom prst="rect">
             <a:avLst/>
@@ -21168,7 +21168,7 @@
         <p:spPr>
           <a:xfrm>
             <a:off x="6208776" y="1700784"/>
-            <a:ext cx="1938528" cy="365760"/>
+            <a:ext cx="1938528" cy="384048"/>
           </a:xfrm>
           <a:prstGeom prst="rect">
             <a:avLst/>
@@ -21206,8 +21206,8 @@
         </p:nvSpPr>
         <p:spPr>
           <a:xfrm>
-            <a:off x="8220456" y="1783080"/>
-            <a:ext cx="119552" cy="201168"/>
+            <a:off x="8220456" y="1787195"/>
+            <a:ext cx="119552" cy="211226"/>
           </a:xfrm>
           <a:prstGeom prst="rect">
             <a:avLst/>
@@ -21227,7 +21227,7 @@
         <p:spPr>
           <a:xfrm>
             <a:off x="9079992" y="1700784"/>
-            <a:ext cx="896112" cy="365760"/>
+            <a:ext cx="896112" cy="384048"/>
           </a:xfrm>
           <a:prstGeom prst="rect">
             <a:avLst/>
@@ -21266,7 +21266,7 @@
         <p:spPr>
           <a:xfrm>
             <a:off x="9976104" y="1700784"/>
-            <a:ext cx="566928" cy="365760"/>
+            <a:ext cx="566928" cy="384048"/>
           </a:xfrm>
           <a:prstGeom prst="rect">
             <a:avLst/>
@@ -21305,7 +21305,7 @@
         <p:spPr>
           <a:xfrm>
             <a:off x="10543032" y="1700784"/>
-            <a:ext cx="877824" cy="365760"/>
+            <a:ext cx="877824" cy="384048"/>
           </a:xfrm>
           <a:prstGeom prst="rect">
             <a:avLst/>
@@ -21343,8 +21343,8 @@
         </p:nvSpPr>
         <p:spPr>
           <a:xfrm>
-            <a:off x="6208776" y="2066544"/>
-            <a:ext cx="1938528" cy="365760"/>
+            <a:off x="6208776" y="2084832"/>
+            <a:ext cx="1938528" cy="384048"/>
           </a:xfrm>
           <a:prstGeom prst="rect">
             <a:avLst/>
@@ -21382,8 +21382,8 @@
         </p:nvSpPr>
         <p:spPr>
           <a:xfrm>
-            <a:off x="8220456" y="2148840"/>
-            <a:ext cx="113707" cy="201168"/>
+            <a:off x="8220456" y="2171243"/>
+            <a:ext cx="113707" cy="211226"/>
           </a:xfrm>
           <a:prstGeom prst="rect">
             <a:avLst/>
@@ -21402,8 +21402,8 @@
         </p:nvSpPr>
         <p:spPr>
           <a:xfrm>
-            <a:off x="9079992" y="2066544"/>
-            <a:ext cx="896112" cy="365760"/>
+            <a:off x="9079992" y="2084832"/>
+            <a:ext cx="896112" cy="384048"/>
           </a:xfrm>
           <a:prstGeom prst="rect">
             <a:avLst/>
@@ -21441,8 +21441,8 @@
         </p:nvSpPr>
         <p:spPr>
           <a:xfrm>
-            <a:off x="9976104" y="2066544"/>
-            <a:ext cx="566928" cy="365760"/>
+            <a:off x="9976104" y="2084832"/>
+            <a:ext cx="566928" cy="384048"/>
           </a:xfrm>
           <a:prstGeom prst="rect">
             <a:avLst/>
@@ -21480,8 +21480,8 @@
         </p:nvSpPr>
         <p:spPr>
           <a:xfrm>
-            <a:off x="10543032" y="2066544"/>
-            <a:ext cx="877824" cy="365760"/>
+            <a:off x="10543032" y="2084832"/>
+            <a:ext cx="877824" cy="384048"/>
           </a:xfrm>
           <a:prstGeom prst="rect">
             <a:avLst/>
@@ -21519,8 +21519,8 @@
         </p:nvSpPr>
         <p:spPr>
           <a:xfrm>
-            <a:off x="6208776" y="2432304"/>
-            <a:ext cx="1938528" cy="365760"/>
+            <a:off x="6208776" y="2468880"/>
+            <a:ext cx="1938528" cy="384048"/>
           </a:xfrm>
           <a:prstGeom prst="rect">
             <a:avLst/>
@@ -21558,8 +21558,8 @@
         </p:nvSpPr>
         <p:spPr>
           <a:xfrm>
-            <a:off x="8220456" y="2514600"/>
-            <a:ext cx="109990" cy="201168"/>
+            <a:off x="8220456" y="2555291"/>
+            <a:ext cx="109990" cy="211226"/>
           </a:xfrm>
           <a:prstGeom prst="rect">
             <a:avLst/>
@@ -21578,8 +21578,8 @@
         </p:nvSpPr>
         <p:spPr>
           <a:xfrm>
-            <a:off x="9079992" y="2432304"/>
-            <a:ext cx="896112" cy="365760"/>
+            <a:off x="9079992" y="2468880"/>
+            <a:ext cx="896112" cy="384048"/>
           </a:xfrm>
           <a:prstGeom prst="rect">
             <a:avLst/>
@@ -21617,8 +21617,8 @@
         </p:nvSpPr>
         <p:spPr>
           <a:xfrm>
-            <a:off x="9976104" y="2432304"/>
-            <a:ext cx="566928" cy="365760"/>
+            <a:off x="9976104" y="2468880"/>
+            <a:ext cx="566928" cy="384048"/>
           </a:xfrm>
           <a:prstGeom prst="rect">
             <a:avLst/>
@@ -21656,8 +21656,8 @@
         </p:nvSpPr>
         <p:spPr>
           <a:xfrm>
-            <a:off x="10543032" y="2432304"/>
-            <a:ext cx="877824" cy="365760"/>
+            <a:off x="10543032" y="2468880"/>
+            <a:ext cx="877824" cy="384048"/>
           </a:xfrm>
           <a:prstGeom prst="rect">
             <a:avLst/>
@@ -21695,8 +21695,8 @@
         </p:nvSpPr>
         <p:spPr>
           <a:xfrm>
-            <a:off x="6208776" y="2798064"/>
-            <a:ext cx="1938528" cy="365760"/>
+            <a:off x="6208776" y="2852928"/>
+            <a:ext cx="1938528" cy="384048"/>
           </a:xfrm>
           <a:prstGeom prst="rect">
             <a:avLst/>
@@ -21734,8 +21734,8 @@
         </p:nvSpPr>
         <p:spPr>
           <a:xfrm>
-            <a:off x="8220456" y="2880360"/>
-            <a:ext cx="104971" cy="201168"/>
+            <a:off x="8220456" y="2939339"/>
+            <a:ext cx="104971" cy="211226"/>
           </a:xfrm>
           <a:prstGeom prst="rect">
             <a:avLst/>
@@ -21754,8 +21754,8 @@
         </p:nvSpPr>
         <p:spPr>
           <a:xfrm>
-            <a:off x="9079992" y="2798064"/>
-            <a:ext cx="896112" cy="365760"/>
+            <a:off x="9079992" y="2852928"/>
+            <a:ext cx="896112" cy="384048"/>
           </a:xfrm>
           <a:prstGeom prst="rect">
             <a:avLst/>
@@ -21793,8 +21793,8 @@
         </p:nvSpPr>
         <p:spPr>
           <a:xfrm>
-            <a:off x="9976104" y="2798064"/>
-            <a:ext cx="566928" cy="365760"/>
+            <a:off x="9976104" y="2852928"/>
+            <a:ext cx="566928" cy="384048"/>
           </a:xfrm>
           <a:prstGeom prst="rect">
             <a:avLst/>
@@ -21832,8 +21832,8 @@
         </p:nvSpPr>
         <p:spPr>
           <a:xfrm>
-            <a:off x="10543032" y="2798064"/>
-            <a:ext cx="877824" cy="365760"/>
+            <a:off x="10543032" y="2852928"/>
+            <a:ext cx="877824" cy="384048"/>
           </a:xfrm>
           <a:prstGeom prst="rect">
             <a:avLst/>
@@ -21871,8 +21871,8 @@
         </p:nvSpPr>
         <p:spPr>
           <a:xfrm>
-            <a:off x="6208776" y="3163824"/>
-            <a:ext cx="1938528" cy="365760"/>
+            <a:off x="6208776" y="3236976"/>
+            <a:ext cx="1938528" cy="384048"/>
           </a:xfrm>
           <a:prstGeom prst="rect">
             <a:avLst/>
@@ -21910,8 +21910,8 @@
         </p:nvSpPr>
         <p:spPr>
           <a:xfrm>
-            <a:off x="8220456" y="3246120"/>
-            <a:ext cx="94348" cy="201168"/>
+            <a:off x="8220456" y="3323387"/>
+            <a:ext cx="94348" cy="211226"/>
           </a:xfrm>
           <a:prstGeom prst="rect">
             <a:avLst/>
@@ -21930,8 +21930,8 @@
         </p:nvSpPr>
         <p:spPr>
           <a:xfrm>
-            <a:off x="9079992" y="3163824"/>
-            <a:ext cx="896112" cy="365760"/>
+            <a:off x="9079992" y="3236976"/>
+            <a:ext cx="896112" cy="384048"/>
           </a:xfrm>
           <a:prstGeom prst="rect">
             <a:avLst/>
@@ -21969,8 +21969,8 @@
         </p:nvSpPr>
         <p:spPr>
           <a:xfrm>
-            <a:off x="9976104" y="3163824"/>
-            <a:ext cx="566928" cy="365760"/>
+            <a:off x="9976104" y="3236976"/>
+            <a:ext cx="566928" cy="384048"/>
           </a:xfrm>
           <a:prstGeom prst="rect">
             <a:avLst/>
@@ -22008,8 +22008,8 @@
         </p:nvSpPr>
         <p:spPr>
           <a:xfrm>
-            <a:off x="10543032" y="3163824"/>
-            <a:ext cx="877824" cy="365760"/>
+            <a:off x="10543032" y="3236976"/>
+            <a:ext cx="877824" cy="384048"/>
           </a:xfrm>
           <a:prstGeom prst="rect">
             <a:avLst/>
@@ -22047,8 +22047,8 @@
         </p:nvSpPr>
         <p:spPr>
           <a:xfrm>
-            <a:off x="6208776" y="3529584"/>
-            <a:ext cx="1938528" cy="365760"/>
+            <a:off x="6208776" y="3621024"/>
+            <a:ext cx="1938528" cy="384048"/>
           </a:xfrm>
           <a:prstGeom prst="rect">
             <a:avLst/>
@@ -22086,8 +22086,8 @@
         </p:nvSpPr>
         <p:spPr>
           <a:xfrm>
-            <a:off x="8220456" y="3611880"/>
-            <a:ext cx="80639" cy="201168"/>
+            <a:off x="8220456" y="3707435"/>
+            <a:ext cx="80639" cy="211226"/>
           </a:xfrm>
           <a:prstGeom prst="rect">
             <a:avLst/>
@@ -22106,8 +22106,8 @@
         </p:nvSpPr>
         <p:spPr>
           <a:xfrm>
-            <a:off x="9079992" y="3529584"/>
-            <a:ext cx="896112" cy="365760"/>
+            <a:off x="9079992" y="3621024"/>
+            <a:ext cx="896112" cy="384048"/>
           </a:xfrm>
           <a:prstGeom prst="rect">
             <a:avLst/>
@@ -22145,8 +22145,8 @@
         </p:nvSpPr>
         <p:spPr>
           <a:xfrm>
-            <a:off x="9976104" y="3529584"/>
-            <a:ext cx="566928" cy="365760"/>
+            <a:off x="9976104" y="3621024"/>
+            <a:ext cx="566928" cy="384048"/>
           </a:xfrm>
           <a:prstGeom prst="rect">
             <a:avLst/>
@@ -22184,8 +22184,8 @@
         </p:nvSpPr>
         <p:spPr>
           <a:xfrm>
-            <a:off x="10543032" y="3529584"/>
-            <a:ext cx="877824" cy="365760"/>
+            <a:off x="10543032" y="3621024"/>
+            <a:ext cx="877824" cy="384048"/>
           </a:xfrm>
           <a:prstGeom prst="rect">
             <a:avLst/>
@@ -22223,8 +22223,8 @@
         </p:nvSpPr>
         <p:spPr>
           <a:xfrm>
-            <a:off x="6208776" y="3895344"/>
-            <a:ext cx="1938528" cy="365760"/>
+            <a:off x="6208776" y="4005072"/>
+            <a:ext cx="1938528" cy="384048"/>
           </a:xfrm>
           <a:prstGeom prst="rect">
             <a:avLst/>
@@ -22262,8 +22262,8 @@
         </p:nvSpPr>
         <p:spPr>
           <a:xfrm>
-            <a:off x="8220456" y="3977640"/>
-            <a:ext cx="69613" cy="201168"/>
+            <a:off x="8220456" y="4091483"/>
+            <a:ext cx="69613" cy="211226"/>
           </a:xfrm>
           <a:prstGeom prst="rect">
             <a:avLst/>
@@ -22282,8 +22282,8 @@
         </p:nvSpPr>
         <p:spPr>
           <a:xfrm>
-            <a:off x="9079992" y="3895344"/>
-            <a:ext cx="896112" cy="365760"/>
+            <a:off x="9079992" y="4005072"/>
+            <a:ext cx="896112" cy="384048"/>
           </a:xfrm>
           <a:prstGeom prst="rect">
             <a:avLst/>
@@ -22321,8 +22321,8 @@
         </p:nvSpPr>
         <p:spPr>
           <a:xfrm>
-            <a:off x="9976104" y="3895344"/>
-            <a:ext cx="566928" cy="365760"/>
+            <a:off x="9976104" y="4005072"/>
+            <a:ext cx="566928" cy="384048"/>
           </a:xfrm>
           <a:prstGeom prst="rect">
             <a:avLst/>
@@ -22360,8 +22360,8 @@
         </p:nvSpPr>
         <p:spPr>
           <a:xfrm>
-            <a:off x="10543032" y="3895344"/>
-            <a:ext cx="877824" cy="365760"/>
+            <a:off x="10543032" y="4005072"/>
+            <a:ext cx="877824" cy="384048"/>
           </a:xfrm>
           <a:prstGeom prst="rect">
             <a:avLst/>
@@ -22399,8 +22399,8 @@
         </p:nvSpPr>
         <p:spPr>
           <a:xfrm>
-            <a:off x="6208776" y="4261104"/>
-            <a:ext cx="1938528" cy="365760"/>
+            <a:off x="6208776" y="4389120"/>
+            <a:ext cx="1938528" cy="384048"/>
           </a:xfrm>
           <a:prstGeom prst="rect">
             <a:avLst/>
@@ -22438,8 +22438,8 @@
         </p:nvSpPr>
         <p:spPr>
           <a:xfrm>
-            <a:off x="8220456" y="4343400"/>
-            <a:ext cx="58212" cy="201168"/>
+            <a:off x="8220456" y="4475531"/>
+            <a:ext cx="58212" cy="211226"/>
           </a:xfrm>
           <a:prstGeom prst="rect">
             <a:avLst/>
@@ -22458,8 +22458,8 @@
         </p:nvSpPr>
         <p:spPr>
           <a:xfrm>
-            <a:off x="9079992" y="4261104"/>
-            <a:ext cx="896112" cy="365760"/>
+            <a:off x="9079992" y="4389120"/>
+            <a:ext cx="896112" cy="384048"/>
           </a:xfrm>
           <a:prstGeom prst="rect">
             <a:avLst/>
@@ -22497,8 +22497,8 @@
         </p:nvSpPr>
         <p:spPr>
           <a:xfrm>
-            <a:off x="9976104" y="4261104"/>
-            <a:ext cx="566928" cy="365760"/>
+            <a:off x="9976104" y="4389120"/>
+            <a:ext cx="566928" cy="384048"/>
           </a:xfrm>
           <a:prstGeom prst="rect">
             <a:avLst/>
@@ -22536,8 +22536,8 @@
         </p:nvSpPr>
         <p:spPr>
           <a:xfrm>
-            <a:off x="10543032" y="4261104"/>
-            <a:ext cx="877824" cy="365760"/>
+            <a:off x="10543032" y="4389120"/>
+            <a:ext cx="877824" cy="384048"/>
           </a:xfrm>
           <a:prstGeom prst="rect">
             <a:avLst/>
@@ -22575,8 +22575,8 @@
         </p:nvSpPr>
         <p:spPr>
           <a:xfrm>
-            <a:off x="6208776" y="4626864"/>
-            <a:ext cx="1938528" cy="365760"/>
+            <a:off x="6208776" y="4773168"/>
+            <a:ext cx="1938528" cy="384048"/>
           </a:xfrm>
           <a:prstGeom prst="rect">
             <a:avLst/>
@@ -22614,8 +22614,8 @@
         </p:nvSpPr>
         <p:spPr>
           <a:xfrm>
-            <a:off x="8220456" y="4709160"/>
-            <a:ext cx="23377" cy="201168"/>
+            <a:off x="8220456" y="4859579"/>
+            <a:ext cx="23377" cy="211226"/>
           </a:xfrm>
           <a:prstGeom prst="rect">
             <a:avLst/>
@@ -22634,8 +22634,8 @@
         </p:nvSpPr>
         <p:spPr>
           <a:xfrm>
-            <a:off x="9079992" y="4626864"/>
-            <a:ext cx="896112" cy="365760"/>
+            <a:off x="9079992" y="4773168"/>
+            <a:ext cx="896112" cy="384048"/>
           </a:xfrm>
           <a:prstGeom prst="rect">
             <a:avLst/>
@@ -22673,8 +22673,8 @@
         </p:nvSpPr>
         <p:spPr>
           <a:xfrm>
-            <a:off x="9976104" y="4626864"/>
-            <a:ext cx="566928" cy="365760"/>
+            <a:off x="9976104" y="4773168"/>
+            <a:ext cx="566928" cy="384048"/>
           </a:xfrm>
           <a:prstGeom prst="rect">
             <a:avLst/>
@@ -22712,8 +22712,8 @@
         </p:nvSpPr>
         <p:spPr>
           <a:xfrm>
-            <a:off x="10543032" y="4626864"/>
-            <a:ext cx="877824" cy="365760"/>
+            <a:off x="10543032" y="4773168"/>
+            <a:ext cx="877824" cy="384048"/>
           </a:xfrm>
           <a:prstGeom prst="rect">
             <a:avLst/>
@@ -22751,8 +22751,8 @@
         </p:nvSpPr>
         <p:spPr>
           <a:xfrm>
-            <a:off x="6208776" y="4992624"/>
-            <a:ext cx="1938528" cy="365760"/>
+            <a:off x="6208776" y="5157216"/>
+            <a:ext cx="1938528" cy="384048"/>
           </a:xfrm>
           <a:prstGeom prst="rect">
             <a:avLst/>
@@ -22790,8 +22790,8 @@
         </p:nvSpPr>
         <p:spPr>
           <a:xfrm>
-            <a:off x="8220456" y="5074920"/>
-            <a:ext cx="18288" cy="201168"/>
+            <a:off x="8220456" y="5243627"/>
+            <a:ext cx="18288" cy="211226"/>
           </a:xfrm>
           <a:prstGeom prst="rect">
             <a:avLst/>
@@ -22810,8 +22810,8 @@
         </p:nvSpPr>
         <p:spPr>
           <a:xfrm>
-            <a:off x="9079992" y="4992624"/>
-            <a:ext cx="896112" cy="365760"/>
+            <a:off x="9079992" y="5157216"/>
+            <a:ext cx="896112" cy="384048"/>
           </a:xfrm>
           <a:prstGeom prst="rect">
             <a:avLst/>
@@ -22849,8 +22849,8 @@
         </p:nvSpPr>
         <p:spPr>
           <a:xfrm>
-            <a:off x="9976104" y="4992624"/>
-            <a:ext cx="566928" cy="365760"/>
+            <a:off x="9976104" y="5157216"/>
+            <a:ext cx="566928" cy="384048"/>
           </a:xfrm>
           <a:prstGeom prst="rect">
             <a:avLst/>
@@ -22888,8 +22888,8 @@
         </p:nvSpPr>
         <p:spPr>
           <a:xfrm>
-            <a:off x="10543032" y="4992624"/>
-            <a:ext cx="877824" cy="365760"/>
+            <a:off x="10543032" y="5157216"/>
+            <a:ext cx="877824" cy="384048"/>
           </a:xfrm>
           <a:prstGeom prst="rect">
             <a:avLst/>
@@ -22927,8 +22927,8 @@
         </p:nvSpPr>
         <p:spPr>
           <a:xfrm>
-            <a:off x="457200" y="5961888"/>
-            <a:ext cx="11274552" cy="548640"/>
+            <a:off x="457200" y="6126480"/>
+            <a:ext cx="11274552" cy="371856"/>
           </a:xfrm>
           <a:prstGeom prst="rect">
             <a:avLst/>
@@ -22947,8 +22947,8 @@
         </p:nvSpPr>
         <p:spPr>
           <a:xfrm>
-            <a:off x="658368" y="5980176"/>
-            <a:ext cx="10927080" cy="512064"/>
+            <a:off x="658368" y="6144768"/>
+            <a:ext cx="10927080" cy="335280"/>
           </a:xfrm>
           <a:prstGeom prst="rect">
             <a:avLst/>
@@ -22972,7 +22972,7 @@
                 <a:ea typeface="Inter" pitchFamily="34" charset="-122"/>
                 <a:cs typeface="Inter" pitchFamily="34" charset="-120"/>
               </a:rPr>
-              <a:t>21 stores under 10% leave $844,657 a year: 5,919 services. CHEVY LV has the most at $150,836.</a:t>
+              <a:t>21 stores under 10% leave $844,657 a year: 5,919 services. Chevy LV has the most at $150,836.</a:t>
             </a:r>
             <a:endParaRPr lang="en-US" sz="1600" dirty="0"/>
           </a:p>
@@ -23117,7 +23117,7 @@
         <p:spPr>
           <a:xfrm>
             <a:off x="457200" y="1207008"/>
-            <a:ext cx="11274552" cy="4645152"/>
+            <a:ext cx="11274552" cy="4782312"/>
           </a:xfrm>
           <a:prstGeom prst="rect">
             <a:avLst/>
@@ -23371,7 +23371,7 @@
         <p:spPr>
           <a:xfrm>
             <a:off x="658368" y="1700784"/>
-            <a:ext cx="1938528" cy="309489"/>
+            <a:ext cx="1938528" cy="324964"/>
           </a:xfrm>
           <a:prstGeom prst="rect">
             <a:avLst/>
@@ -23409,8 +23409,8 @@
         </p:nvSpPr>
         <p:spPr>
           <a:xfrm>
-            <a:off x="2670048" y="1770419"/>
-            <a:ext cx="804672" cy="170219"/>
+            <a:off x="2670048" y="1773901"/>
+            <a:ext cx="804672" cy="178730"/>
           </a:xfrm>
           <a:prstGeom prst="rect">
             <a:avLst/>
@@ -23430,7 +23430,7 @@
         <p:spPr>
           <a:xfrm>
             <a:off x="3529584" y="1700784"/>
-            <a:ext cx="896112" cy="309489"/>
+            <a:ext cx="896112" cy="324964"/>
           </a:xfrm>
           <a:prstGeom prst="rect">
             <a:avLst/>
@@ -23469,7 +23469,7 @@
         <p:spPr>
           <a:xfrm>
             <a:off x="4425696" y="1700784"/>
-            <a:ext cx="566928" cy="309489"/>
+            <a:ext cx="566928" cy="324964"/>
           </a:xfrm>
           <a:prstGeom prst="rect">
             <a:avLst/>
@@ -23508,7 +23508,7 @@
         <p:spPr>
           <a:xfrm>
             <a:off x="4992624" y="1700784"/>
-            <a:ext cx="877824" cy="309489"/>
+            <a:ext cx="877824" cy="324964"/>
           </a:xfrm>
           <a:prstGeom prst="rect">
             <a:avLst/>
@@ -23546,8 +23546,8 @@
         </p:nvSpPr>
         <p:spPr>
           <a:xfrm>
-            <a:off x="658368" y="2010273"/>
-            <a:ext cx="1938528" cy="309489"/>
+            <a:off x="658368" y="2025748"/>
+            <a:ext cx="1938528" cy="324964"/>
           </a:xfrm>
           <a:prstGeom prst="rect">
             <a:avLst/>
@@ -23585,8 +23585,8 @@
         </p:nvSpPr>
         <p:spPr>
           <a:xfrm>
-            <a:off x="2670048" y="2079908"/>
-            <a:ext cx="727080" cy="170219"/>
+            <a:off x="2670048" y="2098865"/>
+            <a:ext cx="727080" cy="178730"/>
           </a:xfrm>
           <a:prstGeom prst="rect">
             <a:avLst/>
@@ -23605,8 +23605,8 @@
         </p:nvSpPr>
         <p:spPr>
           <a:xfrm>
-            <a:off x="3529584" y="2010273"/>
-            <a:ext cx="896112" cy="309489"/>
+            <a:off x="3529584" y="2025748"/>
+            <a:ext cx="896112" cy="324964"/>
           </a:xfrm>
           <a:prstGeom prst="rect">
             <a:avLst/>
@@ -23644,8 +23644,8 @@
         </p:nvSpPr>
         <p:spPr>
           <a:xfrm>
-            <a:off x="4425696" y="2010273"/>
-            <a:ext cx="566928" cy="309489"/>
+            <a:off x="4425696" y="2025748"/>
+            <a:ext cx="566928" cy="324964"/>
           </a:xfrm>
           <a:prstGeom prst="rect">
             <a:avLst/>
@@ -23683,8 +23683,8 @@
         </p:nvSpPr>
         <p:spPr>
           <a:xfrm>
-            <a:off x="4992624" y="2010273"/>
-            <a:ext cx="877824" cy="309489"/>
+            <a:off x="4992624" y="2025748"/>
+            <a:ext cx="877824" cy="324964"/>
           </a:xfrm>
           <a:prstGeom prst="rect">
             <a:avLst/>
@@ -23722,8 +23722,8 @@
         </p:nvSpPr>
         <p:spPr>
           <a:xfrm>
-            <a:off x="658368" y="2319762"/>
-            <a:ext cx="1938528" cy="309489"/>
+            <a:off x="658368" y="2350711"/>
+            <a:ext cx="1938528" cy="324964"/>
           </a:xfrm>
           <a:prstGeom prst="rect">
             <a:avLst/>
@@ -23761,8 +23761,8 @@
         </p:nvSpPr>
         <p:spPr>
           <a:xfrm>
-            <a:off x="2670048" y="2389398"/>
-            <a:ext cx="615724" cy="170219"/>
+            <a:off x="2670048" y="2423828"/>
+            <a:ext cx="615724" cy="178730"/>
           </a:xfrm>
           <a:prstGeom prst="rect">
             <a:avLst/>
@@ -23781,8 +23781,8 @@
         </p:nvSpPr>
         <p:spPr>
           <a:xfrm>
-            <a:off x="3529584" y="2319762"/>
-            <a:ext cx="896112" cy="309489"/>
+            <a:off x="3529584" y="2350711"/>
+            <a:ext cx="896112" cy="324964"/>
           </a:xfrm>
           <a:prstGeom prst="rect">
             <a:avLst/>
@@ -23820,8 +23820,8 @@
         </p:nvSpPr>
         <p:spPr>
           <a:xfrm>
-            <a:off x="4425696" y="2319762"/>
-            <a:ext cx="566928" cy="309489"/>
+            <a:off x="4425696" y="2350711"/>
+            <a:ext cx="566928" cy="324964"/>
           </a:xfrm>
           <a:prstGeom prst="rect">
             <a:avLst/>
@@ -23859,8 +23859,8 @@
         </p:nvSpPr>
         <p:spPr>
           <a:xfrm>
-            <a:off x="4992624" y="2319762"/>
-            <a:ext cx="877824" cy="309489"/>
+            <a:off x="4992624" y="2350711"/>
+            <a:ext cx="877824" cy="324964"/>
           </a:xfrm>
           <a:prstGeom prst="rect">
             <a:avLst/>
@@ -23898,8 +23898,8 @@
         </p:nvSpPr>
         <p:spPr>
           <a:xfrm>
-            <a:off x="658368" y="2629252"/>
-            <a:ext cx="1938528" cy="309489"/>
+            <a:off x="658368" y="2675675"/>
+            <a:ext cx="1938528" cy="324964"/>
           </a:xfrm>
           <a:prstGeom prst="rect">
             <a:avLst/>
@@ -23937,8 +23937,8 @@
         </p:nvSpPr>
         <p:spPr>
           <a:xfrm>
-            <a:off x="2670048" y="2698887"/>
-            <a:ext cx="478631" cy="170219"/>
+            <a:off x="2670048" y="2748792"/>
+            <a:ext cx="478631" cy="178730"/>
           </a:xfrm>
           <a:prstGeom prst="rect">
             <a:avLst/>
@@ -23957,8 +23957,8 @@
         </p:nvSpPr>
         <p:spPr>
           <a:xfrm>
-            <a:off x="3529584" y="2629252"/>
-            <a:ext cx="896112" cy="309489"/>
+            <a:off x="3529584" y="2675675"/>
+            <a:ext cx="896112" cy="324964"/>
           </a:xfrm>
           <a:prstGeom prst="rect">
             <a:avLst/>
@@ -23996,8 +23996,8 @@
         </p:nvSpPr>
         <p:spPr>
           <a:xfrm>
-            <a:off x="4425696" y="2629252"/>
-            <a:ext cx="566928" cy="309489"/>
+            <a:off x="4425696" y="2675675"/>
+            <a:ext cx="566928" cy="324964"/>
           </a:xfrm>
           <a:prstGeom prst="rect">
             <a:avLst/>
@@ -24035,8 +24035,8 @@
         </p:nvSpPr>
         <p:spPr>
           <a:xfrm>
-            <a:off x="4992624" y="2629252"/>
-            <a:ext cx="877824" cy="309489"/>
+            <a:off x="4992624" y="2675675"/>
+            <a:ext cx="877824" cy="324964"/>
           </a:xfrm>
           <a:prstGeom prst="rect">
             <a:avLst/>
@@ -24074,8 +24074,8 @@
         </p:nvSpPr>
         <p:spPr>
           <a:xfrm>
-            <a:off x="658368" y="2938741"/>
-            <a:ext cx="1938528" cy="309489"/>
+            <a:off x="658368" y="3000639"/>
+            <a:ext cx="1938528" cy="324964"/>
           </a:xfrm>
           <a:prstGeom prst="rect">
             <a:avLst/>
@@ -24113,8 +24113,8 @@
         </p:nvSpPr>
         <p:spPr>
           <a:xfrm>
-            <a:off x="2670048" y="3008376"/>
-            <a:ext cx="427501" cy="170219"/>
+            <a:off x="2670048" y="3073756"/>
+            <a:ext cx="427501" cy="178730"/>
           </a:xfrm>
           <a:prstGeom prst="rect">
             <a:avLst/>
@@ -24133,8 +24133,8 @@
         </p:nvSpPr>
         <p:spPr>
           <a:xfrm>
-            <a:off x="3529584" y="2938741"/>
-            <a:ext cx="896112" cy="309489"/>
+            <a:off x="3529584" y="3000639"/>
+            <a:ext cx="896112" cy="324964"/>
           </a:xfrm>
           <a:prstGeom prst="rect">
             <a:avLst/>
@@ -24172,8 +24172,8 @@
         </p:nvSpPr>
         <p:spPr>
           <a:xfrm>
-            <a:off x="4425696" y="2938741"/>
-            <a:ext cx="566928" cy="309489"/>
+            <a:off x="4425696" y="3000639"/>
+            <a:ext cx="566928" cy="324964"/>
           </a:xfrm>
           <a:prstGeom prst="rect">
             <a:avLst/>
@@ -24211,8 +24211,8 @@
         </p:nvSpPr>
         <p:spPr>
           <a:xfrm>
-            <a:off x="4992624" y="2938741"/>
-            <a:ext cx="877824" cy="309489"/>
+            <a:off x="4992624" y="3000639"/>
+            <a:ext cx="877824" cy="324964"/>
           </a:xfrm>
           <a:prstGeom prst="rect">
             <a:avLst/>
@@ -24250,8 +24250,8 @@
         </p:nvSpPr>
         <p:spPr>
           <a:xfrm>
-            <a:off x="658368" y="3248230"/>
-            <a:ext cx="1938528" cy="309489"/>
+            <a:off x="658368" y="3325602"/>
+            <a:ext cx="1938528" cy="324964"/>
           </a:xfrm>
           <a:prstGeom prst="rect">
             <a:avLst/>
@@ -24289,8 +24289,8 @@
         </p:nvSpPr>
         <p:spPr>
           <a:xfrm>
-            <a:off x="2670048" y="3317865"/>
-            <a:ext cx="424538" cy="170219"/>
+            <a:off x="2670048" y="3398719"/>
+            <a:ext cx="424538" cy="178730"/>
           </a:xfrm>
           <a:prstGeom prst="rect">
             <a:avLst/>
@@ -24309,8 +24309,8 @@
         </p:nvSpPr>
         <p:spPr>
           <a:xfrm>
-            <a:off x="3529584" y="3248230"/>
-            <a:ext cx="896112" cy="309489"/>
+            <a:off x="3529584" y="3325602"/>
+            <a:ext cx="896112" cy="324964"/>
           </a:xfrm>
           <a:prstGeom prst="rect">
             <a:avLst/>
@@ -24348,8 +24348,8 @@
         </p:nvSpPr>
         <p:spPr>
           <a:xfrm>
-            <a:off x="4425696" y="3248230"/>
-            <a:ext cx="566928" cy="309489"/>
+            <a:off x="4425696" y="3325602"/>
+            <a:ext cx="566928" cy="324964"/>
           </a:xfrm>
           <a:prstGeom prst="rect">
             <a:avLst/>
@@ -24387,8 +24387,8 @@
         </p:nvSpPr>
         <p:spPr>
           <a:xfrm>
-            <a:off x="4992624" y="3248230"/>
-            <a:ext cx="877824" cy="309489"/>
+            <a:off x="4992624" y="3325602"/>
+            <a:ext cx="877824" cy="324964"/>
           </a:xfrm>
           <a:prstGeom prst="rect">
             <a:avLst/>
@@ -24426,8 +24426,8 @@
         </p:nvSpPr>
         <p:spPr>
           <a:xfrm>
-            <a:off x="658368" y="3557719"/>
-            <a:ext cx="1938528" cy="309489"/>
+            <a:off x="658368" y="3650566"/>
+            <a:ext cx="1938528" cy="324964"/>
           </a:xfrm>
           <a:prstGeom prst="rect">
             <a:avLst/>
@@ -24465,8 +24465,8 @@
         </p:nvSpPr>
         <p:spPr>
           <a:xfrm>
-            <a:off x="2670048" y="3627354"/>
-            <a:ext cx="368655" cy="170219"/>
+            <a:off x="2670048" y="3723683"/>
+            <a:ext cx="368655" cy="178730"/>
           </a:xfrm>
           <a:prstGeom prst="rect">
             <a:avLst/>
@@ -24485,8 +24485,8 @@
         </p:nvSpPr>
         <p:spPr>
           <a:xfrm>
-            <a:off x="3529584" y="3557719"/>
-            <a:ext cx="896112" cy="309489"/>
+            <a:off x="3529584" y="3650566"/>
+            <a:ext cx="896112" cy="324964"/>
           </a:xfrm>
           <a:prstGeom prst="rect">
             <a:avLst/>
@@ -24524,8 +24524,8 @@
         </p:nvSpPr>
         <p:spPr>
           <a:xfrm>
-            <a:off x="4425696" y="3557719"/>
-            <a:ext cx="566928" cy="309489"/>
+            <a:off x="4425696" y="3650566"/>
+            <a:ext cx="566928" cy="324964"/>
           </a:xfrm>
           <a:prstGeom prst="rect">
             <a:avLst/>
@@ -24563,8 +24563,8 @@
         </p:nvSpPr>
         <p:spPr>
           <a:xfrm>
-            <a:off x="4992624" y="3557719"/>
-            <a:ext cx="877824" cy="309489"/>
+            <a:off x="4992624" y="3650566"/>
+            <a:ext cx="877824" cy="324964"/>
           </a:xfrm>
           <a:prstGeom prst="rect">
             <a:avLst/>
@@ -24602,8 +24602,8 @@
         </p:nvSpPr>
         <p:spPr>
           <a:xfrm>
-            <a:off x="658368" y="3867209"/>
-            <a:ext cx="1938528" cy="309489"/>
+            <a:off x="658368" y="3975530"/>
+            <a:ext cx="1938528" cy="324964"/>
           </a:xfrm>
           <a:prstGeom prst="rect">
             <a:avLst/>
@@ -24641,8 +24641,8 @@
         </p:nvSpPr>
         <p:spPr>
           <a:xfrm>
-            <a:off x="2670048" y="3936844"/>
-            <a:ext cx="359513" cy="170219"/>
+            <a:off x="2670048" y="4048647"/>
+            <a:ext cx="359513" cy="178730"/>
           </a:xfrm>
           <a:prstGeom prst="rect">
             <a:avLst/>
@@ -24661,8 +24661,8 @@
         </p:nvSpPr>
         <p:spPr>
           <a:xfrm>
-            <a:off x="3529584" y="3867209"/>
-            <a:ext cx="896112" cy="309489"/>
+            <a:off x="3529584" y="3975530"/>
+            <a:ext cx="896112" cy="324964"/>
           </a:xfrm>
           <a:prstGeom prst="rect">
             <a:avLst/>
@@ -24700,8 +24700,8 @@
         </p:nvSpPr>
         <p:spPr>
           <a:xfrm>
-            <a:off x="4425696" y="3867209"/>
-            <a:ext cx="566928" cy="309489"/>
+            <a:off x="4425696" y="3975530"/>
+            <a:ext cx="566928" cy="324964"/>
           </a:xfrm>
           <a:prstGeom prst="rect">
             <a:avLst/>
@@ -24739,8 +24739,8 @@
         </p:nvSpPr>
         <p:spPr>
           <a:xfrm>
-            <a:off x="4992624" y="3867209"/>
-            <a:ext cx="877824" cy="309489"/>
+            <a:off x="4992624" y="3975530"/>
+            <a:ext cx="877824" cy="324964"/>
           </a:xfrm>
           <a:prstGeom prst="rect">
             <a:avLst/>
@@ -24778,8 +24778,8 @@
         </p:nvSpPr>
         <p:spPr>
           <a:xfrm>
-            <a:off x="658368" y="4176698"/>
-            <a:ext cx="1938528" cy="309489"/>
+            <a:off x="658368" y="4300494"/>
+            <a:ext cx="1938528" cy="324964"/>
           </a:xfrm>
           <a:prstGeom prst="rect">
             <a:avLst/>
@@ -24817,8 +24817,8 @@
         </p:nvSpPr>
         <p:spPr>
           <a:xfrm>
-            <a:off x="2670048" y="4246333"/>
-            <a:ext cx="351554" cy="170219"/>
+            <a:off x="2670048" y="4373610"/>
+            <a:ext cx="351554" cy="178730"/>
           </a:xfrm>
           <a:prstGeom prst="rect">
             <a:avLst/>
@@ -24837,8 +24837,8 @@
         </p:nvSpPr>
         <p:spPr>
           <a:xfrm>
-            <a:off x="3529584" y="4176698"/>
-            <a:ext cx="896112" cy="309489"/>
+            <a:off x="3529584" y="4300494"/>
+            <a:ext cx="896112" cy="324964"/>
           </a:xfrm>
           <a:prstGeom prst="rect">
             <a:avLst/>
@@ -24876,8 +24876,8 @@
         </p:nvSpPr>
         <p:spPr>
           <a:xfrm>
-            <a:off x="4425696" y="4176698"/>
-            <a:ext cx="566928" cy="309489"/>
+            <a:off x="4425696" y="4300494"/>
+            <a:ext cx="566928" cy="324964"/>
           </a:xfrm>
           <a:prstGeom prst="rect">
             <a:avLst/>
@@ -24915,8 +24915,8 @@
         </p:nvSpPr>
         <p:spPr>
           <a:xfrm>
-            <a:off x="4992624" y="4176698"/>
-            <a:ext cx="877824" cy="309489"/>
+            <a:off x="4992624" y="4300494"/>
+            <a:ext cx="877824" cy="324964"/>
           </a:xfrm>
           <a:prstGeom prst="rect">
             <a:avLst/>
@@ -24954,8 +24954,8 @@
         </p:nvSpPr>
         <p:spPr>
           <a:xfrm>
-            <a:off x="658368" y="4486187"/>
-            <a:ext cx="1938528" cy="309489"/>
+            <a:off x="658368" y="4625457"/>
+            <a:ext cx="1938528" cy="324964"/>
           </a:xfrm>
           <a:prstGeom prst="rect">
             <a:avLst/>
@@ -24993,8 +24993,8 @@
         </p:nvSpPr>
         <p:spPr>
           <a:xfrm>
-            <a:off x="2670048" y="4555822"/>
-            <a:ext cx="349253" cy="170219"/>
+            <a:off x="2670048" y="4698574"/>
+            <a:ext cx="349253" cy="178730"/>
           </a:xfrm>
           <a:prstGeom prst="rect">
             <a:avLst/>
@@ -25013,8 +25013,8 @@
         </p:nvSpPr>
         <p:spPr>
           <a:xfrm>
-            <a:off x="3529584" y="4486187"/>
-            <a:ext cx="896112" cy="309489"/>
+            <a:off x="3529584" y="4625457"/>
+            <a:ext cx="896112" cy="324964"/>
           </a:xfrm>
           <a:prstGeom prst="rect">
             <a:avLst/>
@@ -25052,8 +25052,8 @@
         </p:nvSpPr>
         <p:spPr>
           <a:xfrm>
-            <a:off x="4425696" y="4486187"/>
-            <a:ext cx="566928" cy="309489"/>
+            <a:off x="4425696" y="4625457"/>
+            <a:ext cx="566928" cy="324964"/>
           </a:xfrm>
           <a:prstGeom prst="rect">
             <a:avLst/>
@@ -25091,8 +25091,8 @@
         </p:nvSpPr>
         <p:spPr>
           <a:xfrm>
-            <a:off x="4992624" y="4486187"/>
-            <a:ext cx="877824" cy="309489"/>
+            <a:off x="4992624" y="4625457"/>
+            <a:ext cx="877824" cy="324964"/>
           </a:xfrm>
           <a:prstGeom prst="rect">
             <a:avLst/>
@@ -25130,8 +25130,8 @@
         </p:nvSpPr>
         <p:spPr>
           <a:xfrm>
-            <a:off x="658368" y="4795676"/>
-            <a:ext cx="1938528" cy="309489"/>
+            <a:off x="658368" y="4950421"/>
+            <a:ext cx="1938528" cy="324964"/>
           </a:xfrm>
           <a:prstGeom prst="rect">
             <a:avLst/>
@@ -25169,8 +25169,8 @@
         </p:nvSpPr>
         <p:spPr>
           <a:xfrm>
-            <a:off x="2670048" y="4865311"/>
-            <a:ext cx="338933" cy="170219"/>
+            <a:off x="2670048" y="5023538"/>
+            <a:ext cx="338933" cy="178730"/>
           </a:xfrm>
           <a:prstGeom prst="rect">
             <a:avLst/>
@@ -25189,8 +25189,8 @@
         </p:nvSpPr>
         <p:spPr>
           <a:xfrm>
-            <a:off x="3529584" y="4795676"/>
-            <a:ext cx="896112" cy="309489"/>
+            <a:off x="3529584" y="4950421"/>
+            <a:ext cx="896112" cy="324964"/>
           </a:xfrm>
           <a:prstGeom prst="rect">
             <a:avLst/>
@@ -25228,8 +25228,8 @@
         </p:nvSpPr>
         <p:spPr>
           <a:xfrm>
-            <a:off x="4425696" y="4795676"/>
-            <a:ext cx="566928" cy="309489"/>
+            <a:off x="4425696" y="4950421"/>
+            <a:ext cx="566928" cy="324964"/>
           </a:xfrm>
           <a:prstGeom prst="rect">
             <a:avLst/>
@@ -25267,8 +25267,8 @@
         </p:nvSpPr>
         <p:spPr>
           <a:xfrm>
-            <a:off x="4992624" y="4795676"/>
-            <a:ext cx="877824" cy="309489"/>
+            <a:off x="4992624" y="4950421"/>
+            <a:ext cx="877824" cy="324964"/>
           </a:xfrm>
           <a:prstGeom prst="rect">
             <a:avLst/>
@@ -25306,8 +25306,8 @@
         </p:nvSpPr>
         <p:spPr>
           <a:xfrm>
-            <a:off x="658368" y="5105166"/>
-            <a:ext cx="1938528" cy="309489"/>
+            <a:off x="658368" y="5275385"/>
+            <a:ext cx="1938528" cy="324964"/>
           </a:xfrm>
           <a:prstGeom prst="rect">
             <a:avLst/>
@@ -25345,8 +25345,8 @@
         </p:nvSpPr>
         <p:spPr>
           <a:xfrm>
-            <a:off x="2670048" y="5174801"/>
-            <a:ext cx="317170" cy="170219"/>
+            <a:off x="2670048" y="5348501"/>
+            <a:ext cx="317170" cy="178730"/>
           </a:xfrm>
           <a:prstGeom prst="rect">
             <a:avLst/>
@@ -25365,8 +25365,8 @@
         </p:nvSpPr>
         <p:spPr>
           <a:xfrm>
-            <a:off x="3529584" y="5105166"/>
-            <a:ext cx="896112" cy="309489"/>
+            <a:off x="3529584" y="5275385"/>
+            <a:ext cx="896112" cy="324964"/>
           </a:xfrm>
           <a:prstGeom prst="rect">
             <a:avLst/>
@@ -25404,8 +25404,8 @@
         </p:nvSpPr>
         <p:spPr>
           <a:xfrm>
-            <a:off x="4425696" y="5105166"/>
-            <a:ext cx="566928" cy="309489"/>
+            <a:off x="4425696" y="5275385"/>
+            <a:ext cx="566928" cy="324964"/>
           </a:xfrm>
           <a:prstGeom prst="rect">
             <a:avLst/>
@@ -25443,8 +25443,8 @@
         </p:nvSpPr>
         <p:spPr>
           <a:xfrm>
-            <a:off x="4992624" y="5105166"/>
-            <a:ext cx="877824" cy="309489"/>
+            <a:off x="4992624" y="5275385"/>
+            <a:ext cx="877824" cy="324964"/>
           </a:xfrm>
           <a:prstGeom prst="rect">
             <a:avLst/>
@@ -25482,8 +25482,8 @@
         </p:nvSpPr>
         <p:spPr>
           <a:xfrm>
-            <a:off x="658368" y="5414655"/>
-            <a:ext cx="1938528" cy="309489"/>
+            <a:off x="658368" y="5600348"/>
+            <a:ext cx="1938528" cy="324964"/>
           </a:xfrm>
           <a:prstGeom prst="rect">
             <a:avLst/>
@@ -25521,8 +25521,8 @@
         </p:nvSpPr>
         <p:spPr>
           <a:xfrm>
-            <a:off x="2670048" y="5484290"/>
-            <a:ext cx="316483" cy="170219"/>
+            <a:off x="2670048" y="5673465"/>
+            <a:ext cx="316483" cy="178730"/>
           </a:xfrm>
           <a:prstGeom prst="rect">
             <a:avLst/>
@@ -25541,8 +25541,8 @@
         </p:nvSpPr>
         <p:spPr>
           <a:xfrm>
-            <a:off x="3529584" y="5414655"/>
-            <a:ext cx="896112" cy="309489"/>
+            <a:off x="3529584" y="5600348"/>
+            <a:ext cx="896112" cy="324964"/>
           </a:xfrm>
           <a:prstGeom prst="rect">
             <a:avLst/>
@@ -25580,8 +25580,8 @@
         </p:nvSpPr>
         <p:spPr>
           <a:xfrm>
-            <a:off x="4425696" y="5414655"/>
-            <a:ext cx="566928" cy="309489"/>
+            <a:off x="4425696" y="5600348"/>
+            <a:ext cx="566928" cy="324964"/>
           </a:xfrm>
           <a:prstGeom prst="rect">
             <a:avLst/>
@@ -25619,8 +25619,8 @@
         </p:nvSpPr>
         <p:spPr>
           <a:xfrm>
-            <a:off x="4992624" y="5414655"/>
-            <a:ext cx="877824" cy="309489"/>
+            <a:off x="4992624" y="5600348"/>
+            <a:ext cx="877824" cy="324964"/>
           </a:xfrm>
           <a:prstGeom prst="rect">
             <a:avLst/>
@@ -25659,7 +25659,7 @@
         <p:spPr>
           <a:xfrm>
             <a:off x="6208776" y="1700784"/>
-            <a:ext cx="1938528" cy="309489"/>
+            <a:ext cx="1938528" cy="324964"/>
           </a:xfrm>
           <a:prstGeom prst="rect">
             <a:avLst/>
@@ -25697,8 +25697,8 @@
         </p:nvSpPr>
         <p:spPr>
           <a:xfrm>
-            <a:off x="8220456" y="1770419"/>
-            <a:ext cx="290838" cy="170219"/>
+            <a:off x="8220456" y="1773901"/>
+            <a:ext cx="290838" cy="178730"/>
           </a:xfrm>
           <a:prstGeom prst="rect">
             <a:avLst/>
@@ -25718,7 +25718,7 @@
         <p:spPr>
           <a:xfrm>
             <a:off x="9079992" y="1700784"/>
-            <a:ext cx="896112" cy="309489"/>
+            <a:ext cx="896112" cy="324964"/>
           </a:xfrm>
           <a:prstGeom prst="rect">
             <a:avLst/>
@@ -25757,7 +25757,7 @@
         <p:spPr>
           <a:xfrm>
             <a:off x="9976104" y="1700784"/>
-            <a:ext cx="566928" cy="309489"/>
+            <a:ext cx="566928" cy="324964"/>
           </a:xfrm>
           <a:prstGeom prst="rect">
             <a:avLst/>
@@ -25796,7 +25796,7 @@
         <p:spPr>
           <a:xfrm>
             <a:off x="10543032" y="1700784"/>
-            <a:ext cx="877824" cy="309489"/>
+            <a:ext cx="877824" cy="324964"/>
           </a:xfrm>
           <a:prstGeom prst="rect">
             <a:avLst/>
@@ -25834,8 +25834,8 @@
         </p:nvSpPr>
         <p:spPr>
           <a:xfrm>
-            <a:off x="6208776" y="2010273"/>
-            <a:ext cx="1938528" cy="309489"/>
+            <a:off x="6208776" y="2025748"/>
+            <a:ext cx="1938528" cy="324964"/>
           </a:xfrm>
           <a:prstGeom prst="rect">
             <a:avLst/>
@@ -25873,8 +25873,8 @@
         </p:nvSpPr>
         <p:spPr>
           <a:xfrm>
-            <a:off x="8220456" y="2079908"/>
-            <a:ext cx="259149" cy="170219"/>
+            <a:off x="8220456" y="2098865"/>
+            <a:ext cx="259149" cy="178730"/>
           </a:xfrm>
           <a:prstGeom prst="rect">
             <a:avLst/>
@@ -25893,8 +25893,8 @@
         </p:nvSpPr>
         <p:spPr>
           <a:xfrm>
-            <a:off x="9079992" y="2010273"/>
-            <a:ext cx="896112" cy="309489"/>
+            <a:off x="9079992" y="2025748"/>
+            <a:ext cx="896112" cy="324964"/>
           </a:xfrm>
           <a:prstGeom prst="rect">
             <a:avLst/>
@@ -25932,8 +25932,8 @@
         </p:nvSpPr>
         <p:spPr>
           <a:xfrm>
-            <a:off x="9976104" y="2010273"/>
-            <a:ext cx="566928" cy="309489"/>
+            <a:off x="9976104" y="2025748"/>
+            <a:ext cx="566928" cy="324964"/>
           </a:xfrm>
           <a:prstGeom prst="rect">
             <a:avLst/>
@@ -25971,8 +25971,8 @@
         </p:nvSpPr>
         <p:spPr>
           <a:xfrm>
-            <a:off x="10543032" y="2010273"/>
-            <a:ext cx="877824" cy="309489"/>
+            <a:off x="10543032" y="2025748"/>
+            <a:ext cx="877824" cy="324964"/>
           </a:xfrm>
           <a:prstGeom prst="rect">
             <a:avLst/>
@@ -26010,8 +26010,8 @@
         </p:nvSpPr>
         <p:spPr>
           <a:xfrm>
-            <a:off x="6208776" y="2319762"/>
-            <a:ext cx="1938528" cy="309489"/>
+            <a:off x="6208776" y="2350711"/>
+            <a:ext cx="1938528" cy="324964"/>
           </a:xfrm>
           <a:prstGeom prst="rect">
             <a:avLst/>
@@ -26049,8 +26049,8 @@
         </p:nvSpPr>
         <p:spPr>
           <a:xfrm>
-            <a:off x="8220456" y="2389398"/>
-            <a:ext cx="190832" cy="170219"/>
+            <a:off x="8220456" y="2423828"/>
+            <a:ext cx="190832" cy="178730"/>
           </a:xfrm>
           <a:prstGeom prst="rect">
             <a:avLst/>
@@ -26069,8 +26069,8 @@
         </p:nvSpPr>
         <p:spPr>
           <a:xfrm>
-            <a:off x="9079992" y="2319762"/>
-            <a:ext cx="896112" cy="309489"/>
+            <a:off x="9079992" y="2350711"/>
+            <a:ext cx="896112" cy="324964"/>
           </a:xfrm>
           <a:prstGeom prst="rect">
             <a:avLst/>
@@ -26108,8 +26108,8 @@
         </p:nvSpPr>
         <p:spPr>
           <a:xfrm>
-            <a:off x="9976104" y="2319762"/>
-            <a:ext cx="566928" cy="309489"/>
+            <a:off x="9976104" y="2350711"/>
+            <a:ext cx="566928" cy="324964"/>
           </a:xfrm>
           <a:prstGeom prst="rect">
             <a:avLst/>
@@ -26147,8 +26147,8 @@
         </p:nvSpPr>
         <p:spPr>
           <a:xfrm>
-            <a:off x="10543032" y="2319762"/>
-            <a:ext cx="877824" cy="309489"/>
+            <a:off x="10543032" y="2350711"/>
+            <a:ext cx="877824" cy="324964"/>
           </a:xfrm>
           <a:prstGeom prst="rect">
             <a:avLst/>
@@ -26186,8 +26186,8 @@
         </p:nvSpPr>
         <p:spPr>
           <a:xfrm>
-            <a:off x="6208776" y="2629252"/>
-            <a:ext cx="1938528" cy="309489"/>
+            <a:off x="6208776" y="2675675"/>
+            <a:ext cx="1938528" cy="324964"/>
           </a:xfrm>
           <a:prstGeom prst="rect">
             <a:avLst/>
@@ -26225,8 +26225,8 @@
         </p:nvSpPr>
         <p:spPr>
           <a:xfrm>
-            <a:off x="8220456" y="2698887"/>
-            <a:ext cx="163264" cy="170219"/>
+            <a:off x="8220456" y="2748792"/>
+            <a:ext cx="163264" cy="178730"/>
           </a:xfrm>
           <a:prstGeom prst="rect">
             <a:avLst/>
@@ -26245,8 +26245,8 @@
         </p:nvSpPr>
         <p:spPr>
           <a:xfrm>
-            <a:off x="9079992" y="2629252"/>
-            <a:ext cx="896112" cy="309489"/>
+            <a:off x="9079992" y="2675675"/>
+            <a:ext cx="896112" cy="324964"/>
           </a:xfrm>
           <a:prstGeom prst="rect">
             <a:avLst/>
@@ -26284,8 +26284,8 @@
         </p:nvSpPr>
         <p:spPr>
           <a:xfrm>
-            <a:off x="9976104" y="2629252"/>
-            <a:ext cx="566928" cy="309489"/>
+            <a:off x="9976104" y="2675675"/>
+            <a:ext cx="566928" cy="324964"/>
           </a:xfrm>
           <a:prstGeom prst="rect">
             <a:avLst/>
@@ -26323,8 +26323,8 @@
         </p:nvSpPr>
         <p:spPr>
           <a:xfrm>
-            <a:off x="10543032" y="2629252"/>
-            <a:ext cx="877824" cy="309489"/>
+            <a:off x="10543032" y="2675675"/>
+            <a:ext cx="877824" cy="324964"/>
           </a:xfrm>
           <a:prstGeom prst="rect">
             <a:avLst/>
@@ -26362,8 +26362,8 @@
         </p:nvSpPr>
         <p:spPr>
           <a:xfrm>
-            <a:off x="6208776" y="2938741"/>
-            <a:ext cx="1938528" cy="309489"/>
+            <a:off x="6208776" y="3000639"/>
+            <a:ext cx="1938528" cy="324964"/>
           </a:xfrm>
           <a:prstGeom prst="rect">
             <a:avLst/>
@@ -26401,8 +26401,8 @@
         </p:nvSpPr>
         <p:spPr>
           <a:xfrm>
-            <a:off x="8220456" y="3008376"/>
-            <a:ext cx="147423" cy="170219"/>
+            <a:off x="8220456" y="3073756"/>
+            <a:ext cx="147423" cy="178730"/>
           </a:xfrm>
           <a:prstGeom prst="rect">
             <a:avLst/>
@@ -26421,8 +26421,8 @@
         </p:nvSpPr>
         <p:spPr>
           <a:xfrm>
-            <a:off x="9079992" y="2938741"/>
-            <a:ext cx="896112" cy="309489"/>
+            <a:off x="9079992" y="3000639"/>
+            <a:ext cx="896112" cy="324964"/>
           </a:xfrm>
           <a:prstGeom prst="rect">
             <a:avLst/>
@@ -26460,8 +26460,8 @@
         </p:nvSpPr>
         <p:spPr>
           <a:xfrm>
-            <a:off x="9976104" y="2938741"/>
-            <a:ext cx="566928" cy="309489"/>
+            <a:off x="9976104" y="3000639"/>
+            <a:ext cx="566928" cy="324964"/>
           </a:xfrm>
           <a:prstGeom prst="rect">
             <a:avLst/>
@@ -26499,8 +26499,8 @@
         </p:nvSpPr>
         <p:spPr>
           <a:xfrm>
-            <a:off x="10543032" y="2938741"/>
-            <a:ext cx="877824" cy="309489"/>
+            <a:off x="10543032" y="3000639"/>
+            <a:ext cx="877824" cy="324964"/>
           </a:xfrm>
           <a:prstGeom prst="rect">
             <a:avLst/>
@@ -26538,8 +26538,8 @@
         </p:nvSpPr>
         <p:spPr>
           <a:xfrm>
-            <a:off x="6208776" y="3248230"/>
-            <a:ext cx="1938528" cy="309489"/>
+            <a:off x="6208776" y="3325602"/>
+            <a:ext cx="1938528" cy="324964"/>
           </a:xfrm>
           <a:prstGeom prst="rect">
             <a:avLst/>
@@ -26577,8 +26577,8 @@
         </p:nvSpPr>
         <p:spPr>
           <a:xfrm>
-            <a:off x="8220456" y="3317865"/>
-            <a:ext cx="140924" cy="170219"/>
+            <a:off x="8220456" y="3398719"/>
+            <a:ext cx="140924" cy="178730"/>
           </a:xfrm>
           <a:prstGeom prst="rect">
             <a:avLst/>
@@ -26597,8 +26597,8 @@
         </p:nvSpPr>
         <p:spPr>
           <a:xfrm>
-            <a:off x="9079992" y="3248230"/>
-            <a:ext cx="896112" cy="309489"/>
+            <a:off x="9079992" y="3325602"/>
+            <a:ext cx="896112" cy="324964"/>
           </a:xfrm>
           <a:prstGeom prst="rect">
             <a:avLst/>
@@ -26636,8 +26636,8 @@
         </p:nvSpPr>
         <p:spPr>
           <a:xfrm>
-            <a:off x="9976104" y="3248230"/>
-            <a:ext cx="566928" cy="309489"/>
+            <a:off x="9976104" y="3325602"/>
+            <a:ext cx="566928" cy="324964"/>
           </a:xfrm>
           <a:prstGeom prst="rect">
             <a:avLst/>
@@ -26675,8 +26675,8 @@
         </p:nvSpPr>
         <p:spPr>
           <a:xfrm>
-            <a:off x="10543032" y="3248230"/>
-            <a:ext cx="877824" cy="309489"/>
+            <a:off x="10543032" y="3325602"/>
+            <a:ext cx="877824" cy="324964"/>
           </a:xfrm>
           <a:prstGeom prst="rect">
             <a:avLst/>
@@ -26714,8 +26714,8 @@
         </p:nvSpPr>
         <p:spPr>
           <a:xfrm>
-            <a:off x="6208776" y="3557719"/>
-            <a:ext cx="1938528" cy="309489"/>
+            <a:off x="6208776" y="3650566"/>
+            <a:ext cx="1938528" cy="324964"/>
           </a:xfrm>
           <a:prstGeom prst="rect">
             <a:avLst/>
@@ -26753,8 +26753,8 @@
         </p:nvSpPr>
         <p:spPr>
           <a:xfrm>
-            <a:off x="8220456" y="3627354"/>
-            <a:ext cx="134775" cy="170219"/>
+            <a:off x="8220456" y="3723683"/>
+            <a:ext cx="134775" cy="178730"/>
           </a:xfrm>
           <a:prstGeom prst="rect">
             <a:avLst/>
@@ -26773,8 +26773,8 @@
         </p:nvSpPr>
         <p:spPr>
           <a:xfrm>
-            <a:off x="9079992" y="3557719"/>
-            <a:ext cx="896112" cy="309489"/>
+            <a:off x="9079992" y="3650566"/>
+            <a:ext cx="896112" cy="324964"/>
           </a:xfrm>
           <a:prstGeom prst="rect">
             <a:avLst/>
@@ -26812,8 +26812,8 @@
         </p:nvSpPr>
         <p:spPr>
           <a:xfrm>
-            <a:off x="9976104" y="3557719"/>
-            <a:ext cx="566928" cy="309489"/>
+            <a:off x="9976104" y="3650566"/>
+            <a:ext cx="566928" cy="324964"/>
           </a:xfrm>
           <a:prstGeom prst="rect">
             <a:avLst/>
@@ -26851,8 +26851,8 @@
         </p:nvSpPr>
         <p:spPr>
           <a:xfrm>
-            <a:off x="10543032" y="3557719"/>
-            <a:ext cx="877824" cy="309489"/>
+            <a:off x="10543032" y="3650566"/>
+            <a:ext cx="877824" cy="324964"/>
           </a:xfrm>
           <a:prstGeom prst="rect">
             <a:avLst/>
@@ -26890,8 +26890,8 @@
         </p:nvSpPr>
         <p:spPr>
           <a:xfrm>
-            <a:off x="6208776" y="3867209"/>
-            <a:ext cx="1938528" cy="309489"/>
+            <a:off x="6208776" y="3975530"/>
+            <a:ext cx="1938528" cy="324964"/>
           </a:xfrm>
           <a:prstGeom prst="rect">
             <a:avLst/>
@@ -26929,8 +26929,8 @@
         </p:nvSpPr>
         <p:spPr>
           <a:xfrm>
-            <a:off x="8220456" y="3936844"/>
-            <a:ext cx="120016" cy="170219"/>
+            <a:off x="8220456" y="4048647"/>
+            <a:ext cx="120016" cy="178730"/>
           </a:xfrm>
           <a:prstGeom prst="rect">
             <a:avLst/>
@@ -26949,8 +26949,8 @@
         </p:nvSpPr>
         <p:spPr>
           <a:xfrm>
-            <a:off x="9079992" y="3867209"/>
-            <a:ext cx="896112" cy="309489"/>
+            <a:off x="9079992" y="3975530"/>
+            <a:ext cx="896112" cy="324964"/>
           </a:xfrm>
           <a:prstGeom prst="rect">
             <a:avLst/>
@@ -26988,8 +26988,8 @@
         </p:nvSpPr>
         <p:spPr>
           <a:xfrm>
-            <a:off x="9976104" y="3867209"/>
-            <a:ext cx="566928" cy="309489"/>
+            <a:off x="9976104" y="3975530"/>
+            <a:ext cx="566928" cy="324964"/>
           </a:xfrm>
           <a:prstGeom prst="rect">
             <a:avLst/>
@@ -27027,8 +27027,8 @@
         </p:nvSpPr>
         <p:spPr>
           <a:xfrm>
-            <a:off x="10543032" y="3867209"/>
-            <a:ext cx="877824" cy="309489"/>
+            <a:off x="10543032" y="3975530"/>
+            <a:ext cx="877824" cy="324964"/>
           </a:xfrm>
           <a:prstGeom prst="rect">
             <a:avLst/>
@@ -27066,8 +27066,8 @@
         </p:nvSpPr>
         <p:spPr>
           <a:xfrm>
-            <a:off x="6208776" y="4176698"/>
-            <a:ext cx="1938528" cy="309489"/>
+            <a:off x="6208776" y="4300494"/>
+            <a:ext cx="1938528" cy="324964"/>
           </a:xfrm>
           <a:prstGeom prst="rect">
             <a:avLst/>
@@ -27105,8 +27105,8 @@
         </p:nvSpPr>
         <p:spPr>
           <a:xfrm>
-            <a:off x="8220456" y="4246333"/>
-            <a:ext cx="106781" cy="170219"/>
+            <a:off x="8220456" y="4373610"/>
+            <a:ext cx="106781" cy="178730"/>
           </a:xfrm>
           <a:prstGeom prst="rect">
             <a:avLst/>
@@ -27125,8 +27125,8 @@
         </p:nvSpPr>
         <p:spPr>
           <a:xfrm>
-            <a:off x="9079992" y="4176698"/>
-            <a:ext cx="896112" cy="309489"/>
+            <a:off x="9079992" y="4300494"/>
+            <a:ext cx="896112" cy="324964"/>
           </a:xfrm>
           <a:prstGeom prst="rect">
             <a:avLst/>
@@ -27164,8 +27164,8 @@
         </p:nvSpPr>
         <p:spPr>
           <a:xfrm>
-            <a:off x="9976104" y="4176698"/>
-            <a:ext cx="566928" cy="309489"/>
+            <a:off x="9976104" y="4300494"/>
+            <a:ext cx="566928" cy="324964"/>
           </a:xfrm>
           <a:prstGeom prst="rect">
             <a:avLst/>
@@ -27203,8 +27203,8 @@
         </p:nvSpPr>
         <p:spPr>
           <a:xfrm>
-            <a:off x="10543032" y="4176698"/>
-            <a:ext cx="877824" cy="309489"/>
+            <a:off x="10543032" y="4300494"/>
+            <a:ext cx="877824" cy="324964"/>
           </a:xfrm>
           <a:prstGeom prst="rect">
             <a:avLst/>
@@ -27242,8 +27242,8 @@
         </p:nvSpPr>
         <p:spPr>
           <a:xfrm>
-            <a:off x="6208776" y="4486187"/>
-            <a:ext cx="1938528" cy="309489"/>
+            <a:off x="6208776" y="4625457"/>
+            <a:ext cx="1938528" cy="324964"/>
           </a:xfrm>
           <a:prstGeom prst="rect">
             <a:avLst/>
@@ -27281,8 +27281,8 @@
         </p:nvSpPr>
         <p:spPr>
           <a:xfrm>
-            <a:off x="8220456" y="4555822"/>
-            <a:ext cx="103137" cy="170219"/>
+            <a:off x="8220456" y="4698574"/>
+            <a:ext cx="103137" cy="178730"/>
           </a:xfrm>
           <a:prstGeom prst="rect">
             <a:avLst/>
@@ -27301,8 +27301,8 @@
         </p:nvSpPr>
         <p:spPr>
           <a:xfrm>
-            <a:off x="9079992" y="4486187"/>
-            <a:ext cx="896112" cy="309489"/>
+            <a:off x="9079992" y="4625457"/>
+            <a:ext cx="896112" cy="324964"/>
           </a:xfrm>
           <a:prstGeom prst="rect">
             <a:avLst/>
@@ -27340,8 +27340,8 @@
         </p:nvSpPr>
         <p:spPr>
           <a:xfrm>
-            <a:off x="9976104" y="4486187"/>
-            <a:ext cx="566928" cy="309489"/>
+            <a:off x="9976104" y="4625457"/>
+            <a:ext cx="566928" cy="324964"/>
           </a:xfrm>
           <a:prstGeom prst="rect">
             <a:avLst/>
@@ -27379,8 +27379,8 @@
         </p:nvSpPr>
         <p:spPr>
           <a:xfrm>
-            <a:off x="10543032" y="4486187"/>
-            <a:ext cx="877824" cy="309489"/>
+            <a:off x="10543032" y="4625457"/>
+            <a:ext cx="877824" cy="324964"/>
           </a:xfrm>
           <a:prstGeom prst="rect">
             <a:avLst/>
@@ -27418,8 +27418,8 @@
         </p:nvSpPr>
         <p:spPr>
           <a:xfrm>
-            <a:off x="6208776" y="4795676"/>
-            <a:ext cx="1938528" cy="309489"/>
+            <a:off x="6208776" y="4950421"/>
+            <a:ext cx="1938528" cy="324964"/>
           </a:xfrm>
           <a:prstGeom prst="rect">
             <a:avLst/>
@@ -27457,8 +27457,8 @@
         </p:nvSpPr>
         <p:spPr>
           <a:xfrm>
-            <a:off x="8220456" y="4865311"/>
-            <a:ext cx="71967" cy="170219"/>
+            <a:off x="8220456" y="5023538"/>
+            <a:ext cx="71967" cy="178730"/>
           </a:xfrm>
           <a:prstGeom prst="rect">
             <a:avLst/>
@@ -27477,8 +27477,8 @@
         </p:nvSpPr>
         <p:spPr>
           <a:xfrm>
-            <a:off x="9079992" y="4795676"/>
-            <a:ext cx="896112" cy="309489"/>
+            <a:off x="9079992" y="4950421"/>
+            <a:ext cx="896112" cy="324964"/>
           </a:xfrm>
           <a:prstGeom prst="rect">
             <a:avLst/>
@@ -27516,8 +27516,8 @@
         </p:nvSpPr>
         <p:spPr>
           <a:xfrm>
-            <a:off x="9976104" y="4795676"/>
-            <a:ext cx="566928" cy="309489"/>
+            <a:off x="9976104" y="4950421"/>
+            <a:ext cx="566928" cy="324964"/>
           </a:xfrm>
           <a:prstGeom prst="rect">
             <a:avLst/>
@@ -27555,8 +27555,8 @@
         </p:nvSpPr>
         <p:spPr>
           <a:xfrm>
-            <a:off x="10543032" y="4795676"/>
-            <a:ext cx="877824" cy="309489"/>
+            <a:off x="10543032" y="4950421"/>
+            <a:ext cx="877824" cy="324964"/>
           </a:xfrm>
           <a:prstGeom prst="rect">
             <a:avLst/>
@@ -27594,8 +27594,8 @@
         </p:nvSpPr>
         <p:spPr>
           <a:xfrm>
-            <a:off x="6208776" y="5105166"/>
-            <a:ext cx="1938528" cy="309489"/>
+            <a:off x="6208776" y="5275385"/>
+            <a:ext cx="1938528" cy="324964"/>
           </a:xfrm>
           <a:prstGeom prst="rect">
             <a:avLst/>
@@ -27633,8 +27633,8 @@
         </p:nvSpPr>
         <p:spPr>
           <a:xfrm>
-            <a:off x="8220456" y="5174801"/>
-            <a:ext cx="57713" cy="170219"/>
+            <a:off x="8220456" y="5348501"/>
+            <a:ext cx="57713" cy="178730"/>
           </a:xfrm>
           <a:prstGeom prst="rect">
             <a:avLst/>
@@ -27653,8 +27653,8 @@
         </p:nvSpPr>
         <p:spPr>
           <a:xfrm>
-            <a:off x="9079992" y="5105166"/>
-            <a:ext cx="896112" cy="309489"/>
+            <a:off x="9079992" y="5275385"/>
+            <a:ext cx="896112" cy="324964"/>
           </a:xfrm>
           <a:prstGeom prst="rect">
             <a:avLst/>
@@ -27692,8 +27692,8 @@
         </p:nvSpPr>
         <p:spPr>
           <a:xfrm>
-            <a:off x="9976104" y="5105166"/>
-            <a:ext cx="566928" cy="309489"/>
+            <a:off x="9976104" y="5275385"/>
+            <a:ext cx="566928" cy="324964"/>
           </a:xfrm>
           <a:prstGeom prst="rect">
             <a:avLst/>
@@ -27731,8 +27731,8 @@
         </p:nvSpPr>
         <p:spPr>
           <a:xfrm>
-            <a:off x="10543032" y="5105166"/>
-            <a:ext cx="877824" cy="309489"/>
+            <a:off x="10543032" y="5275385"/>
+            <a:ext cx="877824" cy="324964"/>
           </a:xfrm>
           <a:prstGeom prst="rect">
             <a:avLst/>
@@ -27770,8 +27770,8 @@
         </p:nvSpPr>
         <p:spPr>
           <a:xfrm>
-            <a:off x="6208776" y="5414655"/>
-            <a:ext cx="1938528" cy="309489"/>
+            <a:off x="6208776" y="5600348"/>
+            <a:ext cx="1938528" cy="324964"/>
           </a:xfrm>
           <a:prstGeom prst="rect">
             <a:avLst/>
@@ -27809,8 +27809,8 @@
         </p:nvSpPr>
         <p:spPr>
           <a:xfrm>
-            <a:off x="8220456" y="5484290"/>
-            <a:ext cx="18288" cy="170219"/>
+            <a:off x="8220456" y="5673465"/>
+            <a:ext cx="18288" cy="178730"/>
           </a:xfrm>
           <a:prstGeom prst="rect">
             <a:avLst/>
@@ -27829,8 +27829,8 @@
         </p:nvSpPr>
         <p:spPr>
           <a:xfrm>
-            <a:off x="9079992" y="5414655"/>
-            <a:ext cx="896112" cy="309489"/>
+            <a:off x="9079992" y="5600348"/>
+            <a:ext cx="896112" cy="324964"/>
           </a:xfrm>
           <a:prstGeom prst="rect">
             <a:avLst/>
@@ -27868,8 +27868,8 @@
         </p:nvSpPr>
         <p:spPr>
           <a:xfrm>
-            <a:off x="9976104" y="5414655"/>
-            <a:ext cx="566928" cy="309489"/>
+            <a:off x="9976104" y="5600348"/>
+            <a:ext cx="566928" cy="324964"/>
           </a:xfrm>
           <a:prstGeom prst="rect">
             <a:avLst/>
@@ -27907,8 +27907,8 @@
         </p:nvSpPr>
         <p:spPr>
           <a:xfrm>
-            <a:off x="10543032" y="5414655"/>
-            <a:ext cx="877824" cy="309489"/>
+            <a:off x="10543032" y="5600348"/>
+            <a:ext cx="877824" cy="324964"/>
           </a:xfrm>
           <a:prstGeom prst="rect">
             <a:avLst/>
@@ -27946,8 +27946,8 @@
         </p:nvSpPr>
         <p:spPr>
           <a:xfrm>
-            <a:off x="457200" y="5961888"/>
-            <a:ext cx="11274552" cy="548640"/>
+            <a:off x="457200" y="6126480"/>
+            <a:ext cx="11274552" cy="371856"/>
           </a:xfrm>
           <a:prstGeom prst="rect">
             <a:avLst/>
@@ -27966,8 +27966,8 @@
         </p:nvSpPr>
         <p:spPr>
           <a:xfrm>
-            <a:off x="658368" y="5980176"/>
-            <a:ext cx="10927080" cy="512064"/>
+            <a:off x="658368" y="6144768"/>
+            <a:ext cx="10927080" cy="335280"/>
           </a:xfrm>
           <a:prstGeom prst="rect">
             <a:avLst/>
@@ -27991,7 +27991,7 @@
                 <a:ea typeface="Inter" pitchFamily="34" charset="-122"/>
                 <a:cs typeface="Inter" pitchFamily="34" charset="-120"/>
               </a:rPr>
-              <a:t>26 stores under 7.5% leave $1,356,881 a year: 8,527 services. CHEVY LV has the most at $142,290.</a:t>
+              <a:t>26 stores under 7.5% leave $1,356,881 a year: 8,527 services. Chevy LV has the most at $142,290.</a:t>
             </a:r>
             <a:endParaRPr lang="en-US" sz="1600" dirty="0"/>
           </a:p>

--- a/day2-deck/decks/Op Code Missed Opportunity - Review.pptx
+++ b/day2-deck/decks/Op Code Missed Opportunity - Review.pptx
@@ -2532,8 +2532,8 @@
         </p:nvSpPr>
         <p:spPr>
           <a:xfrm>
-            <a:off x="3529584" y="1316736"/>
-            <a:ext cx="896112" cy="329184"/>
+            <a:off x="3602736" y="1316736"/>
+            <a:ext cx="822960" cy="329184"/>
           </a:xfrm>
           <a:prstGeom prst="rect">
             <a:avLst/>
@@ -2649,8 +2649,8 @@
         </p:nvSpPr>
         <p:spPr>
           <a:xfrm>
-            <a:off x="9079992" y="1316736"/>
-            <a:ext cx="896112" cy="329184"/>
+            <a:off x="9153144" y="1316736"/>
+            <a:ext cx="822960" cy="329184"/>
           </a:xfrm>
           <a:prstGeom prst="rect">
             <a:avLst/>
@@ -2806,7 +2806,7 @@
         <p:spPr>
           <a:xfrm>
             <a:off x="2670048" y="1760191"/>
-            <a:ext cx="804672" cy="145218"/>
+            <a:ext cx="877824" cy="145218"/>
           </a:xfrm>
           <a:prstGeom prst="rect">
             <a:avLst/>
@@ -2825,8 +2825,8 @@
         </p:nvSpPr>
         <p:spPr>
           <a:xfrm>
-            <a:off x="3529584" y="1700784"/>
-            <a:ext cx="896112" cy="264033"/>
+            <a:off x="3602736" y="1700784"/>
+            <a:ext cx="822960" cy="264033"/>
           </a:xfrm>
           <a:prstGeom prst="rect">
             <a:avLst/>
@@ -2850,7 +2850,7 @@
                 <a:ea typeface="Inter" pitchFamily="34" charset="-122"/>
                 <a:cs typeface="Inter" pitchFamily="34" charset="-120"/>
               </a:rPr>
-              <a:t>$541,039</a:t>
+              <a:t>$541K</a:t>
             </a:r>
             <a:endParaRPr lang="en-US" sz="1300" dirty="0"/>
           </a:p>
@@ -2982,7 +2982,7 @@
         <p:spPr>
           <a:xfrm>
             <a:off x="2670048" y="2024224"/>
-            <a:ext cx="706276" cy="145218"/>
+            <a:ext cx="770483" cy="145218"/>
           </a:xfrm>
           <a:prstGeom prst="rect">
             <a:avLst/>
@@ -3001,8 +3001,8 @@
         </p:nvSpPr>
         <p:spPr>
           <a:xfrm>
-            <a:off x="3529584" y="1964817"/>
-            <a:ext cx="896112" cy="264033"/>
+            <a:off x="3602736" y="1964817"/>
+            <a:ext cx="822960" cy="264033"/>
           </a:xfrm>
           <a:prstGeom prst="rect">
             <a:avLst/>
@@ -3026,7 +3026,7 @@
                 <a:ea typeface="Inter" pitchFamily="34" charset="-122"/>
                 <a:cs typeface="Inter" pitchFamily="34" charset="-120"/>
               </a:rPr>
-              <a:t>$474,880</a:t>
+              <a:t>$475K</a:t>
             </a:r>
             <a:endParaRPr lang="en-US" sz="1300" dirty="0"/>
           </a:p>
@@ -3158,7 +3158,7 @@
         <p:spPr>
           <a:xfrm>
             <a:off x="2670048" y="2288257"/>
-            <a:ext cx="528954" cy="145218"/>
+            <a:ext cx="577040" cy="145218"/>
           </a:xfrm>
           <a:prstGeom prst="rect">
             <a:avLst/>
@@ -3177,8 +3177,8 @@
         </p:nvSpPr>
         <p:spPr>
           <a:xfrm>
-            <a:off x="3529584" y="2228850"/>
-            <a:ext cx="896112" cy="264033"/>
+            <a:off x="3602736" y="2228850"/>
+            <a:ext cx="822960" cy="264033"/>
           </a:xfrm>
           <a:prstGeom prst="rect">
             <a:avLst/>
@@ -3202,7 +3202,7 @@
                 <a:ea typeface="Inter" pitchFamily="34" charset="-122"/>
                 <a:cs typeface="Inter" pitchFamily="34" charset="-120"/>
               </a:rPr>
-              <a:t>$355,653</a:t>
+              <a:t>$356K</a:t>
             </a:r>
             <a:endParaRPr lang="en-US" sz="1300" dirty="0"/>
           </a:p>
@@ -3334,7 +3334,7 @@
         <p:spPr>
           <a:xfrm>
             <a:off x="2670048" y="2552290"/>
-            <a:ext cx="459669" cy="145218"/>
+            <a:ext cx="501457" cy="145218"/>
           </a:xfrm>
           <a:prstGeom prst="rect">
             <a:avLst/>
@@ -3353,8 +3353,8 @@
         </p:nvSpPr>
         <p:spPr>
           <a:xfrm>
-            <a:off x="3529584" y="2492883"/>
-            <a:ext cx="896112" cy="264033"/>
+            <a:off x="3602736" y="2492883"/>
+            <a:ext cx="822960" cy="264033"/>
           </a:xfrm>
           <a:prstGeom prst="rect">
             <a:avLst/>
@@ -3378,7 +3378,7 @@
                 <a:ea typeface="Inter" pitchFamily="34" charset="-122"/>
                 <a:cs typeface="Inter" pitchFamily="34" charset="-120"/>
               </a:rPr>
-              <a:t>$309,068</a:t>
+              <a:t>$309K</a:t>
             </a:r>
             <a:endParaRPr lang="en-US" sz="1300" dirty="0"/>
           </a:p>
@@ -3510,7 +3510,7 @@
         <p:spPr>
           <a:xfrm>
             <a:off x="2670048" y="2816323"/>
-            <a:ext cx="366701" cy="145218"/>
+            <a:ext cx="400038" cy="145218"/>
           </a:xfrm>
           <a:prstGeom prst="rect">
             <a:avLst/>
@@ -3529,8 +3529,8 @@
         </p:nvSpPr>
         <p:spPr>
           <a:xfrm>
-            <a:off x="3529584" y="2756916"/>
-            <a:ext cx="896112" cy="264033"/>
+            <a:off x="3602736" y="2756916"/>
+            <a:ext cx="822960" cy="264033"/>
           </a:xfrm>
           <a:prstGeom prst="rect">
             <a:avLst/>
@@ -3554,7 +3554,7 @@
                 <a:ea typeface="Inter" pitchFamily="34" charset="-122"/>
                 <a:cs typeface="Inter" pitchFamily="34" charset="-120"/>
               </a:rPr>
-              <a:t>$246,559</a:t>
+              <a:t>$247K</a:t>
             </a:r>
             <a:endParaRPr lang="en-US" sz="1300" dirty="0"/>
           </a:p>
@@ -3686,7 +3686,7 @@
         <p:spPr>
           <a:xfrm>
             <a:off x="2670048" y="3080356"/>
-            <a:ext cx="363983" cy="145218"/>
+            <a:ext cx="397072" cy="145218"/>
           </a:xfrm>
           <a:prstGeom prst="rect">
             <a:avLst/>
@@ -3705,8 +3705,8 @@
         </p:nvSpPr>
         <p:spPr>
           <a:xfrm>
-            <a:off x="3529584" y="3020949"/>
-            <a:ext cx="896112" cy="264033"/>
+            <a:off x="3602736" y="3020949"/>
+            <a:ext cx="822960" cy="264033"/>
           </a:xfrm>
           <a:prstGeom prst="rect">
             <a:avLst/>
@@ -3730,7 +3730,7 @@
                 <a:ea typeface="Inter" pitchFamily="34" charset="-122"/>
                 <a:cs typeface="Inter" pitchFamily="34" charset="-120"/>
               </a:rPr>
-              <a:t>$244,731</a:t>
+              <a:t>$245K</a:t>
             </a:r>
             <a:endParaRPr lang="en-US" sz="1300" dirty="0"/>
           </a:p>
@@ -3862,7 +3862,7 @@
         <p:spPr>
           <a:xfrm>
             <a:off x="2670048" y="3344389"/>
-            <a:ext cx="346113" cy="145218"/>
+            <a:ext cx="377578" cy="145218"/>
           </a:xfrm>
           <a:prstGeom prst="rect">
             <a:avLst/>
@@ -3881,8 +3881,8 @@
         </p:nvSpPr>
         <p:spPr>
           <a:xfrm>
-            <a:off x="3529584" y="3284982"/>
-            <a:ext cx="896112" cy="264033"/>
+            <a:off x="3602736" y="3284982"/>
+            <a:ext cx="822960" cy="264033"/>
           </a:xfrm>
           <a:prstGeom prst="rect">
             <a:avLst/>
@@ -3906,7 +3906,7 @@
                 <a:ea typeface="Inter" pitchFamily="34" charset="-122"/>
                 <a:cs typeface="Inter" pitchFamily="34" charset="-120"/>
               </a:rPr>
-              <a:t>$232,717</a:t>
+              <a:t>$233K</a:t>
             </a:r>
             <a:endParaRPr lang="en-US" sz="1300" dirty="0"/>
           </a:p>
@@ -4038,7 +4038,7 @@
         <p:spPr>
           <a:xfrm>
             <a:off x="2670048" y="3608422"/>
-            <a:ext cx="332201" cy="145218"/>
+            <a:ext cx="362401" cy="145218"/>
           </a:xfrm>
           <a:prstGeom prst="rect">
             <a:avLst/>
@@ -4057,8 +4057,8 @@
         </p:nvSpPr>
         <p:spPr>
           <a:xfrm>
-            <a:off x="3529584" y="3549015"/>
-            <a:ext cx="896112" cy="264033"/>
+            <a:off x="3602736" y="3549015"/>
+            <a:ext cx="822960" cy="264033"/>
           </a:xfrm>
           <a:prstGeom prst="rect">
             <a:avLst/>
@@ -4082,7 +4082,7 @@
                 <a:ea typeface="Inter" pitchFamily="34" charset="-122"/>
                 <a:cs typeface="Inter" pitchFamily="34" charset="-120"/>
               </a:rPr>
-              <a:t>$223,362</a:t>
+              <a:t>$223K</a:t>
             </a:r>
             <a:endParaRPr lang="en-US" sz="1300" dirty="0"/>
           </a:p>
@@ -4214,7 +4214,7 @@
         <p:spPr>
           <a:xfrm>
             <a:off x="2670048" y="3872455"/>
-            <a:ext cx="320639" cy="145218"/>
+            <a:ext cx="349788" cy="145218"/>
           </a:xfrm>
           <a:prstGeom prst="rect">
             <a:avLst/>
@@ -4233,8 +4233,8 @@
         </p:nvSpPr>
         <p:spPr>
           <a:xfrm>
-            <a:off x="3529584" y="3813048"/>
-            <a:ext cx="896112" cy="264033"/>
+            <a:off x="3602736" y="3813048"/>
+            <a:ext cx="822960" cy="264033"/>
           </a:xfrm>
           <a:prstGeom prst="rect">
             <a:avLst/>
@@ -4258,7 +4258,7 @@
                 <a:ea typeface="Inter" pitchFamily="34" charset="-122"/>
                 <a:cs typeface="Inter" pitchFamily="34" charset="-120"/>
               </a:rPr>
-              <a:t>$215,588</a:t>
+              <a:t>$216K</a:t>
             </a:r>
             <a:endParaRPr lang="en-US" sz="1300" dirty="0"/>
           </a:p>
@@ -4390,7 +4390,7 @@
         <p:spPr>
           <a:xfrm>
             <a:off x="2670048" y="4136488"/>
-            <a:ext cx="297413" cy="145218"/>
+            <a:ext cx="324451" cy="145218"/>
           </a:xfrm>
           <a:prstGeom prst="rect">
             <a:avLst/>
@@ -4409,8 +4409,8 @@
         </p:nvSpPr>
         <p:spPr>
           <a:xfrm>
-            <a:off x="3529584" y="4077081"/>
-            <a:ext cx="896112" cy="264033"/>
+            <a:off x="3602736" y="4077081"/>
+            <a:ext cx="822960" cy="264033"/>
           </a:xfrm>
           <a:prstGeom prst="rect">
             <a:avLst/>
@@ -4434,7 +4434,7 @@
                 <a:ea typeface="Inter" pitchFamily="34" charset="-122"/>
                 <a:cs typeface="Inter" pitchFamily="34" charset="-120"/>
               </a:rPr>
-              <a:t>$199,972</a:t>
+              <a:t>$200K</a:t>
             </a:r>
             <a:endParaRPr lang="en-US" sz="1300" dirty="0"/>
           </a:p>
@@ -4566,7 +4566,7 @@
         <p:spPr>
           <a:xfrm>
             <a:off x="2670048" y="4400521"/>
-            <a:ext cx="286859" cy="145218"/>
+            <a:ext cx="312937" cy="145218"/>
           </a:xfrm>
           <a:prstGeom prst="rect">
             <a:avLst/>
@@ -4585,8 +4585,8 @@
         </p:nvSpPr>
         <p:spPr>
           <a:xfrm>
-            <a:off x="3529584" y="4341114"/>
-            <a:ext cx="896112" cy="264033"/>
+            <a:off x="3602736" y="4341114"/>
+            <a:ext cx="822960" cy="264033"/>
           </a:xfrm>
           <a:prstGeom prst="rect">
             <a:avLst/>
@@ -4610,7 +4610,7 @@
                 <a:ea typeface="Inter" pitchFamily="34" charset="-122"/>
                 <a:cs typeface="Inter" pitchFamily="34" charset="-120"/>
               </a:rPr>
-              <a:t>$192,876</a:t>
+              <a:t>$193K</a:t>
             </a:r>
             <a:endParaRPr lang="en-US" sz="1300" dirty="0"/>
           </a:p>
@@ -4742,7 +4742,7 @@
         <p:spPr>
           <a:xfrm>
             <a:off x="2670048" y="4664554"/>
-            <a:ext cx="284748" cy="145218"/>
+            <a:ext cx="310634" cy="145218"/>
           </a:xfrm>
           <a:prstGeom prst="rect">
             <a:avLst/>
@@ -4761,8 +4761,8 @@
         </p:nvSpPr>
         <p:spPr>
           <a:xfrm>
-            <a:off x="3529584" y="4605147"/>
-            <a:ext cx="896112" cy="264033"/>
+            <a:off x="3602736" y="4605147"/>
+            <a:ext cx="822960" cy="264033"/>
           </a:xfrm>
           <a:prstGeom prst="rect">
             <a:avLst/>
@@ -4786,7 +4786,7 @@
                 <a:ea typeface="Inter" pitchFamily="34" charset="-122"/>
                 <a:cs typeface="Inter" pitchFamily="34" charset="-120"/>
               </a:rPr>
-              <a:t>$191,456</a:t>
+              <a:t>$191K</a:t>
             </a:r>
             <a:endParaRPr lang="en-US" sz="1300" dirty="0"/>
           </a:p>
@@ -4918,7 +4918,7 @@
         <p:spPr>
           <a:xfrm>
             <a:off x="2670048" y="4928587"/>
-            <a:ext cx="219428" cy="145218"/>
+            <a:ext cx="239376" cy="145218"/>
           </a:xfrm>
           <a:prstGeom prst="rect">
             <a:avLst/>
@@ -4937,8 +4937,8 @@
         </p:nvSpPr>
         <p:spPr>
           <a:xfrm>
-            <a:off x="3529584" y="4869180"/>
-            <a:ext cx="896112" cy="264033"/>
+            <a:off x="3602736" y="4869180"/>
+            <a:ext cx="822960" cy="264033"/>
           </a:xfrm>
           <a:prstGeom prst="rect">
             <a:avLst/>
@@ -4962,7 +4962,7 @@
                 <a:ea typeface="Inter" pitchFamily="34" charset="-122"/>
                 <a:cs typeface="Inter" pitchFamily="34" charset="-120"/>
               </a:rPr>
-              <a:t>$147,537</a:t>
+              <a:t>$148K</a:t>
             </a:r>
             <a:endParaRPr lang="en-US" sz="1300" dirty="0"/>
           </a:p>
@@ -5094,7 +5094,7 @@
         <p:spPr>
           <a:xfrm>
             <a:off x="2670048" y="5192620"/>
-            <a:ext cx="208978" cy="145218"/>
+            <a:ext cx="227976" cy="145218"/>
           </a:xfrm>
           <a:prstGeom prst="rect">
             <a:avLst/>
@@ -5113,8 +5113,8 @@
         </p:nvSpPr>
         <p:spPr>
           <a:xfrm>
-            <a:off x="3529584" y="5133213"/>
-            <a:ext cx="896112" cy="264033"/>
+            <a:off x="3602736" y="5133213"/>
+            <a:ext cx="822960" cy="264033"/>
           </a:xfrm>
           <a:prstGeom prst="rect">
             <a:avLst/>
@@ -5138,7 +5138,7 @@
                 <a:ea typeface="Inter" pitchFamily="34" charset="-122"/>
                 <a:cs typeface="Inter" pitchFamily="34" charset="-120"/>
               </a:rPr>
-              <a:t>$140,511</a:t>
+              <a:t>$141K</a:t>
             </a:r>
             <a:endParaRPr lang="en-US" sz="1300" dirty="0"/>
           </a:p>
@@ -5270,7 +5270,7 @@
         <p:spPr>
           <a:xfrm>
             <a:off x="2670048" y="5456653"/>
-            <a:ext cx="207980" cy="145218"/>
+            <a:ext cx="226887" cy="145218"/>
           </a:xfrm>
           <a:prstGeom prst="rect">
             <a:avLst/>
@@ -5289,8 +5289,8 @@
         </p:nvSpPr>
         <p:spPr>
           <a:xfrm>
-            <a:off x="3529584" y="5397246"/>
-            <a:ext cx="896112" cy="264033"/>
+            <a:off x="3602736" y="5397246"/>
+            <a:ext cx="822960" cy="264033"/>
           </a:xfrm>
           <a:prstGeom prst="rect">
             <a:avLst/>
@@ -5314,7 +5314,7 @@
                 <a:ea typeface="Inter" pitchFamily="34" charset="-122"/>
                 <a:cs typeface="Inter" pitchFamily="34" charset="-120"/>
               </a:rPr>
-              <a:t>$139,840</a:t>
+              <a:t>$140K</a:t>
             </a:r>
             <a:endParaRPr lang="en-US" sz="1300" dirty="0"/>
           </a:p>
@@ -5446,7 +5446,7 @@
         <p:spPr>
           <a:xfrm>
             <a:off x="2670048" y="5720686"/>
-            <a:ext cx="197393" cy="145218"/>
+            <a:ext cx="215338" cy="145218"/>
           </a:xfrm>
           <a:prstGeom prst="rect">
             <a:avLst/>
@@ -5465,8 +5465,8 @@
         </p:nvSpPr>
         <p:spPr>
           <a:xfrm>
-            <a:off x="3529584" y="5661279"/>
-            <a:ext cx="896112" cy="264033"/>
+            <a:off x="3602736" y="5661279"/>
+            <a:ext cx="822960" cy="264033"/>
           </a:xfrm>
           <a:prstGeom prst="rect">
             <a:avLst/>
@@ -5490,7 +5490,7 @@
                 <a:ea typeface="Inter" pitchFamily="34" charset="-122"/>
                 <a:cs typeface="Inter" pitchFamily="34" charset="-120"/>
               </a:rPr>
-              <a:t>$132,721</a:t>
+              <a:t>$133K</a:t>
             </a:r>
             <a:endParaRPr lang="en-US" sz="1300" dirty="0"/>
           </a:p>
@@ -5622,7 +5622,7 @@
         <p:spPr>
           <a:xfrm>
             <a:off x="8220456" y="1760191"/>
-            <a:ext cx="187318" cy="145218"/>
+            <a:ext cx="204347" cy="145218"/>
           </a:xfrm>
           <a:prstGeom prst="rect">
             <a:avLst/>
@@ -5641,8 +5641,8 @@
         </p:nvSpPr>
         <p:spPr>
           <a:xfrm>
-            <a:off x="9079992" y="1700784"/>
-            <a:ext cx="896112" cy="264033"/>
+            <a:off x="9153144" y="1700784"/>
+            <a:ext cx="822960" cy="264033"/>
           </a:xfrm>
           <a:prstGeom prst="rect">
             <a:avLst/>
@@ -5666,7 +5666,7 @@
                 <a:ea typeface="Inter" pitchFamily="34" charset="-122"/>
                 <a:cs typeface="Inter" pitchFamily="34" charset="-120"/>
               </a:rPr>
-              <a:t>$125,947</a:t>
+              <a:t>$126K</a:t>
             </a:r>
             <a:endParaRPr lang="en-US" sz="1300" dirty="0"/>
           </a:p>
@@ -5798,7 +5798,7 @@
         <p:spPr>
           <a:xfrm>
             <a:off x="8220456" y="2024224"/>
-            <a:ext cx="130556" cy="145218"/>
+            <a:ext cx="142425" cy="145218"/>
           </a:xfrm>
           <a:prstGeom prst="rect">
             <a:avLst/>
@@ -5817,8 +5817,8 @@
         </p:nvSpPr>
         <p:spPr>
           <a:xfrm>
-            <a:off x="9079992" y="1964817"/>
-            <a:ext cx="896112" cy="264033"/>
+            <a:off x="9153144" y="1964817"/>
+            <a:ext cx="822960" cy="264033"/>
           </a:xfrm>
           <a:prstGeom prst="rect">
             <a:avLst/>
@@ -5842,7 +5842,7 @@
                 <a:ea typeface="Inter" pitchFamily="34" charset="-122"/>
                 <a:cs typeface="Inter" pitchFamily="34" charset="-120"/>
               </a:rPr>
-              <a:t>$87,782</a:t>
+              <a:t>$88K</a:t>
             </a:r>
             <a:endParaRPr lang="en-US" sz="1300" dirty="0"/>
           </a:p>
@@ -5974,7 +5974,7 @@
         <p:spPr>
           <a:xfrm>
             <a:off x="8220456" y="2288257"/>
-            <a:ext cx="130163" cy="145218"/>
+            <a:ext cx="141996" cy="145218"/>
           </a:xfrm>
           <a:prstGeom prst="rect">
             <a:avLst/>
@@ -5993,8 +5993,8 @@
         </p:nvSpPr>
         <p:spPr>
           <a:xfrm>
-            <a:off x="9079992" y="2228850"/>
-            <a:ext cx="896112" cy="264033"/>
+            <a:off x="9153144" y="2228850"/>
+            <a:ext cx="822960" cy="264033"/>
           </a:xfrm>
           <a:prstGeom prst="rect">
             <a:avLst/>
@@ -6018,7 +6018,7 @@
                 <a:ea typeface="Inter" pitchFamily="34" charset="-122"/>
                 <a:cs typeface="Inter" pitchFamily="34" charset="-120"/>
               </a:rPr>
-              <a:t>$87,518</a:t>
+              <a:t>$88K</a:t>
             </a:r>
             <a:endParaRPr lang="en-US" sz="1300" dirty="0"/>
           </a:p>
@@ -6150,7 +6150,7 @@
         <p:spPr>
           <a:xfrm>
             <a:off x="8220456" y="2552290"/>
-            <a:ext cx="121390" cy="145218"/>
+            <a:ext cx="132425" cy="145218"/>
           </a:xfrm>
           <a:prstGeom prst="rect">
             <a:avLst/>
@@ -6169,8 +6169,8 @@
         </p:nvSpPr>
         <p:spPr>
           <a:xfrm>
-            <a:off x="9079992" y="2492883"/>
-            <a:ext cx="896112" cy="264033"/>
+            <a:off x="9153144" y="2492883"/>
+            <a:ext cx="822960" cy="264033"/>
           </a:xfrm>
           <a:prstGeom prst="rect">
             <a:avLst/>
@@ -6194,7 +6194,7 @@
                 <a:ea typeface="Inter" pitchFamily="34" charset="-122"/>
                 <a:cs typeface="Inter" pitchFamily="34" charset="-120"/>
               </a:rPr>
-              <a:t>$81,619</a:t>
+              <a:t>$82K</a:t>
             </a:r>
             <a:endParaRPr lang="en-US" sz="1300" dirty="0"/>
           </a:p>
@@ -6326,7 +6326,7 @@
         <p:spPr>
           <a:xfrm>
             <a:off x="8220456" y="2816323"/>
-            <a:ext cx="120162" cy="145218"/>
+            <a:ext cx="131085" cy="145218"/>
           </a:xfrm>
           <a:prstGeom prst="rect">
             <a:avLst/>
@@ -6345,8 +6345,8 @@
         </p:nvSpPr>
         <p:spPr>
           <a:xfrm>
-            <a:off x="9079992" y="2756916"/>
-            <a:ext cx="896112" cy="264033"/>
+            <a:off x="9153144" y="2756916"/>
+            <a:ext cx="822960" cy="264033"/>
           </a:xfrm>
           <a:prstGeom prst="rect">
             <a:avLst/>
@@ -6370,7 +6370,7 @@
                 <a:ea typeface="Inter" pitchFamily="34" charset="-122"/>
                 <a:cs typeface="Inter" pitchFamily="34" charset="-120"/>
               </a:rPr>
-              <a:t>$80,793</a:t>
+              <a:t>$81K</a:t>
             </a:r>
             <a:endParaRPr lang="en-US" sz="1300" dirty="0"/>
           </a:p>
@@ -6502,7 +6502,7 @@
         <p:spPr>
           <a:xfrm>
             <a:off x="8220456" y="3080356"/>
-            <a:ext cx="119265" cy="145218"/>
+            <a:ext cx="130107" cy="145218"/>
           </a:xfrm>
           <a:prstGeom prst="rect">
             <a:avLst/>
@@ -6521,8 +6521,8 @@
         </p:nvSpPr>
         <p:spPr>
           <a:xfrm>
-            <a:off x="9079992" y="3020949"/>
-            <a:ext cx="896112" cy="264033"/>
+            <a:off x="9153144" y="3020949"/>
+            <a:ext cx="822960" cy="264033"/>
           </a:xfrm>
           <a:prstGeom prst="rect">
             <a:avLst/>
@@ -6546,7 +6546,7 @@
                 <a:ea typeface="Inter" pitchFamily="34" charset="-122"/>
                 <a:cs typeface="Inter" pitchFamily="34" charset="-120"/>
               </a:rPr>
-              <a:t>$80,190</a:t>
+              <a:t>$80K</a:t>
             </a:r>
             <a:endParaRPr lang="en-US" sz="1300" dirty="0"/>
           </a:p>
@@ -6678,7 +6678,7 @@
         <p:spPr>
           <a:xfrm>
             <a:off x="8220456" y="3344389"/>
-            <a:ext cx="105199" cy="145218"/>
+            <a:ext cx="114763" cy="145218"/>
           </a:xfrm>
           <a:prstGeom prst="rect">
             <a:avLst/>
@@ -6697,8 +6697,8 @@
         </p:nvSpPr>
         <p:spPr>
           <a:xfrm>
-            <a:off x="9079992" y="3284982"/>
-            <a:ext cx="896112" cy="264033"/>
+            <a:off x="9153144" y="3284982"/>
+            <a:ext cx="822960" cy="264033"/>
           </a:xfrm>
           <a:prstGeom prst="rect">
             <a:avLst/>
@@ -6722,7 +6722,7 @@
                 <a:ea typeface="Inter" pitchFamily="34" charset="-122"/>
                 <a:cs typeface="Inter" pitchFamily="34" charset="-120"/>
               </a:rPr>
-              <a:t>$70,733</a:t>
+              <a:t>$71K</a:t>
             </a:r>
             <a:endParaRPr lang="en-US" sz="1300" dirty="0"/>
           </a:p>
@@ -6854,7 +6854,7 @@
         <p:spPr>
           <a:xfrm>
             <a:off x="8220456" y="3608422"/>
-            <a:ext cx="101209" cy="145218"/>
+            <a:ext cx="110410" cy="145218"/>
           </a:xfrm>
           <a:prstGeom prst="rect">
             <a:avLst/>
@@ -6873,8 +6873,8 @@
         </p:nvSpPr>
         <p:spPr>
           <a:xfrm>
-            <a:off x="9079992" y="3549015"/>
-            <a:ext cx="896112" cy="264033"/>
+            <a:off x="9153144" y="3549015"/>
+            <a:ext cx="822960" cy="264033"/>
           </a:xfrm>
           <a:prstGeom prst="rect">
             <a:avLst/>
@@ -6898,7 +6898,7 @@
                 <a:ea typeface="Inter" pitchFamily="34" charset="-122"/>
                 <a:cs typeface="Inter" pitchFamily="34" charset="-120"/>
               </a:rPr>
-              <a:t>$68,050</a:t>
+              <a:t>$68K</a:t>
             </a:r>
             <a:endParaRPr lang="en-US" sz="1300" dirty="0"/>
           </a:p>
@@ -7030,7 +7030,7 @@
         <p:spPr>
           <a:xfrm>
             <a:off x="8220456" y="3872455"/>
-            <a:ext cx="81242" cy="145218"/>
+            <a:ext cx="88627" cy="145218"/>
           </a:xfrm>
           <a:prstGeom prst="rect">
             <a:avLst/>
@@ -7049,8 +7049,8 @@
         </p:nvSpPr>
         <p:spPr>
           <a:xfrm>
-            <a:off x="9079992" y="3813048"/>
-            <a:ext cx="896112" cy="264033"/>
+            <a:off x="9153144" y="3813048"/>
+            <a:ext cx="822960" cy="264033"/>
           </a:xfrm>
           <a:prstGeom prst="rect">
             <a:avLst/>
@@ -7074,7 +7074,7 @@
                 <a:ea typeface="Inter" pitchFamily="34" charset="-122"/>
                 <a:cs typeface="Inter" pitchFamily="34" charset="-120"/>
               </a:rPr>
-              <a:t>$54,625</a:t>
+              <a:t>$55K</a:t>
             </a:r>
             <a:endParaRPr lang="en-US" sz="1300" dirty="0"/>
           </a:p>
@@ -7206,7 +7206,7 @@
         <p:spPr>
           <a:xfrm>
             <a:off x="8220456" y="4136488"/>
-            <a:ext cx="71870" cy="145218"/>
+            <a:ext cx="78404" cy="145218"/>
           </a:xfrm>
           <a:prstGeom prst="rect">
             <a:avLst/>
@@ -7225,8 +7225,8 @@
         </p:nvSpPr>
         <p:spPr>
           <a:xfrm>
-            <a:off x="9079992" y="4077081"/>
-            <a:ext cx="896112" cy="264033"/>
+            <a:off x="9153144" y="4077081"/>
+            <a:ext cx="822960" cy="264033"/>
           </a:xfrm>
           <a:prstGeom prst="rect">
             <a:avLst/>
@@ -7250,7 +7250,7 @@
                 <a:ea typeface="Inter" pitchFamily="34" charset="-122"/>
                 <a:cs typeface="Inter" pitchFamily="34" charset="-120"/>
               </a:rPr>
-              <a:t>$48,324</a:t>
+              <a:t>$48K</a:t>
             </a:r>
             <a:endParaRPr lang="en-US" sz="1300" dirty="0"/>
           </a:p>
@@ -7382,7 +7382,7 @@
         <p:spPr>
           <a:xfrm>
             <a:off x="8220456" y="4400521"/>
-            <a:ext cx="56913" cy="145218"/>
+            <a:ext cx="62086" cy="145218"/>
           </a:xfrm>
           <a:prstGeom prst="rect">
             <a:avLst/>
@@ -7401,8 +7401,8 @@
         </p:nvSpPr>
         <p:spPr>
           <a:xfrm>
-            <a:off x="9079992" y="4341114"/>
-            <a:ext cx="896112" cy="264033"/>
+            <a:off x="9153144" y="4341114"/>
+            <a:ext cx="822960" cy="264033"/>
           </a:xfrm>
           <a:prstGeom prst="rect">
             <a:avLst/>
@@ -7426,7 +7426,7 @@
                 <a:ea typeface="Inter" pitchFamily="34" charset="-122"/>
                 <a:cs typeface="Inter" pitchFamily="34" charset="-120"/>
               </a:rPr>
-              <a:t>$38,266</a:t>
+              <a:t>$38K</a:t>
             </a:r>
             <a:endParaRPr lang="en-US" sz="1300" dirty="0"/>
           </a:p>
@@ -7558,7 +7558,7 @@
         <p:spPr>
           <a:xfrm>
             <a:off x="8220456" y="4664554"/>
-            <a:ext cx="50188" cy="145218"/>
+            <a:ext cx="54750" cy="145218"/>
           </a:xfrm>
           <a:prstGeom prst="rect">
             <a:avLst/>
@@ -7577,8 +7577,8 @@
         </p:nvSpPr>
         <p:spPr>
           <a:xfrm>
-            <a:off x="9079992" y="4605147"/>
-            <a:ext cx="896112" cy="264033"/>
+            <a:off x="9153144" y="4605147"/>
+            <a:ext cx="822960" cy="264033"/>
           </a:xfrm>
           <a:prstGeom prst="rect">
             <a:avLst/>
@@ -7602,7 +7602,7 @@
                 <a:ea typeface="Inter" pitchFamily="34" charset="-122"/>
                 <a:cs typeface="Inter" pitchFamily="34" charset="-120"/>
               </a:rPr>
-              <a:t>$33,745</a:t>
+              <a:t>$34K</a:t>
             </a:r>
             <a:endParaRPr lang="en-US" sz="1300" dirty="0"/>
           </a:p>
@@ -7734,7 +7734,7 @@
         <p:spPr>
           <a:xfrm>
             <a:off x="8220456" y="4928587"/>
-            <a:ext cx="35445" cy="145218"/>
+            <a:ext cx="38667" cy="145218"/>
           </a:xfrm>
           <a:prstGeom prst="rect">
             <a:avLst/>
@@ -7753,8 +7753,8 @@
         </p:nvSpPr>
         <p:spPr>
           <a:xfrm>
-            <a:off x="9079992" y="4869180"/>
-            <a:ext cx="896112" cy="264033"/>
+            <a:off x="9153144" y="4869180"/>
+            <a:ext cx="822960" cy="264033"/>
           </a:xfrm>
           <a:prstGeom prst="rect">
             <a:avLst/>
@@ -7778,7 +7778,7 @@
                 <a:ea typeface="Inter" pitchFamily="34" charset="-122"/>
                 <a:cs typeface="Inter" pitchFamily="34" charset="-120"/>
               </a:rPr>
-              <a:t>$23,832</a:t>
+              <a:t>$24K</a:t>
             </a:r>
             <a:endParaRPr lang="en-US" sz="1300" dirty="0"/>
           </a:p>
@@ -7910,7 +7910,7 @@
         <p:spPr>
           <a:xfrm>
             <a:off x="8220456" y="5192620"/>
-            <a:ext cx="18288" cy="145218"/>
+            <a:ext cx="19661" cy="145218"/>
           </a:xfrm>
           <a:prstGeom prst="rect">
             <a:avLst/>
@@ -7929,8 +7929,8 @@
         </p:nvSpPr>
         <p:spPr>
           <a:xfrm>
-            <a:off x="9079992" y="5133213"/>
-            <a:ext cx="896112" cy="264033"/>
+            <a:off x="9153144" y="5133213"/>
+            <a:ext cx="822960" cy="264033"/>
           </a:xfrm>
           <a:prstGeom prst="rect">
             <a:avLst/>
@@ -7954,7 +7954,7 @@
                 <a:ea typeface="Inter" pitchFamily="34" charset="-122"/>
                 <a:cs typeface="Inter" pitchFamily="34" charset="-120"/>
               </a:rPr>
-              <a:t>$12,118</a:t>
+              <a:t>$12K</a:t>
             </a:r>
             <a:endParaRPr lang="en-US" sz="1300" dirty="0"/>
           </a:p>
@@ -8105,8 +8105,8 @@
         </p:nvSpPr>
         <p:spPr>
           <a:xfrm>
-            <a:off x="9079992" y="5397246"/>
-            <a:ext cx="896112" cy="264033"/>
+            <a:off x="9153144" y="5397246"/>
+            <a:ext cx="822960" cy="264033"/>
           </a:xfrm>
           <a:prstGeom prst="rect">
             <a:avLst/>
@@ -8130,7 +8130,7 @@
                 <a:ea typeface="Inter" pitchFamily="34" charset="-122"/>
                 <a:cs typeface="Inter" pitchFamily="34" charset="-120"/>
               </a:rPr>
-              <a:t>$10,380</a:t>
+              <a:t>$10K</a:t>
             </a:r>
             <a:endParaRPr lang="en-US" sz="1300" dirty="0"/>
           </a:p>
@@ -8281,8 +8281,8 @@
         </p:nvSpPr>
         <p:spPr>
           <a:xfrm>
-            <a:off x="9079992" y="5661279"/>
-            <a:ext cx="896112" cy="264033"/>
+            <a:off x="9153144" y="5661279"/>
+            <a:ext cx="822960" cy="264033"/>
           </a:xfrm>
           <a:prstGeom prst="rect">
             <a:avLst/>
@@ -8306,7 +8306,7 @@
                 <a:ea typeface="Inter" pitchFamily="34" charset="-122"/>
                 <a:cs typeface="Inter" pitchFamily="34" charset="-120"/>
               </a:rPr>
-              <a:t>$2,765</a:t>
+              <a:t>$3K</a:t>
             </a:r>
             <a:endParaRPr lang="en-US" sz="1300" dirty="0"/>
           </a:p>
@@ -8607,8 +8607,8 @@
         </p:nvSpPr>
         <p:spPr>
           <a:xfrm>
-            <a:off x="3529584" y="1316736"/>
-            <a:ext cx="896112" cy="329184"/>
+            <a:off x="3602736" y="1316736"/>
+            <a:ext cx="822960" cy="329184"/>
           </a:xfrm>
           <a:prstGeom prst="rect">
             <a:avLst/>
@@ -8724,8 +8724,8 @@
         </p:nvSpPr>
         <p:spPr>
           <a:xfrm>
-            <a:off x="9079992" y="1316736"/>
-            <a:ext cx="896112" cy="329184"/>
+            <a:off x="9153144" y="1316736"/>
+            <a:ext cx="822960" cy="329184"/>
           </a:xfrm>
           <a:prstGeom prst="rect">
             <a:avLst/>
@@ -8881,7 +8881,7 @@
         <p:spPr>
           <a:xfrm>
             <a:off x="2670048" y="1773901"/>
-            <a:ext cx="804672" cy="178730"/>
+            <a:ext cx="877824" cy="178730"/>
           </a:xfrm>
           <a:prstGeom prst="rect">
             <a:avLst/>
@@ -8900,8 +8900,8 @@
         </p:nvSpPr>
         <p:spPr>
           <a:xfrm>
-            <a:off x="3529584" y="1700784"/>
-            <a:ext cx="896112" cy="324964"/>
+            <a:off x="3602736" y="1700784"/>
+            <a:ext cx="822960" cy="324964"/>
           </a:xfrm>
           <a:prstGeom prst="rect">
             <a:avLst/>
@@ -8925,7 +8925,7 @@
                 <a:ea typeface="Inter" pitchFamily="34" charset="-122"/>
                 <a:cs typeface="Inter" pitchFamily="34" charset="-120"/>
               </a:rPr>
-              <a:t>$225,288</a:t>
+              <a:t>$225K</a:t>
             </a:r>
             <a:endParaRPr lang="en-US" sz="1300" dirty="0"/>
           </a:p>
@@ -9057,7 +9057,7 @@
         <p:spPr>
           <a:xfrm>
             <a:off x="2670048" y="2098865"/>
-            <a:ext cx="321286" cy="178730"/>
+            <a:ext cx="350494" cy="178730"/>
           </a:xfrm>
           <a:prstGeom prst="rect">
             <a:avLst/>
@@ -9076,8 +9076,8 @@
         </p:nvSpPr>
         <p:spPr>
           <a:xfrm>
-            <a:off x="3529584" y="2025748"/>
-            <a:ext cx="896112" cy="324964"/>
+            <a:off x="3602736" y="2025748"/>
+            <a:ext cx="822960" cy="324964"/>
           </a:xfrm>
           <a:prstGeom prst="rect">
             <a:avLst/>
@@ -9101,7 +9101,7 @@
                 <a:ea typeface="Inter" pitchFamily="34" charset="-122"/>
                 <a:cs typeface="Inter" pitchFamily="34" charset="-120"/>
               </a:rPr>
-              <a:t>$89,952</a:t>
+              <a:t>$90K</a:t>
             </a:r>
             <a:endParaRPr lang="en-US" sz="1300" dirty="0"/>
           </a:p>
@@ -9233,7 +9233,7 @@
         <p:spPr>
           <a:xfrm>
             <a:off x="2670048" y="2423828"/>
-            <a:ext cx="296891" cy="178730"/>
+            <a:ext cx="323881" cy="178730"/>
           </a:xfrm>
           <a:prstGeom prst="rect">
             <a:avLst/>
@@ -9252,8 +9252,8 @@
         </p:nvSpPr>
         <p:spPr>
           <a:xfrm>
-            <a:off x="3529584" y="2350711"/>
-            <a:ext cx="896112" cy="324964"/>
+            <a:off x="3602736" y="2350711"/>
+            <a:ext cx="822960" cy="324964"/>
           </a:xfrm>
           <a:prstGeom prst="rect">
             <a:avLst/>
@@ -9277,7 +9277,7 @@
                 <a:ea typeface="Inter" pitchFamily="34" charset="-122"/>
                 <a:cs typeface="Inter" pitchFamily="34" charset="-120"/>
               </a:rPr>
-              <a:t>$83,122</a:t>
+              <a:t>$83K</a:t>
             </a:r>
             <a:endParaRPr lang="en-US" sz="1300" dirty="0"/>
           </a:p>
@@ -9409,7 +9409,7 @@
         <p:spPr>
           <a:xfrm>
             <a:off x="2670048" y="2748792"/>
-            <a:ext cx="274266" cy="178730"/>
+            <a:ext cx="299199" cy="178730"/>
           </a:xfrm>
           <a:prstGeom prst="rect">
             <a:avLst/>
@@ -9428,8 +9428,8 @@
         </p:nvSpPr>
         <p:spPr>
           <a:xfrm>
-            <a:off x="3529584" y="2675675"/>
-            <a:ext cx="896112" cy="324964"/>
+            <a:off x="3602736" y="2675675"/>
+            <a:ext cx="822960" cy="324964"/>
           </a:xfrm>
           <a:prstGeom prst="rect">
             <a:avLst/>
@@ -9453,7 +9453,7 @@
                 <a:ea typeface="Inter" pitchFamily="34" charset="-122"/>
                 <a:cs typeface="Inter" pitchFamily="34" charset="-120"/>
               </a:rPr>
-              <a:t>$76,788</a:t>
+              <a:t>$77K</a:t>
             </a:r>
             <a:endParaRPr lang="en-US" sz="1300" dirty="0"/>
           </a:p>
@@ -9585,7 +9585,7 @@
         <p:spPr>
           <a:xfrm>
             <a:off x="2670048" y="3073756"/>
-            <a:ext cx="269526" cy="178730"/>
+            <a:ext cx="294028" cy="178730"/>
           </a:xfrm>
           <a:prstGeom prst="rect">
             <a:avLst/>
@@ -9604,8 +9604,8 @@
         </p:nvSpPr>
         <p:spPr>
           <a:xfrm>
-            <a:off x="3529584" y="3000639"/>
-            <a:ext cx="896112" cy="324964"/>
+            <a:off x="3602736" y="3000639"/>
+            <a:ext cx="822960" cy="324964"/>
           </a:xfrm>
           <a:prstGeom prst="rect">
             <a:avLst/>
@@ -9629,7 +9629,7 @@
                 <a:ea typeface="Inter" pitchFamily="34" charset="-122"/>
                 <a:cs typeface="Inter" pitchFamily="34" charset="-120"/>
               </a:rPr>
-              <a:t>$75,460</a:t>
+              <a:t>$75K</a:t>
             </a:r>
             <a:endParaRPr lang="en-US" sz="1300" dirty="0"/>
           </a:p>
@@ -9761,7 +9761,7 @@
         <p:spPr>
           <a:xfrm>
             <a:off x="2670048" y="3398719"/>
-            <a:ext cx="204151" cy="178730"/>
+            <a:ext cx="222710" cy="178730"/>
           </a:xfrm>
           <a:prstGeom prst="rect">
             <a:avLst/>
@@ -9780,8 +9780,8 @@
         </p:nvSpPr>
         <p:spPr>
           <a:xfrm>
-            <a:off x="3529584" y="3325602"/>
-            <a:ext cx="896112" cy="324964"/>
+            <a:off x="3602736" y="3325602"/>
+            <a:ext cx="822960" cy="324964"/>
           </a:xfrm>
           <a:prstGeom prst="rect">
             <a:avLst/>
@@ -9805,7 +9805,7 @@
                 <a:ea typeface="Inter" pitchFamily="34" charset="-122"/>
                 <a:cs typeface="Inter" pitchFamily="34" charset="-120"/>
               </a:rPr>
-              <a:t>$57,157</a:t>
+              <a:t>$57K</a:t>
             </a:r>
             <a:endParaRPr lang="en-US" sz="1300" dirty="0"/>
           </a:p>
@@ -9937,7 +9937,7 @@
         <p:spPr>
           <a:xfrm>
             <a:off x="2670048" y="3723683"/>
-            <a:ext cx="176388" cy="178730"/>
+            <a:ext cx="192423" cy="178730"/>
           </a:xfrm>
           <a:prstGeom prst="rect">
             <a:avLst/>
@@ -9956,8 +9956,8 @@
         </p:nvSpPr>
         <p:spPr>
           <a:xfrm>
-            <a:off x="3529584" y="3650566"/>
-            <a:ext cx="896112" cy="324964"/>
+            <a:off x="3602736" y="3650566"/>
+            <a:ext cx="822960" cy="324964"/>
           </a:xfrm>
           <a:prstGeom prst="rect">
             <a:avLst/>
@@ -9981,7 +9981,7 @@
                 <a:ea typeface="Inter" pitchFamily="34" charset="-122"/>
                 <a:cs typeface="Inter" pitchFamily="34" charset="-120"/>
               </a:rPr>
-              <a:t>$49,384</a:t>
+              <a:t>$49K</a:t>
             </a:r>
             <a:endParaRPr lang="en-US" sz="1300" dirty="0"/>
           </a:p>
@@ -10113,7 +10113,7 @@
         <p:spPr>
           <a:xfrm>
             <a:off x="2670048" y="4048647"/>
-            <a:ext cx="136485" cy="178730"/>
+            <a:ext cx="148892" cy="178730"/>
           </a:xfrm>
           <a:prstGeom prst="rect">
             <a:avLst/>
@@ -10132,8 +10132,8 @@
         </p:nvSpPr>
         <p:spPr>
           <a:xfrm>
-            <a:off x="3529584" y="3975530"/>
-            <a:ext cx="896112" cy="324964"/>
+            <a:off x="3602736" y="3975530"/>
+            <a:ext cx="822960" cy="324964"/>
           </a:xfrm>
           <a:prstGeom prst="rect">
             <a:avLst/>
@@ -10157,7 +10157,7 @@
                 <a:ea typeface="Inter" pitchFamily="34" charset="-122"/>
                 <a:cs typeface="Inter" pitchFamily="34" charset="-120"/>
               </a:rPr>
-              <a:t>$38,212</a:t>
+              <a:t>$38K</a:t>
             </a:r>
             <a:endParaRPr lang="en-US" sz="1300" dirty="0"/>
           </a:p>
@@ -10289,7 +10289,7 @@
         <p:spPr>
           <a:xfrm>
             <a:off x="2670048" y="4373610"/>
-            <a:ext cx="129744" cy="178730"/>
+            <a:ext cx="141539" cy="178730"/>
           </a:xfrm>
           <a:prstGeom prst="rect">
             <a:avLst/>
@@ -10308,8 +10308,8 @@
         </p:nvSpPr>
         <p:spPr>
           <a:xfrm>
-            <a:off x="3529584" y="4300494"/>
-            <a:ext cx="896112" cy="324964"/>
+            <a:off x="3602736" y="4300494"/>
+            <a:ext cx="822960" cy="324964"/>
           </a:xfrm>
           <a:prstGeom prst="rect">
             <a:avLst/>
@@ -10333,7 +10333,7 @@
                 <a:ea typeface="Inter" pitchFamily="34" charset="-122"/>
                 <a:cs typeface="Inter" pitchFamily="34" charset="-120"/>
               </a:rPr>
-              <a:t>$36,325</a:t>
+              <a:t>$36K</a:t>
             </a:r>
             <a:endParaRPr lang="en-US" sz="1300" dirty="0"/>
           </a:p>
@@ -10465,7 +10465,7 @@
         <p:spPr>
           <a:xfrm>
             <a:off x="2670048" y="4698574"/>
-            <a:ext cx="122649" cy="178730"/>
+            <a:ext cx="133799" cy="178730"/>
           </a:xfrm>
           <a:prstGeom prst="rect">
             <a:avLst/>
@@ -10484,8 +10484,8 @@
         </p:nvSpPr>
         <p:spPr>
           <a:xfrm>
-            <a:off x="3529584" y="4625457"/>
-            <a:ext cx="896112" cy="324964"/>
+            <a:off x="3602736" y="4625457"/>
+            <a:ext cx="822960" cy="324964"/>
           </a:xfrm>
           <a:prstGeom prst="rect">
             <a:avLst/>
@@ -10509,7 +10509,7 @@
                 <a:ea typeface="Inter" pitchFamily="34" charset="-122"/>
                 <a:cs typeface="Inter" pitchFamily="34" charset="-120"/>
               </a:rPr>
-              <a:t>$34,339</a:t>
+              <a:t>$34K</a:t>
             </a:r>
             <a:endParaRPr lang="en-US" sz="1300" dirty="0"/>
           </a:p>
@@ -10641,7 +10641,7 @@
         <p:spPr>
           <a:xfrm>
             <a:off x="2670048" y="5023538"/>
-            <a:ext cx="118396" cy="178730"/>
+            <a:ext cx="129160" cy="178730"/>
           </a:xfrm>
           <a:prstGeom prst="rect">
             <a:avLst/>
@@ -10660,8 +10660,8 @@
         </p:nvSpPr>
         <p:spPr>
           <a:xfrm>
-            <a:off x="3529584" y="4950421"/>
-            <a:ext cx="896112" cy="324964"/>
+            <a:off x="3602736" y="4950421"/>
+            <a:ext cx="822960" cy="324964"/>
           </a:xfrm>
           <a:prstGeom prst="rect">
             <a:avLst/>
@@ -10685,7 +10685,7 @@
                 <a:ea typeface="Inter" pitchFamily="34" charset="-122"/>
                 <a:cs typeface="Inter" pitchFamily="34" charset="-120"/>
               </a:rPr>
-              <a:t>$33,148</a:t>
+              <a:t>$33K</a:t>
             </a:r>
             <a:endParaRPr lang="en-US" sz="1300" dirty="0"/>
           </a:p>
@@ -10817,7 +10817,7 @@
         <p:spPr>
           <a:xfrm>
             <a:off x="2670048" y="5348501"/>
-            <a:ext cx="116594" cy="178730"/>
+            <a:ext cx="127194" cy="178730"/>
           </a:xfrm>
           <a:prstGeom prst="rect">
             <a:avLst/>
@@ -10836,8 +10836,8 @@
         </p:nvSpPr>
         <p:spPr>
           <a:xfrm>
-            <a:off x="3529584" y="5275385"/>
-            <a:ext cx="896112" cy="324964"/>
+            <a:off x="3602736" y="5275385"/>
+            <a:ext cx="822960" cy="324964"/>
           </a:xfrm>
           <a:prstGeom prst="rect">
             <a:avLst/>
@@ -10861,7 +10861,7 @@
                 <a:ea typeface="Inter" pitchFamily="34" charset="-122"/>
                 <a:cs typeface="Inter" pitchFamily="34" charset="-120"/>
               </a:rPr>
-              <a:t>$32,644</a:t>
+              <a:t>$33K</a:t>
             </a:r>
             <a:endParaRPr lang="en-US" sz="1300" dirty="0"/>
           </a:p>
@@ -10993,7 +10993,7 @@
         <p:spPr>
           <a:xfrm>
             <a:off x="2670048" y="5673465"/>
-            <a:ext cx="93943" cy="178730"/>
+            <a:ext cx="102484" cy="178730"/>
           </a:xfrm>
           <a:prstGeom prst="rect">
             <a:avLst/>
@@ -11012,8 +11012,8 @@
         </p:nvSpPr>
         <p:spPr>
           <a:xfrm>
-            <a:off x="3529584" y="5600348"/>
-            <a:ext cx="896112" cy="324964"/>
+            <a:off x="3602736" y="5600348"/>
+            <a:ext cx="822960" cy="324964"/>
           </a:xfrm>
           <a:prstGeom prst="rect">
             <a:avLst/>
@@ -11037,7 +11037,7 @@
                 <a:ea typeface="Inter" pitchFamily="34" charset="-122"/>
                 <a:cs typeface="Inter" pitchFamily="34" charset="-120"/>
               </a:rPr>
-              <a:t>$26,302</a:t>
+              <a:t>$26K</a:t>
             </a:r>
             <a:endParaRPr lang="en-US" sz="1300" dirty="0"/>
           </a:p>
@@ -11169,7 +11169,7 @@
         <p:spPr>
           <a:xfrm>
             <a:off x="8220456" y="1773901"/>
-            <a:ext cx="90559" cy="178730"/>
+            <a:ext cx="98792" cy="178730"/>
           </a:xfrm>
           <a:prstGeom prst="rect">
             <a:avLst/>
@@ -11188,8 +11188,8 @@
         </p:nvSpPr>
         <p:spPr>
           <a:xfrm>
-            <a:off x="9079992" y="1700784"/>
-            <a:ext cx="896112" cy="324964"/>
+            <a:off x="9153144" y="1700784"/>
+            <a:ext cx="822960" cy="324964"/>
           </a:xfrm>
           <a:prstGeom prst="rect">
             <a:avLst/>
@@ -11213,7 +11213,7 @@
                 <a:ea typeface="Inter" pitchFamily="34" charset="-122"/>
                 <a:cs typeface="Inter" pitchFamily="34" charset="-120"/>
               </a:rPr>
-              <a:t>$25,354</a:t>
+              <a:t>$25K</a:t>
             </a:r>
             <a:endParaRPr lang="en-US" sz="1300" dirty="0"/>
           </a:p>
@@ -11345,7 +11345,7 @@
         <p:spPr>
           <a:xfrm>
             <a:off x="8220456" y="2098865"/>
-            <a:ext cx="83744" cy="178730"/>
+            <a:ext cx="91358" cy="178730"/>
           </a:xfrm>
           <a:prstGeom prst="rect">
             <a:avLst/>
@@ -11364,8 +11364,8 @@
         </p:nvSpPr>
         <p:spPr>
           <a:xfrm>
-            <a:off x="9079992" y="2025748"/>
-            <a:ext cx="896112" cy="324964"/>
+            <a:off x="9153144" y="2025748"/>
+            <a:ext cx="822960" cy="324964"/>
           </a:xfrm>
           <a:prstGeom prst="rect">
             <a:avLst/>
@@ -11389,7 +11389,7 @@
                 <a:ea typeface="Inter" pitchFamily="34" charset="-122"/>
                 <a:cs typeface="Inter" pitchFamily="34" charset="-120"/>
               </a:rPr>
-              <a:t>$23,446</a:t>
+              <a:t>$23K</a:t>
             </a:r>
             <a:endParaRPr lang="en-US" sz="1300" dirty="0"/>
           </a:p>
@@ -11521,7 +11521,7 @@
         <p:spPr>
           <a:xfrm>
             <a:off x="8220456" y="2423828"/>
-            <a:ext cx="80843" cy="178730"/>
+            <a:ext cx="88193" cy="178730"/>
           </a:xfrm>
           <a:prstGeom prst="rect">
             <a:avLst/>
@@ -11540,8 +11540,8 @@
         </p:nvSpPr>
         <p:spPr>
           <a:xfrm>
-            <a:off x="9079992" y="2350711"/>
-            <a:ext cx="896112" cy="324964"/>
+            <a:off x="9153144" y="2350711"/>
+            <a:ext cx="822960" cy="324964"/>
           </a:xfrm>
           <a:prstGeom prst="rect">
             <a:avLst/>
@@ -11565,7 +11565,7 @@
                 <a:ea typeface="Inter" pitchFamily="34" charset="-122"/>
                 <a:cs typeface="Inter" pitchFamily="34" charset="-120"/>
               </a:rPr>
-              <a:t>$22,634</a:t>
+              <a:t>$23K</a:t>
             </a:r>
             <a:endParaRPr lang="en-US" sz="1300" dirty="0"/>
           </a:p>
@@ -11697,7 +11697,7 @@
         <p:spPr>
           <a:xfrm>
             <a:off x="8220456" y="2748792"/>
-            <a:ext cx="74808" cy="178730"/>
+            <a:ext cx="81609" cy="178730"/>
           </a:xfrm>
           <a:prstGeom prst="rect">
             <a:avLst/>
@@ -11716,8 +11716,8 @@
         </p:nvSpPr>
         <p:spPr>
           <a:xfrm>
-            <a:off x="9079992" y="2675675"/>
-            <a:ext cx="896112" cy="324964"/>
+            <a:off x="9153144" y="2675675"/>
+            <a:ext cx="822960" cy="324964"/>
           </a:xfrm>
           <a:prstGeom prst="rect">
             <a:avLst/>
@@ -11741,7 +11741,7 @@
                 <a:ea typeface="Inter" pitchFamily="34" charset="-122"/>
                 <a:cs typeface="Inter" pitchFamily="34" charset="-120"/>
               </a:rPr>
-              <a:t>$20,944</a:t>
+              <a:t>$21K</a:t>
             </a:r>
             <a:endParaRPr lang="en-US" sz="1300" dirty="0"/>
           </a:p>
@@ -11873,7 +11873,7 @@
         <p:spPr>
           <a:xfrm>
             <a:off x="8220456" y="3073756"/>
-            <a:ext cx="63460" cy="178730"/>
+            <a:ext cx="69229" cy="178730"/>
           </a:xfrm>
           <a:prstGeom prst="rect">
             <a:avLst/>
@@ -11892,8 +11892,8 @@
         </p:nvSpPr>
         <p:spPr>
           <a:xfrm>
-            <a:off x="9079992" y="3000639"/>
-            <a:ext cx="896112" cy="324964"/>
+            <a:off x="9153144" y="3000639"/>
+            <a:ext cx="822960" cy="324964"/>
           </a:xfrm>
           <a:prstGeom prst="rect">
             <a:avLst/>
@@ -11917,7 +11917,7 @@
                 <a:ea typeface="Inter" pitchFamily="34" charset="-122"/>
                 <a:cs typeface="Inter" pitchFamily="34" charset="-120"/>
               </a:rPr>
-              <a:t>$17,767</a:t>
+              <a:t>$18K</a:t>
             </a:r>
             <a:endParaRPr lang="en-US" sz="1300" dirty="0"/>
           </a:p>
@@ -12049,7 +12049,7 @@
         <p:spPr>
           <a:xfrm>
             <a:off x="8220456" y="3398719"/>
-            <a:ext cx="43158" cy="178730"/>
+            <a:ext cx="47082" cy="178730"/>
           </a:xfrm>
           <a:prstGeom prst="rect">
             <a:avLst/>
@@ -12068,8 +12068,8 @@
         </p:nvSpPr>
         <p:spPr>
           <a:xfrm>
-            <a:off x="9079992" y="3325602"/>
-            <a:ext cx="896112" cy="324964"/>
+            <a:off x="9153144" y="3325602"/>
+            <a:ext cx="822960" cy="324964"/>
           </a:xfrm>
           <a:prstGeom prst="rect">
             <a:avLst/>
@@ -12093,7 +12093,7 @@
                 <a:ea typeface="Inter" pitchFamily="34" charset="-122"/>
                 <a:cs typeface="Inter" pitchFamily="34" charset="-120"/>
               </a:rPr>
-              <a:t>$12,083</a:t>
+              <a:t>$12K</a:t>
             </a:r>
             <a:endParaRPr lang="en-US" sz="1300" dirty="0"/>
           </a:p>
@@ -12225,7 +12225,7 @@
         <p:spPr>
           <a:xfrm>
             <a:off x="8220456" y="3723683"/>
-            <a:ext cx="41054" cy="178730"/>
+            <a:ext cx="44786" cy="178730"/>
           </a:xfrm>
           <a:prstGeom prst="rect">
             <a:avLst/>
@@ -12244,8 +12244,8 @@
         </p:nvSpPr>
         <p:spPr>
           <a:xfrm>
-            <a:off x="9079992" y="3650566"/>
-            <a:ext cx="896112" cy="324964"/>
+            <a:off x="9153144" y="3650566"/>
+            <a:ext cx="822960" cy="324964"/>
           </a:xfrm>
           <a:prstGeom prst="rect">
             <a:avLst/>
@@ -12269,7 +12269,7 @@
                 <a:ea typeface="Inter" pitchFamily="34" charset="-122"/>
                 <a:cs typeface="Inter" pitchFamily="34" charset="-120"/>
               </a:rPr>
-              <a:t>$11,494</a:t>
+              <a:t>$11K</a:t>
             </a:r>
             <a:endParaRPr lang="en-US" sz="1300" dirty="0"/>
           </a:p>
@@ -12401,7 +12401,7 @@
         <p:spPr>
           <a:xfrm>
             <a:off x="8220456" y="4048647"/>
-            <a:ext cx="37178" cy="178730"/>
+            <a:ext cx="40558" cy="178730"/>
           </a:xfrm>
           <a:prstGeom prst="rect">
             <a:avLst/>
@@ -12420,8 +12420,8 @@
         </p:nvSpPr>
         <p:spPr>
           <a:xfrm>
-            <a:off x="9079992" y="3975530"/>
-            <a:ext cx="896112" cy="324964"/>
+            <a:off x="9153144" y="3975530"/>
+            <a:ext cx="822960" cy="324964"/>
           </a:xfrm>
           <a:prstGeom prst="rect">
             <a:avLst/>
@@ -12445,7 +12445,7 @@
                 <a:ea typeface="Inter" pitchFamily="34" charset="-122"/>
                 <a:cs typeface="Inter" pitchFamily="34" charset="-120"/>
               </a:rPr>
-              <a:t>$10,409</a:t>
+              <a:t>$10K</a:t>
             </a:r>
             <a:endParaRPr lang="en-US" sz="1300" dirty="0"/>
           </a:p>
@@ -12577,7 +12577,7 @@
         <p:spPr>
           <a:xfrm>
             <a:off x="8220456" y="4373610"/>
-            <a:ext cx="34892" cy="178730"/>
+            <a:ext cx="38064" cy="178730"/>
           </a:xfrm>
           <a:prstGeom prst="rect">
             <a:avLst/>
@@ -12596,8 +12596,8 @@
         </p:nvSpPr>
         <p:spPr>
           <a:xfrm>
-            <a:off x="9079992" y="4300494"/>
-            <a:ext cx="896112" cy="324964"/>
+            <a:off x="9153144" y="4300494"/>
+            <a:ext cx="822960" cy="324964"/>
           </a:xfrm>
           <a:prstGeom prst="rect">
             <a:avLst/>
@@ -12621,7 +12621,7 @@
                 <a:ea typeface="Inter" pitchFamily="34" charset="-122"/>
                 <a:cs typeface="Inter" pitchFamily="34" charset="-120"/>
               </a:rPr>
-              <a:t>$9,769</a:t>
+              <a:t>$10K</a:t>
             </a:r>
             <a:endParaRPr lang="en-US" sz="1300" dirty="0"/>
           </a:p>
@@ -12753,7 +12753,7 @@
         <p:spPr>
           <a:xfrm>
             <a:off x="8220456" y="4698574"/>
-            <a:ext cx="32614" cy="178730"/>
+            <a:ext cx="35579" cy="178730"/>
           </a:xfrm>
           <a:prstGeom prst="rect">
             <a:avLst/>
@@ -12772,8 +12772,8 @@
         </p:nvSpPr>
         <p:spPr>
           <a:xfrm>
-            <a:off x="9079992" y="4625457"/>
-            <a:ext cx="896112" cy="324964"/>
+            <a:off x="9153144" y="4625457"/>
+            <a:ext cx="822960" cy="324964"/>
           </a:xfrm>
           <a:prstGeom prst="rect">
             <a:avLst/>
@@ -12797,7 +12797,7 @@
                 <a:ea typeface="Inter" pitchFamily="34" charset="-122"/>
                 <a:cs typeface="Inter" pitchFamily="34" charset="-120"/>
               </a:rPr>
-              <a:t>$9,131</a:t>
+              <a:t>$9K</a:t>
             </a:r>
             <a:endParaRPr lang="en-US" sz="1300" dirty="0"/>
           </a:p>
@@ -12929,7 +12929,7 @@
         <p:spPr>
           <a:xfrm>
             <a:off x="8220456" y="5023538"/>
-            <a:ext cx="25924" cy="178730"/>
+            <a:ext cx="28280" cy="178730"/>
           </a:xfrm>
           <a:prstGeom prst="rect">
             <a:avLst/>
@@ -12948,8 +12948,8 @@
         </p:nvSpPr>
         <p:spPr>
           <a:xfrm>
-            <a:off x="9079992" y="4950421"/>
-            <a:ext cx="896112" cy="324964"/>
+            <a:off x="9153144" y="4950421"/>
+            <a:ext cx="822960" cy="324964"/>
           </a:xfrm>
           <a:prstGeom prst="rect">
             <a:avLst/>
@@ -12973,7 +12973,7 @@
                 <a:ea typeface="Inter" pitchFamily="34" charset="-122"/>
                 <a:cs typeface="Inter" pitchFamily="34" charset="-120"/>
               </a:rPr>
-              <a:t>$7,258</a:t>
+              <a:t>$7K</a:t>
             </a:r>
             <a:endParaRPr lang="en-US" sz="1300" dirty="0"/>
           </a:p>
@@ -13124,8 +13124,8 @@
         </p:nvSpPr>
         <p:spPr>
           <a:xfrm>
-            <a:off x="9079992" y="5275385"/>
-            <a:ext cx="896112" cy="324964"/>
+            <a:off x="9153144" y="5275385"/>
+            <a:ext cx="822960" cy="324964"/>
           </a:xfrm>
           <a:prstGeom prst="rect">
             <a:avLst/>
@@ -13450,8 +13450,8 @@
         </p:nvSpPr>
         <p:spPr>
           <a:xfrm>
-            <a:off x="3529584" y="1316736"/>
-            <a:ext cx="896112" cy="329184"/>
+            <a:off x="3602736" y="1316736"/>
+            <a:ext cx="822960" cy="329184"/>
           </a:xfrm>
           <a:prstGeom prst="rect">
             <a:avLst/>
@@ -13567,8 +13567,8 @@
         </p:nvSpPr>
         <p:spPr>
           <a:xfrm>
-            <a:off x="9079992" y="1316736"/>
-            <a:ext cx="896112" cy="329184"/>
+            <a:off x="9153144" y="1316736"/>
+            <a:ext cx="822960" cy="329184"/>
           </a:xfrm>
           <a:prstGeom prst="rect">
             <a:avLst/>
@@ -13724,7 +13724,7 @@
         <p:spPr>
           <a:xfrm>
             <a:off x="2670048" y="1764152"/>
-            <a:ext cx="804672" cy="154899"/>
+            <a:ext cx="877824" cy="154899"/>
           </a:xfrm>
           <a:prstGeom prst="rect">
             <a:avLst/>
@@ -13743,8 +13743,8 @@
         </p:nvSpPr>
         <p:spPr>
           <a:xfrm>
-            <a:off x="3529584" y="1700784"/>
-            <a:ext cx="896112" cy="281635"/>
+            <a:off x="3602736" y="1700784"/>
+            <a:ext cx="822960" cy="281635"/>
           </a:xfrm>
           <a:prstGeom prst="rect">
             <a:avLst/>
@@ -13768,7 +13768,7 @@
                 <a:ea typeface="Inter" pitchFamily="34" charset="-122"/>
                 <a:cs typeface="Inter" pitchFamily="34" charset="-120"/>
               </a:rPr>
-              <a:t>$179,701</a:t>
+              <a:t>$180K</a:t>
             </a:r>
             <a:endParaRPr lang="en-US" sz="1300" dirty="0"/>
           </a:p>
@@ -13900,7 +13900,7 @@
         <p:spPr>
           <a:xfrm>
             <a:off x="2670048" y="2045787"/>
-            <a:ext cx="659813" cy="154899"/>
+            <a:ext cx="719796" cy="154899"/>
           </a:xfrm>
           <a:prstGeom prst="rect">
             <a:avLst/>
@@ -13919,8 +13919,8 @@
         </p:nvSpPr>
         <p:spPr>
           <a:xfrm>
-            <a:off x="3529584" y="1982419"/>
-            <a:ext cx="896112" cy="281635"/>
+            <a:off x="3602736" y="1982419"/>
+            <a:ext cx="822960" cy="281635"/>
           </a:xfrm>
           <a:prstGeom prst="rect">
             <a:avLst/>
@@ -13944,7 +13944,7 @@
                 <a:ea typeface="Inter" pitchFamily="34" charset="-122"/>
                 <a:cs typeface="Inter" pitchFamily="34" charset="-120"/>
               </a:rPr>
-              <a:t>$147,351</a:t>
+              <a:t>$147K</a:t>
             </a:r>
             <a:endParaRPr lang="en-US" sz="1300" dirty="0"/>
           </a:p>
@@ -14076,7 +14076,7 @@
         <p:spPr>
           <a:xfrm>
             <a:off x="2670048" y="2327422"/>
-            <a:ext cx="592487" cy="154899"/>
+            <a:ext cx="646349" cy="154899"/>
           </a:xfrm>
           <a:prstGeom prst="rect">
             <a:avLst/>
@@ -14095,8 +14095,8 @@
         </p:nvSpPr>
         <p:spPr>
           <a:xfrm>
-            <a:off x="3529584" y="2264054"/>
-            <a:ext cx="896112" cy="281635"/>
+            <a:off x="3602736" y="2264054"/>
+            <a:ext cx="822960" cy="281635"/>
           </a:xfrm>
           <a:prstGeom prst="rect">
             <a:avLst/>
@@ -14120,7 +14120,7 @@
                 <a:ea typeface="Inter" pitchFamily="34" charset="-122"/>
                 <a:cs typeface="Inter" pitchFamily="34" charset="-120"/>
               </a:rPr>
-              <a:t>$132,315</a:t>
+              <a:t>$132K</a:t>
             </a:r>
             <a:endParaRPr lang="en-US" sz="1300" dirty="0"/>
           </a:p>
@@ -14252,7 +14252,7 @@
         <p:spPr>
           <a:xfrm>
             <a:off x="2670048" y="2609058"/>
-            <a:ext cx="559295" cy="154899"/>
+            <a:ext cx="610140" cy="154899"/>
           </a:xfrm>
           <a:prstGeom prst="rect">
             <a:avLst/>
@@ -14271,8 +14271,8 @@
         </p:nvSpPr>
         <p:spPr>
           <a:xfrm>
-            <a:off x="3529584" y="2545690"/>
-            <a:ext cx="896112" cy="281635"/>
+            <a:off x="3602736" y="2545690"/>
+            <a:ext cx="822960" cy="281635"/>
           </a:xfrm>
           <a:prstGeom prst="rect">
             <a:avLst/>
@@ -14296,7 +14296,7 @@
                 <a:ea typeface="Inter" pitchFamily="34" charset="-122"/>
                 <a:cs typeface="Inter" pitchFamily="34" charset="-120"/>
               </a:rPr>
-              <a:t>$124,903</a:t>
+              <a:t>$125K</a:t>
             </a:r>
             <a:endParaRPr lang="en-US" sz="1300" dirty="0"/>
           </a:p>
@@ -14428,7 +14428,7 @@
         <p:spPr>
           <a:xfrm>
             <a:off x="2670048" y="2890693"/>
-            <a:ext cx="488325" cy="154899"/>
+            <a:ext cx="532718" cy="154899"/>
           </a:xfrm>
           <a:prstGeom prst="rect">
             <a:avLst/>
@@ -14447,8 +14447,8 @@
         </p:nvSpPr>
         <p:spPr>
           <a:xfrm>
-            <a:off x="3529584" y="2827325"/>
-            <a:ext cx="896112" cy="281635"/>
+            <a:off x="3602736" y="2827325"/>
+            <a:ext cx="822960" cy="281635"/>
           </a:xfrm>
           <a:prstGeom prst="rect">
             <a:avLst/>
@@ -14472,7 +14472,7 @@
                 <a:ea typeface="Inter" pitchFamily="34" charset="-122"/>
                 <a:cs typeface="Inter" pitchFamily="34" charset="-120"/>
               </a:rPr>
-              <a:t>$109,054</a:t>
+              <a:t>$109K</a:t>
             </a:r>
             <a:endParaRPr lang="en-US" sz="1300" dirty="0"/>
           </a:p>
@@ -14604,7 +14604,7 @@
         <p:spPr>
           <a:xfrm>
             <a:off x="2670048" y="3172328"/>
-            <a:ext cx="475963" cy="154899"/>
+            <a:ext cx="519232" cy="154899"/>
           </a:xfrm>
           <a:prstGeom prst="rect">
             <a:avLst/>
@@ -14623,8 +14623,8 @@
         </p:nvSpPr>
         <p:spPr>
           <a:xfrm>
-            <a:off x="3529584" y="3108960"/>
-            <a:ext cx="896112" cy="281635"/>
+            <a:off x="3602736" y="3108960"/>
+            <a:ext cx="822960" cy="281635"/>
           </a:xfrm>
           <a:prstGeom prst="rect">
             <a:avLst/>
@@ -14648,7 +14648,7 @@
                 <a:ea typeface="Inter" pitchFamily="34" charset="-122"/>
                 <a:cs typeface="Inter" pitchFamily="34" charset="-120"/>
               </a:rPr>
-              <a:t>$106,293</a:t>
+              <a:t>$106K</a:t>
             </a:r>
             <a:endParaRPr lang="en-US" sz="1300" dirty="0"/>
           </a:p>
@@ -14780,7 +14780,7 @@
         <p:spPr>
           <a:xfrm>
             <a:off x="2670048" y="3453963"/>
-            <a:ext cx="358495" cy="154899"/>
+            <a:ext cx="391085" cy="154899"/>
           </a:xfrm>
           <a:prstGeom prst="rect">
             <a:avLst/>
@@ -14799,8 +14799,8 @@
         </p:nvSpPr>
         <p:spPr>
           <a:xfrm>
-            <a:off x="3529584" y="3390595"/>
-            <a:ext cx="896112" cy="281635"/>
+            <a:off x="3602736" y="3390595"/>
+            <a:ext cx="822960" cy="281635"/>
           </a:xfrm>
           <a:prstGeom prst="rect">
             <a:avLst/>
@@ -14824,7 +14824,7 @@
                 <a:ea typeface="Inter" pitchFamily="34" charset="-122"/>
                 <a:cs typeface="Inter" pitchFamily="34" charset="-120"/>
               </a:rPr>
-              <a:t>$80,060</a:t>
+              <a:t>$80K</a:t>
             </a:r>
             <a:endParaRPr lang="en-US" sz="1300" dirty="0"/>
           </a:p>
@@ -14956,7 +14956,7 @@
         <p:spPr>
           <a:xfrm>
             <a:off x="2670048" y="3735598"/>
-            <a:ext cx="343305" cy="154899"/>
+            <a:ext cx="374515" cy="154899"/>
           </a:xfrm>
           <a:prstGeom prst="rect">
             <a:avLst/>
@@ -14975,8 +14975,8 @@
         </p:nvSpPr>
         <p:spPr>
           <a:xfrm>
-            <a:off x="3529584" y="3672230"/>
-            <a:ext cx="896112" cy="281635"/>
+            <a:off x="3602736" y="3672230"/>
+            <a:ext cx="822960" cy="281635"/>
           </a:xfrm>
           <a:prstGeom prst="rect">
             <a:avLst/>
@@ -15000,7 +15000,7 @@
                 <a:ea typeface="Inter" pitchFamily="34" charset="-122"/>
                 <a:cs typeface="Inter" pitchFamily="34" charset="-120"/>
               </a:rPr>
-              <a:t>$76,668</a:t>
+              <a:t>$77K</a:t>
             </a:r>
             <a:endParaRPr lang="en-US" sz="1300" dirty="0"/>
           </a:p>
@@ -15132,7 +15132,7 @@
         <p:spPr>
           <a:xfrm>
             <a:off x="2670048" y="4017234"/>
-            <a:ext cx="328186" cy="154899"/>
+            <a:ext cx="358021" cy="154899"/>
           </a:xfrm>
           <a:prstGeom prst="rect">
             <a:avLst/>
@@ -15151,8 +15151,8 @@
         </p:nvSpPr>
         <p:spPr>
           <a:xfrm>
-            <a:off x="3529584" y="3953866"/>
-            <a:ext cx="896112" cy="281635"/>
+            <a:off x="3602736" y="3953866"/>
+            <a:ext cx="822960" cy="281635"/>
           </a:xfrm>
           <a:prstGeom prst="rect">
             <a:avLst/>
@@ -15176,7 +15176,7 @@
                 <a:ea typeface="Inter" pitchFamily="34" charset="-122"/>
                 <a:cs typeface="Inter" pitchFamily="34" charset="-120"/>
               </a:rPr>
-              <a:t>$73,291</a:t>
+              <a:t>$73K</a:t>
             </a:r>
             <a:endParaRPr lang="en-US" sz="1300" dirty="0"/>
           </a:p>
@@ -15308,7 +15308,7 @@
         <p:spPr>
           <a:xfrm>
             <a:off x="2670048" y="4298869"/>
-            <a:ext cx="321360" cy="154899"/>
+            <a:ext cx="350574" cy="154899"/>
           </a:xfrm>
           <a:prstGeom prst="rect">
             <a:avLst/>
@@ -15327,8 +15327,8 @@
         </p:nvSpPr>
         <p:spPr>
           <a:xfrm>
-            <a:off x="3529584" y="4235501"/>
-            <a:ext cx="896112" cy="281635"/>
+            <a:off x="3602736" y="4235501"/>
+            <a:ext cx="822960" cy="281635"/>
           </a:xfrm>
           <a:prstGeom prst="rect">
             <a:avLst/>
@@ -15352,7 +15352,7 @@
                 <a:ea typeface="Inter" pitchFamily="34" charset="-122"/>
                 <a:cs typeface="Inter" pitchFamily="34" charset="-120"/>
               </a:rPr>
-              <a:t>$71,767</a:t>
+              <a:t>$72K</a:t>
             </a:r>
             <a:endParaRPr lang="en-US" sz="1300" dirty="0"/>
           </a:p>
@@ -15484,7 +15484,7 @@
         <p:spPr>
           <a:xfrm>
             <a:off x="2670048" y="4580504"/>
-            <a:ext cx="303740" cy="154899"/>
+            <a:ext cx="331353" cy="154899"/>
           </a:xfrm>
           <a:prstGeom prst="rect">
             <a:avLst/>
@@ -15503,8 +15503,8 @@
         </p:nvSpPr>
         <p:spPr>
           <a:xfrm>
-            <a:off x="3529584" y="4517136"/>
-            <a:ext cx="896112" cy="281635"/>
+            <a:off x="3602736" y="4517136"/>
+            <a:ext cx="822960" cy="281635"/>
           </a:xfrm>
           <a:prstGeom prst="rect">
             <a:avLst/>
@@ -15528,7 +15528,7 @@
                 <a:ea typeface="Inter" pitchFamily="34" charset="-122"/>
                 <a:cs typeface="Inter" pitchFamily="34" charset="-120"/>
               </a:rPr>
-              <a:t>$67,832</a:t>
+              <a:t>$68K</a:t>
             </a:r>
             <a:endParaRPr lang="en-US" sz="1300" dirty="0"/>
           </a:p>
@@ -15660,7 +15660,7 @@
         <p:spPr>
           <a:xfrm>
             <a:off x="2670048" y="4862139"/>
-            <a:ext cx="303633" cy="154899"/>
+            <a:ext cx="331235" cy="154899"/>
           </a:xfrm>
           <a:prstGeom prst="rect">
             <a:avLst/>
@@ -15679,8 +15679,8 @@
         </p:nvSpPr>
         <p:spPr>
           <a:xfrm>
-            <a:off x="3529584" y="4798771"/>
-            <a:ext cx="896112" cy="281635"/>
+            <a:off x="3602736" y="4798771"/>
+            <a:ext cx="822960" cy="281635"/>
           </a:xfrm>
           <a:prstGeom prst="rect">
             <a:avLst/>
@@ -15704,7 +15704,7 @@
                 <a:ea typeface="Inter" pitchFamily="34" charset="-122"/>
                 <a:cs typeface="Inter" pitchFamily="34" charset="-120"/>
               </a:rPr>
-              <a:t>$67,808</a:t>
+              <a:t>$68K</a:t>
             </a:r>
             <a:endParaRPr lang="en-US" sz="1300" dirty="0"/>
           </a:p>
@@ -15836,7 +15836,7 @@
         <p:spPr>
           <a:xfrm>
             <a:off x="2670048" y="5143774"/>
-            <a:ext cx="251992" cy="154899"/>
+            <a:ext cx="274901" cy="154899"/>
           </a:xfrm>
           <a:prstGeom prst="rect">
             <a:avLst/>
@@ -15855,8 +15855,8 @@
         </p:nvSpPr>
         <p:spPr>
           <a:xfrm>
-            <a:off x="3529584" y="5080406"/>
-            <a:ext cx="896112" cy="281635"/>
+            <a:off x="3602736" y="5080406"/>
+            <a:ext cx="822960" cy="281635"/>
           </a:xfrm>
           <a:prstGeom prst="rect">
             <a:avLst/>
@@ -15880,7 +15880,7 @@
                 <a:ea typeface="Inter" pitchFamily="34" charset="-122"/>
                 <a:cs typeface="Inter" pitchFamily="34" charset="-120"/>
               </a:rPr>
-              <a:t>$56,275</a:t>
+              <a:t>$56K</a:t>
             </a:r>
             <a:endParaRPr lang="en-US" sz="1300" dirty="0"/>
           </a:p>
@@ -16012,7 +16012,7 @@
         <p:spPr>
           <a:xfrm>
             <a:off x="2670048" y="5425410"/>
-            <a:ext cx="232442" cy="154899"/>
+            <a:ext cx="253573" cy="154899"/>
           </a:xfrm>
           <a:prstGeom prst="rect">
             <a:avLst/>
@@ -16031,8 +16031,8 @@
         </p:nvSpPr>
         <p:spPr>
           <a:xfrm>
-            <a:off x="3529584" y="5362042"/>
-            <a:ext cx="896112" cy="281635"/>
+            <a:off x="3602736" y="5362042"/>
+            <a:ext cx="822960" cy="281635"/>
           </a:xfrm>
           <a:prstGeom prst="rect">
             <a:avLst/>
@@ -16056,7 +16056,7 @@
                 <a:ea typeface="Inter" pitchFamily="34" charset="-122"/>
                 <a:cs typeface="Inter" pitchFamily="34" charset="-120"/>
               </a:rPr>
-              <a:t>$51,909</a:t>
+              <a:t>$52K</a:t>
             </a:r>
             <a:endParaRPr lang="en-US" sz="1300" dirty="0"/>
           </a:p>
@@ -16188,7 +16188,7 @@
         <p:spPr>
           <a:xfrm>
             <a:off x="2670048" y="5707045"/>
-            <a:ext cx="231742" cy="154899"/>
+            <a:ext cx="252810" cy="154899"/>
           </a:xfrm>
           <a:prstGeom prst="rect">
             <a:avLst/>
@@ -16207,8 +16207,8 @@
         </p:nvSpPr>
         <p:spPr>
           <a:xfrm>
-            <a:off x="3529584" y="5643677"/>
-            <a:ext cx="896112" cy="281635"/>
+            <a:off x="3602736" y="5643677"/>
+            <a:ext cx="822960" cy="281635"/>
           </a:xfrm>
           <a:prstGeom prst="rect">
             <a:avLst/>
@@ -16232,7 +16232,7 @@
                 <a:ea typeface="Inter" pitchFamily="34" charset="-122"/>
                 <a:cs typeface="Inter" pitchFamily="34" charset="-120"/>
               </a:rPr>
-              <a:t>$51,753</a:t>
+              <a:t>$52K</a:t>
             </a:r>
             <a:endParaRPr lang="en-US" sz="1300" dirty="0"/>
           </a:p>
@@ -16364,7 +16364,7 @@
         <p:spPr>
           <a:xfrm>
             <a:off x="8220456" y="1764152"/>
-            <a:ext cx="171351" cy="154899"/>
+            <a:ext cx="186928" cy="154899"/>
           </a:xfrm>
           <a:prstGeom prst="rect">
             <a:avLst/>
@@ -16383,8 +16383,8 @@
         </p:nvSpPr>
         <p:spPr>
           <a:xfrm>
-            <a:off x="9079992" y="1700784"/>
-            <a:ext cx="896112" cy="281635"/>
+            <a:off x="9153144" y="1700784"/>
+            <a:ext cx="822960" cy="281635"/>
           </a:xfrm>
           <a:prstGeom prst="rect">
             <a:avLst/>
@@ -16408,7 +16408,7 @@
                 <a:ea typeface="Inter" pitchFamily="34" charset="-122"/>
                 <a:cs typeface="Inter" pitchFamily="34" charset="-120"/>
               </a:rPr>
-              <a:t>$38,266</a:t>
+              <a:t>$38K</a:t>
             </a:r>
             <a:endParaRPr lang="en-US" sz="1300" dirty="0"/>
           </a:p>
@@ -16540,7 +16540,7 @@
         <p:spPr>
           <a:xfrm>
             <a:off x="8220456" y="2045787"/>
-            <a:ext cx="159786" cy="154899"/>
+            <a:ext cx="174312" cy="154899"/>
           </a:xfrm>
           <a:prstGeom prst="rect">
             <a:avLst/>
@@ -16559,8 +16559,8 @@
         </p:nvSpPr>
         <p:spPr>
           <a:xfrm>
-            <a:off x="9079992" y="1982419"/>
-            <a:ext cx="896112" cy="281635"/>
+            <a:off x="9153144" y="1982419"/>
+            <a:ext cx="822960" cy="281635"/>
           </a:xfrm>
           <a:prstGeom prst="rect">
             <a:avLst/>
@@ -16584,7 +16584,7 @@
                 <a:ea typeface="Inter" pitchFamily="34" charset="-122"/>
                 <a:cs typeface="Inter" pitchFamily="34" charset="-120"/>
               </a:rPr>
-              <a:t>$35,684</a:t>
+              <a:t>$36K</a:t>
             </a:r>
             <a:endParaRPr lang="en-US" sz="1300" dirty="0"/>
           </a:p>
@@ -16716,7 +16716,7 @@
         <p:spPr>
           <a:xfrm>
             <a:off x="8220456" y="2327422"/>
-            <a:ext cx="138080" cy="154899"/>
+            <a:ext cx="150632" cy="154899"/>
           </a:xfrm>
           <a:prstGeom prst="rect">
             <a:avLst/>
@@ -16735,8 +16735,8 @@
         </p:nvSpPr>
         <p:spPr>
           <a:xfrm>
-            <a:off x="9079992" y="2264054"/>
-            <a:ext cx="896112" cy="281635"/>
+            <a:off x="9153144" y="2264054"/>
+            <a:ext cx="822960" cy="281635"/>
           </a:xfrm>
           <a:prstGeom prst="rect">
             <a:avLst/>
@@ -16760,7 +16760,7 @@
                 <a:ea typeface="Inter" pitchFamily="34" charset="-122"/>
                 <a:cs typeface="Inter" pitchFamily="34" charset="-120"/>
               </a:rPr>
-              <a:t>$30,836</a:t>
+              <a:t>$31K</a:t>
             </a:r>
             <a:endParaRPr lang="en-US" sz="1300" dirty="0"/>
           </a:p>
@@ -16892,7 +16892,7 @@
         <p:spPr>
           <a:xfrm>
             <a:off x="8220456" y="2609058"/>
-            <a:ext cx="124627" cy="154899"/>
+            <a:ext cx="135957" cy="154899"/>
           </a:xfrm>
           <a:prstGeom prst="rect">
             <a:avLst/>
@@ -16911,8 +16911,8 @@
         </p:nvSpPr>
         <p:spPr>
           <a:xfrm>
-            <a:off x="9079992" y="2545690"/>
-            <a:ext cx="896112" cy="281635"/>
+            <a:off x="9153144" y="2545690"/>
+            <a:ext cx="822960" cy="281635"/>
           </a:xfrm>
           <a:prstGeom prst="rect">
             <a:avLst/>
@@ -16936,7 +16936,7 @@
                 <a:ea typeface="Inter" pitchFamily="34" charset="-122"/>
                 <a:cs typeface="Inter" pitchFamily="34" charset="-120"/>
               </a:rPr>
-              <a:t>$27,832</a:t>
+              <a:t>$28K</a:t>
             </a:r>
             <a:endParaRPr lang="en-US" sz="1300" dirty="0"/>
           </a:p>
@@ -17068,7 +17068,7 @@
         <p:spPr>
           <a:xfrm>
             <a:off x="8220456" y="2890693"/>
-            <a:ext cx="122580" cy="154899"/>
+            <a:ext cx="133724" cy="154899"/>
           </a:xfrm>
           <a:prstGeom prst="rect">
             <a:avLst/>
@@ -17087,8 +17087,8 @@
         </p:nvSpPr>
         <p:spPr>
           <a:xfrm>
-            <a:off x="9079992" y="2827325"/>
-            <a:ext cx="896112" cy="281635"/>
+            <a:off x="9153144" y="2827325"/>
+            <a:ext cx="822960" cy="281635"/>
           </a:xfrm>
           <a:prstGeom prst="rect">
             <a:avLst/>
@@ -17112,7 +17112,7 @@
                 <a:ea typeface="Inter" pitchFamily="34" charset="-122"/>
                 <a:cs typeface="Inter" pitchFamily="34" charset="-120"/>
               </a:rPr>
-              <a:t>$27,375</a:t>
+              <a:t>$27K</a:t>
             </a:r>
             <a:endParaRPr lang="en-US" sz="1300" dirty="0"/>
           </a:p>
@@ -17244,7 +17244,7 @@
         <p:spPr>
           <a:xfrm>
             <a:off x="8220456" y="3172328"/>
-            <a:ext cx="120258" cy="154899"/>
+            <a:ext cx="131190" cy="154899"/>
           </a:xfrm>
           <a:prstGeom prst="rect">
             <a:avLst/>
@@ -17263,8 +17263,8 @@
         </p:nvSpPr>
         <p:spPr>
           <a:xfrm>
-            <a:off x="9079992" y="3108960"/>
-            <a:ext cx="896112" cy="281635"/>
+            <a:off x="9153144" y="3108960"/>
+            <a:ext cx="822960" cy="281635"/>
           </a:xfrm>
           <a:prstGeom prst="rect">
             <a:avLst/>
@@ -17288,7 +17288,7 @@
                 <a:ea typeface="Inter" pitchFamily="34" charset="-122"/>
                 <a:cs typeface="Inter" pitchFamily="34" charset="-120"/>
               </a:rPr>
-              <a:t>$26,856</a:t>
+              <a:t>$27K</a:t>
             </a:r>
             <a:endParaRPr lang="en-US" sz="1300" dirty="0"/>
           </a:p>
@@ -17420,7 +17420,7 @@
         <p:spPr>
           <a:xfrm>
             <a:off x="8220456" y="3453963"/>
-            <a:ext cx="93422" cy="154899"/>
+            <a:ext cx="101915" cy="154899"/>
           </a:xfrm>
           <a:prstGeom prst="rect">
             <a:avLst/>
@@ -17439,8 +17439,8 @@
         </p:nvSpPr>
         <p:spPr>
           <a:xfrm>
-            <a:off x="9079992" y="3390595"/>
-            <a:ext cx="896112" cy="281635"/>
+            <a:off x="9153144" y="3390595"/>
+            <a:ext cx="822960" cy="281635"/>
           </a:xfrm>
           <a:prstGeom prst="rect">
             <a:avLst/>
@@ -17464,7 +17464,7 @@
                 <a:ea typeface="Inter" pitchFamily="34" charset="-122"/>
                 <a:cs typeface="Inter" pitchFamily="34" charset="-120"/>
               </a:rPr>
-              <a:t>$20,863</a:t>
+              <a:t>$21K</a:t>
             </a:r>
             <a:endParaRPr lang="en-US" sz="1300" dirty="0"/>
           </a:p>
@@ -17596,7 +17596,7 @@
         <p:spPr>
           <a:xfrm>
             <a:off x="8220456" y="3735598"/>
-            <a:ext cx="82255" cy="154899"/>
+            <a:ext cx="89733" cy="154899"/>
           </a:xfrm>
           <a:prstGeom prst="rect">
             <a:avLst/>
@@ -17615,8 +17615,8 @@
         </p:nvSpPr>
         <p:spPr>
           <a:xfrm>
-            <a:off x="9079992" y="3672230"/>
-            <a:ext cx="896112" cy="281635"/>
+            <a:off x="9153144" y="3672230"/>
+            <a:ext cx="822960" cy="281635"/>
           </a:xfrm>
           <a:prstGeom prst="rect">
             <a:avLst/>
@@ -17640,7 +17640,7 @@
                 <a:ea typeface="Inter" pitchFamily="34" charset="-122"/>
                 <a:cs typeface="Inter" pitchFamily="34" charset="-120"/>
               </a:rPr>
-              <a:t>$18,369</a:t>
+              <a:t>$18K</a:t>
             </a:r>
             <a:endParaRPr lang="en-US" sz="1300" dirty="0"/>
           </a:p>
@@ -17772,7 +17772,7 @@
         <p:spPr>
           <a:xfrm>
             <a:off x="8220456" y="4017234"/>
-            <a:ext cx="63920" cy="154899"/>
+            <a:ext cx="69731" cy="154899"/>
           </a:xfrm>
           <a:prstGeom prst="rect">
             <a:avLst/>
@@ -17791,8 +17791,8 @@
         </p:nvSpPr>
         <p:spPr>
           <a:xfrm>
-            <a:off x="9079992" y="3953866"/>
-            <a:ext cx="896112" cy="281635"/>
+            <a:off x="9153144" y="3953866"/>
+            <a:ext cx="822960" cy="281635"/>
           </a:xfrm>
           <a:prstGeom prst="rect">
             <a:avLst/>
@@ -17816,7 +17816,7 @@
                 <a:ea typeface="Inter" pitchFamily="34" charset="-122"/>
                 <a:cs typeface="Inter" pitchFamily="34" charset="-120"/>
               </a:rPr>
-              <a:t>$14,275</a:t>
+              <a:t>$14K</a:t>
             </a:r>
             <a:endParaRPr lang="en-US" sz="1300" dirty="0"/>
           </a:p>
@@ -17948,7 +17948,7 @@
         <p:spPr>
           <a:xfrm>
             <a:off x="8220456" y="4298869"/>
-            <a:ext cx="48675" cy="154899"/>
+            <a:ext cx="53100" cy="154899"/>
           </a:xfrm>
           <a:prstGeom prst="rect">
             <a:avLst/>
@@ -17967,8 +17967,8 @@
         </p:nvSpPr>
         <p:spPr>
           <a:xfrm>
-            <a:off x="9079992" y="4235501"/>
-            <a:ext cx="896112" cy="281635"/>
+            <a:off x="9153144" y="4235501"/>
+            <a:ext cx="822960" cy="281635"/>
           </a:xfrm>
           <a:prstGeom prst="rect">
             <a:avLst/>
@@ -17992,7 +17992,7 @@
                 <a:ea typeface="Inter" pitchFamily="34" charset="-122"/>
                 <a:cs typeface="Inter" pitchFamily="34" charset="-120"/>
               </a:rPr>
-              <a:t>$10,870</a:t>
+              <a:t>$11K</a:t>
             </a:r>
             <a:endParaRPr lang="en-US" sz="1300" dirty="0"/>
           </a:p>
@@ -18124,7 +18124,7 @@
         <p:spPr>
           <a:xfrm>
             <a:off x="8220456" y="4580504"/>
-            <a:ext cx="33634" cy="154899"/>
+            <a:ext cx="36692" cy="154899"/>
           </a:xfrm>
           <a:prstGeom prst="rect">
             <a:avLst/>
@@ -18143,8 +18143,8 @@
         </p:nvSpPr>
         <p:spPr>
           <a:xfrm>
-            <a:off x="9079992" y="4517136"/>
-            <a:ext cx="896112" cy="281635"/>
+            <a:off x="9153144" y="4517136"/>
+            <a:ext cx="822960" cy="281635"/>
           </a:xfrm>
           <a:prstGeom prst="rect">
             <a:avLst/>
@@ -18168,7 +18168,7 @@
                 <a:ea typeface="Inter" pitchFamily="34" charset="-122"/>
                 <a:cs typeface="Inter" pitchFamily="34" charset="-120"/>
               </a:rPr>
-              <a:t>$7,511</a:t>
+              <a:t>$8K</a:t>
             </a:r>
             <a:endParaRPr lang="en-US" sz="1300" dirty="0"/>
           </a:p>
@@ -18300,7 +18300,7 @@
         <p:spPr>
           <a:xfrm>
             <a:off x="8220456" y="4862139"/>
-            <a:ext cx="26275" cy="154899"/>
+            <a:ext cx="28663" cy="154899"/>
           </a:xfrm>
           <a:prstGeom prst="rect">
             <a:avLst/>
@@ -18319,8 +18319,8 @@
         </p:nvSpPr>
         <p:spPr>
           <a:xfrm>
-            <a:off x="9079992" y="4798771"/>
-            <a:ext cx="896112" cy="281635"/>
+            <a:off x="9153144" y="4798771"/>
+            <a:ext cx="822960" cy="281635"/>
           </a:xfrm>
           <a:prstGeom prst="rect">
             <a:avLst/>
@@ -18344,7 +18344,7 @@
                 <a:ea typeface="Inter" pitchFamily="34" charset="-122"/>
                 <a:cs typeface="Inter" pitchFamily="34" charset="-120"/>
               </a:rPr>
-              <a:t>$5,868</a:t>
+              <a:t>$6K</a:t>
             </a:r>
             <a:endParaRPr lang="en-US" sz="1300" dirty="0"/>
           </a:p>
@@ -18495,8 +18495,8 @@
         </p:nvSpPr>
         <p:spPr>
           <a:xfrm>
-            <a:off x="9079992" y="5080406"/>
-            <a:ext cx="896112" cy="281635"/>
+            <a:off x="9153144" y="5080406"/>
+            <a:ext cx="822960" cy="281635"/>
           </a:xfrm>
           <a:prstGeom prst="rect">
             <a:avLst/>
@@ -18520,7 +18520,7 @@
                 <a:ea typeface="Inter" pitchFamily="34" charset="-122"/>
                 <a:cs typeface="Inter" pitchFamily="34" charset="-120"/>
               </a:rPr>
-              <a:t>$2,765</a:t>
+              <a:t>$3K</a:t>
             </a:r>
             <a:endParaRPr lang="en-US" sz="1300" dirty="0"/>
           </a:p>
@@ -18671,8 +18671,8 @@
         </p:nvSpPr>
         <p:spPr>
           <a:xfrm>
-            <a:off x="9079992" y="5362042"/>
-            <a:ext cx="896112" cy="281635"/>
+            <a:off x="9153144" y="5362042"/>
+            <a:ext cx="822960" cy="281635"/>
           </a:xfrm>
           <a:prstGeom prst="rect">
             <a:avLst/>
@@ -18997,8 +18997,8 @@
         </p:nvSpPr>
         <p:spPr>
           <a:xfrm>
-            <a:off x="3529584" y="1316736"/>
-            <a:ext cx="896112" cy="329184"/>
+            <a:off x="3602736" y="1316736"/>
+            <a:ext cx="822960" cy="329184"/>
           </a:xfrm>
           <a:prstGeom prst="rect">
             <a:avLst/>
@@ -19114,8 +19114,8 @@
         </p:nvSpPr>
         <p:spPr>
           <a:xfrm>
-            <a:off x="9079992" y="1316736"/>
-            <a:ext cx="896112" cy="329184"/>
+            <a:off x="9153144" y="1316736"/>
+            <a:ext cx="822960" cy="329184"/>
           </a:xfrm>
           <a:prstGeom prst="rect">
             <a:avLst/>
@@ -19271,7 +19271,7 @@
         <p:spPr>
           <a:xfrm>
             <a:off x="2670048" y="1787195"/>
-            <a:ext cx="804672" cy="211226"/>
+            <a:ext cx="877824" cy="211226"/>
           </a:xfrm>
           <a:prstGeom prst="rect">
             <a:avLst/>
@@ -19290,8 +19290,8 @@
         </p:nvSpPr>
         <p:spPr>
           <a:xfrm>
-            <a:off x="3529584" y="1700784"/>
-            <a:ext cx="896112" cy="384048"/>
+            <a:off x="3602736" y="1700784"/>
+            <a:ext cx="822960" cy="384048"/>
           </a:xfrm>
           <a:prstGeom prst="rect">
             <a:avLst/>
@@ -19315,7 +19315,7 @@
                 <a:ea typeface="Inter" pitchFamily="34" charset="-122"/>
                 <a:cs typeface="Inter" pitchFamily="34" charset="-120"/>
               </a:rPr>
-              <a:t>$150,836</a:t>
+              <a:t>$151K</a:t>
             </a:r>
             <a:endParaRPr lang="en-US" sz="1300" dirty="0"/>
           </a:p>
@@ -19447,7 +19447,7 @@
         <p:spPr>
           <a:xfrm>
             <a:off x="2670048" y="2171243"/>
-            <a:ext cx="426590" cy="211226"/>
+            <a:ext cx="465371" cy="211226"/>
           </a:xfrm>
           <a:prstGeom prst="rect">
             <a:avLst/>
@@ -19466,8 +19466,8 @@
         </p:nvSpPr>
         <p:spPr>
           <a:xfrm>
-            <a:off x="3529584" y="2084832"/>
-            <a:ext cx="896112" cy="384048"/>
+            <a:off x="3602736" y="2084832"/>
+            <a:ext cx="822960" cy="384048"/>
           </a:xfrm>
           <a:prstGeom prst="rect">
             <a:avLst/>
@@ -19491,7 +19491,7 @@
                 <a:ea typeface="Inter" pitchFamily="34" charset="-122"/>
                 <a:cs typeface="Inter" pitchFamily="34" charset="-120"/>
               </a:rPr>
-              <a:t>$79,964</a:t>
+              <a:t>$80K</a:t>
             </a:r>
             <a:endParaRPr lang="en-US" sz="1300" dirty="0"/>
           </a:p>
@@ -19623,7 +19623,7 @@
         <p:spPr>
           <a:xfrm>
             <a:off x="2670048" y="2555291"/>
-            <a:ext cx="415637" cy="211226"/>
+            <a:ext cx="453423" cy="211226"/>
           </a:xfrm>
           <a:prstGeom prst="rect">
             <a:avLst/>
@@ -19642,8 +19642,8 @@
         </p:nvSpPr>
         <p:spPr>
           <a:xfrm>
-            <a:off x="3529584" y="2468880"/>
-            <a:ext cx="896112" cy="384048"/>
+            <a:off x="3602736" y="2468880"/>
+            <a:ext cx="822960" cy="384048"/>
           </a:xfrm>
           <a:prstGeom prst="rect">
             <a:avLst/>
@@ -19667,7 +19667,7 @@
                 <a:ea typeface="Inter" pitchFamily="34" charset="-122"/>
                 <a:cs typeface="Inter" pitchFamily="34" charset="-120"/>
               </a:rPr>
-              <a:t>$77,911</a:t>
+              <a:t>$78K</a:t>
             </a:r>
             <a:endParaRPr lang="en-US" sz="1300" dirty="0"/>
           </a:p>
@@ -19799,7 +19799,7 @@
         <p:spPr>
           <a:xfrm>
             <a:off x="2670048" y="2939339"/>
-            <a:ext cx="397090" cy="211226"/>
+            <a:ext cx="433190" cy="211226"/>
           </a:xfrm>
           <a:prstGeom prst="rect">
             <a:avLst/>
@@ -19818,8 +19818,8 @@
         </p:nvSpPr>
         <p:spPr>
           <a:xfrm>
-            <a:off x="3529584" y="2852928"/>
-            <a:ext cx="896112" cy="384048"/>
+            <a:off x="3602736" y="2852928"/>
+            <a:ext cx="822960" cy="384048"/>
           </a:xfrm>
           <a:prstGeom prst="rect">
             <a:avLst/>
@@ -19843,7 +19843,7 @@
                 <a:ea typeface="Inter" pitchFamily="34" charset="-122"/>
                 <a:cs typeface="Inter" pitchFamily="34" charset="-120"/>
               </a:rPr>
-              <a:t>$74,435</a:t>
+              <a:t>$74K</a:t>
             </a:r>
             <a:endParaRPr lang="en-US" sz="1300" dirty="0"/>
           </a:p>
@@ -19975,7 +19975,7 @@
         <p:spPr>
           <a:xfrm>
             <a:off x="2670048" y="3323387"/>
-            <a:ext cx="359248" cy="211226"/>
+            <a:ext cx="391906" cy="211226"/>
           </a:xfrm>
           <a:prstGeom prst="rect">
             <a:avLst/>
@@ -19994,8 +19994,8 @@
         </p:nvSpPr>
         <p:spPr>
           <a:xfrm>
-            <a:off x="3529584" y="3236976"/>
-            <a:ext cx="896112" cy="384048"/>
+            <a:off x="3602736" y="3236976"/>
+            <a:ext cx="822960" cy="384048"/>
           </a:xfrm>
           <a:prstGeom prst="rect">
             <a:avLst/>
@@ -20019,7 +20019,7 @@
                 <a:ea typeface="Inter" pitchFamily="34" charset="-122"/>
                 <a:cs typeface="Inter" pitchFamily="34" charset="-120"/>
               </a:rPr>
-              <a:t>$67,341</a:t>
+              <a:t>$67K</a:t>
             </a:r>
             <a:endParaRPr lang="en-US" sz="1300" dirty="0"/>
           </a:p>
@@ -20151,7 +20151,7 @@
         <p:spPr>
           <a:xfrm>
             <a:off x="2670048" y="3707435"/>
-            <a:ext cx="302564" cy="211226"/>
+            <a:ext cx="330070" cy="211226"/>
           </a:xfrm>
           <a:prstGeom prst="rect">
             <a:avLst/>
@@ -20170,8 +20170,8 @@
         </p:nvSpPr>
         <p:spPr>
           <a:xfrm>
-            <a:off x="3529584" y="3621024"/>
-            <a:ext cx="896112" cy="384048"/>
+            <a:off x="3602736" y="3621024"/>
+            <a:ext cx="822960" cy="384048"/>
           </a:xfrm>
           <a:prstGeom prst="rect">
             <a:avLst/>
@@ -20195,7 +20195,7 @@
                 <a:ea typeface="Inter" pitchFamily="34" charset="-122"/>
                 <a:cs typeface="Inter" pitchFamily="34" charset="-120"/>
               </a:rPr>
-              <a:t>$56,716</a:t>
+              <a:t>$57K</a:t>
             </a:r>
             <a:endParaRPr lang="en-US" sz="1300" dirty="0"/>
           </a:p>
@@ -20327,7 +20327,7 @@
         <p:spPr>
           <a:xfrm>
             <a:off x="2670048" y="4091483"/>
-            <a:ext cx="280206" cy="211226"/>
+            <a:ext cx="305680" cy="211226"/>
           </a:xfrm>
           <a:prstGeom prst="rect">
             <a:avLst/>
@@ -20346,8 +20346,8 @@
         </p:nvSpPr>
         <p:spPr>
           <a:xfrm>
-            <a:off x="3529584" y="4005072"/>
-            <a:ext cx="896112" cy="384048"/>
+            <a:off x="3602736" y="4005072"/>
+            <a:ext cx="822960" cy="384048"/>
           </a:xfrm>
           <a:prstGeom prst="rect">
             <a:avLst/>
@@ -20371,7 +20371,7 @@
                 <a:ea typeface="Inter" pitchFamily="34" charset="-122"/>
                 <a:cs typeface="Inter" pitchFamily="34" charset="-120"/>
               </a:rPr>
-              <a:t>$52,525</a:t>
+              <a:t>$53K</a:t>
             </a:r>
             <a:endParaRPr lang="en-US" sz="1300" dirty="0"/>
           </a:p>
@@ -20503,7 +20503,7 @@
         <p:spPr>
           <a:xfrm>
             <a:off x="2670048" y="4475531"/>
-            <a:ext cx="254835" cy="211226"/>
+            <a:ext cx="278002" cy="211226"/>
           </a:xfrm>
           <a:prstGeom prst="rect">
             <a:avLst/>
@@ -20522,8 +20522,8 @@
         </p:nvSpPr>
         <p:spPr>
           <a:xfrm>
-            <a:off x="3529584" y="4389120"/>
-            <a:ext cx="896112" cy="384048"/>
+            <a:off x="3602736" y="4389120"/>
+            <a:ext cx="822960" cy="384048"/>
           </a:xfrm>
           <a:prstGeom prst="rect">
             <a:avLst/>
@@ -20547,7 +20547,7 @@
                 <a:ea typeface="Inter" pitchFamily="34" charset="-122"/>
                 <a:cs typeface="Inter" pitchFamily="34" charset="-120"/>
               </a:rPr>
-              <a:t>$47,769</a:t>
+              <a:t>$48K</a:t>
             </a:r>
             <a:endParaRPr lang="en-US" sz="1300" dirty="0"/>
           </a:p>
@@ -20679,7 +20679,7 @@
         <p:spPr>
           <a:xfrm>
             <a:off x="2670048" y="4859579"/>
-            <a:ext cx="171431" cy="211226"/>
+            <a:ext cx="187016" cy="211226"/>
           </a:xfrm>
           <a:prstGeom prst="rect">
             <a:avLst/>
@@ -20698,8 +20698,8 @@
         </p:nvSpPr>
         <p:spPr>
           <a:xfrm>
-            <a:off x="3529584" y="4773168"/>
-            <a:ext cx="896112" cy="384048"/>
+            <a:off x="3602736" y="4773168"/>
+            <a:ext cx="822960" cy="384048"/>
           </a:xfrm>
           <a:prstGeom prst="rect">
             <a:avLst/>
@@ -20723,7 +20723,7 @@
                 <a:ea typeface="Inter" pitchFamily="34" charset="-122"/>
                 <a:cs typeface="Inter" pitchFamily="34" charset="-120"/>
               </a:rPr>
-              <a:t>$32,135</a:t>
+              <a:t>$32K</a:t>
             </a:r>
             <a:endParaRPr lang="en-US" sz="1300" dirty="0"/>
           </a:p>
@@ -20855,7 +20855,7 @@
         <p:spPr>
           <a:xfrm>
             <a:off x="2670048" y="5243627"/>
-            <a:ext cx="168143" cy="211226"/>
+            <a:ext cx="183429" cy="211226"/>
           </a:xfrm>
           <a:prstGeom prst="rect">
             <a:avLst/>
@@ -20874,8 +20874,8 @@
         </p:nvSpPr>
         <p:spPr>
           <a:xfrm>
-            <a:off x="3529584" y="5157216"/>
-            <a:ext cx="896112" cy="384048"/>
+            <a:off x="3602736" y="5157216"/>
+            <a:ext cx="822960" cy="384048"/>
           </a:xfrm>
           <a:prstGeom prst="rect">
             <a:avLst/>
@@ -20899,7 +20899,7 @@
                 <a:ea typeface="Inter" pitchFamily="34" charset="-122"/>
                 <a:cs typeface="Inter" pitchFamily="34" charset="-120"/>
               </a:rPr>
-              <a:t>$31,519</a:t>
+              <a:t>$32K</a:t>
             </a:r>
             <a:endParaRPr lang="en-US" sz="1300" dirty="0"/>
           </a:p>
@@ -21031,7 +21031,7 @@
         <p:spPr>
           <a:xfrm>
             <a:off x="2670048" y="5627675"/>
-            <a:ext cx="133568" cy="211226"/>
+            <a:ext cx="145711" cy="211226"/>
           </a:xfrm>
           <a:prstGeom prst="rect">
             <a:avLst/>
@@ -21050,8 +21050,8 @@
         </p:nvSpPr>
         <p:spPr>
           <a:xfrm>
-            <a:off x="3529584" y="5541264"/>
-            <a:ext cx="896112" cy="384048"/>
+            <a:off x="3602736" y="5541264"/>
+            <a:ext cx="822960" cy="384048"/>
           </a:xfrm>
           <a:prstGeom prst="rect">
             <a:avLst/>
@@ -21075,7 +21075,7 @@
                 <a:ea typeface="Inter" pitchFamily="34" charset="-122"/>
                 <a:cs typeface="Inter" pitchFamily="34" charset="-120"/>
               </a:rPr>
-              <a:t>$25,037</a:t>
+              <a:t>$25K</a:t>
             </a:r>
             <a:endParaRPr lang="en-US" sz="1300" dirty="0"/>
           </a:p>
@@ -21207,7 +21207,7 @@
         <p:spPr>
           <a:xfrm>
             <a:off x="8220456" y="1787195"/>
-            <a:ext cx="119552" cy="211226"/>
+            <a:ext cx="130420" cy="211226"/>
           </a:xfrm>
           <a:prstGeom prst="rect">
             <a:avLst/>
@@ -21226,8 +21226,8 @@
         </p:nvSpPr>
         <p:spPr>
           <a:xfrm>
-            <a:off x="9079992" y="1700784"/>
-            <a:ext cx="896112" cy="384048"/>
+            <a:off x="9153144" y="1700784"/>
+            <a:ext cx="822960" cy="384048"/>
           </a:xfrm>
           <a:prstGeom prst="rect">
             <a:avLst/>
@@ -21251,7 +21251,7 @@
                 <a:ea typeface="Inter" pitchFamily="34" charset="-122"/>
                 <a:cs typeface="Inter" pitchFamily="34" charset="-120"/>
               </a:rPr>
-              <a:t>$22,410</a:t>
+              <a:t>$22K</a:t>
             </a:r>
             <a:endParaRPr lang="en-US" sz="1300" dirty="0"/>
           </a:p>
@@ -21383,7 +21383,7 @@
         <p:spPr>
           <a:xfrm>
             <a:off x="8220456" y="2171243"/>
-            <a:ext cx="113707" cy="211226"/>
+            <a:ext cx="124044" cy="211226"/>
           </a:xfrm>
           <a:prstGeom prst="rect">
             <a:avLst/>
@@ -21402,8 +21402,8 @@
         </p:nvSpPr>
         <p:spPr>
           <a:xfrm>
-            <a:off x="9079992" y="2084832"/>
-            <a:ext cx="896112" cy="384048"/>
+            <a:off x="9153144" y="2084832"/>
+            <a:ext cx="822960" cy="384048"/>
           </a:xfrm>
           <a:prstGeom prst="rect">
             <a:avLst/>
@@ -21427,7 +21427,7 @@
                 <a:ea typeface="Inter" pitchFamily="34" charset="-122"/>
                 <a:cs typeface="Inter" pitchFamily="34" charset="-120"/>
               </a:rPr>
-              <a:t>$21,314</a:t>
+              <a:t>$21K</a:t>
             </a:r>
             <a:endParaRPr lang="en-US" sz="1300" dirty="0"/>
           </a:p>
@@ -21559,7 +21559,7 @@
         <p:spPr>
           <a:xfrm>
             <a:off x="8220456" y="2555291"/>
-            <a:ext cx="109990" cy="211226"/>
+            <a:ext cx="119989" cy="211226"/>
           </a:xfrm>
           <a:prstGeom prst="rect">
             <a:avLst/>
@@ -21578,8 +21578,8 @@
         </p:nvSpPr>
         <p:spPr>
           <a:xfrm>
-            <a:off x="9079992" y="2468880"/>
-            <a:ext cx="896112" cy="384048"/>
+            <a:off x="9153144" y="2468880"/>
+            <a:ext cx="822960" cy="384048"/>
           </a:xfrm>
           <a:prstGeom prst="rect">
             <a:avLst/>
@@ -21603,7 +21603,7 @@
                 <a:ea typeface="Inter" pitchFamily="34" charset="-122"/>
                 <a:cs typeface="Inter" pitchFamily="34" charset="-120"/>
               </a:rPr>
-              <a:t>$20,618</a:t>
+              <a:t>$21K</a:t>
             </a:r>
             <a:endParaRPr lang="en-US" sz="1300" dirty="0"/>
           </a:p>
@@ -21735,7 +21735,7 @@
         <p:spPr>
           <a:xfrm>
             <a:off x="8220456" y="2939339"/>
-            <a:ext cx="104971" cy="211226"/>
+            <a:ext cx="114513" cy="211226"/>
           </a:xfrm>
           <a:prstGeom prst="rect">
             <a:avLst/>
@@ -21754,8 +21754,8 @@
         </p:nvSpPr>
         <p:spPr>
           <a:xfrm>
-            <a:off x="9079992" y="2852928"/>
-            <a:ext cx="896112" cy="384048"/>
+            <a:off x="9153144" y="2852928"/>
+            <a:ext cx="822960" cy="384048"/>
           </a:xfrm>
           <a:prstGeom prst="rect">
             <a:avLst/>
@@ -21779,7 +21779,7 @@
                 <a:ea typeface="Inter" pitchFamily="34" charset="-122"/>
                 <a:cs typeface="Inter" pitchFamily="34" charset="-120"/>
               </a:rPr>
-              <a:t>$19,677</a:t>
+              <a:t>$20K</a:t>
             </a:r>
             <a:endParaRPr lang="en-US" sz="1300" dirty="0"/>
           </a:p>
@@ -21911,7 +21911,7 @@
         <p:spPr>
           <a:xfrm>
             <a:off x="8220456" y="3323387"/>
-            <a:ext cx="94348" cy="211226"/>
+            <a:ext cx="102926" cy="211226"/>
           </a:xfrm>
           <a:prstGeom prst="rect">
             <a:avLst/>
@@ -21930,8 +21930,8 @@
         </p:nvSpPr>
         <p:spPr>
           <a:xfrm>
-            <a:off x="9079992" y="3236976"/>
-            <a:ext cx="896112" cy="384048"/>
+            <a:off x="9153144" y="3236976"/>
+            <a:ext cx="822960" cy="384048"/>
           </a:xfrm>
           <a:prstGeom prst="rect">
             <a:avLst/>
@@ -21955,7 +21955,7 @@
                 <a:ea typeface="Inter" pitchFamily="34" charset="-122"/>
                 <a:cs typeface="Inter" pitchFamily="34" charset="-120"/>
               </a:rPr>
-              <a:t>$17,686</a:t>
+              <a:t>$18K</a:t>
             </a:r>
             <a:endParaRPr lang="en-US" sz="1300" dirty="0"/>
           </a:p>
@@ -22087,7 +22087,7 @@
         <p:spPr>
           <a:xfrm>
             <a:off x="8220456" y="3707435"/>
-            <a:ext cx="80639" cy="211226"/>
+            <a:ext cx="87970" cy="211226"/>
           </a:xfrm>
           <a:prstGeom prst="rect">
             <a:avLst/>
@@ -22106,8 +22106,8 @@
         </p:nvSpPr>
         <p:spPr>
           <a:xfrm>
-            <a:off x="9079992" y="3621024"/>
-            <a:ext cx="896112" cy="384048"/>
+            <a:off x="9153144" y="3621024"/>
+            <a:ext cx="822960" cy="384048"/>
           </a:xfrm>
           <a:prstGeom prst="rect">
             <a:avLst/>
@@ -22131,7 +22131,7 @@
                 <a:ea typeface="Inter" pitchFamily="34" charset="-122"/>
                 <a:cs typeface="Inter" pitchFamily="34" charset="-120"/>
               </a:rPr>
-              <a:t>$15,116</a:t>
+              <a:t>$15K</a:t>
             </a:r>
             <a:endParaRPr lang="en-US" sz="1300" dirty="0"/>
           </a:p>
@@ -22263,7 +22263,7 @@
         <p:spPr>
           <a:xfrm>
             <a:off x="8220456" y="4091483"/>
-            <a:ext cx="69613" cy="211226"/>
+            <a:ext cx="75941" cy="211226"/>
           </a:xfrm>
           <a:prstGeom prst="rect">
             <a:avLst/>
@@ -22282,8 +22282,8 @@
         </p:nvSpPr>
         <p:spPr>
           <a:xfrm>
-            <a:off x="9079992" y="4005072"/>
-            <a:ext cx="896112" cy="384048"/>
+            <a:off x="9153144" y="4005072"/>
+            <a:ext cx="822960" cy="384048"/>
           </a:xfrm>
           <a:prstGeom prst="rect">
             <a:avLst/>
@@ -22307,7 +22307,7 @@
                 <a:ea typeface="Inter" pitchFamily="34" charset="-122"/>
                 <a:cs typeface="Inter" pitchFamily="34" charset="-120"/>
               </a:rPr>
-              <a:t>$13,049</a:t>
+              <a:t>$13K</a:t>
             </a:r>
             <a:endParaRPr lang="en-US" sz="1300" dirty="0"/>
           </a:p>
@@ -22439,7 +22439,7 @@
         <p:spPr>
           <a:xfrm>
             <a:off x="8220456" y="4475531"/>
-            <a:ext cx="58212" cy="211226"/>
+            <a:ext cx="63505" cy="211226"/>
           </a:xfrm>
           <a:prstGeom prst="rect">
             <a:avLst/>
@@ -22458,8 +22458,8 @@
         </p:nvSpPr>
         <p:spPr>
           <a:xfrm>
-            <a:off x="9079992" y="4389120"/>
-            <a:ext cx="896112" cy="384048"/>
+            <a:off x="9153144" y="4389120"/>
+            <a:ext cx="822960" cy="384048"/>
           </a:xfrm>
           <a:prstGeom prst="rect">
             <a:avLst/>
@@ -22483,7 +22483,7 @@
                 <a:ea typeface="Inter" pitchFamily="34" charset="-122"/>
                 <a:cs typeface="Inter" pitchFamily="34" charset="-120"/>
               </a:rPr>
-              <a:t>$10,912</a:t>
+              <a:t>$11K</a:t>
             </a:r>
             <a:endParaRPr lang="en-US" sz="1300" dirty="0"/>
           </a:p>
@@ -22615,7 +22615,7 @@
         <p:spPr>
           <a:xfrm>
             <a:off x="8220456" y="4859579"/>
-            <a:ext cx="23377" cy="211226"/>
+            <a:ext cx="25502" cy="211226"/>
           </a:xfrm>
           <a:prstGeom prst="rect">
             <a:avLst/>
@@ -22634,8 +22634,8 @@
         </p:nvSpPr>
         <p:spPr>
           <a:xfrm>
-            <a:off x="9079992" y="4773168"/>
-            <a:ext cx="896112" cy="384048"/>
+            <a:off x="9153144" y="4773168"/>
+            <a:ext cx="822960" cy="384048"/>
           </a:xfrm>
           <a:prstGeom prst="rect">
             <a:avLst/>
@@ -22659,7 +22659,7 @@
                 <a:ea typeface="Inter" pitchFamily="34" charset="-122"/>
                 <a:cs typeface="Inter" pitchFamily="34" charset="-120"/>
               </a:rPr>
-              <a:t>$4,382</a:t>
+              <a:t>$4K</a:t>
             </a:r>
             <a:endParaRPr lang="en-US" sz="1300" dirty="0"/>
           </a:p>
@@ -22791,7 +22791,7 @@
         <p:spPr>
           <a:xfrm>
             <a:off x="8220456" y="5243627"/>
-            <a:ext cx="18288" cy="211226"/>
+            <a:ext cx="19240" cy="211226"/>
           </a:xfrm>
           <a:prstGeom prst="rect">
             <a:avLst/>
@@ -22810,8 +22810,8 @@
         </p:nvSpPr>
         <p:spPr>
           <a:xfrm>
-            <a:off x="9079992" y="5157216"/>
-            <a:ext cx="896112" cy="384048"/>
+            <a:off x="9153144" y="5157216"/>
+            <a:ext cx="822960" cy="384048"/>
           </a:xfrm>
           <a:prstGeom prst="rect">
             <a:avLst/>
@@ -22835,7 +22835,7 @@
                 <a:ea typeface="Inter" pitchFamily="34" charset="-122"/>
                 <a:cs typeface="Inter" pitchFamily="34" charset="-120"/>
               </a:rPr>
-              <a:t>$3,306</a:t>
+              <a:t>$3K</a:t>
             </a:r>
             <a:endParaRPr lang="en-US" sz="1300" dirty="0"/>
           </a:p>
@@ -23136,8 +23136,8 @@
         </p:nvSpPr>
         <p:spPr>
           <a:xfrm>
-            <a:off x="3529584" y="1316736"/>
-            <a:ext cx="896112" cy="329184"/>
+            <a:off x="3602736" y="1316736"/>
+            <a:ext cx="822960" cy="329184"/>
           </a:xfrm>
           <a:prstGeom prst="rect">
             <a:avLst/>
@@ -23253,8 +23253,8 @@
         </p:nvSpPr>
         <p:spPr>
           <a:xfrm>
-            <a:off x="9079992" y="1316736"/>
-            <a:ext cx="896112" cy="329184"/>
+            <a:off x="9153144" y="1316736"/>
+            <a:ext cx="822960" cy="329184"/>
           </a:xfrm>
           <a:prstGeom prst="rect">
             <a:avLst/>
@@ -23410,7 +23410,7 @@
         <p:spPr>
           <a:xfrm>
             <a:off x="2670048" y="1773901"/>
-            <a:ext cx="804672" cy="178730"/>
+            <a:ext cx="877824" cy="178730"/>
           </a:xfrm>
           <a:prstGeom prst="rect">
             <a:avLst/>
@@ -23429,8 +23429,8 @@
         </p:nvSpPr>
         <p:spPr>
           <a:xfrm>
-            <a:off x="3529584" y="1700784"/>
-            <a:ext cx="896112" cy="324964"/>
+            <a:off x="3602736" y="1700784"/>
+            <a:ext cx="822960" cy="324964"/>
           </a:xfrm>
           <a:prstGeom prst="rect">
             <a:avLst/>
@@ -23454,7 +23454,7 @@
                 <a:ea typeface="Inter" pitchFamily="34" charset="-122"/>
                 <a:cs typeface="Inter" pitchFamily="34" charset="-120"/>
               </a:rPr>
-              <a:t>$142,290</a:t>
+              <a:t>$142K</a:t>
             </a:r>
             <a:endParaRPr lang="en-US" sz="1300" dirty="0"/>
           </a:p>
@@ -23586,7 +23586,7 @@
         <p:spPr>
           <a:xfrm>
             <a:off x="2670048" y="2098865"/>
-            <a:ext cx="727080" cy="178730"/>
+            <a:ext cx="793178" cy="178730"/>
           </a:xfrm>
           <a:prstGeom prst="rect">
             <a:avLst/>
@@ -23605,8 +23605,8 @@
         </p:nvSpPr>
         <p:spPr>
           <a:xfrm>
-            <a:off x="3529584" y="2025748"/>
-            <a:ext cx="896112" cy="324964"/>
+            <a:off x="3602736" y="2025748"/>
+            <a:ext cx="822960" cy="324964"/>
           </a:xfrm>
           <a:prstGeom prst="rect">
             <a:avLst/>
@@ -23630,7 +23630,7 @@
                 <a:ea typeface="Inter" pitchFamily="34" charset="-122"/>
                 <a:cs typeface="Inter" pitchFamily="34" charset="-120"/>
               </a:rPr>
-              <a:t>$128,570</a:t>
+              <a:t>$129K</a:t>
             </a:r>
             <a:endParaRPr lang="en-US" sz="1300" dirty="0"/>
           </a:p>
@@ -23762,7 +23762,7 @@
         <p:spPr>
           <a:xfrm>
             <a:off x="2670048" y="2423828"/>
-            <a:ext cx="615724" cy="178730"/>
+            <a:ext cx="671699" cy="178730"/>
           </a:xfrm>
           <a:prstGeom prst="rect">
             <a:avLst/>
@@ -23781,8 +23781,8 @@
         </p:nvSpPr>
         <p:spPr>
           <a:xfrm>
-            <a:off x="3529584" y="2350711"/>
-            <a:ext cx="896112" cy="324964"/>
+            <a:off x="3602736" y="2350711"/>
+            <a:ext cx="822960" cy="324964"/>
           </a:xfrm>
           <a:prstGeom prst="rect">
             <a:avLst/>
@@ -23806,7 +23806,7 @@
                 <a:ea typeface="Inter" pitchFamily="34" charset="-122"/>
                 <a:cs typeface="Inter" pitchFamily="34" charset="-120"/>
               </a:rPr>
-              <a:t>$108,879</a:t>
+              <a:t>$109K</a:t>
             </a:r>
             <a:endParaRPr lang="en-US" sz="1300" dirty="0"/>
           </a:p>
@@ -23938,7 +23938,7 @@
         <p:spPr>
           <a:xfrm>
             <a:off x="2670048" y="2748792"/>
-            <a:ext cx="478631" cy="178730"/>
+            <a:ext cx="522143" cy="178730"/>
           </a:xfrm>
           <a:prstGeom prst="rect">
             <a:avLst/>
@@ -23957,8 +23957,8 @@
         </p:nvSpPr>
         <p:spPr>
           <a:xfrm>
-            <a:off x="3529584" y="2675675"/>
-            <a:ext cx="896112" cy="324964"/>
+            <a:off x="3602736" y="2675675"/>
+            <a:ext cx="822960" cy="324964"/>
           </a:xfrm>
           <a:prstGeom prst="rect">
             <a:avLst/>
@@ -23982,7 +23982,7 @@
                 <a:ea typeface="Inter" pitchFamily="34" charset="-122"/>
                 <a:cs typeface="Inter" pitchFamily="34" charset="-120"/>
               </a:rPr>
-              <a:t>$84,636</a:t>
+              <a:t>$85K</a:t>
             </a:r>
             <a:endParaRPr lang="en-US" sz="1300" dirty="0"/>
           </a:p>
@@ -24114,7 +24114,7 @@
         <p:spPr>
           <a:xfrm>
             <a:off x="2670048" y="3073756"/>
-            <a:ext cx="427501" cy="178730"/>
+            <a:ext cx="466364" cy="178730"/>
           </a:xfrm>
           <a:prstGeom prst="rect">
             <a:avLst/>
@@ -24133,8 +24133,8 @@
         </p:nvSpPr>
         <p:spPr>
           <a:xfrm>
-            <a:off x="3529584" y="3000639"/>
-            <a:ext cx="896112" cy="324964"/>
+            <a:off x="3602736" y="3000639"/>
+            <a:ext cx="822960" cy="324964"/>
           </a:xfrm>
           <a:prstGeom prst="rect">
             <a:avLst/>
@@ -24158,7 +24158,7 @@
                 <a:ea typeface="Inter" pitchFamily="34" charset="-122"/>
                 <a:cs typeface="Inter" pitchFamily="34" charset="-120"/>
               </a:rPr>
-              <a:t>$75,595</a:t>
+              <a:t>$76K</a:t>
             </a:r>
             <a:endParaRPr lang="en-US" sz="1300" dirty="0"/>
           </a:p>
@@ -24290,7 +24290,7 @@
         <p:spPr>
           <a:xfrm>
             <a:off x="2670048" y="3398719"/>
-            <a:ext cx="424538" cy="178730"/>
+            <a:ext cx="463132" cy="178730"/>
           </a:xfrm>
           <a:prstGeom prst="rect">
             <a:avLst/>
@@ -24309,8 +24309,8 @@
         </p:nvSpPr>
         <p:spPr>
           <a:xfrm>
-            <a:off x="3529584" y="3325602"/>
-            <a:ext cx="896112" cy="324964"/>
+            <a:off x="3602736" y="3325602"/>
+            <a:ext cx="822960" cy="324964"/>
           </a:xfrm>
           <a:prstGeom prst="rect">
             <a:avLst/>
@@ -24334,7 +24334,7 @@
                 <a:ea typeface="Inter" pitchFamily="34" charset="-122"/>
                 <a:cs typeface="Inter" pitchFamily="34" charset="-120"/>
               </a:rPr>
-              <a:t>$75,071</a:t>
+              <a:t>$75K</a:t>
             </a:r>
             <a:endParaRPr lang="en-US" sz="1300" dirty="0"/>
           </a:p>
@@ -24466,7 +24466,7 @@
         <p:spPr>
           <a:xfrm>
             <a:off x="2670048" y="3723683"/>
-            <a:ext cx="368655" cy="178730"/>
+            <a:ext cx="402170" cy="178730"/>
           </a:xfrm>
           <a:prstGeom prst="rect">
             <a:avLst/>
@@ -24485,8 +24485,8 @@
         </p:nvSpPr>
         <p:spPr>
           <a:xfrm>
-            <a:off x="3529584" y="3650566"/>
-            <a:ext cx="896112" cy="324964"/>
+            <a:off x="3602736" y="3650566"/>
+            <a:ext cx="822960" cy="324964"/>
           </a:xfrm>
           <a:prstGeom prst="rect">
             <a:avLst/>
@@ -24510,7 +24510,7 @@
                 <a:ea typeface="Inter" pitchFamily="34" charset="-122"/>
                 <a:cs typeface="Inter" pitchFamily="34" charset="-120"/>
               </a:rPr>
-              <a:t>$65,189</a:t>
+              <a:t>$65K</a:t>
             </a:r>
             <a:endParaRPr lang="en-US" sz="1300" dirty="0"/>
           </a:p>
@@ -24642,7 +24642,7 @@
         <p:spPr>
           <a:xfrm>
             <a:off x="2670048" y="4048647"/>
-            <a:ext cx="359513" cy="178730"/>
+            <a:ext cx="392196" cy="178730"/>
           </a:xfrm>
           <a:prstGeom prst="rect">
             <a:avLst/>
@@ -24661,8 +24661,8 @@
         </p:nvSpPr>
         <p:spPr>
           <a:xfrm>
-            <a:off x="3529584" y="3975530"/>
-            <a:ext cx="896112" cy="324964"/>
+            <a:off x="3602736" y="3975530"/>
+            <a:ext cx="822960" cy="324964"/>
           </a:xfrm>
           <a:prstGeom prst="rect">
             <a:avLst/>
@@ -24686,7 +24686,7 @@
                 <a:ea typeface="Inter" pitchFamily="34" charset="-122"/>
                 <a:cs typeface="Inter" pitchFamily="34" charset="-120"/>
               </a:rPr>
-              <a:t>$63,573</a:t>
+              <a:t>$64K</a:t>
             </a:r>
             <a:endParaRPr lang="en-US" sz="1300" dirty="0"/>
           </a:p>
@@ -24818,7 +24818,7 @@
         <p:spPr>
           <a:xfrm>
             <a:off x="2670048" y="4373610"/>
-            <a:ext cx="351554" cy="178730"/>
+            <a:ext cx="383514" cy="178730"/>
           </a:xfrm>
           <a:prstGeom prst="rect">
             <a:avLst/>
@@ -24837,8 +24837,8 @@
         </p:nvSpPr>
         <p:spPr>
           <a:xfrm>
-            <a:off x="3529584" y="4300494"/>
-            <a:ext cx="896112" cy="324964"/>
+            <a:off x="3602736" y="4300494"/>
+            <a:ext cx="822960" cy="324964"/>
           </a:xfrm>
           <a:prstGeom prst="rect">
             <a:avLst/>
@@ -24862,7 +24862,7 @@
                 <a:ea typeface="Inter" pitchFamily="34" charset="-122"/>
                 <a:cs typeface="Inter" pitchFamily="34" charset="-120"/>
               </a:rPr>
-              <a:t>$62,165</a:t>
+              <a:t>$62K</a:t>
             </a:r>
             <a:endParaRPr lang="en-US" sz="1300" dirty="0"/>
           </a:p>
@@ -24994,7 +24994,7 @@
         <p:spPr>
           <a:xfrm>
             <a:off x="2670048" y="4698574"/>
-            <a:ext cx="349253" cy="178730"/>
+            <a:ext cx="381003" cy="178730"/>
           </a:xfrm>
           <a:prstGeom prst="rect">
             <a:avLst/>
@@ -25013,8 +25013,8 @@
         </p:nvSpPr>
         <p:spPr>
           <a:xfrm>
-            <a:off x="3529584" y="4625457"/>
-            <a:ext cx="896112" cy="324964"/>
+            <a:off x="3602736" y="4625457"/>
+            <a:ext cx="822960" cy="324964"/>
           </a:xfrm>
           <a:prstGeom prst="rect">
             <a:avLst/>
@@ -25038,7 +25038,7 @@
                 <a:ea typeface="Inter" pitchFamily="34" charset="-122"/>
                 <a:cs typeface="Inter" pitchFamily="34" charset="-120"/>
               </a:rPr>
-              <a:t>$61,758</a:t>
+              <a:t>$62K</a:t>
             </a:r>
             <a:endParaRPr lang="en-US" sz="1300" dirty="0"/>
           </a:p>
@@ -25170,7 +25170,7 @@
         <p:spPr>
           <a:xfrm>
             <a:off x="2670048" y="5023538"/>
-            <a:ext cx="338933" cy="178730"/>
+            <a:ext cx="369746" cy="178730"/>
           </a:xfrm>
           <a:prstGeom prst="rect">
             <a:avLst/>
@@ -25189,8 +25189,8 @@
         </p:nvSpPr>
         <p:spPr>
           <a:xfrm>
-            <a:off x="3529584" y="4950421"/>
-            <a:ext cx="896112" cy="324964"/>
+            <a:off x="3602736" y="4950421"/>
+            <a:ext cx="822960" cy="324964"/>
           </a:xfrm>
           <a:prstGeom prst="rect">
             <a:avLst/>
@@ -25214,7 +25214,7 @@
                 <a:ea typeface="Inter" pitchFamily="34" charset="-122"/>
                 <a:cs typeface="Inter" pitchFamily="34" charset="-120"/>
               </a:rPr>
-              <a:t>$59,934</a:t>
+              <a:t>$60K</a:t>
             </a:r>
             <a:endParaRPr lang="en-US" sz="1300" dirty="0"/>
           </a:p>
@@ -25346,7 +25346,7 @@
         <p:spPr>
           <a:xfrm>
             <a:off x="2670048" y="5348501"/>
-            <a:ext cx="317170" cy="178730"/>
+            <a:ext cx="346004" cy="178730"/>
           </a:xfrm>
           <a:prstGeom prst="rect">
             <a:avLst/>
@@ -25365,8 +25365,8 @@
         </p:nvSpPr>
         <p:spPr>
           <a:xfrm>
-            <a:off x="3529584" y="5275385"/>
-            <a:ext cx="896112" cy="324964"/>
+            <a:off x="3602736" y="5275385"/>
+            <a:ext cx="822960" cy="324964"/>
           </a:xfrm>
           <a:prstGeom prst="rect">
             <a:avLst/>
@@ -25390,7 +25390,7 @@
                 <a:ea typeface="Inter" pitchFamily="34" charset="-122"/>
                 <a:cs typeface="Inter" pitchFamily="34" charset="-120"/>
               </a:rPr>
-              <a:t>$56,085</a:t>
+              <a:t>$56K</a:t>
             </a:r>
             <a:endParaRPr lang="en-US" sz="1300" dirty="0"/>
           </a:p>
@@ -25522,7 +25522,7 @@
         <p:spPr>
           <a:xfrm>
             <a:off x="2670048" y="5673465"/>
-            <a:ext cx="316483" cy="178730"/>
+            <a:ext cx="345254" cy="178730"/>
           </a:xfrm>
           <a:prstGeom prst="rect">
             <a:avLst/>
@@ -25541,8 +25541,8 @@
         </p:nvSpPr>
         <p:spPr>
           <a:xfrm>
-            <a:off x="3529584" y="5600348"/>
-            <a:ext cx="896112" cy="324964"/>
+            <a:off x="3602736" y="5600348"/>
+            <a:ext cx="822960" cy="324964"/>
           </a:xfrm>
           <a:prstGeom prst="rect">
             <a:avLst/>
@@ -25566,7 +25566,7 @@
                 <a:ea typeface="Inter" pitchFamily="34" charset="-122"/>
                 <a:cs typeface="Inter" pitchFamily="34" charset="-120"/>
               </a:rPr>
-              <a:t>$55,964</a:t>
+              <a:t>$56K</a:t>
             </a:r>
             <a:endParaRPr lang="en-US" sz="1300" dirty="0"/>
           </a:p>
@@ -25698,7 +25698,7 @@
         <p:spPr>
           <a:xfrm>
             <a:off x="8220456" y="1773901"/>
-            <a:ext cx="290838" cy="178730"/>
+            <a:ext cx="317278" cy="178730"/>
           </a:xfrm>
           <a:prstGeom prst="rect">
             <a:avLst/>
@@ -25717,8 +25717,8 @@
         </p:nvSpPr>
         <p:spPr>
           <a:xfrm>
-            <a:off x="9079992" y="1700784"/>
-            <a:ext cx="896112" cy="324964"/>
+            <a:off x="9153144" y="1700784"/>
+            <a:ext cx="822960" cy="324964"/>
           </a:xfrm>
           <a:prstGeom prst="rect">
             <a:avLst/>
@@ -25742,7 +25742,7 @@
                 <a:ea typeface="Inter" pitchFamily="34" charset="-122"/>
                 <a:cs typeface="Inter" pitchFamily="34" charset="-120"/>
               </a:rPr>
-              <a:t>$51,429</a:t>
+              <a:t>$51K</a:t>
             </a:r>
             <a:endParaRPr lang="en-US" sz="1300" dirty="0"/>
           </a:p>
@@ -25874,7 +25874,7 @@
         <p:spPr>
           <a:xfrm>
             <a:off x="8220456" y="2098865"/>
-            <a:ext cx="259149" cy="178730"/>
+            <a:ext cx="282708" cy="178730"/>
           </a:xfrm>
           <a:prstGeom prst="rect">
             <a:avLst/>
@@ -25893,8 +25893,8 @@
         </p:nvSpPr>
         <p:spPr>
           <a:xfrm>
-            <a:off x="9079992" y="2025748"/>
-            <a:ext cx="896112" cy="324964"/>
+            <a:off x="9153144" y="2025748"/>
+            <a:ext cx="822960" cy="324964"/>
           </a:xfrm>
           <a:prstGeom prst="rect">
             <a:avLst/>
@@ -25918,7 +25918,7 @@
                 <a:ea typeface="Inter" pitchFamily="34" charset="-122"/>
                 <a:cs typeface="Inter" pitchFamily="34" charset="-120"/>
               </a:rPr>
-              <a:t>$45,825</a:t>
+              <a:t>$46K</a:t>
             </a:r>
             <a:endParaRPr lang="en-US" sz="1300" dirty="0"/>
           </a:p>
@@ -26050,7 +26050,7 @@
         <p:spPr>
           <a:xfrm>
             <a:off x="8220456" y="2423828"/>
-            <a:ext cx="190832" cy="178730"/>
+            <a:ext cx="208181" cy="178730"/>
           </a:xfrm>
           <a:prstGeom prst="rect">
             <a:avLst/>
@@ -26069,8 +26069,8 @@
         </p:nvSpPr>
         <p:spPr>
           <a:xfrm>
-            <a:off x="9079992" y="2350711"/>
-            <a:ext cx="896112" cy="324964"/>
+            <a:off x="9153144" y="2350711"/>
+            <a:ext cx="822960" cy="324964"/>
           </a:xfrm>
           <a:prstGeom prst="rect">
             <a:avLst/>
@@ -26094,7 +26094,7 @@
                 <a:ea typeface="Inter" pitchFamily="34" charset="-122"/>
                 <a:cs typeface="Inter" pitchFamily="34" charset="-120"/>
               </a:rPr>
-              <a:t>$33,745</a:t>
+              <a:t>$34K</a:t>
             </a:r>
             <a:endParaRPr lang="en-US" sz="1300" dirty="0"/>
           </a:p>
@@ -26226,7 +26226,7 @@
         <p:spPr>
           <a:xfrm>
             <a:off x="8220456" y="2748792"/>
-            <a:ext cx="163264" cy="178730"/>
+            <a:ext cx="178106" cy="178730"/>
           </a:xfrm>
           <a:prstGeom prst="rect">
             <a:avLst/>
@@ -26245,8 +26245,8 @@
         </p:nvSpPr>
         <p:spPr>
           <a:xfrm>
-            <a:off x="9079992" y="2675675"/>
-            <a:ext cx="896112" cy="324964"/>
+            <a:off x="9153144" y="2675675"/>
+            <a:ext cx="822960" cy="324964"/>
           </a:xfrm>
           <a:prstGeom prst="rect">
             <a:avLst/>
@@ -26270,7 +26270,7 @@
                 <a:ea typeface="Inter" pitchFamily="34" charset="-122"/>
                 <a:cs typeface="Inter" pitchFamily="34" charset="-120"/>
               </a:rPr>
-              <a:t>$28,870</a:t>
+              <a:t>$29K</a:t>
             </a:r>
             <a:endParaRPr lang="en-US" sz="1300" dirty="0"/>
           </a:p>
@@ -26402,7 +26402,7 @@
         <p:spPr>
           <a:xfrm>
             <a:off x="8220456" y="3073756"/>
-            <a:ext cx="147423" cy="178730"/>
+            <a:ext cx="160825" cy="178730"/>
           </a:xfrm>
           <a:prstGeom prst="rect">
             <a:avLst/>
@@ -26421,8 +26421,8 @@
         </p:nvSpPr>
         <p:spPr>
           <a:xfrm>
-            <a:off x="9079992" y="3000639"/>
-            <a:ext cx="896112" cy="324964"/>
+            <a:off x="9153144" y="3000639"/>
+            <a:ext cx="822960" cy="324964"/>
           </a:xfrm>
           <a:prstGeom prst="rect">
             <a:avLst/>
@@ -26446,7 +26446,7 @@
                 <a:ea typeface="Inter" pitchFamily="34" charset="-122"/>
                 <a:cs typeface="Inter" pitchFamily="34" charset="-120"/>
               </a:rPr>
-              <a:t>$26,069</a:t>
+              <a:t>$26K</a:t>
             </a:r>
             <a:endParaRPr lang="en-US" sz="1300" dirty="0"/>
           </a:p>
@@ -26578,7 +26578,7 @@
         <p:spPr>
           <a:xfrm>
             <a:off x="8220456" y="3398719"/>
-            <a:ext cx="140924" cy="178730"/>
+            <a:ext cx="153735" cy="178730"/>
           </a:xfrm>
           <a:prstGeom prst="rect">
             <a:avLst/>
@@ -26597,8 +26597,8 @@
         </p:nvSpPr>
         <p:spPr>
           <a:xfrm>
-            <a:off x="9079992" y="3325602"/>
-            <a:ext cx="896112" cy="324964"/>
+            <a:off x="9153144" y="3325602"/>
+            <a:ext cx="822960" cy="324964"/>
           </a:xfrm>
           <a:prstGeom prst="rect">
             <a:avLst/>
@@ -26622,7 +26622,7 @@
                 <a:ea typeface="Inter" pitchFamily="34" charset="-122"/>
                 <a:cs typeface="Inter" pitchFamily="34" charset="-120"/>
               </a:rPr>
-              <a:t>$24,920</a:t>
+              <a:t>$25K</a:t>
             </a:r>
             <a:endParaRPr lang="en-US" sz="1300" dirty="0"/>
           </a:p>
@@ -26754,7 +26754,7 @@
         <p:spPr>
           <a:xfrm>
             <a:off x="8220456" y="3723683"/>
-            <a:ext cx="134775" cy="178730"/>
+            <a:ext cx="147027" cy="178730"/>
           </a:xfrm>
           <a:prstGeom prst="rect">
             <a:avLst/>
@@ -26773,8 +26773,8 @@
         </p:nvSpPr>
         <p:spPr>
           <a:xfrm>
-            <a:off x="9079992" y="3650566"/>
-            <a:ext cx="896112" cy="324964"/>
+            <a:off x="9153144" y="3650566"/>
+            <a:ext cx="822960" cy="324964"/>
           </a:xfrm>
           <a:prstGeom prst="rect">
             <a:avLst/>
@@ -26798,7 +26798,7 @@
                 <a:ea typeface="Inter" pitchFamily="34" charset="-122"/>
                 <a:cs typeface="Inter" pitchFamily="34" charset="-120"/>
               </a:rPr>
-              <a:t>$23,832</a:t>
+              <a:t>$24K</a:t>
             </a:r>
             <a:endParaRPr lang="en-US" sz="1300" dirty="0"/>
           </a:p>
@@ -26930,7 +26930,7 @@
         <p:spPr>
           <a:xfrm>
             <a:off x="8220456" y="4048647"/>
-            <a:ext cx="120016" cy="178730"/>
+            <a:ext cx="130926" cy="178730"/>
           </a:xfrm>
           <a:prstGeom prst="rect">
             <a:avLst/>
@@ -26949,8 +26949,8 @@
         </p:nvSpPr>
         <p:spPr>
           <a:xfrm>
-            <a:off x="9079992" y="3975530"/>
-            <a:ext cx="896112" cy="324964"/>
+            <a:off x="9153144" y="3975530"/>
+            <a:ext cx="822960" cy="324964"/>
           </a:xfrm>
           <a:prstGeom prst="rect">
             <a:avLst/>
@@ -26974,7 +26974,7 @@
                 <a:ea typeface="Inter" pitchFamily="34" charset="-122"/>
                 <a:cs typeface="Inter" pitchFamily="34" charset="-120"/>
               </a:rPr>
-              <a:t>$21,222</a:t>
+              <a:t>$21K</a:t>
             </a:r>
             <a:endParaRPr lang="en-US" sz="1300" dirty="0"/>
           </a:p>
@@ -27106,7 +27106,7 @@
         <p:spPr>
           <a:xfrm>
             <a:off x="8220456" y="4373610"/>
-            <a:ext cx="106781" cy="178730"/>
+            <a:ext cx="116489" cy="178730"/>
           </a:xfrm>
           <a:prstGeom prst="rect">
             <a:avLst/>
@@ -27125,8 +27125,8 @@
         </p:nvSpPr>
         <p:spPr>
           <a:xfrm>
-            <a:off x="9079992" y="4300494"/>
-            <a:ext cx="896112" cy="324964"/>
+            <a:off x="9153144" y="4300494"/>
+            <a:ext cx="822960" cy="324964"/>
           </a:xfrm>
           <a:prstGeom prst="rect">
             <a:avLst/>
@@ -27150,7 +27150,7 @@
                 <a:ea typeface="Inter" pitchFamily="34" charset="-122"/>
                 <a:cs typeface="Inter" pitchFamily="34" charset="-120"/>
               </a:rPr>
-              <a:t>$18,882</a:t>
+              <a:t>$19K</a:t>
             </a:r>
             <a:endParaRPr lang="en-US" sz="1300" dirty="0"/>
           </a:p>
@@ -27282,7 +27282,7 @@
         <p:spPr>
           <a:xfrm>
             <a:off x="8220456" y="4698574"/>
-            <a:ext cx="103137" cy="178730"/>
+            <a:ext cx="112514" cy="178730"/>
           </a:xfrm>
           <a:prstGeom prst="rect">
             <a:avLst/>
@@ -27301,8 +27301,8 @@
         </p:nvSpPr>
         <p:spPr>
           <a:xfrm>
-            <a:off x="9079992" y="4625457"/>
-            <a:ext cx="896112" cy="324964"/>
+            <a:off x="9153144" y="4625457"/>
+            <a:ext cx="822960" cy="324964"/>
           </a:xfrm>
           <a:prstGeom prst="rect">
             <a:avLst/>
@@ -27326,7 +27326,7 @@
                 <a:ea typeface="Inter" pitchFamily="34" charset="-122"/>
                 <a:cs typeface="Inter" pitchFamily="34" charset="-120"/>
               </a:rPr>
-              <a:t>$18,238</a:t>
+              <a:t>$18K</a:t>
             </a:r>
             <a:endParaRPr lang="en-US" sz="1300" dirty="0"/>
           </a:p>
@@ -27458,7 +27458,7 @@
         <p:spPr>
           <a:xfrm>
             <a:off x="8220456" y="5023538"/>
-            <a:ext cx="71967" cy="178730"/>
+            <a:ext cx="78509" cy="178730"/>
           </a:xfrm>
           <a:prstGeom prst="rect">
             <a:avLst/>
@@ -27477,8 +27477,8 @@
         </p:nvSpPr>
         <p:spPr>
           <a:xfrm>
-            <a:off x="9079992" y="4950421"/>
-            <a:ext cx="896112" cy="324964"/>
+            <a:off x="9153144" y="4950421"/>
+            <a:ext cx="822960" cy="324964"/>
           </a:xfrm>
           <a:prstGeom prst="rect">
             <a:avLst/>
@@ -27502,7 +27502,7 @@
                 <a:ea typeface="Inter" pitchFamily="34" charset="-122"/>
                 <a:cs typeface="Inter" pitchFamily="34" charset="-120"/>
               </a:rPr>
-              <a:t>$12,726</a:t>
+              <a:t>$13K</a:t>
             </a:r>
             <a:endParaRPr lang="en-US" sz="1300" dirty="0"/>
           </a:p>
@@ -27634,7 +27634,7 @@
         <p:spPr>
           <a:xfrm>
             <a:off x="8220456" y="5348501"/>
-            <a:ext cx="57713" cy="178730"/>
+            <a:ext cx="62960" cy="178730"/>
           </a:xfrm>
           <a:prstGeom prst="rect">
             <a:avLst/>
@@ -27653,8 +27653,8 @@
         </p:nvSpPr>
         <p:spPr>
           <a:xfrm>
-            <a:off x="9079992" y="5275385"/>
-            <a:ext cx="896112" cy="324964"/>
+            <a:off x="9153144" y="5275385"/>
+            <a:ext cx="822960" cy="324964"/>
           </a:xfrm>
           <a:prstGeom prst="rect">
             <a:avLst/>
@@ -27678,7 +27678,7 @@
                 <a:ea typeface="Inter" pitchFamily="34" charset="-122"/>
                 <a:cs typeface="Inter" pitchFamily="34" charset="-120"/>
               </a:rPr>
-              <a:t>$10,205</a:t>
+              <a:t>$10K</a:t>
             </a:r>
             <a:endParaRPr lang="en-US" sz="1300" dirty="0"/>
           </a:p>
@@ -27829,8 +27829,8 @@
         </p:nvSpPr>
         <p:spPr>
           <a:xfrm>
-            <a:off x="9079992" y="5600348"/>
-            <a:ext cx="896112" cy="324964"/>
+            <a:off x="9153144" y="5600348"/>
+            <a:ext cx="822960" cy="324964"/>
           </a:xfrm>
           <a:prstGeom prst="rect">
             <a:avLst/>
@@ -27854,7 +27854,7 @@
                 <a:ea typeface="Inter" pitchFamily="34" charset="-122"/>
                 <a:cs typeface="Inter" pitchFamily="34" charset="-120"/>
               </a:rPr>
-              <a:t>$1,206</a:t>
+              <a:t>$1K</a:t>
             </a:r>
             <a:endParaRPr lang="en-US" sz="1300" dirty="0"/>
           </a:p>

--- a/day2-deck/decks/Op Code Missed Opportunity - Review.pptx
+++ b/day2-deck/decks/Op Code Missed Opportunity - Review.pptx
@@ -2530,7 +2530,7 @@
                 <a:ea typeface="Inter" pitchFamily="34" charset="-122"/>
                 <a:cs typeface="Inter" pitchFamily="34" charset="-120"/>
               </a:rPr>
-              <a:t>Total Missed Opportunity by Store</a:t>
+              <a:t>Total Variance from Benchmark by Store</a:t>
             </a:r>
             <a:endParaRPr lang="en-US" sz="2800" dirty="0"/>
           </a:p>
@@ -7398,7 +7398,7 @@
                 <a:ea typeface="Inter" pitchFamily="34" charset="-122"/>
                 <a:cs typeface="Inter" pitchFamily="34" charset="-120"/>
               </a:rPr>
-              <a:t>Alignment Missed Opportunity</a:t>
+              <a:t>Alignment Variance from Benchmark</a:t>
             </a:r>
             <a:endParaRPr lang="en-US" sz="2800" dirty="0"/>
           </a:p>
@@ -13631,7 +13631,7 @@
                 <a:ea typeface="Inter" pitchFamily="34" charset="-122"/>
                 <a:cs typeface="Inter" pitchFamily="34" charset="-120"/>
               </a:rPr>
-              <a:t>Tire Balance Missed Opportunity</a:t>
+              <a:t>Tire Balance Variance from Benchmark</a:t>
             </a:r>
             <a:endParaRPr lang="en-US" sz="2800" dirty="0"/>
           </a:p>
@@ -19864,7 +19864,7 @@
                 <a:ea typeface="Inter" pitchFamily="34" charset="-122"/>
                 <a:cs typeface="Inter" pitchFamily="34" charset="-120"/>
               </a:rPr>
-              <a:t>Brake Fluid Missed Opportunity</a:t>
+              <a:t>Brake Fluid Variance from Benchmark</a:t>
             </a:r>
             <a:endParaRPr lang="en-US" sz="2800" dirty="0"/>
           </a:p>
@@ -26097,7 +26097,7 @@
                 <a:ea typeface="Inter" pitchFamily="34" charset="-122"/>
                 <a:cs typeface="Inter" pitchFamily="34" charset="-120"/>
               </a:rPr>
-              <a:t>Fuel System Service Missed Opportunity</a:t>
+              <a:t>Fuel System Service Variance from Benchmark</a:t>
             </a:r>
             <a:endParaRPr lang="en-US" sz="2800" dirty="0"/>
           </a:p>

--- a/day2-deck/decks/Op Code Missed Opportunity - Review.pptx
+++ b/day2-deck/decks/Op Code Missed Opportunity - Review.pptx
@@ -2491,7 +2491,7 @@
                 <a:ea typeface="Inter" pitchFamily="34" charset="-122"/>
                 <a:cs typeface="Inter" pitchFamily="34" charset="-120"/>
               </a:rPr>
-              <a:t>OPCODES</a:t>
+              <a:t>OPCODES · JAN–SEP 2026, ANNUALIZED</a:t>
             </a:r>
             <a:endParaRPr lang="en-US" sz="1400" dirty="0"/>
           </a:p>
@@ -7359,7 +7359,7 @@
                 <a:ea typeface="Inter" pitchFamily="34" charset="-122"/>
                 <a:cs typeface="Inter" pitchFamily="34" charset="-120"/>
               </a:rPr>
-              <a:t>OPCODES</a:t>
+              <a:t>OPCODES · JAN–SEP 2026, ANNUALIZED</a:t>
             </a:r>
             <a:endParaRPr lang="en-US" sz="1400" dirty="0"/>
           </a:p>
@@ -13592,7 +13592,7 @@
                 <a:ea typeface="Inter" pitchFamily="34" charset="-122"/>
                 <a:cs typeface="Inter" pitchFamily="34" charset="-120"/>
               </a:rPr>
-              <a:t>OPCODES</a:t>
+              <a:t>OPCODES · JAN–SEP 2026, ANNUALIZED</a:t>
             </a:r>
             <a:endParaRPr lang="en-US" sz="1400" dirty="0"/>
           </a:p>
@@ -19825,7 +19825,7 @@
                 <a:ea typeface="Inter" pitchFamily="34" charset="-122"/>
                 <a:cs typeface="Inter" pitchFamily="34" charset="-120"/>
               </a:rPr>
-              <a:t>OPCODES</a:t>
+              <a:t>OPCODES · JAN–SEP 2026, ANNUALIZED</a:t>
             </a:r>
             <a:endParaRPr lang="en-US" sz="1400" dirty="0"/>
           </a:p>
@@ -26058,7 +26058,7 @@
                 <a:ea typeface="Inter" pitchFamily="34" charset="-122"/>
                 <a:cs typeface="Inter" pitchFamily="34" charset="-120"/>
               </a:rPr>
-              <a:t>OPCODES</a:t>
+              <a:t>OPCODES · JAN–SEP 2026, ANNUALIZED</a:t>
             </a:r>
             <a:endParaRPr lang="en-US" sz="1400" dirty="0"/>
           </a:p>

--- a/day2-deck/decks/Op Code Missed Opportunity - Review.pptx
+++ b/day2-deck/decks/Op Code Missed Opportunity - Review.pptx
@@ -595,39 +595,39 @@
           <a:p>
             <a:r>
               <a:rPr lang="en-US" dirty="0"/>
-              <a:t>Source: Qlik - Closed Repair Orders. Customer pay, Jan-Sep 2026 by close date, op code report basis. Same-store, INEOS excluded (opened 2026). Services short = benchmark x the store's CP ROs, minus the services it sold. Each service valued at the store's own labor + parts gross per service sold (group average where the store sold fewer than 30), capped at twice the group average because some flagged lines carry other work bundled on them. A year = Jan-Sep x 12 / 9. Stores at or above the benchmark are not shown and do not offset anyone. Alignment, tire balance, brake fluid and fuel system service added together, every store: gross a year above (+) or below (-) the four benchmarks, at the store's own gross per service. Below-benchmark services count against above-benchmark ones here.TOYOTA SPOKANE: −$541K a year against the four benchmarks; under 4 of 4
-CHEVY LV: −$475K a year against the four benchmarks; under 4 of 4
-TOYOTA FLAGSTAFF: −$356K a year against the four benchmarks; under 4 of 4
-TOYOTA HENDERSON: −$302K a year against the four benchmarks; under 3 of 4
-KIA LV: −$247K a year against the four benchmarks; under 4 of 4
-CDJR POST FALLS: −$245K a year against the four benchmarks; under 4 of 4
-TOYOTA PRESCOTT: −$233K a year against the four benchmarks; under 4 of 4
-AUDI RENO: −$216K a year against the four benchmarks; under 4 of 4
-HONDA FLAGSTAFF: −$200K a year against the four benchmarks; under 4 of 4
-NISSAN: −$200K a year against the four benchmarks; under 3 of 4
-HONDA SPOKANE: −$186K a year against the four benchmarks; under 3 of 4
-LEXUS: −$141K a year against the four benchmarks; under 4 of 4
-VW HENDERSON: −$140K a year against the four benchmarks; under 4 of 4
-CHEVY GMC BULLHEAD: −$133K a year against the four benchmarks; under 4 of 4
-CADILLAC: −$126K a year against the four benchmarks; under 4 of 4
-VW ST GEORGE: −$88K a year against the four benchmarks; under 4 of 4
-HYUNDAI ST GEORGE: −$81K a year against the four benchmarks; under 4 of 4
-GMC PRESCOTT: −$80K a year against the four benchmarks; under 4 of 4
-SUBARU LV: −$79K a year against the four benchmarks; under 3 of 4
-KIA ST GEORGE: −$70K a year against the four benchmarks; under 3 of 4
-LINCOLN: −$64K a year against the four benchmarks; under 3 of 4
-SUBARU ST GEORGE: −$55K a year against the four benchmarks; under 2 of 4
-LR RENO: −$43K a year against the four benchmarks; under 3 of 4
-VOLVO: −$38K a year against the four benchmarks; under 3 of 4
-MAZDA: −$38K a year against the four benchmarks; under 3 of 4
-AUDI HENDERSON: −$30K a year against the four benchmarks; under 3 of 4
-HYUNDAI PRESCOTT: +$31K a year against the four benchmarks; under 3 of 4
-ACURA: +$45K a year against the four benchmarks; under 1 of 4
-SUBARU PRESCOTT: +$55K a year against the four benchmarks; under 2 of 4
-HONDA NORTH: +$60K a year against the four benchmarks; under 1 of 4
-LR HENDERSON: +$72K a year against the four benchmarks; under 1 of 4
-LR LV: +$201K a year against the four benchmarks; under 1 of 4
-HONDA HENDERSON: +$743K a year against the four benchmarks; under 0 of 4</a:t>
+              <a:t>Source: Qlik - Closed Repair Orders. Customer pay, Jan-Sep 2026 by close date, op code report basis. Same-store, INEOS excluded (opened 2026). Services short = benchmark x the store's CP ROs, minus the services it sold. Each service valued at the store's own labor + parts gross per service sold (group average where the store sold fewer than 30), capped at twice the group average because some flagged lines carry other work bundled on them. Alignment, tire balance, brake fluid and fuel system service added together, every store: gross Jan-Sep 2026 above (+) or below (-) the four benchmarks, at the store's own gross per service. Below-benchmark services count against above-benchmark ones here.TOYOTA SPOKANE: −$406K Jan-Sep against the four benchmarks; under 4 of 4
+CHEVY LV: −$356K Jan-Sep against the four benchmarks; under 4 of 4
+TOYOTA FLAGSTAFF: −$267K Jan-Sep against the four benchmarks; under 4 of 4
+TOYOTA HENDERSON: −$227K Jan-Sep against the four benchmarks; under 3 of 4
+KIA LV: −$185K Jan-Sep against the four benchmarks; under 4 of 4
+CDJR POST FALLS: −$184K Jan-Sep against the four benchmarks; under 4 of 4
+TOYOTA PRESCOTT: −$175K Jan-Sep against the four benchmarks; under 4 of 4
+AUDI RENO: −$162K Jan-Sep against the four benchmarks; under 4 of 4
+HONDA FLAGSTAFF: −$150K Jan-Sep against the four benchmarks; under 4 of 4
+NISSAN: −$150K Jan-Sep against the four benchmarks; under 3 of 4
+HONDA SPOKANE: −$140K Jan-Sep against the four benchmarks; under 3 of 4
+LEXUS: −$105K Jan-Sep against the four benchmarks; under 4 of 4
+VW HENDERSON: −$105K Jan-Sep against the four benchmarks; under 4 of 4
+CHEVY GMC BULLHEAD: −$100K Jan-Sep against the four benchmarks; under 4 of 4
+CADILLAC: −$94K Jan-Sep against the four benchmarks; under 4 of 4
+VW ST GEORGE: −$66K Jan-Sep against the four benchmarks; under 4 of 4
+HYUNDAI ST GEORGE: −$61K Jan-Sep against the four benchmarks; under 4 of 4
+GMC PRESCOTT: −$60K Jan-Sep against the four benchmarks; under 4 of 4
+SUBARU LV: −$59K Jan-Sep against the four benchmarks; under 3 of 4
+KIA ST GEORGE: −$53K Jan-Sep against the four benchmarks; under 3 of 4
+LINCOLN: −$48K Jan-Sep against the four benchmarks; under 3 of 4
+SUBARU ST GEORGE: −$41K Jan-Sep against the four benchmarks; under 2 of 4
+LR RENO: −$32K Jan-Sep against the four benchmarks; under 3 of 4
+VOLVO: −$29K Jan-Sep against the four benchmarks; under 3 of 4
+MAZDA: −$28K Jan-Sep against the four benchmarks; under 3 of 4
+AUDI HENDERSON: −$22K Jan-Sep against the four benchmarks; under 3 of 4
+HYUNDAI PRESCOTT: +$23K Jan-Sep against the four benchmarks; under 3 of 4
+ACURA: +$33K Jan-Sep against the four benchmarks; under 1 of 4
+SUBARU PRESCOTT: +$41K Jan-Sep against the four benchmarks; under 2 of 4
+HONDA NORTH: +$45K Jan-Sep against the four benchmarks; under 1 of 4
+LR HENDERSON: +$54K Jan-Sep against the four benchmarks; under 1 of 4
+LR LV: +$151K Jan-Sep against the four benchmarks; under 1 of 4
+HONDA HENDERSON: +$557K Jan-Sep against the four benchmarks; under 0 of 4</a:t>
             </a:r>
             <a:endParaRPr lang="en-US" dirty="0"/>
           </a:p>
@@ -715,40 +715,40 @@
           <a:p>
             <a:r>
               <a:rPr lang="en-US" dirty="0"/>
-              <a:t>Source: Qlik - Closed Repair Orders. Customer pay, Jan-Sep 2026 by close date, op code report basis. Same-store, INEOS excluded (opened 2026). Services short = benchmark x the store's CP ROs, minus the services it sold. Each service valued at the store's own labor + parts gross per service sold (group average where the store sold fewer than 30), capped at twice the group average because some flagged lines carry other work bundled on them. A year = Jan-Sep x 12 / 9. Stores at or above the benchmark are not shown and do not offset anyone. Alignment: every store, gross a year above (+) or below (-) the benchmark at the store's own gross per service; group gross per service $129. Rate = Jan-Sep closing %.Near-zero stores are included on purpose (Noah, Oct 19 2026): some stores sell little of a service by OEM recommendation or local habit (e.g. Spokane customers swap seasonal tires, so fewer balances), but not every customer fits that pattern, so the opportunity is real. A store with a high RO count can show more opportunity than one selling at zero.
-TOYOTA SPOKANE: 4.2%, −$225K a year at $90/service
-TOYOTA FLAGSTAFF: 9.7%, −$90K a year at $84/service
-NISSAN: 7.4%, −$83K a year at $119/service
-KIA LV: 9.7%, −$77K a year at $135/service
-CHEVY LV: 12.8%, −$75K a year at $136/service
-CDJR POST FALLS: 4.2%, −$57K a year at $74/service
-TOYOTA PRESCOTT: 12.3%, −$49K a year at $103/service
-KIA ST GEORGE: 8.0%, −$38K a year at $105/service
-HONDA SPOKANE: 12.5%, −$36K a year at $124/service
-AUDI RENO: 11.8%, −$34K a year at $230/service
-TOYOTA HENDERSON: 14.5%, −$33K a year at $102/service
-LEXUS: 11.3%, −$33K a year at $147/service
-LINCOLN: 8.4%, −$26K a year at $114/service
-CHEVY GMC BULLHEAD: 11.1%, −$25K a year at $78/service
-VW HENDERSON: 13.6%, −$23K a year at $245/service
-SUBARU ST GEORGE: 11.0%, −$23K a year at $78/service
-HONDA FLAGSTAFF: 11.0%, −$21K a year at $100/service
-VW ST GEORGE: 5.6%, −$18K a year at $74/service
-SUBARU PRESCOTT: 12.5%, −$12K a year at $73/service
-GMC PRESCOTT: 11.7%, −$11K a year at $85/service
-LR RENO: 12.8%, −$10K a year at $259/service (capped; raw $715/service)
-SUBARU LV: 14.5%, −$10K a year at $117/service
-CADILLAC: 13.8%, −$9K a year at $115/service
-VOLVO: 13.8%, −$7K a year at $142/service
-HYUNDAI ST GEORGE: 14.8%, −$865 a year at $121/service
-ACURA: 17.5%, +$14K a year at $117/service
-MAZDA: 16.6%, +$17K a year at $132/service
-LR LV: 17.3%, +$23K a year at $210/service
-HONDA NORTH: 16.1%, +$27K a year at $112/service
-LR HENDERSON: 24.4%, +$41K a year at $209/service
-HYUNDAI PRESCOTT: 21.7%, +$42K a year at $228/service
-AUDI HENDERSON: 27.5%, +$163K a year at $259/service (capped; raw $390/service)
-HONDA HENDERSON: 21.3%, +$229K a year at $121/service</a:t>
+              <a:t>Source: Qlik - Closed Repair Orders. Customer pay, Jan-Sep 2026 by close date, op code report basis. Same-store, INEOS excluded (opened 2026). Services short = benchmark x the store's CP ROs, minus the services it sold. Each service valued at the store's own labor + parts gross per service sold (group average where the store sold fewer than 30), capped at twice the group average because some flagged lines carry other work bundled on them. Alignment: every store, gross Jan-Sep 2026 above (+) or below (-) the benchmark at the store's own gross per service; group gross per service $129. Rate = Jan-Sep closing %.Near-zero stores are included on purpose (Noah, Oct 19 2026): some stores sell little of a service by OEM recommendation or local habit (e.g. Spokane customers swap seasonal tires, so fewer balances), but not every customer fits that pattern, so the opportunity is real. A store with a high RO count can show more opportunity than one selling at zero.
+TOYOTA SPOKANE: 4.2%, −$169K Jan-Sep at $90/service
+TOYOTA FLAGSTAFF: 9.7%, −$67K Jan-Sep at $84/service
+NISSAN: 7.4%, −$62K Jan-Sep at $119/service
+KIA LV: 9.7%, −$58K Jan-Sep at $135/service
+CHEVY LV: 12.8%, −$57K Jan-Sep at $136/service
+CDJR POST FALLS: 4.2%, −$43K Jan-Sep at $74/service
+TOYOTA PRESCOTT: 12.3%, −$37K Jan-Sep at $103/service
+KIA ST GEORGE: 8.0%, −$29K Jan-Sep at $105/service
+HONDA SPOKANE: 12.5%, −$27K Jan-Sep at $124/service
+AUDI RENO: 11.8%, −$26K Jan-Sep at $230/service
+TOYOTA HENDERSON: 14.5%, −$25K Jan-Sep at $102/service
+LEXUS: 11.3%, −$24K Jan-Sep at $147/service
+LINCOLN: 8.4%, −$20K Jan-Sep at $114/service
+CHEVY GMC BULLHEAD: 11.1%, −$19K Jan-Sep at $78/service
+VW HENDERSON: 13.6%, −$18K Jan-Sep at $245/service
+SUBARU ST GEORGE: 11.0%, −$17K Jan-Sep at $78/service
+HONDA FLAGSTAFF: 11.0%, −$16K Jan-Sep at $100/service
+VW ST GEORGE: 5.6%, −$13K Jan-Sep at $74/service
+SUBARU PRESCOTT: 12.5%, −$9K Jan-Sep at $73/service
+GMC PRESCOTT: 11.7%, −$9K Jan-Sep at $85/service
+LR RENO: 12.8%, −$8K Jan-Sep at $259/service (capped; raw $715/service)
+SUBARU LV: 14.5%, −$7K Jan-Sep at $117/service
+CADILLAC: 13.8%, −$7K Jan-Sep at $115/service
+VOLVO: 13.8%, −$5K Jan-Sep at $142/service
+HYUNDAI ST GEORGE: 14.8%, −$649 Jan-Sep at $121/service
+ACURA: 17.5%, +$11K Jan-Sep at $117/service
+MAZDA: 16.6%, +$13K Jan-Sep at $132/service
+LR LV: 17.3%, +$18K Jan-Sep at $210/service
+HONDA NORTH: 16.1%, +$20K Jan-Sep at $112/service
+LR HENDERSON: 24.4%, +$31K Jan-Sep at $209/service
+HYUNDAI PRESCOTT: 21.7%, +$31K Jan-Sep at $228/service
+AUDI HENDERSON: 27.5%, +$123K Jan-Sep at $259/service (capped; raw $390/service)
+HONDA HENDERSON: 21.3%, +$171K Jan-Sep at $121/service</a:t>
             </a:r>
             <a:endParaRPr lang="en-US" dirty="0"/>
           </a:p>
@@ -836,40 +836,40 @@
           <a:p>
             <a:r>
               <a:rPr lang="en-US" dirty="0"/>
-              <a:t>Source: Qlik - Closed Repair Orders. Customer pay, Jan-Sep 2026 by close date, op code report basis. Same-store, INEOS excluded (opened 2026). Services short = benchmark x the store's CP ROs, minus the services it sold. Each service valued at the store's own labor + parts gross per service sold (group average where the store sold fewer than 30), capped at twice the group average because some flagged lines carry other work bundled on them. A year = Jan-Sep x 12 / 9. Stores at or above the benchmark are not shown and do not offset anyone. Tire Balance: every store, gross a year above (+) or below (-) the benchmark at the store's own gross per service; group gross per service $75. Rate = Jan-Sep closing %.Near-zero stores are included on purpose (Noah, Oct 19 2026): some stores sell little of a service by OEM recommendation or local habit (e.g. Spokane customers swap seasonal tires, so fewer balances), but not every customer fits that pattern, so the opportunity is real. A store with a high RO count can show more opportunity than one selling at zero.
-TOYOTA SPOKANE: 0.4%, −$180K a year at $53/service
-TOYOTA HENDERSON: 11.2%, −$147K a year at $55/service
-TOYOTA PRESCOTT: 6.1%, −$132K a year at $83/service
-SUBARU ST GEORGE: 3.6%, −$125K a year at $149/service (capped; raw $247/service)
-TOYOTA FLAGSTAFF: 4.9%, −$109K a year at $54/service
-CHEVY LV: 7.3%, −$106K a year at $53/service
-HONDA SPOKANE: 2.1%, −$80K a year at $52/service
-NISSAN: 1.0%, −$77K a year at $59/service
-CDJR POST FALLS: 1.2%, −$73K a year at $75/service
-KIA LV: 5.2%, −$72K a year at $68/service
-LEXUS: 0.0%, −$68K a year at $75/service (group avg)
-SUBARU LV: 10.2%, −$68K a year at $75/service
-AUDI HENDERSON: 0.0%, −$56K a year at $75/service (group avg)
-AUDI RENO: 0.1%, −$52K a year at $75/service (group avg)
-HONDA FLAGSTAFF: 1.3%, −$52K a year at $70/service
-HONDA NORTH: 12.0%, −$38K a year at $64/service
-HYUNDAI ST GEORGE: 1.2%, −$36K a year at $58/service
-LINCOLN: 1.6%, −$31K a year at $66/service
-VW ST GEORGE: 0.4%, −$28K a year at $75/service (group avg)
-VW HENDERSON: 8.2%, −$27K a year at $60/service
-GMC PRESCOTT: 7.7%, −$27K a year at $90/service
-CHEVY GMC BULLHEAD: 9.0%, −$21K a year at $42/service
-KIA ST GEORGE: 7.7%, −$18K a year at $48/service
-CADILLAC: 5.9%, −$14K a year at $22/service
-MAZDA: 13.1%, −$11K a year at $79/service
-VOLVO: 11.7%, −$8K a year at $51/service
-HYUNDAI PRESCOTT: 13.5%, −$6K a year at $149/service (capped; raw $311/service)
-ACURA: 14.1%, −$3K a year at $64/service
-SUBARU PRESCOTT: 14.9%, −$34 a year at $34/service
-LR RENO: 16.9%, +$6K a year at $149/service (capped; raw $647/service)
-LR LV: 16.9%, +$14K a year at $149/service
-LR HENDERSON: 27.0%, +$31K a year at $122/service
-HONDA HENDERSON: 18.4%, +$70K a year at $68/service</a:t>
+              <a:t>Source: Qlik - Closed Repair Orders. Customer pay, Jan-Sep 2026 by close date, op code report basis. Same-store, INEOS excluded (opened 2026). Services short = benchmark x the store's CP ROs, minus the services it sold. Each service valued at the store's own labor + parts gross per service sold (group average where the store sold fewer than 30), capped at twice the group average because some flagged lines carry other work bundled on them. Tire Balance: every store, gross Jan-Sep 2026 above (+) or below (-) the benchmark at the store's own gross per service; group gross per service $75. Rate = Jan-Sep closing %.Near-zero stores are included on purpose (Noah, Oct 19 2026): some stores sell little of a service by OEM recommendation or local habit (e.g. Spokane customers swap seasonal tires, so fewer balances), but not every customer fits that pattern, so the opportunity is real. A store with a high RO count can show more opportunity than one selling at zero.
+TOYOTA SPOKANE: 0.4%, −$135K Jan-Sep at $53/service
+TOYOTA HENDERSON: 11.2%, −$111K Jan-Sep at $55/service
+TOYOTA PRESCOTT: 6.1%, −$99K Jan-Sep at $83/service
+SUBARU ST GEORGE: 3.6%, −$94K Jan-Sep at $149/service (capped; raw $247/service)
+TOYOTA FLAGSTAFF: 4.9%, −$82K Jan-Sep at $54/service
+CHEVY LV: 7.3%, −$80K Jan-Sep at $53/service
+HONDA SPOKANE: 2.1%, −$60K Jan-Sep at $52/service
+NISSAN: 1.0%, −$58K Jan-Sep at $59/service
+CDJR POST FALLS: 1.2%, −$55K Jan-Sep at $75/service
+KIA LV: 5.2%, −$54K Jan-Sep at $68/service
+LEXUS: 0.0%, −$51K Jan-Sep at $75/service (group avg)
+SUBARU LV: 10.2%, −$51K Jan-Sep at $75/service
+AUDI HENDERSON: 0.0%, −$42K Jan-Sep at $75/service (group avg)
+AUDI RENO: 0.1%, −$39K Jan-Sep at $75/service (group avg)
+HONDA FLAGSTAFF: 1.3%, −$39K Jan-Sep at $70/service
+HONDA NORTH: 12.0%, −$29K Jan-Sep at $64/service
+HYUNDAI ST GEORGE: 1.2%, −$27K Jan-Sep at $58/service
+LINCOLN: 1.6%, −$23K Jan-Sep at $66/service
+VW ST GEORGE: 0.4%, −$21K Jan-Sep at $75/service (group avg)
+VW HENDERSON: 8.2%, −$21K Jan-Sep at $60/service
+GMC PRESCOTT: 7.7%, −$20K Jan-Sep at $90/service
+CHEVY GMC BULLHEAD: 9.0%, −$16K Jan-Sep at $42/service
+KIA ST GEORGE: 7.7%, −$14K Jan-Sep at $48/service
+CADILLAC: 5.9%, −$11K Jan-Sep at $22/service
+MAZDA: 13.1%, −$8K Jan-Sep at $79/service
+VOLVO: 11.7%, −$6K Jan-Sep at $51/service
+HYUNDAI PRESCOTT: 13.5%, −$4K Jan-Sep at $149/service (capped; raw $311/service)
+ACURA: 14.1%, −$2K Jan-Sep at $64/service
+SUBARU PRESCOTT: 14.9%, −$26 Jan-Sep at $34/service
+LR RENO: 16.9%, +$4K Jan-Sep at $149/service (capped; raw $647/service)
+LR LV: 16.9%, +$10K Jan-Sep at $149/service
+LR HENDERSON: 27.0%, +$23K Jan-Sep at $122/service
+HONDA HENDERSON: 18.4%, +$52K Jan-Sep at $68/service</a:t>
             </a:r>
             <a:endParaRPr lang="en-US" dirty="0"/>
           </a:p>
@@ -957,40 +957,40 @@
           <a:p>
             <a:r>
               <a:rPr lang="en-US" dirty="0"/>
-              <a:t>Source: Qlik - Closed Repair Orders. Customer pay, Jan-Sep 2026 by close date, op code report basis. Same-store, INEOS excluded (opened 2026). Services short = benchmark x the store's CP ROs, minus the services it sold. Each service valued at the store's own labor + parts gross per service sold (group average where the store sold fewer than 30), capped at twice the group average because some flagged lines carry other work bundled on them. A year = Jan-Sep x 12 / 9. Stores at or above the benchmark are not shown and do not offset anyone. Brake Fluid: every store, gross a year above (+) or below (-) the benchmark at the store's own gross per service; group gross per service $189. Rate = Jan-Sep closing %.Near-zero stores are included on purpose (Noah, Oct 19 2026): some stores sell little of a service by OEM recommendation or local habit (e.g. Spokane customers swap seasonal tires, so fewer balances), but not every customer fits that pattern, so the opportunity is real. A store with a high RO count can show more opportunity than one selling at zero.
-CHEVY LV: 5.7%, −$151K a year at $138/service
-TOYOTA SPOKANE: 7.0%, −$80K a year at $117/service
-AUDI RENO: 1.9%, −$78K a year at $206/service
-AUDI HENDERSON: 2.4%, −$74K a year at $196/service
-HONDA FLAGSTAFF: 3.1%, −$67K a year at $184/service
-CADILLAC: 4.6%, −$57K a year at $150/service
-CDJR POST FALLS: 4.2%, −$53K a year at $128/service
-TOYOTA FLAGSTAFF: 8.0%, −$48K a year at $123/service
-TOYOTA PRESCOTT: 8.4%, −$32K a year at $112/service
-HYUNDAI ST GEORGE: 4.7%, −$32K a year at $134/service
-KIA ST GEORGE: 5.9%, −$25K a year at $119/service
-KIA LV: 8.2%, −$22K a year at $120/service
-CHEVY GMC BULLHEAD: 7.0%, −$21K a year at $87/service
-GMC PRESCOTT: 6.0%, −$21K a year at $127/service
-LR RENO: 7.2%, −$20K a year at $377/service (capped; raw $1,380/service)
-MAZDA: 8.4%, −$18K a year at $154/service
-LEXUS: 8.3%, −$15K a year at $154/service
-VW ST GEORGE: 5.4%, −$13K a year at $111/service
-LINCOLN: 7.5%, −$11K a year at $126/service
-VW HENDERSON: 9.5%, −$4K a year at $134/service
-HYUNDAI PRESCOTT: 9.6%, −$3K a year at $354/service
-HONDA SPOKANE: 10.3%, +$5K a year at $126/service
-TOYOTA HENDERSON: 10.0%, +$7K a year at $141/service
-SUBARU LV: 10.1%, +$9K a year at $333/service
-SUBARU PRESCOTT: 10.6%, +$16K a year at $377/service (capped; raw $380/service)
-ACURA: 12.7%, +$20K a year at $147/service
-SUBARU ST GEORGE: 10.7%, +$21K a year at $377/service (capped; raw $489/service)
-NISSAN: 11.6%, +$24K a year at $155/service
-VOLVO: 11.9%, +$33K a year at $377/service (capped; raw $538/service)
-LR HENDERSON: 14.3%, +$34K a year at $377/service (capped; raw $709/service)
-HONDA NORTH: 12.1%, +$67K a year at $160/service
-LR LV: 20.6%, +$187K a year at $377/service (capped; raw $424/service)
-HONDA HENDERSON: 15.5%, +$260K a year at $155/service</a:t>
+              <a:t>Source: Qlik - Closed Repair Orders. Customer pay, Jan-Sep 2026 by close date, op code report basis. Same-store, INEOS excluded (opened 2026). Services short = benchmark x the store's CP ROs, minus the services it sold. Each service valued at the store's own labor + parts gross per service sold (group average where the store sold fewer than 30), capped at twice the group average because some flagged lines carry other work bundled on them. Brake Fluid: every store, gross Jan-Sep 2026 above (+) or below (-) the benchmark at the store's own gross per service; group gross per service $189. Rate = Jan-Sep closing %.Near-zero stores are included on purpose (Noah, Oct 19 2026): some stores sell little of a service by OEM recommendation or local habit (e.g. Spokane customers swap seasonal tires, so fewer balances), but not every customer fits that pattern, so the opportunity is real. A store with a high RO count can show more opportunity than one selling at zero.
+CHEVY LV: 5.7%, −$113K Jan-Sep at $138/service
+TOYOTA SPOKANE: 7.0%, −$60K Jan-Sep at $117/service
+AUDI RENO: 1.9%, −$58K Jan-Sep at $206/service
+AUDI HENDERSON: 2.4%, −$56K Jan-Sep at $196/service
+HONDA FLAGSTAFF: 3.1%, −$51K Jan-Sep at $184/service
+CADILLAC: 4.6%, −$43K Jan-Sep at $150/service
+CDJR POST FALLS: 4.2%, −$39K Jan-Sep at $128/service
+TOYOTA FLAGSTAFF: 8.0%, −$36K Jan-Sep at $123/service
+TOYOTA PRESCOTT: 8.4%, −$24K Jan-Sep at $112/service
+HYUNDAI ST GEORGE: 4.7%, −$24K Jan-Sep at $134/service
+KIA ST GEORGE: 5.9%, −$19K Jan-Sep at $119/service
+KIA LV: 8.2%, −$17K Jan-Sep at $120/service
+CHEVY GMC BULLHEAD: 7.0%, −$16K Jan-Sep at $87/service
+GMC PRESCOTT: 6.0%, −$15K Jan-Sep at $127/service
+LR RENO: 7.2%, −$15K Jan-Sep at $377/service (capped; raw $1,380/service)
+MAZDA: 8.4%, −$13K Jan-Sep at $154/service
+LEXUS: 8.3%, −$11K Jan-Sep at $154/service
+VW ST GEORGE: 5.4%, −$10K Jan-Sep at $111/service
+LINCOLN: 7.5%, −$8K Jan-Sep at $126/service
+VW HENDERSON: 9.5%, −$3K Jan-Sep at $134/service
+HYUNDAI PRESCOTT: 9.6%, −$2K Jan-Sep at $354/service
+HONDA SPOKANE: 10.3%, +$4K Jan-Sep at $126/service
+TOYOTA HENDERSON: 10.0%, +$5K Jan-Sep at $141/service
+SUBARU LV: 10.1%, +$7K Jan-Sep at $333/service
+SUBARU PRESCOTT: 10.6%, +$12K Jan-Sep at $377/service (capped; raw $380/service)
+ACURA: 12.7%, +$15K Jan-Sep at $147/service
+SUBARU ST GEORGE: 10.7%, +$16K Jan-Sep at $377/service (capped; raw $489/service)
+NISSAN: 11.6%, +$18K Jan-Sep at $155/service
+VOLVO: 11.9%, +$24K Jan-Sep at $377/service (capped; raw $538/service)
+LR HENDERSON: 14.3%, +$25K Jan-Sep at $377/service (capped; raw $709/service)
+HONDA NORTH: 12.1%, +$51K Jan-Sep at $160/service
+LR LV: 20.6%, +$141K Jan-Sep at $377/service (capped; raw $424/service)
+HONDA HENDERSON: 15.5%, +$195K Jan-Sep at $155/service</a:t>
             </a:r>
             <a:endParaRPr lang="en-US" dirty="0"/>
           </a:p>
@@ -1078,40 +1078,40 @@
           <a:p>
             <a:r>
               <a:rPr lang="en-US" dirty="0"/>
-              <a:t>Source: Qlik - Closed Repair Orders. Customer pay, Jan-Sep 2026 by close date, op code report basis. Same-store, INEOS excluded (opened 2026). Services short = benchmark x the store's CP ROs, minus the services it sold. Each service valued at the store's own labor + parts gross per service sold (group average where the store sold fewer than 30), capped at twice the group average because some flagged lines carry other work bundled on them. A year = Jan-Sep x 12 / 9. Stores at or above the benchmark are not shown and do not offset anyone. Fuel System Service: every store, gross a year above (+) or below (-) the benchmark at the store's own gross per service; group gross per service $165. Rate = Jan-Sep closing %.Near-zero stores are included on purpose (Noah, Oct 19 2026): some stores sell little of a service by OEM recommendation or local habit (e.g. Spokane customers swap seasonal tires, so fewer balances), but not every customer fits that pattern, so the opportunity is real. A store with a high RO count can show more opportunity than one selling at zero.
-CHEVY LV: 5.2%, −$142K a year at $243/service
-TOYOTA HENDERSON: 6.0%, −$129K a year at $122/service
-TOYOTA FLAGSTAFF: 1.6%, −$109K a year at $93/service
-VW HENDERSON: 0.0%, −$85K a year at $165/service (group avg)
-KIA LV: 3.2%, −$76K a year at $163/service
-HONDA SPOKANE: 3.2%, −$75K a year at $147/service
-CHEVY GMC BULLHEAD: 2.7%, −$65K a year at $163/service
-NISSAN: 4.1%, −$64K a year at $206/service
-AUDI HENDERSON: 0.0%, −$62K a year at $165/service (group avg)
-CDJR POST FALLS: 3.0%, −$62K a year at $192/service
-HONDA FLAGSTAFF: 0.7%, −$60K a year at $165/service (group avg)
-TOYOTA SPOKANE: 5.8%, −$56K a year at $145/service
-VOLVO: 0.0%, −$56K a year at $165/service (group avg)
-AUDI RENO: 0.8%, −$51K a year at $165/service (group avg)
-CADILLAC: 5.1%, −$46K a year at $269/service
-LR HENDERSON: 2.5%, −$34K a year at $329/service (capped; raw $774/service)
-VW ST GEORGE: 2.7%, −$29K a year at $236/service
-MAZDA: 5.2%, −$26K a year at $150/service
-LEXUS: 4.2%, −$25K a year at $128/service
-LR LV: 5.5%, −$24K a year at $258/service
-GMC PRESCOTT: 3.6%, −$21K a year at $133/service
-TOYOTA PRESCOTT: 6.4%, −$19K a year at $101/service
-LR RENO: 4.5%, −$18K a year at $329/service (capped; raw $1,631/service)
-HYUNDAI ST GEORGE: 5.8%, −$13K a year at $176/service
-SUBARU LV: 7.0%, −$10K a year at $130/service
-HYUNDAI PRESCOTT: 7.3%, −$1K a year at $329/service (capped; raw $459/service)
-HONDA NORTH: 7.6%, +$4K a year at $118/service
-LINCOLN: 8.2%, +$4K a year at $175/service
-KIA ST GEORGE: 8.9%, +$12K a year at $154/service
-ACURA: 9.3%, +$13K a year at $145/service
-SUBARU PRESCOTT: 9.7%, +$51K a year at $329/service (capped; raw $406/service)
-SUBARU ST GEORGE: 13.8%, +$72K a year at $153/service
-HONDA HENDERSON: 12.0%, +$185K a year at $135/service</a:t>
+              <a:t>Source: Qlik - Closed Repair Orders. Customer pay, Jan-Sep 2026 by close date, op code report basis. Same-store, INEOS excluded (opened 2026). Services short = benchmark x the store's CP ROs, minus the services it sold. Each service valued at the store's own labor + parts gross per service sold (group average where the store sold fewer than 30), capped at twice the group average because some flagged lines carry other work bundled on them. Fuel System Service: every store, gross Jan-Sep 2026 above (+) or below (-) the benchmark at the store's own gross per service; group gross per service $165. Rate = Jan-Sep closing %.Near-zero stores are included on purpose (Noah, Oct 19 2026): some stores sell little of a service by OEM recommendation or local habit (e.g. Spokane customers swap seasonal tires, so fewer balances), but not every customer fits that pattern, so the opportunity is real. A store with a high RO count can show more opportunity than one selling at zero.
+CHEVY LV: 5.2%, −$107K Jan-Sep at $243/service
+TOYOTA HENDERSON: 6.0%, −$96K Jan-Sep at $122/service
+TOYOTA FLAGSTAFF: 1.6%, −$82K Jan-Sep at $93/service
+VW HENDERSON: 0.0%, −$63K Jan-Sep at $165/service (group avg)
+KIA LV: 3.2%, −$57K Jan-Sep at $163/service
+HONDA SPOKANE: 3.2%, −$56K Jan-Sep at $147/service
+CHEVY GMC BULLHEAD: 2.7%, −$49K Jan-Sep at $163/service
+NISSAN: 4.1%, −$48K Jan-Sep at $206/service
+AUDI HENDERSON: 0.0%, −$47K Jan-Sep at $165/service (group avg)
+CDJR POST FALLS: 3.0%, −$46K Jan-Sep at $192/service
+HONDA FLAGSTAFF: 0.7%, −$45K Jan-Sep at $165/service (group avg)
+TOYOTA SPOKANE: 5.8%, −$42K Jan-Sep at $145/service
+VOLVO: 0.0%, −$42K Jan-Sep at $165/service (group avg)
+AUDI RENO: 0.8%, −$39K Jan-Sep at $165/service (group avg)
+CADILLAC: 5.1%, −$34K Jan-Sep at $269/service
+LR HENDERSON: 2.5%, −$25K Jan-Sep at $329/service (capped; raw $774/service)
+VW ST GEORGE: 2.7%, −$22K Jan-Sep at $236/service
+MAZDA: 5.2%, −$20K Jan-Sep at $150/service
+LEXUS: 4.2%, −$19K Jan-Sep at $128/service
+LR LV: 5.5%, −$18K Jan-Sep at $258/service
+GMC PRESCOTT: 3.6%, −$16K Jan-Sep at $133/service
+TOYOTA PRESCOTT: 6.4%, −$14K Jan-Sep at $101/service
+LR RENO: 4.5%, −$14K Jan-Sep at $329/service (capped; raw $1,631/service)
+HYUNDAI ST GEORGE: 5.8%, −$10K Jan-Sep at $176/service
+SUBARU LV: 7.0%, −$8K Jan-Sep at $130/service
+HYUNDAI PRESCOTT: 7.3%, −$905 Jan-Sep at $329/service (capped; raw $459/service)
+HONDA NORTH: 7.6%, +$3K Jan-Sep at $118/service
+LINCOLN: 8.2%, +$3K Jan-Sep at $175/service
+KIA ST GEORGE: 8.9%, +$9K Jan-Sep at $154/service
+ACURA: 9.3%, +$10K Jan-Sep at $145/service
+SUBARU PRESCOTT: 9.7%, +$39K Jan-Sep at $329/service (capped; raw $406/service)
+SUBARU ST GEORGE: 13.8%, +$54K Jan-Sep at $153/service
+HONDA HENDERSON: 12.0%, +$138K Jan-Sep at $135/service</a:t>
             </a:r>
             <a:endParaRPr lang="en-US" dirty="0"/>
           </a:p>
@@ -2491,7 +2491,7 @@
                 <a:ea typeface="Inter" pitchFamily="34" charset="-122"/>
                 <a:cs typeface="Inter" pitchFamily="34" charset="-120"/>
               </a:rPr>
-              <a:t>OPCODES · JAN–SEP 2026, ANNUALIZED</a:t>
+              <a:t>OPCODES · JAN–SEP 2026 YTD</a:t>
             </a:r>
             <a:endParaRPr lang="en-US" sz="1400" dirty="0"/>
           </a:p>
@@ -2805,7 +2805,7 @@
                 <a:ea typeface="Inter" pitchFamily="34" charset="-122"/>
                 <a:cs typeface="Inter" pitchFamily="34" charset="-120"/>
               </a:rPr>
-              <a:t>+$743K</a:t>
+              <a:t>+$557K</a:t>
             </a:r>
             <a:endParaRPr lang="en-US" sz="1300" dirty="0"/>
           </a:p>
@@ -2942,7 +2942,7 @@
                 <a:ea typeface="Inter" pitchFamily="34" charset="-122"/>
                 <a:cs typeface="Inter" pitchFamily="34" charset="-120"/>
               </a:rPr>
-              <a:t>+$201K</a:t>
+              <a:t>+$151K</a:t>
             </a:r>
             <a:endParaRPr lang="en-US" sz="1300" dirty="0"/>
           </a:p>
@@ -3079,7 +3079,7 @@
                 <a:ea typeface="Inter" pitchFamily="34" charset="-122"/>
                 <a:cs typeface="Inter" pitchFamily="34" charset="-120"/>
               </a:rPr>
-              <a:t>+$72K</a:t>
+              <a:t>+$54K</a:t>
             </a:r>
             <a:endParaRPr lang="en-US" sz="1300" dirty="0"/>
           </a:p>
@@ -3216,7 +3216,7 @@
                 <a:ea typeface="Inter" pitchFamily="34" charset="-122"/>
                 <a:cs typeface="Inter" pitchFamily="34" charset="-120"/>
               </a:rPr>
-              <a:t>+$60K</a:t>
+              <a:t>+$45K</a:t>
             </a:r>
             <a:endParaRPr lang="en-US" sz="1300" dirty="0"/>
           </a:p>
@@ -3353,7 +3353,7 @@
                 <a:ea typeface="Inter" pitchFamily="34" charset="-122"/>
                 <a:cs typeface="Inter" pitchFamily="34" charset="-120"/>
               </a:rPr>
-              <a:t>+$55K</a:t>
+              <a:t>+$41K</a:t>
             </a:r>
             <a:endParaRPr lang="en-US" sz="1300" dirty="0"/>
           </a:p>
@@ -3490,7 +3490,7 @@
                 <a:ea typeface="Inter" pitchFamily="34" charset="-122"/>
                 <a:cs typeface="Inter" pitchFamily="34" charset="-120"/>
               </a:rPr>
-              <a:t>+$45K</a:t>
+              <a:t>+$33K</a:t>
             </a:r>
             <a:endParaRPr lang="en-US" sz="1300" dirty="0"/>
           </a:p>
@@ -3627,7 +3627,7 @@
                 <a:ea typeface="Inter" pitchFamily="34" charset="-122"/>
                 <a:cs typeface="Inter" pitchFamily="34" charset="-120"/>
               </a:rPr>
-              <a:t>+$31K</a:t>
+              <a:t>+$23K</a:t>
             </a:r>
             <a:endParaRPr lang="en-US" sz="1300" dirty="0"/>
           </a:p>
@@ -3764,7 +3764,7 @@
                 <a:ea typeface="Inter" pitchFamily="34" charset="-122"/>
                 <a:cs typeface="Inter" pitchFamily="34" charset="-120"/>
               </a:rPr>
-              <a:t>−$30K</a:t>
+              <a:t>−$22K</a:t>
             </a:r>
             <a:endParaRPr lang="en-US" sz="1300" dirty="0"/>
           </a:p>
@@ -3901,7 +3901,7 @@
                 <a:ea typeface="Inter" pitchFamily="34" charset="-122"/>
                 <a:cs typeface="Inter" pitchFamily="34" charset="-120"/>
               </a:rPr>
-              <a:t>−$38K</a:t>
+              <a:t>−$28K</a:t>
             </a:r>
             <a:endParaRPr lang="en-US" sz="1300" dirty="0"/>
           </a:p>
@@ -4038,7 +4038,7 @@
                 <a:ea typeface="Inter" pitchFamily="34" charset="-122"/>
                 <a:cs typeface="Inter" pitchFamily="34" charset="-120"/>
               </a:rPr>
-              <a:t>−$38K</a:t>
+              <a:t>−$29K</a:t>
             </a:r>
             <a:endParaRPr lang="en-US" sz="1300" dirty="0"/>
           </a:p>
@@ -4175,7 +4175,7 @@
                 <a:ea typeface="Inter" pitchFamily="34" charset="-122"/>
                 <a:cs typeface="Inter" pitchFamily="34" charset="-120"/>
               </a:rPr>
-              <a:t>−$43K</a:t>
+              <a:t>−$32K</a:t>
             </a:r>
             <a:endParaRPr lang="en-US" sz="1300" dirty="0"/>
           </a:p>
@@ -4312,7 +4312,7 @@
                 <a:ea typeface="Inter" pitchFamily="34" charset="-122"/>
                 <a:cs typeface="Inter" pitchFamily="34" charset="-120"/>
               </a:rPr>
-              <a:t>−$55K</a:t>
+              <a:t>−$41K</a:t>
             </a:r>
             <a:endParaRPr lang="en-US" sz="1300" dirty="0"/>
           </a:p>
@@ -4449,7 +4449,7 @@
                 <a:ea typeface="Inter" pitchFamily="34" charset="-122"/>
                 <a:cs typeface="Inter" pitchFamily="34" charset="-120"/>
               </a:rPr>
-              <a:t>−$64K</a:t>
+              <a:t>−$48K</a:t>
             </a:r>
             <a:endParaRPr lang="en-US" sz="1300" dirty="0"/>
           </a:p>
@@ -4586,7 +4586,7 @@
                 <a:ea typeface="Inter" pitchFamily="34" charset="-122"/>
                 <a:cs typeface="Inter" pitchFamily="34" charset="-120"/>
               </a:rPr>
-              <a:t>−$70K</a:t>
+              <a:t>−$53K</a:t>
             </a:r>
             <a:endParaRPr lang="en-US" sz="1300" dirty="0"/>
           </a:p>
@@ -4723,7 +4723,7 @@
                 <a:ea typeface="Inter" pitchFamily="34" charset="-122"/>
                 <a:cs typeface="Inter" pitchFamily="34" charset="-120"/>
               </a:rPr>
-              <a:t>−$79K</a:t>
+              <a:t>−$59K</a:t>
             </a:r>
             <a:endParaRPr lang="en-US" sz="1300" dirty="0"/>
           </a:p>
@@ -4860,7 +4860,7 @@
                 <a:ea typeface="Inter" pitchFamily="34" charset="-122"/>
                 <a:cs typeface="Inter" pitchFamily="34" charset="-120"/>
               </a:rPr>
-              <a:t>−$80K</a:t>
+              <a:t>−$60K</a:t>
             </a:r>
             <a:endParaRPr lang="en-US" sz="1300" dirty="0"/>
           </a:p>
@@ -4997,7 +4997,7 @@
                 <a:ea typeface="Inter" pitchFamily="34" charset="-122"/>
                 <a:cs typeface="Inter" pitchFamily="34" charset="-120"/>
               </a:rPr>
-              <a:t>−$81K</a:t>
+              <a:t>−$61K</a:t>
             </a:r>
             <a:endParaRPr lang="en-US" sz="1300" dirty="0"/>
           </a:p>
@@ -5134,7 +5134,7 @@
                 <a:ea typeface="Inter" pitchFamily="34" charset="-122"/>
                 <a:cs typeface="Inter" pitchFamily="34" charset="-120"/>
               </a:rPr>
-              <a:t>−$88K</a:t>
+              <a:t>−$66K</a:t>
             </a:r>
             <a:endParaRPr lang="en-US" sz="1300" dirty="0"/>
           </a:p>
@@ -5271,7 +5271,7 @@
                 <a:ea typeface="Inter" pitchFamily="34" charset="-122"/>
                 <a:cs typeface="Inter" pitchFamily="34" charset="-120"/>
               </a:rPr>
-              <a:t>−$126K</a:t>
+              <a:t>−$94K</a:t>
             </a:r>
             <a:endParaRPr lang="en-US" sz="1300" dirty="0"/>
           </a:p>
@@ -5408,7 +5408,7 @@
                 <a:ea typeface="Inter" pitchFamily="34" charset="-122"/>
                 <a:cs typeface="Inter" pitchFamily="34" charset="-120"/>
               </a:rPr>
-              <a:t>−$133K</a:t>
+              <a:t>−$100K</a:t>
             </a:r>
             <a:endParaRPr lang="en-US" sz="1300" dirty="0"/>
           </a:p>
@@ -5545,7 +5545,7 @@
                 <a:ea typeface="Inter" pitchFamily="34" charset="-122"/>
                 <a:cs typeface="Inter" pitchFamily="34" charset="-120"/>
               </a:rPr>
-              <a:t>−$140K</a:t>
+              <a:t>−$105K</a:t>
             </a:r>
             <a:endParaRPr lang="en-US" sz="1300" dirty="0"/>
           </a:p>
@@ -5682,7 +5682,7 @@
                 <a:ea typeface="Inter" pitchFamily="34" charset="-122"/>
                 <a:cs typeface="Inter" pitchFamily="34" charset="-120"/>
               </a:rPr>
-              <a:t>−$141K</a:t>
+              <a:t>−$105K</a:t>
             </a:r>
             <a:endParaRPr lang="en-US" sz="1300" dirty="0"/>
           </a:p>
@@ -5819,7 +5819,7 @@
                 <a:ea typeface="Inter" pitchFamily="34" charset="-122"/>
                 <a:cs typeface="Inter" pitchFamily="34" charset="-120"/>
               </a:rPr>
-              <a:t>−$186K</a:t>
+              <a:t>−$140K</a:t>
             </a:r>
             <a:endParaRPr lang="en-US" sz="1300" dirty="0"/>
           </a:p>
@@ -5956,7 +5956,7 @@
                 <a:ea typeface="Inter" pitchFamily="34" charset="-122"/>
                 <a:cs typeface="Inter" pitchFamily="34" charset="-120"/>
               </a:rPr>
-              <a:t>−$200K</a:t>
+              <a:t>−$150K</a:t>
             </a:r>
             <a:endParaRPr lang="en-US" sz="1300" dirty="0"/>
           </a:p>
@@ -6093,7 +6093,7 @@
                 <a:ea typeface="Inter" pitchFamily="34" charset="-122"/>
                 <a:cs typeface="Inter" pitchFamily="34" charset="-120"/>
               </a:rPr>
-              <a:t>−$200K</a:t>
+              <a:t>−$150K</a:t>
             </a:r>
             <a:endParaRPr lang="en-US" sz="1300" dirty="0"/>
           </a:p>
@@ -6230,7 +6230,7 @@
                 <a:ea typeface="Inter" pitchFamily="34" charset="-122"/>
                 <a:cs typeface="Inter" pitchFamily="34" charset="-120"/>
               </a:rPr>
-              <a:t>−$216K</a:t>
+              <a:t>−$162K</a:t>
             </a:r>
             <a:endParaRPr lang="en-US" sz="1300" dirty="0"/>
           </a:p>
@@ -6367,7 +6367,7 @@
                 <a:ea typeface="Inter" pitchFamily="34" charset="-122"/>
                 <a:cs typeface="Inter" pitchFamily="34" charset="-120"/>
               </a:rPr>
-              <a:t>−$233K</a:t>
+              <a:t>−$175K</a:t>
             </a:r>
             <a:endParaRPr lang="en-US" sz="1300" dirty="0"/>
           </a:p>
@@ -6504,7 +6504,7 @@
                 <a:ea typeface="Inter" pitchFamily="34" charset="-122"/>
                 <a:cs typeface="Inter" pitchFamily="34" charset="-120"/>
               </a:rPr>
-              <a:t>−$245K</a:t>
+              <a:t>−$184K</a:t>
             </a:r>
             <a:endParaRPr lang="en-US" sz="1300" dirty="0"/>
           </a:p>
@@ -6641,7 +6641,7 @@
                 <a:ea typeface="Inter" pitchFamily="34" charset="-122"/>
                 <a:cs typeface="Inter" pitchFamily="34" charset="-120"/>
               </a:rPr>
-              <a:t>−$247K</a:t>
+              <a:t>−$185K</a:t>
             </a:r>
             <a:endParaRPr lang="en-US" sz="1300" dirty="0"/>
           </a:p>
@@ -6778,7 +6778,7 @@
                 <a:ea typeface="Inter" pitchFamily="34" charset="-122"/>
                 <a:cs typeface="Inter" pitchFamily="34" charset="-120"/>
               </a:rPr>
-              <a:t>−$302K</a:t>
+              <a:t>−$227K</a:t>
             </a:r>
             <a:endParaRPr lang="en-US" sz="1300" dirty="0"/>
           </a:p>
@@ -6915,7 +6915,7 @@
                 <a:ea typeface="Inter" pitchFamily="34" charset="-122"/>
                 <a:cs typeface="Inter" pitchFamily="34" charset="-120"/>
               </a:rPr>
-              <a:t>−$356K</a:t>
+              <a:t>−$267K</a:t>
             </a:r>
             <a:endParaRPr lang="en-US" sz="1300" dirty="0"/>
           </a:p>
@@ -7052,7 +7052,7 @@
                 <a:ea typeface="Inter" pitchFamily="34" charset="-122"/>
                 <a:cs typeface="Inter" pitchFamily="34" charset="-120"/>
               </a:rPr>
-              <a:t>−$475K</a:t>
+              <a:t>−$356K</a:t>
             </a:r>
             <a:endParaRPr lang="en-US" sz="1300" dirty="0"/>
           </a:p>
@@ -7189,7 +7189,7 @@
                 <a:ea typeface="Inter" pitchFamily="34" charset="-122"/>
                 <a:cs typeface="Inter" pitchFamily="34" charset="-120"/>
               </a:rPr>
-              <a:t>−$541K</a:t>
+              <a:t>−$406K</a:t>
             </a:r>
             <a:endParaRPr lang="en-US" sz="1300" dirty="0"/>
           </a:p>
@@ -7268,7 +7268,7 @@
                 <a:ea typeface="Inter" pitchFamily="34" charset="-122"/>
                 <a:cs typeface="Inter" pitchFamily="34" charset="-120"/>
               </a:rPr>
-              <a:t>Toyota Spokane is furthest below at −$541K a year; 7 of 33 stores are ahead of benchmark across the four services. 15 stores are under all four.</a:t>
+              <a:t>Toyota Spokane is furthest below at −$406K so far this year; 7 of 33 stores are ahead of benchmark across the four services. 15 stores are under all four.</a:t>
             </a:r>
             <a:endParaRPr lang="en-US" sz="1600" dirty="0"/>
           </a:p>
@@ -7359,7 +7359,7 @@
                 <a:ea typeface="Inter" pitchFamily="34" charset="-122"/>
                 <a:cs typeface="Inter" pitchFamily="34" charset="-120"/>
               </a:rPr>
-              <a:t>OPCODES · JAN–SEP 2026, ANNUALIZED</a:t>
+              <a:t>OPCODES · JAN–SEP 2026 YTD</a:t>
             </a:r>
             <a:endParaRPr lang="en-US" sz="1400" dirty="0"/>
           </a:p>
@@ -7751,7 +7751,7 @@
                 <a:ea typeface="Inter" pitchFamily="34" charset="-122"/>
                 <a:cs typeface="Inter" pitchFamily="34" charset="-120"/>
               </a:rPr>
-              <a:t>+$229K</a:t>
+              <a:t>+$171K</a:t>
             </a:r>
             <a:endParaRPr lang="en-US" sz="1300" dirty="0"/>
           </a:p>
@@ -7927,7 +7927,7 @@
                 <a:ea typeface="Inter" pitchFamily="34" charset="-122"/>
                 <a:cs typeface="Inter" pitchFamily="34" charset="-120"/>
               </a:rPr>
-              <a:t>+$163K</a:t>
+              <a:t>+$123K</a:t>
             </a:r>
             <a:endParaRPr lang="en-US" sz="1300" dirty="0"/>
           </a:p>
@@ -8103,7 +8103,7 @@
                 <a:ea typeface="Inter" pitchFamily="34" charset="-122"/>
                 <a:cs typeface="Inter" pitchFamily="34" charset="-120"/>
               </a:rPr>
-              <a:t>+$42K</a:t>
+              <a:t>+$31K</a:t>
             </a:r>
             <a:endParaRPr lang="en-US" sz="1300" dirty="0"/>
           </a:p>
@@ -8279,7 +8279,7 @@
                 <a:ea typeface="Inter" pitchFamily="34" charset="-122"/>
                 <a:cs typeface="Inter" pitchFamily="34" charset="-120"/>
               </a:rPr>
-              <a:t>+$41K</a:t>
+              <a:t>+$31K</a:t>
             </a:r>
             <a:endParaRPr lang="en-US" sz="1300" dirty="0"/>
           </a:p>
@@ -8455,7 +8455,7 @@
                 <a:ea typeface="Inter" pitchFamily="34" charset="-122"/>
                 <a:cs typeface="Inter" pitchFamily="34" charset="-120"/>
               </a:rPr>
-              <a:t>+$27K</a:t>
+              <a:t>+$20K</a:t>
             </a:r>
             <a:endParaRPr lang="en-US" sz="1300" dirty="0"/>
           </a:p>
@@ -8631,7 +8631,7 @@
                 <a:ea typeface="Inter" pitchFamily="34" charset="-122"/>
                 <a:cs typeface="Inter" pitchFamily="34" charset="-120"/>
               </a:rPr>
-              <a:t>+$23K</a:t>
+              <a:t>+$18K</a:t>
             </a:r>
             <a:endParaRPr lang="en-US" sz="1300" dirty="0"/>
           </a:p>
@@ -8807,7 +8807,7 @@
                 <a:ea typeface="Inter" pitchFamily="34" charset="-122"/>
                 <a:cs typeface="Inter" pitchFamily="34" charset="-120"/>
               </a:rPr>
-              <a:t>+$17K</a:t>
+              <a:t>+$13K</a:t>
             </a:r>
             <a:endParaRPr lang="en-US" sz="1300" dirty="0"/>
           </a:p>
@@ -8983,7 +8983,7 @@
                 <a:ea typeface="Inter" pitchFamily="34" charset="-122"/>
                 <a:cs typeface="Inter" pitchFamily="34" charset="-120"/>
               </a:rPr>
-              <a:t>+$14K</a:t>
+              <a:t>+$11K</a:t>
             </a:r>
             <a:endParaRPr lang="en-US" sz="1300" dirty="0"/>
           </a:p>
@@ -9159,7 +9159,7 @@
                 <a:ea typeface="Inter" pitchFamily="34" charset="-122"/>
                 <a:cs typeface="Inter" pitchFamily="34" charset="-120"/>
               </a:rPr>
-              <a:t>−$865</a:t>
+              <a:t>−$649</a:t>
             </a:r>
             <a:endParaRPr lang="en-US" sz="1300" dirty="0"/>
           </a:p>
@@ -9335,7 +9335,7 @@
                 <a:ea typeface="Inter" pitchFamily="34" charset="-122"/>
                 <a:cs typeface="Inter" pitchFamily="34" charset="-120"/>
               </a:rPr>
-              <a:t>−$7K</a:t>
+              <a:t>−$5K</a:t>
             </a:r>
             <a:endParaRPr lang="en-US" sz="1300" dirty="0"/>
           </a:p>
@@ -9511,7 +9511,7 @@
                 <a:ea typeface="Inter" pitchFamily="34" charset="-122"/>
                 <a:cs typeface="Inter" pitchFamily="34" charset="-120"/>
               </a:rPr>
-              <a:t>−$9K</a:t>
+              <a:t>−$7K</a:t>
             </a:r>
             <a:endParaRPr lang="en-US" sz="1300" dirty="0"/>
           </a:p>
@@ -9687,7 +9687,7 @@
                 <a:ea typeface="Inter" pitchFamily="34" charset="-122"/>
                 <a:cs typeface="Inter" pitchFamily="34" charset="-120"/>
               </a:rPr>
-              <a:t>−$10K</a:t>
+              <a:t>−$7K</a:t>
             </a:r>
             <a:endParaRPr lang="en-US" sz="1300" dirty="0"/>
           </a:p>
@@ -9863,7 +9863,7 @@
                 <a:ea typeface="Inter" pitchFamily="34" charset="-122"/>
                 <a:cs typeface="Inter" pitchFamily="34" charset="-120"/>
               </a:rPr>
-              <a:t>−$10K</a:t>
+              <a:t>−$8K</a:t>
             </a:r>
             <a:endParaRPr lang="en-US" sz="1300" dirty="0"/>
           </a:p>
@@ -10039,7 +10039,7 @@
                 <a:ea typeface="Inter" pitchFamily="34" charset="-122"/>
                 <a:cs typeface="Inter" pitchFamily="34" charset="-120"/>
               </a:rPr>
-              <a:t>−$11K</a:t>
+              <a:t>−$9K</a:t>
             </a:r>
             <a:endParaRPr lang="en-US" sz="1300" dirty="0"/>
           </a:p>
@@ -10215,7 +10215,7 @@
                 <a:ea typeface="Inter" pitchFamily="34" charset="-122"/>
                 <a:cs typeface="Inter" pitchFamily="34" charset="-120"/>
               </a:rPr>
-              <a:t>−$12K</a:t>
+              <a:t>−$9K</a:t>
             </a:r>
             <a:endParaRPr lang="en-US" sz="1300" dirty="0"/>
           </a:p>
@@ -10391,7 +10391,7 @@
                 <a:ea typeface="Inter" pitchFamily="34" charset="-122"/>
                 <a:cs typeface="Inter" pitchFamily="34" charset="-120"/>
               </a:rPr>
-              <a:t>−$18K</a:t>
+              <a:t>−$13K</a:t>
             </a:r>
             <a:endParaRPr lang="en-US" sz="1300" dirty="0"/>
           </a:p>
@@ -10567,7 +10567,7 @@
                 <a:ea typeface="Inter" pitchFamily="34" charset="-122"/>
                 <a:cs typeface="Inter" pitchFamily="34" charset="-120"/>
               </a:rPr>
-              <a:t>−$21K</a:t>
+              <a:t>−$16K</a:t>
             </a:r>
             <a:endParaRPr lang="en-US" sz="1300" dirty="0"/>
           </a:p>
@@ -10743,7 +10743,7 @@
                 <a:ea typeface="Inter" pitchFamily="34" charset="-122"/>
                 <a:cs typeface="Inter" pitchFamily="34" charset="-120"/>
               </a:rPr>
-              <a:t>−$23K</a:t>
+              <a:t>−$17K</a:t>
             </a:r>
             <a:endParaRPr lang="en-US" sz="1300" dirty="0"/>
           </a:p>
@@ -10919,7 +10919,7 @@
                 <a:ea typeface="Inter" pitchFamily="34" charset="-122"/>
                 <a:cs typeface="Inter" pitchFamily="34" charset="-120"/>
               </a:rPr>
-              <a:t>−$23K</a:t>
+              <a:t>−$18K</a:t>
             </a:r>
             <a:endParaRPr lang="en-US" sz="1300" dirty="0"/>
           </a:p>
@@ -11095,7 +11095,7 @@
                 <a:ea typeface="Inter" pitchFamily="34" charset="-122"/>
                 <a:cs typeface="Inter" pitchFamily="34" charset="-120"/>
               </a:rPr>
-              <a:t>−$25K</a:t>
+              <a:t>−$19K</a:t>
             </a:r>
             <a:endParaRPr lang="en-US" sz="1300" dirty="0"/>
           </a:p>
@@ -11271,7 +11271,7 @@
                 <a:ea typeface="Inter" pitchFamily="34" charset="-122"/>
                 <a:cs typeface="Inter" pitchFamily="34" charset="-120"/>
               </a:rPr>
-              <a:t>−$26K</a:t>
+              <a:t>−$20K</a:t>
             </a:r>
             <a:endParaRPr lang="en-US" sz="1300" dirty="0"/>
           </a:p>
@@ -11447,7 +11447,7 @@
                 <a:ea typeface="Inter" pitchFamily="34" charset="-122"/>
                 <a:cs typeface="Inter" pitchFamily="34" charset="-120"/>
               </a:rPr>
-              <a:t>−$33K</a:t>
+              <a:t>−$24K</a:t>
             </a:r>
             <a:endParaRPr lang="en-US" sz="1300" dirty="0"/>
           </a:p>
@@ -11623,7 +11623,7 @@
                 <a:ea typeface="Inter" pitchFamily="34" charset="-122"/>
                 <a:cs typeface="Inter" pitchFamily="34" charset="-120"/>
               </a:rPr>
-              <a:t>−$33K</a:t>
+              <a:t>−$25K</a:t>
             </a:r>
             <a:endParaRPr lang="en-US" sz="1300" dirty="0"/>
           </a:p>
@@ -11799,7 +11799,7 @@
                 <a:ea typeface="Inter" pitchFamily="34" charset="-122"/>
                 <a:cs typeface="Inter" pitchFamily="34" charset="-120"/>
               </a:rPr>
-              <a:t>−$34K</a:t>
+              <a:t>−$26K</a:t>
             </a:r>
             <a:endParaRPr lang="en-US" sz="1300" dirty="0"/>
           </a:p>
@@ -11975,7 +11975,7 @@
                 <a:ea typeface="Inter" pitchFamily="34" charset="-122"/>
                 <a:cs typeface="Inter" pitchFamily="34" charset="-120"/>
               </a:rPr>
-              <a:t>−$36K</a:t>
+              <a:t>−$27K</a:t>
             </a:r>
             <a:endParaRPr lang="en-US" sz="1300" dirty="0"/>
           </a:p>
@@ -12151,7 +12151,7 @@
                 <a:ea typeface="Inter" pitchFamily="34" charset="-122"/>
                 <a:cs typeface="Inter" pitchFamily="34" charset="-120"/>
               </a:rPr>
-              <a:t>−$38K</a:t>
+              <a:t>−$29K</a:t>
             </a:r>
             <a:endParaRPr lang="en-US" sz="1300" dirty="0"/>
           </a:p>
@@ -12327,7 +12327,7 @@
                 <a:ea typeface="Inter" pitchFamily="34" charset="-122"/>
                 <a:cs typeface="Inter" pitchFamily="34" charset="-120"/>
               </a:rPr>
-              <a:t>−$49K</a:t>
+              <a:t>−$37K</a:t>
             </a:r>
             <a:endParaRPr lang="en-US" sz="1300" dirty="0"/>
           </a:p>
@@ -12503,7 +12503,7 @@
                 <a:ea typeface="Inter" pitchFamily="34" charset="-122"/>
                 <a:cs typeface="Inter" pitchFamily="34" charset="-120"/>
               </a:rPr>
-              <a:t>−$57K</a:t>
+              <a:t>−$43K</a:t>
             </a:r>
             <a:endParaRPr lang="en-US" sz="1300" dirty="0"/>
           </a:p>
@@ -12679,7 +12679,7 @@
                 <a:ea typeface="Inter" pitchFamily="34" charset="-122"/>
                 <a:cs typeface="Inter" pitchFamily="34" charset="-120"/>
               </a:rPr>
-              <a:t>−$75K</a:t>
+              <a:t>−$57K</a:t>
             </a:r>
             <a:endParaRPr lang="en-US" sz="1300" dirty="0"/>
           </a:p>
@@ -12855,7 +12855,7 @@
                 <a:ea typeface="Inter" pitchFamily="34" charset="-122"/>
                 <a:cs typeface="Inter" pitchFamily="34" charset="-120"/>
               </a:rPr>
-              <a:t>−$77K</a:t>
+              <a:t>−$58K</a:t>
             </a:r>
             <a:endParaRPr lang="en-US" sz="1300" dirty="0"/>
           </a:p>
@@ -13031,7 +13031,7 @@
                 <a:ea typeface="Inter" pitchFamily="34" charset="-122"/>
                 <a:cs typeface="Inter" pitchFamily="34" charset="-120"/>
               </a:rPr>
-              <a:t>−$83K</a:t>
+              <a:t>−$62K</a:t>
             </a:r>
             <a:endParaRPr lang="en-US" sz="1300" dirty="0"/>
           </a:p>
@@ -13207,7 +13207,7 @@
                 <a:ea typeface="Inter" pitchFamily="34" charset="-122"/>
                 <a:cs typeface="Inter" pitchFamily="34" charset="-120"/>
               </a:rPr>
-              <a:t>−$90K</a:t>
+              <a:t>−$67K</a:t>
             </a:r>
             <a:endParaRPr lang="en-US" sz="1300" dirty="0"/>
           </a:p>
@@ -13383,7 +13383,7 @@
                 <a:ea typeface="Inter" pitchFamily="34" charset="-122"/>
                 <a:cs typeface="Inter" pitchFamily="34" charset="-120"/>
               </a:rPr>
-              <a:t>−$225K</a:t>
+              <a:t>−$169K</a:t>
             </a:r>
             <a:endParaRPr lang="en-US" sz="1300" dirty="0"/>
           </a:p>
@@ -13457,7 +13457,7 @@
         <p:spPr>
           <a:xfrm>
             <a:off x="457200" y="6126480"/>
-            <a:ext cx="11274552" cy="341376"/>
+            <a:ext cx="11274552" cy="615696"/>
           </a:xfrm>
           <a:prstGeom prst="rect">
             <a:avLst/>
@@ -13477,7 +13477,7 @@
         <p:spPr>
           <a:xfrm>
             <a:off x="658368" y="6144768"/>
-            <a:ext cx="10927080" cy="304800"/>
+            <a:ext cx="10927080" cy="579120"/>
           </a:xfrm>
           <a:prstGeom prst="rect">
             <a:avLst/>
@@ -13493,7 +13493,7 @@
               <a:buNone/>
             </a:pPr>
             <a:r>
-              <a:rPr lang="en-US" sz="1400" b="1" dirty="0">
+              <a:rPr lang="en-US" sz="1600" b="1" dirty="0">
                 <a:solidFill>
                   <a:srgbClr val="A82B26"/>
                 </a:solidFill>
@@ -13501,9 +13501,9 @@
                 <a:ea typeface="Inter" pitchFamily="34" charset="-122"/>
                 <a:cs typeface="Inter" pitchFamily="34" charset="-120"/>
               </a:rPr>
-              <a:t>25 stores under 15% leave $1,029,276 a year; 8 are at or above it. Toyota Spokane is furthest below at −$225K.</a:t>
-            </a:r>
-            <a:endParaRPr lang="en-US" sz="1400" dirty="0"/>
+              <a:t>25 stores under 15% have left $771,957 so far this year; 8 are at or above it. Toyota Spokane is furthest below at −$169K.</a:t>
+            </a:r>
+            <a:endParaRPr lang="en-US" sz="1600" dirty="0"/>
           </a:p>
         </p:txBody>
       </p:sp>
@@ -13592,7 +13592,7 @@
                 <a:ea typeface="Inter" pitchFamily="34" charset="-122"/>
                 <a:cs typeface="Inter" pitchFamily="34" charset="-120"/>
               </a:rPr>
-              <a:t>OPCODES · JAN–SEP 2026, ANNUALIZED</a:t>
+              <a:t>OPCODES · JAN–SEP 2026 YTD</a:t>
             </a:r>
             <a:endParaRPr lang="en-US" sz="1400" dirty="0"/>
           </a:p>
@@ -13984,7 +13984,7 @@
                 <a:ea typeface="Inter" pitchFamily="34" charset="-122"/>
                 <a:cs typeface="Inter" pitchFamily="34" charset="-120"/>
               </a:rPr>
-              <a:t>+$70K</a:t>
+              <a:t>+$52K</a:t>
             </a:r>
             <a:endParaRPr lang="en-US" sz="1300" dirty="0"/>
           </a:p>
@@ -14160,7 +14160,7 @@
                 <a:ea typeface="Inter" pitchFamily="34" charset="-122"/>
                 <a:cs typeface="Inter" pitchFamily="34" charset="-120"/>
               </a:rPr>
-              <a:t>+$31K</a:t>
+              <a:t>+$23K</a:t>
             </a:r>
             <a:endParaRPr lang="en-US" sz="1300" dirty="0"/>
           </a:p>
@@ -14336,7 +14336,7 @@
                 <a:ea typeface="Inter" pitchFamily="34" charset="-122"/>
                 <a:cs typeface="Inter" pitchFamily="34" charset="-120"/>
               </a:rPr>
-              <a:t>+$14K</a:t>
+              <a:t>+$10K</a:t>
             </a:r>
             <a:endParaRPr lang="en-US" sz="1300" dirty="0"/>
           </a:p>
@@ -14512,7 +14512,7 @@
                 <a:ea typeface="Inter" pitchFamily="34" charset="-122"/>
                 <a:cs typeface="Inter" pitchFamily="34" charset="-120"/>
               </a:rPr>
-              <a:t>+$6K</a:t>
+              <a:t>+$4K</a:t>
             </a:r>
             <a:endParaRPr lang="en-US" sz="1300" dirty="0"/>
           </a:p>
@@ -14688,7 +14688,7 @@
                 <a:ea typeface="Inter" pitchFamily="34" charset="-122"/>
                 <a:cs typeface="Inter" pitchFamily="34" charset="-120"/>
               </a:rPr>
-              <a:t>−$34</a:t>
+              <a:t>−$26</a:t>
             </a:r>
             <a:endParaRPr lang="en-US" sz="1300" dirty="0"/>
           </a:p>
@@ -14864,7 +14864,7 @@
                 <a:ea typeface="Inter" pitchFamily="34" charset="-122"/>
                 <a:cs typeface="Inter" pitchFamily="34" charset="-120"/>
               </a:rPr>
-              <a:t>−$3K</a:t>
+              <a:t>−$2K</a:t>
             </a:r>
             <a:endParaRPr lang="en-US" sz="1300" dirty="0"/>
           </a:p>
@@ -15040,7 +15040,7 @@
                 <a:ea typeface="Inter" pitchFamily="34" charset="-122"/>
                 <a:cs typeface="Inter" pitchFamily="34" charset="-120"/>
               </a:rPr>
-              <a:t>−$6K</a:t>
+              <a:t>−$4K</a:t>
             </a:r>
             <a:endParaRPr lang="en-US" sz="1300" dirty="0"/>
           </a:p>
@@ -15216,7 +15216,7 @@
                 <a:ea typeface="Inter" pitchFamily="34" charset="-122"/>
                 <a:cs typeface="Inter" pitchFamily="34" charset="-120"/>
               </a:rPr>
-              <a:t>−$8K</a:t>
+              <a:t>−$6K</a:t>
             </a:r>
             <a:endParaRPr lang="en-US" sz="1300" dirty="0"/>
           </a:p>
@@ -15392,7 +15392,7 @@
                 <a:ea typeface="Inter" pitchFamily="34" charset="-122"/>
                 <a:cs typeface="Inter" pitchFamily="34" charset="-120"/>
               </a:rPr>
-              <a:t>−$11K</a:t>
+              <a:t>−$8K</a:t>
             </a:r>
             <a:endParaRPr lang="en-US" sz="1300" dirty="0"/>
           </a:p>
@@ -15568,7 +15568,7 @@
                 <a:ea typeface="Inter" pitchFamily="34" charset="-122"/>
                 <a:cs typeface="Inter" pitchFamily="34" charset="-120"/>
               </a:rPr>
-              <a:t>−$14K</a:t>
+              <a:t>−$11K</a:t>
             </a:r>
             <a:endParaRPr lang="en-US" sz="1300" dirty="0"/>
           </a:p>
@@ -15744,7 +15744,7 @@
                 <a:ea typeface="Inter" pitchFamily="34" charset="-122"/>
                 <a:cs typeface="Inter" pitchFamily="34" charset="-120"/>
               </a:rPr>
-              <a:t>−$18K</a:t>
+              <a:t>−$14K</a:t>
             </a:r>
             <a:endParaRPr lang="en-US" sz="1300" dirty="0"/>
           </a:p>
@@ -15920,7 +15920,7 @@
                 <a:ea typeface="Inter" pitchFamily="34" charset="-122"/>
                 <a:cs typeface="Inter" pitchFamily="34" charset="-120"/>
               </a:rPr>
-              <a:t>−$21K</a:t>
+              <a:t>−$16K</a:t>
             </a:r>
             <a:endParaRPr lang="en-US" sz="1300" dirty="0"/>
           </a:p>
@@ -16096,7 +16096,7 @@
                 <a:ea typeface="Inter" pitchFamily="34" charset="-122"/>
                 <a:cs typeface="Inter" pitchFamily="34" charset="-120"/>
               </a:rPr>
-              <a:t>−$27K</a:t>
+              <a:t>−$20K</a:t>
             </a:r>
             <a:endParaRPr lang="en-US" sz="1300" dirty="0"/>
           </a:p>
@@ -16272,7 +16272,7 @@
                 <a:ea typeface="Inter" pitchFamily="34" charset="-122"/>
                 <a:cs typeface="Inter" pitchFamily="34" charset="-120"/>
               </a:rPr>
-              <a:t>−$27K</a:t>
+              <a:t>−$21K</a:t>
             </a:r>
             <a:endParaRPr lang="en-US" sz="1300" dirty="0"/>
           </a:p>
@@ -16448,7 +16448,7 @@
                 <a:ea typeface="Inter" pitchFamily="34" charset="-122"/>
                 <a:cs typeface="Inter" pitchFamily="34" charset="-120"/>
               </a:rPr>
-              <a:t>−$28K</a:t>
+              <a:t>−$21K</a:t>
             </a:r>
             <a:endParaRPr lang="en-US" sz="1300" dirty="0"/>
           </a:p>
@@ -16624,7 +16624,7 @@
                 <a:ea typeface="Inter" pitchFamily="34" charset="-122"/>
                 <a:cs typeface="Inter" pitchFamily="34" charset="-120"/>
               </a:rPr>
-              <a:t>−$31K</a:t>
+              <a:t>−$23K</a:t>
             </a:r>
             <a:endParaRPr lang="en-US" sz="1300" dirty="0"/>
           </a:p>
@@ -16800,7 +16800,7 @@
                 <a:ea typeface="Inter" pitchFamily="34" charset="-122"/>
                 <a:cs typeface="Inter" pitchFamily="34" charset="-120"/>
               </a:rPr>
-              <a:t>−$36K</a:t>
+              <a:t>−$27K</a:t>
             </a:r>
             <a:endParaRPr lang="en-US" sz="1300" dirty="0"/>
           </a:p>
@@ -16976,7 +16976,7 @@
                 <a:ea typeface="Inter" pitchFamily="34" charset="-122"/>
                 <a:cs typeface="Inter" pitchFamily="34" charset="-120"/>
               </a:rPr>
-              <a:t>−$38K</a:t>
+              <a:t>−$29K</a:t>
             </a:r>
             <a:endParaRPr lang="en-US" sz="1300" dirty="0"/>
           </a:p>
@@ -17152,7 +17152,7 @@
                 <a:ea typeface="Inter" pitchFamily="34" charset="-122"/>
                 <a:cs typeface="Inter" pitchFamily="34" charset="-120"/>
               </a:rPr>
-              <a:t>−$52K</a:t>
+              <a:t>−$39K</a:t>
             </a:r>
             <a:endParaRPr lang="en-US" sz="1300" dirty="0"/>
           </a:p>
@@ -17328,7 +17328,7 @@
                 <a:ea typeface="Inter" pitchFamily="34" charset="-122"/>
                 <a:cs typeface="Inter" pitchFamily="34" charset="-120"/>
               </a:rPr>
-              <a:t>−$52K</a:t>
+              <a:t>−$39K</a:t>
             </a:r>
             <a:endParaRPr lang="en-US" sz="1300" dirty="0"/>
           </a:p>
@@ -17504,7 +17504,7 @@
                 <a:ea typeface="Inter" pitchFamily="34" charset="-122"/>
                 <a:cs typeface="Inter" pitchFamily="34" charset="-120"/>
               </a:rPr>
-              <a:t>−$56K</a:t>
+              <a:t>−$42K</a:t>
             </a:r>
             <a:endParaRPr lang="en-US" sz="1300" dirty="0"/>
           </a:p>
@@ -17680,7 +17680,7 @@
                 <a:ea typeface="Inter" pitchFamily="34" charset="-122"/>
                 <a:cs typeface="Inter" pitchFamily="34" charset="-120"/>
               </a:rPr>
-              <a:t>−$68K</a:t>
+              <a:t>−$51K</a:t>
             </a:r>
             <a:endParaRPr lang="en-US" sz="1300" dirty="0"/>
           </a:p>
@@ -17856,7 +17856,7 @@
                 <a:ea typeface="Inter" pitchFamily="34" charset="-122"/>
                 <a:cs typeface="Inter" pitchFamily="34" charset="-120"/>
               </a:rPr>
-              <a:t>−$68K</a:t>
+              <a:t>−$51K</a:t>
             </a:r>
             <a:endParaRPr lang="en-US" sz="1300" dirty="0"/>
           </a:p>
@@ -18032,7 +18032,7 @@
                 <a:ea typeface="Inter" pitchFamily="34" charset="-122"/>
                 <a:cs typeface="Inter" pitchFamily="34" charset="-120"/>
               </a:rPr>
-              <a:t>−$72K</a:t>
+              <a:t>−$54K</a:t>
             </a:r>
             <a:endParaRPr lang="en-US" sz="1300" dirty="0"/>
           </a:p>
@@ -18208,7 +18208,7 @@
                 <a:ea typeface="Inter" pitchFamily="34" charset="-122"/>
                 <a:cs typeface="Inter" pitchFamily="34" charset="-120"/>
               </a:rPr>
-              <a:t>−$73K</a:t>
+              <a:t>−$55K</a:t>
             </a:r>
             <a:endParaRPr lang="en-US" sz="1300" dirty="0"/>
           </a:p>
@@ -18384,7 +18384,7 @@
                 <a:ea typeface="Inter" pitchFamily="34" charset="-122"/>
                 <a:cs typeface="Inter" pitchFamily="34" charset="-120"/>
               </a:rPr>
-              <a:t>−$77K</a:t>
+              <a:t>−$58K</a:t>
             </a:r>
             <a:endParaRPr lang="en-US" sz="1300" dirty="0"/>
           </a:p>
@@ -18560,7 +18560,7 @@
                 <a:ea typeface="Inter" pitchFamily="34" charset="-122"/>
                 <a:cs typeface="Inter" pitchFamily="34" charset="-120"/>
               </a:rPr>
-              <a:t>−$80K</a:t>
+              <a:t>−$60K</a:t>
             </a:r>
             <a:endParaRPr lang="en-US" sz="1300" dirty="0"/>
           </a:p>
@@ -18736,7 +18736,7 @@
                 <a:ea typeface="Inter" pitchFamily="34" charset="-122"/>
                 <a:cs typeface="Inter" pitchFamily="34" charset="-120"/>
               </a:rPr>
-              <a:t>−$106K</a:t>
+              <a:t>−$80K</a:t>
             </a:r>
             <a:endParaRPr lang="en-US" sz="1300" dirty="0"/>
           </a:p>
@@ -18912,7 +18912,7 @@
                 <a:ea typeface="Inter" pitchFamily="34" charset="-122"/>
                 <a:cs typeface="Inter" pitchFamily="34" charset="-120"/>
               </a:rPr>
-              <a:t>−$109K</a:t>
+              <a:t>−$82K</a:t>
             </a:r>
             <a:endParaRPr lang="en-US" sz="1300" dirty="0"/>
           </a:p>
@@ -19088,7 +19088,7 @@
                 <a:ea typeface="Inter" pitchFamily="34" charset="-122"/>
                 <a:cs typeface="Inter" pitchFamily="34" charset="-120"/>
               </a:rPr>
-              <a:t>−$125K</a:t>
+              <a:t>−$94K</a:t>
             </a:r>
             <a:endParaRPr lang="en-US" sz="1300" dirty="0"/>
           </a:p>
@@ -19264,7 +19264,7 @@
                 <a:ea typeface="Inter" pitchFamily="34" charset="-122"/>
                 <a:cs typeface="Inter" pitchFamily="34" charset="-120"/>
               </a:rPr>
-              <a:t>−$132K</a:t>
+              <a:t>−$99K</a:t>
             </a:r>
             <a:endParaRPr lang="en-US" sz="1300" dirty="0"/>
           </a:p>
@@ -19440,7 +19440,7 @@
                 <a:ea typeface="Inter" pitchFamily="34" charset="-122"/>
                 <a:cs typeface="Inter" pitchFamily="34" charset="-120"/>
               </a:rPr>
-              <a:t>−$147K</a:t>
+              <a:t>−$111K</a:t>
             </a:r>
             <a:endParaRPr lang="en-US" sz="1300" dirty="0"/>
           </a:p>
@@ -19616,7 +19616,7 @@
                 <a:ea typeface="Inter" pitchFamily="34" charset="-122"/>
                 <a:cs typeface="Inter" pitchFamily="34" charset="-120"/>
               </a:rPr>
-              <a:t>−$180K</a:t>
+              <a:t>−$135K</a:t>
             </a:r>
             <a:endParaRPr lang="en-US" sz="1300" dirty="0"/>
           </a:p>
@@ -19690,7 +19690,7 @@
         <p:spPr>
           <a:xfrm>
             <a:off x="457200" y="6126480"/>
-            <a:ext cx="11274552" cy="341376"/>
+            <a:ext cx="11274552" cy="615696"/>
           </a:xfrm>
           <a:prstGeom prst="rect">
             <a:avLst/>
@@ -19710,7 +19710,7 @@
         <p:spPr>
           <a:xfrm>
             <a:off x="658368" y="6144768"/>
-            <a:ext cx="10927080" cy="304800"/>
+            <a:ext cx="10927080" cy="579120"/>
           </a:xfrm>
           <a:prstGeom prst="rect">
             <a:avLst/>
@@ -19726,7 +19726,7 @@
               <a:buNone/>
             </a:pPr>
             <a:r>
-              <a:rPr lang="en-US" sz="1400" b="1" dirty="0">
+              <a:rPr lang="en-US" sz="1600" b="1" dirty="0">
                 <a:solidFill>
                   <a:srgbClr val="A82B26"/>
                 </a:solidFill>
@@ -19734,9 +19734,9 @@
                 <a:ea typeface="Inter" pitchFamily="34" charset="-122"/>
                 <a:cs typeface="Inter" pitchFamily="34" charset="-120"/>
               </a:rPr>
-              <a:t>29 stores under 15% leave $1,664,385 a year; 4 are at or above it. Toyota Spokane is furthest below at −$180K.</a:t>
-            </a:r>
-            <a:endParaRPr lang="en-US" sz="1400" dirty="0"/>
+              <a:t>29 stores under 15% have left $1,248,289 so far this year; 4 are at or above it. Toyota Spokane is furthest below at −$135K.</a:t>
+            </a:r>
+            <a:endParaRPr lang="en-US" sz="1600" dirty="0"/>
           </a:p>
         </p:txBody>
       </p:sp>
@@ -19825,7 +19825,7 @@
                 <a:ea typeface="Inter" pitchFamily="34" charset="-122"/>
                 <a:cs typeface="Inter" pitchFamily="34" charset="-120"/>
               </a:rPr>
-              <a:t>OPCODES · JAN–SEP 2026, ANNUALIZED</a:t>
+              <a:t>OPCODES · JAN–SEP 2026 YTD</a:t>
             </a:r>
             <a:endParaRPr lang="en-US" sz="1400" dirty="0"/>
           </a:p>
@@ -20217,7 +20217,7 @@
                 <a:ea typeface="Inter" pitchFamily="34" charset="-122"/>
                 <a:cs typeface="Inter" pitchFamily="34" charset="-120"/>
               </a:rPr>
-              <a:t>+$260K</a:t>
+              <a:t>+$195K</a:t>
             </a:r>
             <a:endParaRPr lang="en-US" sz="1300" dirty="0"/>
           </a:p>
@@ -20393,7 +20393,7 @@
                 <a:ea typeface="Inter" pitchFamily="34" charset="-122"/>
                 <a:cs typeface="Inter" pitchFamily="34" charset="-120"/>
               </a:rPr>
-              <a:t>+$187K</a:t>
+              <a:t>+$141K</a:t>
             </a:r>
             <a:endParaRPr lang="en-US" sz="1300" dirty="0"/>
           </a:p>
@@ -20569,7 +20569,7 @@
                 <a:ea typeface="Inter" pitchFamily="34" charset="-122"/>
                 <a:cs typeface="Inter" pitchFamily="34" charset="-120"/>
               </a:rPr>
-              <a:t>+$67K</a:t>
+              <a:t>+$51K</a:t>
             </a:r>
             <a:endParaRPr lang="en-US" sz="1300" dirty="0"/>
           </a:p>
@@ -20745,7 +20745,7 @@
                 <a:ea typeface="Inter" pitchFamily="34" charset="-122"/>
                 <a:cs typeface="Inter" pitchFamily="34" charset="-120"/>
               </a:rPr>
-              <a:t>+$34K</a:t>
+              <a:t>+$25K</a:t>
             </a:r>
             <a:endParaRPr lang="en-US" sz="1300" dirty="0"/>
           </a:p>
@@ -20921,7 +20921,7 @@
                 <a:ea typeface="Inter" pitchFamily="34" charset="-122"/>
                 <a:cs typeface="Inter" pitchFamily="34" charset="-120"/>
               </a:rPr>
-              <a:t>+$33K</a:t>
+              <a:t>+$24K</a:t>
             </a:r>
             <a:endParaRPr lang="en-US" sz="1300" dirty="0"/>
           </a:p>
@@ -21097,7 +21097,7 @@
                 <a:ea typeface="Inter" pitchFamily="34" charset="-122"/>
                 <a:cs typeface="Inter" pitchFamily="34" charset="-120"/>
               </a:rPr>
-              <a:t>+$24K</a:t>
+              <a:t>+$18K</a:t>
             </a:r>
             <a:endParaRPr lang="en-US" sz="1300" dirty="0"/>
           </a:p>
@@ -21273,7 +21273,7 @@
                 <a:ea typeface="Inter" pitchFamily="34" charset="-122"/>
                 <a:cs typeface="Inter" pitchFamily="34" charset="-120"/>
               </a:rPr>
-              <a:t>+$21K</a:t>
+              <a:t>+$16K</a:t>
             </a:r>
             <a:endParaRPr lang="en-US" sz="1300" dirty="0"/>
           </a:p>
@@ -21449,7 +21449,7 @@
                 <a:ea typeface="Inter" pitchFamily="34" charset="-122"/>
                 <a:cs typeface="Inter" pitchFamily="34" charset="-120"/>
               </a:rPr>
-              <a:t>+$20K</a:t>
+              <a:t>+$15K</a:t>
             </a:r>
             <a:endParaRPr lang="en-US" sz="1300" dirty="0"/>
           </a:p>
@@ -21625,7 +21625,7 @@
                 <a:ea typeface="Inter" pitchFamily="34" charset="-122"/>
                 <a:cs typeface="Inter" pitchFamily="34" charset="-120"/>
               </a:rPr>
-              <a:t>+$16K</a:t>
+              <a:t>+$12K</a:t>
             </a:r>
             <a:endParaRPr lang="en-US" sz="1300" dirty="0"/>
           </a:p>
@@ -21801,7 +21801,7 @@
                 <a:ea typeface="Inter" pitchFamily="34" charset="-122"/>
                 <a:cs typeface="Inter" pitchFamily="34" charset="-120"/>
               </a:rPr>
-              <a:t>+$9K</a:t>
+              <a:t>+$7K</a:t>
             </a:r>
             <a:endParaRPr lang="en-US" sz="1300" dirty="0"/>
           </a:p>
@@ -21977,7 +21977,7 @@
                 <a:ea typeface="Inter" pitchFamily="34" charset="-122"/>
                 <a:cs typeface="Inter" pitchFamily="34" charset="-120"/>
               </a:rPr>
-              <a:t>+$7K</a:t>
+              <a:t>+$5K</a:t>
             </a:r>
             <a:endParaRPr lang="en-US" sz="1300" dirty="0"/>
           </a:p>
@@ -22153,7 +22153,7 @@
                 <a:ea typeface="Inter" pitchFamily="34" charset="-122"/>
                 <a:cs typeface="Inter" pitchFamily="34" charset="-120"/>
               </a:rPr>
-              <a:t>+$5K</a:t>
+              <a:t>+$4K</a:t>
             </a:r>
             <a:endParaRPr lang="en-US" sz="1300" dirty="0"/>
           </a:p>
@@ -22329,7 +22329,7 @@
                 <a:ea typeface="Inter" pitchFamily="34" charset="-122"/>
                 <a:cs typeface="Inter" pitchFamily="34" charset="-120"/>
               </a:rPr>
-              <a:t>−$3K</a:t>
+              <a:t>−$2K</a:t>
             </a:r>
             <a:endParaRPr lang="en-US" sz="1300" dirty="0"/>
           </a:p>
@@ -22505,7 +22505,7 @@
                 <a:ea typeface="Inter" pitchFamily="34" charset="-122"/>
                 <a:cs typeface="Inter" pitchFamily="34" charset="-120"/>
               </a:rPr>
-              <a:t>−$4K</a:t>
+              <a:t>−$3K</a:t>
             </a:r>
             <a:endParaRPr lang="en-US" sz="1300" dirty="0"/>
           </a:p>
@@ -22681,7 +22681,7 @@
                 <a:ea typeface="Inter" pitchFamily="34" charset="-122"/>
                 <a:cs typeface="Inter" pitchFamily="34" charset="-120"/>
               </a:rPr>
-              <a:t>−$11K</a:t>
+              <a:t>−$8K</a:t>
             </a:r>
             <a:endParaRPr lang="en-US" sz="1300" dirty="0"/>
           </a:p>
@@ -22857,7 +22857,7 @@
                 <a:ea typeface="Inter" pitchFamily="34" charset="-122"/>
                 <a:cs typeface="Inter" pitchFamily="34" charset="-120"/>
               </a:rPr>
-              <a:t>−$13K</a:t>
+              <a:t>−$10K</a:t>
             </a:r>
             <a:endParaRPr lang="en-US" sz="1300" dirty="0"/>
           </a:p>
@@ -23033,7 +23033,7 @@
                 <a:ea typeface="Inter" pitchFamily="34" charset="-122"/>
                 <a:cs typeface="Inter" pitchFamily="34" charset="-120"/>
               </a:rPr>
-              <a:t>−$15K</a:t>
+              <a:t>−$11K</a:t>
             </a:r>
             <a:endParaRPr lang="en-US" sz="1300" dirty="0"/>
           </a:p>
@@ -23209,7 +23209,7 @@
                 <a:ea typeface="Inter" pitchFamily="34" charset="-122"/>
                 <a:cs typeface="Inter" pitchFamily="34" charset="-120"/>
               </a:rPr>
-              <a:t>−$18K</a:t>
+              <a:t>−$13K</a:t>
             </a:r>
             <a:endParaRPr lang="en-US" sz="1300" dirty="0"/>
           </a:p>
@@ -23385,7 +23385,7 @@
                 <a:ea typeface="Inter" pitchFamily="34" charset="-122"/>
                 <a:cs typeface="Inter" pitchFamily="34" charset="-120"/>
               </a:rPr>
-              <a:t>−$20K</a:t>
+              <a:t>−$15K</a:t>
             </a:r>
             <a:endParaRPr lang="en-US" sz="1300" dirty="0"/>
           </a:p>
@@ -23561,7 +23561,7 @@
                 <a:ea typeface="Inter" pitchFamily="34" charset="-122"/>
                 <a:cs typeface="Inter" pitchFamily="34" charset="-120"/>
               </a:rPr>
-              <a:t>−$21K</a:t>
+              <a:t>−$15K</a:t>
             </a:r>
             <a:endParaRPr lang="en-US" sz="1300" dirty="0"/>
           </a:p>
@@ -23737,7 +23737,7 @@
                 <a:ea typeface="Inter" pitchFamily="34" charset="-122"/>
                 <a:cs typeface="Inter" pitchFamily="34" charset="-120"/>
               </a:rPr>
-              <a:t>−$21K</a:t>
+              <a:t>−$16K</a:t>
             </a:r>
             <a:endParaRPr lang="en-US" sz="1300" dirty="0"/>
           </a:p>
@@ -23913,7 +23913,7 @@
                 <a:ea typeface="Inter" pitchFamily="34" charset="-122"/>
                 <a:cs typeface="Inter" pitchFamily="34" charset="-120"/>
               </a:rPr>
-              <a:t>−$22K</a:t>
+              <a:t>−$17K</a:t>
             </a:r>
             <a:endParaRPr lang="en-US" sz="1300" dirty="0"/>
           </a:p>
@@ -24089,7 +24089,7 @@
                 <a:ea typeface="Inter" pitchFamily="34" charset="-122"/>
                 <a:cs typeface="Inter" pitchFamily="34" charset="-120"/>
               </a:rPr>
-              <a:t>−$25K</a:t>
+              <a:t>−$19K</a:t>
             </a:r>
             <a:endParaRPr lang="en-US" sz="1300" dirty="0"/>
           </a:p>
@@ -24265,7 +24265,7 @@
                 <a:ea typeface="Inter" pitchFamily="34" charset="-122"/>
                 <a:cs typeface="Inter" pitchFamily="34" charset="-120"/>
               </a:rPr>
-              <a:t>−$32K</a:t>
+              <a:t>−$24K</a:t>
             </a:r>
             <a:endParaRPr lang="en-US" sz="1300" dirty="0"/>
           </a:p>
@@ -24441,7 +24441,7 @@
                 <a:ea typeface="Inter" pitchFamily="34" charset="-122"/>
                 <a:cs typeface="Inter" pitchFamily="34" charset="-120"/>
               </a:rPr>
-              <a:t>−$32K</a:t>
+              <a:t>−$24K</a:t>
             </a:r>
             <a:endParaRPr lang="en-US" sz="1300" dirty="0"/>
           </a:p>
@@ -24617,7 +24617,7 @@
                 <a:ea typeface="Inter" pitchFamily="34" charset="-122"/>
                 <a:cs typeface="Inter" pitchFamily="34" charset="-120"/>
               </a:rPr>
-              <a:t>−$48K</a:t>
+              <a:t>−$36K</a:t>
             </a:r>
             <a:endParaRPr lang="en-US" sz="1300" dirty="0"/>
           </a:p>
@@ -24793,7 +24793,7 @@
                 <a:ea typeface="Inter" pitchFamily="34" charset="-122"/>
                 <a:cs typeface="Inter" pitchFamily="34" charset="-120"/>
               </a:rPr>
-              <a:t>−$53K</a:t>
+              <a:t>−$39K</a:t>
             </a:r>
             <a:endParaRPr lang="en-US" sz="1300" dirty="0"/>
           </a:p>
@@ -24969,7 +24969,7 @@
                 <a:ea typeface="Inter" pitchFamily="34" charset="-122"/>
                 <a:cs typeface="Inter" pitchFamily="34" charset="-120"/>
               </a:rPr>
-              <a:t>−$57K</a:t>
+              <a:t>−$43K</a:t>
             </a:r>
             <a:endParaRPr lang="en-US" sz="1300" dirty="0"/>
           </a:p>
@@ -25145,7 +25145,7 @@
                 <a:ea typeface="Inter" pitchFamily="34" charset="-122"/>
                 <a:cs typeface="Inter" pitchFamily="34" charset="-120"/>
               </a:rPr>
-              <a:t>−$67K</a:t>
+              <a:t>−$51K</a:t>
             </a:r>
             <a:endParaRPr lang="en-US" sz="1300" dirty="0"/>
           </a:p>
@@ -25321,7 +25321,7 @@
                 <a:ea typeface="Inter" pitchFamily="34" charset="-122"/>
                 <a:cs typeface="Inter" pitchFamily="34" charset="-120"/>
               </a:rPr>
-              <a:t>−$74K</a:t>
+              <a:t>−$56K</a:t>
             </a:r>
             <a:endParaRPr lang="en-US" sz="1300" dirty="0"/>
           </a:p>
@@ -25497,7 +25497,7 @@
                 <a:ea typeface="Inter" pitchFamily="34" charset="-122"/>
                 <a:cs typeface="Inter" pitchFamily="34" charset="-120"/>
               </a:rPr>
-              <a:t>−$78K</a:t>
+              <a:t>−$58K</a:t>
             </a:r>
             <a:endParaRPr lang="en-US" sz="1300" dirty="0"/>
           </a:p>
@@ -25673,7 +25673,7 @@
                 <a:ea typeface="Inter" pitchFamily="34" charset="-122"/>
                 <a:cs typeface="Inter" pitchFamily="34" charset="-120"/>
               </a:rPr>
-              <a:t>−$80K</a:t>
+              <a:t>−$60K</a:t>
             </a:r>
             <a:endParaRPr lang="en-US" sz="1300" dirty="0"/>
           </a:p>
@@ -25849,7 +25849,7 @@
                 <a:ea typeface="Inter" pitchFamily="34" charset="-122"/>
                 <a:cs typeface="Inter" pitchFamily="34" charset="-120"/>
               </a:rPr>
-              <a:t>−$151K</a:t>
+              <a:t>−$113K</a:t>
             </a:r>
             <a:endParaRPr lang="en-US" sz="1300" dirty="0"/>
           </a:p>
@@ -25923,7 +25923,7 @@
         <p:spPr>
           <a:xfrm>
             <a:off x="457200" y="6126480"/>
-            <a:ext cx="11274552" cy="356616"/>
+            <a:ext cx="11274552" cy="615696"/>
           </a:xfrm>
           <a:prstGeom prst="rect">
             <a:avLst/>
@@ -25943,7 +25943,7 @@
         <p:spPr>
           <a:xfrm>
             <a:off x="658368" y="6144768"/>
-            <a:ext cx="10927080" cy="320040"/>
+            <a:ext cx="10927080" cy="579120"/>
           </a:xfrm>
           <a:prstGeom prst="rect">
             <a:avLst/>
@@ -25959,7 +25959,7 @@
               <a:buNone/>
             </a:pPr>
             <a:r>
-              <a:rPr lang="en-US" sz="1500" b="1" dirty="0">
+              <a:rPr lang="en-US" sz="1600" b="1" dirty="0">
                 <a:solidFill>
                   <a:srgbClr val="A82B26"/>
                 </a:solidFill>
@@ -25967,9 +25967,9 @@
                 <a:ea typeface="Inter" pitchFamily="34" charset="-122"/>
                 <a:cs typeface="Inter" pitchFamily="34" charset="-120"/>
               </a:rPr>
-              <a:t>21 stores under 10% leave $844,657 a year; 12 are at or above it. Chevy LV is furthest below at −$151K.</a:t>
-            </a:r>
-            <a:endParaRPr lang="en-US" sz="1500" dirty="0"/>
+              <a:t>21 stores under 10% have left $633,493 so far this year; 12 are at or above it. Chevy LV is furthest below at −$113K.</a:t>
+            </a:r>
+            <a:endParaRPr lang="en-US" sz="1600" dirty="0"/>
           </a:p>
         </p:txBody>
       </p:sp>
@@ -26058,7 +26058,7 @@
                 <a:ea typeface="Inter" pitchFamily="34" charset="-122"/>
                 <a:cs typeface="Inter" pitchFamily="34" charset="-120"/>
               </a:rPr>
-              <a:t>OPCODES · JAN–SEP 2026, ANNUALIZED</a:t>
+              <a:t>OPCODES · JAN–SEP 2026 YTD</a:t>
             </a:r>
             <a:endParaRPr lang="en-US" sz="1400" dirty="0"/>
           </a:p>
@@ -26450,7 +26450,7 @@
                 <a:ea typeface="Inter" pitchFamily="34" charset="-122"/>
                 <a:cs typeface="Inter" pitchFamily="34" charset="-120"/>
               </a:rPr>
-              <a:t>+$185K</a:t>
+              <a:t>+$138K</a:t>
             </a:r>
             <a:endParaRPr lang="en-US" sz="1300" dirty="0"/>
           </a:p>
@@ -26626,7 +26626,7 @@
                 <a:ea typeface="Inter" pitchFamily="34" charset="-122"/>
                 <a:cs typeface="Inter" pitchFamily="34" charset="-120"/>
               </a:rPr>
-              <a:t>+$72K</a:t>
+              <a:t>+$54K</a:t>
             </a:r>
             <a:endParaRPr lang="en-US" sz="1300" dirty="0"/>
           </a:p>
@@ -26802,7 +26802,7 @@
                 <a:ea typeface="Inter" pitchFamily="34" charset="-122"/>
                 <a:cs typeface="Inter" pitchFamily="34" charset="-120"/>
               </a:rPr>
-              <a:t>+$51K</a:t>
+              <a:t>+$39K</a:t>
             </a:r>
             <a:endParaRPr lang="en-US" sz="1300" dirty="0"/>
           </a:p>
@@ -26978,7 +26978,7 @@
                 <a:ea typeface="Inter" pitchFamily="34" charset="-122"/>
                 <a:cs typeface="Inter" pitchFamily="34" charset="-120"/>
               </a:rPr>
-              <a:t>+$13K</a:t>
+              <a:t>+$10K</a:t>
             </a:r>
             <a:endParaRPr lang="en-US" sz="1300" dirty="0"/>
           </a:p>
@@ -27154,7 +27154,7 @@
                 <a:ea typeface="Inter" pitchFamily="34" charset="-122"/>
                 <a:cs typeface="Inter" pitchFamily="34" charset="-120"/>
               </a:rPr>
-              <a:t>+$12K</a:t>
+              <a:t>+$9K</a:t>
             </a:r>
             <a:endParaRPr lang="en-US" sz="1300" dirty="0"/>
           </a:p>
@@ -27330,7 +27330,7 @@
                 <a:ea typeface="Inter" pitchFamily="34" charset="-122"/>
                 <a:cs typeface="Inter" pitchFamily="34" charset="-120"/>
               </a:rPr>
-              <a:t>+$4K</a:t>
+              <a:t>+$3K</a:t>
             </a:r>
             <a:endParaRPr lang="en-US" sz="1300" dirty="0"/>
           </a:p>
@@ -27506,7 +27506,7 @@
                 <a:ea typeface="Inter" pitchFamily="34" charset="-122"/>
                 <a:cs typeface="Inter" pitchFamily="34" charset="-120"/>
               </a:rPr>
-              <a:t>+$4K</a:t>
+              <a:t>+$3K</a:t>
             </a:r>
             <a:endParaRPr lang="en-US" sz="1300" dirty="0"/>
           </a:p>
@@ -27682,7 +27682,7 @@
                 <a:ea typeface="Inter" pitchFamily="34" charset="-122"/>
                 <a:cs typeface="Inter" pitchFamily="34" charset="-120"/>
               </a:rPr>
-              <a:t>−$1K</a:t>
+              <a:t>−$905</a:t>
             </a:r>
             <a:endParaRPr lang="en-US" sz="1300" dirty="0"/>
           </a:p>
@@ -27858,7 +27858,7 @@
                 <a:ea typeface="Inter" pitchFamily="34" charset="-122"/>
                 <a:cs typeface="Inter" pitchFamily="34" charset="-120"/>
               </a:rPr>
-              <a:t>−$10K</a:t>
+              <a:t>−$8K</a:t>
             </a:r>
             <a:endParaRPr lang="en-US" sz="1300" dirty="0"/>
           </a:p>
@@ -28034,7 +28034,7 @@
                 <a:ea typeface="Inter" pitchFamily="34" charset="-122"/>
                 <a:cs typeface="Inter" pitchFamily="34" charset="-120"/>
               </a:rPr>
-              <a:t>−$13K</a:t>
+              <a:t>−$10K</a:t>
             </a:r>
             <a:endParaRPr lang="en-US" sz="1300" dirty="0"/>
           </a:p>
@@ -28210,7 +28210,7 @@
                 <a:ea typeface="Inter" pitchFamily="34" charset="-122"/>
                 <a:cs typeface="Inter" pitchFamily="34" charset="-120"/>
               </a:rPr>
-              <a:t>−$18K</a:t>
+              <a:t>−$14K</a:t>
             </a:r>
             <a:endParaRPr lang="en-US" sz="1300" dirty="0"/>
           </a:p>
@@ -28386,7 +28386,7 @@
                 <a:ea typeface="Inter" pitchFamily="34" charset="-122"/>
                 <a:cs typeface="Inter" pitchFamily="34" charset="-120"/>
               </a:rPr>
-              <a:t>−$19K</a:t>
+              <a:t>−$14K</a:t>
             </a:r>
             <a:endParaRPr lang="en-US" sz="1300" dirty="0"/>
           </a:p>
@@ -28562,7 +28562,7 @@
                 <a:ea typeface="Inter" pitchFamily="34" charset="-122"/>
                 <a:cs typeface="Inter" pitchFamily="34" charset="-120"/>
               </a:rPr>
-              <a:t>−$21K</a:t>
+              <a:t>−$16K</a:t>
             </a:r>
             <a:endParaRPr lang="en-US" sz="1300" dirty="0"/>
           </a:p>
@@ -28738,7 +28738,7 @@
                 <a:ea typeface="Inter" pitchFamily="34" charset="-122"/>
                 <a:cs typeface="Inter" pitchFamily="34" charset="-120"/>
               </a:rPr>
-              <a:t>−$24K</a:t>
+              <a:t>−$18K</a:t>
             </a:r>
             <a:endParaRPr lang="en-US" sz="1300" dirty="0"/>
           </a:p>
@@ -28914,7 +28914,7 @@
                 <a:ea typeface="Inter" pitchFamily="34" charset="-122"/>
                 <a:cs typeface="Inter" pitchFamily="34" charset="-120"/>
               </a:rPr>
-              <a:t>−$25K</a:t>
+              <a:t>−$19K</a:t>
             </a:r>
             <a:endParaRPr lang="en-US" sz="1300" dirty="0"/>
           </a:p>
@@ -29090,7 +29090,7 @@
                 <a:ea typeface="Inter" pitchFamily="34" charset="-122"/>
                 <a:cs typeface="Inter" pitchFamily="34" charset="-120"/>
               </a:rPr>
-              <a:t>−$26K</a:t>
+              <a:t>−$20K</a:t>
             </a:r>
             <a:endParaRPr lang="en-US" sz="1300" dirty="0"/>
           </a:p>
@@ -29266,7 +29266,7 @@
                 <a:ea typeface="Inter" pitchFamily="34" charset="-122"/>
                 <a:cs typeface="Inter" pitchFamily="34" charset="-120"/>
               </a:rPr>
-              <a:t>−$29K</a:t>
+              <a:t>−$22K</a:t>
             </a:r>
             <a:endParaRPr lang="en-US" sz="1300" dirty="0"/>
           </a:p>
@@ -29442,7 +29442,7 @@
                 <a:ea typeface="Inter" pitchFamily="34" charset="-122"/>
                 <a:cs typeface="Inter" pitchFamily="34" charset="-120"/>
               </a:rPr>
-              <a:t>−$34K</a:t>
+              <a:t>−$25K</a:t>
             </a:r>
             <a:endParaRPr lang="en-US" sz="1300" dirty="0"/>
           </a:p>
@@ -29618,7 +29618,7 @@
                 <a:ea typeface="Inter" pitchFamily="34" charset="-122"/>
                 <a:cs typeface="Inter" pitchFamily="34" charset="-120"/>
               </a:rPr>
-              <a:t>−$46K</a:t>
+              <a:t>−$34K</a:t>
             </a:r>
             <a:endParaRPr lang="en-US" sz="1300" dirty="0"/>
           </a:p>
@@ -29794,7 +29794,7 @@
                 <a:ea typeface="Inter" pitchFamily="34" charset="-122"/>
                 <a:cs typeface="Inter" pitchFamily="34" charset="-120"/>
               </a:rPr>
-              <a:t>−$51K</a:t>
+              <a:t>−$39K</a:t>
             </a:r>
             <a:endParaRPr lang="en-US" sz="1300" dirty="0"/>
           </a:p>
@@ -29970,7 +29970,7 @@
                 <a:ea typeface="Inter" pitchFamily="34" charset="-122"/>
                 <a:cs typeface="Inter" pitchFamily="34" charset="-120"/>
               </a:rPr>
-              <a:t>−$56K</a:t>
+              <a:t>−$42K</a:t>
             </a:r>
             <a:endParaRPr lang="en-US" sz="1300" dirty="0"/>
           </a:p>
@@ -30146,7 +30146,7 @@
                 <a:ea typeface="Inter" pitchFamily="34" charset="-122"/>
                 <a:cs typeface="Inter" pitchFamily="34" charset="-120"/>
               </a:rPr>
-              <a:t>−$56K</a:t>
+              <a:t>−$42K</a:t>
             </a:r>
             <a:endParaRPr lang="en-US" sz="1300" dirty="0"/>
           </a:p>
@@ -30322,7 +30322,7 @@
                 <a:ea typeface="Inter" pitchFamily="34" charset="-122"/>
                 <a:cs typeface="Inter" pitchFamily="34" charset="-120"/>
               </a:rPr>
-              <a:t>−$60K</a:t>
+              <a:t>−$45K</a:t>
             </a:r>
             <a:endParaRPr lang="en-US" sz="1300" dirty="0"/>
           </a:p>
@@ -30498,7 +30498,7 @@
                 <a:ea typeface="Inter" pitchFamily="34" charset="-122"/>
                 <a:cs typeface="Inter" pitchFamily="34" charset="-120"/>
               </a:rPr>
-              <a:t>−$62K</a:t>
+              <a:t>−$46K</a:t>
             </a:r>
             <a:endParaRPr lang="en-US" sz="1300" dirty="0"/>
           </a:p>
@@ -30674,7 +30674,7 @@
                 <a:ea typeface="Inter" pitchFamily="34" charset="-122"/>
                 <a:cs typeface="Inter" pitchFamily="34" charset="-120"/>
               </a:rPr>
-              <a:t>−$62K</a:t>
+              <a:t>−$47K</a:t>
             </a:r>
             <a:endParaRPr lang="en-US" sz="1300" dirty="0"/>
           </a:p>
@@ -30850,7 +30850,7 @@
                 <a:ea typeface="Inter" pitchFamily="34" charset="-122"/>
                 <a:cs typeface="Inter" pitchFamily="34" charset="-120"/>
               </a:rPr>
-              <a:t>−$64K</a:t>
+              <a:t>−$48K</a:t>
             </a:r>
             <a:endParaRPr lang="en-US" sz="1300" dirty="0"/>
           </a:p>
@@ -31026,7 +31026,7 @@
                 <a:ea typeface="Inter" pitchFamily="34" charset="-122"/>
                 <a:cs typeface="Inter" pitchFamily="34" charset="-120"/>
               </a:rPr>
-              <a:t>−$65K</a:t>
+              <a:t>−$49K</a:t>
             </a:r>
             <a:endParaRPr lang="en-US" sz="1300" dirty="0"/>
           </a:p>
@@ -31202,7 +31202,7 @@
                 <a:ea typeface="Inter" pitchFamily="34" charset="-122"/>
                 <a:cs typeface="Inter" pitchFamily="34" charset="-120"/>
               </a:rPr>
-              <a:t>−$75K</a:t>
+              <a:t>−$56K</a:t>
             </a:r>
             <a:endParaRPr lang="en-US" sz="1300" dirty="0"/>
           </a:p>
@@ -31378,7 +31378,7 @@
                 <a:ea typeface="Inter" pitchFamily="34" charset="-122"/>
                 <a:cs typeface="Inter" pitchFamily="34" charset="-120"/>
               </a:rPr>
-              <a:t>−$76K</a:t>
+              <a:t>−$57K</a:t>
             </a:r>
             <a:endParaRPr lang="en-US" sz="1300" dirty="0"/>
           </a:p>
@@ -31554,7 +31554,7 @@
                 <a:ea typeface="Inter" pitchFamily="34" charset="-122"/>
                 <a:cs typeface="Inter" pitchFamily="34" charset="-120"/>
               </a:rPr>
-              <a:t>−$85K</a:t>
+              <a:t>−$63K</a:t>
             </a:r>
             <a:endParaRPr lang="en-US" sz="1300" dirty="0"/>
           </a:p>
@@ -31730,7 +31730,7 @@
                 <a:ea typeface="Inter" pitchFamily="34" charset="-122"/>
                 <a:cs typeface="Inter" pitchFamily="34" charset="-120"/>
               </a:rPr>
-              <a:t>−$109K</a:t>
+              <a:t>−$82K</a:t>
             </a:r>
             <a:endParaRPr lang="en-US" sz="1300" dirty="0"/>
           </a:p>
@@ -31906,7 +31906,7 @@
                 <a:ea typeface="Inter" pitchFamily="34" charset="-122"/>
                 <a:cs typeface="Inter" pitchFamily="34" charset="-120"/>
               </a:rPr>
-              <a:t>−$129K</a:t>
+              <a:t>−$96K</a:t>
             </a:r>
             <a:endParaRPr lang="en-US" sz="1300" dirty="0"/>
           </a:p>
@@ -32082,7 +32082,7 @@
                 <a:ea typeface="Inter" pitchFamily="34" charset="-122"/>
                 <a:cs typeface="Inter" pitchFamily="34" charset="-120"/>
               </a:rPr>
-              <a:t>−$142K</a:t>
+              <a:t>−$107K</a:t>
             </a:r>
             <a:endParaRPr lang="en-US" sz="1300" dirty="0"/>
           </a:p>
@@ -32156,7 +32156,7 @@
         <p:spPr>
           <a:xfrm>
             <a:off x="457200" y="6126480"/>
-            <a:ext cx="11274552" cy="356616"/>
+            <a:ext cx="11274552" cy="615696"/>
           </a:xfrm>
           <a:prstGeom prst="rect">
             <a:avLst/>
@@ -32176,7 +32176,7 @@
         <p:spPr>
           <a:xfrm>
             <a:off x="658368" y="6144768"/>
-            <a:ext cx="10927080" cy="320040"/>
+            <a:ext cx="10927080" cy="579120"/>
           </a:xfrm>
           <a:prstGeom prst="rect">
             <a:avLst/>
@@ -32192,7 +32192,7 @@
               <a:buNone/>
             </a:pPr>
             <a:r>
-              <a:rPr lang="en-US" sz="1500" b="1" dirty="0">
+              <a:rPr lang="en-US" sz="1600" b="1" dirty="0">
                 <a:solidFill>
                   <a:srgbClr val="A82B26"/>
                 </a:solidFill>
@@ -32200,9 +32200,9 @@
                 <a:ea typeface="Inter" pitchFamily="34" charset="-122"/>
                 <a:cs typeface="Inter" pitchFamily="34" charset="-120"/>
               </a:rPr>
-              <a:t>26 stores under 7.5% leave $1,356,881 a year; 7 are at or above it. Chevy LV is furthest below at −$142K.</a:t>
-            </a:r>
-            <a:endParaRPr lang="en-US" sz="1500" dirty="0"/>
+              <a:t>26 stores under 7.5% have left $1,017,661 so far this year; 7 are at or above it. Chevy LV is furthest below at −$107K.</a:t>
+            </a:r>
+            <a:endParaRPr lang="en-US" sz="1600" dirty="0"/>
           </a:p>
         </p:txBody>
       </p:sp>

--- a/day2-deck/decks/Op Code Missed Opportunity - Review.pptx
+++ b/day2-deck/decks/Op Code Missed Opportunity - Review.pptx
@@ -595,39 +595,39 @@
           <a:p>
             <a:r>
               <a:rPr lang="en-US" dirty="0"/>
-              <a:t>Source: Qlik - Closed Repair Orders. Customer pay, Jan-Sep 2026 by close date, op code report basis. Same-store, INEOS excluded (opened 2026). Services short = benchmark x the store's CP ROs, minus the services it sold. Each service valued at the store's own labor + parts gross per service sold (group average where the store sold fewer than 30), capped at twice the group average because some flagged lines carry other work bundled on them. Alignment, tire balance, brake fluid and fuel system service added together, every store: gross Jan-Sep 2026 above (+) or below (-) the four benchmarks, at the store's own gross per service. Below-benchmark services count against above-benchmark ones here.TOYOTA SPOKANE: −$406K Jan-Sep against the four benchmarks; under 4 of 4
-CHEVY LV: −$356K Jan-Sep against the four benchmarks; under 4 of 4
-TOYOTA FLAGSTAFF: −$267K Jan-Sep against the four benchmarks; under 4 of 4
-TOYOTA HENDERSON: −$227K Jan-Sep against the four benchmarks; under 3 of 4
-KIA LV: −$185K Jan-Sep against the four benchmarks; under 4 of 4
-CDJR POST FALLS: −$184K Jan-Sep against the four benchmarks; under 4 of 4
-TOYOTA PRESCOTT: −$175K Jan-Sep against the four benchmarks; under 4 of 4
-AUDI RENO: −$162K Jan-Sep against the four benchmarks; under 4 of 4
-HONDA FLAGSTAFF: −$150K Jan-Sep against the four benchmarks; under 4 of 4
-NISSAN: −$150K Jan-Sep against the four benchmarks; under 3 of 4
-HONDA SPOKANE: −$140K Jan-Sep against the four benchmarks; under 3 of 4
-LEXUS: −$105K Jan-Sep against the four benchmarks; under 4 of 4
-VW HENDERSON: −$105K Jan-Sep against the four benchmarks; under 4 of 4
-CHEVY GMC BULLHEAD: −$100K Jan-Sep against the four benchmarks; under 4 of 4
-CADILLAC: −$94K Jan-Sep against the four benchmarks; under 4 of 4
-VW ST GEORGE: −$66K Jan-Sep against the four benchmarks; under 4 of 4
-HYUNDAI ST GEORGE: −$61K Jan-Sep against the four benchmarks; under 4 of 4
-GMC PRESCOTT: −$60K Jan-Sep against the four benchmarks; under 4 of 4
-SUBARU LV: −$59K Jan-Sep against the four benchmarks; under 3 of 4
-KIA ST GEORGE: −$53K Jan-Sep against the four benchmarks; under 3 of 4
-LINCOLN: −$48K Jan-Sep against the four benchmarks; under 3 of 4
-SUBARU ST GEORGE: −$41K Jan-Sep against the four benchmarks; under 2 of 4
-LR RENO: −$32K Jan-Sep against the four benchmarks; under 3 of 4
-VOLVO: −$29K Jan-Sep against the four benchmarks; under 3 of 4
-MAZDA: −$28K Jan-Sep against the four benchmarks; under 3 of 4
-AUDI HENDERSON: −$22K Jan-Sep against the four benchmarks; under 3 of 4
-HYUNDAI PRESCOTT: +$23K Jan-Sep against the four benchmarks; under 3 of 4
-ACURA: +$33K Jan-Sep against the four benchmarks; under 1 of 4
-SUBARU PRESCOTT: +$41K Jan-Sep against the four benchmarks; under 2 of 4
-HONDA NORTH: +$45K Jan-Sep against the four benchmarks; under 1 of 4
-LR HENDERSON: +$54K Jan-Sep against the four benchmarks; under 1 of 4
-LR LV: +$151K Jan-Sep against the four benchmarks; under 1 of 4
-HONDA HENDERSON: +$557K Jan-Sep against the four benchmarks; under 0 of 4</a:t>
+              <a:t>Source: Qlik - Closed Repair Orders. Customer pay, Jan-Sep 2026 by close date, op code report basis. Same-store, INEOS excluded (opened 2026). Services short = benchmark x the store's CP ROs, minus the services it sold. Each service valued at the store's own labor + parts gross per service sold (group average where the store sold fewer than 30), capped at twice the group average because some flagged lines carry other work bundled on them. Alignment, tire balance, brake fluid and fuel system service added together, every store: gross Jan-Sep 2026 above (+) or below (-) the four benchmarks, at the store's own gross per service. Opcodes = the four services' opcodes above (+) or below (-) their benchmarks, added together. Below-benchmark services count against above-benchmark ones here.TOYOTA SPOKANE: −$406K, −5,191 opcodes Jan-Sep against the four benchmarks; under 4 of 4
+CHEVY LV: −$356K, −3,177 opcodes Jan-Sep against the four benchmarks; under 4 of 4
+TOYOTA FLAGSTAFF: −$267K, −3,494 opcodes Jan-Sep against the four benchmarks; under 4 of 4
+TOYOTA HENDERSON: −$227K, −3,005 opcodes Jan-Sep against the four benchmarks; under 3 of 4
+KIA LV: −$185K, −1,708 opcodes Jan-Sep against the four benchmarks; under 4 of 4
+CDJR POST FALLS: −$184K, −1,863 opcodes Jan-Sep against the four benchmarks; under 4 of 4
+TOYOTA PRESCOTT: −$175K, −1,906 opcodes Jan-Sep against the four benchmarks; under 4 of 4
+AUDI RENO: −$162K, −1,152 opcodes Jan-Sep against the four benchmarks; under 4 of 4
+HONDA FLAGSTAFF: −$150K, −1,257 opcodes Jan-Sep against the four benchmarks; under 4 of 4
+NISSAN: −$150K, −1,613 opcodes Jan-Sep against the four benchmarks; under 3 of 4
+HONDA SPOKANE: −$140K, −1,717 opcodes Jan-Sep against the four benchmarks; under 3 of 4
+LEXUS: −$105K, −1,068 opcodes Jan-Sep against the four benchmarks; under 4 of 4
+VW HENDERSON: −$105K, −827 opcodes Jan-Sep against the four benchmarks; under 4 of 4
+CHEVY GMC BULLHEAD: −$100K, −1,100 opcodes Jan-Sep against the four benchmarks; under 4 of 4
+CADILLAC: −$94K, −954 opcodes Jan-Sep against the four benchmarks; under 4 of 4
+VW ST GEORGE: −$66K, −640 opcodes Jan-Sep against the four benchmarks; under 4 of 4
+HYUNDAI ST GEORGE: −$61K, −697 opcodes Jan-Sep against the four benchmarks; under 4 of 4
+GMC PRESCOTT: −$60K, −568 opcodes Jan-Sep against the four benchmarks; under 4 of 4
+SUBARU LV: −$59K, −783 opcodes Jan-Sep against the four benchmarks; under 3 of 4
+KIA ST GEORGE: −$53K, −660 opcodes Jan-Sep against the four benchmarks; under 3 of 4
+LINCOLN: −$48K, −569 opcodes Jan-Sep against the four benchmarks; under 3 of 4
+SUBARU ST GEORGE: −$41K, −452 opcodes Jan-Sep against the four benchmarks; under 2 of 4
+LR RENO: −$32K, −83 opcodes Jan-Sep against the four benchmarks; under 3 of 4
+VOLVO: −$29K, −340 opcodes Jan-Sep against the four benchmarks; under 3 of 4
+MAZDA: −$28K, −223 opcodes Jan-Sep against the four benchmarks; under 3 of 4
+AUDI HENDERSON: −$22K, −661 opcodes Jan-Sep against the four benchmarks; under 3 of 4
+HYUNDAI PRESCOTT: +$23K, +97 opcodes Jan-Sep against the four benchmarks; under 3 of 4
+ACURA: +$33K, +228 opcodes Jan-Sep against the four benchmarks; under 1 of 4
+SUBARU PRESCOTT: +$41K, +24 opcodes Jan-Sep against the four benchmarks; under 2 of 4
+HONDA NORTH: +$45K, +70 opcodes Jan-Sep against the four benchmarks; under 1 of 4
+LR HENDERSON: +$54K, +324 opcodes Jan-Sep against the four benchmarks; under 1 of 4
+LR LV: +$151K, +456 opcodes Jan-Sep against the four benchmarks; under 1 of 4
+HONDA HENDERSON: +$557K, +4,476 opcodes Jan-Sep against the four benchmarks; under 0 of 4</a:t>
             </a:r>
             <a:endParaRPr lang="en-US" dirty="0"/>
           </a:p>
@@ -2564,7 +2564,7 @@
         </p:nvSpPr>
         <p:spPr>
           <a:xfrm>
-            <a:off x="4818888" y="1316736"/>
+            <a:off x="3950208" y="1316736"/>
             <a:ext cx="1097280" cy="329184"/>
           </a:xfrm>
           <a:prstGeom prst="rect">
@@ -2597,13 +2597,52 @@
       </p:sp>
       <p:sp>
         <p:nvSpPr>
-          <p:cNvPr id="7" name="Shape 5"/>
+          <p:cNvPr id="7" name="Text 5"/>
+          <p:cNvSpPr txBox="1"/>
+          <p:nvPr/>
+        </p:nvSpPr>
+        <p:spPr>
+          <a:xfrm>
+            <a:off x="5047488" y="1316736"/>
+            <a:ext cx="868680" cy="329184"/>
+          </a:xfrm>
+          <a:prstGeom prst="rect">
+            <a:avLst/>
+          </a:prstGeom>
+          <a:noFill/>
+          <a:ln/>
+        </p:spPr>
+        <p:txBody>
+          <a:bodyPr wrap="square" lIns="0" tIns="0" rIns="0" bIns="0" rtlCol="0" anchor="ctr"/>
+          <a:lstStyle/>
+          <a:p>
+            <a:pPr algn="r" indent="0" marL="0">
+              <a:buNone/>
+            </a:pPr>
+            <a:r>
+              <a:rPr lang="en-US" sz="1400" b="1" dirty="0">
+                <a:solidFill>
+                  <a:srgbClr val="595959"/>
+                </a:solidFill>
+                <a:latin typeface="Inter" pitchFamily="34" charset="0"/>
+                <a:ea typeface="Inter" pitchFamily="34" charset="-122"/>
+                <a:cs typeface="Inter" pitchFamily="34" charset="-120"/>
+              </a:rPr>
+              <a:t>Opcodes</a:t>
+            </a:r>
+            <a:endParaRPr lang="en-US" sz="1400" dirty="0"/>
+          </a:p>
+        </p:txBody>
+      </p:sp>
+      <p:sp>
+        <p:nvSpPr>
+          <p:cNvPr id="8" name="Shape 6"/>
           <p:cNvSpPr/>
           <p:nvPr/>
         </p:nvSpPr>
         <p:spPr>
           <a:xfrm>
-            <a:off x="3795511" y="1700784"/>
+            <a:off x="3429510" y="1700784"/>
             <a:ext cx="10973" cy="4224528"/>
           </a:xfrm>
           <a:prstGeom prst="rect">
@@ -2617,13 +2656,13 @@
       </p:sp>
       <p:sp>
         <p:nvSpPr>
-          <p:cNvPr id="8" name="Text 6"/>
-          <p:cNvSpPr txBox="1"/>
-          <p:nvPr/>
-        </p:nvSpPr>
-        <p:spPr>
-          <a:xfrm>
-            <a:off x="10369296" y="1316736"/>
+          <p:cNvPr id="9" name="Text 7"/>
+          <p:cNvSpPr txBox="1"/>
+          <p:nvPr/>
+        </p:nvSpPr>
+        <p:spPr>
+          <a:xfrm>
+            <a:off x="9500616" y="1316736"/>
             <a:ext cx="1097280" cy="329184"/>
           </a:xfrm>
           <a:prstGeom prst="rect">
@@ -2656,13 +2695,52 @@
       </p:sp>
       <p:sp>
         <p:nvSpPr>
-          <p:cNvPr id="9" name="Shape 7"/>
+          <p:cNvPr id="10" name="Text 8"/>
+          <p:cNvSpPr txBox="1"/>
+          <p:nvPr/>
+        </p:nvSpPr>
+        <p:spPr>
+          <a:xfrm>
+            <a:off x="10597896" y="1316736"/>
+            <a:ext cx="868680" cy="329184"/>
+          </a:xfrm>
+          <a:prstGeom prst="rect">
+            <a:avLst/>
+          </a:prstGeom>
+          <a:noFill/>
+          <a:ln/>
+        </p:spPr>
+        <p:txBody>
+          <a:bodyPr wrap="square" lIns="0" tIns="0" rIns="0" bIns="0" rtlCol="0" anchor="ctr"/>
+          <a:lstStyle/>
+          <a:p>
+            <a:pPr algn="r" indent="0" marL="0">
+              <a:buNone/>
+            </a:pPr>
+            <a:r>
+              <a:rPr lang="en-US" sz="1400" b="1" dirty="0">
+                <a:solidFill>
+                  <a:srgbClr val="595959"/>
+                </a:solidFill>
+                <a:latin typeface="Inter" pitchFamily="34" charset="0"/>
+                <a:ea typeface="Inter" pitchFamily="34" charset="-122"/>
+                <a:cs typeface="Inter" pitchFamily="34" charset="-120"/>
+              </a:rPr>
+              <a:t>Opcodes</a:t>
+            </a:r>
+            <a:endParaRPr lang="en-US" sz="1400" dirty="0"/>
+          </a:p>
+        </p:txBody>
+      </p:sp>
+      <p:sp>
+        <p:nvSpPr>
+          <p:cNvPr id="11" name="Shape 9"/>
           <p:cNvSpPr/>
           <p:nvPr/>
         </p:nvSpPr>
         <p:spPr>
           <a:xfrm>
-            <a:off x="9345919" y="1700784"/>
+            <a:off x="8979918" y="1700784"/>
             <a:ext cx="10973" cy="3976026"/>
           </a:xfrm>
           <a:prstGeom prst="rect">
@@ -2676,7 +2754,7 @@
       </p:sp>
       <p:sp>
         <p:nvSpPr>
-          <p:cNvPr id="10" name="Text 8"/>
+          <p:cNvPr id="12" name="Text 10"/>
           <p:cNvSpPr txBox="1"/>
           <p:nvPr/>
         </p:nvSpPr>
@@ -2715,7 +2793,7 @@
       </p:sp>
       <p:sp>
         <p:nvSpPr>
-          <p:cNvPr id="11" name="Text 9"/>
+          <p:cNvPr id="13" name="Text 11"/>
           <p:cNvSpPr txBox="1"/>
           <p:nvPr/>
         </p:nvSpPr>
@@ -2754,14 +2832,14 @@
       </p:sp>
       <p:sp>
         <p:nvSpPr>
-          <p:cNvPr id="12" name="Shape 10"/>
+          <p:cNvPr id="14" name="Shape 12"/>
           <p:cNvSpPr/>
           <p:nvPr/>
         </p:nvSpPr>
         <p:spPr>
           <a:xfrm>
-            <a:off x="3800997" y="1756697"/>
-            <a:ext cx="963027" cy="136676"/>
+            <a:off x="3434996" y="1756697"/>
+            <a:ext cx="460348" cy="136676"/>
           </a:xfrm>
           <a:prstGeom prst="rect">
             <a:avLst/>
@@ -2774,13 +2852,13 @@
       </p:sp>
       <p:sp>
         <p:nvSpPr>
-          <p:cNvPr id="13" name="Text 11"/>
-          <p:cNvSpPr txBox="1"/>
-          <p:nvPr/>
-        </p:nvSpPr>
-        <p:spPr>
-          <a:xfrm>
-            <a:off x="4818888" y="1700784"/>
+          <p:cNvPr id="15" name="Text 13"/>
+          <p:cNvSpPr txBox="1"/>
+          <p:nvPr/>
+        </p:nvSpPr>
+        <p:spPr>
+          <a:xfrm>
+            <a:off x="3950208" y="1700784"/>
             <a:ext cx="1097280" cy="248502"/>
           </a:xfrm>
           <a:prstGeom prst="rect">
@@ -2813,7 +2891,46 @@
       </p:sp>
       <p:sp>
         <p:nvSpPr>
-          <p:cNvPr id="14" name="Text 12"/>
+          <p:cNvPr id="16" name="Text 14"/>
+          <p:cNvSpPr txBox="1"/>
+          <p:nvPr/>
+        </p:nvSpPr>
+        <p:spPr>
+          <a:xfrm>
+            <a:off x="5047488" y="1700784"/>
+            <a:ext cx="868680" cy="248502"/>
+          </a:xfrm>
+          <a:prstGeom prst="rect">
+            <a:avLst/>
+          </a:prstGeom>
+          <a:noFill/>
+          <a:ln/>
+        </p:spPr>
+        <p:txBody>
+          <a:bodyPr wrap="square" lIns="0" tIns="0" rIns="0" bIns="0" rtlCol="0" anchor="ctr"/>
+          <a:lstStyle/>
+          <a:p>
+            <a:pPr algn="r" indent="0" marL="0">
+              <a:buNone/>
+            </a:pPr>
+            <a:r>
+              <a:rPr lang="en-US" sz="1300" dirty="0">
+                <a:solidFill>
+                  <a:srgbClr val="595959"/>
+                </a:solidFill>
+                <a:latin typeface="Inter" pitchFamily="34" charset="0"/>
+                <a:ea typeface="Inter" pitchFamily="34" charset="-122"/>
+                <a:cs typeface="Inter" pitchFamily="34" charset="-120"/>
+              </a:rPr>
+              <a:t>+4,476</a:t>
+            </a:r>
+            <a:endParaRPr lang="en-US" sz="1300" dirty="0"/>
+          </a:p>
+        </p:txBody>
+      </p:sp>
+      <p:sp>
+        <p:nvSpPr>
+          <p:cNvPr id="17" name="Text 15"/>
           <p:cNvSpPr txBox="1"/>
           <p:nvPr/>
         </p:nvSpPr>
@@ -2852,7 +2969,7 @@
       </p:sp>
       <p:sp>
         <p:nvSpPr>
-          <p:cNvPr id="15" name="Text 13"/>
+          <p:cNvPr id="18" name="Text 16"/>
           <p:cNvSpPr txBox="1"/>
           <p:nvPr/>
         </p:nvSpPr>
@@ -2891,14 +3008,14 @@
       </p:sp>
       <p:sp>
         <p:nvSpPr>
-          <p:cNvPr id="16" name="Shape 14"/>
+          <p:cNvPr id="19" name="Shape 17"/>
           <p:cNvSpPr/>
           <p:nvPr/>
         </p:nvSpPr>
         <p:spPr>
           <a:xfrm>
-            <a:off x="3800997" y="2005199"/>
-            <a:ext cx="260306" cy="136676"/>
+            <a:off x="3434996" y="2005199"/>
+            <a:ext cx="124432" cy="136676"/>
           </a:xfrm>
           <a:prstGeom prst="rect">
             <a:avLst/>
@@ -2911,13 +3028,13 @@
       </p:sp>
       <p:sp>
         <p:nvSpPr>
-          <p:cNvPr id="17" name="Text 15"/>
-          <p:cNvSpPr txBox="1"/>
-          <p:nvPr/>
-        </p:nvSpPr>
-        <p:spPr>
-          <a:xfrm>
-            <a:off x="4818888" y="1949286"/>
+          <p:cNvPr id="20" name="Text 18"/>
+          <p:cNvSpPr txBox="1"/>
+          <p:nvPr/>
+        </p:nvSpPr>
+        <p:spPr>
+          <a:xfrm>
+            <a:off x="3950208" y="1949286"/>
             <a:ext cx="1097280" cy="248502"/>
           </a:xfrm>
           <a:prstGeom prst="rect">
@@ -2950,7 +3067,46 @@
       </p:sp>
       <p:sp>
         <p:nvSpPr>
-          <p:cNvPr id="18" name="Text 16"/>
+          <p:cNvPr id="21" name="Text 19"/>
+          <p:cNvSpPr txBox="1"/>
+          <p:nvPr/>
+        </p:nvSpPr>
+        <p:spPr>
+          <a:xfrm>
+            <a:off x="5047488" y="1949286"/>
+            <a:ext cx="868680" cy="248502"/>
+          </a:xfrm>
+          <a:prstGeom prst="rect">
+            <a:avLst/>
+          </a:prstGeom>
+          <a:noFill/>
+          <a:ln/>
+        </p:spPr>
+        <p:txBody>
+          <a:bodyPr wrap="square" lIns="0" tIns="0" rIns="0" bIns="0" rtlCol="0" anchor="ctr"/>
+          <a:lstStyle/>
+          <a:p>
+            <a:pPr algn="r" indent="0" marL="0">
+              <a:buNone/>
+            </a:pPr>
+            <a:r>
+              <a:rPr lang="en-US" sz="1300" dirty="0">
+                <a:solidFill>
+                  <a:srgbClr val="595959"/>
+                </a:solidFill>
+                <a:latin typeface="Inter" pitchFamily="34" charset="0"/>
+                <a:ea typeface="Inter" pitchFamily="34" charset="-122"/>
+                <a:cs typeface="Inter" pitchFamily="34" charset="-120"/>
+              </a:rPr>
+              <a:t>+456</a:t>
+            </a:r>
+            <a:endParaRPr lang="en-US" sz="1300" dirty="0"/>
+          </a:p>
+        </p:txBody>
+      </p:sp>
+      <p:sp>
+        <p:nvSpPr>
+          <p:cNvPr id="22" name="Text 20"/>
           <p:cNvSpPr txBox="1"/>
           <p:nvPr/>
         </p:nvSpPr>
@@ -2989,7 +3145,7 @@
       </p:sp>
       <p:sp>
         <p:nvSpPr>
-          <p:cNvPr id="19" name="Text 17"/>
+          <p:cNvPr id="23" name="Text 21"/>
           <p:cNvSpPr txBox="1"/>
           <p:nvPr/>
         </p:nvSpPr>
@@ -3028,14 +3184,14 @@
       </p:sp>
       <p:sp>
         <p:nvSpPr>
-          <p:cNvPr id="20" name="Shape 18"/>
+          <p:cNvPr id="24" name="Shape 22"/>
           <p:cNvSpPr/>
           <p:nvPr/>
         </p:nvSpPr>
         <p:spPr>
           <a:xfrm>
-            <a:off x="3800997" y="2253700"/>
-            <a:ext cx="92755" cy="136676"/>
+            <a:off x="3434996" y="2253700"/>
+            <a:ext cx="44339" cy="136676"/>
           </a:xfrm>
           <a:prstGeom prst="rect">
             <a:avLst/>
@@ -3048,13 +3204,13 @@
       </p:sp>
       <p:sp>
         <p:nvSpPr>
-          <p:cNvPr id="21" name="Text 19"/>
-          <p:cNvSpPr txBox="1"/>
-          <p:nvPr/>
-        </p:nvSpPr>
-        <p:spPr>
-          <a:xfrm>
-            <a:off x="4818888" y="2197787"/>
+          <p:cNvPr id="25" name="Text 23"/>
+          <p:cNvSpPr txBox="1"/>
+          <p:nvPr/>
+        </p:nvSpPr>
+        <p:spPr>
+          <a:xfrm>
+            <a:off x="3950208" y="2197787"/>
             <a:ext cx="1097280" cy="248502"/>
           </a:xfrm>
           <a:prstGeom prst="rect">
@@ -3087,7 +3243,46 @@
       </p:sp>
       <p:sp>
         <p:nvSpPr>
-          <p:cNvPr id="22" name="Text 20"/>
+          <p:cNvPr id="26" name="Text 24"/>
+          <p:cNvSpPr txBox="1"/>
+          <p:nvPr/>
+        </p:nvSpPr>
+        <p:spPr>
+          <a:xfrm>
+            <a:off x="5047488" y="2197787"/>
+            <a:ext cx="868680" cy="248502"/>
+          </a:xfrm>
+          <a:prstGeom prst="rect">
+            <a:avLst/>
+          </a:prstGeom>
+          <a:noFill/>
+          <a:ln/>
+        </p:spPr>
+        <p:txBody>
+          <a:bodyPr wrap="square" lIns="0" tIns="0" rIns="0" bIns="0" rtlCol="0" anchor="ctr"/>
+          <a:lstStyle/>
+          <a:p>
+            <a:pPr algn="r" indent="0" marL="0">
+              <a:buNone/>
+            </a:pPr>
+            <a:r>
+              <a:rPr lang="en-US" sz="1300" dirty="0">
+                <a:solidFill>
+                  <a:srgbClr val="595959"/>
+                </a:solidFill>
+                <a:latin typeface="Inter" pitchFamily="34" charset="0"/>
+                <a:ea typeface="Inter" pitchFamily="34" charset="-122"/>
+                <a:cs typeface="Inter" pitchFamily="34" charset="-120"/>
+              </a:rPr>
+              <a:t>+324</a:t>
+            </a:r>
+            <a:endParaRPr lang="en-US" sz="1300" dirty="0"/>
+          </a:p>
+        </p:txBody>
+      </p:sp>
+      <p:sp>
+        <p:nvSpPr>
+          <p:cNvPr id="27" name="Text 25"/>
           <p:cNvSpPr txBox="1"/>
           <p:nvPr/>
         </p:nvSpPr>
@@ -3126,7 +3321,7 @@
       </p:sp>
       <p:sp>
         <p:nvSpPr>
-          <p:cNvPr id="23" name="Text 21"/>
+          <p:cNvPr id="28" name="Text 26"/>
           <p:cNvSpPr txBox="1"/>
           <p:nvPr/>
         </p:nvSpPr>
@@ -3165,14 +3360,14 @@
       </p:sp>
       <p:sp>
         <p:nvSpPr>
-          <p:cNvPr id="24" name="Shape 22"/>
+          <p:cNvPr id="29" name="Shape 27"/>
           <p:cNvSpPr/>
           <p:nvPr/>
         </p:nvSpPr>
         <p:spPr>
           <a:xfrm>
-            <a:off x="3800997" y="2502202"/>
-            <a:ext cx="77707" cy="136676"/>
+            <a:off x="3434996" y="2502202"/>
+            <a:ext cx="37145" cy="136676"/>
           </a:xfrm>
           <a:prstGeom prst="rect">
             <a:avLst/>
@@ -3185,13 +3380,13 @@
       </p:sp>
       <p:sp>
         <p:nvSpPr>
-          <p:cNvPr id="25" name="Text 23"/>
-          <p:cNvSpPr txBox="1"/>
-          <p:nvPr/>
-        </p:nvSpPr>
-        <p:spPr>
-          <a:xfrm>
-            <a:off x="4818888" y="2446289"/>
+          <p:cNvPr id="30" name="Text 28"/>
+          <p:cNvSpPr txBox="1"/>
+          <p:nvPr/>
+        </p:nvSpPr>
+        <p:spPr>
+          <a:xfrm>
+            <a:off x="3950208" y="2446289"/>
             <a:ext cx="1097280" cy="248502"/>
           </a:xfrm>
           <a:prstGeom prst="rect">
@@ -3224,7 +3419,46 @@
       </p:sp>
       <p:sp>
         <p:nvSpPr>
-          <p:cNvPr id="26" name="Text 24"/>
+          <p:cNvPr id="31" name="Text 29"/>
+          <p:cNvSpPr txBox="1"/>
+          <p:nvPr/>
+        </p:nvSpPr>
+        <p:spPr>
+          <a:xfrm>
+            <a:off x="5047488" y="2446289"/>
+            <a:ext cx="868680" cy="248502"/>
+          </a:xfrm>
+          <a:prstGeom prst="rect">
+            <a:avLst/>
+          </a:prstGeom>
+          <a:noFill/>
+          <a:ln/>
+        </p:spPr>
+        <p:txBody>
+          <a:bodyPr wrap="square" lIns="0" tIns="0" rIns="0" bIns="0" rtlCol="0" anchor="ctr"/>
+          <a:lstStyle/>
+          <a:p>
+            <a:pPr algn="r" indent="0" marL="0">
+              <a:buNone/>
+            </a:pPr>
+            <a:r>
+              <a:rPr lang="en-US" sz="1300" dirty="0">
+                <a:solidFill>
+                  <a:srgbClr val="595959"/>
+                </a:solidFill>
+                <a:latin typeface="Inter" pitchFamily="34" charset="0"/>
+                <a:ea typeface="Inter" pitchFamily="34" charset="-122"/>
+                <a:cs typeface="Inter" pitchFamily="34" charset="-120"/>
+              </a:rPr>
+              <a:t>+70</a:t>
+            </a:r>
+            <a:endParaRPr lang="en-US" sz="1300" dirty="0"/>
+          </a:p>
+        </p:txBody>
+      </p:sp>
+      <p:sp>
+        <p:nvSpPr>
+          <p:cNvPr id="32" name="Text 30"/>
           <p:cNvSpPr txBox="1"/>
           <p:nvPr/>
         </p:nvSpPr>
@@ -3263,7 +3497,7 @@
       </p:sp>
       <p:sp>
         <p:nvSpPr>
-          <p:cNvPr id="27" name="Text 25"/>
+          <p:cNvPr id="33" name="Text 31"/>
           <p:cNvSpPr txBox="1"/>
           <p:nvPr/>
         </p:nvSpPr>
@@ -3302,14 +3536,14 @@
       </p:sp>
       <p:sp>
         <p:nvSpPr>
-          <p:cNvPr id="28" name="Shape 26"/>
+          <p:cNvPr id="34" name="Shape 32"/>
           <p:cNvSpPr/>
           <p:nvPr/>
         </p:nvSpPr>
         <p:spPr>
           <a:xfrm>
-            <a:off x="3800997" y="2750703"/>
-            <a:ext cx="71427" cy="136676"/>
+            <a:off x="3434996" y="2750703"/>
+            <a:ext cx="34144" cy="136676"/>
           </a:xfrm>
           <a:prstGeom prst="rect">
             <a:avLst/>
@@ -3322,13 +3556,13 @@
       </p:sp>
       <p:sp>
         <p:nvSpPr>
-          <p:cNvPr id="29" name="Text 27"/>
-          <p:cNvSpPr txBox="1"/>
-          <p:nvPr/>
-        </p:nvSpPr>
-        <p:spPr>
-          <a:xfrm>
-            <a:off x="4818888" y="2694791"/>
+          <p:cNvPr id="35" name="Text 33"/>
+          <p:cNvSpPr txBox="1"/>
+          <p:nvPr/>
+        </p:nvSpPr>
+        <p:spPr>
+          <a:xfrm>
+            <a:off x="3950208" y="2694791"/>
             <a:ext cx="1097280" cy="248502"/>
           </a:xfrm>
           <a:prstGeom prst="rect">
@@ -3361,7 +3595,46 @@
       </p:sp>
       <p:sp>
         <p:nvSpPr>
-          <p:cNvPr id="30" name="Text 28"/>
+          <p:cNvPr id="36" name="Text 34"/>
+          <p:cNvSpPr txBox="1"/>
+          <p:nvPr/>
+        </p:nvSpPr>
+        <p:spPr>
+          <a:xfrm>
+            <a:off x="5047488" y="2694791"/>
+            <a:ext cx="868680" cy="248502"/>
+          </a:xfrm>
+          <a:prstGeom prst="rect">
+            <a:avLst/>
+          </a:prstGeom>
+          <a:noFill/>
+          <a:ln/>
+        </p:spPr>
+        <p:txBody>
+          <a:bodyPr wrap="square" lIns="0" tIns="0" rIns="0" bIns="0" rtlCol="0" anchor="ctr"/>
+          <a:lstStyle/>
+          <a:p>
+            <a:pPr algn="r" indent="0" marL="0">
+              <a:buNone/>
+            </a:pPr>
+            <a:r>
+              <a:rPr lang="en-US" sz="1300" dirty="0">
+                <a:solidFill>
+                  <a:srgbClr val="595959"/>
+                </a:solidFill>
+                <a:latin typeface="Inter" pitchFamily="34" charset="0"/>
+                <a:ea typeface="Inter" pitchFamily="34" charset="-122"/>
+                <a:cs typeface="Inter" pitchFamily="34" charset="-120"/>
+              </a:rPr>
+              <a:t>+24</a:t>
+            </a:r>
+            <a:endParaRPr lang="en-US" sz="1300" dirty="0"/>
+          </a:p>
+        </p:txBody>
+      </p:sp>
+      <p:sp>
+        <p:nvSpPr>
+          <p:cNvPr id="37" name="Text 35"/>
           <p:cNvSpPr txBox="1"/>
           <p:nvPr/>
         </p:nvSpPr>
@@ -3400,7 +3673,7 @@
       </p:sp>
       <p:sp>
         <p:nvSpPr>
-          <p:cNvPr id="31" name="Text 29"/>
+          <p:cNvPr id="38" name="Text 36"/>
           <p:cNvSpPr txBox="1"/>
           <p:nvPr/>
         </p:nvSpPr>
@@ -3439,14 +3712,14 @@
       </p:sp>
       <p:sp>
         <p:nvSpPr>
-          <p:cNvPr id="32" name="Shape 30"/>
+          <p:cNvPr id="39" name="Shape 37"/>
           <p:cNvSpPr/>
           <p:nvPr/>
         </p:nvSpPr>
         <p:spPr>
           <a:xfrm>
-            <a:off x="3800997" y="2999205"/>
-            <a:ext cx="57698" cy="136676"/>
+            <a:off x="3434996" y="2999205"/>
+            <a:ext cx="27581" cy="136676"/>
           </a:xfrm>
           <a:prstGeom prst="rect">
             <a:avLst/>
@@ -3459,13 +3732,13 @@
       </p:sp>
       <p:sp>
         <p:nvSpPr>
-          <p:cNvPr id="33" name="Text 31"/>
-          <p:cNvSpPr txBox="1"/>
-          <p:nvPr/>
-        </p:nvSpPr>
-        <p:spPr>
-          <a:xfrm>
-            <a:off x="4818888" y="2943292"/>
+          <p:cNvPr id="40" name="Text 38"/>
+          <p:cNvSpPr txBox="1"/>
+          <p:nvPr/>
+        </p:nvSpPr>
+        <p:spPr>
+          <a:xfrm>
+            <a:off x="3950208" y="2943292"/>
             <a:ext cx="1097280" cy="248502"/>
           </a:xfrm>
           <a:prstGeom prst="rect">
@@ -3498,7 +3771,46 @@
       </p:sp>
       <p:sp>
         <p:nvSpPr>
-          <p:cNvPr id="34" name="Text 32"/>
+          <p:cNvPr id="41" name="Text 39"/>
+          <p:cNvSpPr txBox="1"/>
+          <p:nvPr/>
+        </p:nvSpPr>
+        <p:spPr>
+          <a:xfrm>
+            <a:off x="5047488" y="2943292"/>
+            <a:ext cx="868680" cy="248502"/>
+          </a:xfrm>
+          <a:prstGeom prst="rect">
+            <a:avLst/>
+          </a:prstGeom>
+          <a:noFill/>
+          <a:ln/>
+        </p:spPr>
+        <p:txBody>
+          <a:bodyPr wrap="square" lIns="0" tIns="0" rIns="0" bIns="0" rtlCol="0" anchor="ctr"/>
+          <a:lstStyle/>
+          <a:p>
+            <a:pPr algn="r" indent="0" marL="0">
+              <a:buNone/>
+            </a:pPr>
+            <a:r>
+              <a:rPr lang="en-US" sz="1300" dirty="0">
+                <a:solidFill>
+                  <a:srgbClr val="595959"/>
+                </a:solidFill>
+                <a:latin typeface="Inter" pitchFamily="34" charset="0"/>
+                <a:ea typeface="Inter" pitchFamily="34" charset="-122"/>
+                <a:cs typeface="Inter" pitchFamily="34" charset="-120"/>
+              </a:rPr>
+              <a:t>+228</a:t>
+            </a:r>
+            <a:endParaRPr lang="en-US" sz="1300" dirty="0"/>
+          </a:p>
+        </p:txBody>
+      </p:sp>
+      <p:sp>
+        <p:nvSpPr>
+          <p:cNvPr id="42" name="Text 40"/>
           <p:cNvSpPr txBox="1"/>
           <p:nvPr/>
         </p:nvSpPr>
@@ -3537,7 +3849,7 @@
       </p:sp>
       <p:sp>
         <p:nvSpPr>
-          <p:cNvPr id="35" name="Text 33"/>
+          <p:cNvPr id="43" name="Text 41"/>
           <p:cNvSpPr txBox="1"/>
           <p:nvPr/>
         </p:nvSpPr>
@@ -3576,14 +3888,14 @@
       </p:sp>
       <p:sp>
         <p:nvSpPr>
-          <p:cNvPr id="36" name="Shape 34"/>
+          <p:cNvPr id="44" name="Shape 42"/>
           <p:cNvSpPr/>
           <p:nvPr/>
         </p:nvSpPr>
         <p:spPr>
           <a:xfrm>
-            <a:off x="3800997" y="3247707"/>
-            <a:ext cx="40337" cy="136676"/>
+            <a:off x="3434996" y="3247707"/>
+            <a:ext cx="19282" cy="136676"/>
           </a:xfrm>
           <a:prstGeom prst="rect">
             <a:avLst/>
@@ -3596,13 +3908,13 @@
       </p:sp>
       <p:sp>
         <p:nvSpPr>
-          <p:cNvPr id="37" name="Text 35"/>
-          <p:cNvSpPr txBox="1"/>
-          <p:nvPr/>
-        </p:nvSpPr>
-        <p:spPr>
-          <a:xfrm>
-            <a:off x="4818888" y="3191794"/>
+          <p:cNvPr id="45" name="Text 43"/>
+          <p:cNvSpPr txBox="1"/>
+          <p:nvPr/>
+        </p:nvSpPr>
+        <p:spPr>
+          <a:xfrm>
+            <a:off x="3950208" y="3191794"/>
             <a:ext cx="1097280" cy="248502"/>
           </a:xfrm>
           <a:prstGeom prst="rect">
@@ -3635,7 +3947,46 @@
       </p:sp>
       <p:sp>
         <p:nvSpPr>
-          <p:cNvPr id="38" name="Text 36"/>
+          <p:cNvPr id="46" name="Text 44"/>
+          <p:cNvSpPr txBox="1"/>
+          <p:nvPr/>
+        </p:nvSpPr>
+        <p:spPr>
+          <a:xfrm>
+            <a:off x="5047488" y="3191794"/>
+            <a:ext cx="868680" cy="248502"/>
+          </a:xfrm>
+          <a:prstGeom prst="rect">
+            <a:avLst/>
+          </a:prstGeom>
+          <a:noFill/>
+          <a:ln/>
+        </p:spPr>
+        <p:txBody>
+          <a:bodyPr wrap="square" lIns="0" tIns="0" rIns="0" bIns="0" rtlCol="0" anchor="ctr"/>
+          <a:lstStyle/>
+          <a:p>
+            <a:pPr algn="r" indent="0" marL="0">
+              <a:buNone/>
+            </a:pPr>
+            <a:r>
+              <a:rPr lang="en-US" sz="1300" dirty="0">
+                <a:solidFill>
+                  <a:srgbClr val="595959"/>
+                </a:solidFill>
+                <a:latin typeface="Inter" pitchFamily="34" charset="0"/>
+                <a:ea typeface="Inter" pitchFamily="34" charset="-122"/>
+                <a:cs typeface="Inter" pitchFamily="34" charset="-120"/>
+              </a:rPr>
+              <a:t>+97</a:t>
+            </a:r>
+            <a:endParaRPr lang="en-US" sz="1300" dirty="0"/>
+          </a:p>
+        </p:txBody>
+      </p:sp>
+      <p:sp>
+        <p:nvSpPr>
+          <p:cNvPr id="47" name="Text 45"/>
           <p:cNvSpPr txBox="1"/>
           <p:nvPr/>
         </p:nvSpPr>
@@ -3674,7 +4025,7 @@
       </p:sp>
       <p:sp>
         <p:nvSpPr>
-          <p:cNvPr id="39" name="Text 37"/>
+          <p:cNvPr id="48" name="Text 46"/>
           <p:cNvSpPr txBox="1"/>
           <p:nvPr/>
         </p:nvSpPr>
@@ -3713,14 +4064,14 @@
       </p:sp>
       <p:sp>
         <p:nvSpPr>
-          <p:cNvPr id="40" name="Shape 38"/>
+          <p:cNvPr id="49" name="Shape 47"/>
           <p:cNvSpPr/>
           <p:nvPr/>
         </p:nvSpPr>
         <p:spPr>
           <a:xfrm>
-            <a:off x="3762731" y="3496208"/>
-            <a:ext cx="38266" cy="136676"/>
+            <a:off x="3416704" y="3496208"/>
+            <a:ext cx="18292" cy="136676"/>
           </a:xfrm>
           <a:prstGeom prst="rect">
             <a:avLst/>
@@ -3733,13 +4084,13 @@
       </p:sp>
       <p:sp>
         <p:nvSpPr>
-          <p:cNvPr id="41" name="Text 39"/>
-          <p:cNvSpPr txBox="1"/>
-          <p:nvPr/>
-        </p:nvSpPr>
-        <p:spPr>
-          <a:xfrm>
-            <a:off x="4818888" y="3440296"/>
+          <p:cNvPr id="50" name="Text 48"/>
+          <p:cNvSpPr txBox="1"/>
+          <p:nvPr/>
+        </p:nvSpPr>
+        <p:spPr>
+          <a:xfrm>
+            <a:off x="3950208" y="3440296"/>
             <a:ext cx="1097280" cy="248502"/>
           </a:xfrm>
           <a:prstGeom prst="rect">
@@ -3772,7 +4123,46 @@
       </p:sp>
       <p:sp>
         <p:nvSpPr>
-          <p:cNvPr id="42" name="Text 40"/>
+          <p:cNvPr id="51" name="Text 49"/>
+          <p:cNvSpPr txBox="1"/>
+          <p:nvPr/>
+        </p:nvSpPr>
+        <p:spPr>
+          <a:xfrm>
+            <a:off x="5047488" y="3440296"/>
+            <a:ext cx="868680" cy="248502"/>
+          </a:xfrm>
+          <a:prstGeom prst="rect">
+            <a:avLst/>
+          </a:prstGeom>
+          <a:noFill/>
+          <a:ln/>
+        </p:spPr>
+        <p:txBody>
+          <a:bodyPr wrap="square" lIns="0" tIns="0" rIns="0" bIns="0" rtlCol="0" anchor="ctr"/>
+          <a:lstStyle/>
+          <a:p>
+            <a:pPr algn="r" indent="0" marL="0">
+              <a:buNone/>
+            </a:pPr>
+            <a:r>
+              <a:rPr lang="en-US" sz="1300" dirty="0">
+                <a:solidFill>
+                  <a:srgbClr val="595959"/>
+                </a:solidFill>
+                <a:latin typeface="Inter" pitchFamily="34" charset="0"/>
+                <a:ea typeface="Inter" pitchFamily="34" charset="-122"/>
+                <a:cs typeface="Inter" pitchFamily="34" charset="-120"/>
+              </a:rPr>
+              <a:t>−661</a:t>
+            </a:r>
+            <a:endParaRPr lang="en-US" sz="1300" dirty="0"/>
+          </a:p>
+        </p:txBody>
+      </p:sp>
+      <p:sp>
+        <p:nvSpPr>
+          <p:cNvPr id="52" name="Text 50"/>
           <p:cNvSpPr txBox="1"/>
           <p:nvPr/>
         </p:nvSpPr>
@@ -3811,7 +4201,7 @@
       </p:sp>
       <p:sp>
         <p:nvSpPr>
-          <p:cNvPr id="43" name="Text 41"/>
+          <p:cNvPr id="53" name="Text 51"/>
           <p:cNvSpPr txBox="1"/>
           <p:nvPr/>
         </p:nvSpPr>
@@ -3850,14 +4240,14 @@
       </p:sp>
       <p:sp>
         <p:nvSpPr>
-          <p:cNvPr id="44" name="Shape 42"/>
+          <p:cNvPr id="54" name="Shape 52"/>
           <p:cNvSpPr/>
           <p:nvPr/>
         </p:nvSpPr>
         <p:spPr>
           <a:xfrm>
-            <a:off x="3752270" y="3744710"/>
-            <a:ext cx="48727" cy="136676"/>
+            <a:off x="3411703" y="3744710"/>
+            <a:ext cx="23293" cy="136676"/>
           </a:xfrm>
           <a:prstGeom prst="rect">
             <a:avLst/>
@@ -3870,13 +4260,13 @@
       </p:sp>
       <p:sp>
         <p:nvSpPr>
-          <p:cNvPr id="45" name="Text 43"/>
-          <p:cNvSpPr txBox="1"/>
-          <p:nvPr/>
-        </p:nvSpPr>
-        <p:spPr>
-          <a:xfrm>
-            <a:off x="4818888" y="3688797"/>
+          <p:cNvPr id="55" name="Text 53"/>
+          <p:cNvSpPr txBox="1"/>
+          <p:nvPr/>
+        </p:nvSpPr>
+        <p:spPr>
+          <a:xfrm>
+            <a:off x="3950208" y="3688797"/>
             <a:ext cx="1097280" cy="248502"/>
           </a:xfrm>
           <a:prstGeom prst="rect">
@@ -3909,7 +4299,46 @@
       </p:sp>
       <p:sp>
         <p:nvSpPr>
-          <p:cNvPr id="46" name="Text 44"/>
+          <p:cNvPr id="56" name="Text 54"/>
+          <p:cNvSpPr txBox="1"/>
+          <p:nvPr/>
+        </p:nvSpPr>
+        <p:spPr>
+          <a:xfrm>
+            <a:off x="5047488" y="3688797"/>
+            <a:ext cx="868680" cy="248502"/>
+          </a:xfrm>
+          <a:prstGeom prst="rect">
+            <a:avLst/>
+          </a:prstGeom>
+          <a:noFill/>
+          <a:ln/>
+        </p:spPr>
+        <p:txBody>
+          <a:bodyPr wrap="square" lIns="0" tIns="0" rIns="0" bIns="0" rtlCol="0" anchor="ctr"/>
+          <a:lstStyle/>
+          <a:p>
+            <a:pPr algn="r" indent="0" marL="0">
+              <a:buNone/>
+            </a:pPr>
+            <a:r>
+              <a:rPr lang="en-US" sz="1300" dirty="0">
+                <a:solidFill>
+                  <a:srgbClr val="595959"/>
+                </a:solidFill>
+                <a:latin typeface="Inter" pitchFamily="34" charset="0"/>
+                <a:ea typeface="Inter" pitchFamily="34" charset="-122"/>
+                <a:cs typeface="Inter" pitchFamily="34" charset="-120"/>
+              </a:rPr>
+              <a:t>−223</a:t>
+            </a:r>
+            <a:endParaRPr lang="en-US" sz="1300" dirty="0"/>
+          </a:p>
+        </p:txBody>
+      </p:sp>
+      <p:sp>
+        <p:nvSpPr>
+          <p:cNvPr id="57" name="Text 55"/>
           <p:cNvSpPr txBox="1"/>
           <p:nvPr/>
         </p:nvSpPr>
@@ -3948,7 +4377,7 @@
       </p:sp>
       <p:sp>
         <p:nvSpPr>
-          <p:cNvPr id="47" name="Text 45"/>
+          <p:cNvPr id="58" name="Text 56"/>
           <p:cNvSpPr txBox="1"/>
           <p:nvPr/>
         </p:nvSpPr>
@@ -3987,14 +4416,14 @@
       </p:sp>
       <p:sp>
         <p:nvSpPr>
-          <p:cNvPr id="48" name="Shape 46"/>
+          <p:cNvPr id="59" name="Shape 57"/>
           <p:cNvSpPr/>
           <p:nvPr/>
         </p:nvSpPr>
         <p:spPr>
           <a:xfrm>
-            <a:off x="3751591" y="3993212"/>
-            <a:ext cx="49407" cy="136676"/>
+            <a:off x="3411379" y="3993212"/>
+            <a:ext cx="23618" cy="136676"/>
           </a:xfrm>
           <a:prstGeom prst="rect">
             <a:avLst/>
@@ -4007,13 +4436,13 @@
       </p:sp>
       <p:sp>
         <p:nvSpPr>
-          <p:cNvPr id="49" name="Text 47"/>
-          <p:cNvSpPr txBox="1"/>
-          <p:nvPr/>
-        </p:nvSpPr>
-        <p:spPr>
-          <a:xfrm>
-            <a:off x="4818888" y="3937299"/>
+          <p:cNvPr id="60" name="Text 58"/>
+          <p:cNvSpPr txBox="1"/>
+          <p:nvPr/>
+        </p:nvSpPr>
+        <p:spPr>
+          <a:xfrm>
+            <a:off x="3950208" y="3937299"/>
             <a:ext cx="1097280" cy="248502"/>
           </a:xfrm>
           <a:prstGeom prst="rect">
@@ -4046,7 +4475,46 @@
       </p:sp>
       <p:sp>
         <p:nvSpPr>
-          <p:cNvPr id="50" name="Text 48"/>
+          <p:cNvPr id="61" name="Text 59"/>
+          <p:cNvSpPr txBox="1"/>
+          <p:nvPr/>
+        </p:nvSpPr>
+        <p:spPr>
+          <a:xfrm>
+            <a:off x="5047488" y="3937299"/>
+            <a:ext cx="868680" cy="248502"/>
+          </a:xfrm>
+          <a:prstGeom prst="rect">
+            <a:avLst/>
+          </a:prstGeom>
+          <a:noFill/>
+          <a:ln/>
+        </p:spPr>
+        <p:txBody>
+          <a:bodyPr wrap="square" lIns="0" tIns="0" rIns="0" bIns="0" rtlCol="0" anchor="ctr"/>
+          <a:lstStyle/>
+          <a:p>
+            <a:pPr algn="r" indent="0" marL="0">
+              <a:buNone/>
+            </a:pPr>
+            <a:r>
+              <a:rPr lang="en-US" sz="1300" dirty="0">
+                <a:solidFill>
+                  <a:srgbClr val="595959"/>
+                </a:solidFill>
+                <a:latin typeface="Inter" pitchFamily="34" charset="0"/>
+                <a:ea typeface="Inter" pitchFamily="34" charset="-122"/>
+                <a:cs typeface="Inter" pitchFamily="34" charset="-120"/>
+              </a:rPr>
+              <a:t>−340</a:t>
+            </a:r>
+            <a:endParaRPr lang="en-US" sz="1300" dirty="0"/>
+          </a:p>
+        </p:txBody>
+      </p:sp>
+      <p:sp>
+        <p:nvSpPr>
+          <p:cNvPr id="62" name="Text 60"/>
           <p:cNvSpPr txBox="1"/>
           <p:nvPr/>
         </p:nvSpPr>
@@ -4085,7 +4553,7 @@
       </p:sp>
       <p:sp>
         <p:nvSpPr>
-          <p:cNvPr id="51" name="Text 49"/>
+          <p:cNvPr id="63" name="Text 61"/>
           <p:cNvSpPr txBox="1"/>
           <p:nvPr/>
         </p:nvSpPr>
@@ -4124,14 +4592,14 @@
       </p:sp>
       <p:sp>
         <p:nvSpPr>
-          <p:cNvPr id="52" name="Shape 50"/>
+          <p:cNvPr id="64" name="Shape 62"/>
           <p:cNvSpPr/>
           <p:nvPr/>
         </p:nvSpPr>
         <p:spPr>
           <a:xfrm>
-            <a:off x="3745550" y="4241713"/>
-            <a:ext cx="55448" cy="136676"/>
+            <a:off x="3408491" y="4241713"/>
+            <a:ext cx="26505" cy="136676"/>
           </a:xfrm>
           <a:prstGeom prst="rect">
             <a:avLst/>
@@ -4144,13 +4612,13 @@
       </p:sp>
       <p:sp>
         <p:nvSpPr>
-          <p:cNvPr id="53" name="Text 51"/>
-          <p:cNvSpPr txBox="1"/>
-          <p:nvPr/>
-        </p:nvSpPr>
-        <p:spPr>
-          <a:xfrm>
-            <a:off x="4818888" y="4185800"/>
+          <p:cNvPr id="65" name="Text 63"/>
+          <p:cNvSpPr txBox="1"/>
+          <p:nvPr/>
+        </p:nvSpPr>
+        <p:spPr>
+          <a:xfrm>
+            <a:off x="3950208" y="4185800"/>
             <a:ext cx="1097280" cy="248502"/>
           </a:xfrm>
           <a:prstGeom prst="rect">
@@ -4183,7 +4651,46 @@
       </p:sp>
       <p:sp>
         <p:nvSpPr>
-          <p:cNvPr id="54" name="Text 52"/>
+          <p:cNvPr id="66" name="Text 64"/>
+          <p:cNvSpPr txBox="1"/>
+          <p:nvPr/>
+        </p:nvSpPr>
+        <p:spPr>
+          <a:xfrm>
+            <a:off x="5047488" y="4185800"/>
+            <a:ext cx="868680" cy="248502"/>
+          </a:xfrm>
+          <a:prstGeom prst="rect">
+            <a:avLst/>
+          </a:prstGeom>
+          <a:noFill/>
+          <a:ln/>
+        </p:spPr>
+        <p:txBody>
+          <a:bodyPr wrap="square" lIns="0" tIns="0" rIns="0" bIns="0" rtlCol="0" anchor="ctr"/>
+          <a:lstStyle/>
+          <a:p>
+            <a:pPr algn="r" indent="0" marL="0">
+              <a:buNone/>
+            </a:pPr>
+            <a:r>
+              <a:rPr lang="en-US" sz="1300" dirty="0">
+                <a:solidFill>
+                  <a:srgbClr val="595959"/>
+                </a:solidFill>
+                <a:latin typeface="Inter" pitchFamily="34" charset="0"/>
+                <a:ea typeface="Inter" pitchFamily="34" charset="-122"/>
+                <a:cs typeface="Inter" pitchFamily="34" charset="-120"/>
+              </a:rPr>
+              <a:t>−83</a:t>
+            </a:r>
+            <a:endParaRPr lang="en-US" sz="1300" dirty="0"/>
+          </a:p>
+        </p:txBody>
+      </p:sp>
+      <p:sp>
+        <p:nvSpPr>
+          <p:cNvPr id="67" name="Text 65"/>
           <p:cNvSpPr txBox="1"/>
           <p:nvPr/>
         </p:nvSpPr>
@@ -4222,7 +4729,7 @@
       </p:sp>
       <p:sp>
         <p:nvSpPr>
-          <p:cNvPr id="55" name="Text 53"/>
+          <p:cNvPr id="68" name="Text 66"/>
           <p:cNvSpPr txBox="1"/>
           <p:nvPr/>
         </p:nvSpPr>
@@ -4261,14 +4768,14 @@
       </p:sp>
       <p:sp>
         <p:nvSpPr>
-          <p:cNvPr id="56" name="Shape 54"/>
+          <p:cNvPr id="69" name="Shape 67"/>
           <p:cNvSpPr/>
           <p:nvPr/>
         </p:nvSpPr>
         <p:spPr>
           <a:xfrm>
-            <a:off x="3729945" y="4490215"/>
-            <a:ext cx="71053" cy="136676"/>
+            <a:off x="3401031" y="4490215"/>
+            <a:ext cx="33965" cy="136676"/>
           </a:xfrm>
           <a:prstGeom prst="rect">
             <a:avLst/>
@@ -4281,13 +4788,13 @@
       </p:sp>
       <p:sp>
         <p:nvSpPr>
-          <p:cNvPr id="57" name="Text 55"/>
-          <p:cNvSpPr txBox="1"/>
-          <p:nvPr/>
-        </p:nvSpPr>
-        <p:spPr>
-          <a:xfrm>
-            <a:off x="4818888" y="4434302"/>
+          <p:cNvPr id="70" name="Text 68"/>
+          <p:cNvSpPr txBox="1"/>
+          <p:nvPr/>
+        </p:nvSpPr>
+        <p:spPr>
+          <a:xfrm>
+            <a:off x="3950208" y="4434302"/>
             <a:ext cx="1097280" cy="248502"/>
           </a:xfrm>
           <a:prstGeom prst="rect">
@@ -4320,7 +4827,46 @@
       </p:sp>
       <p:sp>
         <p:nvSpPr>
-          <p:cNvPr id="58" name="Text 56"/>
+          <p:cNvPr id="71" name="Text 69"/>
+          <p:cNvSpPr txBox="1"/>
+          <p:nvPr/>
+        </p:nvSpPr>
+        <p:spPr>
+          <a:xfrm>
+            <a:off x="5047488" y="4434302"/>
+            <a:ext cx="868680" cy="248502"/>
+          </a:xfrm>
+          <a:prstGeom prst="rect">
+            <a:avLst/>
+          </a:prstGeom>
+          <a:noFill/>
+          <a:ln/>
+        </p:spPr>
+        <p:txBody>
+          <a:bodyPr wrap="square" lIns="0" tIns="0" rIns="0" bIns="0" rtlCol="0" anchor="ctr"/>
+          <a:lstStyle/>
+          <a:p>
+            <a:pPr algn="r" indent="0" marL="0">
+              <a:buNone/>
+            </a:pPr>
+            <a:r>
+              <a:rPr lang="en-US" sz="1300" dirty="0">
+                <a:solidFill>
+                  <a:srgbClr val="595959"/>
+                </a:solidFill>
+                <a:latin typeface="Inter" pitchFamily="34" charset="0"/>
+                <a:ea typeface="Inter" pitchFamily="34" charset="-122"/>
+                <a:cs typeface="Inter" pitchFamily="34" charset="-120"/>
+              </a:rPr>
+              <a:t>−452</a:t>
+            </a:r>
+            <a:endParaRPr lang="en-US" sz="1300" dirty="0"/>
+          </a:p>
+        </p:txBody>
+      </p:sp>
+      <p:sp>
+        <p:nvSpPr>
+          <p:cNvPr id="72" name="Text 70"/>
           <p:cNvSpPr txBox="1"/>
           <p:nvPr/>
         </p:nvSpPr>
@@ -4359,7 +4905,7 @@
       </p:sp>
       <p:sp>
         <p:nvSpPr>
-          <p:cNvPr id="59" name="Text 57"/>
+          <p:cNvPr id="73" name="Text 71"/>
           <p:cNvSpPr txBox="1"/>
           <p:nvPr/>
         </p:nvSpPr>
@@ -4398,14 +4944,14 @@
       </p:sp>
       <p:sp>
         <p:nvSpPr>
-          <p:cNvPr id="60" name="Shape 58"/>
+          <p:cNvPr id="74" name="Shape 72"/>
           <p:cNvSpPr/>
           <p:nvPr/>
         </p:nvSpPr>
         <p:spPr>
           <a:xfrm>
-            <a:off x="3718481" y="4738717"/>
-            <a:ext cx="82517" cy="136676"/>
+            <a:off x="3395551" y="4738717"/>
+            <a:ext cx="39445" cy="136676"/>
           </a:xfrm>
           <a:prstGeom prst="rect">
             <a:avLst/>
@@ -4418,13 +4964,13 @@
       </p:sp>
       <p:sp>
         <p:nvSpPr>
-          <p:cNvPr id="61" name="Text 59"/>
-          <p:cNvSpPr txBox="1"/>
-          <p:nvPr/>
-        </p:nvSpPr>
-        <p:spPr>
-          <a:xfrm>
-            <a:off x="4818888" y="4682804"/>
+          <p:cNvPr id="75" name="Text 73"/>
+          <p:cNvSpPr txBox="1"/>
+          <p:nvPr/>
+        </p:nvSpPr>
+        <p:spPr>
+          <a:xfrm>
+            <a:off x="3950208" y="4682804"/>
             <a:ext cx="1097280" cy="248502"/>
           </a:xfrm>
           <a:prstGeom prst="rect">
@@ -4457,7 +5003,46 @@
       </p:sp>
       <p:sp>
         <p:nvSpPr>
-          <p:cNvPr id="62" name="Text 60"/>
+          <p:cNvPr id="76" name="Text 74"/>
+          <p:cNvSpPr txBox="1"/>
+          <p:nvPr/>
+        </p:nvSpPr>
+        <p:spPr>
+          <a:xfrm>
+            <a:off x="5047488" y="4682804"/>
+            <a:ext cx="868680" cy="248502"/>
+          </a:xfrm>
+          <a:prstGeom prst="rect">
+            <a:avLst/>
+          </a:prstGeom>
+          <a:noFill/>
+          <a:ln/>
+        </p:spPr>
+        <p:txBody>
+          <a:bodyPr wrap="square" lIns="0" tIns="0" rIns="0" bIns="0" rtlCol="0" anchor="ctr"/>
+          <a:lstStyle/>
+          <a:p>
+            <a:pPr algn="r" indent="0" marL="0">
+              <a:buNone/>
+            </a:pPr>
+            <a:r>
+              <a:rPr lang="en-US" sz="1300" dirty="0">
+                <a:solidFill>
+                  <a:srgbClr val="595959"/>
+                </a:solidFill>
+                <a:latin typeface="Inter" pitchFamily="34" charset="0"/>
+                <a:ea typeface="Inter" pitchFamily="34" charset="-122"/>
+                <a:cs typeface="Inter" pitchFamily="34" charset="-120"/>
+              </a:rPr>
+              <a:t>−569</a:t>
+            </a:r>
+            <a:endParaRPr lang="en-US" sz="1300" dirty="0"/>
+          </a:p>
+        </p:txBody>
+      </p:sp>
+      <p:sp>
+        <p:nvSpPr>
+          <p:cNvPr id="77" name="Text 75"/>
           <p:cNvSpPr txBox="1"/>
           <p:nvPr/>
         </p:nvSpPr>
@@ -4496,7 +5081,7 @@
       </p:sp>
       <p:sp>
         <p:nvSpPr>
-          <p:cNvPr id="63" name="Text 61"/>
+          <p:cNvPr id="78" name="Text 76"/>
           <p:cNvSpPr txBox="1"/>
           <p:nvPr/>
         </p:nvSpPr>
@@ -4535,14 +5120,14 @@
       </p:sp>
       <p:sp>
         <p:nvSpPr>
-          <p:cNvPr id="64" name="Shape 62"/>
+          <p:cNvPr id="79" name="Shape 77"/>
           <p:cNvSpPr/>
           <p:nvPr/>
         </p:nvSpPr>
         <p:spPr>
           <a:xfrm>
-            <a:off x="3710263" y="4987218"/>
-            <a:ext cx="90735" cy="136676"/>
+            <a:off x="3391623" y="4987218"/>
+            <a:ext cx="43373" cy="136676"/>
           </a:xfrm>
           <a:prstGeom prst="rect">
             <a:avLst/>
@@ -4555,13 +5140,13 @@
       </p:sp>
       <p:sp>
         <p:nvSpPr>
-          <p:cNvPr id="65" name="Text 63"/>
-          <p:cNvSpPr txBox="1"/>
-          <p:nvPr/>
-        </p:nvSpPr>
-        <p:spPr>
-          <a:xfrm>
-            <a:off x="4818888" y="4931305"/>
+          <p:cNvPr id="80" name="Text 78"/>
+          <p:cNvSpPr txBox="1"/>
+          <p:nvPr/>
+        </p:nvSpPr>
+        <p:spPr>
+          <a:xfrm>
+            <a:off x="3950208" y="4931305"/>
             <a:ext cx="1097280" cy="248502"/>
           </a:xfrm>
           <a:prstGeom prst="rect">
@@ -4594,7 +5179,46 @@
       </p:sp>
       <p:sp>
         <p:nvSpPr>
-          <p:cNvPr id="66" name="Text 64"/>
+          <p:cNvPr id="81" name="Text 79"/>
+          <p:cNvSpPr txBox="1"/>
+          <p:nvPr/>
+        </p:nvSpPr>
+        <p:spPr>
+          <a:xfrm>
+            <a:off x="5047488" y="4931305"/>
+            <a:ext cx="868680" cy="248502"/>
+          </a:xfrm>
+          <a:prstGeom prst="rect">
+            <a:avLst/>
+          </a:prstGeom>
+          <a:noFill/>
+          <a:ln/>
+        </p:spPr>
+        <p:txBody>
+          <a:bodyPr wrap="square" lIns="0" tIns="0" rIns="0" bIns="0" rtlCol="0" anchor="ctr"/>
+          <a:lstStyle/>
+          <a:p>
+            <a:pPr algn="r" indent="0" marL="0">
+              <a:buNone/>
+            </a:pPr>
+            <a:r>
+              <a:rPr lang="en-US" sz="1300" dirty="0">
+                <a:solidFill>
+                  <a:srgbClr val="595959"/>
+                </a:solidFill>
+                <a:latin typeface="Inter" pitchFamily="34" charset="0"/>
+                <a:ea typeface="Inter" pitchFamily="34" charset="-122"/>
+                <a:cs typeface="Inter" pitchFamily="34" charset="-120"/>
+              </a:rPr>
+              <a:t>−660</a:t>
+            </a:r>
+            <a:endParaRPr lang="en-US" sz="1300" dirty="0"/>
+          </a:p>
+        </p:txBody>
+      </p:sp>
+      <p:sp>
+        <p:nvSpPr>
+          <p:cNvPr id="82" name="Text 80"/>
           <p:cNvSpPr txBox="1"/>
           <p:nvPr/>
         </p:nvSpPr>
@@ -4633,7 +5257,7 @@
       </p:sp>
       <p:sp>
         <p:nvSpPr>
-          <p:cNvPr id="67" name="Text 65"/>
+          <p:cNvPr id="83" name="Text 81"/>
           <p:cNvSpPr txBox="1"/>
           <p:nvPr/>
         </p:nvSpPr>
@@ -4672,14 +5296,14 @@
       </p:sp>
       <p:sp>
         <p:nvSpPr>
-          <p:cNvPr id="68" name="Shape 66"/>
+          <p:cNvPr id="84" name="Shape 82"/>
           <p:cNvSpPr/>
           <p:nvPr/>
         </p:nvSpPr>
         <p:spPr>
           <a:xfrm>
-            <a:off x="3698735" y="5235720"/>
-            <a:ext cx="102262" cy="136676"/>
+            <a:off x="3386113" y="5235720"/>
+            <a:ext cx="48884" cy="136676"/>
           </a:xfrm>
           <a:prstGeom prst="rect">
             <a:avLst/>
@@ -4692,13 +5316,13 @@
       </p:sp>
       <p:sp>
         <p:nvSpPr>
-          <p:cNvPr id="69" name="Text 67"/>
-          <p:cNvSpPr txBox="1"/>
-          <p:nvPr/>
-        </p:nvSpPr>
-        <p:spPr>
-          <a:xfrm>
-            <a:off x="4818888" y="5179807"/>
+          <p:cNvPr id="85" name="Text 83"/>
+          <p:cNvSpPr txBox="1"/>
+          <p:nvPr/>
+        </p:nvSpPr>
+        <p:spPr>
+          <a:xfrm>
+            <a:off x="3950208" y="5179807"/>
             <a:ext cx="1097280" cy="248502"/>
           </a:xfrm>
           <a:prstGeom prst="rect">
@@ -4731,7 +5355,46 @@
       </p:sp>
       <p:sp>
         <p:nvSpPr>
-          <p:cNvPr id="70" name="Text 68"/>
+          <p:cNvPr id="86" name="Text 84"/>
+          <p:cNvSpPr txBox="1"/>
+          <p:nvPr/>
+        </p:nvSpPr>
+        <p:spPr>
+          <a:xfrm>
+            <a:off x="5047488" y="5179807"/>
+            <a:ext cx="868680" cy="248502"/>
+          </a:xfrm>
+          <a:prstGeom prst="rect">
+            <a:avLst/>
+          </a:prstGeom>
+          <a:noFill/>
+          <a:ln/>
+        </p:spPr>
+        <p:txBody>
+          <a:bodyPr wrap="square" lIns="0" tIns="0" rIns="0" bIns="0" rtlCol="0" anchor="ctr"/>
+          <a:lstStyle/>
+          <a:p>
+            <a:pPr algn="r" indent="0" marL="0">
+              <a:buNone/>
+            </a:pPr>
+            <a:r>
+              <a:rPr lang="en-US" sz="1300" dirty="0">
+                <a:solidFill>
+                  <a:srgbClr val="595959"/>
+                </a:solidFill>
+                <a:latin typeface="Inter" pitchFamily="34" charset="0"/>
+                <a:ea typeface="Inter" pitchFamily="34" charset="-122"/>
+                <a:cs typeface="Inter" pitchFamily="34" charset="-120"/>
+              </a:rPr>
+              <a:t>−783</a:t>
+            </a:r>
+            <a:endParaRPr lang="en-US" sz="1300" dirty="0"/>
+          </a:p>
+        </p:txBody>
+      </p:sp>
+      <p:sp>
+        <p:nvSpPr>
+          <p:cNvPr id="87" name="Text 85"/>
           <p:cNvSpPr txBox="1"/>
           <p:nvPr/>
         </p:nvSpPr>
@@ -4770,7 +5433,7 @@
       </p:sp>
       <p:sp>
         <p:nvSpPr>
-          <p:cNvPr id="71" name="Text 69"/>
+          <p:cNvPr id="88" name="Text 86"/>
           <p:cNvSpPr txBox="1"/>
           <p:nvPr/>
         </p:nvSpPr>
@@ -4809,14 +5472,14 @@
       </p:sp>
       <p:sp>
         <p:nvSpPr>
-          <p:cNvPr id="72" name="Shape 70"/>
+          <p:cNvPr id="89" name="Shape 87"/>
           <p:cNvSpPr/>
           <p:nvPr/>
         </p:nvSpPr>
         <p:spPr>
           <a:xfrm>
-            <a:off x="3697071" y="5484222"/>
-            <a:ext cx="103926" cy="136676"/>
+            <a:off x="3385317" y="5484222"/>
+            <a:ext cx="49679" cy="136676"/>
           </a:xfrm>
           <a:prstGeom prst="rect">
             <a:avLst/>
@@ -4829,13 +5492,13 @@
       </p:sp>
       <p:sp>
         <p:nvSpPr>
-          <p:cNvPr id="73" name="Text 71"/>
-          <p:cNvSpPr txBox="1"/>
-          <p:nvPr/>
-        </p:nvSpPr>
-        <p:spPr>
-          <a:xfrm>
-            <a:off x="4818888" y="5428309"/>
+          <p:cNvPr id="90" name="Text 88"/>
+          <p:cNvSpPr txBox="1"/>
+          <p:nvPr/>
+        </p:nvSpPr>
+        <p:spPr>
+          <a:xfrm>
+            <a:off x="3950208" y="5428309"/>
             <a:ext cx="1097280" cy="248502"/>
           </a:xfrm>
           <a:prstGeom prst="rect">
@@ -4868,7 +5531,46 @@
       </p:sp>
       <p:sp>
         <p:nvSpPr>
-          <p:cNvPr id="74" name="Text 72"/>
+          <p:cNvPr id="91" name="Text 89"/>
+          <p:cNvSpPr txBox="1"/>
+          <p:nvPr/>
+        </p:nvSpPr>
+        <p:spPr>
+          <a:xfrm>
+            <a:off x="5047488" y="5428309"/>
+            <a:ext cx="868680" cy="248502"/>
+          </a:xfrm>
+          <a:prstGeom prst="rect">
+            <a:avLst/>
+          </a:prstGeom>
+          <a:noFill/>
+          <a:ln/>
+        </p:spPr>
+        <p:txBody>
+          <a:bodyPr wrap="square" lIns="0" tIns="0" rIns="0" bIns="0" rtlCol="0" anchor="ctr"/>
+          <a:lstStyle/>
+          <a:p>
+            <a:pPr algn="r" indent="0" marL="0">
+              <a:buNone/>
+            </a:pPr>
+            <a:r>
+              <a:rPr lang="en-US" sz="1300" dirty="0">
+                <a:solidFill>
+                  <a:srgbClr val="595959"/>
+                </a:solidFill>
+                <a:latin typeface="Inter" pitchFamily="34" charset="0"/>
+                <a:ea typeface="Inter" pitchFamily="34" charset="-122"/>
+                <a:cs typeface="Inter" pitchFamily="34" charset="-120"/>
+              </a:rPr>
+              <a:t>−568</a:t>
+            </a:r>
+            <a:endParaRPr lang="en-US" sz="1300" dirty="0"/>
+          </a:p>
+        </p:txBody>
+      </p:sp>
+      <p:sp>
+        <p:nvSpPr>
+          <p:cNvPr id="92" name="Text 90"/>
           <p:cNvSpPr txBox="1"/>
           <p:nvPr/>
         </p:nvSpPr>
@@ -4907,7 +5609,7 @@
       </p:sp>
       <p:sp>
         <p:nvSpPr>
-          <p:cNvPr id="75" name="Text 73"/>
+          <p:cNvPr id="93" name="Text 91"/>
           <p:cNvSpPr txBox="1"/>
           <p:nvPr/>
         </p:nvSpPr>
@@ -4946,14 +5648,14 @@
       </p:sp>
       <p:sp>
         <p:nvSpPr>
-          <p:cNvPr id="76" name="Shape 74"/>
+          <p:cNvPr id="94" name="Shape 92"/>
           <p:cNvSpPr/>
           <p:nvPr/>
         </p:nvSpPr>
         <p:spPr>
           <a:xfrm>
-            <a:off x="3696290" y="5732723"/>
-            <a:ext cx="104707" cy="136676"/>
+            <a:off x="3384944" y="5732723"/>
+            <a:ext cx="50052" cy="136676"/>
           </a:xfrm>
           <a:prstGeom prst="rect">
             <a:avLst/>
@@ -4966,13 +5668,13 @@
       </p:sp>
       <p:sp>
         <p:nvSpPr>
-          <p:cNvPr id="77" name="Text 75"/>
-          <p:cNvSpPr txBox="1"/>
-          <p:nvPr/>
-        </p:nvSpPr>
-        <p:spPr>
-          <a:xfrm>
-            <a:off x="4818888" y="5676810"/>
+          <p:cNvPr id="95" name="Text 93"/>
+          <p:cNvSpPr txBox="1"/>
+          <p:nvPr/>
+        </p:nvSpPr>
+        <p:spPr>
+          <a:xfrm>
+            <a:off x="3950208" y="5676810"/>
             <a:ext cx="1097280" cy="248502"/>
           </a:xfrm>
           <a:prstGeom prst="rect">
@@ -5005,7 +5707,46 @@
       </p:sp>
       <p:sp>
         <p:nvSpPr>
-          <p:cNvPr id="78" name="Text 76"/>
+          <p:cNvPr id="96" name="Text 94"/>
+          <p:cNvSpPr txBox="1"/>
+          <p:nvPr/>
+        </p:nvSpPr>
+        <p:spPr>
+          <a:xfrm>
+            <a:off x="5047488" y="5676810"/>
+            <a:ext cx="868680" cy="248502"/>
+          </a:xfrm>
+          <a:prstGeom prst="rect">
+            <a:avLst/>
+          </a:prstGeom>
+          <a:noFill/>
+          <a:ln/>
+        </p:spPr>
+        <p:txBody>
+          <a:bodyPr wrap="square" lIns="0" tIns="0" rIns="0" bIns="0" rtlCol="0" anchor="ctr"/>
+          <a:lstStyle/>
+          <a:p>
+            <a:pPr algn="r" indent="0" marL="0">
+              <a:buNone/>
+            </a:pPr>
+            <a:r>
+              <a:rPr lang="en-US" sz="1300" dirty="0">
+                <a:solidFill>
+                  <a:srgbClr val="595959"/>
+                </a:solidFill>
+                <a:latin typeface="Inter" pitchFamily="34" charset="0"/>
+                <a:ea typeface="Inter" pitchFamily="34" charset="-122"/>
+                <a:cs typeface="Inter" pitchFamily="34" charset="-120"/>
+              </a:rPr>
+              <a:t>−697</a:t>
+            </a:r>
+            <a:endParaRPr lang="en-US" sz="1300" dirty="0"/>
+          </a:p>
+        </p:txBody>
+      </p:sp>
+      <p:sp>
+        <p:nvSpPr>
+          <p:cNvPr id="97" name="Text 95"/>
           <p:cNvSpPr txBox="1"/>
           <p:nvPr/>
         </p:nvSpPr>
@@ -5044,7 +5785,7 @@
       </p:sp>
       <p:sp>
         <p:nvSpPr>
-          <p:cNvPr id="79" name="Text 77"/>
+          <p:cNvPr id="98" name="Text 96"/>
           <p:cNvSpPr txBox="1"/>
           <p:nvPr/>
         </p:nvSpPr>
@@ -5083,14 +5824,14 @@
       </p:sp>
       <p:sp>
         <p:nvSpPr>
-          <p:cNvPr id="80" name="Shape 78"/>
+          <p:cNvPr id="99" name="Shape 97"/>
           <p:cNvSpPr/>
           <p:nvPr/>
         </p:nvSpPr>
         <p:spPr>
           <a:xfrm>
-            <a:off x="9237983" y="1756697"/>
-            <a:ext cx="113423" cy="136676"/>
+            <a:off x="8931186" y="1756697"/>
+            <a:ext cx="54219" cy="136676"/>
           </a:xfrm>
           <a:prstGeom prst="rect">
             <a:avLst/>
@@ -5103,13 +5844,13 @@
       </p:sp>
       <p:sp>
         <p:nvSpPr>
-          <p:cNvPr id="81" name="Text 79"/>
-          <p:cNvSpPr txBox="1"/>
-          <p:nvPr/>
-        </p:nvSpPr>
-        <p:spPr>
-          <a:xfrm>
-            <a:off x="10369296" y="1700784"/>
+          <p:cNvPr id="100" name="Text 98"/>
+          <p:cNvSpPr txBox="1"/>
+          <p:nvPr/>
+        </p:nvSpPr>
+        <p:spPr>
+          <a:xfrm>
+            <a:off x="9500616" y="1700784"/>
             <a:ext cx="1097280" cy="248502"/>
           </a:xfrm>
           <a:prstGeom prst="rect">
@@ -5142,7 +5883,46 @@
       </p:sp>
       <p:sp>
         <p:nvSpPr>
-          <p:cNvPr id="82" name="Text 80"/>
+          <p:cNvPr id="101" name="Text 99"/>
+          <p:cNvSpPr txBox="1"/>
+          <p:nvPr/>
+        </p:nvSpPr>
+        <p:spPr>
+          <a:xfrm>
+            <a:off x="10597896" y="1700784"/>
+            <a:ext cx="868680" cy="248502"/>
+          </a:xfrm>
+          <a:prstGeom prst="rect">
+            <a:avLst/>
+          </a:prstGeom>
+          <a:noFill/>
+          <a:ln/>
+        </p:spPr>
+        <p:txBody>
+          <a:bodyPr wrap="square" lIns="0" tIns="0" rIns="0" bIns="0" rtlCol="0" anchor="ctr"/>
+          <a:lstStyle/>
+          <a:p>
+            <a:pPr algn="r" indent="0" marL="0">
+              <a:buNone/>
+            </a:pPr>
+            <a:r>
+              <a:rPr lang="en-US" sz="1300" dirty="0">
+                <a:solidFill>
+                  <a:srgbClr val="595959"/>
+                </a:solidFill>
+                <a:latin typeface="Inter" pitchFamily="34" charset="0"/>
+                <a:ea typeface="Inter" pitchFamily="34" charset="-122"/>
+                <a:cs typeface="Inter" pitchFamily="34" charset="-120"/>
+              </a:rPr>
+              <a:t>−640</a:t>
+            </a:r>
+            <a:endParaRPr lang="en-US" sz="1300" dirty="0"/>
+          </a:p>
+        </p:txBody>
+      </p:sp>
+      <p:sp>
+        <p:nvSpPr>
+          <p:cNvPr id="102" name="Text 100"/>
           <p:cNvSpPr txBox="1"/>
           <p:nvPr/>
         </p:nvSpPr>
@@ -5181,7 +5961,7 @@
       </p:sp>
       <p:sp>
         <p:nvSpPr>
-          <p:cNvPr id="83" name="Text 81"/>
+          <p:cNvPr id="103" name="Text 101"/>
           <p:cNvSpPr txBox="1"/>
           <p:nvPr/>
         </p:nvSpPr>
@@ -5220,14 +6000,14 @@
       </p:sp>
       <p:sp>
         <p:nvSpPr>
-          <p:cNvPr id="84" name="Shape 82"/>
+          <p:cNvPr id="104" name="Shape 102"/>
           <p:cNvSpPr/>
           <p:nvPr/>
         </p:nvSpPr>
         <p:spPr>
           <a:xfrm>
-            <a:off x="9188179" y="2005199"/>
-            <a:ext cx="163227" cy="136676"/>
+            <a:off x="8907378" y="2005199"/>
+            <a:ext cx="78026" cy="136676"/>
           </a:xfrm>
           <a:prstGeom prst="rect">
             <a:avLst/>
@@ -5240,13 +6020,13 @@
       </p:sp>
       <p:sp>
         <p:nvSpPr>
-          <p:cNvPr id="85" name="Text 83"/>
-          <p:cNvSpPr txBox="1"/>
-          <p:nvPr/>
-        </p:nvSpPr>
-        <p:spPr>
-          <a:xfrm>
-            <a:off x="10369296" y="1949286"/>
+          <p:cNvPr id="105" name="Text 103"/>
+          <p:cNvSpPr txBox="1"/>
+          <p:nvPr/>
+        </p:nvSpPr>
+        <p:spPr>
+          <a:xfrm>
+            <a:off x="9500616" y="1949286"/>
             <a:ext cx="1097280" cy="248502"/>
           </a:xfrm>
           <a:prstGeom prst="rect">
@@ -5279,7 +6059,46 @@
       </p:sp>
       <p:sp>
         <p:nvSpPr>
-          <p:cNvPr id="86" name="Text 84"/>
+          <p:cNvPr id="106" name="Text 104"/>
+          <p:cNvSpPr txBox="1"/>
+          <p:nvPr/>
+        </p:nvSpPr>
+        <p:spPr>
+          <a:xfrm>
+            <a:off x="10597896" y="1949286"/>
+            <a:ext cx="868680" cy="248502"/>
+          </a:xfrm>
+          <a:prstGeom prst="rect">
+            <a:avLst/>
+          </a:prstGeom>
+          <a:noFill/>
+          <a:ln/>
+        </p:spPr>
+        <p:txBody>
+          <a:bodyPr wrap="square" lIns="0" tIns="0" rIns="0" bIns="0" rtlCol="0" anchor="ctr"/>
+          <a:lstStyle/>
+          <a:p>
+            <a:pPr algn="r" indent="0" marL="0">
+              <a:buNone/>
+            </a:pPr>
+            <a:r>
+              <a:rPr lang="en-US" sz="1300" dirty="0">
+                <a:solidFill>
+                  <a:srgbClr val="595959"/>
+                </a:solidFill>
+                <a:latin typeface="Inter" pitchFamily="34" charset="0"/>
+                <a:ea typeface="Inter" pitchFamily="34" charset="-122"/>
+                <a:cs typeface="Inter" pitchFamily="34" charset="-120"/>
+              </a:rPr>
+              <a:t>−954</a:t>
+            </a:r>
+            <a:endParaRPr lang="en-US" sz="1300" dirty="0"/>
+          </a:p>
+        </p:txBody>
+      </p:sp>
+      <p:sp>
+        <p:nvSpPr>
+          <p:cNvPr id="107" name="Text 105"/>
           <p:cNvSpPr txBox="1"/>
           <p:nvPr/>
         </p:nvSpPr>
@@ -5318,7 +6137,7 @@
       </p:sp>
       <p:sp>
         <p:nvSpPr>
-          <p:cNvPr id="87" name="Text 85"/>
+          <p:cNvPr id="108" name="Text 106"/>
           <p:cNvSpPr txBox="1"/>
           <p:nvPr/>
         </p:nvSpPr>
@@ -5357,14 +6176,14 @@
       </p:sp>
       <p:sp>
         <p:nvSpPr>
-          <p:cNvPr id="88" name="Shape 86"/>
+          <p:cNvPr id="109" name="Shape 107"/>
           <p:cNvSpPr/>
           <p:nvPr/>
         </p:nvSpPr>
         <p:spPr>
           <a:xfrm>
-            <a:off x="9179400" y="2253700"/>
-            <a:ext cx="172006" cy="136676"/>
+            <a:off x="8903182" y="2253700"/>
+            <a:ext cx="82223" cy="136676"/>
           </a:xfrm>
           <a:prstGeom prst="rect">
             <a:avLst/>
@@ -5377,13 +6196,13 @@
       </p:sp>
       <p:sp>
         <p:nvSpPr>
-          <p:cNvPr id="89" name="Text 87"/>
-          <p:cNvSpPr txBox="1"/>
-          <p:nvPr/>
-        </p:nvSpPr>
-        <p:spPr>
-          <a:xfrm>
-            <a:off x="10369296" y="2197787"/>
+          <p:cNvPr id="110" name="Text 108"/>
+          <p:cNvSpPr txBox="1"/>
+          <p:nvPr/>
+        </p:nvSpPr>
+        <p:spPr>
+          <a:xfrm>
+            <a:off x="9500616" y="2197787"/>
             <a:ext cx="1097280" cy="248502"/>
           </a:xfrm>
           <a:prstGeom prst="rect">
@@ -5416,7 +6235,46 @@
       </p:sp>
       <p:sp>
         <p:nvSpPr>
-          <p:cNvPr id="90" name="Text 88"/>
+          <p:cNvPr id="111" name="Text 109"/>
+          <p:cNvSpPr txBox="1"/>
+          <p:nvPr/>
+        </p:nvSpPr>
+        <p:spPr>
+          <a:xfrm>
+            <a:off x="10597896" y="2197787"/>
+            <a:ext cx="868680" cy="248502"/>
+          </a:xfrm>
+          <a:prstGeom prst="rect">
+            <a:avLst/>
+          </a:prstGeom>
+          <a:noFill/>
+          <a:ln/>
+        </p:spPr>
+        <p:txBody>
+          <a:bodyPr wrap="square" lIns="0" tIns="0" rIns="0" bIns="0" rtlCol="0" anchor="ctr"/>
+          <a:lstStyle/>
+          <a:p>
+            <a:pPr algn="r" indent="0" marL="0">
+              <a:buNone/>
+            </a:pPr>
+            <a:r>
+              <a:rPr lang="en-US" sz="1300" dirty="0">
+                <a:solidFill>
+                  <a:srgbClr val="595959"/>
+                </a:solidFill>
+                <a:latin typeface="Inter" pitchFamily="34" charset="0"/>
+                <a:ea typeface="Inter" pitchFamily="34" charset="-122"/>
+                <a:cs typeface="Inter" pitchFamily="34" charset="-120"/>
+              </a:rPr>
+              <a:t>−1,100</a:t>
+            </a:r>
+            <a:endParaRPr lang="en-US" sz="1300" dirty="0"/>
+          </a:p>
+        </p:txBody>
+      </p:sp>
+      <p:sp>
+        <p:nvSpPr>
+          <p:cNvPr id="112" name="Text 110"/>
           <p:cNvSpPr txBox="1"/>
           <p:nvPr/>
         </p:nvSpPr>
@@ -5455,7 +6313,7 @@
       </p:sp>
       <p:sp>
         <p:nvSpPr>
-          <p:cNvPr id="91" name="Text 89"/>
+          <p:cNvPr id="113" name="Text 111"/>
           <p:cNvSpPr txBox="1"/>
           <p:nvPr/>
         </p:nvSpPr>
@@ -5494,14 +6352,14 @@
       </p:sp>
       <p:sp>
         <p:nvSpPr>
-          <p:cNvPr id="92" name="Shape 90"/>
+          <p:cNvPr id="114" name="Shape 112"/>
           <p:cNvSpPr/>
           <p:nvPr/>
         </p:nvSpPr>
         <p:spPr>
           <a:xfrm>
-            <a:off x="9170174" y="2502202"/>
-            <a:ext cx="181231" cy="136676"/>
+            <a:off x="8898772" y="2502202"/>
+            <a:ext cx="86632" cy="136676"/>
           </a:xfrm>
           <a:prstGeom prst="rect">
             <a:avLst/>
@@ -5514,13 +6372,13 @@
       </p:sp>
       <p:sp>
         <p:nvSpPr>
-          <p:cNvPr id="93" name="Text 91"/>
-          <p:cNvSpPr txBox="1"/>
-          <p:nvPr/>
-        </p:nvSpPr>
-        <p:spPr>
-          <a:xfrm>
-            <a:off x="10369296" y="2446289"/>
+          <p:cNvPr id="115" name="Text 113"/>
+          <p:cNvSpPr txBox="1"/>
+          <p:nvPr/>
+        </p:nvSpPr>
+        <p:spPr>
+          <a:xfrm>
+            <a:off x="9500616" y="2446289"/>
             <a:ext cx="1097280" cy="248502"/>
           </a:xfrm>
           <a:prstGeom prst="rect">
@@ -5553,7 +6411,46 @@
       </p:sp>
       <p:sp>
         <p:nvSpPr>
-          <p:cNvPr id="94" name="Text 92"/>
+          <p:cNvPr id="116" name="Text 114"/>
+          <p:cNvSpPr txBox="1"/>
+          <p:nvPr/>
+        </p:nvSpPr>
+        <p:spPr>
+          <a:xfrm>
+            <a:off x="10597896" y="2446289"/>
+            <a:ext cx="868680" cy="248502"/>
+          </a:xfrm>
+          <a:prstGeom prst="rect">
+            <a:avLst/>
+          </a:prstGeom>
+          <a:noFill/>
+          <a:ln/>
+        </p:spPr>
+        <p:txBody>
+          <a:bodyPr wrap="square" lIns="0" tIns="0" rIns="0" bIns="0" rtlCol="0" anchor="ctr"/>
+          <a:lstStyle/>
+          <a:p>
+            <a:pPr algn="r" indent="0" marL="0">
+              <a:buNone/>
+            </a:pPr>
+            <a:r>
+              <a:rPr lang="en-US" sz="1300" dirty="0">
+                <a:solidFill>
+                  <a:srgbClr val="595959"/>
+                </a:solidFill>
+                <a:latin typeface="Inter" pitchFamily="34" charset="0"/>
+                <a:ea typeface="Inter" pitchFamily="34" charset="-122"/>
+                <a:cs typeface="Inter" pitchFamily="34" charset="-120"/>
+              </a:rPr>
+              <a:t>−827</a:t>
+            </a:r>
+            <a:endParaRPr lang="en-US" sz="1300" dirty="0"/>
+          </a:p>
+        </p:txBody>
+      </p:sp>
+      <p:sp>
+        <p:nvSpPr>
+          <p:cNvPr id="117" name="Text 115"/>
           <p:cNvSpPr txBox="1"/>
           <p:nvPr/>
         </p:nvSpPr>
@@ -5592,7 +6489,7 @@
       </p:sp>
       <p:sp>
         <p:nvSpPr>
-          <p:cNvPr id="95" name="Text 93"/>
+          <p:cNvPr id="118" name="Text 116"/>
           <p:cNvSpPr txBox="1"/>
           <p:nvPr/>
         </p:nvSpPr>
@@ -5631,14 +6528,14 @@
       </p:sp>
       <p:sp>
         <p:nvSpPr>
-          <p:cNvPr id="96" name="Shape 94"/>
+          <p:cNvPr id="119" name="Shape 117"/>
           <p:cNvSpPr/>
           <p:nvPr/>
         </p:nvSpPr>
         <p:spPr>
           <a:xfrm>
-            <a:off x="9169305" y="2750703"/>
-            <a:ext cx="182101" cy="136676"/>
+            <a:off x="8898356" y="2750703"/>
+            <a:ext cx="87048" cy="136676"/>
           </a:xfrm>
           <a:prstGeom prst="rect">
             <a:avLst/>
@@ -5651,13 +6548,13 @@
       </p:sp>
       <p:sp>
         <p:nvSpPr>
-          <p:cNvPr id="97" name="Text 95"/>
-          <p:cNvSpPr txBox="1"/>
-          <p:nvPr/>
-        </p:nvSpPr>
-        <p:spPr>
-          <a:xfrm>
-            <a:off x="10369296" y="2694791"/>
+          <p:cNvPr id="120" name="Text 118"/>
+          <p:cNvSpPr txBox="1"/>
+          <p:nvPr/>
+        </p:nvSpPr>
+        <p:spPr>
+          <a:xfrm>
+            <a:off x="9500616" y="2694791"/>
             <a:ext cx="1097280" cy="248502"/>
           </a:xfrm>
           <a:prstGeom prst="rect">
@@ -5690,7 +6587,46 @@
       </p:sp>
       <p:sp>
         <p:nvSpPr>
-          <p:cNvPr id="98" name="Text 96"/>
+          <p:cNvPr id="121" name="Text 119"/>
+          <p:cNvSpPr txBox="1"/>
+          <p:nvPr/>
+        </p:nvSpPr>
+        <p:spPr>
+          <a:xfrm>
+            <a:off x="10597896" y="2694791"/>
+            <a:ext cx="868680" cy="248502"/>
+          </a:xfrm>
+          <a:prstGeom prst="rect">
+            <a:avLst/>
+          </a:prstGeom>
+          <a:noFill/>
+          <a:ln/>
+        </p:spPr>
+        <p:txBody>
+          <a:bodyPr wrap="square" lIns="0" tIns="0" rIns="0" bIns="0" rtlCol="0" anchor="ctr"/>
+          <a:lstStyle/>
+          <a:p>
+            <a:pPr algn="r" indent="0" marL="0">
+              <a:buNone/>
+            </a:pPr>
+            <a:r>
+              <a:rPr lang="en-US" sz="1300" dirty="0">
+                <a:solidFill>
+                  <a:srgbClr val="595959"/>
+                </a:solidFill>
+                <a:latin typeface="Inter" pitchFamily="34" charset="0"/>
+                <a:ea typeface="Inter" pitchFamily="34" charset="-122"/>
+                <a:cs typeface="Inter" pitchFamily="34" charset="-120"/>
+              </a:rPr>
+              <a:t>−1,068</a:t>
+            </a:r>
+            <a:endParaRPr lang="en-US" sz="1300" dirty="0"/>
+          </a:p>
+        </p:txBody>
+      </p:sp>
+      <p:sp>
+        <p:nvSpPr>
+          <p:cNvPr id="122" name="Text 120"/>
           <p:cNvSpPr txBox="1"/>
           <p:nvPr/>
         </p:nvSpPr>
@@ -5729,7 +6665,7 @@
       </p:sp>
       <p:sp>
         <p:nvSpPr>
-          <p:cNvPr id="99" name="Text 97"/>
+          <p:cNvPr id="123" name="Text 121"/>
           <p:cNvSpPr txBox="1"/>
           <p:nvPr/>
         </p:nvSpPr>
@@ -5768,14 +6704,14 @@
       </p:sp>
       <p:sp>
         <p:nvSpPr>
-          <p:cNvPr id="100" name="Shape 98"/>
+          <p:cNvPr id="124" name="Shape 122"/>
           <p:cNvSpPr/>
           <p:nvPr/>
         </p:nvSpPr>
         <p:spPr>
           <a:xfrm>
-            <a:off x="9109792" y="2999205"/>
-            <a:ext cx="241613" cy="136676"/>
+            <a:off x="8869908" y="2999205"/>
+            <a:ext cx="115496" cy="136676"/>
           </a:xfrm>
           <a:prstGeom prst="rect">
             <a:avLst/>
@@ -5788,13 +6724,13 @@
       </p:sp>
       <p:sp>
         <p:nvSpPr>
-          <p:cNvPr id="101" name="Text 99"/>
-          <p:cNvSpPr txBox="1"/>
-          <p:nvPr/>
-        </p:nvSpPr>
-        <p:spPr>
-          <a:xfrm>
-            <a:off x="10369296" y="2943292"/>
+          <p:cNvPr id="125" name="Text 123"/>
+          <p:cNvSpPr txBox="1"/>
+          <p:nvPr/>
+        </p:nvSpPr>
+        <p:spPr>
+          <a:xfrm>
+            <a:off x="9500616" y="2943292"/>
             <a:ext cx="1097280" cy="248502"/>
           </a:xfrm>
           <a:prstGeom prst="rect">
@@ -5827,7 +6763,46 @@
       </p:sp>
       <p:sp>
         <p:nvSpPr>
-          <p:cNvPr id="102" name="Text 100"/>
+          <p:cNvPr id="126" name="Text 124"/>
+          <p:cNvSpPr txBox="1"/>
+          <p:nvPr/>
+        </p:nvSpPr>
+        <p:spPr>
+          <a:xfrm>
+            <a:off x="10597896" y="2943292"/>
+            <a:ext cx="868680" cy="248502"/>
+          </a:xfrm>
+          <a:prstGeom prst="rect">
+            <a:avLst/>
+          </a:prstGeom>
+          <a:noFill/>
+          <a:ln/>
+        </p:spPr>
+        <p:txBody>
+          <a:bodyPr wrap="square" lIns="0" tIns="0" rIns="0" bIns="0" rtlCol="0" anchor="ctr"/>
+          <a:lstStyle/>
+          <a:p>
+            <a:pPr algn="r" indent="0" marL="0">
+              <a:buNone/>
+            </a:pPr>
+            <a:r>
+              <a:rPr lang="en-US" sz="1300" dirty="0">
+                <a:solidFill>
+                  <a:srgbClr val="595959"/>
+                </a:solidFill>
+                <a:latin typeface="Inter" pitchFamily="34" charset="0"/>
+                <a:ea typeface="Inter" pitchFamily="34" charset="-122"/>
+                <a:cs typeface="Inter" pitchFamily="34" charset="-120"/>
+              </a:rPr>
+              <a:t>−1,717</a:t>
+            </a:r>
+            <a:endParaRPr lang="en-US" sz="1300" dirty="0"/>
+          </a:p>
+        </p:txBody>
+      </p:sp>
+      <p:sp>
+        <p:nvSpPr>
+          <p:cNvPr id="127" name="Text 125"/>
           <p:cNvSpPr txBox="1"/>
           <p:nvPr/>
         </p:nvSpPr>
@@ -5866,7 +6841,7 @@
       </p:sp>
       <p:sp>
         <p:nvSpPr>
-          <p:cNvPr id="103" name="Text 101"/>
+          <p:cNvPr id="128" name="Text 126"/>
           <p:cNvSpPr txBox="1"/>
           <p:nvPr/>
         </p:nvSpPr>
@@ -5905,14 +6880,14 @@
       </p:sp>
       <p:sp>
         <p:nvSpPr>
-          <p:cNvPr id="104" name="Shape 102"/>
+          <p:cNvPr id="129" name="Shape 127"/>
           <p:cNvSpPr/>
           <p:nvPr/>
         </p:nvSpPr>
         <p:spPr>
           <a:xfrm>
-            <a:off x="9092573" y="3247707"/>
-            <a:ext cx="258833" cy="136676"/>
+            <a:off x="8861676" y="3247707"/>
+            <a:ext cx="123728" cy="136676"/>
           </a:xfrm>
           <a:prstGeom prst="rect">
             <a:avLst/>
@@ -5925,13 +6900,13 @@
       </p:sp>
       <p:sp>
         <p:nvSpPr>
-          <p:cNvPr id="105" name="Text 103"/>
-          <p:cNvSpPr txBox="1"/>
-          <p:nvPr/>
-        </p:nvSpPr>
-        <p:spPr>
-          <a:xfrm>
-            <a:off x="10369296" y="3191794"/>
+          <p:cNvPr id="130" name="Text 128"/>
+          <p:cNvSpPr txBox="1"/>
+          <p:nvPr/>
+        </p:nvSpPr>
+        <p:spPr>
+          <a:xfrm>
+            <a:off x="9500616" y="3191794"/>
             <a:ext cx="1097280" cy="248502"/>
           </a:xfrm>
           <a:prstGeom prst="rect">
@@ -5964,7 +6939,46 @@
       </p:sp>
       <p:sp>
         <p:nvSpPr>
-          <p:cNvPr id="106" name="Text 104"/>
+          <p:cNvPr id="131" name="Text 129"/>
+          <p:cNvSpPr txBox="1"/>
+          <p:nvPr/>
+        </p:nvSpPr>
+        <p:spPr>
+          <a:xfrm>
+            <a:off x="10597896" y="3191794"/>
+            <a:ext cx="868680" cy="248502"/>
+          </a:xfrm>
+          <a:prstGeom prst="rect">
+            <a:avLst/>
+          </a:prstGeom>
+          <a:noFill/>
+          <a:ln/>
+        </p:spPr>
+        <p:txBody>
+          <a:bodyPr wrap="square" lIns="0" tIns="0" rIns="0" bIns="0" rtlCol="0" anchor="ctr"/>
+          <a:lstStyle/>
+          <a:p>
+            <a:pPr algn="r" indent="0" marL="0">
+              <a:buNone/>
+            </a:pPr>
+            <a:r>
+              <a:rPr lang="en-US" sz="1300" dirty="0">
+                <a:solidFill>
+                  <a:srgbClr val="595959"/>
+                </a:solidFill>
+                <a:latin typeface="Inter" pitchFamily="34" charset="0"/>
+                <a:ea typeface="Inter" pitchFamily="34" charset="-122"/>
+                <a:cs typeface="Inter" pitchFamily="34" charset="-120"/>
+              </a:rPr>
+              <a:t>−1,613</a:t>
+            </a:r>
+            <a:endParaRPr lang="en-US" sz="1300" dirty="0"/>
+          </a:p>
+        </p:txBody>
+      </p:sp>
+      <p:sp>
+        <p:nvSpPr>
+          <p:cNvPr id="132" name="Text 130"/>
           <p:cNvSpPr txBox="1"/>
           <p:nvPr/>
         </p:nvSpPr>
@@ -6003,7 +7017,7 @@
       </p:sp>
       <p:sp>
         <p:nvSpPr>
-          <p:cNvPr id="107" name="Text 105"/>
+          <p:cNvPr id="133" name="Text 131"/>
           <p:cNvSpPr txBox="1"/>
           <p:nvPr/>
         </p:nvSpPr>
@@ -6042,14 +7056,14 @@
       </p:sp>
       <p:sp>
         <p:nvSpPr>
-          <p:cNvPr id="108" name="Shape 106"/>
+          <p:cNvPr id="134" name="Shape 132"/>
           <p:cNvSpPr/>
           <p:nvPr/>
         </p:nvSpPr>
         <p:spPr>
           <a:xfrm>
-            <a:off x="9092243" y="3496208"/>
-            <a:ext cx="259162" cy="136676"/>
+            <a:off x="8861519" y="3496208"/>
+            <a:ext cx="123885" cy="136676"/>
           </a:xfrm>
           <a:prstGeom prst="rect">
             <a:avLst/>
@@ -6062,13 +7076,13 @@
       </p:sp>
       <p:sp>
         <p:nvSpPr>
-          <p:cNvPr id="109" name="Text 107"/>
-          <p:cNvSpPr txBox="1"/>
-          <p:nvPr/>
-        </p:nvSpPr>
-        <p:spPr>
-          <a:xfrm>
-            <a:off x="10369296" y="3440296"/>
+          <p:cNvPr id="135" name="Text 133"/>
+          <p:cNvSpPr txBox="1"/>
+          <p:nvPr/>
+        </p:nvSpPr>
+        <p:spPr>
+          <a:xfrm>
+            <a:off x="9500616" y="3440296"/>
             <a:ext cx="1097280" cy="248502"/>
           </a:xfrm>
           <a:prstGeom prst="rect">
@@ -6101,7 +7115,46 @@
       </p:sp>
       <p:sp>
         <p:nvSpPr>
-          <p:cNvPr id="110" name="Text 108"/>
+          <p:cNvPr id="136" name="Text 134"/>
+          <p:cNvSpPr txBox="1"/>
+          <p:nvPr/>
+        </p:nvSpPr>
+        <p:spPr>
+          <a:xfrm>
+            <a:off x="10597896" y="3440296"/>
+            <a:ext cx="868680" cy="248502"/>
+          </a:xfrm>
+          <a:prstGeom prst="rect">
+            <a:avLst/>
+          </a:prstGeom>
+          <a:noFill/>
+          <a:ln/>
+        </p:spPr>
+        <p:txBody>
+          <a:bodyPr wrap="square" lIns="0" tIns="0" rIns="0" bIns="0" rtlCol="0" anchor="ctr"/>
+          <a:lstStyle/>
+          <a:p>
+            <a:pPr algn="r" indent="0" marL="0">
+              <a:buNone/>
+            </a:pPr>
+            <a:r>
+              <a:rPr lang="en-US" sz="1300" dirty="0">
+                <a:solidFill>
+                  <a:srgbClr val="595959"/>
+                </a:solidFill>
+                <a:latin typeface="Inter" pitchFamily="34" charset="0"/>
+                <a:ea typeface="Inter" pitchFamily="34" charset="-122"/>
+                <a:cs typeface="Inter" pitchFamily="34" charset="-120"/>
+              </a:rPr>
+              <a:t>−1,257</a:t>
+            </a:r>
+            <a:endParaRPr lang="en-US" sz="1300" dirty="0"/>
+          </a:p>
+        </p:txBody>
+      </p:sp>
+      <p:sp>
+        <p:nvSpPr>
+          <p:cNvPr id="137" name="Text 135"/>
           <p:cNvSpPr txBox="1"/>
           <p:nvPr/>
         </p:nvSpPr>
@@ -6140,7 +7193,7 @@
       </p:sp>
       <p:sp>
         <p:nvSpPr>
-          <p:cNvPr id="111" name="Text 109"/>
+          <p:cNvPr id="138" name="Text 136"/>
           <p:cNvSpPr txBox="1"/>
           <p:nvPr/>
         </p:nvSpPr>
@@ -6179,14 +7232,14 @@
       </p:sp>
       <p:sp>
         <p:nvSpPr>
-          <p:cNvPr id="112" name="Shape 110"/>
+          <p:cNvPr id="139" name="Shape 137"/>
           <p:cNvSpPr/>
           <p:nvPr/>
         </p:nvSpPr>
         <p:spPr>
           <a:xfrm>
-            <a:off x="9072005" y="3744710"/>
-            <a:ext cx="279401" cy="136676"/>
+            <a:off x="8851844" y="3744710"/>
+            <a:ext cx="133560" cy="136676"/>
           </a:xfrm>
           <a:prstGeom prst="rect">
             <a:avLst/>
@@ -6199,13 +7252,13 @@
       </p:sp>
       <p:sp>
         <p:nvSpPr>
-          <p:cNvPr id="113" name="Text 111"/>
-          <p:cNvSpPr txBox="1"/>
-          <p:nvPr/>
-        </p:nvSpPr>
-        <p:spPr>
-          <a:xfrm>
-            <a:off x="10369296" y="3688797"/>
+          <p:cNvPr id="140" name="Text 138"/>
+          <p:cNvSpPr txBox="1"/>
+          <p:nvPr/>
+        </p:nvSpPr>
+        <p:spPr>
+          <a:xfrm>
+            <a:off x="9500616" y="3688797"/>
             <a:ext cx="1097280" cy="248502"/>
           </a:xfrm>
           <a:prstGeom prst="rect">
@@ -6238,7 +7291,46 @@
       </p:sp>
       <p:sp>
         <p:nvSpPr>
-          <p:cNvPr id="114" name="Text 112"/>
+          <p:cNvPr id="141" name="Text 139"/>
+          <p:cNvSpPr txBox="1"/>
+          <p:nvPr/>
+        </p:nvSpPr>
+        <p:spPr>
+          <a:xfrm>
+            <a:off x="10597896" y="3688797"/>
+            <a:ext cx="868680" cy="248502"/>
+          </a:xfrm>
+          <a:prstGeom prst="rect">
+            <a:avLst/>
+          </a:prstGeom>
+          <a:noFill/>
+          <a:ln/>
+        </p:spPr>
+        <p:txBody>
+          <a:bodyPr wrap="square" lIns="0" tIns="0" rIns="0" bIns="0" rtlCol="0" anchor="ctr"/>
+          <a:lstStyle/>
+          <a:p>
+            <a:pPr algn="r" indent="0" marL="0">
+              <a:buNone/>
+            </a:pPr>
+            <a:r>
+              <a:rPr lang="en-US" sz="1300" dirty="0">
+                <a:solidFill>
+                  <a:srgbClr val="595959"/>
+                </a:solidFill>
+                <a:latin typeface="Inter" pitchFamily="34" charset="0"/>
+                <a:ea typeface="Inter" pitchFamily="34" charset="-122"/>
+                <a:cs typeface="Inter" pitchFamily="34" charset="-120"/>
+              </a:rPr>
+              <a:t>−1,152</a:t>
+            </a:r>
+            <a:endParaRPr lang="en-US" sz="1300" dirty="0"/>
+          </a:p>
+        </p:txBody>
+      </p:sp>
+      <p:sp>
+        <p:nvSpPr>
+          <p:cNvPr id="142" name="Text 140"/>
           <p:cNvSpPr txBox="1"/>
           <p:nvPr/>
         </p:nvSpPr>
@@ -6277,7 +7369,7 @@
       </p:sp>
       <p:sp>
         <p:nvSpPr>
-          <p:cNvPr id="115" name="Text 113"/>
+          <p:cNvPr id="143" name="Text 141"/>
           <p:cNvSpPr txBox="1"/>
           <p:nvPr/>
         </p:nvSpPr>
@@ -6316,14 +7408,14 @@
       </p:sp>
       <p:sp>
         <p:nvSpPr>
-          <p:cNvPr id="116" name="Shape 114"/>
+          <p:cNvPr id="144" name="Shape 142"/>
           <p:cNvSpPr/>
           <p:nvPr/>
         </p:nvSpPr>
         <p:spPr>
           <a:xfrm>
-            <a:off x="9049807" y="3993212"/>
-            <a:ext cx="301599" cy="136676"/>
+            <a:off x="8841233" y="3993212"/>
+            <a:ext cx="144171" cy="136676"/>
           </a:xfrm>
           <a:prstGeom prst="rect">
             <a:avLst/>
@@ -6336,13 +7428,13 @@
       </p:sp>
       <p:sp>
         <p:nvSpPr>
-          <p:cNvPr id="117" name="Text 115"/>
-          <p:cNvSpPr txBox="1"/>
-          <p:nvPr/>
-        </p:nvSpPr>
-        <p:spPr>
-          <a:xfrm>
-            <a:off x="10369296" y="3937299"/>
+          <p:cNvPr id="145" name="Text 143"/>
+          <p:cNvSpPr txBox="1"/>
+          <p:nvPr/>
+        </p:nvSpPr>
+        <p:spPr>
+          <a:xfrm>
+            <a:off x="9500616" y="3937299"/>
             <a:ext cx="1097280" cy="248502"/>
           </a:xfrm>
           <a:prstGeom prst="rect">
@@ -6375,7 +7467,46 @@
       </p:sp>
       <p:sp>
         <p:nvSpPr>
-          <p:cNvPr id="118" name="Text 116"/>
+          <p:cNvPr id="146" name="Text 144"/>
+          <p:cNvSpPr txBox="1"/>
+          <p:nvPr/>
+        </p:nvSpPr>
+        <p:spPr>
+          <a:xfrm>
+            <a:off x="10597896" y="3937299"/>
+            <a:ext cx="868680" cy="248502"/>
+          </a:xfrm>
+          <a:prstGeom prst="rect">
+            <a:avLst/>
+          </a:prstGeom>
+          <a:noFill/>
+          <a:ln/>
+        </p:spPr>
+        <p:txBody>
+          <a:bodyPr wrap="square" lIns="0" tIns="0" rIns="0" bIns="0" rtlCol="0" anchor="ctr"/>
+          <a:lstStyle/>
+          <a:p>
+            <a:pPr algn="r" indent="0" marL="0">
+              <a:buNone/>
+            </a:pPr>
+            <a:r>
+              <a:rPr lang="en-US" sz="1300" dirty="0">
+                <a:solidFill>
+                  <a:srgbClr val="595959"/>
+                </a:solidFill>
+                <a:latin typeface="Inter" pitchFamily="34" charset="0"/>
+                <a:ea typeface="Inter" pitchFamily="34" charset="-122"/>
+                <a:cs typeface="Inter" pitchFamily="34" charset="-120"/>
+              </a:rPr>
+              <a:t>−1,906</a:t>
+            </a:r>
+            <a:endParaRPr lang="en-US" sz="1300" dirty="0"/>
+          </a:p>
+        </p:txBody>
+      </p:sp>
+      <p:sp>
+        <p:nvSpPr>
+          <p:cNvPr id="147" name="Text 145"/>
           <p:cNvSpPr txBox="1"/>
           <p:nvPr/>
         </p:nvSpPr>
@@ -6414,7 +7545,7 @@
       </p:sp>
       <p:sp>
         <p:nvSpPr>
-          <p:cNvPr id="119" name="Text 117"/>
+          <p:cNvPr id="148" name="Text 146"/>
           <p:cNvSpPr txBox="1"/>
           <p:nvPr/>
         </p:nvSpPr>
@@ -6453,14 +7584,14 @@
       </p:sp>
       <p:sp>
         <p:nvSpPr>
-          <p:cNvPr id="120" name="Shape 118"/>
+          <p:cNvPr id="149" name="Shape 147"/>
           <p:cNvSpPr/>
           <p:nvPr/>
         </p:nvSpPr>
         <p:spPr>
           <a:xfrm>
-            <a:off x="9034236" y="4241713"/>
-            <a:ext cx="317170" cy="136676"/>
+            <a:off x="8833790" y="4241713"/>
+            <a:ext cx="151614" cy="136676"/>
           </a:xfrm>
           <a:prstGeom prst="rect">
             <a:avLst/>
@@ -6473,13 +7604,13 @@
       </p:sp>
       <p:sp>
         <p:nvSpPr>
-          <p:cNvPr id="121" name="Text 119"/>
-          <p:cNvSpPr txBox="1"/>
-          <p:nvPr/>
-        </p:nvSpPr>
-        <p:spPr>
-          <a:xfrm>
-            <a:off x="10369296" y="4185800"/>
+          <p:cNvPr id="150" name="Text 148"/>
+          <p:cNvSpPr txBox="1"/>
+          <p:nvPr/>
+        </p:nvSpPr>
+        <p:spPr>
+          <a:xfrm>
+            <a:off x="9500616" y="4185800"/>
             <a:ext cx="1097280" cy="248502"/>
           </a:xfrm>
           <a:prstGeom prst="rect">
@@ -6512,7 +7643,46 @@
       </p:sp>
       <p:sp>
         <p:nvSpPr>
-          <p:cNvPr id="122" name="Text 120"/>
+          <p:cNvPr id="151" name="Text 149"/>
+          <p:cNvSpPr txBox="1"/>
+          <p:nvPr/>
+        </p:nvSpPr>
+        <p:spPr>
+          <a:xfrm>
+            <a:off x="10597896" y="4185800"/>
+            <a:ext cx="868680" cy="248502"/>
+          </a:xfrm>
+          <a:prstGeom prst="rect">
+            <a:avLst/>
+          </a:prstGeom>
+          <a:noFill/>
+          <a:ln/>
+        </p:spPr>
+        <p:txBody>
+          <a:bodyPr wrap="square" lIns="0" tIns="0" rIns="0" bIns="0" rtlCol="0" anchor="ctr"/>
+          <a:lstStyle/>
+          <a:p>
+            <a:pPr algn="r" indent="0" marL="0">
+              <a:buNone/>
+            </a:pPr>
+            <a:r>
+              <a:rPr lang="en-US" sz="1300" dirty="0">
+                <a:solidFill>
+                  <a:srgbClr val="595959"/>
+                </a:solidFill>
+                <a:latin typeface="Inter" pitchFamily="34" charset="0"/>
+                <a:ea typeface="Inter" pitchFamily="34" charset="-122"/>
+                <a:cs typeface="Inter" pitchFamily="34" charset="-120"/>
+              </a:rPr>
+              <a:t>−1,863</a:t>
+            </a:r>
+            <a:endParaRPr lang="en-US" sz="1300" dirty="0"/>
+          </a:p>
+        </p:txBody>
+      </p:sp>
+      <p:sp>
+        <p:nvSpPr>
+          <p:cNvPr id="152" name="Text 150"/>
           <p:cNvSpPr txBox="1"/>
           <p:nvPr/>
         </p:nvSpPr>
@@ -6551,7 +7721,7 @@
       </p:sp>
       <p:sp>
         <p:nvSpPr>
-          <p:cNvPr id="123" name="Text 121"/>
+          <p:cNvPr id="153" name="Text 151"/>
           <p:cNvSpPr txBox="1"/>
           <p:nvPr/>
         </p:nvSpPr>
@@ -6590,14 +7760,14 @@
       </p:sp>
       <p:sp>
         <p:nvSpPr>
-          <p:cNvPr id="124" name="Shape 122"/>
+          <p:cNvPr id="154" name="Shape 152"/>
           <p:cNvSpPr/>
           <p:nvPr/>
         </p:nvSpPr>
         <p:spPr>
           <a:xfrm>
-            <a:off x="9031867" y="4490215"/>
-            <a:ext cx="319539" cy="136676"/>
+            <a:off x="8832658" y="4490215"/>
+            <a:ext cx="152747" cy="136676"/>
           </a:xfrm>
           <a:prstGeom prst="rect">
             <a:avLst/>
@@ -6610,13 +7780,13 @@
       </p:sp>
       <p:sp>
         <p:nvSpPr>
-          <p:cNvPr id="125" name="Text 123"/>
-          <p:cNvSpPr txBox="1"/>
-          <p:nvPr/>
-        </p:nvSpPr>
-        <p:spPr>
-          <a:xfrm>
-            <a:off x="10369296" y="4434302"/>
+          <p:cNvPr id="155" name="Text 153"/>
+          <p:cNvSpPr txBox="1"/>
+          <p:nvPr/>
+        </p:nvSpPr>
+        <p:spPr>
+          <a:xfrm>
+            <a:off x="9500616" y="4434302"/>
             <a:ext cx="1097280" cy="248502"/>
           </a:xfrm>
           <a:prstGeom prst="rect">
@@ -6649,7 +7819,46 @@
       </p:sp>
       <p:sp>
         <p:nvSpPr>
-          <p:cNvPr id="126" name="Text 124"/>
+          <p:cNvPr id="156" name="Text 154"/>
+          <p:cNvSpPr txBox="1"/>
+          <p:nvPr/>
+        </p:nvSpPr>
+        <p:spPr>
+          <a:xfrm>
+            <a:off x="10597896" y="4434302"/>
+            <a:ext cx="868680" cy="248502"/>
+          </a:xfrm>
+          <a:prstGeom prst="rect">
+            <a:avLst/>
+          </a:prstGeom>
+          <a:noFill/>
+          <a:ln/>
+        </p:spPr>
+        <p:txBody>
+          <a:bodyPr wrap="square" lIns="0" tIns="0" rIns="0" bIns="0" rtlCol="0" anchor="ctr"/>
+          <a:lstStyle/>
+          <a:p>
+            <a:pPr algn="r" indent="0" marL="0">
+              <a:buNone/>
+            </a:pPr>
+            <a:r>
+              <a:rPr lang="en-US" sz="1300" dirty="0">
+                <a:solidFill>
+                  <a:srgbClr val="595959"/>
+                </a:solidFill>
+                <a:latin typeface="Inter" pitchFamily="34" charset="0"/>
+                <a:ea typeface="Inter" pitchFamily="34" charset="-122"/>
+                <a:cs typeface="Inter" pitchFamily="34" charset="-120"/>
+              </a:rPr>
+              <a:t>−1,708</a:t>
+            </a:r>
+            <a:endParaRPr lang="en-US" sz="1300" dirty="0"/>
+          </a:p>
+        </p:txBody>
+      </p:sp>
+      <p:sp>
+        <p:nvSpPr>
+          <p:cNvPr id="157" name="Text 155"/>
           <p:cNvSpPr txBox="1"/>
           <p:nvPr/>
         </p:nvSpPr>
@@ -6688,7 +7897,7 @@
       </p:sp>
       <p:sp>
         <p:nvSpPr>
-          <p:cNvPr id="127" name="Text 125"/>
+          <p:cNvPr id="158" name="Text 156"/>
           <p:cNvSpPr txBox="1"/>
           <p:nvPr/>
         </p:nvSpPr>
@@ -6727,14 +7936,14 @@
       </p:sp>
       <p:sp>
         <p:nvSpPr>
-          <p:cNvPr id="128" name="Shape 126"/>
+          <p:cNvPr id="159" name="Shape 157"/>
           <p:cNvSpPr/>
           <p:nvPr/>
         </p:nvSpPr>
         <p:spPr>
           <a:xfrm>
-            <a:off x="8959526" y="4738717"/>
-            <a:ext cx="391880" cy="136676"/>
+            <a:off x="8798077" y="4738717"/>
+            <a:ext cx="187327" cy="136676"/>
           </a:xfrm>
           <a:prstGeom prst="rect">
             <a:avLst/>
@@ -6747,13 +7956,13 @@
       </p:sp>
       <p:sp>
         <p:nvSpPr>
-          <p:cNvPr id="129" name="Text 127"/>
-          <p:cNvSpPr txBox="1"/>
-          <p:nvPr/>
-        </p:nvSpPr>
-        <p:spPr>
-          <a:xfrm>
-            <a:off x="10369296" y="4682804"/>
+          <p:cNvPr id="160" name="Text 158"/>
+          <p:cNvSpPr txBox="1"/>
+          <p:nvPr/>
+        </p:nvSpPr>
+        <p:spPr>
+          <a:xfrm>
+            <a:off x="9500616" y="4682804"/>
             <a:ext cx="1097280" cy="248502"/>
           </a:xfrm>
           <a:prstGeom prst="rect">
@@ -6786,7 +7995,46 @@
       </p:sp>
       <p:sp>
         <p:nvSpPr>
-          <p:cNvPr id="130" name="Text 128"/>
+          <p:cNvPr id="161" name="Text 159"/>
+          <p:cNvSpPr txBox="1"/>
+          <p:nvPr/>
+        </p:nvSpPr>
+        <p:spPr>
+          <a:xfrm>
+            <a:off x="10597896" y="4682804"/>
+            <a:ext cx="868680" cy="248502"/>
+          </a:xfrm>
+          <a:prstGeom prst="rect">
+            <a:avLst/>
+          </a:prstGeom>
+          <a:noFill/>
+          <a:ln/>
+        </p:spPr>
+        <p:txBody>
+          <a:bodyPr wrap="square" lIns="0" tIns="0" rIns="0" bIns="0" rtlCol="0" anchor="ctr"/>
+          <a:lstStyle/>
+          <a:p>
+            <a:pPr algn="r" indent="0" marL="0">
+              <a:buNone/>
+            </a:pPr>
+            <a:r>
+              <a:rPr lang="en-US" sz="1300" dirty="0">
+                <a:solidFill>
+                  <a:srgbClr val="595959"/>
+                </a:solidFill>
+                <a:latin typeface="Inter" pitchFamily="34" charset="0"/>
+                <a:ea typeface="Inter" pitchFamily="34" charset="-122"/>
+                <a:cs typeface="Inter" pitchFamily="34" charset="-120"/>
+              </a:rPr>
+              <a:t>−3,005</a:t>
+            </a:r>
+            <a:endParaRPr lang="en-US" sz="1300" dirty="0"/>
+          </a:p>
+        </p:txBody>
+      </p:sp>
+      <p:sp>
+        <p:nvSpPr>
+          <p:cNvPr id="162" name="Text 160"/>
           <p:cNvSpPr txBox="1"/>
           <p:nvPr/>
         </p:nvSpPr>
@@ -6825,7 +8073,7 @@
       </p:sp>
       <p:sp>
         <p:nvSpPr>
-          <p:cNvPr id="131" name="Text 129"/>
+          <p:cNvPr id="163" name="Text 161"/>
           <p:cNvSpPr txBox="1"/>
           <p:nvPr/>
         </p:nvSpPr>
@@ -6864,14 +8112,14 @@
       </p:sp>
       <p:sp>
         <p:nvSpPr>
-          <p:cNvPr id="132" name="Shape 130"/>
+          <p:cNvPr id="164" name="Shape 162"/>
           <p:cNvSpPr/>
           <p:nvPr/>
         </p:nvSpPr>
         <p:spPr>
           <a:xfrm>
-            <a:off x="8890482" y="4987218"/>
-            <a:ext cx="460924" cy="136676"/>
+            <a:off x="8765072" y="4987218"/>
+            <a:ext cx="220332" cy="136676"/>
           </a:xfrm>
           <a:prstGeom prst="rect">
             <a:avLst/>
@@ -6884,13 +8132,13 @@
       </p:sp>
       <p:sp>
         <p:nvSpPr>
-          <p:cNvPr id="133" name="Text 131"/>
-          <p:cNvSpPr txBox="1"/>
-          <p:nvPr/>
-        </p:nvSpPr>
-        <p:spPr>
-          <a:xfrm>
-            <a:off x="10369296" y="4931305"/>
+          <p:cNvPr id="165" name="Text 163"/>
+          <p:cNvSpPr txBox="1"/>
+          <p:nvPr/>
+        </p:nvSpPr>
+        <p:spPr>
+          <a:xfrm>
+            <a:off x="9500616" y="4931305"/>
             <a:ext cx="1097280" cy="248502"/>
           </a:xfrm>
           <a:prstGeom prst="rect">
@@ -6923,7 +8171,46 @@
       </p:sp>
       <p:sp>
         <p:nvSpPr>
-          <p:cNvPr id="134" name="Text 132"/>
+          <p:cNvPr id="166" name="Text 164"/>
+          <p:cNvSpPr txBox="1"/>
+          <p:nvPr/>
+        </p:nvSpPr>
+        <p:spPr>
+          <a:xfrm>
+            <a:off x="10597896" y="4931305"/>
+            <a:ext cx="868680" cy="248502"/>
+          </a:xfrm>
+          <a:prstGeom prst="rect">
+            <a:avLst/>
+          </a:prstGeom>
+          <a:noFill/>
+          <a:ln/>
+        </p:spPr>
+        <p:txBody>
+          <a:bodyPr wrap="square" lIns="0" tIns="0" rIns="0" bIns="0" rtlCol="0" anchor="ctr"/>
+          <a:lstStyle/>
+          <a:p>
+            <a:pPr algn="r" indent="0" marL="0">
+              <a:buNone/>
+            </a:pPr>
+            <a:r>
+              <a:rPr lang="en-US" sz="1300" dirty="0">
+                <a:solidFill>
+                  <a:srgbClr val="595959"/>
+                </a:solidFill>
+                <a:latin typeface="Inter" pitchFamily="34" charset="0"/>
+                <a:ea typeface="Inter" pitchFamily="34" charset="-122"/>
+                <a:cs typeface="Inter" pitchFamily="34" charset="-120"/>
+              </a:rPr>
+              <a:t>−3,494</a:t>
+            </a:r>
+            <a:endParaRPr lang="en-US" sz="1300" dirty="0"/>
+          </a:p>
+        </p:txBody>
+      </p:sp>
+      <p:sp>
+        <p:nvSpPr>
+          <p:cNvPr id="167" name="Text 165"/>
           <p:cNvSpPr txBox="1"/>
           <p:nvPr/>
         </p:nvSpPr>
@@ -6962,7 +8249,7 @@
       </p:sp>
       <p:sp>
         <p:nvSpPr>
-          <p:cNvPr id="135" name="Text 133"/>
+          <p:cNvPr id="168" name="Text 166"/>
           <p:cNvSpPr txBox="1"/>
           <p:nvPr/>
         </p:nvSpPr>
@@ -7001,14 +8288,14 @@
       </p:sp>
       <p:sp>
         <p:nvSpPr>
-          <p:cNvPr id="136" name="Shape 134"/>
+          <p:cNvPr id="169" name="Shape 167"/>
           <p:cNvSpPr/>
           <p:nvPr/>
         </p:nvSpPr>
         <p:spPr>
           <a:xfrm>
-            <a:off x="8735965" y="5235720"/>
-            <a:ext cx="615441" cy="136676"/>
+            <a:off x="8691210" y="5235720"/>
+            <a:ext cx="294194" cy="136676"/>
           </a:xfrm>
           <a:prstGeom prst="rect">
             <a:avLst/>
@@ -7021,13 +8308,13 @@
       </p:sp>
       <p:sp>
         <p:nvSpPr>
-          <p:cNvPr id="137" name="Text 135"/>
-          <p:cNvSpPr txBox="1"/>
-          <p:nvPr/>
-        </p:nvSpPr>
-        <p:spPr>
-          <a:xfrm>
-            <a:off x="10369296" y="5179807"/>
+          <p:cNvPr id="170" name="Text 168"/>
+          <p:cNvSpPr txBox="1"/>
+          <p:nvPr/>
+        </p:nvSpPr>
+        <p:spPr>
+          <a:xfrm>
+            <a:off x="9500616" y="5179807"/>
             <a:ext cx="1097280" cy="248502"/>
           </a:xfrm>
           <a:prstGeom prst="rect">
@@ -7060,7 +8347,46 @@
       </p:sp>
       <p:sp>
         <p:nvSpPr>
-          <p:cNvPr id="138" name="Text 136"/>
+          <p:cNvPr id="171" name="Text 169"/>
+          <p:cNvSpPr txBox="1"/>
+          <p:nvPr/>
+        </p:nvSpPr>
+        <p:spPr>
+          <a:xfrm>
+            <a:off x="10597896" y="5179807"/>
+            <a:ext cx="868680" cy="248502"/>
+          </a:xfrm>
+          <a:prstGeom prst="rect">
+            <a:avLst/>
+          </a:prstGeom>
+          <a:noFill/>
+          <a:ln/>
+        </p:spPr>
+        <p:txBody>
+          <a:bodyPr wrap="square" lIns="0" tIns="0" rIns="0" bIns="0" rtlCol="0" anchor="ctr"/>
+          <a:lstStyle/>
+          <a:p>
+            <a:pPr algn="r" indent="0" marL="0">
+              <a:buNone/>
+            </a:pPr>
+            <a:r>
+              <a:rPr lang="en-US" sz="1300" dirty="0">
+                <a:solidFill>
+                  <a:srgbClr val="595959"/>
+                </a:solidFill>
+                <a:latin typeface="Inter" pitchFamily="34" charset="0"/>
+                <a:ea typeface="Inter" pitchFamily="34" charset="-122"/>
+                <a:cs typeface="Inter" pitchFamily="34" charset="-120"/>
+              </a:rPr>
+              <a:t>−3,177</a:t>
+            </a:r>
+            <a:endParaRPr lang="en-US" sz="1300" dirty="0"/>
+          </a:p>
+        </p:txBody>
+      </p:sp>
+      <p:sp>
+        <p:nvSpPr>
+          <p:cNvPr id="172" name="Text 170"/>
           <p:cNvSpPr txBox="1"/>
           <p:nvPr/>
         </p:nvSpPr>
@@ -7099,7 +8425,7 @@
       </p:sp>
       <p:sp>
         <p:nvSpPr>
-          <p:cNvPr id="139" name="Text 137"/>
+          <p:cNvPr id="173" name="Text 171"/>
           <p:cNvSpPr txBox="1"/>
           <p:nvPr/>
         </p:nvSpPr>
@@ -7138,14 +8464,14 @@
       </p:sp>
       <p:sp>
         <p:nvSpPr>
-          <p:cNvPr id="140" name="Shape 138"/>
+          <p:cNvPr id="174" name="Shape 172"/>
           <p:cNvSpPr/>
           <p:nvPr/>
         </p:nvSpPr>
         <p:spPr>
           <a:xfrm>
             <a:off x="8650224" y="5484222"/>
-            <a:ext cx="701181" cy="136676"/>
+            <a:ext cx="335180" cy="136676"/>
           </a:xfrm>
           <a:prstGeom prst="rect">
             <a:avLst/>
@@ -7158,13 +8484,13 @@
       </p:sp>
       <p:sp>
         <p:nvSpPr>
-          <p:cNvPr id="141" name="Text 139"/>
-          <p:cNvSpPr txBox="1"/>
-          <p:nvPr/>
-        </p:nvSpPr>
-        <p:spPr>
-          <a:xfrm>
-            <a:off x="10369296" y="5428309"/>
+          <p:cNvPr id="175" name="Text 173"/>
+          <p:cNvSpPr txBox="1"/>
+          <p:nvPr/>
+        </p:nvSpPr>
+        <p:spPr>
+          <a:xfrm>
+            <a:off x="9500616" y="5428309"/>
             <a:ext cx="1097280" cy="248502"/>
           </a:xfrm>
           <a:prstGeom prst="rect">
@@ -7197,7 +8523,46 @@
       </p:sp>
       <p:sp>
         <p:nvSpPr>
-          <p:cNvPr id="142" name="Shape 140"/>
+          <p:cNvPr id="176" name="Text 174"/>
+          <p:cNvSpPr txBox="1"/>
+          <p:nvPr/>
+        </p:nvSpPr>
+        <p:spPr>
+          <a:xfrm>
+            <a:off x="10597896" y="5428309"/>
+            <a:ext cx="868680" cy="248502"/>
+          </a:xfrm>
+          <a:prstGeom prst="rect">
+            <a:avLst/>
+          </a:prstGeom>
+          <a:noFill/>
+          <a:ln/>
+        </p:spPr>
+        <p:txBody>
+          <a:bodyPr wrap="square" lIns="0" tIns="0" rIns="0" bIns="0" rtlCol="0" anchor="ctr"/>
+          <a:lstStyle/>
+          <a:p>
+            <a:pPr algn="r" indent="0" marL="0">
+              <a:buNone/>
+            </a:pPr>
+            <a:r>
+              <a:rPr lang="en-US" sz="1300" dirty="0">
+                <a:solidFill>
+                  <a:srgbClr val="595959"/>
+                </a:solidFill>
+                <a:latin typeface="Inter" pitchFamily="34" charset="0"/>
+                <a:ea typeface="Inter" pitchFamily="34" charset="-122"/>
+                <a:cs typeface="Inter" pitchFamily="34" charset="-120"/>
+              </a:rPr>
+              <a:t>−5,191</a:t>
+            </a:r>
+            <a:endParaRPr lang="en-US" sz="1300" dirty="0"/>
+          </a:p>
+        </p:txBody>
+      </p:sp>
+      <p:sp>
+        <p:nvSpPr>
+          <p:cNvPr id="177" name="Shape 175"/>
           <p:cNvSpPr/>
           <p:nvPr/>
         </p:nvSpPr>
@@ -7217,7 +8582,7 @@
       </p:sp>
       <p:sp>
         <p:nvSpPr>
-          <p:cNvPr id="143" name="Shape 141"/>
+          <p:cNvPr id="178" name="Shape 176"/>
           <p:cNvSpPr/>
           <p:nvPr/>
         </p:nvSpPr>
@@ -7237,7 +8602,7 @@
       </p:sp>
       <p:sp>
         <p:nvSpPr>
-          <p:cNvPr id="144" name="Text 142"/>
+          <p:cNvPr id="179" name="Text 177"/>
           <p:cNvSpPr txBox="1"/>
           <p:nvPr/>
         </p:nvSpPr>

--- a/day2-deck/decks/Op Code Missed Opportunity - Review.pptx
+++ b/day2-deck/decks/Op Code Missed Opportunity - Review.pptx
@@ -595,7 +595,7 @@
           <a:p>
             <a:r>
               <a:rPr lang="en-US" dirty="0"/>
-              <a:t>Source: Qlik - Closed Repair Orders. Customer pay, Jan-Sep 2026 by close date, op code report basis. Same-store, INEOS excluded (opened 2026). Services short = benchmark x the store's CP ROs, minus the services it sold. Each service valued at the store's own labor + parts gross per service sold (group average where the store sold fewer than 30), capped at twice the group average because some flagged lines carry other work bundled on them. Alignment, tire balance, brake fluid and fuel system service added together, every store: gross Jan-Sep 2026 above (+) or below (-) the four benchmarks, at the store's own gross per service. Opcodes = the four services' opcodes above (+) or below (-) their benchmarks, added together. Below-benchmark services count against above-benchmark ones here.TOYOTA SPOKANE: −$406K, −5,191 opcodes Jan-Sep against the four benchmarks; under 4 of 4
+              <a:t>Source: Qlik - Closed Repair Orders. Customer pay, Jan-Sep 2026 by close date, op code report basis. Same-store, INEOS excluded (opened 2026). Services short = benchmark x the store's CP ROs, minus the services it sold. Each service valued at the store's own labor + parts gross per service sold (group average where the store sold fewer than 30), capped at twice the group average because some flagged lines carry other work bundled on them. Alignment, tire balance, brake fluid and fuel system service added together, every store: gross Jan-Sep 2026 above (+) or below (-) the four benchmarks, at the store's own gross per service. Opcodes = the four services' opcodes above (+) or below (-) their benchmarks, added together; green / red bar = top / bottom three by opcodes. Below-benchmark services count against above-benchmark ones here.TOYOTA SPOKANE: −$406K, −5,191 opcodes Jan-Sep against the four benchmarks; under 4 of 4
 CHEVY LV: −$356K, −3,177 opcodes Jan-Sep against the four benchmarks; under 4 of 4
 TOYOTA FLAGSTAFF: −$267K, −3,494 opcodes Jan-Sep against the four benchmarks; under 4 of 4
 TOYOTA HENDERSON: −$227K, −3,005 opcodes Jan-Sep against the four benchmarks; under 3 of 4
@@ -1713,7 +1713,7 @@
                 <a:ea typeface="Inter" pitchFamily="34" charset="-122"/>
                 <a:cs typeface="Inter" pitchFamily="34" charset="-120"/>
               </a:rPr>
-              <a:t>a year in labor and parts gross · about $407,933 a month</a:t>
+              <a:t>a year in labor and parts gross · $407,933 a month</a:t>
             </a:r>
             <a:endParaRPr lang="en-US" sz="2000" dirty="0"/>
           </a:p>
@@ -2930,92 +2930,14 @@
       </p:sp>
       <p:sp>
         <p:nvSpPr>
-          <p:cNvPr id="17" name="Text 15"/>
-          <p:cNvSpPr txBox="1"/>
-          <p:nvPr/>
-        </p:nvSpPr>
-        <p:spPr>
-          <a:xfrm>
-            <a:off x="658368" y="1949286"/>
-            <a:ext cx="310896" cy="248502"/>
-          </a:xfrm>
-          <a:prstGeom prst="rect">
-            <a:avLst/>
-          </a:prstGeom>
-          <a:noFill/>
-          <a:ln/>
-        </p:spPr>
-        <p:txBody>
-          <a:bodyPr wrap="square" lIns="0" tIns="0" rIns="0" bIns="0" rtlCol="0" anchor="ctr"/>
-          <a:lstStyle/>
-          <a:p>
-            <a:pPr algn="r" indent="0" marL="0">
-              <a:buNone/>
-            </a:pPr>
-            <a:r>
-              <a:rPr lang="en-US" sz="1200" dirty="0">
-                <a:solidFill>
-                  <a:srgbClr val="9AA3AD"/>
-                </a:solidFill>
-                <a:latin typeface="Inter" pitchFamily="34" charset="0"/>
-                <a:ea typeface="Inter" pitchFamily="34" charset="-122"/>
-                <a:cs typeface="Inter" pitchFamily="34" charset="-120"/>
-              </a:rPr>
-              <a:t>2</a:t>
-            </a:r>
-            <a:endParaRPr lang="en-US" sz="1200" dirty="0"/>
-          </a:p>
-        </p:txBody>
-      </p:sp>
-      <p:sp>
-        <p:nvSpPr>
-          <p:cNvPr id="18" name="Text 16"/>
-          <p:cNvSpPr txBox="1"/>
-          <p:nvPr/>
-        </p:nvSpPr>
-        <p:spPr>
-          <a:xfrm>
-            <a:off x="1014984" y="1949286"/>
-            <a:ext cx="2011680" cy="248502"/>
-          </a:xfrm>
-          <a:prstGeom prst="rect">
-            <a:avLst/>
-          </a:prstGeom>
-          <a:noFill/>
-          <a:ln/>
-        </p:spPr>
-        <p:txBody>
-          <a:bodyPr wrap="square" lIns="0" tIns="0" rIns="0" bIns="0" rtlCol="0" anchor="ctr"/>
-          <a:lstStyle/>
-          <a:p>
-            <a:pPr indent="0" marL="0">
-              <a:buNone/>
-            </a:pPr>
-            <a:r>
-              <a:rPr lang="en-US" sz="1300" dirty="0">
-                <a:solidFill>
-                  <a:srgbClr val="1A1A1A"/>
-                </a:solidFill>
-                <a:latin typeface="Inter" pitchFamily="34" charset="0"/>
-                <a:ea typeface="Inter" pitchFamily="34" charset="-122"/>
-                <a:cs typeface="Inter" pitchFamily="34" charset="-120"/>
-              </a:rPr>
-              <a:t>LR LV</a:t>
-            </a:r>
-            <a:endParaRPr lang="en-US" sz="1300" dirty="0"/>
-          </a:p>
-        </p:txBody>
-      </p:sp>
-      <p:sp>
-        <p:nvSpPr>
-          <p:cNvPr id="19" name="Shape 17"/>
+          <p:cNvPr id="17" name="Shape 15"/>
           <p:cNvSpPr/>
           <p:nvPr/>
         </p:nvSpPr>
         <p:spPr>
           <a:xfrm>
-            <a:off x="3434996" y="2005199"/>
-            <a:ext cx="124432" cy="136676"/>
+            <a:off x="5971032" y="1746504"/>
+            <a:ext cx="54864" cy="157062"/>
           </a:xfrm>
           <a:prstGeom prst="rect">
             <a:avLst/>
@@ -3028,170 +2950,92 @@
       </p:sp>
       <p:sp>
         <p:nvSpPr>
-          <p:cNvPr id="20" name="Text 18"/>
-          <p:cNvSpPr txBox="1"/>
-          <p:nvPr/>
-        </p:nvSpPr>
-        <p:spPr>
-          <a:xfrm>
-            <a:off x="3950208" y="1949286"/>
-            <a:ext cx="1097280" cy="248502"/>
-          </a:xfrm>
-          <a:prstGeom prst="rect">
-            <a:avLst/>
-          </a:prstGeom>
-          <a:noFill/>
-          <a:ln/>
-        </p:spPr>
-        <p:txBody>
-          <a:bodyPr wrap="square" lIns="0" tIns="0" rIns="0" bIns="0" rtlCol="0" anchor="ctr"/>
-          <a:lstStyle/>
-          <a:p>
-            <a:pPr algn="r" indent="0" marL="0">
-              <a:buNone/>
-            </a:pPr>
-            <a:r>
-              <a:rPr lang="en-US" sz="1300" b="1" dirty="0">
-                <a:solidFill>
-                  <a:srgbClr val="0B7A4A"/>
-                </a:solidFill>
-                <a:latin typeface="Inter" pitchFamily="34" charset="0"/>
-                <a:ea typeface="Inter" pitchFamily="34" charset="-122"/>
-                <a:cs typeface="Inter" pitchFamily="34" charset="-120"/>
-              </a:rPr>
-              <a:t>+$151K</a:t>
-            </a:r>
-            <a:endParaRPr lang="en-US" sz="1300" dirty="0"/>
-          </a:p>
-        </p:txBody>
-      </p:sp>
-      <p:sp>
-        <p:nvSpPr>
-          <p:cNvPr id="21" name="Text 19"/>
-          <p:cNvSpPr txBox="1"/>
-          <p:nvPr/>
-        </p:nvSpPr>
-        <p:spPr>
-          <a:xfrm>
-            <a:off x="5047488" y="1949286"/>
-            <a:ext cx="868680" cy="248502"/>
-          </a:xfrm>
-          <a:prstGeom prst="rect">
-            <a:avLst/>
-          </a:prstGeom>
-          <a:noFill/>
-          <a:ln/>
-        </p:spPr>
-        <p:txBody>
-          <a:bodyPr wrap="square" lIns="0" tIns="0" rIns="0" bIns="0" rtlCol="0" anchor="ctr"/>
-          <a:lstStyle/>
-          <a:p>
-            <a:pPr algn="r" indent="0" marL="0">
+          <p:cNvPr id="18" name="Text 16"/>
+          <p:cNvSpPr txBox="1"/>
+          <p:nvPr/>
+        </p:nvSpPr>
+        <p:spPr>
+          <a:xfrm>
+            <a:off x="658368" y="1949286"/>
+            <a:ext cx="310896" cy="248502"/>
+          </a:xfrm>
+          <a:prstGeom prst="rect">
+            <a:avLst/>
+          </a:prstGeom>
+          <a:noFill/>
+          <a:ln/>
+        </p:spPr>
+        <p:txBody>
+          <a:bodyPr wrap="square" lIns="0" tIns="0" rIns="0" bIns="0" rtlCol="0" anchor="ctr"/>
+          <a:lstStyle/>
+          <a:p>
+            <a:pPr algn="r" indent="0" marL="0">
+              <a:buNone/>
+            </a:pPr>
+            <a:r>
+              <a:rPr lang="en-US" sz="1200" dirty="0">
+                <a:solidFill>
+                  <a:srgbClr val="9AA3AD"/>
+                </a:solidFill>
+                <a:latin typeface="Inter" pitchFamily="34" charset="0"/>
+                <a:ea typeface="Inter" pitchFamily="34" charset="-122"/>
+                <a:cs typeface="Inter" pitchFamily="34" charset="-120"/>
+              </a:rPr>
+              <a:t>2</a:t>
+            </a:r>
+            <a:endParaRPr lang="en-US" sz="1200" dirty="0"/>
+          </a:p>
+        </p:txBody>
+      </p:sp>
+      <p:sp>
+        <p:nvSpPr>
+          <p:cNvPr id="19" name="Text 17"/>
+          <p:cNvSpPr txBox="1"/>
+          <p:nvPr/>
+        </p:nvSpPr>
+        <p:spPr>
+          <a:xfrm>
+            <a:off x="1014984" y="1949286"/>
+            <a:ext cx="2011680" cy="248502"/>
+          </a:xfrm>
+          <a:prstGeom prst="rect">
+            <a:avLst/>
+          </a:prstGeom>
+          <a:noFill/>
+          <a:ln/>
+        </p:spPr>
+        <p:txBody>
+          <a:bodyPr wrap="square" lIns="0" tIns="0" rIns="0" bIns="0" rtlCol="0" anchor="ctr"/>
+          <a:lstStyle/>
+          <a:p>
+            <a:pPr indent="0" marL="0">
               <a:buNone/>
             </a:pPr>
             <a:r>
               <a:rPr lang="en-US" sz="1300" dirty="0">
                 <a:solidFill>
-                  <a:srgbClr val="595959"/>
-                </a:solidFill>
-                <a:latin typeface="Inter" pitchFamily="34" charset="0"/>
-                <a:ea typeface="Inter" pitchFamily="34" charset="-122"/>
-                <a:cs typeface="Inter" pitchFamily="34" charset="-120"/>
-              </a:rPr>
-              <a:t>+456</a:t>
-            </a:r>
-            <a:endParaRPr lang="en-US" sz="1300" dirty="0"/>
-          </a:p>
-        </p:txBody>
-      </p:sp>
-      <p:sp>
-        <p:nvSpPr>
-          <p:cNvPr id="22" name="Text 20"/>
-          <p:cNvSpPr txBox="1"/>
-          <p:nvPr/>
-        </p:nvSpPr>
-        <p:spPr>
-          <a:xfrm>
-            <a:off x="658368" y="2197787"/>
-            <a:ext cx="310896" cy="248502"/>
-          </a:xfrm>
-          <a:prstGeom prst="rect">
-            <a:avLst/>
-          </a:prstGeom>
-          <a:noFill/>
-          <a:ln/>
-        </p:spPr>
-        <p:txBody>
-          <a:bodyPr wrap="square" lIns="0" tIns="0" rIns="0" bIns="0" rtlCol="0" anchor="ctr"/>
-          <a:lstStyle/>
-          <a:p>
-            <a:pPr algn="r" indent="0" marL="0">
-              <a:buNone/>
-            </a:pPr>
-            <a:r>
-              <a:rPr lang="en-US" sz="1200" dirty="0">
-                <a:solidFill>
-                  <a:srgbClr val="9AA3AD"/>
-                </a:solidFill>
-                <a:latin typeface="Inter" pitchFamily="34" charset="0"/>
-                <a:ea typeface="Inter" pitchFamily="34" charset="-122"/>
-                <a:cs typeface="Inter" pitchFamily="34" charset="-120"/>
-              </a:rPr>
-              <a:t>3</a:t>
-            </a:r>
-            <a:endParaRPr lang="en-US" sz="1200" dirty="0"/>
-          </a:p>
-        </p:txBody>
-      </p:sp>
-      <p:sp>
-        <p:nvSpPr>
-          <p:cNvPr id="23" name="Text 21"/>
-          <p:cNvSpPr txBox="1"/>
-          <p:nvPr/>
-        </p:nvSpPr>
-        <p:spPr>
-          <a:xfrm>
-            <a:off x="1014984" y="2197787"/>
-            <a:ext cx="2011680" cy="248502"/>
-          </a:xfrm>
-          <a:prstGeom prst="rect">
-            <a:avLst/>
-          </a:prstGeom>
-          <a:noFill/>
-          <a:ln/>
-        </p:spPr>
-        <p:txBody>
-          <a:bodyPr wrap="square" lIns="0" tIns="0" rIns="0" bIns="0" rtlCol="0" anchor="ctr"/>
-          <a:lstStyle/>
-          <a:p>
-            <a:pPr indent="0" marL="0">
-              <a:buNone/>
-            </a:pPr>
-            <a:r>
-              <a:rPr lang="en-US" sz="1300" dirty="0">
-                <a:solidFill>
                   <a:srgbClr val="1A1A1A"/>
                 </a:solidFill>
                 <a:latin typeface="Inter" pitchFamily="34" charset="0"/>
                 <a:ea typeface="Inter" pitchFamily="34" charset="-122"/>
                 <a:cs typeface="Inter" pitchFamily="34" charset="-120"/>
               </a:rPr>
-              <a:t>LR HENDERSON</a:t>
-            </a:r>
-            <a:endParaRPr lang="en-US" sz="1300" dirty="0"/>
-          </a:p>
-        </p:txBody>
-      </p:sp>
-      <p:sp>
-        <p:nvSpPr>
-          <p:cNvPr id="24" name="Shape 22"/>
+              <a:t>LR LV</a:t>
+            </a:r>
+            <a:endParaRPr lang="en-US" sz="1300" dirty="0"/>
+          </a:p>
+        </p:txBody>
+      </p:sp>
+      <p:sp>
+        <p:nvSpPr>
+          <p:cNvPr id="20" name="Shape 18"/>
           <p:cNvSpPr/>
           <p:nvPr/>
         </p:nvSpPr>
         <p:spPr>
           <a:xfrm>
-            <a:off x="3434996" y="2253700"/>
-            <a:ext cx="44339" cy="136676"/>
+            <a:off x="3434996" y="2005199"/>
+            <a:ext cx="124432" cy="136676"/>
           </a:xfrm>
           <a:prstGeom prst="rect">
             <a:avLst/>
@@ -3204,13 +3048,13 @@
       </p:sp>
       <p:sp>
         <p:nvSpPr>
-          <p:cNvPr id="25" name="Text 23"/>
-          <p:cNvSpPr txBox="1"/>
-          <p:nvPr/>
-        </p:nvSpPr>
-        <p:spPr>
-          <a:xfrm>
-            <a:off x="3950208" y="2197787"/>
+          <p:cNvPr id="21" name="Text 19"/>
+          <p:cNvSpPr txBox="1"/>
+          <p:nvPr/>
+        </p:nvSpPr>
+        <p:spPr>
+          <a:xfrm>
+            <a:off x="3950208" y="1949286"/>
             <a:ext cx="1097280" cy="248502"/>
           </a:xfrm>
           <a:prstGeom prst="rect">
@@ -3235,21 +3079,21 @@
                 <a:ea typeface="Inter" pitchFamily="34" charset="-122"/>
                 <a:cs typeface="Inter" pitchFamily="34" charset="-120"/>
               </a:rPr>
-              <a:t>+$54K</a:t>
-            </a:r>
-            <a:endParaRPr lang="en-US" sz="1300" dirty="0"/>
-          </a:p>
-        </p:txBody>
-      </p:sp>
-      <p:sp>
-        <p:nvSpPr>
-          <p:cNvPr id="26" name="Text 24"/>
-          <p:cNvSpPr txBox="1"/>
-          <p:nvPr/>
-        </p:nvSpPr>
-        <p:spPr>
-          <a:xfrm>
-            <a:off x="5047488" y="2197787"/>
+              <a:t>+$151K</a:t>
+            </a:r>
+            <a:endParaRPr lang="en-US" sz="1300" dirty="0"/>
+          </a:p>
+        </p:txBody>
+      </p:sp>
+      <p:sp>
+        <p:nvSpPr>
+          <p:cNvPr id="22" name="Text 20"/>
+          <p:cNvSpPr txBox="1"/>
+          <p:nvPr/>
+        </p:nvSpPr>
+        <p:spPr>
+          <a:xfrm>
+            <a:off x="5047488" y="1949286"/>
             <a:ext cx="868680" cy="248502"/>
           </a:xfrm>
           <a:prstGeom prst="rect">
@@ -3274,100 +3118,22 @@
                 <a:ea typeface="Inter" pitchFamily="34" charset="-122"/>
                 <a:cs typeface="Inter" pitchFamily="34" charset="-120"/>
               </a:rPr>
-              <a:t>+324</a:t>
-            </a:r>
-            <a:endParaRPr lang="en-US" sz="1300" dirty="0"/>
-          </a:p>
-        </p:txBody>
-      </p:sp>
-      <p:sp>
-        <p:nvSpPr>
-          <p:cNvPr id="27" name="Text 25"/>
-          <p:cNvSpPr txBox="1"/>
-          <p:nvPr/>
-        </p:nvSpPr>
-        <p:spPr>
-          <a:xfrm>
-            <a:off x="658368" y="2446289"/>
-            <a:ext cx="310896" cy="248502"/>
-          </a:xfrm>
-          <a:prstGeom prst="rect">
-            <a:avLst/>
-          </a:prstGeom>
-          <a:noFill/>
-          <a:ln/>
-        </p:spPr>
-        <p:txBody>
-          <a:bodyPr wrap="square" lIns="0" tIns="0" rIns="0" bIns="0" rtlCol="0" anchor="ctr"/>
-          <a:lstStyle/>
-          <a:p>
-            <a:pPr algn="r" indent="0" marL="0">
-              <a:buNone/>
-            </a:pPr>
-            <a:r>
-              <a:rPr lang="en-US" sz="1200" dirty="0">
-                <a:solidFill>
-                  <a:srgbClr val="9AA3AD"/>
-                </a:solidFill>
-                <a:latin typeface="Inter" pitchFamily="34" charset="0"/>
-                <a:ea typeface="Inter" pitchFamily="34" charset="-122"/>
-                <a:cs typeface="Inter" pitchFamily="34" charset="-120"/>
-              </a:rPr>
-              <a:t>4</a:t>
-            </a:r>
-            <a:endParaRPr lang="en-US" sz="1200" dirty="0"/>
-          </a:p>
-        </p:txBody>
-      </p:sp>
-      <p:sp>
-        <p:nvSpPr>
-          <p:cNvPr id="28" name="Text 26"/>
-          <p:cNvSpPr txBox="1"/>
-          <p:nvPr/>
-        </p:nvSpPr>
-        <p:spPr>
-          <a:xfrm>
-            <a:off x="1014984" y="2446289"/>
-            <a:ext cx="2011680" cy="248502"/>
-          </a:xfrm>
-          <a:prstGeom prst="rect">
-            <a:avLst/>
-          </a:prstGeom>
-          <a:noFill/>
-          <a:ln/>
-        </p:spPr>
-        <p:txBody>
-          <a:bodyPr wrap="square" lIns="0" tIns="0" rIns="0" bIns="0" rtlCol="0" anchor="ctr"/>
-          <a:lstStyle/>
-          <a:p>
-            <a:pPr indent="0" marL="0">
-              <a:buNone/>
-            </a:pPr>
-            <a:r>
-              <a:rPr lang="en-US" sz="1300" dirty="0">
-                <a:solidFill>
-                  <a:srgbClr val="1A1A1A"/>
-                </a:solidFill>
-                <a:latin typeface="Inter" pitchFamily="34" charset="0"/>
-                <a:ea typeface="Inter" pitchFamily="34" charset="-122"/>
-                <a:cs typeface="Inter" pitchFamily="34" charset="-120"/>
-              </a:rPr>
-              <a:t>HONDA NORTH</a:t>
-            </a:r>
-            <a:endParaRPr lang="en-US" sz="1300" dirty="0"/>
-          </a:p>
-        </p:txBody>
-      </p:sp>
-      <p:sp>
-        <p:nvSpPr>
-          <p:cNvPr id="29" name="Shape 27"/>
+              <a:t>+456</a:t>
+            </a:r>
+            <a:endParaRPr lang="en-US" sz="1300" dirty="0"/>
+          </a:p>
+        </p:txBody>
+      </p:sp>
+      <p:sp>
+        <p:nvSpPr>
+          <p:cNvPr id="23" name="Shape 21"/>
           <p:cNvSpPr/>
           <p:nvPr/>
         </p:nvSpPr>
         <p:spPr>
           <a:xfrm>
-            <a:off x="3434996" y="2502202"/>
-            <a:ext cx="37145" cy="136676"/>
+            <a:off x="5971032" y="1995006"/>
+            <a:ext cx="54864" cy="157062"/>
           </a:xfrm>
           <a:prstGeom prst="rect">
             <a:avLst/>
@@ -3380,170 +3146,92 @@
       </p:sp>
       <p:sp>
         <p:nvSpPr>
-          <p:cNvPr id="30" name="Text 28"/>
-          <p:cNvSpPr txBox="1"/>
-          <p:nvPr/>
-        </p:nvSpPr>
-        <p:spPr>
-          <a:xfrm>
-            <a:off x="3950208" y="2446289"/>
-            <a:ext cx="1097280" cy="248502"/>
-          </a:xfrm>
-          <a:prstGeom prst="rect">
-            <a:avLst/>
-          </a:prstGeom>
-          <a:noFill/>
-          <a:ln/>
-        </p:spPr>
-        <p:txBody>
-          <a:bodyPr wrap="square" lIns="0" tIns="0" rIns="0" bIns="0" rtlCol="0" anchor="ctr"/>
-          <a:lstStyle/>
-          <a:p>
-            <a:pPr algn="r" indent="0" marL="0">
-              <a:buNone/>
-            </a:pPr>
-            <a:r>
-              <a:rPr lang="en-US" sz="1300" b="1" dirty="0">
-                <a:solidFill>
-                  <a:srgbClr val="0B7A4A"/>
-                </a:solidFill>
-                <a:latin typeface="Inter" pitchFamily="34" charset="0"/>
-                <a:ea typeface="Inter" pitchFamily="34" charset="-122"/>
-                <a:cs typeface="Inter" pitchFamily="34" charset="-120"/>
-              </a:rPr>
-              <a:t>+$45K</a:t>
-            </a:r>
-            <a:endParaRPr lang="en-US" sz="1300" dirty="0"/>
-          </a:p>
-        </p:txBody>
-      </p:sp>
-      <p:sp>
-        <p:nvSpPr>
-          <p:cNvPr id="31" name="Text 29"/>
-          <p:cNvSpPr txBox="1"/>
-          <p:nvPr/>
-        </p:nvSpPr>
-        <p:spPr>
-          <a:xfrm>
-            <a:off x="5047488" y="2446289"/>
-            <a:ext cx="868680" cy="248502"/>
-          </a:xfrm>
-          <a:prstGeom prst="rect">
-            <a:avLst/>
-          </a:prstGeom>
-          <a:noFill/>
-          <a:ln/>
-        </p:spPr>
-        <p:txBody>
-          <a:bodyPr wrap="square" lIns="0" tIns="0" rIns="0" bIns="0" rtlCol="0" anchor="ctr"/>
-          <a:lstStyle/>
-          <a:p>
-            <a:pPr algn="r" indent="0" marL="0">
+          <p:cNvPr id="24" name="Text 22"/>
+          <p:cNvSpPr txBox="1"/>
+          <p:nvPr/>
+        </p:nvSpPr>
+        <p:spPr>
+          <a:xfrm>
+            <a:off x="658368" y="2197787"/>
+            <a:ext cx="310896" cy="248502"/>
+          </a:xfrm>
+          <a:prstGeom prst="rect">
+            <a:avLst/>
+          </a:prstGeom>
+          <a:noFill/>
+          <a:ln/>
+        </p:spPr>
+        <p:txBody>
+          <a:bodyPr wrap="square" lIns="0" tIns="0" rIns="0" bIns="0" rtlCol="0" anchor="ctr"/>
+          <a:lstStyle/>
+          <a:p>
+            <a:pPr algn="r" indent="0" marL="0">
+              <a:buNone/>
+            </a:pPr>
+            <a:r>
+              <a:rPr lang="en-US" sz="1200" dirty="0">
+                <a:solidFill>
+                  <a:srgbClr val="9AA3AD"/>
+                </a:solidFill>
+                <a:latin typeface="Inter" pitchFamily="34" charset="0"/>
+                <a:ea typeface="Inter" pitchFamily="34" charset="-122"/>
+                <a:cs typeface="Inter" pitchFamily="34" charset="-120"/>
+              </a:rPr>
+              <a:t>3</a:t>
+            </a:r>
+            <a:endParaRPr lang="en-US" sz="1200" dirty="0"/>
+          </a:p>
+        </p:txBody>
+      </p:sp>
+      <p:sp>
+        <p:nvSpPr>
+          <p:cNvPr id="25" name="Text 23"/>
+          <p:cNvSpPr txBox="1"/>
+          <p:nvPr/>
+        </p:nvSpPr>
+        <p:spPr>
+          <a:xfrm>
+            <a:off x="1014984" y="2197787"/>
+            <a:ext cx="2011680" cy="248502"/>
+          </a:xfrm>
+          <a:prstGeom prst="rect">
+            <a:avLst/>
+          </a:prstGeom>
+          <a:noFill/>
+          <a:ln/>
+        </p:spPr>
+        <p:txBody>
+          <a:bodyPr wrap="square" lIns="0" tIns="0" rIns="0" bIns="0" rtlCol="0" anchor="ctr"/>
+          <a:lstStyle/>
+          <a:p>
+            <a:pPr indent="0" marL="0">
               <a:buNone/>
             </a:pPr>
             <a:r>
               <a:rPr lang="en-US" sz="1300" dirty="0">
                 <a:solidFill>
-                  <a:srgbClr val="595959"/>
-                </a:solidFill>
-                <a:latin typeface="Inter" pitchFamily="34" charset="0"/>
-                <a:ea typeface="Inter" pitchFamily="34" charset="-122"/>
-                <a:cs typeface="Inter" pitchFamily="34" charset="-120"/>
-              </a:rPr>
-              <a:t>+70</a:t>
-            </a:r>
-            <a:endParaRPr lang="en-US" sz="1300" dirty="0"/>
-          </a:p>
-        </p:txBody>
-      </p:sp>
-      <p:sp>
-        <p:nvSpPr>
-          <p:cNvPr id="32" name="Text 30"/>
-          <p:cNvSpPr txBox="1"/>
-          <p:nvPr/>
-        </p:nvSpPr>
-        <p:spPr>
-          <a:xfrm>
-            <a:off x="658368" y="2694791"/>
-            <a:ext cx="310896" cy="248502"/>
-          </a:xfrm>
-          <a:prstGeom prst="rect">
-            <a:avLst/>
-          </a:prstGeom>
-          <a:noFill/>
-          <a:ln/>
-        </p:spPr>
-        <p:txBody>
-          <a:bodyPr wrap="square" lIns="0" tIns="0" rIns="0" bIns="0" rtlCol="0" anchor="ctr"/>
-          <a:lstStyle/>
-          <a:p>
-            <a:pPr algn="r" indent="0" marL="0">
-              <a:buNone/>
-            </a:pPr>
-            <a:r>
-              <a:rPr lang="en-US" sz="1200" dirty="0">
-                <a:solidFill>
-                  <a:srgbClr val="9AA3AD"/>
-                </a:solidFill>
-                <a:latin typeface="Inter" pitchFamily="34" charset="0"/>
-                <a:ea typeface="Inter" pitchFamily="34" charset="-122"/>
-                <a:cs typeface="Inter" pitchFamily="34" charset="-120"/>
-              </a:rPr>
-              <a:t>5</a:t>
-            </a:r>
-            <a:endParaRPr lang="en-US" sz="1200" dirty="0"/>
-          </a:p>
-        </p:txBody>
-      </p:sp>
-      <p:sp>
-        <p:nvSpPr>
-          <p:cNvPr id="33" name="Text 31"/>
-          <p:cNvSpPr txBox="1"/>
-          <p:nvPr/>
-        </p:nvSpPr>
-        <p:spPr>
-          <a:xfrm>
-            <a:off x="1014984" y="2694791"/>
-            <a:ext cx="2011680" cy="248502"/>
-          </a:xfrm>
-          <a:prstGeom prst="rect">
-            <a:avLst/>
-          </a:prstGeom>
-          <a:noFill/>
-          <a:ln/>
-        </p:spPr>
-        <p:txBody>
-          <a:bodyPr wrap="square" lIns="0" tIns="0" rIns="0" bIns="0" rtlCol="0" anchor="ctr"/>
-          <a:lstStyle/>
-          <a:p>
-            <a:pPr indent="0" marL="0">
-              <a:buNone/>
-            </a:pPr>
-            <a:r>
-              <a:rPr lang="en-US" sz="1300" dirty="0">
-                <a:solidFill>
                   <a:srgbClr val="1A1A1A"/>
                 </a:solidFill>
                 <a:latin typeface="Inter" pitchFamily="34" charset="0"/>
                 <a:ea typeface="Inter" pitchFamily="34" charset="-122"/>
                 <a:cs typeface="Inter" pitchFamily="34" charset="-120"/>
               </a:rPr>
-              <a:t>SUBARU PRESCOTT</a:t>
-            </a:r>
-            <a:endParaRPr lang="en-US" sz="1300" dirty="0"/>
-          </a:p>
-        </p:txBody>
-      </p:sp>
-      <p:sp>
-        <p:nvSpPr>
-          <p:cNvPr id="34" name="Shape 32"/>
+              <a:t>LR HENDERSON</a:t>
+            </a:r>
+            <a:endParaRPr lang="en-US" sz="1300" dirty="0"/>
+          </a:p>
+        </p:txBody>
+      </p:sp>
+      <p:sp>
+        <p:nvSpPr>
+          <p:cNvPr id="26" name="Shape 24"/>
           <p:cNvSpPr/>
           <p:nvPr/>
         </p:nvSpPr>
         <p:spPr>
           <a:xfrm>
-            <a:off x="3434996" y="2750703"/>
-            <a:ext cx="34144" cy="136676"/>
+            <a:off x="3434996" y="2253700"/>
+            <a:ext cx="44339" cy="136676"/>
           </a:xfrm>
           <a:prstGeom prst="rect">
             <a:avLst/>
@@ -3556,13 +3244,13 @@
       </p:sp>
       <p:sp>
         <p:nvSpPr>
-          <p:cNvPr id="35" name="Text 33"/>
-          <p:cNvSpPr txBox="1"/>
-          <p:nvPr/>
-        </p:nvSpPr>
-        <p:spPr>
-          <a:xfrm>
-            <a:off x="3950208" y="2694791"/>
+          <p:cNvPr id="27" name="Text 25"/>
+          <p:cNvSpPr txBox="1"/>
+          <p:nvPr/>
+        </p:nvSpPr>
+        <p:spPr>
+          <a:xfrm>
+            <a:off x="3950208" y="2197787"/>
             <a:ext cx="1097280" cy="248502"/>
           </a:xfrm>
           <a:prstGeom prst="rect">
@@ -3587,21 +3275,21 @@
                 <a:ea typeface="Inter" pitchFamily="34" charset="-122"/>
                 <a:cs typeface="Inter" pitchFamily="34" charset="-120"/>
               </a:rPr>
-              <a:t>+$41K</a:t>
-            </a:r>
-            <a:endParaRPr lang="en-US" sz="1300" dirty="0"/>
-          </a:p>
-        </p:txBody>
-      </p:sp>
-      <p:sp>
-        <p:nvSpPr>
-          <p:cNvPr id="36" name="Text 34"/>
-          <p:cNvSpPr txBox="1"/>
-          <p:nvPr/>
-        </p:nvSpPr>
-        <p:spPr>
-          <a:xfrm>
-            <a:off x="5047488" y="2694791"/>
+              <a:t>+$54K</a:t>
+            </a:r>
+            <a:endParaRPr lang="en-US" sz="1300" dirty="0"/>
+          </a:p>
+        </p:txBody>
+      </p:sp>
+      <p:sp>
+        <p:nvSpPr>
+          <p:cNvPr id="28" name="Text 26"/>
+          <p:cNvSpPr txBox="1"/>
+          <p:nvPr/>
+        </p:nvSpPr>
+        <p:spPr>
+          <a:xfrm>
+            <a:off x="5047488" y="2197787"/>
             <a:ext cx="868680" cy="248502"/>
           </a:xfrm>
           <a:prstGeom prst="rect">
@@ -3626,100 +3314,22 @@
                 <a:ea typeface="Inter" pitchFamily="34" charset="-122"/>
                 <a:cs typeface="Inter" pitchFamily="34" charset="-120"/>
               </a:rPr>
-              <a:t>+24</a:t>
-            </a:r>
-            <a:endParaRPr lang="en-US" sz="1300" dirty="0"/>
-          </a:p>
-        </p:txBody>
-      </p:sp>
-      <p:sp>
-        <p:nvSpPr>
-          <p:cNvPr id="37" name="Text 35"/>
-          <p:cNvSpPr txBox="1"/>
-          <p:nvPr/>
-        </p:nvSpPr>
-        <p:spPr>
-          <a:xfrm>
-            <a:off x="658368" y="2943292"/>
-            <a:ext cx="310896" cy="248502"/>
-          </a:xfrm>
-          <a:prstGeom prst="rect">
-            <a:avLst/>
-          </a:prstGeom>
-          <a:noFill/>
-          <a:ln/>
-        </p:spPr>
-        <p:txBody>
-          <a:bodyPr wrap="square" lIns="0" tIns="0" rIns="0" bIns="0" rtlCol="0" anchor="ctr"/>
-          <a:lstStyle/>
-          <a:p>
-            <a:pPr algn="r" indent="0" marL="0">
-              <a:buNone/>
-            </a:pPr>
-            <a:r>
-              <a:rPr lang="en-US" sz="1200" dirty="0">
-                <a:solidFill>
-                  <a:srgbClr val="9AA3AD"/>
-                </a:solidFill>
-                <a:latin typeface="Inter" pitchFamily="34" charset="0"/>
-                <a:ea typeface="Inter" pitchFamily="34" charset="-122"/>
-                <a:cs typeface="Inter" pitchFamily="34" charset="-120"/>
-              </a:rPr>
-              <a:t>6</a:t>
-            </a:r>
-            <a:endParaRPr lang="en-US" sz="1200" dirty="0"/>
-          </a:p>
-        </p:txBody>
-      </p:sp>
-      <p:sp>
-        <p:nvSpPr>
-          <p:cNvPr id="38" name="Text 36"/>
-          <p:cNvSpPr txBox="1"/>
-          <p:nvPr/>
-        </p:nvSpPr>
-        <p:spPr>
-          <a:xfrm>
-            <a:off x="1014984" y="2943292"/>
-            <a:ext cx="2011680" cy="248502"/>
-          </a:xfrm>
-          <a:prstGeom prst="rect">
-            <a:avLst/>
-          </a:prstGeom>
-          <a:noFill/>
-          <a:ln/>
-        </p:spPr>
-        <p:txBody>
-          <a:bodyPr wrap="square" lIns="0" tIns="0" rIns="0" bIns="0" rtlCol="0" anchor="ctr"/>
-          <a:lstStyle/>
-          <a:p>
-            <a:pPr indent="0" marL="0">
-              <a:buNone/>
-            </a:pPr>
-            <a:r>
-              <a:rPr lang="en-US" sz="1300" dirty="0">
-                <a:solidFill>
-                  <a:srgbClr val="1A1A1A"/>
-                </a:solidFill>
-                <a:latin typeface="Inter" pitchFamily="34" charset="0"/>
-                <a:ea typeface="Inter" pitchFamily="34" charset="-122"/>
-                <a:cs typeface="Inter" pitchFamily="34" charset="-120"/>
-              </a:rPr>
-              <a:t>ACURA</a:t>
-            </a:r>
-            <a:endParaRPr lang="en-US" sz="1300" dirty="0"/>
-          </a:p>
-        </p:txBody>
-      </p:sp>
-      <p:sp>
-        <p:nvSpPr>
-          <p:cNvPr id="39" name="Shape 37"/>
+              <a:t>+324</a:t>
+            </a:r>
+            <a:endParaRPr lang="en-US" sz="1300" dirty="0"/>
+          </a:p>
+        </p:txBody>
+      </p:sp>
+      <p:sp>
+        <p:nvSpPr>
+          <p:cNvPr id="29" name="Shape 27"/>
           <p:cNvSpPr/>
           <p:nvPr/>
         </p:nvSpPr>
         <p:spPr>
           <a:xfrm>
-            <a:off x="3434996" y="2999205"/>
-            <a:ext cx="27581" cy="136676"/>
+            <a:off x="5971032" y="2243507"/>
+            <a:ext cx="54864" cy="157062"/>
           </a:xfrm>
           <a:prstGeom prst="rect">
             <a:avLst/>
@@ -3732,170 +3342,92 @@
       </p:sp>
       <p:sp>
         <p:nvSpPr>
-          <p:cNvPr id="40" name="Text 38"/>
-          <p:cNvSpPr txBox="1"/>
-          <p:nvPr/>
-        </p:nvSpPr>
-        <p:spPr>
-          <a:xfrm>
-            <a:off x="3950208" y="2943292"/>
-            <a:ext cx="1097280" cy="248502"/>
-          </a:xfrm>
-          <a:prstGeom prst="rect">
-            <a:avLst/>
-          </a:prstGeom>
-          <a:noFill/>
-          <a:ln/>
-        </p:spPr>
-        <p:txBody>
-          <a:bodyPr wrap="square" lIns="0" tIns="0" rIns="0" bIns="0" rtlCol="0" anchor="ctr"/>
-          <a:lstStyle/>
-          <a:p>
-            <a:pPr algn="r" indent="0" marL="0">
-              <a:buNone/>
-            </a:pPr>
-            <a:r>
-              <a:rPr lang="en-US" sz="1300" b="1" dirty="0">
-                <a:solidFill>
-                  <a:srgbClr val="0B7A4A"/>
-                </a:solidFill>
-                <a:latin typeface="Inter" pitchFamily="34" charset="0"/>
-                <a:ea typeface="Inter" pitchFamily="34" charset="-122"/>
-                <a:cs typeface="Inter" pitchFamily="34" charset="-120"/>
-              </a:rPr>
-              <a:t>+$33K</a:t>
-            </a:r>
-            <a:endParaRPr lang="en-US" sz="1300" dirty="0"/>
-          </a:p>
-        </p:txBody>
-      </p:sp>
-      <p:sp>
-        <p:nvSpPr>
-          <p:cNvPr id="41" name="Text 39"/>
-          <p:cNvSpPr txBox="1"/>
-          <p:nvPr/>
-        </p:nvSpPr>
-        <p:spPr>
-          <a:xfrm>
-            <a:off x="5047488" y="2943292"/>
-            <a:ext cx="868680" cy="248502"/>
-          </a:xfrm>
-          <a:prstGeom prst="rect">
-            <a:avLst/>
-          </a:prstGeom>
-          <a:noFill/>
-          <a:ln/>
-        </p:spPr>
-        <p:txBody>
-          <a:bodyPr wrap="square" lIns="0" tIns="0" rIns="0" bIns="0" rtlCol="0" anchor="ctr"/>
-          <a:lstStyle/>
-          <a:p>
-            <a:pPr algn="r" indent="0" marL="0">
+          <p:cNvPr id="30" name="Text 28"/>
+          <p:cNvSpPr txBox="1"/>
+          <p:nvPr/>
+        </p:nvSpPr>
+        <p:spPr>
+          <a:xfrm>
+            <a:off x="658368" y="2446289"/>
+            <a:ext cx="310896" cy="248502"/>
+          </a:xfrm>
+          <a:prstGeom prst="rect">
+            <a:avLst/>
+          </a:prstGeom>
+          <a:noFill/>
+          <a:ln/>
+        </p:spPr>
+        <p:txBody>
+          <a:bodyPr wrap="square" lIns="0" tIns="0" rIns="0" bIns="0" rtlCol="0" anchor="ctr"/>
+          <a:lstStyle/>
+          <a:p>
+            <a:pPr algn="r" indent="0" marL="0">
+              <a:buNone/>
+            </a:pPr>
+            <a:r>
+              <a:rPr lang="en-US" sz="1200" dirty="0">
+                <a:solidFill>
+                  <a:srgbClr val="9AA3AD"/>
+                </a:solidFill>
+                <a:latin typeface="Inter" pitchFamily="34" charset="0"/>
+                <a:ea typeface="Inter" pitchFamily="34" charset="-122"/>
+                <a:cs typeface="Inter" pitchFamily="34" charset="-120"/>
+              </a:rPr>
+              <a:t>4</a:t>
+            </a:r>
+            <a:endParaRPr lang="en-US" sz="1200" dirty="0"/>
+          </a:p>
+        </p:txBody>
+      </p:sp>
+      <p:sp>
+        <p:nvSpPr>
+          <p:cNvPr id="31" name="Text 29"/>
+          <p:cNvSpPr txBox="1"/>
+          <p:nvPr/>
+        </p:nvSpPr>
+        <p:spPr>
+          <a:xfrm>
+            <a:off x="1014984" y="2446289"/>
+            <a:ext cx="2011680" cy="248502"/>
+          </a:xfrm>
+          <a:prstGeom prst="rect">
+            <a:avLst/>
+          </a:prstGeom>
+          <a:noFill/>
+          <a:ln/>
+        </p:spPr>
+        <p:txBody>
+          <a:bodyPr wrap="square" lIns="0" tIns="0" rIns="0" bIns="0" rtlCol="0" anchor="ctr"/>
+          <a:lstStyle/>
+          <a:p>
+            <a:pPr indent="0" marL="0">
               <a:buNone/>
             </a:pPr>
             <a:r>
               <a:rPr lang="en-US" sz="1300" dirty="0">
                 <a:solidFill>
-                  <a:srgbClr val="595959"/>
-                </a:solidFill>
-                <a:latin typeface="Inter" pitchFamily="34" charset="0"/>
-                <a:ea typeface="Inter" pitchFamily="34" charset="-122"/>
-                <a:cs typeface="Inter" pitchFamily="34" charset="-120"/>
-              </a:rPr>
-              <a:t>+228</a:t>
-            </a:r>
-            <a:endParaRPr lang="en-US" sz="1300" dirty="0"/>
-          </a:p>
-        </p:txBody>
-      </p:sp>
-      <p:sp>
-        <p:nvSpPr>
-          <p:cNvPr id="42" name="Text 40"/>
-          <p:cNvSpPr txBox="1"/>
-          <p:nvPr/>
-        </p:nvSpPr>
-        <p:spPr>
-          <a:xfrm>
-            <a:off x="658368" y="3191794"/>
-            <a:ext cx="310896" cy="248502"/>
-          </a:xfrm>
-          <a:prstGeom prst="rect">
-            <a:avLst/>
-          </a:prstGeom>
-          <a:noFill/>
-          <a:ln/>
-        </p:spPr>
-        <p:txBody>
-          <a:bodyPr wrap="square" lIns="0" tIns="0" rIns="0" bIns="0" rtlCol="0" anchor="ctr"/>
-          <a:lstStyle/>
-          <a:p>
-            <a:pPr algn="r" indent="0" marL="0">
-              <a:buNone/>
-            </a:pPr>
-            <a:r>
-              <a:rPr lang="en-US" sz="1200" dirty="0">
-                <a:solidFill>
-                  <a:srgbClr val="9AA3AD"/>
-                </a:solidFill>
-                <a:latin typeface="Inter" pitchFamily="34" charset="0"/>
-                <a:ea typeface="Inter" pitchFamily="34" charset="-122"/>
-                <a:cs typeface="Inter" pitchFamily="34" charset="-120"/>
-              </a:rPr>
-              <a:t>7</a:t>
-            </a:r>
-            <a:endParaRPr lang="en-US" sz="1200" dirty="0"/>
-          </a:p>
-        </p:txBody>
-      </p:sp>
-      <p:sp>
-        <p:nvSpPr>
-          <p:cNvPr id="43" name="Text 41"/>
-          <p:cNvSpPr txBox="1"/>
-          <p:nvPr/>
-        </p:nvSpPr>
-        <p:spPr>
-          <a:xfrm>
-            <a:off x="1014984" y="3191794"/>
-            <a:ext cx="2011680" cy="248502"/>
-          </a:xfrm>
-          <a:prstGeom prst="rect">
-            <a:avLst/>
-          </a:prstGeom>
-          <a:noFill/>
-          <a:ln/>
-        </p:spPr>
-        <p:txBody>
-          <a:bodyPr wrap="square" lIns="0" tIns="0" rIns="0" bIns="0" rtlCol="0" anchor="ctr"/>
-          <a:lstStyle/>
-          <a:p>
-            <a:pPr indent="0" marL="0">
-              <a:buNone/>
-            </a:pPr>
-            <a:r>
-              <a:rPr lang="en-US" sz="1300" dirty="0">
-                <a:solidFill>
                   <a:srgbClr val="1A1A1A"/>
                 </a:solidFill>
                 <a:latin typeface="Inter" pitchFamily="34" charset="0"/>
                 <a:ea typeface="Inter" pitchFamily="34" charset="-122"/>
                 <a:cs typeface="Inter" pitchFamily="34" charset="-120"/>
               </a:rPr>
-              <a:t>HYUNDAI PRESCOTT</a:t>
-            </a:r>
-            <a:endParaRPr lang="en-US" sz="1300" dirty="0"/>
-          </a:p>
-        </p:txBody>
-      </p:sp>
-      <p:sp>
-        <p:nvSpPr>
-          <p:cNvPr id="44" name="Shape 42"/>
+              <a:t>HONDA NORTH</a:t>
+            </a:r>
+            <a:endParaRPr lang="en-US" sz="1300" dirty="0"/>
+          </a:p>
+        </p:txBody>
+      </p:sp>
+      <p:sp>
+        <p:nvSpPr>
+          <p:cNvPr id="32" name="Shape 30"/>
           <p:cNvSpPr/>
           <p:nvPr/>
         </p:nvSpPr>
         <p:spPr>
           <a:xfrm>
-            <a:off x="3434996" y="3247707"/>
-            <a:ext cx="19282" cy="136676"/>
+            <a:off x="3434996" y="2502202"/>
+            <a:ext cx="37145" cy="136676"/>
           </a:xfrm>
           <a:prstGeom prst="rect">
             <a:avLst/>
@@ -3908,7 +3440,535 @@
       </p:sp>
       <p:sp>
         <p:nvSpPr>
+          <p:cNvPr id="33" name="Text 31"/>
+          <p:cNvSpPr txBox="1"/>
+          <p:nvPr/>
+        </p:nvSpPr>
+        <p:spPr>
+          <a:xfrm>
+            <a:off x="3950208" y="2446289"/>
+            <a:ext cx="1097280" cy="248502"/>
+          </a:xfrm>
+          <a:prstGeom prst="rect">
+            <a:avLst/>
+          </a:prstGeom>
+          <a:noFill/>
+          <a:ln/>
+        </p:spPr>
+        <p:txBody>
+          <a:bodyPr wrap="square" lIns="0" tIns="0" rIns="0" bIns="0" rtlCol="0" anchor="ctr"/>
+          <a:lstStyle/>
+          <a:p>
+            <a:pPr algn="r" indent="0" marL="0">
+              <a:buNone/>
+            </a:pPr>
+            <a:r>
+              <a:rPr lang="en-US" sz="1300" b="1" dirty="0">
+                <a:solidFill>
+                  <a:srgbClr val="0B7A4A"/>
+                </a:solidFill>
+                <a:latin typeface="Inter" pitchFamily="34" charset="0"/>
+                <a:ea typeface="Inter" pitchFamily="34" charset="-122"/>
+                <a:cs typeface="Inter" pitchFamily="34" charset="-120"/>
+              </a:rPr>
+              <a:t>+$45K</a:t>
+            </a:r>
+            <a:endParaRPr lang="en-US" sz="1300" dirty="0"/>
+          </a:p>
+        </p:txBody>
+      </p:sp>
+      <p:sp>
+        <p:nvSpPr>
+          <p:cNvPr id="34" name="Text 32"/>
+          <p:cNvSpPr txBox="1"/>
+          <p:nvPr/>
+        </p:nvSpPr>
+        <p:spPr>
+          <a:xfrm>
+            <a:off x="5047488" y="2446289"/>
+            <a:ext cx="868680" cy="248502"/>
+          </a:xfrm>
+          <a:prstGeom prst="rect">
+            <a:avLst/>
+          </a:prstGeom>
+          <a:noFill/>
+          <a:ln/>
+        </p:spPr>
+        <p:txBody>
+          <a:bodyPr wrap="square" lIns="0" tIns="0" rIns="0" bIns="0" rtlCol="0" anchor="ctr"/>
+          <a:lstStyle/>
+          <a:p>
+            <a:pPr algn="r" indent="0" marL="0">
+              <a:buNone/>
+            </a:pPr>
+            <a:r>
+              <a:rPr lang="en-US" sz="1300" dirty="0">
+                <a:solidFill>
+                  <a:srgbClr val="595959"/>
+                </a:solidFill>
+                <a:latin typeface="Inter" pitchFamily="34" charset="0"/>
+                <a:ea typeface="Inter" pitchFamily="34" charset="-122"/>
+                <a:cs typeface="Inter" pitchFamily="34" charset="-120"/>
+              </a:rPr>
+              <a:t>+70</a:t>
+            </a:r>
+            <a:endParaRPr lang="en-US" sz="1300" dirty="0"/>
+          </a:p>
+        </p:txBody>
+      </p:sp>
+      <p:sp>
+        <p:nvSpPr>
+          <p:cNvPr id="35" name="Text 33"/>
+          <p:cNvSpPr txBox="1"/>
+          <p:nvPr/>
+        </p:nvSpPr>
+        <p:spPr>
+          <a:xfrm>
+            <a:off x="658368" y="2694791"/>
+            <a:ext cx="310896" cy="248502"/>
+          </a:xfrm>
+          <a:prstGeom prst="rect">
+            <a:avLst/>
+          </a:prstGeom>
+          <a:noFill/>
+          <a:ln/>
+        </p:spPr>
+        <p:txBody>
+          <a:bodyPr wrap="square" lIns="0" tIns="0" rIns="0" bIns="0" rtlCol="0" anchor="ctr"/>
+          <a:lstStyle/>
+          <a:p>
+            <a:pPr algn="r" indent="0" marL="0">
+              <a:buNone/>
+            </a:pPr>
+            <a:r>
+              <a:rPr lang="en-US" sz="1200" dirty="0">
+                <a:solidFill>
+                  <a:srgbClr val="9AA3AD"/>
+                </a:solidFill>
+                <a:latin typeface="Inter" pitchFamily="34" charset="0"/>
+                <a:ea typeface="Inter" pitchFamily="34" charset="-122"/>
+                <a:cs typeface="Inter" pitchFamily="34" charset="-120"/>
+              </a:rPr>
+              <a:t>5</a:t>
+            </a:r>
+            <a:endParaRPr lang="en-US" sz="1200" dirty="0"/>
+          </a:p>
+        </p:txBody>
+      </p:sp>
+      <p:sp>
+        <p:nvSpPr>
+          <p:cNvPr id="36" name="Text 34"/>
+          <p:cNvSpPr txBox="1"/>
+          <p:nvPr/>
+        </p:nvSpPr>
+        <p:spPr>
+          <a:xfrm>
+            <a:off x="1014984" y="2694791"/>
+            <a:ext cx="2011680" cy="248502"/>
+          </a:xfrm>
+          <a:prstGeom prst="rect">
+            <a:avLst/>
+          </a:prstGeom>
+          <a:noFill/>
+          <a:ln/>
+        </p:spPr>
+        <p:txBody>
+          <a:bodyPr wrap="square" lIns="0" tIns="0" rIns="0" bIns="0" rtlCol="0" anchor="ctr"/>
+          <a:lstStyle/>
+          <a:p>
+            <a:pPr indent="0" marL="0">
+              <a:buNone/>
+            </a:pPr>
+            <a:r>
+              <a:rPr lang="en-US" sz="1300" dirty="0">
+                <a:solidFill>
+                  <a:srgbClr val="1A1A1A"/>
+                </a:solidFill>
+                <a:latin typeface="Inter" pitchFamily="34" charset="0"/>
+                <a:ea typeface="Inter" pitchFamily="34" charset="-122"/>
+                <a:cs typeface="Inter" pitchFamily="34" charset="-120"/>
+              </a:rPr>
+              <a:t>SUBARU PRESCOTT</a:t>
+            </a:r>
+            <a:endParaRPr lang="en-US" sz="1300" dirty="0"/>
+          </a:p>
+        </p:txBody>
+      </p:sp>
+      <p:sp>
+        <p:nvSpPr>
+          <p:cNvPr id="37" name="Shape 35"/>
+          <p:cNvSpPr/>
+          <p:nvPr/>
+        </p:nvSpPr>
+        <p:spPr>
+          <a:xfrm>
+            <a:off x="3434996" y="2750703"/>
+            <a:ext cx="34144" cy="136676"/>
+          </a:xfrm>
+          <a:prstGeom prst="rect">
+            <a:avLst/>
+          </a:prstGeom>
+          <a:solidFill>
+            <a:srgbClr val="12A566"/>
+          </a:solidFill>
+          <a:ln/>
+        </p:spPr>
+      </p:sp>
+      <p:sp>
+        <p:nvSpPr>
+          <p:cNvPr id="38" name="Text 36"/>
+          <p:cNvSpPr txBox="1"/>
+          <p:nvPr/>
+        </p:nvSpPr>
+        <p:spPr>
+          <a:xfrm>
+            <a:off x="3950208" y="2694791"/>
+            <a:ext cx="1097280" cy="248502"/>
+          </a:xfrm>
+          <a:prstGeom prst="rect">
+            <a:avLst/>
+          </a:prstGeom>
+          <a:noFill/>
+          <a:ln/>
+        </p:spPr>
+        <p:txBody>
+          <a:bodyPr wrap="square" lIns="0" tIns="0" rIns="0" bIns="0" rtlCol="0" anchor="ctr"/>
+          <a:lstStyle/>
+          <a:p>
+            <a:pPr algn="r" indent="0" marL="0">
+              <a:buNone/>
+            </a:pPr>
+            <a:r>
+              <a:rPr lang="en-US" sz="1300" b="1" dirty="0">
+                <a:solidFill>
+                  <a:srgbClr val="0B7A4A"/>
+                </a:solidFill>
+                <a:latin typeface="Inter" pitchFamily="34" charset="0"/>
+                <a:ea typeface="Inter" pitchFamily="34" charset="-122"/>
+                <a:cs typeface="Inter" pitchFamily="34" charset="-120"/>
+              </a:rPr>
+              <a:t>+$41K</a:t>
+            </a:r>
+            <a:endParaRPr lang="en-US" sz="1300" dirty="0"/>
+          </a:p>
+        </p:txBody>
+      </p:sp>
+      <p:sp>
+        <p:nvSpPr>
+          <p:cNvPr id="39" name="Text 37"/>
+          <p:cNvSpPr txBox="1"/>
+          <p:nvPr/>
+        </p:nvSpPr>
+        <p:spPr>
+          <a:xfrm>
+            <a:off x="5047488" y="2694791"/>
+            <a:ext cx="868680" cy="248502"/>
+          </a:xfrm>
+          <a:prstGeom prst="rect">
+            <a:avLst/>
+          </a:prstGeom>
+          <a:noFill/>
+          <a:ln/>
+        </p:spPr>
+        <p:txBody>
+          <a:bodyPr wrap="square" lIns="0" tIns="0" rIns="0" bIns="0" rtlCol="0" anchor="ctr"/>
+          <a:lstStyle/>
+          <a:p>
+            <a:pPr algn="r" indent="0" marL="0">
+              <a:buNone/>
+            </a:pPr>
+            <a:r>
+              <a:rPr lang="en-US" sz="1300" dirty="0">
+                <a:solidFill>
+                  <a:srgbClr val="595959"/>
+                </a:solidFill>
+                <a:latin typeface="Inter" pitchFamily="34" charset="0"/>
+                <a:ea typeface="Inter" pitchFamily="34" charset="-122"/>
+                <a:cs typeface="Inter" pitchFamily="34" charset="-120"/>
+              </a:rPr>
+              <a:t>+24</a:t>
+            </a:r>
+            <a:endParaRPr lang="en-US" sz="1300" dirty="0"/>
+          </a:p>
+        </p:txBody>
+      </p:sp>
+      <p:sp>
+        <p:nvSpPr>
+          <p:cNvPr id="40" name="Text 38"/>
+          <p:cNvSpPr txBox="1"/>
+          <p:nvPr/>
+        </p:nvSpPr>
+        <p:spPr>
+          <a:xfrm>
+            <a:off x="658368" y="2943292"/>
+            <a:ext cx="310896" cy="248502"/>
+          </a:xfrm>
+          <a:prstGeom prst="rect">
+            <a:avLst/>
+          </a:prstGeom>
+          <a:noFill/>
+          <a:ln/>
+        </p:spPr>
+        <p:txBody>
+          <a:bodyPr wrap="square" lIns="0" tIns="0" rIns="0" bIns="0" rtlCol="0" anchor="ctr"/>
+          <a:lstStyle/>
+          <a:p>
+            <a:pPr algn="r" indent="0" marL="0">
+              <a:buNone/>
+            </a:pPr>
+            <a:r>
+              <a:rPr lang="en-US" sz="1200" dirty="0">
+                <a:solidFill>
+                  <a:srgbClr val="9AA3AD"/>
+                </a:solidFill>
+                <a:latin typeface="Inter" pitchFamily="34" charset="0"/>
+                <a:ea typeface="Inter" pitchFamily="34" charset="-122"/>
+                <a:cs typeface="Inter" pitchFamily="34" charset="-120"/>
+              </a:rPr>
+              <a:t>6</a:t>
+            </a:r>
+            <a:endParaRPr lang="en-US" sz="1200" dirty="0"/>
+          </a:p>
+        </p:txBody>
+      </p:sp>
+      <p:sp>
+        <p:nvSpPr>
+          <p:cNvPr id="41" name="Text 39"/>
+          <p:cNvSpPr txBox="1"/>
+          <p:nvPr/>
+        </p:nvSpPr>
+        <p:spPr>
+          <a:xfrm>
+            <a:off x="1014984" y="2943292"/>
+            <a:ext cx="2011680" cy="248502"/>
+          </a:xfrm>
+          <a:prstGeom prst="rect">
+            <a:avLst/>
+          </a:prstGeom>
+          <a:noFill/>
+          <a:ln/>
+        </p:spPr>
+        <p:txBody>
+          <a:bodyPr wrap="square" lIns="0" tIns="0" rIns="0" bIns="0" rtlCol="0" anchor="ctr"/>
+          <a:lstStyle/>
+          <a:p>
+            <a:pPr indent="0" marL="0">
+              <a:buNone/>
+            </a:pPr>
+            <a:r>
+              <a:rPr lang="en-US" sz="1300" dirty="0">
+                <a:solidFill>
+                  <a:srgbClr val="1A1A1A"/>
+                </a:solidFill>
+                <a:latin typeface="Inter" pitchFamily="34" charset="0"/>
+                <a:ea typeface="Inter" pitchFamily="34" charset="-122"/>
+                <a:cs typeface="Inter" pitchFamily="34" charset="-120"/>
+              </a:rPr>
+              <a:t>ACURA</a:t>
+            </a:r>
+            <a:endParaRPr lang="en-US" sz="1300" dirty="0"/>
+          </a:p>
+        </p:txBody>
+      </p:sp>
+      <p:sp>
+        <p:nvSpPr>
+          <p:cNvPr id="42" name="Shape 40"/>
+          <p:cNvSpPr/>
+          <p:nvPr/>
+        </p:nvSpPr>
+        <p:spPr>
+          <a:xfrm>
+            <a:off x="3434996" y="2999205"/>
+            <a:ext cx="27581" cy="136676"/>
+          </a:xfrm>
+          <a:prstGeom prst="rect">
+            <a:avLst/>
+          </a:prstGeom>
+          <a:solidFill>
+            <a:srgbClr val="12A566"/>
+          </a:solidFill>
+          <a:ln/>
+        </p:spPr>
+      </p:sp>
+      <p:sp>
+        <p:nvSpPr>
+          <p:cNvPr id="43" name="Text 41"/>
+          <p:cNvSpPr txBox="1"/>
+          <p:nvPr/>
+        </p:nvSpPr>
+        <p:spPr>
+          <a:xfrm>
+            <a:off x="3950208" y="2943292"/>
+            <a:ext cx="1097280" cy="248502"/>
+          </a:xfrm>
+          <a:prstGeom prst="rect">
+            <a:avLst/>
+          </a:prstGeom>
+          <a:noFill/>
+          <a:ln/>
+        </p:spPr>
+        <p:txBody>
+          <a:bodyPr wrap="square" lIns="0" tIns="0" rIns="0" bIns="0" rtlCol="0" anchor="ctr"/>
+          <a:lstStyle/>
+          <a:p>
+            <a:pPr algn="r" indent="0" marL="0">
+              <a:buNone/>
+            </a:pPr>
+            <a:r>
+              <a:rPr lang="en-US" sz="1300" b="1" dirty="0">
+                <a:solidFill>
+                  <a:srgbClr val="0B7A4A"/>
+                </a:solidFill>
+                <a:latin typeface="Inter" pitchFamily="34" charset="0"/>
+                <a:ea typeface="Inter" pitchFamily="34" charset="-122"/>
+                <a:cs typeface="Inter" pitchFamily="34" charset="-120"/>
+              </a:rPr>
+              <a:t>+$33K</a:t>
+            </a:r>
+            <a:endParaRPr lang="en-US" sz="1300" dirty="0"/>
+          </a:p>
+        </p:txBody>
+      </p:sp>
+      <p:sp>
+        <p:nvSpPr>
+          <p:cNvPr id="44" name="Text 42"/>
+          <p:cNvSpPr txBox="1"/>
+          <p:nvPr/>
+        </p:nvSpPr>
+        <p:spPr>
+          <a:xfrm>
+            <a:off x="5047488" y="2943292"/>
+            <a:ext cx="868680" cy="248502"/>
+          </a:xfrm>
+          <a:prstGeom prst="rect">
+            <a:avLst/>
+          </a:prstGeom>
+          <a:noFill/>
+          <a:ln/>
+        </p:spPr>
+        <p:txBody>
+          <a:bodyPr wrap="square" lIns="0" tIns="0" rIns="0" bIns="0" rtlCol="0" anchor="ctr"/>
+          <a:lstStyle/>
+          <a:p>
+            <a:pPr algn="r" indent="0" marL="0">
+              <a:buNone/>
+            </a:pPr>
+            <a:r>
+              <a:rPr lang="en-US" sz="1300" dirty="0">
+                <a:solidFill>
+                  <a:srgbClr val="595959"/>
+                </a:solidFill>
+                <a:latin typeface="Inter" pitchFamily="34" charset="0"/>
+                <a:ea typeface="Inter" pitchFamily="34" charset="-122"/>
+                <a:cs typeface="Inter" pitchFamily="34" charset="-120"/>
+              </a:rPr>
+              <a:t>+228</a:t>
+            </a:r>
+            <a:endParaRPr lang="en-US" sz="1300" dirty="0"/>
+          </a:p>
+        </p:txBody>
+      </p:sp>
+      <p:sp>
+        <p:nvSpPr>
           <p:cNvPr id="45" name="Text 43"/>
+          <p:cNvSpPr txBox="1"/>
+          <p:nvPr/>
+        </p:nvSpPr>
+        <p:spPr>
+          <a:xfrm>
+            <a:off x="658368" y="3191794"/>
+            <a:ext cx="310896" cy="248502"/>
+          </a:xfrm>
+          <a:prstGeom prst="rect">
+            <a:avLst/>
+          </a:prstGeom>
+          <a:noFill/>
+          <a:ln/>
+        </p:spPr>
+        <p:txBody>
+          <a:bodyPr wrap="square" lIns="0" tIns="0" rIns="0" bIns="0" rtlCol="0" anchor="ctr"/>
+          <a:lstStyle/>
+          <a:p>
+            <a:pPr algn="r" indent="0" marL="0">
+              <a:buNone/>
+            </a:pPr>
+            <a:r>
+              <a:rPr lang="en-US" sz="1200" dirty="0">
+                <a:solidFill>
+                  <a:srgbClr val="9AA3AD"/>
+                </a:solidFill>
+                <a:latin typeface="Inter" pitchFamily="34" charset="0"/>
+                <a:ea typeface="Inter" pitchFamily="34" charset="-122"/>
+                <a:cs typeface="Inter" pitchFamily="34" charset="-120"/>
+              </a:rPr>
+              <a:t>7</a:t>
+            </a:r>
+            <a:endParaRPr lang="en-US" sz="1200" dirty="0"/>
+          </a:p>
+        </p:txBody>
+      </p:sp>
+      <p:sp>
+        <p:nvSpPr>
+          <p:cNvPr id="46" name="Text 44"/>
+          <p:cNvSpPr txBox="1"/>
+          <p:nvPr/>
+        </p:nvSpPr>
+        <p:spPr>
+          <a:xfrm>
+            <a:off x="1014984" y="3191794"/>
+            <a:ext cx="2011680" cy="248502"/>
+          </a:xfrm>
+          <a:prstGeom prst="rect">
+            <a:avLst/>
+          </a:prstGeom>
+          <a:noFill/>
+          <a:ln/>
+        </p:spPr>
+        <p:txBody>
+          <a:bodyPr wrap="square" lIns="0" tIns="0" rIns="0" bIns="0" rtlCol="0" anchor="ctr"/>
+          <a:lstStyle/>
+          <a:p>
+            <a:pPr indent="0" marL="0">
+              <a:buNone/>
+            </a:pPr>
+            <a:r>
+              <a:rPr lang="en-US" sz="1300" dirty="0">
+                <a:solidFill>
+                  <a:srgbClr val="1A1A1A"/>
+                </a:solidFill>
+                <a:latin typeface="Inter" pitchFamily="34" charset="0"/>
+                <a:ea typeface="Inter" pitchFamily="34" charset="-122"/>
+                <a:cs typeface="Inter" pitchFamily="34" charset="-120"/>
+              </a:rPr>
+              <a:t>HYUNDAI PRESCOTT</a:t>
+            </a:r>
+            <a:endParaRPr lang="en-US" sz="1300" dirty="0"/>
+          </a:p>
+        </p:txBody>
+      </p:sp>
+      <p:sp>
+        <p:nvSpPr>
+          <p:cNvPr id="47" name="Shape 45"/>
+          <p:cNvSpPr/>
+          <p:nvPr/>
+        </p:nvSpPr>
+        <p:spPr>
+          <a:xfrm>
+            <a:off x="3434996" y="3247707"/>
+            <a:ext cx="19282" cy="136676"/>
+          </a:xfrm>
+          <a:prstGeom prst="rect">
+            <a:avLst/>
+          </a:prstGeom>
+          <a:solidFill>
+            <a:srgbClr val="12A566"/>
+          </a:solidFill>
+          <a:ln/>
+        </p:spPr>
+      </p:sp>
+      <p:sp>
+        <p:nvSpPr>
+          <p:cNvPr id="48" name="Text 46"/>
           <p:cNvSpPr txBox="1"/>
           <p:nvPr/>
         </p:nvSpPr>
@@ -3947,7 +4007,7 @@
       </p:sp>
       <p:sp>
         <p:nvSpPr>
-          <p:cNvPr id="46" name="Text 44"/>
+          <p:cNvPr id="49" name="Text 47"/>
           <p:cNvSpPr txBox="1"/>
           <p:nvPr/>
         </p:nvSpPr>
@@ -3986,7 +4046,7 @@
       </p:sp>
       <p:sp>
         <p:nvSpPr>
-          <p:cNvPr id="47" name="Text 45"/>
+          <p:cNvPr id="50" name="Text 48"/>
           <p:cNvSpPr txBox="1"/>
           <p:nvPr/>
         </p:nvSpPr>
@@ -4025,7 +4085,7 @@
       </p:sp>
       <p:sp>
         <p:nvSpPr>
-          <p:cNvPr id="48" name="Text 46"/>
+          <p:cNvPr id="51" name="Text 49"/>
           <p:cNvSpPr txBox="1"/>
           <p:nvPr/>
         </p:nvSpPr>
@@ -4064,7 +4124,7 @@
       </p:sp>
       <p:sp>
         <p:nvSpPr>
-          <p:cNvPr id="49" name="Shape 47"/>
+          <p:cNvPr id="52" name="Shape 50"/>
           <p:cNvSpPr/>
           <p:nvPr/>
         </p:nvSpPr>
@@ -4084,7 +4144,7 @@
       </p:sp>
       <p:sp>
         <p:nvSpPr>
-          <p:cNvPr id="50" name="Text 48"/>
+          <p:cNvPr id="53" name="Text 51"/>
           <p:cNvSpPr txBox="1"/>
           <p:nvPr/>
         </p:nvSpPr>
@@ -4123,7 +4183,7 @@
       </p:sp>
       <p:sp>
         <p:nvSpPr>
-          <p:cNvPr id="51" name="Text 49"/>
+          <p:cNvPr id="54" name="Text 52"/>
           <p:cNvSpPr txBox="1"/>
           <p:nvPr/>
         </p:nvSpPr>
@@ -4162,7 +4222,7 @@
       </p:sp>
       <p:sp>
         <p:nvSpPr>
-          <p:cNvPr id="52" name="Text 50"/>
+          <p:cNvPr id="55" name="Text 53"/>
           <p:cNvSpPr txBox="1"/>
           <p:nvPr/>
         </p:nvSpPr>
@@ -4201,7 +4261,7 @@
       </p:sp>
       <p:sp>
         <p:nvSpPr>
-          <p:cNvPr id="53" name="Text 51"/>
+          <p:cNvPr id="56" name="Text 54"/>
           <p:cNvSpPr txBox="1"/>
           <p:nvPr/>
         </p:nvSpPr>
@@ -4240,7 +4300,7 @@
       </p:sp>
       <p:sp>
         <p:nvSpPr>
-          <p:cNvPr id="54" name="Shape 52"/>
+          <p:cNvPr id="57" name="Shape 55"/>
           <p:cNvSpPr/>
           <p:nvPr/>
         </p:nvSpPr>
@@ -4260,7 +4320,7 @@
       </p:sp>
       <p:sp>
         <p:nvSpPr>
-          <p:cNvPr id="55" name="Text 53"/>
+          <p:cNvPr id="58" name="Text 56"/>
           <p:cNvSpPr txBox="1"/>
           <p:nvPr/>
         </p:nvSpPr>
@@ -4299,7 +4359,7 @@
       </p:sp>
       <p:sp>
         <p:nvSpPr>
-          <p:cNvPr id="56" name="Text 54"/>
+          <p:cNvPr id="59" name="Text 57"/>
           <p:cNvSpPr txBox="1"/>
           <p:nvPr/>
         </p:nvSpPr>
@@ -4338,7 +4398,7 @@
       </p:sp>
       <p:sp>
         <p:nvSpPr>
-          <p:cNvPr id="57" name="Text 55"/>
+          <p:cNvPr id="60" name="Text 58"/>
           <p:cNvSpPr txBox="1"/>
           <p:nvPr/>
         </p:nvSpPr>
@@ -4377,7 +4437,7 @@
       </p:sp>
       <p:sp>
         <p:nvSpPr>
-          <p:cNvPr id="58" name="Text 56"/>
+          <p:cNvPr id="61" name="Text 59"/>
           <p:cNvSpPr txBox="1"/>
           <p:nvPr/>
         </p:nvSpPr>
@@ -4416,7 +4476,7 @@
       </p:sp>
       <p:sp>
         <p:nvSpPr>
-          <p:cNvPr id="59" name="Shape 57"/>
+          <p:cNvPr id="62" name="Shape 60"/>
           <p:cNvSpPr/>
           <p:nvPr/>
         </p:nvSpPr>
@@ -4436,7 +4496,7 @@
       </p:sp>
       <p:sp>
         <p:nvSpPr>
-          <p:cNvPr id="60" name="Text 58"/>
+          <p:cNvPr id="63" name="Text 61"/>
           <p:cNvSpPr txBox="1"/>
           <p:nvPr/>
         </p:nvSpPr>
@@ -4475,7 +4535,7 @@
       </p:sp>
       <p:sp>
         <p:nvSpPr>
-          <p:cNvPr id="61" name="Text 59"/>
+          <p:cNvPr id="64" name="Text 62"/>
           <p:cNvSpPr txBox="1"/>
           <p:nvPr/>
         </p:nvSpPr>
@@ -4514,7 +4574,7 @@
       </p:sp>
       <p:sp>
         <p:nvSpPr>
-          <p:cNvPr id="62" name="Text 60"/>
+          <p:cNvPr id="65" name="Text 63"/>
           <p:cNvSpPr txBox="1"/>
           <p:nvPr/>
         </p:nvSpPr>
@@ -4553,7 +4613,7 @@
       </p:sp>
       <p:sp>
         <p:nvSpPr>
-          <p:cNvPr id="63" name="Text 61"/>
+          <p:cNvPr id="66" name="Text 64"/>
           <p:cNvSpPr txBox="1"/>
           <p:nvPr/>
         </p:nvSpPr>
@@ -4592,7 +4652,7 @@
       </p:sp>
       <p:sp>
         <p:nvSpPr>
-          <p:cNvPr id="64" name="Shape 62"/>
+          <p:cNvPr id="67" name="Shape 65"/>
           <p:cNvSpPr/>
           <p:nvPr/>
         </p:nvSpPr>
@@ -4612,7 +4672,7 @@
       </p:sp>
       <p:sp>
         <p:nvSpPr>
-          <p:cNvPr id="65" name="Text 63"/>
+          <p:cNvPr id="68" name="Text 66"/>
           <p:cNvSpPr txBox="1"/>
           <p:nvPr/>
         </p:nvSpPr>
@@ -4651,7 +4711,7 @@
       </p:sp>
       <p:sp>
         <p:nvSpPr>
-          <p:cNvPr id="66" name="Text 64"/>
+          <p:cNvPr id="69" name="Text 67"/>
           <p:cNvSpPr txBox="1"/>
           <p:nvPr/>
         </p:nvSpPr>
@@ -4690,7 +4750,7 @@
       </p:sp>
       <p:sp>
         <p:nvSpPr>
-          <p:cNvPr id="67" name="Text 65"/>
+          <p:cNvPr id="70" name="Text 68"/>
           <p:cNvSpPr txBox="1"/>
           <p:nvPr/>
         </p:nvSpPr>
@@ -4729,7 +4789,7 @@
       </p:sp>
       <p:sp>
         <p:nvSpPr>
-          <p:cNvPr id="68" name="Text 66"/>
+          <p:cNvPr id="71" name="Text 69"/>
           <p:cNvSpPr txBox="1"/>
           <p:nvPr/>
         </p:nvSpPr>
@@ -4768,7 +4828,7 @@
       </p:sp>
       <p:sp>
         <p:nvSpPr>
-          <p:cNvPr id="69" name="Shape 67"/>
+          <p:cNvPr id="72" name="Shape 70"/>
           <p:cNvSpPr/>
           <p:nvPr/>
         </p:nvSpPr>
@@ -4788,7 +4848,7 @@
       </p:sp>
       <p:sp>
         <p:nvSpPr>
-          <p:cNvPr id="70" name="Text 68"/>
+          <p:cNvPr id="73" name="Text 71"/>
           <p:cNvSpPr txBox="1"/>
           <p:nvPr/>
         </p:nvSpPr>
@@ -4827,7 +4887,7 @@
       </p:sp>
       <p:sp>
         <p:nvSpPr>
-          <p:cNvPr id="71" name="Text 69"/>
+          <p:cNvPr id="74" name="Text 72"/>
           <p:cNvSpPr txBox="1"/>
           <p:nvPr/>
         </p:nvSpPr>
@@ -4866,7 +4926,7 @@
       </p:sp>
       <p:sp>
         <p:nvSpPr>
-          <p:cNvPr id="72" name="Text 70"/>
+          <p:cNvPr id="75" name="Text 73"/>
           <p:cNvSpPr txBox="1"/>
           <p:nvPr/>
         </p:nvSpPr>
@@ -4905,7 +4965,7 @@
       </p:sp>
       <p:sp>
         <p:nvSpPr>
-          <p:cNvPr id="73" name="Text 71"/>
+          <p:cNvPr id="76" name="Text 74"/>
           <p:cNvSpPr txBox="1"/>
           <p:nvPr/>
         </p:nvSpPr>
@@ -4944,7 +5004,7 @@
       </p:sp>
       <p:sp>
         <p:nvSpPr>
-          <p:cNvPr id="74" name="Shape 72"/>
+          <p:cNvPr id="77" name="Shape 75"/>
           <p:cNvSpPr/>
           <p:nvPr/>
         </p:nvSpPr>
@@ -4964,7 +5024,7 @@
       </p:sp>
       <p:sp>
         <p:nvSpPr>
-          <p:cNvPr id="75" name="Text 73"/>
+          <p:cNvPr id="78" name="Text 76"/>
           <p:cNvSpPr txBox="1"/>
           <p:nvPr/>
         </p:nvSpPr>
@@ -5003,7 +5063,7 @@
       </p:sp>
       <p:sp>
         <p:nvSpPr>
-          <p:cNvPr id="76" name="Text 74"/>
+          <p:cNvPr id="79" name="Text 77"/>
           <p:cNvSpPr txBox="1"/>
           <p:nvPr/>
         </p:nvSpPr>
@@ -5042,7 +5102,7 @@
       </p:sp>
       <p:sp>
         <p:nvSpPr>
-          <p:cNvPr id="77" name="Text 75"/>
+          <p:cNvPr id="80" name="Text 78"/>
           <p:cNvSpPr txBox="1"/>
           <p:nvPr/>
         </p:nvSpPr>
@@ -5081,7 +5141,7 @@
       </p:sp>
       <p:sp>
         <p:nvSpPr>
-          <p:cNvPr id="78" name="Text 76"/>
+          <p:cNvPr id="81" name="Text 79"/>
           <p:cNvSpPr txBox="1"/>
           <p:nvPr/>
         </p:nvSpPr>
@@ -5120,7 +5180,7 @@
       </p:sp>
       <p:sp>
         <p:nvSpPr>
-          <p:cNvPr id="79" name="Shape 77"/>
+          <p:cNvPr id="82" name="Shape 80"/>
           <p:cNvSpPr/>
           <p:nvPr/>
         </p:nvSpPr>
@@ -5140,7 +5200,7 @@
       </p:sp>
       <p:sp>
         <p:nvSpPr>
-          <p:cNvPr id="80" name="Text 78"/>
+          <p:cNvPr id="83" name="Text 81"/>
           <p:cNvSpPr txBox="1"/>
           <p:nvPr/>
         </p:nvSpPr>
@@ -5179,7 +5239,7 @@
       </p:sp>
       <p:sp>
         <p:nvSpPr>
-          <p:cNvPr id="81" name="Text 79"/>
+          <p:cNvPr id="84" name="Text 82"/>
           <p:cNvSpPr txBox="1"/>
           <p:nvPr/>
         </p:nvSpPr>
@@ -5218,7 +5278,7 @@
       </p:sp>
       <p:sp>
         <p:nvSpPr>
-          <p:cNvPr id="82" name="Text 80"/>
+          <p:cNvPr id="85" name="Text 83"/>
           <p:cNvSpPr txBox="1"/>
           <p:nvPr/>
         </p:nvSpPr>
@@ -5257,7 +5317,7 @@
       </p:sp>
       <p:sp>
         <p:nvSpPr>
-          <p:cNvPr id="83" name="Text 81"/>
+          <p:cNvPr id="86" name="Text 84"/>
           <p:cNvSpPr txBox="1"/>
           <p:nvPr/>
         </p:nvSpPr>
@@ -5296,7 +5356,7 @@
       </p:sp>
       <p:sp>
         <p:nvSpPr>
-          <p:cNvPr id="84" name="Shape 82"/>
+          <p:cNvPr id="87" name="Shape 85"/>
           <p:cNvSpPr/>
           <p:nvPr/>
         </p:nvSpPr>
@@ -5316,7 +5376,7 @@
       </p:sp>
       <p:sp>
         <p:nvSpPr>
-          <p:cNvPr id="85" name="Text 83"/>
+          <p:cNvPr id="88" name="Text 86"/>
           <p:cNvSpPr txBox="1"/>
           <p:nvPr/>
         </p:nvSpPr>
@@ -5355,7 +5415,7 @@
       </p:sp>
       <p:sp>
         <p:nvSpPr>
-          <p:cNvPr id="86" name="Text 84"/>
+          <p:cNvPr id="89" name="Text 87"/>
           <p:cNvSpPr txBox="1"/>
           <p:nvPr/>
         </p:nvSpPr>
@@ -5394,7 +5454,7 @@
       </p:sp>
       <p:sp>
         <p:nvSpPr>
-          <p:cNvPr id="87" name="Text 85"/>
+          <p:cNvPr id="90" name="Text 88"/>
           <p:cNvSpPr txBox="1"/>
           <p:nvPr/>
         </p:nvSpPr>
@@ -5433,7 +5493,7 @@
       </p:sp>
       <p:sp>
         <p:nvSpPr>
-          <p:cNvPr id="88" name="Text 86"/>
+          <p:cNvPr id="91" name="Text 89"/>
           <p:cNvSpPr txBox="1"/>
           <p:nvPr/>
         </p:nvSpPr>
@@ -5472,7 +5532,7 @@
       </p:sp>
       <p:sp>
         <p:nvSpPr>
-          <p:cNvPr id="89" name="Shape 87"/>
+          <p:cNvPr id="92" name="Shape 90"/>
           <p:cNvSpPr/>
           <p:nvPr/>
         </p:nvSpPr>
@@ -5492,7 +5552,7 @@
       </p:sp>
       <p:sp>
         <p:nvSpPr>
-          <p:cNvPr id="90" name="Text 88"/>
+          <p:cNvPr id="93" name="Text 91"/>
           <p:cNvSpPr txBox="1"/>
           <p:nvPr/>
         </p:nvSpPr>
@@ -5531,7 +5591,7 @@
       </p:sp>
       <p:sp>
         <p:nvSpPr>
-          <p:cNvPr id="91" name="Text 89"/>
+          <p:cNvPr id="94" name="Text 92"/>
           <p:cNvSpPr txBox="1"/>
           <p:nvPr/>
         </p:nvSpPr>
@@ -5570,7 +5630,7 @@
       </p:sp>
       <p:sp>
         <p:nvSpPr>
-          <p:cNvPr id="92" name="Text 90"/>
+          <p:cNvPr id="95" name="Text 93"/>
           <p:cNvSpPr txBox="1"/>
           <p:nvPr/>
         </p:nvSpPr>
@@ -5609,7 +5669,7 @@
       </p:sp>
       <p:sp>
         <p:nvSpPr>
-          <p:cNvPr id="93" name="Text 91"/>
+          <p:cNvPr id="96" name="Text 94"/>
           <p:cNvSpPr txBox="1"/>
           <p:nvPr/>
         </p:nvSpPr>
@@ -5648,7 +5708,7 @@
       </p:sp>
       <p:sp>
         <p:nvSpPr>
-          <p:cNvPr id="94" name="Shape 92"/>
+          <p:cNvPr id="97" name="Shape 95"/>
           <p:cNvSpPr/>
           <p:nvPr/>
         </p:nvSpPr>
@@ -5668,7 +5728,7 @@
       </p:sp>
       <p:sp>
         <p:nvSpPr>
-          <p:cNvPr id="95" name="Text 93"/>
+          <p:cNvPr id="98" name="Text 96"/>
           <p:cNvSpPr txBox="1"/>
           <p:nvPr/>
         </p:nvSpPr>
@@ -5707,7 +5767,7 @@
       </p:sp>
       <p:sp>
         <p:nvSpPr>
-          <p:cNvPr id="96" name="Text 94"/>
+          <p:cNvPr id="99" name="Text 97"/>
           <p:cNvSpPr txBox="1"/>
           <p:nvPr/>
         </p:nvSpPr>
@@ -5746,7 +5806,7 @@
       </p:sp>
       <p:sp>
         <p:nvSpPr>
-          <p:cNvPr id="97" name="Text 95"/>
+          <p:cNvPr id="100" name="Text 98"/>
           <p:cNvSpPr txBox="1"/>
           <p:nvPr/>
         </p:nvSpPr>
@@ -5785,7 +5845,7 @@
       </p:sp>
       <p:sp>
         <p:nvSpPr>
-          <p:cNvPr id="98" name="Text 96"/>
+          <p:cNvPr id="101" name="Text 99"/>
           <p:cNvSpPr txBox="1"/>
           <p:nvPr/>
         </p:nvSpPr>
@@ -5824,7 +5884,7 @@
       </p:sp>
       <p:sp>
         <p:nvSpPr>
-          <p:cNvPr id="99" name="Shape 97"/>
+          <p:cNvPr id="102" name="Shape 100"/>
           <p:cNvSpPr/>
           <p:nvPr/>
         </p:nvSpPr>
@@ -5844,7 +5904,7 @@
       </p:sp>
       <p:sp>
         <p:nvSpPr>
-          <p:cNvPr id="100" name="Text 98"/>
+          <p:cNvPr id="103" name="Text 101"/>
           <p:cNvSpPr txBox="1"/>
           <p:nvPr/>
         </p:nvSpPr>
@@ -5883,7 +5943,7 @@
       </p:sp>
       <p:sp>
         <p:nvSpPr>
-          <p:cNvPr id="101" name="Text 99"/>
+          <p:cNvPr id="104" name="Text 102"/>
           <p:cNvSpPr txBox="1"/>
           <p:nvPr/>
         </p:nvSpPr>
@@ -5922,7 +5982,7 @@
       </p:sp>
       <p:sp>
         <p:nvSpPr>
-          <p:cNvPr id="102" name="Text 100"/>
+          <p:cNvPr id="105" name="Text 103"/>
           <p:cNvSpPr txBox="1"/>
           <p:nvPr/>
         </p:nvSpPr>
@@ -5961,7 +6021,7 @@
       </p:sp>
       <p:sp>
         <p:nvSpPr>
-          <p:cNvPr id="103" name="Text 101"/>
+          <p:cNvPr id="106" name="Text 104"/>
           <p:cNvSpPr txBox="1"/>
           <p:nvPr/>
         </p:nvSpPr>
@@ -6000,7 +6060,7 @@
       </p:sp>
       <p:sp>
         <p:nvSpPr>
-          <p:cNvPr id="104" name="Shape 102"/>
+          <p:cNvPr id="107" name="Shape 105"/>
           <p:cNvSpPr/>
           <p:nvPr/>
         </p:nvSpPr>
@@ -6020,7 +6080,7 @@
       </p:sp>
       <p:sp>
         <p:nvSpPr>
-          <p:cNvPr id="105" name="Text 103"/>
+          <p:cNvPr id="108" name="Text 106"/>
           <p:cNvSpPr txBox="1"/>
           <p:nvPr/>
         </p:nvSpPr>
@@ -6059,7 +6119,7 @@
       </p:sp>
       <p:sp>
         <p:nvSpPr>
-          <p:cNvPr id="106" name="Text 104"/>
+          <p:cNvPr id="109" name="Text 107"/>
           <p:cNvSpPr txBox="1"/>
           <p:nvPr/>
         </p:nvSpPr>
@@ -6098,7 +6158,7 @@
       </p:sp>
       <p:sp>
         <p:nvSpPr>
-          <p:cNvPr id="107" name="Text 105"/>
+          <p:cNvPr id="110" name="Text 108"/>
           <p:cNvSpPr txBox="1"/>
           <p:nvPr/>
         </p:nvSpPr>
@@ -6137,7 +6197,7 @@
       </p:sp>
       <p:sp>
         <p:nvSpPr>
-          <p:cNvPr id="108" name="Text 106"/>
+          <p:cNvPr id="111" name="Text 109"/>
           <p:cNvSpPr txBox="1"/>
           <p:nvPr/>
         </p:nvSpPr>
@@ -6176,7 +6236,7 @@
       </p:sp>
       <p:sp>
         <p:nvSpPr>
-          <p:cNvPr id="109" name="Shape 107"/>
+          <p:cNvPr id="112" name="Shape 110"/>
           <p:cNvSpPr/>
           <p:nvPr/>
         </p:nvSpPr>
@@ -6196,7 +6256,7 @@
       </p:sp>
       <p:sp>
         <p:nvSpPr>
-          <p:cNvPr id="110" name="Text 108"/>
+          <p:cNvPr id="113" name="Text 111"/>
           <p:cNvSpPr txBox="1"/>
           <p:nvPr/>
         </p:nvSpPr>
@@ -6235,7 +6295,7 @@
       </p:sp>
       <p:sp>
         <p:nvSpPr>
-          <p:cNvPr id="111" name="Text 109"/>
+          <p:cNvPr id="114" name="Text 112"/>
           <p:cNvSpPr txBox="1"/>
           <p:nvPr/>
         </p:nvSpPr>
@@ -6274,7 +6334,7 @@
       </p:sp>
       <p:sp>
         <p:nvSpPr>
-          <p:cNvPr id="112" name="Text 110"/>
+          <p:cNvPr id="115" name="Text 113"/>
           <p:cNvSpPr txBox="1"/>
           <p:nvPr/>
         </p:nvSpPr>
@@ -6313,7 +6373,7 @@
       </p:sp>
       <p:sp>
         <p:nvSpPr>
-          <p:cNvPr id="113" name="Text 111"/>
+          <p:cNvPr id="116" name="Text 114"/>
           <p:cNvSpPr txBox="1"/>
           <p:nvPr/>
         </p:nvSpPr>
@@ -6352,7 +6412,7 @@
       </p:sp>
       <p:sp>
         <p:nvSpPr>
-          <p:cNvPr id="114" name="Shape 112"/>
+          <p:cNvPr id="117" name="Shape 115"/>
           <p:cNvSpPr/>
           <p:nvPr/>
         </p:nvSpPr>
@@ -6372,7 +6432,7 @@
       </p:sp>
       <p:sp>
         <p:nvSpPr>
-          <p:cNvPr id="115" name="Text 113"/>
+          <p:cNvPr id="118" name="Text 116"/>
           <p:cNvSpPr txBox="1"/>
           <p:nvPr/>
         </p:nvSpPr>
@@ -6411,7 +6471,7 @@
       </p:sp>
       <p:sp>
         <p:nvSpPr>
-          <p:cNvPr id="116" name="Text 114"/>
+          <p:cNvPr id="119" name="Text 117"/>
           <p:cNvSpPr txBox="1"/>
           <p:nvPr/>
         </p:nvSpPr>
@@ -6450,7 +6510,7 @@
       </p:sp>
       <p:sp>
         <p:nvSpPr>
-          <p:cNvPr id="117" name="Text 115"/>
+          <p:cNvPr id="120" name="Text 118"/>
           <p:cNvSpPr txBox="1"/>
           <p:nvPr/>
         </p:nvSpPr>
@@ -6489,7 +6549,7 @@
       </p:sp>
       <p:sp>
         <p:nvSpPr>
-          <p:cNvPr id="118" name="Text 116"/>
+          <p:cNvPr id="121" name="Text 119"/>
           <p:cNvSpPr txBox="1"/>
           <p:nvPr/>
         </p:nvSpPr>
@@ -6528,7 +6588,7 @@
       </p:sp>
       <p:sp>
         <p:nvSpPr>
-          <p:cNvPr id="119" name="Shape 117"/>
+          <p:cNvPr id="122" name="Shape 120"/>
           <p:cNvSpPr/>
           <p:nvPr/>
         </p:nvSpPr>
@@ -6548,7 +6608,7 @@
       </p:sp>
       <p:sp>
         <p:nvSpPr>
-          <p:cNvPr id="120" name="Text 118"/>
+          <p:cNvPr id="123" name="Text 121"/>
           <p:cNvSpPr txBox="1"/>
           <p:nvPr/>
         </p:nvSpPr>
@@ -6587,7 +6647,7 @@
       </p:sp>
       <p:sp>
         <p:nvSpPr>
-          <p:cNvPr id="121" name="Text 119"/>
+          <p:cNvPr id="124" name="Text 122"/>
           <p:cNvSpPr txBox="1"/>
           <p:nvPr/>
         </p:nvSpPr>
@@ -6626,7 +6686,7 @@
       </p:sp>
       <p:sp>
         <p:nvSpPr>
-          <p:cNvPr id="122" name="Text 120"/>
+          <p:cNvPr id="125" name="Text 123"/>
           <p:cNvSpPr txBox="1"/>
           <p:nvPr/>
         </p:nvSpPr>
@@ -6665,7 +6725,7 @@
       </p:sp>
       <p:sp>
         <p:nvSpPr>
-          <p:cNvPr id="123" name="Text 121"/>
+          <p:cNvPr id="126" name="Text 124"/>
           <p:cNvSpPr txBox="1"/>
           <p:nvPr/>
         </p:nvSpPr>
@@ -6704,7 +6764,7 @@
       </p:sp>
       <p:sp>
         <p:nvSpPr>
-          <p:cNvPr id="124" name="Shape 122"/>
+          <p:cNvPr id="127" name="Shape 125"/>
           <p:cNvSpPr/>
           <p:nvPr/>
         </p:nvSpPr>
@@ -6724,7 +6784,7 @@
       </p:sp>
       <p:sp>
         <p:nvSpPr>
-          <p:cNvPr id="125" name="Text 123"/>
+          <p:cNvPr id="128" name="Text 126"/>
           <p:cNvSpPr txBox="1"/>
           <p:nvPr/>
         </p:nvSpPr>
@@ -6763,7 +6823,7 @@
       </p:sp>
       <p:sp>
         <p:nvSpPr>
-          <p:cNvPr id="126" name="Text 124"/>
+          <p:cNvPr id="129" name="Text 127"/>
           <p:cNvSpPr txBox="1"/>
           <p:nvPr/>
         </p:nvSpPr>
@@ -6802,7 +6862,7 @@
       </p:sp>
       <p:sp>
         <p:nvSpPr>
-          <p:cNvPr id="127" name="Text 125"/>
+          <p:cNvPr id="130" name="Text 128"/>
           <p:cNvSpPr txBox="1"/>
           <p:nvPr/>
         </p:nvSpPr>
@@ -6841,7 +6901,7 @@
       </p:sp>
       <p:sp>
         <p:nvSpPr>
-          <p:cNvPr id="128" name="Text 126"/>
+          <p:cNvPr id="131" name="Text 129"/>
           <p:cNvSpPr txBox="1"/>
           <p:nvPr/>
         </p:nvSpPr>
@@ -6880,7 +6940,7 @@
       </p:sp>
       <p:sp>
         <p:nvSpPr>
-          <p:cNvPr id="129" name="Shape 127"/>
+          <p:cNvPr id="132" name="Shape 130"/>
           <p:cNvSpPr/>
           <p:nvPr/>
         </p:nvSpPr>
@@ -6900,7 +6960,7 @@
       </p:sp>
       <p:sp>
         <p:nvSpPr>
-          <p:cNvPr id="130" name="Text 128"/>
+          <p:cNvPr id="133" name="Text 131"/>
           <p:cNvSpPr txBox="1"/>
           <p:nvPr/>
         </p:nvSpPr>
@@ -6939,7 +6999,7 @@
       </p:sp>
       <p:sp>
         <p:nvSpPr>
-          <p:cNvPr id="131" name="Text 129"/>
+          <p:cNvPr id="134" name="Text 132"/>
           <p:cNvSpPr txBox="1"/>
           <p:nvPr/>
         </p:nvSpPr>
@@ -6978,7 +7038,7 @@
       </p:sp>
       <p:sp>
         <p:nvSpPr>
-          <p:cNvPr id="132" name="Text 130"/>
+          <p:cNvPr id="135" name="Text 133"/>
           <p:cNvSpPr txBox="1"/>
           <p:nvPr/>
         </p:nvSpPr>
@@ -7017,7 +7077,7 @@
       </p:sp>
       <p:sp>
         <p:nvSpPr>
-          <p:cNvPr id="133" name="Text 131"/>
+          <p:cNvPr id="136" name="Text 134"/>
           <p:cNvSpPr txBox="1"/>
           <p:nvPr/>
         </p:nvSpPr>
@@ -7056,7 +7116,7 @@
       </p:sp>
       <p:sp>
         <p:nvSpPr>
-          <p:cNvPr id="134" name="Shape 132"/>
+          <p:cNvPr id="137" name="Shape 135"/>
           <p:cNvSpPr/>
           <p:nvPr/>
         </p:nvSpPr>
@@ -7076,7 +7136,7 @@
       </p:sp>
       <p:sp>
         <p:nvSpPr>
-          <p:cNvPr id="135" name="Text 133"/>
+          <p:cNvPr id="138" name="Text 136"/>
           <p:cNvSpPr txBox="1"/>
           <p:nvPr/>
         </p:nvSpPr>
@@ -7115,7 +7175,7 @@
       </p:sp>
       <p:sp>
         <p:nvSpPr>
-          <p:cNvPr id="136" name="Text 134"/>
+          <p:cNvPr id="139" name="Text 137"/>
           <p:cNvSpPr txBox="1"/>
           <p:nvPr/>
         </p:nvSpPr>
@@ -7154,7 +7214,7 @@
       </p:sp>
       <p:sp>
         <p:nvSpPr>
-          <p:cNvPr id="137" name="Text 135"/>
+          <p:cNvPr id="140" name="Text 138"/>
           <p:cNvSpPr txBox="1"/>
           <p:nvPr/>
         </p:nvSpPr>
@@ -7193,7 +7253,7 @@
       </p:sp>
       <p:sp>
         <p:nvSpPr>
-          <p:cNvPr id="138" name="Text 136"/>
+          <p:cNvPr id="141" name="Text 139"/>
           <p:cNvSpPr txBox="1"/>
           <p:nvPr/>
         </p:nvSpPr>
@@ -7232,7 +7292,7 @@
       </p:sp>
       <p:sp>
         <p:nvSpPr>
-          <p:cNvPr id="139" name="Shape 137"/>
+          <p:cNvPr id="142" name="Shape 140"/>
           <p:cNvSpPr/>
           <p:nvPr/>
         </p:nvSpPr>
@@ -7252,7 +7312,7 @@
       </p:sp>
       <p:sp>
         <p:nvSpPr>
-          <p:cNvPr id="140" name="Text 138"/>
+          <p:cNvPr id="143" name="Text 141"/>
           <p:cNvSpPr txBox="1"/>
           <p:nvPr/>
         </p:nvSpPr>
@@ -7291,7 +7351,7 @@
       </p:sp>
       <p:sp>
         <p:nvSpPr>
-          <p:cNvPr id="141" name="Text 139"/>
+          <p:cNvPr id="144" name="Text 142"/>
           <p:cNvSpPr txBox="1"/>
           <p:nvPr/>
         </p:nvSpPr>
@@ -7330,7 +7390,7 @@
       </p:sp>
       <p:sp>
         <p:nvSpPr>
-          <p:cNvPr id="142" name="Text 140"/>
+          <p:cNvPr id="145" name="Text 143"/>
           <p:cNvSpPr txBox="1"/>
           <p:nvPr/>
         </p:nvSpPr>
@@ -7369,7 +7429,7 @@
       </p:sp>
       <p:sp>
         <p:nvSpPr>
-          <p:cNvPr id="143" name="Text 141"/>
+          <p:cNvPr id="146" name="Text 144"/>
           <p:cNvSpPr txBox="1"/>
           <p:nvPr/>
         </p:nvSpPr>
@@ -7408,7 +7468,7 @@
       </p:sp>
       <p:sp>
         <p:nvSpPr>
-          <p:cNvPr id="144" name="Shape 142"/>
+          <p:cNvPr id="147" name="Shape 145"/>
           <p:cNvSpPr/>
           <p:nvPr/>
         </p:nvSpPr>
@@ -7428,7 +7488,7 @@
       </p:sp>
       <p:sp>
         <p:nvSpPr>
-          <p:cNvPr id="145" name="Text 143"/>
+          <p:cNvPr id="148" name="Text 146"/>
           <p:cNvSpPr txBox="1"/>
           <p:nvPr/>
         </p:nvSpPr>
@@ -7467,7 +7527,7 @@
       </p:sp>
       <p:sp>
         <p:nvSpPr>
-          <p:cNvPr id="146" name="Text 144"/>
+          <p:cNvPr id="149" name="Text 147"/>
           <p:cNvSpPr txBox="1"/>
           <p:nvPr/>
         </p:nvSpPr>
@@ -7506,7 +7566,7 @@
       </p:sp>
       <p:sp>
         <p:nvSpPr>
-          <p:cNvPr id="147" name="Text 145"/>
+          <p:cNvPr id="150" name="Text 148"/>
           <p:cNvSpPr txBox="1"/>
           <p:nvPr/>
         </p:nvSpPr>
@@ -7545,7 +7605,7 @@
       </p:sp>
       <p:sp>
         <p:nvSpPr>
-          <p:cNvPr id="148" name="Text 146"/>
+          <p:cNvPr id="151" name="Text 149"/>
           <p:cNvSpPr txBox="1"/>
           <p:nvPr/>
         </p:nvSpPr>
@@ -7584,7 +7644,7 @@
       </p:sp>
       <p:sp>
         <p:nvSpPr>
-          <p:cNvPr id="149" name="Shape 147"/>
+          <p:cNvPr id="152" name="Shape 150"/>
           <p:cNvSpPr/>
           <p:nvPr/>
         </p:nvSpPr>
@@ -7604,7 +7664,7 @@
       </p:sp>
       <p:sp>
         <p:nvSpPr>
-          <p:cNvPr id="150" name="Text 148"/>
+          <p:cNvPr id="153" name="Text 151"/>
           <p:cNvSpPr txBox="1"/>
           <p:nvPr/>
         </p:nvSpPr>
@@ -7643,7 +7703,7 @@
       </p:sp>
       <p:sp>
         <p:nvSpPr>
-          <p:cNvPr id="151" name="Text 149"/>
+          <p:cNvPr id="154" name="Text 152"/>
           <p:cNvSpPr txBox="1"/>
           <p:nvPr/>
         </p:nvSpPr>
@@ -7682,7 +7742,7 @@
       </p:sp>
       <p:sp>
         <p:nvSpPr>
-          <p:cNvPr id="152" name="Text 150"/>
+          <p:cNvPr id="155" name="Text 153"/>
           <p:cNvSpPr txBox="1"/>
           <p:nvPr/>
         </p:nvSpPr>
@@ -7721,7 +7781,7 @@
       </p:sp>
       <p:sp>
         <p:nvSpPr>
-          <p:cNvPr id="153" name="Text 151"/>
+          <p:cNvPr id="156" name="Text 154"/>
           <p:cNvSpPr txBox="1"/>
           <p:nvPr/>
         </p:nvSpPr>
@@ -7760,7 +7820,7 @@
       </p:sp>
       <p:sp>
         <p:nvSpPr>
-          <p:cNvPr id="154" name="Shape 152"/>
+          <p:cNvPr id="157" name="Shape 155"/>
           <p:cNvSpPr/>
           <p:nvPr/>
         </p:nvSpPr>
@@ -7780,7 +7840,7 @@
       </p:sp>
       <p:sp>
         <p:nvSpPr>
-          <p:cNvPr id="155" name="Text 153"/>
+          <p:cNvPr id="158" name="Text 156"/>
           <p:cNvSpPr txBox="1"/>
           <p:nvPr/>
         </p:nvSpPr>
@@ -7819,7 +7879,7 @@
       </p:sp>
       <p:sp>
         <p:nvSpPr>
-          <p:cNvPr id="156" name="Text 154"/>
+          <p:cNvPr id="159" name="Text 157"/>
           <p:cNvSpPr txBox="1"/>
           <p:nvPr/>
         </p:nvSpPr>
@@ -7858,7 +7918,7 @@
       </p:sp>
       <p:sp>
         <p:nvSpPr>
-          <p:cNvPr id="157" name="Text 155"/>
+          <p:cNvPr id="160" name="Text 158"/>
           <p:cNvSpPr txBox="1"/>
           <p:nvPr/>
         </p:nvSpPr>
@@ -7897,7 +7957,7 @@
       </p:sp>
       <p:sp>
         <p:nvSpPr>
-          <p:cNvPr id="158" name="Text 156"/>
+          <p:cNvPr id="161" name="Text 159"/>
           <p:cNvSpPr txBox="1"/>
           <p:nvPr/>
         </p:nvSpPr>
@@ -7936,7 +7996,7 @@
       </p:sp>
       <p:sp>
         <p:nvSpPr>
-          <p:cNvPr id="159" name="Shape 157"/>
+          <p:cNvPr id="162" name="Shape 160"/>
           <p:cNvSpPr/>
           <p:nvPr/>
         </p:nvSpPr>
@@ -7956,7 +8016,7 @@
       </p:sp>
       <p:sp>
         <p:nvSpPr>
-          <p:cNvPr id="160" name="Text 158"/>
+          <p:cNvPr id="163" name="Text 161"/>
           <p:cNvSpPr txBox="1"/>
           <p:nvPr/>
         </p:nvSpPr>
@@ -7995,7 +8055,7 @@
       </p:sp>
       <p:sp>
         <p:nvSpPr>
-          <p:cNvPr id="161" name="Text 159"/>
+          <p:cNvPr id="164" name="Text 162"/>
           <p:cNvSpPr txBox="1"/>
           <p:nvPr/>
         </p:nvSpPr>
@@ -8034,7 +8094,7 @@
       </p:sp>
       <p:sp>
         <p:nvSpPr>
-          <p:cNvPr id="162" name="Text 160"/>
+          <p:cNvPr id="165" name="Text 163"/>
           <p:cNvSpPr txBox="1"/>
           <p:nvPr/>
         </p:nvSpPr>
@@ -8073,7 +8133,7 @@
       </p:sp>
       <p:sp>
         <p:nvSpPr>
-          <p:cNvPr id="163" name="Text 161"/>
+          <p:cNvPr id="166" name="Text 164"/>
           <p:cNvSpPr txBox="1"/>
           <p:nvPr/>
         </p:nvSpPr>
@@ -8112,7 +8172,7 @@
       </p:sp>
       <p:sp>
         <p:nvSpPr>
-          <p:cNvPr id="164" name="Shape 162"/>
+          <p:cNvPr id="167" name="Shape 165"/>
           <p:cNvSpPr/>
           <p:nvPr/>
         </p:nvSpPr>
@@ -8132,7 +8192,7 @@
       </p:sp>
       <p:sp>
         <p:nvSpPr>
-          <p:cNvPr id="165" name="Text 163"/>
+          <p:cNvPr id="168" name="Text 166"/>
           <p:cNvSpPr txBox="1"/>
           <p:nvPr/>
         </p:nvSpPr>
@@ -8171,7 +8231,7 @@
       </p:sp>
       <p:sp>
         <p:nvSpPr>
-          <p:cNvPr id="166" name="Text 164"/>
+          <p:cNvPr id="169" name="Text 167"/>
           <p:cNvSpPr txBox="1"/>
           <p:nvPr/>
         </p:nvSpPr>
@@ -8210,92 +8270,14 @@
       </p:sp>
       <p:sp>
         <p:nvSpPr>
-          <p:cNvPr id="167" name="Text 165"/>
-          <p:cNvSpPr txBox="1"/>
-          <p:nvPr/>
-        </p:nvSpPr>
-        <p:spPr>
-          <a:xfrm>
-            <a:off x="6208776" y="5179807"/>
-            <a:ext cx="310896" cy="248502"/>
-          </a:xfrm>
-          <a:prstGeom prst="rect">
-            <a:avLst/>
-          </a:prstGeom>
-          <a:noFill/>
-          <a:ln/>
-        </p:spPr>
-        <p:txBody>
-          <a:bodyPr wrap="square" lIns="0" tIns="0" rIns="0" bIns="0" rtlCol="0" anchor="ctr"/>
-          <a:lstStyle/>
-          <a:p>
-            <a:pPr algn="r" indent="0" marL="0">
-              <a:buNone/>
-            </a:pPr>
-            <a:r>
-              <a:rPr lang="en-US" sz="1200" dirty="0">
-                <a:solidFill>
-                  <a:srgbClr val="9AA3AD"/>
-                </a:solidFill>
-                <a:latin typeface="Inter" pitchFamily="34" charset="0"/>
-                <a:ea typeface="Inter" pitchFamily="34" charset="-122"/>
-                <a:cs typeface="Inter" pitchFamily="34" charset="-120"/>
-              </a:rPr>
-              <a:t>32</a:t>
-            </a:r>
-            <a:endParaRPr lang="en-US" sz="1200" dirty="0"/>
-          </a:p>
-        </p:txBody>
-      </p:sp>
-      <p:sp>
-        <p:nvSpPr>
-          <p:cNvPr id="168" name="Text 166"/>
-          <p:cNvSpPr txBox="1"/>
-          <p:nvPr/>
-        </p:nvSpPr>
-        <p:spPr>
-          <a:xfrm>
-            <a:off x="6565392" y="5179807"/>
-            <a:ext cx="2011680" cy="248502"/>
-          </a:xfrm>
-          <a:prstGeom prst="rect">
-            <a:avLst/>
-          </a:prstGeom>
-          <a:noFill/>
-          <a:ln/>
-        </p:spPr>
-        <p:txBody>
-          <a:bodyPr wrap="square" lIns="0" tIns="0" rIns="0" bIns="0" rtlCol="0" anchor="ctr"/>
-          <a:lstStyle/>
-          <a:p>
-            <a:pPr indent="0" marL="0">
-              <a:buNone/>
-            </a:pPr>
-            <a:r>
-              <a:rPr lang="en-US" sz="1300" dirty="0">
-                <a:solidFill>
-                  <a:srgbClr val="1A1A1A"/>
-                </a:solidFill>
-                <a:latin typeface="Inter" pitchFamily="34" charset="0"/>
-                <a:ea typeface="Inter" pitchFamily="34" charset="-122"/>
-                <a:cs typeface="Inter" pitchFamily="34" charset="-120"/>
-              </a:rPr>
-              <a:t>CHEVY LV</a:t>
-            </a:r>
-            <a:endParaRPr lang="en-US" sz="1300" dirty="0"/>
-          </a:p>
-        </p:txBody>
-      </p:sp>
-      <p:sp>
-        <p:nvSpPr>
-          <p:cNvPr id="169" name="Shape 167"/>
+          <p:cNvPr id="170" name="Shape 168"/>
           <p:cNvSpPr/>
           <p:nvPr/>
         </p:nvSpPr>
         <p:spPr>
           <a:xfrm>
-            <a:off x="8691210" y="5235720"/>
-            <a:ext cx="294194" cy="136676"/>
+            <a:off x="11521440" y="4977025"/>
+            <a:ext cx="54864" cy="157062"/>
           </a:xfrm>
           <a:prstGeom prst="rect">
             <a:avLst/>
@@ -8308,170 +8290,92 @@
       </p:sp>
       <p:sp>
         <p:nvSpPr>
-          <p:cNvPr id="170" name="Text 168"/>
-          <p:cNvSpPr txBox="1"/>
-          <p:nvPr/>
-        </p:nvSpPr>
-        <p:spPr>
-          <a:xfrm>
-            <a:off x="9500616" y="5179807"/>
-            <a:ext cx="1097280" cy="248502"/>
-          </a:xfrm>
-          <a:prstGeom prst="rect">
-            <a:avLst/>
-          </a:prstGeom>
-          <a:noFill/>
-          <a:ln/>
-        </p:spPr>
-        <p:txBody>
-          <a:bodyPr wrap="square" lIns="0" tIns="0" rIns="0" bIns="0" rtlCol="0" anchor="ctr"/>
-          <a:lstStyle/>
-          <a:p>
-            <a:pPr algn="r" indent="0" marL="0">
-              <a:buNone/>
-            </a:pPr>
-            <a:r>
-              <a:rPr lang="en-US" sz="1300" b="1" dirty="0">
-                <a:solidFill>
-                  <a:srgbClr val="A82B26"/>
-                </a:solidFill>
-                <a:latin typeface="Inter" pitchFamily="34" charset="0"/>
-                <a:ea typeface="Inter" pitchFamily="34" charset="-122"/>
-                <a:cs typeface="Inter" pitchFamily="34" charset="-120"/>
-              </a:rPr>
-              <a:t>−$356K</a:t>
-            </a:r>
-            <a:endParaRPr lang="en-US" sz="1300" dirty="0"/>
-          </a:p>
-        </p:txBody>
-      </p:sp>
-      <p:sp>
-        <p:nvSpPr>
           <p:cNvPr id="171" name="Text 169"/>
           <p:cNvSpPr txBox="1"/>
           <p:nvPr/>
         </p:nvSpPr>
         <p:spPr>
           <a:xfrm>
-            <a:off x="10597896" y="5179807"/>
-            <a:ext cx="868680" cy="248502"/>
-          </a:xfrm>
-          <a:prstGeom prst="rect">
-            <a:avLst/>
-          </a:prstGeom>
-          <a:noFill/>
-          <a:ln/>
-        </p:spPr>
-        <p:txBody>
-          <a:bodyPr wrap="square" lIns="0" tIns="0" rIns="0" bIns="0" rtlCol="0" anchor="ctr"/>
-          <a:lstStyle/>
-          <a:p>
-            <a:pPr algn="r" indent="0" marL="0">
+            <a:off x="6208776" y="5179807"/>
+            <a:ext cx="310896" cy="248502"/>
+          </a:xfrm>
+          <a:prstGeom prst="rect">
+            <a:avLst/>
+          </a:prstGeom>
+          <a:noFill/>
+          <a:ln/>
+        </p:spPr>
+        <p:txBody>
+          <a:bodyPr wrap="square" lIns="0" tIns="0" rIns="0" bIns="0" rtlCol="0" anchor="ctr"/>
+          <a:lstStyle/>
+          <a:p>
+            <a:pPr algn="r" indent="0" marL="0">
+              <a:buNone/>
+            </a:pPr>
+            <a:r>
+              <a:rPr lang="en-US" sz="1200" dirty="0">
+                <a:solidFill>
+                  <a:srgbClr val="9AA3AD"/>
+                </a:solidFill>
+                <a:latin typeface="Inter" pitchFamily="34" charset="0"/>
+                <a:ea typeface="Inter" pitchFamily="34" charset="-122"/>
+                <a:cs typeface="Inter" pitchFamily="34" charset="-120"/>
+              </a:rPr>
+              <a:t>32</a:t>
+            </a:r>
+            <a:endParaRPr lang="en-US" sz="1200" dirty="0"/>
+          </a:p>
+        </p:txBody>
+      </p:sp>
+      <p:sp>
+        <p:nvSpPr>
+          <p:cNvPr id="172" name="Text 170"/>
+          <p:cNvSpPr txBox="1"/>
+          <p:nvPr/>
+        </p:nvSpPr>
+        <p:spPr>
+          <a:xfrm>
+            <a:off x="6565392" y="5179807"/>
+            <a:ext cx="2011680" cy="248502"/>
+          </a:xfrm>
+          <a:prstGeom prst="rect">
+            <a:avLst/>
+          </a:prstGeom>
+          <a:noFill/>
+          <a:ln/>
+        </p:spPr>
+        <p:txBody>
+          <a:bodyPr wrap="square" lIns="0" tIns="0" rIns="0" bIns="0" rtlCol="0" anchor="ctr"/>
+          <a:lstStyle/>
+          <a:p>
+            <a:pPr indent="0" marL="0">
               <a:buNone/>
             </a:pPr>
             <a:r>
               <a:rPr lang="en-US" sz="1300" dirty="0">
                 <a:solidFill>
-                  <a:srgbClr val="595959"/>
-                </a:solidFill>
-                <a:latin typeface="Inter" pitchFamily="34" charset="0"/>
-                <a:ea typeface="Inter" pitchFamily="34" charset="-122"/>
-                <a:cs typeface="Inter" pitchFamily="34" charset="-120"/>
-              </a:rPr>
-              <a:t>−3,177</a:t>
-            </a:r>
-            <a:endParaRPr lang="en-US" sz="1300" dirty="0"/>
-          </a:p>
-        </p:txBody>
-      </p:sp>
-      <p:sp>
-        <p:nvSpPr>
-          <p:cNvPr id="172" name="Text 170"/>
-          <p:cNvSpPr txBox="1"/>
-          <p:nvPr/>
-        </p:nvSpPr>
-        <p:spPr>
-          <a:xfrm>
-            <a:off x="6208776" y="5428309"/>
-            <a:ext cx="310896" cy="248502"/>
-          </a:xfrm>
-          <a:prstGeom prst="rect">
-            <a:avLst/>
-          </a:prstGeom>
-          <a:noFill/>
-          <a:ln/>
-        </p:spPr>
-        <p:txBody>
-          <a:bodyPr wrap="square" lIns="0" tIns="0" rIns="0" bIns="0" rtlCol="0" anchor="ctr"/>
-          <a:lstStyle/>
-          <a:p>
-            <a:pPr algn="r" indent="0" marL="0">
-              <a:buNone/>
-            </a:pPr>
-            <a:r>
-              <a:rPr lang="en-US" sz="1200" dirty="0">
-                <a:solidFill>
-                  <a:srgbClr val="9AA3AD"/>
-                </a:solidFill>
-                <a:latin typeface="Inter" pitchFamily="34" charset="0"/>
-                <a:ea typeface="Inter" pitchFamily="34" charset="-122"/>
-                <a:cs typeface="Inter" pitchFamily="34" charset="-120"/>
-              </a:rPr>
-              <a:t>33</a:t>
-            </a:r>
-            <a:endParaRPr lang="en-US" sz="1200" dirty="0"/>
-          </a:p>
-        </p:txBody>
-      </p:sp>
-      <p:sp>
-        <p:nvSpPr>
-          <p:cNvPr id="173" name="Text 171"/>
-          <p:cNvSpPr txBox="1"/>
-          <p:nvPr/>
-        </p:nvSpPr>
-        <p:spPr>
-          <a:xfrm>
-            <a:off x="6565392" y="5428309"/>
-            <a:ext cx="2011680" cy="248502"/>
-          </a:xfrm>
-          <a:prstGeom prst="rect">
-            <a:avLst/>
-          </a:prstGeom>
-          <a:noFill/>
-          <a:ln/>
-        </p:spPr>
-        <p:txBody>
-          <a:bodyPr wrap="square" lIns="0" tIns="0" rIns="0" bIns="0" rtlCol="0" anchor="ctr"/>
-          <a:lstStyle/>
-          <a:p>
-            <a:pPr indent="0" marL="0">
-              <a:buNone/>
-            </a:pPr>
-            <a:r>
-              <a:rPr lang="en-US" sz="1300" dirty="0">
-                <a:solidFill>
                   <a:srgbClr val="1A1A1A"/>
                 </a:solidFill>
                 <a:latin typeface="Inter" pitchFamily="34" charset="0"/>
                 <a:ea typeface="Inter" pitchFamily="34" charset="-122"/>
                 <a:cs typeface="Inter" pitchFamily="34" charset="-120"/>
               </a:rPr>
-              <a:t>TOYOTA SPOKANE</a:t>
-            </a:r>
-            <a:endParaRPr lang="en-US" sz="1300" dirty="0"/>
-          </a:p>
-        </p:txBody>
-      </p:sp>
-      <p:sp>
-        <p:nvSpPr>
-          <p:cNvPr id="174" name="Shape 172"/>
+              <a:t>CHEVY LV</a:t>
+            </a:r>
+            <a:endParaRPr lang="en-US" sz="1300" dirty="0"/>
+          </a:p>
+        </p:txBody>
+      </p:sp>
+      <p:sp>
+        <p:nvSpPr>
+          <p:cNvPr id="173" name="Shape 171"/>
           <p:cNvSpPr/>
           <p:nvPr/>
         </p:nvSpPr>
         <p:spPr>
           <a:xfrm>
-            <a:off x="8650224" y="5484222"/>
-            <a:ext cx="335180" cy="136676"/>
+            <a:off x="8691210" y="5235720"/>
+            <a:ext cx="294194" cy="136676"/>
           </a:xfrm>
           <a:prstGeom prst="rect">
             <a:avLst/>
@@ -8484,7 +8388,203 @@
       </p:sp>
       <p:sp>
         <p:nvSpPr>
+          <p:cNvPr id="174" name="Text 172"/>
+          <p:cNvSpPr txBox="1"/>
+          <p:nvPr/>
+        </p:nvSpPr>
+        <p:spPr>
+          <a:xfrm>
+            <a:off x="9500616" y="5179807"/>
+            <a:ext cx="1097280" cy="248502"/>
+          </a:xfrm>
+          <a:prstGeom prst="rect">
+            <a:avLst/>
+          </a:prstGeom>
+          <a:noFill/>
+          <a:ln/>
+        </p:spPr>
+        <p:txBody>
+          <a:bodyPr wrap="square" lIns="0" tIns="0" rIns="0" bIns="0" rtlCol="0" anchor="ctr"/>
+          <a:lstStyle/>
+          <a:p>
+            <a:pPr algn="r" indent="0" marL="0">
+              <a:buNone/>
+            </a:pPr>
+            <a:r>
+              <a:rPr lang="en-US" sz="1300" b="1" dirty="0">
+                <a:solidFill>
+                  <a:srgbClr val="A82B26"/>
+                </a:solidFill>
+                <a:latin typeface="Inter" pitchFamily="34" charset="0"/>
+                <a:ea typeface="Inter" pitchFamily="34" charset="-122"/>
+                <a:cs typeface="Inter" pitchFamily="34" charset="-120"/>
+              </a:rPr>
+              <a:t>−$356K</a:t>
+            </a:r>
+            <a:endParaRPr lang="en-US" sz="1300" dirty="0"/>
+          </a:p>
+        </p:txBody>
+      </p:sp>
+      <p:sp>
+        <p:nvSpPr>
           <p:cNvPr id="175" name="Text 173"/>
+          <p:cNvSpPr txBox="1"/>
+          <p:nvPr/>
+        </p:nvSpPr>
+        <p:spPr>
+          <a:xfrm>
+            <a:off x="10597896" y="5179807"/>
+            <a:ext cx="868680" cy="248502"/>
+          </a:xfrm>
+          <a:prstGeom prst="rect">
+            <a:avLst/>
+          </a:prstGeom>
+          <a:noFill/>
+          <a:ln/>
+        </p:spPr>
+        <p:txBody>
+          <a:bodyPr wrap="square" lIns="0" tIns="0" rIns="0" bIns="0" rtlCol="0" anchor="ctr"/>
+          <a:lstStyle/>
+          <a:p>
+            <a:pPr algn="r" indent="0" marL="0">
+              <a:buNone/>
+            </a:pPr>
+            <a:r>
+              <a:rPr lang="en-US" sz="1300" dirty="0">
+                <a:solidFill>
+                  <a:srgbClr val="595959"/>
+                </a:solidFill>
+                <a:latin typeface="Inter" pitchFamily="34" charset="0"/>
+                <a:ea typeface="Inter" pitchFamily="34" charset="-122"/>
+                <a:cs typeface="Inter" pitchFamily="34" charset="-120"/>
+              </a:rPr>
+              <a:t>−3,177</a:t>
+            </a:r>
+            <a:endParaRPr lang="en-US" sz="1300" dirty="0"/>
+          </a:p>
+        </p:txBody>
+      </p:sp>
+      <p:sp>
+        <p:nvSpPr>
+          <p:cNvPr id="176" name="Shape 174"/>
+          <p:cNvSpPr/>
+          <p:nvPr/>
+        </p:nvSpPr>
+        <p:spPr>
+          <a:xfrm>
+            <a:off x="11521440" y="5225527"/>
+            <a:ext cx="54864" cy="157062"/>
+          </a:xfrm>
+          <a:prstGeom prst="rect">
+            <a:avLst/>
+          </a:prstGeom>
+          <a:solidFill>
+            <a:srgbClr val="C2352F"/>
+          </a:solidFill>
+          <a:ln/>
+        </p:spPr>
+      </p:sp>
+      <p:sp>
+        <p:nvSpPr>
+          <p:cNvPr id="177" name="Text 175"/>
+          <p:cNvSpPr txBox="1"/>
+          <p:nvPr/>
+        </p:nvSpPr>
+        <p:spPr>
+          <a:xfrm>
+            <a:off x="6208776" y="5428309"/>
+            <a:ext cx="310896" cy="248502"/>
+          </a:xfrm>
+          <a:prstGeom prst="rect">
+            <a:avLst/>
+          </a:prstGeom>
+          <a:noFill/>
+          <a:ln/>
+        </p:spPr>
+        <p:txBody>
+          <a:bodyPr wrap="square" lIns="0" tIns="0" rIns="0" bIns="0" rtlCol="0" anchor="ctr"/>
+          <a:lstStyle/>
+          <a:p>
+            <a:pPr algn="r" indent="0" marL="0">
+              <a:buNone/>
+            </a:pPr>
+            <a:r>
+              <a:rPr lang="en-US" sz="1200" dirty="0">
+                <a:solidFill>
+                  <a:srgbClr val="9AA3AD"/>
+                </a:solidFill>
+                <a:latin typeface="Inter" pitchFamily="34" charset="0"/>
+                <a:ea typeface="Inter" pitchFamily="34" charset="-122"/>
+                <a:cs typeface="Inter" pitchFamily="34" charset="-120"/>
+              </a:rPr>
+              <a:t>33</a:t>
+            </a:r>
+            <a:endParaRPr lang="en-US" sz="1200" dirty="0"/>
+          </a:p>
+        </p:txBody>
+      </p:sp>
+      <p:sp>
+        <p:nvSpPr>
+          <p:cNvPr id="178" name="Text 176"/>
+          <p:cNvSpPr txBox="1"/>
+          <p:nvPr/>
+        </p:nvSpPr>
+        <p:spPr>
+          <a:xfrm>
+            <a:off x="6565392" y="5428309"/>
+            <a:ext cx="2011680" cy="248502"/>
+          </a:xfrm>
+          <a:prstGeom prst="rect">
+            <a:avLst/>
+          </a:prstGeom>
+          <a:noFill/>
+          <a:ln/>
+        </p:spPr>
+        <p:txBody>
+          <a:bodyPr wrap="square" lIns="0" tIns="0" rIns="0" bIns="0" rtlCol="0" anchor="ctr"/>
+          <a:lstStyle/>
+          <a:p>
+            <a:pPr indent="0" marL="0">
+              <a:buNone/>
+            </a:pPr>
+            <a:r>
+              <a:rPr lang="en-US" sz="1300" dirty="0">
+                <a:solidFill>
+                  <a:srgbClr val="1A1A1A"/>
+                </a:solidFill>
+                <a:latin typeface="Inter" pitchFamily="34" charset="0"/>
+                <a:ea typeface="Inter" pitchFamily="34" charset="-122"/>
+                <a:cs typeface="Inter" pitchFamily="34" charset="-120"/>
+              </a:rPr>
+              <a:t>TOYOTA SPOKANE</a:t>
+            </a:r>
+            <a:endParaRPr lang="en-US" sz="1300" dirty="0"/>
+          </a:p>
+        </p:txBody>
+      </p:sp>
+      <p:sp>
+        <p:nvSpPr>
+          <p:cNvPr id="179" name="Shape 177"/>
+          <p:cNvSpPr/>
+          <p:nvPr/>
+        </p:nvSpPr>
+        <p:spPr>
+          <a:xfrm>
+            <a:off x="8650224" y="5484222"/>
+            <a:ext cx="335180" cy="136676"/>
+          </a:xfrm>
+          <a:prstGeom prst="rect">
+            <a:avLst/>
+          </a:prstGeom>
+          <a:solidFill>
+            <a:srgbClr val="C2352F"/>
+          </a:solidFill>
+          <a:ln/>
+        </p:spPr>
+      </p:sp>
+      <p:sp>
+        <p:nvSpPr>
+          <p:cNvPr id="180" name="Text 178"/>
           <p:cNvSpPr txBox="1"/>
           <p:nvPr/>
         </p:nvSpPr>
@@ -8523,7 +8623,7 @@
       </p:sp>
       <p:sp>
         <p:nvSpPr>
-          <p:cNvPr id="176" name="Text 174"/>
+          <p:cNvPr id="181" name="Text 179"/>
           <p:cNvSpPr txBox="1"/>
           <p:nvPr/>
         </p:nvSpPr>
@@ -8562,7 +8662,27 @@
       </p:sp>
       <p:sp>
         <p:nvSpPr>
-          <p:cNvPr id="177" name="Shape 175"/>
+          <p:cNvPr id="182" name="Shape 180"/>
+          <p:cNvSpPr/>
+          <p:nvPr/>
+        </p:nvSpPr>
+        <p:spPr>
+          <a:xfrm>
+            <a:off x="11521440" y="5474029"/>
+            <a:ext cx="54864" cy="157062"/>
+          </a:xfrm>
+          <a:prstGeom prst="rect">
+            <a:avLst/>
+          </a:prstGeom>
+          <a:solidFill>
+            <a:srgbClr val="C2352F"/>
+          </a:solidFill>
+          <a:ln/>
+        </p:spPr>
+      </p:sp>
+      <p:sp>
+        <p:nvSpPr>
+          <p:cNvPr id="183" name="Shape 181"/>
           <p:cNvSpPr/>
           <p:nvPr/>
         </p:nvSpPr>
@@ -8582,7 +8702,7 @@
       </p:sp>
       <p:sp>
         <p:nvSpPr>
-          <p:cNvPr id="178" name="Shape 176"/>
+          <p:cNvPr id="184" name="Shape 182"/>
           <p:cNvSpPr/>
           <p:nvPr/>
         </p:nvSpPr>
@@ -8602,7 +8722,7 @@
       </p:sp>
       <p:sp>
         <p:nvSpPr>
-          <p:cNvPr id="179" name="Text 177"/>
+          <p:cNvPr id="185" name="Text 183"/>
           <p:cNvSpPr txBox="1"/>
           <p:nvPr/>
         </p:nvSpPr>

--- a/day2-deck/decks/Op Code Missed Opportunity - Review.pptx
+++ b/day2-deck/decks/Op Code Missed Opportunity - Review.pptx
@@ -595,7 +595,7 @@
           <a:p>
             <a:r>
               <a:rPr lang="en-US" dirty="0"/>
-              <a:t>Takeaway with the store call-outs (off the slide): Toyota Spokane is furthest below at −$406K so far this year; 7 of 33 stores are ahead of benchmark across the four services. 15 stores are under all four.Source: Qlik - Closed Repair Orders. Customer pay, Jan-Sep 2026 by close date, op code report basis. Same-store, INEOS excluded (opened 2026). Services short = benchmark x the store's CP ROs, minus the services it sold. Each service valued at the store's own labor + parts gross per service sold (group average where the store sold fewer than 30), capped at twice the group average because some flagged lines carry other work bundled on them. Alignment, tire balance, brake fluid and fuel system service added together, every store: gross Jan-Sep 2026 above (+) or below (-) the four benchmarks, at the store's own gross per service. Opcodes = the four services' opcodes above (+) or below (-) their benchmarks, added together; green / red bar = top / bottom three by opcodes. Below-benchmark services count against above-benchmark ones here.TOYOTA SPOKANE: −$406K, −5,191 opcodes Jan-Sep against the four benchmarks; under 4 of 4
+              <a:t>Takeaway with the store call-outs (off the slide): Toyota Spokane is furthest below at −$406K so far this year; 7 of 33 stores are ahead of benchmark on net across the four services. 15 stores are under all four.Source: Qlik - Closed Repair Orders. Customer pay, Jan-Sep 2026 by close date, op code report basis. Same-store, INEOS excluded (opened 2026). Services short = benchmark x the store's CP ROs, minus the services it sold. Each service valued at the store's own labor + parts gross per service sold (group average where the store sold fewer than 30), capped at twice the group average because some flagged lines carry other work bundled on them. Alignment, tire balance, brake fluid and fuel system service added together, every store: gross Jan-Sep 2026 above (+) or below (-) the four benchmarks, at the store's own gross per service. Opcodes = the four services' opcodes above (+) or below (-) their benchmarks, added together; green / red bar = top / bottom three by opcodes. Below-benchmark services count against above-benchmark ones here.TOYOTA SPOKANE: −$406K, −5,191 opcodes Jan-Sep against the four benchmarks; under 4 of 4
 CHEVY LV: −$356K, −3,177 opcodes Jan-Sep against the four benchmarks; under 4 of 4
 TOYOTA FLAGSTAFF: −$267K, −3,494 opcodes Jan-Sep against the four benchmarks; under 4 of 4
 TOYOTA HENDERSON: −$227K, −3,005 opcodes Jan-Sep against the four benchmarks; under 3 of 4
@@ -8709,7 +8709,7 @@
         <p:spPr>
           <a:xfrm>
             <a:off x="457200" y="6126480"/>
-            <a:ext cx="11274552" cy="371856"/>
+            <a:ext cx="11274552" cy="364236"/>
           </a:xfrm>
           <a:prstGeom prst="rect">
             <a:avLst/>
@@ -8729,7 +8729,7 @@
         <p:spPr>
           <a:xfrm>
             <a:off x="658368" y="6144768"/>
-            <a:ext cx="10927080" cy="335280"/>
+            <a:ext cx="10927080" cy="327660"/>
           </a:xfrm>
           <a:prstGeom prst="rect">
             <a:avLst/>
@@ -8745,7 +8745,7 @@
               <a:buNone/>
             </a:pPr>
             <a:r>
-              <a:rPr lang="en-US" sz="1600" b="1" dirty="0">
+              <a:rPr lang="en-US" sz="1550" b="1" dirty="0">
                 <a:solidFill>
                   <a:srgbClr val="A82B26"/>
                 </a:solidFill>
@@ -8753,9 +8753,9 @@
                 <a:ea typeface="Inter" pitchFamily="34" charset="-122"/>
                 <a:cs typeface="Inter" pitchFamily="34" charset="-120"/>
               </a:rPr>
-              <a:t>7 of 33 stores are ahead of benchmark across the four services. 15 stores are under all four.</a:t>
-            </a:r>
-            <a:endParaRPr lang="en-US" sz="1600" dirty="0"/>
+              <a:t>7 of 33 stores are ahead of benchmark on net across the four services. 15 stores are under all four.</a:t>
+            </a:r>
+            <a:endParaRPr lang="en-US" sz="1550" dirty="0"/>
           </a:p>
         </p:txBody>
       </p:sp>

--- a/day2-deck/decks/Op Code Missed Opportunity - Review.pptx
+++ b/day2-deck/decks/Op Code Missed Opportunity - Review.pptx
@@ -595,19 +595,19 @@
           <a:p>
             <a:r>
               <a:rPr lang="en-US" dirty="0"/>
-              <a:t>Takeaway with the store call-outs (off the slide): Toyota Spokane is furthest below at −$406K so far this year; 7 of 33 stores are ahead of benchmark on net across the four services. 15 stores are under all four.Source: Qlik - Closed Repair Orders. Customer pay, Jan-Sep 2026 by close date, op code report basis. Same-store, INEOS excluded (opened 2026). Services short = benchmark x the store's CP ROs, minus the services it sold. Each service valued at the store's own labor + parts gross per service sold (group average where the store sold fewer than 30), capped at twice the group average because some flagged lines carry other work bundled on them. Alignment, tire balance, brake fluid and fuel system service added together, every store: gross Jan-Sep 2026 above (+) or below (-) the four benchmarks, at the store's own gross per service. Opcodes = the four services' opcodes above (+) or below (-) their benchmarks, added together; green / red bar = top / bottom three by opcodes. Below-benchmark services count against above-benchmark ones here.TOYOTA SPOKANE: −$406K, −5,191 opcodes Jan-Sep against the four benchmarks; under 4 of 4
+              <a:t>Takeaway with the store call-outs (off the slide): Toyota Spokane is furthest below at −$406K so far this year; 7 of 33 stores are ahead of benchmark on net across the four services. 15 stores miss every benchmark that applies to them; 1 store misses none.Source: Qlik - Closed Repair Orders. Customer pay, Jan-Sep 2026 by close date, op code report basis. Same-store, INEOS excluded (opened 2026). Services short = benchmark x the store's CP ROs, minus the services it sold. Each service valued at the store's own labor + parts gross per service sold (group average where the store sold fewer than 30), capped at twice the group average because some flagged lines carry other work bundled on them. Alignment, tire balance, brake fluid and fuel system service added together, every store: gross Jan-Sep 2026 above (+) or below (-) the four benchmarks, at the store's own gross per service. Opcodes = the four services' opcodes above (+) or below (-) their benchmarks, added together; green / red bar = top / bottom three by opcodes. Missed = services under benchmark out of those the manufacturer calls for at the store (tire balance at the Audi stores and fuel system service at Volvo, Audi Henderson, VW Henderson and Audi Reno are left out). Below-benchmark services count against above-benchmark ones here.TOYOTA SPOKANE: −$406K, −5,191 opcodes Jan-Sep against the four benchmarks; under 4 of 4
 CHEVY LV: −$356K, −3,177 opcodes Jan-Sep against the four benchmarks; under 4 of 4
 TOYOTA FLAGSTAFF: −$267K, −3,494 opcodes Jan-Sep against the four benchmarks; under 4 of 4
 TOYOTA HENDERSON: −$227K, −3,005 opcodes Jan-Sep against the four benchmarks; under 3 of 4
 KIA LV: −$185K, −1,708 opcodes Jan-Sep against the four benchmarks; under 4 of 4
 CDJR POST FALLS: −$184K, −1,863 opcodes Jan-Sep against the four benchmarks; under 4 of 4
 TOYOTA PRESCOTT: −$175K, −1,906 opcodes Jan-Sep against the four benchmarks; under 4 of 4
-AUDI RENO: −$162K, −1,152 opcodes Jan-Sep against the four benchmarks; under 4 of 4
+AUDI RENO: −$162K, −1,152 opcodes Jan-Sep against the four benchmarks; under 2 of 2
 HONDA FLAGSTAFF: −$150K, −1,257 opcodes Jan-Sep against the four benchmarks; under 4 of 4
 NISSAN: −$150K, −1,613 opcodes Jan-Sep against the four benchmarks; under 3 of 4
 HONDA SPOKANE: −$140K, −1,717 opcodes Jan-Sep against the four benchmarks; under 3 of 4
 LEXUS: −$105K, −1,068 opcodes Jan-Sep against the four benchmarks; under 4 of 4
-VW HENDERSON: −$105K, −827 opcodes Jan-Sep against the four benchmarks; under 4 of 4
+VW HENDERSON: −$105K, −827 opcodes Jan-Sep against the four benchmarks; under 3 of 3
 CHEVY GMC BULLHEAD: −$100K, −1,100 opcodes Jan-Sep against the four benchmarks; under 4 of 4
 CADILLAC: −$94K, −954 opcodes Jan-Sep against the four benchmarks; under 4 of 4
 VW ST GEORGE: −$66K, −640 opcodes Jan-Sep against the four benchmarks; under 4 of 4
@@ -618,9 +618,9 @@
 LINCOLN: −$48K, −569 opcodes Jan-Sep against the four benchmarks; under 3 of 4
 SUBARU ST GEORGE: −$41K, −452 opcodes Jan-Sep against the four benchmarks; under 2 of 4
 LR RENO: −$32K, −83 opcodes Jan-Sep against the four benchmarks; under 3 of 4
-VOLVO: −$29K, −340 opcodes Jan-Sep against the four benchmarks; under 3 of 4
+VOLVO: −$29K, −340 opcodes Jan-Sep against the four benchmarks; under 2 of 3
 MAZDA: −$28K, −223 opcodes Jan-Sep against the four benchmarks; under 3 of 4
-AUDI HENDERSON: −$22K, −661 opcodes Jan-Sep against the four benchmarks; under 3 of 4
+AUDI HENDERSON: −$22K, −661 opcodes Jan-Sep against the four benchmarks; under 1 of 2
 HYUNDAI PRESCOTT: +$23K, +97 opcodes Jan-Sep against the four benchmarks; under 3 of 4
 ACURA: +$33K, +228 opcodes Jan-Sep against the four benchmarks; under 1 of 4
 SUBARU PRESCOTT: +$41K, +24 opcodes Jan-Sep against the four benchmarks; under 2 of 4
@@ -2564,7 +2564,7 @@
         </p:nvSpPr>
         <p:spPr>
           <a:xfrm>
-            <a:off x="3950208" y="1316736"/>
+            <a:off x="3172968" y="1316736"/>
             <a:ext cx="1097280" cy="329184"/>
           </a:xfrm>
           <a:prstGeom prst="rect">
@@ -2603,7 +2603,7 @@
         </p:nvSpPr>
         <p:spPr>
           <a:xfrm>
-            <a:off x="5047488" y="1316736"/>
+            <a:off x="4270248" y="1316736"/>
             <a:ext cx="868680" cy="329184"/>
           </a:xfrm>
           <a:prstGeom prst="rect">
@@ -2636,13 +2636,52 @@
       </p:sp>
       <p:sp>
         <p:nvSpPr>
-          <p:cNvPr id="8" name="Shape 6"/>
+          <p:cNvPr id="8" name="Text 6"/>
+          <p:cNvSpPr txBox="1"/>
+          <p:nvPr/>
+        </p:nvSpPr>
+        <p:spPr>
+          <a:xfrm>
+            <a:off x="5138928" y="1316736"/>
+            <a:ext cx="777240" cy="329184"/>
+          </a:xfrm>
+          <a:prstGeom prst="rect">
+            <a:avLst/>
+          </a:prstGeom>
+          <a:noFill/>
+          <a:ln/>
+        </p:spPr>
+        <p:txBody>
+          <a:bodyPr wrap="square" lIns="0" tIns="0" rIns="0" bIns="0" rtlCol="0" anchor="ctr"/>
+          <a:lstStyle/>
+          <a:p>
+            <a:pPr algn="r" indent="0" marL="0">
+              <a:buNone/>
+            </a:pPr>
+            <a:r>
+              <a:rPr lang="en-US" sz="1400" b="1" dirty="0">
+                <a:solidFill>
+                  <a:srgbClr val="595959"/>
+                </a:solidFill>
+                <a:latin typeface="Inter" pitchFamily="34" charset="0"/>
+                <a:ea typeface="Inter" pitchFamily="34" charset="-122"/>
+                <a:cs typeface="Inter" pitchFamily="34" charset="-120"/>
+              </a:rPr>
+              <a:t>Missed</a:t>
+            </a:r>
+            <a:endParaRPr lang="en-US" sz="1400" dirty="0"/>
+          </a:p>
+        </p:txBody>
+      </p:sp>
+      <p:sp>
+        <p:nvSpPr>
+          <p:cNvPr id="9" name="Shape 7"/>
           <p:cNvSpPr/>
           <p:nvPr/>
         </p:nvSpPr>
         <p:spPr>
           <a:xfrm>
-            <a:off x="3429510" y="1700784"/>
+            <a:off x="2969751" y="1700784"/>
             <a:ext cx="10973" cy="4224528"/>
           </a:xfrm>
           <a:prstGeom prst="rect">
@@ -2656,13 +2695,13 @@
       </p:sp>
       <p:sp>
         <p:nvSpPr>
-          <p:cNvPr id="9" name="Text 7"/>
-          <p:cNvSpPr txBox="1"/>
-          <p:nvPr/>
-        </p:nvSpPr>
-        <p:spPr>
-          <a:xfrm>
-            <a:off x="9500616" y="1316736"/>
+          <p:cNvPr id="10" name="Text 8"/>
+          <p:cNvSpPr txBox="1"/>
+          <p:nvPr/>
+        </p:nvSpPr>
+        <p:spPr>
+          <a:xfrm>
+            <a:off x="8723376" y="1316736"/>
             <a:ext cx="1097280" cy="329184"/>
           </a:xfrm>
           <a:prstGeom prst="rect">
@@ -2695,13 +2734,13 @@
       </p:sp>
       <p:sp>
         <p:nvSpPr>
-          <p:cNvPr id="10" name="Text 8"/>
-          <p:cNvSpPr txBox="1"/>
-          <p:nvPr/>
-        </p:nvSpPr>
-        <p:spPr>
-          <a:xfrm>
-            <a:off x="10597896" y="1316736"/>
+          <p:cNvPr id="11" name="Text 9"/>
+          <p:cNvSpPr txBox="1"/>
+          <p:nvPr/>
+        </p:nvSpPr>
+        <p:spPr>
+          <a:xfrm>
+            <a:off x="9820656" y="1316736"/>
             <a:ext cx="868680" cy="329184"/>
           </a:xfrm>
           <a:prstGeom prst="rect">
@@ -2734,13 +2773,52 @@
       </p:sp>
       <p:sp>
         <p:nvSpPr>
-          <p:cNvPr id="11" name="Shape 9"/>
+          <p:cNvPr id="12" name="Text 10"/>
+          <p:cNvSpPr txBox="1"/>
+          <p:nvPr/>
+        </p:nvSpPr>
+        <p:spPr>
+          <a:xfrm>
+            <a:off x="10689336" y="1316736"/>
+            <a:ext cx="777240" cy="329184"/>
+          </a:xfrm>
+          <a:prstGeom prst="rect">
+            <a:avLst/>
+          </a:prstGeom>
+          <a:noFill/>
+          <a:ln/>
+        </p:spPr>
+        <p:txBody>
+          <a:bodyPr wrap="square" lIns="0" tIns="0" rIns="0" bIns="0" rtlCol="0" anchor="ctr"/>
+          <a:lstStyle/>
+          <a:p>
+            <a:pPr algn="r" indent="0" marL="0">
+              <a:buNone/>
+            </a:pPr>
+            <a:r>
+              <a:rPr lang="en-US" sz="1400" b="1" dirty="0">
+                <a:solidFill>
+                  <a:srgbClr val="595959"/>
+                </a:solidFill>
+                <a:latin typeface="Inter" pitchFamily="34" charset="0"/>
+                <a:ea typeface="Inter" pitchFamily="34" charset="-122"/>
+                <a:cs typeface="Inter" pitchFamily="34" charset="-120"/>
+              </a:rPr>
+              <a:t>Missed</a:t>
+            </a:r>
+            <a:endParaRPr lang="en-US" sz="1400" dirty="0"/>
+          </a:p>
+        </p:txBody>
+      </p:sp>
+      <p:sp>
+        <p:nvSpPr>
+          <p:cNvPr id="13" name="Shape 11"/>
           <p:cNvSpPr/>
           <p:nvPr/>
         </p:nvSpPr>
         <p:spPr>
           <a:xfrm>
-            <a:off x="8979918" y="1700784"/>
+            <a:off x="8520159" y="1700784"/>
             <a:ext cx="10973" cy="3976026"/>
           </a:xfrm>
           <a:prstGeom prst="rect">
@@ -2754,7 +2832,7 @@
       </p:sp>
       <p:sp>
         <p:nvSpPr>
-          <p:cNvPr id="12" name="Text 10"/>
+          <p:cNvPr id="14" name="Text 12"/>
           <p:cNvSpPr txBox="1"/>
           <p:nvPr/>
         </p:nvSpPr>
@@ -2793,14 +2871,14 @@
       </p:sp>
       <p:sp>
         <p:nvSpPr>
-          <p:cNvPr id="13" name="Text 11"/>
+          <p:cNvPr id="15" name="Text 13"/>
           <p:cNvSpPr txBox="1"/>
           <p:nvPr/>
         </p:nvSpPr>
         <p:spPr>
           <a:xfrm>
             <a:off x="1014984" y="1700784"/>
-            <a:ext cx="2011680" cy="248502"/>
+            <a:ext cx="1783080" cy="248502"/>
           </a:xfrm>
           <a:prstGeom prst="rect">
             <a:avLst/>
@@ -2816,7 +2894,7 @@
               <a:buNone/>
             </a:pPr>
             <a:r>
-              <a:rPr lang="en-US" sz="1300" dirty="0">
+              <a:rPr lang="en-US" sz="1200" dirty="0">
                 <a:solidFill>
                   <a:srgbClr val="1A1A1A"/>
                 </a:solidFill>
@@ -2826,20 +2904,20 @@
               </a:rPr>
               <a:t>HONDA HENDERSON</a:t>
             </a:r>
-            <a:endParaRPr lang="en-US" sz="1300" dirty="0"/>
-          </a:p>
-        </p:txBody>
-      </p:sp>
-      <p:sp>
-        <p:nvSpPr>
-          <p:cNvPr id="14" name="Shape 12"/>
+            <a:endParaRPr lang="en-US" sz="1200" dirty="0"/>
+          </a:p>
+        </p:txBody>
+      </p:sp>
+      <p:sp>
+        <p:nvSpPr>
+          <p:cNvPr id="16" name="Shape 14"/>
           <p:cNvSpPr/>
           <p:nvPr/>
         </p:nvSpPr>
         <p:spPr>
           <a:xfrm>
-            <a:off x="3434996" y="1756697"/>
-            <a:ext cx="460348" cy="136676"/>
+            <a:off x="2975237" y="1756697"/>
+            <a:ext cx="142867" cy="136676"/>
           </a:xfrm>
           <a:prstGeom prst="rect">
             <a:avLst/>
@@ -2852,13 +2930,13 @@
       </p:sp>
       <p:sp>
         <p:nvSpPr>
-          <p:cNvPr id="15" name="Text 13"/>
-          <p:cNvSpPr txBox="1"/>
-          <p:nvPr/>
-        </p:nvSpPr>
-        <p:spPr>
-          <a:xfrm>
-            <a:off x="3950208" y="1700784"/>
+          <p:cNvPr id="17" name="Text 15"/>
+          <p:cNvSpPr txBox="1"/>
+          <p:nvPr/>
+        </p:nvSpPr>
+        <p:spPr>
+          <a:xfrm>
+            <a:off x="3172968" y="1700784"/>
             <a:ext cx="1097280" cy="248502"/>
           </a:xfrm>
           <a:prstGeom prst="rect">
@@ -2891,13 +2969,13 @@
       </p:sp>
       <p:sp>
         <p:nvSpPr>
-          <p:cNvPr id="16" name="Text 14"/>
-          <p:cNvSpPr txBox="1"/>
-          <p:nvPr/>
-        </p:nvSpPr>
-        <p:spPr>
-          <a:xfrm>
-            <a:off x="5047488" y="1700784"/>
+          <p:cNvPr id="18" name="Text 16"/>
+          <p:cNvSpPr txBox="1"/>
+          <p:nvPr/>
+        </p:nvSpPr>
+        <p:spPr>
+          <a:xfrm>
+            <a:off x="4270248" y="1700784"/>
             <a:ext cx="868680" cy="248502"/>
           </a:xfrm>
           <a:prstGeom prst="rect">
@@ -2930,13 +3008,13 @@
       </p:sp>
       <p:sp>
         <p:nvSpPr>
-          <p:cNvPr id="17" name="Shape 15"/>
+          <p:cNvPr id="19" name="Shape 17"/>
           <p:cNvSpPr/>
           <p:nvPr/>
         </p:nvSpPr>
         <p:spPr>
           <a:xfrm>
-            <a:off x="5971032" y="1746504"/>
+            <a:off x="5193792" y="1746504"/>
             <a:ext cx="54864" cy="157062"/>
           </a:xfrm>
           <a:prstGeom prst="rect">
@@ -2950,7 +3028,46 @@
       </p:sp>
       <p:sp>
         <p:nvSpPr>
-          <p:cNvPr id="18" name="Text 16"/>
+          <p:cNvPr id="20" name="Text 18"/>
+          <p:cNvSpPr txBox="1"/>
+          <p:nvPr/>
+        </p:nvSpPr>
+        <p:spPr>
+          <a:xfrm>
+            <a:off x="5138928" y="1700784"/>
+            <a:ext cx="777240" cy="248502"/>
+          </a:xfrm>
+          <a:prstGeom prst="rect">
+            <a:avLst/>
+          </a:prstGeom>
+          <a:noFill/>
+          <a:ln/>
+        </p:spPr>
+        <p:txBody>
+          <a:bodyPr wrap="square" lIns="0" tIns="0" rIns="0" bIns="0" rtlCol="0" anchor="ctr"/>
+          <a:lstStyle/>
+          <a:p>
+            <a:pPr algn="r" indent="0" marL="0">
+              <a:buNone/>
+            </a:pPr>
+            <a:r>
+              <a:rPr lang="en-US" sz="1300" dirty="0">
+                <a:solidFill>
+                  <a:srgbClr val="595959"/>
+                </a:solidFill>
+                <a:latin typeface="Inter" pitchFamily="34" charset="0"/>
+                <a:ea typeface="Inter" pitchFamily="34" charset="-122"/>
+                <a:cs typeface="Inter" pitchFamily="34" charset="-120"/>
+              </a:rPr>
+              <a:t>0 of 4</a:t>
+            </a:r>
+            <a:endParaRPr lang="en-US" sz="1300" dirty="0"/>
+          </a:p>
+        </p:txBody>
+      </p:sp>
+      <p:sp>
+        <p:nvSpPr>
+          <p:cNvPr id="21" name="Text 19"/>
           <p:cNvSpPr txBox="1"/>
           <p:nvPr/>
         </p:nvSpPr>
@@ -2989,14 +3106,14 @@
       </p:sp>
       <p:sp>
         <p:nvSpPr>
-          <p:cNvPr id="19" name="Text 17"/>
+          <p:cNvPr id="22" name="Text 20"/>
           <p:cNvSpPr txBox="1"/>
           <p:nvPr/>
         </p:nvSpPr>
         <p:spPr>
           <a:xfrm>
             <a:off x="1014984" y="1949286"/>
-            <a:ext cx="2011680" cy="248502"/>
+            <a:ext cx="1783080" cy="248502"/>
           </a:xfrm>
           <a:prstGeom prst="rect">
             <a:avLst/>
@@ -3012,7 +3129,7 @@
               <a:buNone/>
             </a:pPr>
             <a:r>
-              <a:rPr lang="en-US" sz="1300" dirty="0">
+              <a:rPr lang="en-US" sz="1200" dirty="0">
                 <a:solidFill>
                   <a:srgbClr val="1A1A1A"/>
                 </a:solidFill>
@@ -3022,20 +3139,20 @@
               </a:rPr>
               <a:t>LR LV</a:t>
             </a:r>
-            <a:endParaRPr lang="en-US" sz="1300" dirty="0"/>
-          </a:p>
-        </p:txBody>
-      </p:sp>
-      <p:sp>
-        <p:nvSpPr>
-          <p:cNvPr id="20" name="Shape 18"/>
+            <a:endParaRPr lang="en-US" sz="1200" dirty="0"/>
+          </a:p>
+        </p:txBody>
+      </p:sp>
+      <p:sp>
+        <p:nvSpPr>
+          <p:cNvPr id="23" name="Shape 21"/>
           <p:cNvSpPr/>
           <p:nvPr/>
         </p:nvSpPr>
         <p:spPr>
           <a:xfrm>
-            <a:off x="3434996" y="2005199"/>
-            <a:ext cx="124432" cy="136676"/>
+            <a:off x="2975237" y="2005199"/>
+            <a:ext cx="38617" cy="136676"/>
           </a:xfrm>
           <a:prstGeom prst="rect">
             <a:avLst/>
@@ -3048,13 +3165,13 @@
       </p:sp>
       <p:sp>
         <p:nvSpPr>
-          <p:cNvPr id="21" name="Text 19"/>
-          <p:cNvSpPr txBox="1"/>
-          <p:nvPr/>
-        </p:nvSpPr>
-        <p:spPr>
-          <a:xfrm>
-            <a:off x="3950208" y="1949286"/>
+          <p:cNvPr id="24" name="Text 22"/>
+          <p:cNvSpPr txBox="1"/>
+          <p:nvPr/>
+        </p:nvSpPr>
+        <p:spPr>
+          <a:xfrm>
+            <a:off x="3172968" y="1949286"/>
             <a:ext cx="1097280" cy="248502"/>
           </a:xfrm>
           <a:prstGeom prst="rect">
@@ -3087,13 +3204,13 @@
       </p:sp>
       <p:sp>
         <p:nvSpPr>
-          <p:cNvPr id="22" name="Text 20"/>
-          <p:cNvSpPr txBox="1"/>
-          <p:nvPr/>
-        </p:nvSpPr>
-        <p:spPr>
-          <a:xfrm>
-            <a:off x="5047488" y="1949286"/>
+          <p:cNvPr id="25" name="Text 23"/>
+          <p:cNvSpPr txBox="1"/>
+          <p:nvPr/>
+        </p:nvSpPr>
+        <p:spPr>
+          <a:xfrm>
+            <a:off x="4270248" y="1949286"/>
             <a:ext cx="868680" cy="248502"/>
           </a:xfrm>
           <a:prstGeom prst="rect">
@@ -3126,13 +3243,13 @@
       </p:sp>
       <p:sp>
         <p:nvSpPr>
-          <p:cNvPr id="23" name="Shape 21"/>
+          <p:cNvPr id="26" name="Shape 24"/>
           <p:cNvSpPr/>
           <p:nvPr/>
         </p:nvSpPr>
         <p:spPr>
           <a:xfrm>
-            <a:off x="5971032" y="1995006"/>
+            <a:off x="5193792" y="1995006"/>
             <a:ext cx="54864" cy="157062"/>
           </a:xfrm>
           <a:prstGeom prst="rect">
@@ -3146,7 +3263,46 @@
       </p:sp>
       <p:sp>
         <p:nvSpPr>
-          <p:cNvPr id="24" name="Text 22"/>
+          <p:cNvPr id="27" name="Text 25"/>
+          <p:cNvSpPr txBox="1"/>
+          <p:nvPr/>
+        </p:nvSpPr>
+        <p:spPr>
+          <a:xfrm>
+            <a:off x="5138928" y="1949286"/>
+            <a:ext cx="777240" cy="248502"/>
+          </a:xfrm>
+          <a:prstGeom prst="rect">
+            <a:avLst/>
+          </a:prstGeom>
+          <a:noFill/>
+          <a:ln/>
+        </p:spPr>
+        <p:txBody>
+          <a:bodyPr wrap="square" lIns="0" tIns="0" rIns="0" bIns="0" rtlCol="0" anchor="ctr"/>
+          <a:lstStyle/>
+          <a:p>
+            <a:pPr algn="r" indent="0" marL="0">
+              <a:buNone/>
+            </a:pPr>
+            <a:r>
+              <a:rPr lang="en-US" sz="1300" dirty="0">
+                <a:solidFill>
+                  <a:srgbClr val="595959"/>
+                </a:solidFill>
+                <a:latin typeface="Inter" pitchFamily="34" charset="0"/>
+                <a:ea typeface="Inter" pitchFamily="34" charset="-122"/>
+                <a:cs typeface="Inter" pitchFamily="34" charset="-120"/>
+              </a:rPr>
+              <a:t>1 of 4</a:t>
+            </a:r>
+            <a:endParaRPr lang="en-US" sz="1300" dirty="0"/>
+          </a:p>
+        </p:txBody>
+      </p:sp>
+      <p:sp>
+        <p:nvSpPr>
+          <p:cNvPr id="28" name="Text 26"/>
           <p:cNvSpPr txBox="1"/>
           <p:nvPr/>
         </p:nvSpPr>
@@ -3185,14 +3341,14 @@
       </p:sp>
       <p:sp>
         <p:nvSpPr>
-          <p:cNvPr id="25" name="Text 23"/>
+          <p:cNvPr id="29" name="Text 27"/>
           <p:cNvSpPr txBox="1"/>
           <p:nvPr/>
         </p:nvSpPr>
         <p:spPr>
           <a:xfrm>
             <a:off x="1014984" y="2197787"/>
-            <a:ext cx="2011680" cy="248502"/>
+            <a:ext cx="1783080" cy="248502"/>
           </a:xfrm>
           <a:prstGeom prst="rect">
             <a:avLst/>
@@ -3208,7 +3364,7 @@
               <a:buNone/>
             </a:pPr>
             <a:r>
-              <a:rPr lang="en-US" sz="1300" dirty="0">
+              <a:rPr lang="en-US" sz="1200" dirty="0">
                 <a:solidFill>
                   <a:srgbClr val="1A1A1A"/>
                 </a:solidFill>
@@ -3218,20 +3374,20 @@
               </a:rPr>
               <a:t>LR HENDERSON</a:t>
             </a:r>
-            <a:endParaRPr lang="en-US" sz="1300" dirty="0"/>
-          </a:p>
-        </p:txBody>
-      </p:sp>
-      <p:sp>
-        <p:nvSpPr>
-          <p:cNvPr id="26" name="Shape 24"/>
+            <a:endParaRPr lang="en-US" sz="1200" dirty="0"/>
+          </a:p>
+        </p:txBody>
+      </p:sp>
+      <p:sp>
+        <p:nvSpPr>
+          <p:cNvPr id="30" name="Shape 28"/>
           <p:cNvSpPr/>
           <p:nvPr/>
         </p:nvSpPr>
         <p:spPr>
           <a:xfrm>
-            <a:off x="3434996" y="2253700"/>
-            <a:ext cx="44339" cy="136676"/>
+            <a:off x="2975237" y="2253700"/>
+            <a:ext cx="18288" cy="136676"/>
           </a:xfrm>
           <a:prstGeom prst="rect">
             <a:avLst/>
@@ -3244,13 +3400,13 @@
       </p:sp>
       <p:sp>
         <p:nvSpPr>
-          <p:cNvPr id="27" name="Text 25"/>
-          <p:cNvSpPr txBox="1"/>
-          <p:nvPr/>
-        </p:nvSpPr>
-        <p:spPr>
-          <a:xfrm>
-            <a:off x="3950208" y="2197787"/>
+          <p:cNvPr id="31" name="Text 29"/>
+          <p:cNvSpPr txBox="1"/>
+          <p:nvPr/>
+        </p:nvSpPr>
+        <p:spPr>
+          <a:xfrm>
+            <a:off x="3172968" y="2197787"/>
             <a:ext cx="1097280" cy="248502"/>
           </a:xfrm>
           <a:prstGeom prst="rect">
@@ -3283,13 +3439,13 @@
       </p:sp>
       <p:sp>
         <p:nvSpPr>
-          <p:cNvPr id="28" name="Text 26"/>
-          <p:cNvSpPr txBox="1"/>
-          <p:nvPr/>
-        </p:nvSpPr>
-        <p:spPr>
-          <a:xfrm>
-            <a:off x="5047488" y="2197787"/>
+          <p:cNvPr id="32" name="Text 30"/>
+          <p:cNvSpPr txBox="1"/>
+          <p:nvPr/>
+        </p:nvSpPr>
+        <p:spPr>
+          <a:xfrm>
+            <a:off x="4270248" y="2197787"/>
             <a:ext cx="868680" cy="248502"/>
           </a:xfrm>
           <a:prstGeom prst="rect">
@@ -3322,13 +3478,13 @@
       </p:sp>
       <p:sp>
         <p:nvSpPr>
-          <p:cNvPr id="29" name="Shape 27"/>
+          <p:cNvPr id="33" name="Shape 31"/>
           <p:cNvSpPr/>
           <p:nvPr/>
         </p:nvSpPr>
         <p:spPr>
           <a:xfrm>
-            <a:off x="5971032" y="2243507"/>
+            <a:off x="5193792" y="2243507"/>
             <a:ext cx="54864" cy="157062"/>
           </a:xfrm>
           <a:prstGeom prst="rect">
@@ -3342,7 +3498,46 @@
       </p:sp>
       <p:sp>
         <p:nvSpPr>
-          <p:cNvPr id="30" name="Text 28"/>
+          <p:cNvPr id="34" name="Text 32"/>
+          <p:cNvSpPr txBox="1"/>
+          <p:nvPr/>
+        </p:nvSpPr>
+        <p:spPr>
+          <a:xfrm>
+            <a:off x="5138928" y="2197787"/>
+            <a:ext cx="777240" cy="248502"/>
+          </a:xfrm>
+          <a:prstGeom prst="rect">
+            <a:avLst/>
+          </a:prstGeom>
+          <a:noFill/>
+          <a:ln/>
+        </p:spPr>
+        <p:txBody>
+          <a:bodyPr wrap="square" lIns="0" tIns="0" rIns="0" bIns="0" rtlCol="0" anchor="ctr"/>
+          <a:lstStyle/>
+          <a:p>
+            <a:pPr algn="r" indent="0" marL="0">
+              <a:buNone/>
+            </a:pPr>
+            <a:r>
+              <a:rPr lang="en-US" sz="1300" dirty="0">
+                <a:solidFill>
+                  <a:srgbClr val="595959"/>
+                </a:solidFill>
+                <a:latin typeface="Inter" pitchFamily="34" charset="0"/>
+                <a:ea typeface="Inter" pitchFamily="34" charset="-122"/>
+                <a:cs typeface="Inter" pitchFamily="34" charset="-120"/>
+              </a:rPr>
+              <a:t>1 of 4</a:t>
+            </a:r>
+            <a:endParaRPr lang="en-US" sz="1300" dirty="0"/>
+          </a:p>
+        </p:txBody>
+      </p:sp>
+      <p:sp>
+        <p:nvSpPr>
+          <p:cNvPr id="35" name="Text 33"/>
           <p:cNvSpPr txBox="1"/>
           <p:nvPr/>
         </p:nvSpPr>
@@ -3381,14 +3576,14 @@
       </p:sp>
       <p:sp>
         <p:nvSpPr>
-          <p:cNvPr id="31" name="Text 29"/>
+          <p:cNvPr id="36" name="Text 34"/>
           <p:cNvSpPr txBox="1"/>
           <p:nvPr/>
         </p:nvSpPr>
         <p:spPr>
           <a:xfrm>
             <a:off x="1014984" y="2446289"/>
-            <a:ext cx="2011680" cy="248502"/>
+            <a:ext cx="1783080" cy="248502"/>
           </a:xfrm>
           <a:prstGeom prst="rect">
             <a:avLst/>
@@ -3404,7 +3599,7 @@
               <a:buNone/>
             </a:pPr>
             <a:r>
-              <a:rPr lang="en-US" sz="1300" dirty="0">
+              <a:rPr lang="en-US" sz="1200" dirty="0">
                 <a:solidFill>
                   <a:srgbClr val="1A1A1A"/>
                 </a:solidFill>
@@ -3414,20 +3609,20 @@
               </a:rPr>
               <a:t>HONDA NORTH</a:t>
             </a:r>
-            <a:endParaRPr lang="en-US" sz="1300" dirty="0"/>
-          </a:p>
-        </p:txBody>
-      </p:sp>
-      <p:sp>
-        <p:nvSpPr>
-          <p:cNvPr id="32" name="Shape 30"/>
+            <a:endParaRPr lang="en-US" sz="1200" dirty="0"/>
+          </a:p>
+        </p:txBody>
+      </p:sp>
+      <p:sp>
+        <p:nvSpPr>
+          <p:cNvPr id="37" name="Shape 35"/>
           <p:cNvSpPr/>
           <p:nvPr/>
         </p:nvSpPr>
         <p:spPr>
           <a:xfrm>
-            <a:off x="3434996" y="2502202"/>
-            <a:ext cx="37145" cy="136676"/>
+            <a:off x="2975237" y="2502202"/>
+            <a:ext cx="18288" cy="136676"/>
           </a:xfrm>
           <a:prstGeom prst="rect">
             <a:avLst/>
@@ -3440,13 +3635,13 @@
       </p:sp>
       <p:sp>
         <p:nvSpPr>
-          <p:cNvPr id="33" name="Text 31"/>
-          <p:cNvSpPr txBox="1"/>
-          <p:nvPr/>
-        </p:nvSpPr>
-        <p:spPr>
-          <a:xfrm>
-            <a:off x="3950208" y="2446289"/>
+          <p:cNvPr id="38" name="Text 36"/>
+          <p:cNvSpPr txBox="1"/>
+          <p:nvPr/>
+        </p:nvSpPr>
+        <p:spPr>
+          <a:xfrm>
+            <a:off x="3172968" y="2446289"/>
             <a:ext cx="1097280" cy="248502"/>
           </a:xfrm>
           <a:prstGeom prst="rect">
@@ -3479,13 +3674,13 @@
       </p:sp>
       <p:sp>
         <p:nvSpPr>
-          <p:cNvPr id="34" name="Text 32"/>
-          <p:cNvSpPr txBox="1"/>
-          <p:nvPr/>
-        </p:nvSpPr>
-        <p:spPr>
-          <a:xfrm>
-            <a:off x="5047488" y="2446289"/>
+          <p:cNvPr id="39" name="Text 37"/>
+          <p:cNvSpPr txBox="1"/>
+          <p:nvPr/>
+        </p:nvSpPr>
+        <p:spPr>
+          <a:xfrm>
+            <a:off x="4270248" y="2446289"/>
             <a:ext cx="868680" cy="248502"/>
           </a:xfrm>
           <a:prstGeom prst="rect">
@@ -3518,7 +3713,46 @@
       </p:sp>
       <p:sp>
         <p:nvSpPr>
-          <p:cNvPr id="35" name="Text 33"/>
+          <p:cNvPr id="40" name="Text 38"/>
+          <p:cNvSpPr txBox="1"/>
+          <p:nvPr/>
+        </p:nvSpPr>
+        <p:spPr>
+          <a:xfrm>
+            <a:off x="5138928" y="2446289"/>
+            <a:ext cx="777240" cy="248502"/>
+          </a:xfrm>
+          <a:prstGeom prst="rect">
+            <a:avLst/>
+          </a:prstGeom>
+          <a:noFill/>
+          <a:ln/>
+        </p:spPr>
+        <p:txBody>
+          <a:bodyPr wrap="square" lIns="0" tIns="0" rIns="0" bIns="0" rtlCol="0" anchor="ctr"/>
+          <a:lstStyle/>
+          <a:p>
+            <a:pPr algn="r" indent="0" marL="0">
+              <a:buNone/>
+            </a:pPr>
+            <a:r>
+              <a:rPr lang="en-US" sz="1300" dirty="0">
+                <a:solidFill>
+                  <a:srgbClr val="595959"/>
+                </a:solidFill>
+                <a:latin typeface="Inter" pitchFamily="34" charset="0"/>
+                <a:ea typeface="Inter" pitchFamily="34" charset="-122"/>
+                <a:cs typeface="Inter" pitchFamily="34" charset="-120"/>
+              </a:rPr>
+              <a:t>1 of 4</a:t>
+            </a:r>
+            <a:endParaRPr lang="en-US" sz="1300" dirty="0"/>
+          </a:p>
+        </p:txBody>
+      </p:sp>
+      <p:sp>
+        <p:nvSpPr>
+          <p:cNvPr id="41" name="Text 39"/>
           <p:cNvSpPr txBox="1"/>
           <p:nvPr/>
         </p:nvSpPr>
@@ -3557,14 +3791,14 @@
       </p:sp>
       <p:sp>
         <p:nvSpPr>
-          <p:cNvPr id="36" name="Text 34"/>
+          <p:cNvPr id="42" name="Text 40"/>
           <p:cNvSpPr txBox="1"/>
           <p:nvPr/>
         </p:nvSpPr>
         <p:spPr>
           <a:xfrm>
             <a:off x="1014984" y="2694791"/>
-            <a:ext cx="2011680" cy="248502"/>
+            <a:ext cx="1783080" cy="248502"/>
           </a:xfrm>
           <a:prstGeom prst="rect">
             <a:avLst/>
@@ -3580,7 +3814,7 @@
               <a:buNone/>
             </a:pPr>
             <a:r>
-              <a:rPr lang="en-US" sz="1300" dirty="0">
+              <a:rPr lang="en-US" sz="1200" dirty="0">
                 <a:solidFill>
                   <a:srgbClr val="1A1A1A"/>
                 </a:solidFill>
@@ -3590,20 +3824,20 @@
               </a:rPr>
               <a:t>SUBARU PRESCOTT</a:t>
             </a:r>
-            <a:endParaRPr lang="en-US" sz="1300" dirty="0"/>
-          </a:p>
-        </p:txBody>
-      </p:sp>
-      <p:sp>
-        <p:nvSpPr>
-          <p:cNvPr id="37" name="Shape 35"/>
+            <a:endParaRPr lang="en-US" sz="1200" dirty="0"/>
+          </a:p>
+        </p:txBody>
+      </p:sp>
+      <p:sp>
+        <p:nvSpPr>
+          <p:cNvPr id="43" name="Shape 41"/>
           <p:cNvSpPr/>
           <p:nvPr/>
         </p:nvSpPr>
         <p:spPr>
           <a:xfrm>
-            <a:off x="3434996" y="2750703"/>
-            <a:ext cx="34144" cy="136676"/>
+            <a:off x="2975237" y="2750703"/>
+            <a:ext cx="18288" cy="136676"/>
           </a:xfrm>
           <a:prstGeom prst="rect">
             <a:avLst/>
@@ -3616,13 +3850,13 @@
       </p:sp>
       <p:sp>
         <p:nvSpPr>
-          <p:cNvPr id="38" name="Text 36"/>
-          <p:cNvSpPr txBox="1"/>
-          <p:nvPr/>
-        </p:nvSpPr>
-        <p:spPr>
-          <a:xfrm>
-            <a:off x="3950208" y="2694791"/>
+          <p:cNvPr id="44" name="Text 42"/>
+          <p:cNvSpPr txBox="1"/>
+          <p:nvPr/>
+        </p:nvSpPr>
+        <p:spPr>
+          <a:xfrm>
+            <a:off x="3172968" y="2694791"/>
             <a:ext cx="1097280" cy="248502"/>
           </a:xfrm>
           <a:prstGeom prst="rect">
@@ -3655,13 +3889,13 @@
       </p:sp>
       <p:sp>
         <p:nvSpPr>
-          <p:cNvPr id="39" name="Text 37"/>
-          <p:cNvSpPr txBox="1"/>
-          <p:nvPr/>
-        </p:nvSpPr>
-        <p:spPr>
-          <a:xfrm>
-            <a:off x="5047488" y="2694791"/>
+          <p:cNvPr id="45" name="Text 43"/>
+          <p:cNvSpPr txBox="1"/>
+          <p:nvPr/>
+        </p:nvSpPr>
+        <p:spPr>
+          <a:xfrm>
+            <a:off x="4270248" y="2694791"/>
             <a:ext cx="868680" cy="248502"/>
           </a:xfrm>
           <a:prstGeom prst="rect">
@@ -3694,7 +3928,46 @@
       </p:sp>
       <p:sp>
         <p:nvSpPr>
-          <p:cNvPr id="40" name="Text 38"/>
+          <p:cNvPr id="46" name="Text 44"/>
+          <p:cNvSpPr txBox="1"/>
+          <p:nvPr/>
+        </p:nvSpPr>
+        <p:spPr>
+          <a:xfrm>
+            <a:off x="5138928" y="2694791"/>
+            <a:ext cx="777240" cy="248502"/>
+          </a:xfrm>
+          <a:prstGeom prst="rect">
+            <a:avLst/>
+          </a:prstGeom>
+          <a:noFill/>
+          <a:ln/>
+        </p:spPr>
+        <p:txBody>
+          <a:bodyPr wrap="square" lIns="0" tIns="0" rIns="0" bIns="0" rtlCol="0" anchor="ctr"/>
+          <a:lstStyle/>
+          <a:p>
+            <a:pPr algn="r" indent="0" marL="0">
+              <a:buNone/>
+            </a:pPr>
+            <a:r>
+              <a:rPr lang="en-US" sz="1300" dirty="0">
+                <a:solidFill>
+                  <a:srgbClr val="595959"/>
+                </a:solidFill>
+                <a:latin typeface="Inter" pitchFamily="34" charset="0"/>
+                <a:ea typeface="Inter" pitchFamily="34" charset="-122"/>
+                <a:cs typeface="Inter" pitchFamily="34" charset="-120"/>
+              </a:rPr>
+              <a:t>2 of 4</a:t>
+            </a:r>
+            <a:endParaRPr lang="en-US" sz="1300" dirty="0"/>
+          </a:p>
+        </p:txBody>
+      </p:sp>
+      <p:sp>
+        <p:nvSpPr>
+          <p:cNvPr id="47" name="Text 45"/>
           <p:cNvSpPr txBox="1"/>
           <p:nvPr/>
         </p:nvSpPr>
@@ -3733,14 +4006,14 @@
       </p:sp>
       <p:sp>
         <p:nvSpPr>
-          <p:cNvPr id="41" name="Text 39"/>
+          <p:cNvPr id="48" name="Text 46"/>
           <p:cNvSpPr txBox="1"/>
           <p:nvPr/>
         </p:nvSpPr>
         <p:spPr>
           <a:xfrm>
             <a:off x="1014984" y="2943292"/>
-            <a:ext cx="2011680" cy="248502"/>
+            <a:ext cx="1783080" cy="248502"/>
           </a:xfrm>
           <a:prstGeom prst="rect">
             <a:avLst/>
@@ -3756,7 +4029,7 @@
               <a:buNone/>
             </a:pPr>
             <a:r>
-              <a:rPr lang="en-US" sz="1300" dirty="0">
+              <a:rPr lang="en-US" sz="1200" dirty="0">
                 <a:solidFill>
                   <a:srgbClr val="1A1A1A"/>
                 </a:solidFill>
@@ -3766,20 +4039,20 @@
               </a:rPr>
               <a:t>ACURA</a:t>
             </a:r>
-            <a:endParaRPr lang="en-US" sz="1300" dirty="0"/>
-          </a:p>
-        </p:txBody>
-      </p:sp>
-      <p:sp>
-        <p:nvSpPr>
-          <p:cNvPr id="42" name="Shape 40"/>
+            <a:endParaRPr lang="en-US" sz="1200" dirty="0"/>
+          </a:p>
+        </p:txBody>
+      </p:sp>
+      <p:sp>
+        <p:nvSpPr>
+          <p:cNvPr id="49" name="Shape 47"/>
           <p:cNvSpPr/>
           <p:nvPr/>
         </p:nvSpPr>
         <p:spPr>
           <a:xfrm>
-            <a:off x="3434996" y="2999205"/>
-            <a:ext cx="27581" cy="136676"/>
+            <a:off x="2975237" y="2999205"/>
+            <a:ext cx="18288" cy="136676"/>
           </a:xfrm>
           <a:prstGeom prst="rect">
             <a:avLst/>
@@ -3792,13 +4065,13 @@
       </p:sp>
       <p:sp>
         <p:nvSpPr>
-          <p:cNvPr id="43" name="Text 41"/>
-          <p:cNvSpPr txBox="1"/>
-          <p:nvPr/>
-        </p:nvSpPr>
-        <p:spPr>
-          <a:xfrm>
-            <a:off x="3950208" y="2943292"/>
+          <p:cNvPr id="50" name="Text 48"/>
+          <p:cNvSpPr txBox="1"/>
+          <p:nvPr/>
+        </p:nvSpPr>
+        <p:spPr>
+          <a:xfrm>
+            <a:off x="3172968" y="2943292"/>
             <a:ext cx="1097280" cy="248502"/>
           </a:xfrm>
           <a:prstGeom prst="rect">
@@ -3831,13 +4104,13 @@
       </p:sp>
       <p:sp>
         <p:nvSpPr>
-          <p:cNvPr id="44" name="Text 42"/>
-          <p:cNvSpPr txBox="1"/>
-          <p:nvPr/>
-        </p:nvSpPr>
-        <p:spPr>
-          <a:xfrm>
-            <a:off x="5047488" y="2943292"/>
+          <p:cNvPr id="51" name="Text 49"/>
+          <p:cNvSpPr txBox="1"/>
+          <p:nvPr/>
+        </p:nvSpPr>
+        <p:spPr>
+          <a:xfrm>
+            <a:off x="4270248" y="2943292"/>
             <a:ext cx="868680" cy="248502"/>
           </a:xfrm>
           <a:prstGeom prst="rect">
@@ -3870,7 +4143,46 @@
       </p:sp>
       <p:sp>
         <p:nvSpPr>
-          <p:cNvPr id="45" name="Text 43"/>
+          <p:cNvPr id="52" name="Text 50"/>
+          <p:cNvSpPr txBox="1"/>
+          <p:nvPr/>
+        </p:nvSpPr>
+        <p:spPr>
+          <a:xfrm>
+            <a:off x="5138928" y="2943292"/>
+            <a:ext cx="777240" cy="248502"/>
+          </a:xfrm>
+          <a:prstGeom prst="rect">
+            <a:avLst/>
+          </a:prstGeom>
+          <a:noFill/>
+          <a:ln/>
+        </p:spPr>
+        <p:txBody>
+          <a:bodyPr wrap="square" lIns="0" tIns="0" rIns="0" bIns="0" rtlCol="0" anchor="ctr"/>
+          <a:lstStyle/>
+          <a:p>
+            <a:pPr algn="r" indent="0" marL="0">
+              <a:buNone/>
+            </a:pPr>
+            <a:r>
+              <a:rPr lang="en-US" sz="1300" dirty="0">
+                <a:solidFill>
+                  <a:srgbClr val="595959"/>
+                </a:solidFill>
+                <a:latin typeface="Inter" pitchFamily="34" charset="0"/>
+                <a:ea typeface="Inter" pitchFamily="34" charset="-122"/>
+                <a:cs typeface="Inter" pitchFamily="34" charset="-120"/>
+              </a:rPr>
+              <a:t>1 of 4</a:t>
+            </a:r>
+            <a:endParaRPr lang="en-US" sz="1300" dirty="0"/>
+          </a:p>
+        </p:txBody>
+      </p:sp>
+      <p:sp>
+        <p:nvSpPr>
+          <p:cNvPr id="53" name="Text 51"/>
           <p:cNvSpPr txBox="1"/>
           <p:nvPr/>
         </p:nvSpPr>
@@ -3909,14 +4221,14 @@
       </p:sp>
       <p:sp>
         <p:nvSpPr>
-          <p:cNvPr id="46" name="Text 44"/>
+          <p:cNvPr id="54" name="Text 52"/>
           <p:cNvSpPr txBox="1"/>
           <p:nvPr/>
         </p:nvSpPr>
         <p:spPr>
           <a:xfrm>
             <a:off x="1014984" y="3191794"/>
-            <a:ext cx="2011680" cy="248502"/>
+            <a:ext cx="1783080" cy="248502"/>
           </a:xfrm>
           <a:prstGeom prst="rect">
             <a:avLst/>
@@ -3932,7 +4244,7 @@
               <a:buNone/>
             </a:pPr>
             <a:r>
-              <a:rPr lang="en-US" sz="1300" dirty="0">
+              <a:rPr lang="en-US" sz="1200" dirty="0">
                 <a:solidFill>
                   <a:srgbClr val="1A1A1A"/>
                 </a:solidFill>
@@ -3942,20 +4254,20 @@
               </a:rPr>
               <a:t>HYUNDAI PRESCOTT</a:t>
             </a:r>
-            <a:endParaRPr lang="en-US" sz="1300" dirty="0"/>
-          </a:p>
-        </p:txBody>
-      </p:sp>
-      <p:sp>
-        <p:nvSpPr>
-          <p:cNvPr id="47" name="Shape 45"/>
+            <a:endParaRPr lang="en-US" sz="1200" dirty="0"/>
+          </a:p>
+        </p:txBody>
+      </p:sp>
+      <p:sp>
+        <p:nvSpPr>
+          <p:cNvPr id="55" name="Shape 53"/>
           <p:cNvSpPr/>
           <p:nvPr/>
         </p:nvSpPr>
         <p:spPr>
           <a:xfrm>
-            <a:off x="3434996" y="3247707"/>
-            <a:ext cx="19282" cy="136676"/>
+            <a:off x="2975237" y="3247707"/>
+            <a:ext cx="18288" cy="136676"/>
           </a:xfrm>
           <a:prstGeom prst="rect">
             <a:avLst/>
@@ -3968,13 +4280,13 @@
       </p:sp>
       <p:sp>
         <p:nvSpPr>
-          <p:cNvPr id="48" name="Text 46"/>
-          <p:cNvSpPr txBox="1"/>
-          <p:nvPr/>
-        </p:nvSpPr>
-        <p:spPr>
-          <a:xfrm>
-            <a:off x="3950208" y="3191794"/>
+          <p:cNvPr id="56" name="Text 54"/>
+          <p:cNvSpPr txBox="1"/>
+          <p:nvPr/>
+        </p:nvSpPr>
+        <p:spPr>
+          <a:xfrm>
+            <a:off x="3172968" y="3191794"/>
             <a:ext cx="1097280" cy="248502"/>
           </a:xfrm>
           <a:prstGeom prst="rect">
@@ -4007,13 +4319,13 @@
       </p:sp>
       <p:sp>
         <p:nvSpPr>
-          <p:cNvPr id="49" name="Text 47"/>
-          <p:cNvSpPr txBox="1"/>
-          <p:nvPr/>
-        </p:nvSpPr>
-        <p:spPr>
-          <a:xfrm>
-            <a:off x="5047488" y="3191794"/>
+          <p:cNvPr id="57" name="Text 55"/>
+          <p:cNvSpPr txBox="1"/>
+          <p:nvPr/>
+        </p:nvSpPr>
+        <p:spPr>
+          <a:xfrm>
+            <a:off x="4270248" y="3191794"/>
             <a:ext cx="868680" cy="248502"/>
           </a:xfrm>
           <a:prstGeom prst="rect">
@@ -4046,7 +4358,46 @@
       </p:sp>
       <p:sp>
         <p:nvSpPr>
-          <p:cNvPr id="50" name="Text 48"/>
+          <p:cNvPr id="58" name="Text 56"/>
+          <p:cNvSpPr txBox="1"/>
+          <p:nvPr/>
+        </p:nvSpPr>
+        <p:spPr>
+          <a:xfrm>
+            <a:off x="5138928" y="3191794"/>
+            <a:ext cx="777240" cy="248502"/>
+          </a:xfrm>
+          <a:prstGeom prst="rect">
+            <a:avLst/>
+          </a:prstGeom>
+          <a:noFill/>
+          <a:ln/>
+        </p:spPr>
+        <p:txBody>
+          <a:bodyPr wrap="square" lIns="0" tIns="0" rIns="0" bIns="0" rtlCol="0" anchor="ctr"/>
+          <a:lstStyle/>
+          <a:p>
+            <a:pPr algn="r" indent="0" marL="0">
+              <a:buNone/>
+            </a:pPr>
+            <a:r>
+              <a:rPr lang="en-US" sz="1300" dirty="0">
+                <a:solidFill>
+                  <a:srgbClr val="595959"/>
+                </a:solidFill>
+                <a:latin typeface="Inter" pitchFamily="34" charset="0"/>
+                <a:ea typeface="Inter" pitchFamily="34" charset="-122"/>
+                <a:cs typeface="Inter" pitchFamily="34" charset="-120"/>
+              </a:rPr>
+              <a:t>3 of 4</a:t>
+            </a:r>
+            <a:endParaRPr lang="en-US" sz="1300" dirty="0"/>
+          </a:p>
+        </p:txBody>
+      </p:sp>
+      <p:sp>
+        <p:nvSpPr>
+          <p:cNvPr id="59" name="Text 57"/>
           <p:cNvSpPr txBox="1"/>
           <p:nvPr/>
         </p:nvSpPr>
@@ -4085,14 +4436,14 @@
       </p:sp>
       <p:sp>
         <p:nvSpPr>
-          <p:cNvPr id="51" name="Text 49"/>
+          <p:cNvPr id="60" name="Text 58"/>
           <p:cNvSpPr txBox="1"/>
           <p:nvPr/>
         </p:nvSpPr>
         <p:spPr>
           <a:xfrm>
             <a:off x="1014984" y="3440296"/>
-            <a:ext cx="2011680" cy="248502"/>
+            <a:ext cx="1783080" cy="248502"/>
           </a:xfrm>
           <a:prstGeom prst="rect">
             <a:avLst/>
@@ -4108,7 +4459,7 @@
               <a:buNone/>
             </a:pPr>
             <a:r>
-              <a:rPr lang="en-US" sz="1300" dirty="0">
+              <a:rPr lang="en-US" sz="1200" dirty="0">
                 <a:solidFill>
                   <a:srgbClr val="1A1A1A"/>
                 </a:solidFill>
@@ -4118,20 +4469,20 @@
               </a:rPr>
               <a:t>AUDI HENDERSON</a:t>
             </a:r>
-            <a:endParaRPr lang="en-US" sz="1300" dirty="0"/>
-          </a:p>
-        </p:txBody>
-      </p:sp>
-      <p:sp>
-        <p:nvSpPr>
-          <p:cNvPr id="52" name="Shape 50"/>
+            <a:endParaRPr lang="en-US" sz="1200" dirty="0"/>
+          </a:p>
+        </p:txBody>
+      </p:sp>
+      <p:sp>
+        <p:nvSpPr>
+          <p:cNvPr id="61" name="Shape 59"/>
           <p:cNvSpPr/>
           <p:nvPr/>
         </p:nvSpPr>
         <p:spPr>
           <a:xfrm>
-            <a:off x="3416704" y="3496208"/>
-            <a:ext cx="18292" cy="136676"/>
+            <a:off x="2969561" y="3496208"/>
+            <a:ext cx="18288" cy="136676"/>
           </a:xfrm>
           <a:prstGeom prst="rect">
             <a:avLst/>
@@ -4144,13 +4495,13 @@
       </p:sp>
       <p:sp>
         <p:nvSpPr>
-          <p:cNvPr id="53" name="Text 51"/>
-          <p:cNvSpPr txBox="1"/>
-          <p:nvPr/>
-        </p:nvSpPr>
-        <p:spPr>
-          <a:xfrm>
-            <a:off x="3950208" y="3440296"/>
+          <p:cNvPr id="62" name="Text 60"/>
+          <p:cNvSpPr txBox="1"/>
+          <p:nvPr/>
+        </p:nvSpPr>
+        <p:spPr>
+          <a:xfrm>
+            <a:off x="3172968" y="3440296"/>
             <a:ext cx="1097280" cy="248502"/>
           </a:xfrm>
           <a:prstGeom prst="rect">
@@ -4183,13 +4534,13 @@
       </p:sp>
       <p:sp>
         <p:nvSpPr>
-          <p:cNvPr id="54" name="Text 52"/>
-          <p:cNvSpPr txBox="1"/>
-          <p:nvPr/>
-        </p:nvSpPr>
-        <p:spPr>
-          <a:xfrm>
-            <a:off x="5047488" y="3440296"/>
+          <p:cNvPr id="63" name="Text 61"/>
+          <p:cNvSpPr txBox="1"/>
+          <p:nvPr/>
+        </p:nvSpPr>
+        <p:spPr>
+          <a:xfrm>
+            <a:off x="4270248" y="3440296"/>
             <a:ext cx="868680" cy="248502"/>
           </a:xfrm>
           <a:prstGeom prst="rect">
@@ -4222,7 +4573,46 @@
       </p:sp>
       <p:sp>
         <p:nvSpPr>
-          <p:cNvPr id="55" name="Text 53"/>
+          <p:cNvPr id="64" name="Text 62"/>
+          <p:cNvSpPr txBox="1"/>
+          <p:nvPr/>
+        </p:nvSpPr>
+        <p:spPr>
+          <a:xfrm>
+            <a:off x="5138928" y="3440296"/>
+            <a:ext cx="777240" cy="248502"/>
+          </a:xfrm>
+          <a:prstGeom prst="rect">
+            <a:avLst/>
+          </a:prstGeom>
+          <a:noFill/>
+          <a:ln/>
+        </p:spPr>
+        <p:txBody>
+          <a:bodyPr wrap="square" lIns="0" tIns="0" rIns="0" bIns="0" rtlCol="0" anchor="ctr"/>
+          <a:lstStyle/>
+          <a:p>
+            <a:pPr algn="r" indent="0" marL="0">
+              <a:buNone/>
+            </a:pPr>
+            <a:r>
+              <a:rPr lang="en-US" sz="1300" dirty="0">
+                <a:solidFill>
+                  <a:srgbClr val="595959"/>
+                </a:solidFill>
+                <a:latin typeface="Inter" pitchFamily="34" charset="0"/>
+                <a:ea typeface="Inter" pitchFamily="34" charset="-122"/>
+                <a:cs typeface="Inter" pitchFamily="34" charset="-120"/>
+              </a:rPr>
+              <a:t>1 of 2</a:t>
+            </a:r>
+            <a:endParaRPr lang="en-US" sz="1300" dirty="0"/>
+          </a:p>
+        </p:txBody>
+      </p:sp>
+      <p:sp>
+        <p:nvSpPr>
+          <p:cNvPr id="65" name="Text 63"/>
           <p:cNvSpPr txBox="1"/>
           <p:nvPr/>
         </p:nvSpPr>
@@ -4261,14 +4651,14 @@
       </p:sp>
       <p:sp>
         <p:nvSpPr>
-          <p:cNvPr id="56" name="Text 54"/>
+          <p:cNvPr id="66" name="Text 64"/>
           <p:cNvSpPr txBox="1"/>
           <p:nvPr/>
         </p:nvSpPr>
         <p:spPr>
           <a:xfrm>
             <a:off x="1014984" y="3688797"/>
-            <a:ext cx="2011680" cy="248502"/>
+            <a:ext cx="1783080" cy="248502"/>
           </a:xfrm>
           <a:prstGeom prst="rect">
             <a:avLst/>
@@ -4284,7 +4674,7 @@
               <a:buNone/>
             </a:pPr>
             <a:r>
-              <a:rPr lang="en-US" sz="1300" dirty="0">
+              <a:rPr lang="en-US" sz="1200" dirty="0">
                 <a:solidFill>
                   <a:srgbClr val="1A1A1A"/>
                 </a:solidFill>
@@ -4294,20 +4684,20 @@
               </a:rPr>
               <a:t>MAZDA</a:t>
             </a:r>
-            <a:endParaRPr lang="en-US" sz="1300" dirty="0"/>
-          </a:p>
-        </p:txBody>
-      </p:sp>
-      <p:sp>
-        <p:nvSpPr>
-          <p:cNvPr id="57" name="Shape 55"/>
+            <a:endParaRPr lang="en-US" sz="1200" dirty="0"/>
+          </a:p>
+        </p:txBody>
+      </p:sp>
+      <p:sp>
+        <p:nvSpPr>
+          <p:cNvPr id="67" name="Shape 65"/>
           <p:cNvSpPr/>
           <p:nvPr/>
         </p:nvSpPr>
         <p:spPr>
           <a:xfrm>
-            <a:off x="3411703" y="3744710"/>
-            <a:ext cx="23293" cy="136676"/>
+            <a:off x="2968009" y="3744710"/>
+            <a:ext cx="18288" cy="136676"/>
           </a:xfrm>
           <a:prstGeom prst="rect">
             <a:avLst/>
@@ -4320,13 +4710,13 @@
       </p:sp>
       <p:sp>
         <p:nvSpPr>
-          <p:cNvPr id="58" name="Text 56"/>
-          <p:cNvSpPr txBox="1"/>
-          <p:nvPr/>
-        </p:nvSpPr>
-        <p:spPr>
-          <a:xfrm>
-            <a:off x="3950208" y="3688797"/>
+          <p:cNvPr id="68" name="Text 66"/>
+          <p:cNvSpPr txBox="1"/>
+          <p:nvPr/>
+        </p:nvSpPr>
+        <p:spPr>
+          <a:xfrm>
+            <a:off x="3172968" y="3688797"/>
             <a:ext cx="1097280" cy="248502"/>
           </a:xfrm>
           <a:prstGeom prst="rect">
@@ -4359,13 +4749,13 @@
       </p:sp>
       <p:sp>
         <p:nvSpPr>
-          <p:cNvPr id="59" name="Text 57"/>
-          <p:cNvSpPr txBox="1"/>
-          <p:nvPr/>
-        </p:nvSpPr>
-        <p:spPr>
-          <a:xfrm>
-            <a:off x="5047488" y="3688797"/>
+          <p:cNvPr id="69" name="Text 67"/>
+          <p:cNvSpPr txBox="1"/>
+          <p:nvPr/>
+        </p:nvSpPr>
+        <p:spPr>
+          <a:xfrm>
+            <a:off x="4270248" y="3688797"/>
             <a:ext cx="868680" cy="248502"/>
           </a:xfrm>
           <a:prstGeom prst="rect">
@@ -4398,7 +4788,46 @@
       </p:sp>
       <p:sp>
         <p:nvSpPr>
-          <p:cNvPr id="60" name="Text 58"/>
+          <p:cNvPr id="70" name="Text 68"/>
+          <p:cNvSpPr txBox="1"/>
+          <p:nvPr/>
+        </p:nvSpPr>
+        <p:spPr>
+          <a:xfrm>
+            <a:off x="5138928" y="3688797"/>
+            <a:ext cx="777240" cy="248502"/>
+          </a:xfrm>
+          <a:prstGeom prst="rect">
+            <a:avLst/>
+          </a:prstGeom>
+          <a:noFill/>
+          <a:ln/>
+        </p:spPr>
+        <p:txBody>
+          <a:bodyPr wrap="square" lIns="0" tIns="0" rIns="0" bIns="0" rtlCol="0" anchor="ctr"/>
+          <a:lstStyle/>
+          <a:p>
+            <a:pPr algn="r" indent="0" marL="0">
+              <a:buNone/>
+            </a:pPr>
+            <a:r>
+              <a:rPr lang="en-US" sz="1300" dirty="0">
+                <a:solidFill>
+                  <a:srgbClr val="595959"/>
+                </a:solidFill>
+                <a:latin typeface="Inter" pitchFamily="34" charset="0"/>
+                <a:ea typeface="Inter" pitchFamily="34" charset="-122"/>
+                <a:cs typeface="Inter" pitchFamily="34" charset="-120"/>
+              </a:rPr>
+              <a:t>3 of 4</a:t>
+            </a:r>
+            <a:endParaRPr lang="en-US" sz="1300" dirty="0"/>
+          </a:p>
+        </p:txBody>
+      </p:sp>
+      <p:sp>
+        <p:nvSpPr>
+          <p:cNvPr id="71" name="Text 69"/>
           <p:cNvSpPr txBox="1"/>
           <p:nvPr/>
         </p:nvSpPr>
@@ -4437,14 +4866,14 @@
       </p:sp>
       <p:sp>
         <p:nvSpPr>
-          <p:cNvPr id="61" name="Text 59"/>
+          <p:cNvPr id="72" name="Text 70"/>
           <p:cNvSpPr txBox="1"/>
           <p:nvPr/>
         </p:nvSpPr>
         <p:spPr>
           <a:xfrm>
             <a:off x="1014984" y="3937299"/>
-            <a:ext cx="2011680" cy="248502"/>
+            <a:ext cx="1783080" cy="248502"/>
           </a:xfrm>
           <a:prstGeom prst="rect">
             <a:avLst/>
@@ -4460,7 +4889,7 @@
               <a:buNone/>
             </a:pPr>
             <a:r>
-              <a:rPr lang="en-US" sz="1300" dirty="0">
+              <a:rPr lang="en-US" sz="1200" dirty="0">
                 <a:solidFill>
                   <a:srgbClr val="1A1A1A"/>
                 </a:solidFill>
@@ -4470,20 +4899,20 @@
               </a:rPr>
               <a:t>VOLVO</a:t>
             </a:r>
-            <a:endParaRPr lang="en-US" sz="1300" dirty="0"/>
-          </a:p>
-        </p:txBody>
-      </p:sp>
-      <p:sp>
-        <p:nvSpPr>
-          <p:cNvPr id="62" name="Shape 60"/>
+            <a:endParaRPr lang="en-US" sz="1200" dirty="0"/>
+          </a:p>
+        </p:txBody>
+      </p:sp>
+      <p:sp>
+        <p:nvSpPr>
+          <p:cNvPr id="73" name="Shape 71"/>
           <p:cNvSpPr/>
           <p:nvPr/>
         </p:nvSpPr>
         <p:spPr>
           <a:xfrm>
-            <a:off x="3411379" y="3993212"/>
-            <a:ext cx="23618" cy="136676"/>
+            <a:off x="2967908" y="3993212"/>
+            <a:ext cx="18288" cy="136676"/>
           </a:xfrm>
           <a:prstGeom prst="rect">
             <a:avLst/>
@@ -4496,13 +4925,13 @@
       </p:sp>
       <p:sp>
         <p:nvSpPr>
-          <p:cNvPr id="63" name="Text 61"/>
-          <p:cNvSpPr txBox="1"/>
-          <p:nvPr/>
-        </p:nvSpPr>
-        <p:spPr>
-          <a:xfrm>
-            <a:off x="3950208" y="3937299"/>
+          <p:cNvPr id="74" name="Text 72"/>
+          <p:cNvSpPr txBox="1"/>
+          <p:nvPr/>
+        </p:nvSpPr>
+        <p:spPr>
+          <a:xfrm>
+            <a:off x="3172968" y="3937299"/>
             <a:ext cx="1097280" cy="248502"/>
           </a:xfrm>
           <a:prstGeom prst="rect">
@@ -4535,13 +4964,13 @@
       </p:sp>
       <p:sp>
         <p:nvSpPr>
-          <p:cNvPr id="64" name="Text 62"/>
-          <p:cNvSpPr txBox="1"/>
-          <p:nvPr/>
-        </p:nvSpPr>
-        <p:spPr>
-          <a:xfrm>
-            <a:off x="5047488" y="3937299"/>
+          <p:cNvPr id="75" name="Text 73"/>
+          <p:cNvSpPr txBox="1"/>
+          <p:nvPr/>
+        </p:nvSpPr>
+        <p:spPr>
+          <a:xfrm>
+            <a:off x="4270248" y="3937299"/>
             <a:ext cx="868680" cy="248502"/>
           </a:xfrm>
           <a:prstGeom prst="rect">
@@ -4574,7 +5003,46 @@
       </p:sp>
       <p:sp>
         <p:nvSpPr>
-          <p:cNvPr id="65" name="Text 63"/>
+          <p:cNvPr id="76" name="Text 74"/>
+          <p:cNvSpPr txBox="1"/>
+          <p:nvPr/>
+        </p:nvSpPr>
+        <p:spPr>
+          <a:xfrm>
+            <a:off x="5138928" y="3937299"/>
+            <a:ext cx="777240" cy="248502"/>
+          </a:xfrm>
+          <a:prstGeom prst="rect">
+            <a:avLst/>
+          </a:prstGeom>
+          <a:noFill/>
+          <a:ln/>
+        </p:spPr>
+        <p:txBody>
+          <a:bodyPr wrap="square" lIns="0" tIns="0" rIns="0" bIns="0" rtlCol="0" anchor="ctr"/>
+          <a:lstStyle/>
+          <a:p>
+            <a:pPr algn="r" indent="0" marL="0">
+              <a:buNone/>
+            </a:pPr>
+            <a:r>
+              <a:rPr lang="en-US" sz="1300" dirty="0">
+                <a:solidFill>
+                  <a:srgbClr val="595959"/>
+                </a:solidFill>
+                <a:latin typeface="Inter" pitchFamily="34" charset="0"/>
+                <a:ea typeface="Inter" pitchFamily="34" charset="-122"/>
+                <a:cs typeface="Inter" pitchFamily="34" charset="-120"/>
+              </a:rPr>
+              <a:t>2 of 3</a:t>
+            </a:r>
+            <a:endParaRPr lang="en-US" sz="1300" dirty="0"/>
+          </a:p>
+        </p:txBody>
+      </p:sp>
+      <p:sp>
+        <p:nvSpPr>
+          <p:cNvPr id="77" name="Text 75"/>
           <p:cNvSpPr txBox="1"/>
           <p:nvPr/>
         </p:nvSpPr>
@@ -4613,14 +5081,14 @@
       </p:sp>
       <p:sp>
         <p:nvSpPr>
-          <p:cNvPr id="66" name="Text 64"/>
+          <p:cNvPr id="78" name="Text 76"/>
           <p:cNvSpPr txBox="1"/>
           <p:nvPr/>
         </p:nvSpPr>
         <p:spPr>
           <a:xfrm>
             <a:off x="1014984" y="4185800"/>
-            <a:ext cx="2011680" cy="248502"/>
+            <a:ext cx="1783080" cy="248502"/>
           </a:xfrm>
           <a:prstGeom prst="rect">
             <a:avLst/>
@@ -4636,7 +5104,7 @@
               <a:buNone/>
             </a:pPr>
             <a:r>
-              <a:rPr lang="en-US" sz="1300" dirty="0">
+              <a:rPr lang="en-US" sz="1200" dirty="0">
                 <a:solidFill>
                   <a:srgbClr val="1A1A1A"/>
                 </a:solidFill>
@@ -4646,20 +5114,20 @@
               </a:rPr>
               <a:t>LR RENO</a:t>
             </a:r>
-            <a:endParaRPr lang="en-US" sz="1300" dirty="0"/>
-          </a:p>
-        </p:txBody>
-      </p:sp>
-      <p:sp>
-        <p:nvSpPr>
-          <p:cNvPr id="67" name="Shape 65"/>
+            <a:endParaRPr lang="en-US" sz="1200" dirty="0"/>
+          </a:p>
+        </p:txBody>
+      </p:sp>
+      <p:sp>
+        <p:nvSpPr>
+          <p:cNvPr id="79" name="Shape 77"/>
           <p:cNvSpPr/>
           <p:nvPr/>
         </p:nvSpPr>
         <p:spPr>
           <a:xfrm>
-            <a:off x="3408491" y="4241713"/>
-            <a:ext cx="26505" cy="136676"/>
+            <a:off x="2967012" y="4241713"/>
+            <a:ext cx="18288" cy="136676"/>
           </a:xfrm>
           <a:prstGeom prst="rect">
             <a:avLst/>
@@ -4672,13 +5140,13 @@
       </p:sp>
       <p:sp>
         <p:nvSpPr>
-          <p:cNvPr id="68" name="Text 66"/>
-          <p:cNvSpPr txBox="1"/>
-          <p:nvPr/>
-        </p:nvSpPr>
-        <p:spPr>
-          <a:xfrm>
-            <a:off x="3950208" y="4185800"/>
+          <p:cNvPr id="80" name="Text 78"/>
+          <p:cNvSpPr txBox="1"/>
+          <p:nvPr/>
+        </p:nvSpPr>
+        <p:spPr>
+          <a:xfrm>
+            <a:off x="3172968" y="4185800"/>
             <a:ext cx="1097280" cy="248502"/>
           </a:xfrm>
           <a:prstGeom prst="rect">
@@ -4711,13 +5179,13 @@
       </p:sp>
       <p:sp>
         <p:nvSpPr>
-          <p:cNvPr id="69" name="Text 67"/>
-          <p:cNvSpPr txBox="1"/>
-          <p:nvPr/>
-        </p:nvSpPr>
-        <p:spPr>
-          <a:xfrm>
-            <a:off x="5047488" y="4185800"/>
+          <p:cNvPr id="81" name="Text 79"/>
+          <p:cNvSpPr txBox="1"/>
+          <p:nvPr/>
+        </p:nvSpPr>
+        <p:spPr>
+          <a:xfrm>
+            <a:off x="4270248" y="4185800"/>
             <a:ext cx="868680" cy="248502"/>
           </a:xfrm>
           <a:prstGeom prst="rect">
@@ -4750,7 +5218,46 @@
       </p:sp>
       <p:sp>
         <p:nvSpPr>
-          <p:cNvPr id="70" name="Text 68"/>
+          <p:cNvPr id="82" name="Text 80"/>
+          <p:cNvSpPr txBox="1"/>
+          <p:nvPr/>
+        </p:nvSpPr>
+        <p:spPr>
+          <a:xfrm>
+            <a:off x="5138928" y="4185800"/>
+            <a:ext cx="777240" cy="248502"/>
+          </a:xfrm>
+          <a:prstGeom prst="rect">
+            <a:avLst/>
+          </a:prstGeom>
+          <a:noFill/>
+          <a:ln/>
+        </p:spPr>
+        <p:txBody>
+          <a:bodyPr wrap="square" lIns="0" tIns="0" rIns="0" bIns="0" rtlCol="0" anchor="ctr"/>
+          <a:lstStyle/>
+          <a:p>
+            <a:pPr algn="r" indent="0" marL="0">
+              <a:buNone/>
+            </a:pPr>
+            <a:r>
+              <a:rPr lang="en-US" sz="1300" dirty="0">
+                <a:solidFill>
+                  <a:srgbClr val="595959"/>
+                </a:solidFill>
+                <a:latin typeface="Inter" pitchFamily="34" charset="0"/>
+                <a:ea typeface="Inter" pitchFamily="34" charset="-122"/>
+                <a:cs typeface="Inter" pitchFamily="34" charset="-120"/>
+              </a:rPr>
+              <a:t>3 of 4</a:t>
+            </a:r>
+            <a:endParaRPr lang="en-US" sz="1300" dirty="0"/>
+          </a:p>
+        </p:txBody>
+      </p:sp>
+      <p:sp>
+        <p:nvSpPr>
+          <p:cNvPr id="83" name="Text 81"/>
           <p:cNvSpPr txBox="1"/>
           <p:nvPr/>
         </p:nvSpPr>
@@ -4789,14 +5296,14 @@
       </p:sp>
       <p:sp>
         <p:nvSpPr>
-          <p:cNvPr id="71" name="Text 69"/>
+          <p:cNvPr id="84" name="Text 82"/>
           <p:cNvSpPr txBox="1"/>
           <p:nvPr/>
         </p:nvSpPr>
         <p:spPr>
           <a:xfrm>
             <a:off x="1014984" y="4434302"/>
-            <a:ext cx="2011680" cy="248502"/>
+            <a:ext cx="1783080" cy="248502"/>
           </a:xfrm>
           <a:prstGeom prst="rect">
             <a:avLst/>
@@ -4812,7 +5319,7 @@
               <a:buNone/>
             </a:pPr>
             <a:r>
-              <a:rPr lang="en-US" sz="1300" dirty="0">
+              <a:rPr lang="en-US" sz="1200" dirty="0">
                 <a:solidFill>
                   <a:srgbClr val="1A1A1A"/>
                 </a:solidFill>
@@ -4822,20 +5329,20 @@
               </a:rPr>
               <a:t>SUBARU ST GEORGE</a:t>
             </a:r>
-            <a:endParaRPr lang="en-US" sz="1300" dirty="0"/>
-          </a:p>
-        </p:txBody>
-      </p:sp>
-      <p:sp>
-        <p:nvSpPr>
-          <p:cNvPr id="72" name="Shape 70"/>
+            <a:endParaRPr lang="en-US" sz="1200" dirty="0"/>
+          </a:p>
+        </p:txBody>
+      </p:sp>
+      <p:sp>
+        <p:nvSpPr>
+          <p:cNvPr id="85" name="Shape 83"/>
           <p:cNvSpPr/>
           <p:nvPr/>
         </p:nvSpPr>
         <p:spPr>
           <a:xfrm>
-            <a:off x="3401031" y="4490215"/>
-            <a:ext cx="33965" cy="136676"/>
+            <a:off x="2964697" y="4490215"/>
+            <a:ext cx="18288" cy="136676"/>
           </a:xfrm>
           <a:prstGeom prst="rect">
             <a:avLst/>
@@ -4848,13 +5355,13 @@
       </p:sp>
       <p:sp>
         <p:nvSpPr>
-          <p:cNvPr id="73" name="Text 71"/>
-          <p:cNvSpPr txBox="1"/>
-          <p:nvPr/>
-        </p:nvSpPr>
-        <p:spPr>
-          <a:xfrm>
-            <a:off x="3950208" y="4434302"/>
+          <p:cNvPr id="86" name="Text 84"/>
+          <p:cNvSpPr txBox="1"/>
+          <p:nvPr/>
+        </p:nvSpPr>
+        <p:spPr>
+          <a:xfrm>
+            <a:off x="3172968" y="4434302"/>
             <a:ext cx="1097280" cy="248502"/>
           </a:xfrm>
           <a:prstGeom prst="rect">
@@ -4887,13 +5394,13 @@
       </p:sp>
       <p:sp>
         <p:nvSpPr>
-          <p:cNvPr id="74" name="Text 72"/>
-          <p:cNvSpPr txBox="1"/>
-          <p:nvPr/>
-        </p:nvSpPr>
-        <p:spPr>
-          <a:xfrm>
-            <a:off x="5047488" y="4434302"/>
+          <p:cNvPr id="87" name="Text 85"/>
+          <p:cNvSpPr txBox="1"/>
+          <p:nvPr/>
+        </p:nvSpPr>
+        <p:spPr>
+          <a:xfrm>
+            <a:off x="4270248" y="4434302"/>
             <a:ext cx="868680" cy="248502"/>
           </a:xfrm>
           <a:prstGeom prst="rect">
@@ -4926,7 +5433,46 @@
       </p:sp>
       <p:sp>
         <p:nvSpPr>
-          <p:cNvPr id="75" name="Text 73"/>
+          <p:cNvPr id="88" name="Text 86"/>
+          <p:cNvSpPr txBox="1"/>
+          <p:nvPr/>
+        </p:nvSpPr>
+        <p:spPr>
+          <a:xfrm>
+            <a:off x="5138928" y="4434302"/>
+            <a:ext cx="777240" cy="248502"/>
+          </a:xfrm>
+          <a:prstGeom prst="rect">
+            <a:avLst/>
+          </a:prstGeom>
+          <a:noFill/>
+          <a:ln/>
+        </p:spPr>
+        <p:txBody>
+          <a:bodyPr wrap="square" lIns="0" tIns="0" rIns="0" bIns="0" rtlCol="0" anchor="ctr"/>
+          <a:lstStyle/>
+          <a:p>
+            <a:pPr algn="r" indent="0" marL="0">
+              <a:buNone/>
+            </a:pPr>
+            <a:r>
+              <a:rPr lang="en-US" sz="1300" dirty="0">
+                <a:solidFill>
+                  <a:srgbClr val="595959"/>
+                </a:solidFill>
+                <a:latin typeface="Inter" pitchFamily="34" charset="0"/>
+                <a:ea typeface="Inter" pitchFamily="34" charset="-122"/>
+                <a:cs typeface="Inter" pitchFamily="34" charset="-120"/>
+              </a:rPr>
+              <a:t>2 of 4</a:t>
+            </a:r>
+            <a:endParaRPr lang="en-US" sz="1300" dirty="0"/>
+          </a:p>
+        </p:txBody>
+      </p:sp>
+      <p:sp>
+        <p:nvSpPr>
+          <p:cNvPr id="89" name="Text 87"/>
           <p:cNvSpPr txBox="1"/>
           <p:nvPr/>
         </p:nvSpPr>
@@ -4965,14 +5511,14 @@
       </p:sp>
       <p:sp>
         <p:nvSpPr>
-          <p:cNvPr id="76" name="Text 74"/>
+          <p:cNvPr id="90" name="Text 88"/>
           <p:cNvSpPr txBox="1"/>
           <p:nvPr/>
         </p:nvSpPr>
         <p:spPr>
           <a:xfrm>
             <a:off x="1014984" y="4682804"/>
-            <a:ext cx="2011680" cy="248502"/>
+            <a:ext cx="1783080" cy="248502"/>
           </a:xfrm>
           <a:prstGeom prst="rect">
             <a:avLst/>
@@ -4988,7 +5534,7 @@
               <a:buNone/>
             </a:pPr>
             <a:r>
-              <a:rPr lang="en-US" sz="1300" dirty="0">
+              <a:rPr lang="en-US" sz="1200" dirty="0">
                 <a:solidFill>
                   <a:srgbClr val="1A1A1A"/>
                 </a:solidFill>
@@ -4998,20 +5544,20 @@
               </a:rPr>
               <a:t>LINCOLN</a:t>
             </a:r>
-            <a:endParaRPr lang="en-US" sz="1300" dirty="0"/>
-          </a:p>
-        </p:txBody>
-      </p:sp>
-      <p:sp>
-        <p:nvSpPr>
-          <p:cNvPr id="77" name="Shape 75"/>
+            <a:endParaRPr lang="en-US" sz="1200" dirty="0"/>
+          </a:p>
+        </p:txBody>
+      </p:sp>
+      <p:sp>
+        <p:nvSpPr>
+          <p:cNvPr id="91" name="Shape 89"/>
           <p:cNvSpPr/>
           <p:nvPr/>
         </p:nvSpPr>
         <p:spPr>
           <a:xfrm>
-            <a:off x="3395551" y="4738717"/>
-            <a:ext cx="39445" cy="136676"/>
+            <a:off x="2962996" y="4738717"/>
+            <a:ext cx="18288" cy="136676"/>
           </a:xfrm>
           <a:prstGeom prst="rect">
             <a:avLst/>
@@ -5024,13 +5570,13 @@
       </p:sp>
       <p:sp>
         <p:nvSpPr>
-          <p:cNvPr id="78" name="Text 76"/>
-          <p:cNvSpPr txBox="1"/>
-          <p:nvPr/>
-        </p:nvSpPr>
-        <p:spPr>
-          <a:xfrm>
-            <a:off x="3950208" y="4682804"/>
+          <p:cNvPr id="92" name="Text 90"/>
+          <p:cNvSpPr txBox="1"/>
+          <p:nvPr/>
+        </p:nvSpPr>
+        <p:spPr>
+          <a:xfrm>
+            <a:off x="3172968" y="4682804"/>
             <a:ext cx="1097280" cy="248502"/>
           </a:xfrm>
           <a:prstGeom prst="rect">
@@ -5063,13 +5609,13 @@
       </p:sp>
       <p:sp>
         <p:nvSpPr>
-          <p:cNvPr id="79" name="Text 77"/>
-          <p:cNvSpPr txBox="1"/>
-          <p:nvPr/>
-        </p:nvSpPr>
-        <p:spPr>
-          <a:xfrm>
-            <a:off x="5047488" y="4682804"/>
+          <p:cNvPr id="93" name="Text 91"/>
+          <p:cNvSpPr txBox="1"/>
+          <p:nvPr/>
+        </p:nvSpPr>
+        <p:spPr>
+          <a:xfrm>
+            <a:off x="4270248" y="4682804"/>
             <a:ext cx="868680" cy="248502"/>
           </a:xfrm>
           <a:prstGeom prst="rect">
@@ -5102,7 +5648,46 @@
       </p:sp>
       <p:sp>
         <p:nvSpPr>
-          <p:cNvPr id="80" name="Text 78"/>
+          <p:cNvPr id="94" name="Text 92"/>
+          <p:cNvSpPr txBox="1"/>
+          <p:nvPr/>
+        </p:nvSpPr>
+        <p:spPr>
+          <a:xfrm>
+            <a:off x="5138928" y="4682804"/>
+            <a:ext cx="777240" cy="248502"/>
+          </a:xfrm>
+          <a:prstGeom prst="rect">
+            <a:avLst/>
+          </a:prstGeom>
+          <a:noFill/>
+          <a:ln/>
+        </p:spPr>
+        <p:txBody>
+          <a:bodyPr wrap="square" lIns="0" tIns="0" rIns="0" bIns="0" rtlCol="0" anchor="ctr"/>
+          <a:lstStyle/>
+          <a:p>
+            <a:pPr algn="r" indent="0" marL="0">
+              <a:buNone/>
+            </a:pPr>
+            <a:r>
+              <a:rPr lang="en-US" sz="1300" dirty="0">
+                <a:solidFill>
+                  <a:srgbClr val="595959"/>
+                </a:solidFill>
+                <a:latin typeface="Inter" pitchFamily="34" charset="0"/>
+                <a:ea typeface="Inter" pitchFamily="34" charset="-122"/>
+                <a:cs typeface="Inter" pitchFamily="34" charset="-120"/>
+              </a:rPr>
+              <a:t>3 of 4</a:t>
+            </a:r>
+            <a:endParaRPr lang="en-US" sz="1300" dirty="0"/>
+          </a:p>
+        </p:txBody>
+      </p:sp>
+      <p:sp>
+        <p:nvSpPr>
+          <p:cNvPr id="95" name="Text 93"/>
           <p:cNvSpPr txBox="1"/>
           <p:nvPr/>
         </p:nvSpPr>
@@ -5141,14 +5726,14 @@
       </p:sp>
       <p:sp>
         <p:nvSpPr>
-          <p:cNvPr id="81" name="Text 79"/>
+          <p:cNvPr id="96" name="Text 94"/>
           <p:cNvSpPr txBox="1"/>
           <p:nvPr/>
         </p:nvSpPr>
         <p:spPr>
           <a:xfrm>
             <a:off x="1014984" y="4931305"/>
-            <a:ext cx="2011680" cy="248502"/>
+            <a:ext cx="1783080" cy="248502"/>
           </a:xfrm>
           <a:prstGeom prst="rect">
             <a:avLst/>
@@ -5164,7 +5749,7 @@
               <a:buNone/>
             </a:pPr>
             <a:r>
-              <a:rPr lang="en-US" sz="1300" dirty="0">
+              <a:rPr lang="en-US" sz="1200" dirty="0">
                 <a:solidFill>
                   <a:srgbClr val="1A1A1A"/>
                 </a:solidFill>
@@ -5174,20 +5759,20 @@
               </a:rPr>
               <a:t>KIA ST GEORGE</a:t>
             </a:r>
-            <a:endParaRPr lang="en-US" sz="1300" dirty="0"/>
-          </a:p>
-        </p:txBody>
-      </p:sp>
-      <p:sp>
-        <p:nvSpPr>
-          <p:cNvPr id="82" name="Shape 80"/>
+            <a:endParaRPr lang="en-US" sz="1200" dirty="0"/>
+          </a:p>
+        </p:txBody>
+      </p:sp>
+      <p:sp>
+        <p:nvSpPr>
+          <p:cNvPr id="97" name="Shape 95"/>
           <p:cNvSpPr/>
           <p:nvPr/>
         </p:nvSpPr>
         <p:spPr>
           <a:xfrm>
-            <a:off x="3391623" y="4987218"/>
-            <a:ext cx="43373" cy="136676"/>
+            <a:off x="2961777" y="4987218"/>
+            <a:ext cx="18288" cy="136676"/>
           </a:xfrm>
           <a:prstGeom prst="rect">
             <a:avLst/>
@@ -5200,13 +5785,13 @@
       </p:sp>
       <p:sp>
         <p:nvSpPr>
-          <p:cNvPr id="83" name="Text 81"/>
-          <p:cNvSpPr txBox="1"/>
-          <p:nvPr/>
-        </p:nvSpPr>
-        <p:spPr>
-          <a:xfrm>
-            <a:off x="3950208" y="4931305"/>
+          <p:cNvPr id="98" name="Text 96"/>
+          <p:cNvSpPr txBox="1"/>
+          <p:nvPr/>
+        </p:nvSpPr>
+        <p:spPr>
+          <a:xfrm>
+            <a:off x="3172968" y="4931305"/>
             <a:ext cx="1097280" cy="248502"/>
           </a:xfrm>
           <a:prstGeom prst="rect">
@@ -5239,13 +5824,13 @@
       </p:sp>
       <p:sp>
         <p:nvSpPr>
-          <p:cNvPr id="84" name="Text 82"/>
-          <p:cNvSpPr txBox="1"/>
-          <p:nvPr/>
-        </p:nvSpPr>
-        <p:spPr>
-          <a:xfrm>
-            <a:off x="5047488" y="4931305"/>
+          <p:cNvPr id="99" name="Text 97"/>
+          <p:cNvSpPr txBox="1"/>
+          <p:nvPr/>
+        </p:nvSpPr>
+        <p:spPr>
+          <a:xfrm>
+            <a:off x="4270248" y="4931305"/>
             <a:ext cx="868680" cy="248502"/>
           </a:xfrm>
           <a:prstGeom prst="rect">
@@ -5278,7 +5863,46 @@
       </p:sp>
       <p:sp>
         <p:nvSpPr>
-          <p:cNvPr id="85" name="Text 83"/>
+          <p:cNvPr id="100" name="Text 98"/>
+          <p:cNvSpPr txBox="1"/>
+          <p:nvPr/>
+        </p:nvSpPr>
+        <p:spPr>
+          <a:xfrm>
+            <a:off x="5138928" y="4931305"/>
+            <a:ext cx="777240" cy="248502"/>
+          </a:xfrm>
+          <a:prstGeom prst="rect">
+            <a:avLst/>
+          </a:prstGeom>
+          <a:noFill/>
+          <a:ln/>
+        </p:spPr>
+        <p:txBody>
+          <a:bodyPr wrap="square" lIns="0" tIns="0" rIns="0" bIns="0" rtlCol="0" anchor="ctr"/>
+          <a:lstStyle/>
+          <a:p>
+            <a:pPr algn="r" indent="0" marL="0">
+              <a:buNone/>
+            </a:pPr>
+            <a:r>
+              <a:rPr lang="en-US" sz="1300" dirty="0">
+                <a:solidFill>
+                  <a:srgbClr val="595959"/>
+                </a:solidFill>
+                <a:latin typeface="Inter" pitchFamily="34" charset="0"/>
+                <a:ea typeface="Inter" pitchFamily="34" charset="-122"/>
+                <a:cs typeface="Inter" pitchFamily="34" charset="-120"/>
+              </a:rPr>
+              <a:t>3 of 4</a:t>
+            </a:r>
+            <a:endParaRPr lang="en-US" sz="1300" dirty="0"/>
+          </a:p>
+        </p:txBody>
+      </p:sp>
+      <p:sp>
+        <p:nvSpPr>
+          <p:cNvPr id="101" name="Text 99"/>
           <p:cNvSpPr txBox="1"/>
           <p:nvPr/>
         </p:nvSpPr>
@@ -5317,14 +5941,14 @@
       </p:sp>
       <p:sp>
         <p:nvSpPr>
-          <p:cNvPr id="86" name="Text 84"/>
+          <p:cNvPr id="102" name="Text 100"/>
           <p:cNvSpPr txBox="1"/>
           <p:nvPr/>
         </p:nvSpPr>
         <p:spPr>
           <a:xfrm>
             <a:off x="1014984" y="5179807"/>
-            <a:ext cx="2011680" cy="248502"/>
+            <a:ext cx="1783080" cy="248502"/>
           </a:xfrm>
           <a:prstGeom prst="rect">
             <a:avLst/>
@@ -5340,7 +5964,7 @@
               <a:buNone/>
             </a:pPr>
             <a:r>
-              <a:rPr lang="en-US" sz="1300" dirty="0">
+              <a:rPr lang="en-US" sz="1200" dirty="0">
                 <a:solidFill>
                   <a:srgbClr val="1A1A1A"/>
                 </a:solidFill>
@@ -5350,20 +5974,20 @@
               </a:rPr>
               <a:t>SUBARU LV</a:t>
             </a:r>
-            <a:endParaRPr lang="en-US" sz="1300" dirty="0"/>
-          </a:p>
-        </p:txBody>
-      </p:sp>
-      <p:sp>
-        <p:nvSpPr>
-          <p:cNvPr id="87" name="Shape 85"/>
+            <a:endParaRPr lang="en-US" sz="1200" dirty="0"/>
+          </a:p>
+        </p:txBody>
+      </p:sp>
+      <p:sp>
+        <p:nvSpPr>
+          <p:cNvPr id="103" name="Shape 101"/>
           <p:cNvSpPr/>
           <p:nvPr/>
         </p:nvSpPr>
         <p:spPr>
           <a:xfrm>
-            <a:off x="3386113" y="5235720"/>
-            <a:ext cx="48884" cy="136676"/>
+            <a:off x="2960067" y="5235720"/>
+            <a:ext cx="18288" cy="136676"/>
           </a:xfrm>
           <a:prstGeom prst="rect">
             <a:avLst/>
@@ -5376,13 +6000,13 @@
       </p:sp>
       <p:sp>
         <p:nvSpPr>
-          <p:cNvPr id="88" name="Text 86"/>
-          <p:cNvSpPr txBox="1"/>
-          <p:nvPr/>
-        </p:nvSpPr>
-        <p:spPr>
-          <a:xfrm>
-            <a:off x="3950208" y="5179807"/>
+          <p:cNvPr id="104" name="Text 102"/>
+          <p:cNvSpPr txBox="1"/>
+          <p:nvPr/>
+        </p:nvSpPr>
+        <p:spPr>
+          <a:xfrm>
+            <a:off x="3172968" y="5179807"/>
             <a:ext cx="1097280" cy="248502"/>
           </a:xfrm>
           <a:prstGeom prst="rect">
@@ -5415,13 +6039,13 @@
       </p:sp>
       <p:sp>
         <p:nvSpPr>
-          <p:cNvPr id="89" name="Text 87"/>
-          <p:cNvSpPr txBox="1"/>
-          <p:nvPr/>
-        </p:nvSpPr>
-        <p:spPr>
-          <a:xfrm>
-            <a:off x="5047488" y="5179807"/>
+          <p:cNvPr id="105" name="Text 103"/>
+          <p:cNvSpPr txBox="1"/>
+          <p:nvPr/>
+        </p:nvSpPr>
+        <p:spPr>
+          <a:xfrm>
+            <a:off x="4270248" y="5179807"/>
             <a:ext cx="868680" cy="248502"/>
           </a:xfrm>
           <a:prstGeom prst="rect">
@@ -5454,7 +6078,46 @@
       </p:sp>
       <p:sp>
         <p:nvSpPr>
-          <p:cNvPr id="90" name="Text 88"/>
+          <p:cNvPr id="106" name="Text 104"/>
+          <p:cNvSpPr txBox="1"/>
+          <p:nvPr/>
+        </p:nvSpPr>
+        <p:spPr>
+          <a:xfrm>
+            <a:off x="5138928" y="5179807"/>
+            <a:ext cx="777240" cy="248502"/>
+          </a:xfrm>
+          <a:prstGeom prst="rect">
+            <a:avLst/>
+          </a:prstGeom>
+          <a:noFill/>
+          <a:ln/>
+        </p:spPr>
+        <p:txBody>
+          <a:bodyPr wrap="square" lIns="0" tIns="0" rIns="0" bIns="0" rtlCol="0" anchor="ctr"/>
+          <a:lstStyle/>
+          <a:p>
+            <a:pPr algn="r" indent="0" marL="0">
+              <a:buNone/>
+            </a:pPr>
+            <a:r>
+              <a:rPr lang="en-US" sz="1300" dirty="0">
+                <a:solidFill>
+                  <a:srgbClr val="595959"/>
+                </a:solidFill>
+                <a:latin typeface="Inter" pitchFamily="34" charset="0"/>
+                <a:ea typeface="Inter" pitchFamily="34" charset="-122"/>
+                <a:cs typeface="Inter" pitchFamily="34" charset="-120"/>
+              </a:rPr>
+              <a:t>3 of 4</a:t>
+            </a:r>
+            <a:endParaRPr lang="en-US" sz="1300" dirty="0"/>
+          </a:p>
+        </p:txBody>
+      </p:sp>
+      <p:sp>
+        <p:nvSpPr>
+          <p:cNvPr id="107" name="Text 105"/>
           <p:cNvSpPr txBox="1"/>
           <p:nvPr/>
         </p:nvSpPr>
@@ -5493,14 +6156,14 @@
       </p:sp>
       <p:sp>
         <p:nvSpPr>
-          <p:cNvPr id="91" name="Text 89"/>
+          <p:cNvPr id="108" name="Text 106"/>
           <p:cNvSpPr txBox="1"/>
           <p:nvPr/>
         </p:nvSpPr>
         <p:spPr>
           <a:xfrm>
             <a:off x="1014984" y="5428309"/>
-            <a:ext cx="2011680" cy="248502"/>
+            <a:ext cx="1783080" cy="248502"/>
           </a:xfrm>
           <a:prstGeom prst="rect">
             <a:avLst/>
@@ -5516,7 +6179,7 @@
               <a:buNone/>
             </a:pPr>
             <a:r>
-              <a:rPr lang="en-US" sz="1300" dirty="0">
+              <a:rPr lang="en-US" sz="1200" dirty="0">
                 <a:solidFill>
                   <a:srgbClr val="1A1A1A"/>
                 </a:solidFill>
@@ -5526,20 +6189,20 @@
               </a:rPr>
               <a:t>GMC PRESCOTT</a:t>
             </a:r>
-            <a:endParaRPr lang="en-US" sz="1300" dirty="0"/>
-          </a:p>
-        </p:txBody>
-      </p:sp>
-      <p:sp>
-        <p:nvSpPr>
-          <p:cNvPr id="92" name="Shape 90"/>
+            <a:endParaRPr lang="en-US" sz="1200" dirty="0"/>
+          </a:p>
+        </p:txBody>
+      </p:sp>
+      <p:sp>
+        <p:nvSpPr>
+          <p:cNvPr id="109" name="Shape 107"/>
           <p:cNvSpPr/>
           <p:nvPr/>
         </p:nvSpPr>
         <p:spPr>
           <a:xfrm>
-            <a:off x="3385317" y="5484222"/>
-            <a:ext cx="49679" cy="136676"/>
+            <a:off x="2959820" y="5484222"/>
+            <a:ext cx="18288" cy="136676"/>
           </a:xfrm>
           <a:prstGeom prst="rect">
             <a:avLst/>
@@ -5552,13 +6215,13 @@
       </p:sp>
       <p:sp>
         <p:nvSpPr>
-          <p:cNvPr id="93" name="Text 91"/>
-          <p:cNvSpPr txBox="1"/>
-          <p:nvPr/>
-        </p:nvSpPr>
-        <p:spPr>
-          <a:xfrm>
-            <a:off x="3950208" y="5428309"/>
+          <p:cNvPr id="110" name="Text 108"/>
+          <p:cNvSpPr txBox="1"/>
+          <p:nvPr/>
+        </p:nvSpPr>
+        <p:spPr>
+          <a:xfrm>
+            <a:off x="3172968" y="5428309"/>
             <a:ext cx="1097280" cy="248502"/>
           </a:xfrm>
           <a:prstGeom prst="rect">
@@ -5591,13 +6254,13 @@
       </p:sp>
       <p:sp>
         <p:nvSpPr>
-          <p:cNvPr id="94" name="Text 92"/>
-          <p:cNvSpPr txBox="1"/>
-          <p:nvPr/>
-        </p:nvSpPr>
-        <p:spPr>
-          <a:xfrm>
-            <a:off x="5047488" y="5428309"/>
+          <p:cNvPr id="111" name="Text 109"/>
+          <p:cNvSpPr txBox="1"/>
+          <p:nvPr/>
+        </p:nvSpPr>
+        <p:spPr>
+          <a:xfrm>
+            <a:off x="4270248" y="5428309"/>
             <a:ext cx="868680" cy="248502"/>
           </a:xfrm>
           <a:prstGeom prst="rect">
@@ -5630,7 +6293,46 @@
       </p:sp>
       <p:sp>
         <p:nvSpPr>
-          <p:cNvPr id="95" name="Text 93"/>
+          <p:cNvPr id="112" name="Text 110"/>
+          <p:cNvSpPr txBox="1"/>
+          <p:nvPr/>
+        </p:nvSpPr>
+        <p:spPr>
+          <a:xfrm>
+            <a:off x="5138928" y="5428309"/>
+            <a:ext cx="777240" cy="248502"/>
+          </a:xfrm>
+          <a:prstGeom prst="rect">
+            <a:avLst/>
+          </a:prstGeom>
+          <a:noFill/>
+          <a:ln/>
+        </p:spPr>
+        <p:txBody>
+          <a:bodyPr wrap="square" lIns="0" tIns="0" rIns="0" bIns="0" rtlCol="0" anchor="ctr"/>
+          <a:lstStyle/>
+          <a:p>
+            <a:pPr algn="r" indent="0" marL="0">
+              <a:buNone/>
+            </a:pPr>
+            <a:r>
+              <a:rPr lang="en-US" sz="1300" dirty="0">
+                <a:solidFill>
+                  <a:srgbClr val="595959"/>
+                </a:solidFill>
+                <a:latin typeface="Inter" pitchFamily="34" charset="0"/>
+                <a:ea typeface="Inter" pitchFamily="34" charset="-122"/>
+                <a:cs typeface="Inter" pitchFamily="34" charset="-120"/>
+              </a:rPr>
+              <a:t>4 of 4</a:t>
+            </a:r>
+            <a:endParaRPr lang="en-US" sz="1300" dirty="0"/>
+          </a:p>
+        </p:txBody>
+      </p:sp>
+      <p:sp>
+        <p:nvSpPr>
+          <p:cNvPr id="113" name="Text 111"/>
           <p:cNvSpPr txBox="1"/>
           <p:nvPr/>
         </p:nvSpPr>
@@ -5669,14 +6371,14 @@
       </p:sp>
       <p:sp>
         <p:nvSpPr>
-          <p:cNvPr id="96" name="Text 94"/>
+          <p:cNvPr id="114" name="Text 112"/>
           <p:cNvSpPr txBox="1"/>
           <p:nvPr/>
         </p:nvSpPr>
         <p:spPr>
           <a:xfrm>
             <a:off x="1014984" y="5676810"/>
-            <a:ext cx="2011680" cy="248502"/>
+            <a:ext cx="1783080" cy="248502"/>
           </a:xfrm>
           <a:prstGeom prst="rect">
             <a:avLst/>
@@ -5692,7 +6394,7 @@
               <a:buNone/>
             </a:pPr>
             <a:r>
-              <a:rPr lang="en-US" sz="1300" dirty="0">
+              <a:rPr lang="en-US" sz="1200" dirty="0">
                 <a:solidFill>
                   <a:srgbClr val="1A1A1A"/>
                 </a:solidFill>
@@ -5702,20 +6404,20 @@
               </a:rPr>
               <a:t>HYUNDAI ST GEORGE</a:t>
             </a:r>
-            <a:endParaRPr lang="en-US" sz="1300" dirty="0"/>
-          </a:p>
-        </p:txBody>
-      </p:sp>
-      <p:sp>
-        <p:nvSpPr>
-          <p:cNvPr id="97" name="Shape 95"/>
+            <a:endParaRPr lang="en-US" sz="1200" dirty="0"/>
+          </a:p>
+        </p:txBody>
+      </p:sp>
+      <p:sp>
+        <p:nvSpPr>
+          <p:cNvPr id="115" name="Shape 113"/>
           <p:cNvSpPr/>
           <p:nvPr/>
         </p:nvSpPr>
         <p:spPr>
           <a:xfrm>
-            <a:off x="3384944" y="5732723"/>
-            <a:ext cx="50052" cy="136676"/>
+            <a:off x="2959704" y="5732723"/>
+            <a:ext cx="18288" cy="136676"/>
           </a:xfrm>
           <a:prstGeom prst="rect">
             <a:avLst/>
@@ -5728,13 +6430,13 @@
       </p:sp>
       <p:sp>
         <p:nvSpPr>
-          <p:cNvPr id="98" name="Text 96"/>
-          <p:cNvSpPr txBox="1"/>
-          <p:nvPr/>
-        </p:nvSpPr>
-        <p:spPr>
-          <a:xfrm>
-            <a:off x="3950208" y="5676810"/>
+          <p:cNvPr id="116" name="Text 114"/>
+          <p:cNvSpPr txBox="1"/>
+          <p:nvPr/>
+        </p:nvSpPr>
+        <p:spPr>
+          <a:xfrm>
+            <a:off x="3172968" y="5676810"/>
             <a:ext cx="1097280" cy="248502"/>
           </a:xfrm>
           <a:prstGeom prst="rect">
@@ -5767,13 +6469,13 @@
       </p:sp>
       <p:sp>
         <p:nvSpPr>
-          <p:cNvPr id="99" name="Text 97"/>
-          <p:cNvSpPr txBox="1"/>
-          <p:nvPr/>
-        </p:nvSpPr>
-        <p:spPr>
-          <a:xfrm>
-            <a:off x="5047488" y="5676810"/>
+          <p:cNvPr id="117" name="Text 115"/>
+          <p:cNvSpPr txBox="1"/>
+          <p:nvPr/>
+        </p:nvSpPr>
+        <p:spPr>
+          <a:xfrm>
+            <a:off x="4270248" y="5676810"/>
             <a:ext cx="868680" cy="248502"/>
           </a:xfrm>
           <a:prstGeom prst="rect">
@@ -5806,7 +6508,46 @@
       </p:sp>
       <p:sp>
         <p:nvSpPr>
-          <p:cNvPr id="100" name="Text 98"/>
+          <p:cNvPr id="118" name="Text 116"/>
+          <p:cNvSpPr txBox="1"/>
+          <p:nvPr/>
+        </p:nvSpPr>
+        <p:spPr>
+          <a:xfrm>
+            <a:off x="5138928" y="5676810"/>
+            <a:ext cx="777240" cy="248502"/>
+          </a:xfrm>
+          <a:prstGeom prst="rect">
+            <a:avLst/>
+          </a:prstGeom>
+          <a:noFill/>
+          <a:ln/>
+        </p:spPr>
+        <p:txBody>
+          <a:bodyPr wrap="square" lIns="0" tIns="0" rIns="0" bIns="0" rtlCol="0" anchor="ctr"/>
+          <a:lstStyle/>
+          <a:p>
+            <a:pPr algn="r" indent="0" marL="0">
+              <a:buNone/>
+            </a:pPr>
+            <a:r>
+              <a:rPr lang="en-US" sz="1300" dirty="0">
+                <a:solidFill>
+                  <a:srgbClr val="595959"/>
+                </a:solidFill>
+                <a:latin typeface="Inter" pitchFamily="34" charset="0"/>
+                <a:ea typeface="Inter" pitchFamily="34" charset="-122"/>
+                <a:cs typeface="Inter" pitchFamily="34" charset="-120"/>
+              </a:rPr>
+              <a:t>4 of 4</a:t>
+            </a:r>
+            <a:endParaRPr lang="en-US" sz="1300" dirty="0"/>
+          </a:p>
+        </p:txBody>
+      </p:sp>
+      <p:sp>
+        <p:nvSpPr>
+          <p:cNvPr id="119" name="Text 117"/>
           <p:cNvSpPr txBox="1"/>
           <p:nvPr/>
         </p:nvSpPr>
@@ -5845,14 +6586,14 @@
       </p:sp>
       <p:sp>
         <p:nvSpPr>
-          <p:cNvPr id="101" name="Text 99"/>
+          <p:cNvPr id="120" name="Text 118"/>
           <p:cNvSpPr txBox="1"/>
           <p:nvPr/>
         </p:nvSpPr>
         <p:spPr>
           <a:xfrm>
             <a:off x="6565392" y="1700784"/>
-            <a:ext cx="2011680" cy="248502"/>
+            <a:ext cx="1783080" cy="248502"/>
           </a:xfrm>
           <a:prstGeom prst="rect">
             <a:avLst/>
@@ -5868,7 +6609,7 @@
               <a:buNone/>
             </a:pPr>
             <a:r>
-              <a:rPr lang="en-US" sz="1300" dirty="0">
+              <a:rPr lang="en-US" sz="1200" dirty="0">
                 <a:solidFill>
                   <a:srgbClr val="1A1A1A"/>
                 </a:solidFill>
@@ -5878,20 +6619,20 @@
               </a:rPr>
               <a:t>VW ST GEORGE</a:t>
             </a:r>
-            <a:endParaRPr lang="en-US" sz="1300" dirty="0"/>
-          </a:p>
-        </p:txBody>
-      </p:sp>
-      <p:sp>
-        <p:nvSpPr>
-          <p:cNvPr id="102" name="Shape 100"/>
+            <a:endParaRPr lang="en-US" sz="1200" dirty="0"/>
+          </a:p>
+        </p:txBody>
+      </p:sp>
+      <p:sp>
+        <p:nvSpPr>
+          <p:cNvPr id="121" name="Shape 119"/>
           <p:cNvSpPr/>
           <p:nvPr/>
         </p:nvSpPr>
         <p:spPr>
           <a:xfrm>
-            <a:off x="8931186" y="1756697"/>
-            <a:ext cx="54219" cy="136676"/>
+            <a:off x="8508819" y="1756697"/>
+            <a:ext cx="18288" cy="136676"/>
           </a:xfrm>
           <a:prstGeom prst="rect">
             <a:avLst/>
@@ -5904,13 +6645,13 @@
       </p:sp>
       <p:sp>
         <p:nvSpPr>
-          <p:cNvPr id="103" name="Text 101"/>
-          <p:cNvSpPr txBox="1"/>
-          <p:nvPr/>
-        </p:nvSpPr>
-        <p:spPr>
-          <a:xfrm>
-            <a:off x="9500616" y="1700784"/>
+          <p:cNvPr id="122" name="Text 120"/>
+          <p:cNvSpPr txBox="1"/>
+          <p:nvPr/>
+        </p:nvSpPr>
+        <p:spPr>
+          <a:xfrm>
+            <a:off x="8723376" y="1700784"/>
             <a:ext cx="1097280" cy="248502"/>
           </a:xfrm>
           <a:prstGeom prst="rect">
@@ -5943,13 +6684,13 @@
       </p:sp>
       <p:sp>
         <p:nvSpPr>
-          <p:cNvPr id="104" name="Text 102"/>
-          <p:cNvSpPr txBox="1"/>
-          <p:nvPr/>
-        </p:nvSpPr>
-        <p:spPr>
-          <a:xfrm>
-            <a:off x="10597896" y="1700784"/>
+          <p:cNvPr id="123" name="Text 121"/>
+          <p:cNvSpPr txBox="1"/>
+          <p:nvPr/>
+        </p:nvSpPr>
+        <p:spPr>
+          <a:xfrm>
+            <a:off x="9820656" y="1700784"/>
             <a:ext cx="868680" cy="248502"/>
           </a:xfrm>
           <a:prstGeom prst="rect">
@@ -5982,7 +6723,46 @@
       </p:sp>
       <p:sp>
         <p:nvSpPr>
-          <p:cNvPr id="105" name="Text 103"/>
+          <p:cNvPr id="124" name="Text 122"/>
+          <p:cNvSpPr txBox="1"/>
+          <p:nvPr/>
+        </p:nvSpPr>
+        <p:spPr>
+          <a:xfrm>
+            <a:off x="10689336" y="1700784"/>
+            <a:ext cx="777240" cy="248502"/>
+          </a:xfrm>
+          <a:prstGeom prst="rect">
+            <a:avLst/>
+          </a:prstGeom>
+          <a:noFill/>
+          <a:ln/>
+        </p:spPr>
+        <p:txBody>
+          <a:bodyPr wrap="square" lIns="0" tIns="0" rIns="0" bIns="0" rtlCol="0" anchor="ctr"/>
+          <a:lstStyle/>
+          <a:p>
+            <a:pPr algn="r" indent="0" marL="0">
+              <a:buNone/>
+            </a:pPr>
+            <a:r>
+              <a:rPr lang="en-US" sz="1300" dirty="0">
+                <a:solidFill>
+                  <a:srgbClr val="595959"/>
+                </a:solidFill>
+                <a:latin typeface="Inter" pitchFamily="34" charset="0"/>
+                <a:ea typeface="Inter" pitchFamily="34" charset="-122"/>
+                <a:cs typeface="Inter" pitchFamily="34" charset="-120"/>
+              </a:rPr>
+              <a:t>4 of 4</a:t>
+            </a:r>
+            <a:endParaRPr lang="en-US" sz="1300" dirty="0"/>
+          </a:p>
+        </p:txBody>
+      </p:sp>
+      <p:sp>
+        <p:nvSpPr>
+          <p:cNvPr id="125" name="Text 123"/>
           <p:cNvSpPr txBox="1"/>
           <p:nvPr/>
         </p:nvSpPr>
@@ -6021,14 +6801,14 @@
       </p:sp>
       <p:sp>
         <p:nvSpPr>
-          <p:cNvPr id="106" name="Text 104"/>
+          <p:cNvPr id="126" name="Text 124"/>
           <p:cNvSpPr txBox="1"/>
           <p:nvPr/>
         </p:nvSpPr>
         <p:spPr>
           <a:xfrm>
             <a:off x="6565392" y="1949286"/>
-            <a:ext cx="2011680" cy="248502"/>
+            <a:ext cx="1783080" cy="248502"/>
           </a:xfrm>
           <a:prstGeom prst="rect">
             <a:avLst/>
@@ -6044,7 +6824,7 @@
               <a:buNone/>
             </a:pPr>
             <a:r>
-              <a:rPr lang="en-US" sz="1300" dirty="0">
+              <a:rPr lang="en-US" sz="1200" dirty="0">
                 <a:solidFill>
                   <a:srgbClr val="1A1A1A"/>
                 </a:solidFill>
@@ -6054,20 +6834,20 @@
               </a:rPr>
               <a:t>CADILLAC</a:t>
             </a:r>
-            <a:endParaRPr lang="en-US" sz="1300" dirty="0"/>
-          </a:p>
-        </p:txBody>
-      </p:sp>
-      <p:sp>
-        <p:nvSpPr>
-          <p:cNvPr id="107" name="Shape 105"/>
+            <a:endParaRPr lang="en-US" sz="1200" dirty="0"/>
+          </a:p>
+        </p:txBody>
+      </p:sp>
+      <p:sp>
+        <p:nvSpPr>
+          <p:cNvPr id="127" name="Shape 125"/>
           <p:cNvSpPr/>
           <p:nvPr/>
         </p:nvSpPr>
         <p:spPr>
           <a:xfrm>
-            <a:off x="8907378" y="2005199"/>
-            <a:ext cx="78026" cy="136676"/>
+            <a:off x="8501431" y="2005199"/>
+            <a:ext cx="24215" cy="136676"/>
           </a:xfrm>
           <a:prstGeom prst="rect">
             <a:avLst/>
@@ -6080,13 +6860,13 @@
       </p:sp>
       <p:sp>
         <p:nvSpPr>
-          <p:cNvPr id="108" name="Text 106"/>
-          <p:cNvSpPr txBox="1"/>
-          <p:nvPr/>
-        </p:nvSpPr>
-        <p:spPr>
-          <a:xfrm>
-            <a:off x="9500616" y="1949286"/>
+          <p:cNvPr id="128" name="Text 126"/>
+          <p:cNvSpPr txBox="1"/>
+          <p:nvPr/>
+        </p:nvSpPr>
+        <p:spPr>
+          <a:xfrm>
+            <a:off x="8723376" y="1949286"/>
             <a:ext cx="1097280" cy="248502"/>
           </a:xfrm>
           <a:prstGeom prst="rect">
@@ -6119,13 +6899,13 @@
       </p:sp>
       <p:sp>
         <p:nvSpPr>
-          <p:cNvPr id="109" name="Text 107"/>
-          <p:cNvSpPr txBox="1"/>
-          <p:nvPr/>
-        </p:nvSpPr>
-        <p:spPr>
-          <a:xfrm>
-            <a:off x="10597896" y="1949286"/>
+          <p:cNvPr id="129" name="Text 127"/>
+          <p:cNvSpPr txBox="1"/>
+          <p:nvPr/>
+        </p:nvSpPr>
+        <p:spPr>
+          <a:xfrm>
+            <a:off x="9820656" y="1949286"/>
             <a:ext cx="868680" cy="248502"/>
           </a:xfrm>
           <a:prstGeom prst="rect">
@@ -6158,7 +6938,46 @@
       </p:sp>
       <p:sp>
         <p:nvSpPr>
-          <p:cNvPr id="110" name="Text 108"/>
+          <p:cNvPr id="130" name="Text 128"/>
+          <p:cNvSpPr txBox="1"/>
+          <p:nvPr/>
+        </p:nvSpPr>
+        <p:spPr>
+          <a:xfrm>
+            <a:off x="10689336" y="1949286"/>
+            <a:ext cx="777240" cy="248502"/>
+          </a:xfrm>
+          <a:prstGeom prst="rect">
+            <a:avLst/>
+          </a:prstGeom>
+          <a:noFill/>
+          <a:ln/>
+        </p:spPr>
+        <p:txBody>
+          <a:bodyPr wrap="square" lIns="0" tIns="0" rIns="0" bIns="0" rtlCol="0" anchor="ctr"/>
+          <a:lstStyle/>
+          <a:p>
+            <a:pPr algn="r" indent="0" marL="0">
+              <a:buNone/>
+            </a:pPr>
+            <a:r>
+              <a:rPr lang="en-US" sz="1300" dirty="0">
+                <a:solidFill>
+                  <a:srgbClr val="595959"/>
+                </a:solidFill>
+                <a:latin typeface="Inter" pitchFamily="34" charset="0"/>
+                <a:ea typeface="Inter" pitchFamily="34" charset="-122"/>
+                <a:cs typeface="Inter" pitchFamily="34" charset="-120"/>
+              </a:rPr>
+              <a:t>4 of 4</a:t>
+            </a:r>
+            <a:endParaRPr lang="en-US" sz="1300" dirty="0"/>
+          </a:p>
+        </p:txBody>
+      </p:sp>
+      <p:sp>
+        <p:nvSpPr>
+          <p:cNvPr id="131" name="Text 129"/>
           <p:cNvSpPr txBox="1"/>
           <p:nvPr/>
         </p:nvSpPr>
@@ -6197,14 +7016,14 @@
       </p:sp>
       <p:sp>
         <p:nvSpPr>
-          <p:cNvPr id="111" name="Text 109"/>
+          <p:cNvPr id="132" name="Text 130"/>
           <p:cNvSpPr txBox="1"/>
           <p:nvPr/>
         </p:nvSpPr>
         <p:spPr>
           <a:xfrm>
             <a:off x="6565392" y="2197787"/>
-            <a:ext cx="2011680" cy="248502"/>
+            <a:ext cx="1783080" cy="248502"/>
           </a:xfrm>
           <a:prstGeom prst="rect">
             <a:avLst/>
@@ -6220,7 +7039,7 @@
               <a:buNone/>
             </a:pPr>
             <a:r>
-              <a:rPr lang="en-US" sz="1300" dirty="0">
+              <a:rPr lang="en-US" sz="1200" dirty="0">
                 <a:solidFill>
                   <a:srgbClr val="1A1A1A"/>
                 </a:solidFill>
@@ -6230,20 +7049,20 @@
               </a:rPr>
               <a:t>CHEVY GMC BULLHEAD</a:t>
             </a:r>
-            <a:endParaRPr lang="en-US" sz="1300" dirty="0"/>
-          </a:p>
-        </p:txBody>
-      </p:sp>
-      <p:sp>
-        <p:nvSpPr>
-          <p:cNvPr id="112" name="Shape 110"/>
+            <a:endParaRPr lang="en-US" sz="1200" dirty="0"/>
+          </a:p>
+        </p:txBody>
+      </p:sp>
+      <p:sp>
+        <p:nvSpPr>
+          <p:cNvPr id="133" name="Shape 131"/>
           <p:cNvSpPr/>
           <p:nvPr/>
         </p:nvSpPr>
         <p:spPr>
           <a:xfrm>
-            <a:off x="8903182" y="2253700"/>
-            <a:ext cx="82223" cy="136676"/>
+            <a:off x="8500128" y="2253700"/>
+            <a:ext cx="25517" cy="136676"/>
           </a:xfrm>
           <a:prstGeom prst="rect">
             <a:avLst/>
@@ -6256,13 +7075,13 @@
       </p:sp>
       <p:sp>
         <p:nvSpPr>
-          <p:cNvPr id="113" name="Text 111"/>
-          <p:cNvSpPr txBox="1"/>
-          <p:nvPr/>
-        </p:nvSpPr>
-        <p:spPr>
-          <a:xfrm>
-            <a:off x="9500616" y="2197787"/>
+          <p:cNvPr id="134" name="Text 132"/>
+          <p:cNvSpPr txBox="1"/>
+          <p:nvPr/>
+        </p:nvSpPr>
+        <p:spPr>
+          <a:xfrm>
+            <a:off x="8723376" y="2197787"/>
             <a:ext cx="1097280" cy="248502"/>
           </a:xfrm>
           <a:prstGeom prst="rect">
@@ -6295,13 +7114,13 @@
       </p:sp>
       <p:sp>
         <p:nvSpPr>
-          <p:cNvPr id="114" name="Text 112"/>
-          <p:cNvSpPr txBox="1"/>
-          <p:nvPr/>
-        </p:nvSpPr>
-        <p:spPr>
-          <a:xfrm>
-            <a:off x="10597896" y="2197787"/>
+          <p:cNvPr id="135" name="Text 133"/>
+          <p:cNvSpPr txBox="1"/>
+          <p:nvPr/>
+        </p:nvSpPr>
+        <p:spPr>
+          <a:xfrm>
+            <a:off x="9820656" y="2197787"/>
             <a:ext cx="868680" cy="248502"/>
           </a:xfrm>
           <a:prstGeom prst="rect">
@@ -6334,7 +7153,46 @@
       </p:sp>
       <p:sp>
         <p:nvSpPr>
-          <p:cNvPr id="115" name="Text 113"/>
+          <p:cNvPr id="136" name="Text 134"/>
+          <p:cNvSpPr txBox="1"/>
+          <p:nvPr/>
+        </p:nvSpPr>
+        <p:spPr>
+          <a:xfrm>
+            <a:off x="10689336" y="2197787"/>
+            <a:ext cx="777240" cy="248502"/>
+          </a:xfrm>
+          <a:prstGeom prst="rect">
+            <a:avLst/>
+          </a:prstGeom>
+          <a:noFill/>
+          <a:ln/>
+        </p:spPr>
+        <p:txBody>
+          <a:bodyPr wrap="square" lIns="0" tIns="0" rIns="0" bIns="0" rtlCol="0" anchor="ctr"/>
+          <a:lstStyle/>
+          <a:p>
+            <a:pPr algn="r" indent="0" marL="0">
+              <a:buNone/>
+            </a:pPr>
+            <a:r>
+              <a:rPr lang="en-US" sz="1300" dirty="0">
+                <a:solidFill>
+                  <a:srgbClr val="595959"/>
+                </a:solidFill>
+                <a:latin typeface="Inter" pitchFamily="34" charset="0"/>
+                <a:ea typeface="Inter" pitchFamily="34" charset="-122"/>
+                <a:cs typeface="Inter" pitchFamily="34" charset="-120"/>
+              </a:rPr>
+              <a:t>4 of 4</a:t>
+            </a:r>
+            <a:endParaRPr lang="en-US" sz="1300" dirty="0"/>
+          </a:p>
+        </p:txBody>
+      </p:sp>
+      <p:sp>
+        <p:nvSpPr>
+          <p:cNvPr id="137" name="Text 135"/>
           <p:cNvSpPr txBox="1"/>
           <p:nvPr/>
         </p:nvSpPr>
@@ -6373,14 +7231,14 @@
       </p:sp>
       <p:sp>
         <p:nvSpPr>
-          <p:cNvPr id="116" name="Text 114"/>
+          <p:cNvPr id="138" name="Text 136"/>
           <p:cNvSpPr txBox="1"/>
           <p:nvPr/>
         </p:nvSpPr>
         <p:spPr>
           <a:xfrm>
             <a:off x="6565392" y="2446289"/>
-            <a:ext cx="2011680" cy="248502"/>
+            <a:ext cx="1783080" cy="248502"/>
           </a:xfrm>
           <a:prstGeom prst="rect">
             <a:avLst/>
@@ -6396,7 +7254,7 @@
               <a:buNone/>
             </a:pPr>
             <a:r>
-              <a:rPr lang="en-US" sz="1300" dirty="0">
+              <a:rPr lang="en-US" sz="1200" dirty="0">
                 <a:solidFill>
                   <a:srgbClr val="1A1A1A"/>
                 </a:solidFill>
@@ -6406,20 +7264,20 @@
               </a:rPr>
               <a:t>VW HENDERSON</a:t>
             </a:r>
-            <a:endParaRPr lang="en-US" sz="1300" dirty="0"/>
-          </a:p>
-        </p:txBody>
-      </p:sp>
-      <p:sp>
-        <p:nvSpPr>
-          <p:cNvPr id="117" name="Shape 115"/>
+            <a:endParaRPr lang="en-US" sz="1200" dirty="0"/>
+          </a:p>
+        </p:txBody>
+      </p:sp>
+      <p:sp>
+        <p:nvSpPr>
+          <p:cNvPr id="139" name="Shape 137"/>
           <p:cNvSpPr/>
           <p:nvPr/>
         </p:nvSpPr>
         <p:spPr>
           <a:xfrm>
-            <a:off x="8898772" y="2502202"/>
-            <a:ext cx="86632" cy="136676"/>
+            <a:off x="8498760" y="2502202"/>
+            <a:ext cx="26886" cy="136676"/>
           </a:xfrm>
           <a:prstGeom prst="rect">
             <a:avLst/>
@@ -6432,13 +7290,13 @@
       </p:sp>
       <p:sp>
         <p:nvSpPr>
-          <p:cNvPr id="118" name="Text 116"/>
-          <p:cNvSpPr txBox="1"/>
-          <p:nvPr/>
-        </p:nvSpPr>
-        <p:spPr>
-          <a:xfrm>
-            <a:off x="9500616" y="2446289"/>
+          <p:cNvPr id="140" name="Text 138"/>
+          <p:cNvSpPr txBox="1"/>
+          <p:nvPr/>
+        </p:nvSpPr>
+        <p:spPr>
+          <a:xfrm>
+            <a:off x="8723376" y="2446289"/>
             <a:ext cx="1097280" cy="248502"/>
           </a:xfrm>
           <a:prstGeom prst="rect">
@@ -6471,13 +7329,13 @@
       </p:sp>
       <p:sp>
         <p:nvSpPr>
-          <p:cNvPr id="119" name="Text 117"/>
-          <p:cNvSpPr txBox="1"/>
-          <p:nvPr/>
-        </p:nvSpPr>
-        <p:spPr>
-          <a:xfrm>
-            <a:off x="10597896" y="2446289"/>
+          <p:cNvPr id="141" name="Text 139"/>
+          <p:cNvSpPr txBox="1"/>
+          <p:nvPr/>
+        </p:nvSpPr>
+        <p:spPr>
+          <a:xfrm>
+            <a:off x="9820656" y="2446289"/>
             <a:ext cx="868680" cy="248502"/>
           </a:xfrm>
           <a:prstGeom prst="rect">
@@ -6510,7 +7368,46 @@
       </p:sp>
       <p:sp>
         <p:nvSpPr>
-          <p:cNvPr id="120" name="Text 118"/>
+          <p:cNvPr id="142" name="Text 140"/>
+          <p:cNvSpPr txBox="1"/>
+          <p:nvPr/>
+        </p:nvSpPr>
+        <p:spPr>
+          <a:xfrm>
+            <a:off x="10689336" y="2446289"/>
+            <a:ext cx="777240" cy="248502"/>
+          </a:xfrm>
+          <a:prstGeom prst="rect">
+            <a:avLst/>
+          </a:prstGeom>
+          <a:noFill/>
+          <a:ln/>
+        </p:spPr>
+        <p:txBody>
+          <a:bodyPr wrap="square" lIns="0" tIns="0" rIns="0" bIns="0" rtlCol="0" anchor="ctr"/>
+          <a:lstStyle/>
+          <a:p>
+            <a:pPr algn="r" indent="0" marL="0">
+              <a:buNone/>
+            </a:pPr>
+            <a:r>
+              <a:rPr lang="en-US" sz="1300" dirty="0">
+                <a:solidFill>
+                  <a:srgbClr val="595959"/>
+                </a:solidFill>
+                <a:latin typeface="Inter" pitchFamily="34" charset="0"/>
+                <a:ea typeface="Inter" pitchFamily="34" charset="-122"/>
+                <a:cs typeface="Inter" pitchFamily="34" charset="-120"/>
+              </a:rPr>
+              <a:t>3 of 3</a:t>
+            </a:r>
+            <a:endParaRPr lang="en-US" sz="1300" dirty="0"/>
+          </a:p>
+        </p:txBody>
+      </p:sp>
+      <p:sp>
+        <p:nvSpPr>
+          <p:cNvPr id="143" name="Text 141"/>
           <p:cNvSpPr txBox="1"/>
           <p:nvPr/>
         </p:nvSpPr>
@@ -6549,14 +7446,14 @@
       </p:sp>
       <p:sp>
         <p:nvSpPr>
-          <p:cNvPr id="121" name="Text 119"/>
+          <p:cNvPr id="144" name="Text 142"/>
           <p:cNvSpPr txBox="1"/>
           <p:nvPr/>
         </p:nvSpPr>
         <p:spPr>
           <a:xfrm>
             <a:off x="6565392" y="2694791"/>
-            <a:ext cx="2011680" cy="248502"/>
+            <a:ext cx="1783080" cy="248502"/>
           </a:xfrm>
           <a:prstGeom prst="rect">
             <a:avLst/>
@@ -6572,7 +7469,7 @@
               <a:buNone/>
             </a:pPr>
             <a:r>
-              <a:rPr lang="en-US" sz="1300" dirty="0">
+              <a:rPr lang="en-US" sz="1200" dirty="0">
                 <a:solidFill>
                   <a:srgbClr val="1A1A1A"/>
                 </a:solidFill>
@@ -6582,20 +7479,20 @@
               </a:rPr>
               <a:t>LEXUS</a:t>
             </a:r>
-            <a:endParaRPr lang="en-US" sz="1300" dirty="0"/>
-          </a:p>
-        </p:txBody>
-      </p:sp>
-      <p:sp>
-        <p:nvSpPr>
-          <p:cNvPr id="122" name="Shape 120"/>
+            <a:endParaRPr lang="en-US" sz="1200" dirty="0"/>
+          </a:p>
+        </p:txBody>
+      </p:sp>
+      <p:sp>
+        <p:nvSpPr>
+          <p:cNvPr id="145" name="Shape 143"/>
           <p:cNvSpPr/>
           <p:nvPr/>
         </p:nvSpPr>
         <p:spPr>
           <a:xfrm>
-            <a:off x="8898356" y="2750703"/>
-            <a:ext cx="87048" cy="136676"/>
+            <a:off x="8498630" y="2750703"/>
+            <a:ext cx="27015" cy="136676"/>
           </a:xfrm>
           <a:prstGeom prst="rect">
             <a:avLst/>
@@ -6608,13 +7505,13 @@
       </p:sp>
       <p:sp>
         <p:nvSpPr>
-          <p:cNvPr id="123" name="Text 121"/>
-          <p:cNvSpPr txBox="1"/>
-          <p:nvPr/>
-        </p:nvSpPr>
-        <p:spPr>
-          <a:xfrm>
-            <a:off x="9500616" y="2694791"/>
+          <p:cNvPr id="146" name="Text 144"/>
+          <p:cNvSpPr txBox="1"/>
+          <p:nvPr/>
+        </p:nvSpPr>
+        <p:spPr>
+          <a:xfrm>
+            <a:off x="8723376" y="2694791"/>
             <a:ext cx="1097280" cy="248502"/>
           </a:xfrm>
           <a:prstGeom prst="rect">
@@ -6647,13 +7544,13 @@
       </p:sp>
       <p:sp>
         <p:nvSpPr>
-          <p:cNvPr id="124" name="Text 122"/>
-          <p:cNvSpPr txBox="1"/>
-          <p:nvPr/>
-        </p:nvSpPr>
-        <p:spPr>
-          <a:xfrm>
-            <a:off x="10597896" y="2694791"/>
+          <p:cNvPr id="147" name="Text 145"/>
+          <p:cNvSpPr txBox="1"/>
+          <p:nvPr/>
+        </p:nvSpPr>
+        <p:spPr>
+          <a:xfrm>
+            <a:off x="9820656" y="2694791"/>
             <a:ext cx="868680" cy="248502"/>
           </a:xfrm>
           <a:prstGeom prst="rect">
@@ -6686,7 +7583,46 @@
       </p:sp>
       <p:sp>
         <p:nvSpPr>
-          <p:cNvPr id="125" name="Text 123"/>
+          <p:cNvPr id="148" name="Text 146"/>
+          <p:cNvSpPr txBox="1"/>
+          <p:nvPr/>
+        </p:nvSpPr>
+        <p:spPr>
+          <a:xfrm>
+            <a:off x="10689336" y="2694791"/>
+            <a:ext cx="777240" cy="248502"/>
+          </a:xfrm>
+          <a:prstGeom prst="rect">
+            <a:avLst/>
+          </a:prstGeom>
+          <a:noFill/>
+          <a:ln/>
+        </p:spPr>
+        <p:txBody>
+          <a:bodyPr wrap="square" lIns="0" tIns="0" rIns="0" bIns="0" rtlCol="0" anchor="ctr"/>
+          <a:lstStyle/>
+          <a:p>
+            <a:pPr algn="r" indent="0" marL="0">
+              <a:buNone/>
+            </a:pPr>
+            <a:r>
+              <a:rPr lang="en-US" sz="1300" dirty="0">
+                <a:solidFill>
+                  <a:srgbClr val="595959"/>
+                </a:solidFill>
+                <a:latin typeface="Inter" pitchFamily="34" charset="0"/>
+                <a:ea typeface="Inter" pitchFamily="34" charset="-122"/>
+                <a:cs typeface="Inter" pitchFamily="34" charset="-120"/>
+              </a:rPr>
+              <a:t>4 of 4</a:t>
+            </a:r>
+            <a:endParaRPr lang="en-US" sz="1300" dirty="0"/>
+          </a:p>
+        </p:txBody>
+      </p:sp>
+      <p:sp>
+        <p:nvSpPr>
+          <p:cNvPr id="149" name="Text 147"/>
           <p:cNvSpPr txBox="1"/>
           <p:nvPr/>
         </p:nvSpPr>
@@ -6725,14 +7661,14 @@
       </p:sp>
       <p:sp>
         <p:nvSpPr>
-          <p:cNvPr id="126" name="Text 124"/>
+          <p:cNvPr id="150" name="Text 148"/>
           <p:cNvSpPr txBox="1"/>
           <p:nvPr/>
         </p:nvSpPr>
         <p:spPr>
           <a:xfrm>
             <a:off x="6565392" y="2943292"/>
-            <a:ext cx="2011680" cy="248502"/>
+            <a:ext cx="1783080" cy="248502"/>
           </a:xfrm>
           <a:prstGeom prst="rect">
             <a:avLst/>
@@ -6748,7 +7684,7 @@
               <a:buNone/>
             </a:pPr>
             <a:r>
-              <a:rPr lang="en-US" sz="1300" dirty="0">
+              <a:rPr lang="en-US" sz="1200" dirty="0">
                 <a:solidFill>
                   <a:srgbClr val="1A1A1A"/>
                 </a:solidFill>
@@ -6758,20 +7694,20 @@
               </a:rPr>
               <a:t>HONDA SPOKANE</a:t>
             </a:r>
-            <a:endParaRPr lang="en-US" sz="1300" dirty="0"/>
-          </a:p>
-        </p:txBody>
-      </p:sp>
-      <p:sp>
-        <p:nvSpPr>
-          <p:cNvPr id="127" name="Shape 125"/>
+            <a:endParaRPr lang="en-US" sz="1200" dirty="0"/>
+          </a:p>
+        </p:txBody>
+      </p:sp>
+      <p:sp>
+        <p:nvSpPr>
+          <p:cNvPr id="151" name="Shape 149"/>
           <p:cNvSpPr/>
           <p:nvPr/>
         </p:nvSpPr>
         <p:spPr>
           <a:xfrm>
-            <a:off x="8869908" y="2999205"/>
-            <a:ext cx="115496" cy="136676"/>
+            <a:off x="8489802" y="2999205"/>
+            <a:ext cx="35844" cy="136676"/>
           </a:xfrm>
           <a:prstGeom prst="rect">
             <a:avLst/>
@@ -6784,13 +7720,13 @@
       </p:sp>
       <p:sp>
         <p:nvSpPr>
-          <p:cNvPr id="128" name="Text 126"/>
-          <p:cNvSpPr txBox="1"/>
-          <p:nvPr/>
-        </p:nvSpPr>
-        <p:spPr>
-          <a:xfrm>
-            <a:off x="9500616" y="2943292"/>
+          <p:cNvPr id="152" name="Text 150"/>
+          <p:cNvSpPr txBox="1"/>
+          <p:nvPr/>
+        </p:nvSpPr>
+        <p:spPr>
+          <a:xfrm>
+            <a:off x="8723376" y="2943292"/>
             <a:ext cx="1097280" cy="248502"/>
           </a:xfrm>
           <a:prstGeom prst="rect">
@@ -6823,13 +7759,13 @@
       </p:sp>
       <p:sp>
         <p:nvSpPr>
-          <p:cNvPr id="129" name="Text 127"/>
-          <p:cNvSpPr txBox="1"/>
-          <p:nvPr/>
-        </p:nvSpPr>
-        <p:spPr>
-          <a:xfrm>
-            <a:off x="10597896" y="2943292"/>
+          <p:cNvPr id="153" name="Text 151"/>
+          <p:cNvSpPr txBox="1"/>
+          <p:nvPr/>
+        </p:nvSpPr>
+        <p:spPr>
+          <a:xfrm>
+            <a:off x="9820656" y="2943292"/>
             <a:ext cx="868680" cy="248502"/>
           </a:xfrm>
           <a:prstGeom prst="rect">
@@ -6862,7 +7798,46 @@
       </p:sp>
       <p:sp>
         <p:nvSpPr>
-          <p:cNvPr id="130" name="Text 128"/>
+          <p:cNvPr id="154" name="Text 152"/>
+          <p:cNvSpPr txBox="1"/>
+          <p:nvPr/>
+        </p:nvSpPr>
+        <p:spPr>
+          <a:xfrm>
+            <a:off x="10689336" y="2943292"/>
+            <a:ext cx="777240" cy="248502"/>
+          </a:xfrm>
+          <a:prstGeom prst="rect">
+            <a:avLst/>
+          </a:prstGeom>
+          <a:noFill/>
+          <a:ln/>
+        </p:spPr>
+        <p:txBody>
+          <a:bodyPr wrap="square" lIns="0" tIns="0" rIns="0" bIns="0" rtlCol="0" anchor="ctr"/>
+          <a:lstStyle/>
+          <a:p>
+            <a:pPr algn="r" indent="0" marL="0">
+              <a:buNone/>
+            </a:pPr>
+            <a:r>
+              <a:rPr lang="en-US" sz="1300" dirty="0">
+                <a:solidFill>
+                  <a:srgbClr val="595959"/>
+                </a:solidFill>
+                <a:latin typeface="Inter" pitchFamily="34" charset="0"/>
+                <a:ea typeface="Inter" pitchFamily="34" charset="-122"/>
+                <a:cs typeface="Inter" pitchFamily="34" charset="-120"/>
+              </a:rPr>
+              <a:t>3 of 4</a:t>
+            </a:r>
+            <a:endParaRPr lang="en-US" sz="1300" dirty="0"/>
+          </a:p>
+        </p:txBody>
+      </p:sp>
+      <p:sp>
+        <p:nvSpPr>
+          <p:cNvPr id="155" name="Text 153"/>
           <p:cNvSpPr txBox="1"/>
           <p:nvPr/>
         </p:nvSpPr>
@@ -6901,14 +7876,14 @@
       </p:sp>
       <p:sp>
         <p:nvSpPr>
-          <p:cNvPr id="131" name="Text 129"/>
+          <p:cNvPr id="156" name="Text 154"/>
           <p:cNvSpPr txBox="1"/>
           <p:nvPr/>
         </p:nvSpPr>
         <p:spPr>
           <a:xfrm>
             <a:off x="6565392" y="3191794"/>
-            <a:ext cx="2011680" cy="248502"/>
+            <a:ext cx="1783080" cy="248502"/>
           </a:xfrm>
           <a:prstGeom prst="rect">
             <a:avLst/>
@@ -6924,7 +7899,7 @@
               <a:buNone/>
             </a:pPr>
             <a:r>
-              <a:rPr lang="en-US" sz="1300" dirty="0">
+              <a:rPr lang="en-US" sz="1200" dirty="0">
                 <a:solidFill>
                   <a:srgbClr val="1A1A1A"/>
                 </a:solidFill>
@@ -6934,20 +7909,20 @@
               </a:rPr>
               <a:t>NISSAN</a:t>
             </a:r>
-            <a:endParaRPr lang="en-US" sz="1300" dirty="0"/>
-          </a:p>
-        </p:txBody>
-      </p:sp>
-      <p:sp>
-        <p:nvSpPr>
-          <p:cNvPr id="132" name="Shape 130"/>
+            <a:endParaRPr lang="en-US" sz="1200" dirty="0"/>
+          </a:p>
+        </p:txBody>
+      </p:sp>
+      <p:sp>
+        <p:nvSpPr>
+          <p:cNvPr id="157" name="Shape 155"/>
           <p:cNvSpPr/>
           <p:nvPr/>
         </p:nvSpPr>
         <p:spPr>
           <a:xfrm>
-            <a:off x="8861676" y="3247707"/>
-            <a:ext cx="123728" cy="136676"/>
+            <a:off x="8487247" y="3247707"/>
+            <a:ext cx="38398" cy="136676"/>
           </a:xfrm>
           <a:prstGeom prst="rect">
             <a:avLst/>
@@ -6960,13 +7935,13 @@
       </p:sp>
       <p:sp>
         <p:nvSpPr>
-          <p:cNvPr id="133" name="Text 131"/>
-          <p:cNvSpPr txBox="1"/>
-          <p:nvPr/>
-        </p:nvSpPr>
-        <p:spPr>
-          <a:xfrm>
-            <a:off x="9500616" y="3191794"/>
+          <p:cNvPr id="158" name="Text 156"/>
+          <p:cNvSpPr txBox="1"/>
+          <p:nvPr/>
+        </p:nvSpPr>
+        <p:spPr>
+          <a:xfrm>
+            <a:off x="8723376" y="3191794"/>
             <a:ext cx="1097280" cy="248502"/>
           </a:xfrm>
           <a:prstGeom prst="rect">
@@ -6999,13 +7974,13 @@
       </p:sp>
       <p:sp>
         <p:nvSpPr>
-          <p:cNvPr id="134" name="Text 132"/>
-          <p:cNvSpPr txBox="1"/>
-          <p:nvPr/>
-        </p:nvSpPr>
-        <p:spPr>
-          <a:xfrm>
-            <a:off x="10597896" y="3191794"/>
+          <p:cNvPr id="159" name="Text 157"/>
+          <p:cNvSpPr txBox="1"/>
+          <p:nvPr/>
+        </p:nvSpPr>
+        <p:spPr>
+          <a:xfrm>
+            <a:off x="9820656" y="3191794"/>
             <a:ext cx="868680" cy="248502"/>
           </a:xfrm>
           <a:prstGeom prst="rect">
@@ -7038,7 +8013,46 @@
       </p:sp>
       <p:sp>
         <p:nvSpPr>
-          <p:cNvPr id="135" name="Text 133"/>
+          <p:cNvPr id="160" name="Text 158"/>
+          <p:cNvSpPr txBox="1"/>
+          <p:nvPr/>
+        </p:nvSpPr>
+        <p:spPr>
+          <a:xfrm>
+            <a:off x="10689336" y="3191794"/>
+            <a:ext cx="777240" cy="248502"/>
+          </a:xfrm>
+          <a:prstGeom prst="rect">
+            <a:avLst/>
+          </a:prstGeom>
+          <a:noFill/>
+          <a:ln/>
+        </p:spPr>
+        <p:txBody>
+          <a:bodyPr wrap="square" lIns="0" tIns="0" rIns="0" bIns="0" rtlCol="0" anchor="ctr"/>
+          <a:lstStyle/>
+          <a:p>
+            <a:pPr algn="r" indent="0" marL="0">
+              <a:buNone/>
+            </a:pPr>
+            <a:r>
+              <a:rPr lang="en-US" sz="1300" dirty="0">
+                <a:solidFill>
+                  <a:srgbClr val="595959"/>
+                </a:solidFill>
+                <a:latin typeface="Inter" pitchFamily="34" charset="0"/>
+                <a:ea typeface="Inter" pitchFamily="34" charset="-122"/>
+                <a:cs typeface="Inter" pitchFamily="34" charset="-120"/>
+              </a:rPr>
+              <a:t>3 of 4</a:t>
+            </a:r>
+            <a:endParaRPr lang="en-US" sz="1300" dirty="0"/>
+          </a:p>
+        </p:txBody>
+      </p:sp>
+      <p:sp>
+        <p:nvSpPr>
+          <p:cNvPr id="161" name="Text 159"/>
           <p:cNvSpPr txBox="1"/>
           <p:nvPr/>
         </p:nvSpPr>
@@ -7077,14 +8091,14 @@
       </p:sp>
       <p:sp>
         <p:nvSpPr>
-          <p:cNvPr id="136" name="Text 134"/>
+          <p:cNvPr id="162" name="Text 160"/>
           <p:cNvSpPr txBox="1"/>
           <p:nvPr/>
         </p:nvSpPr>
         <p:spPr>
           <a:xfrm>
             <a:off x="6565392" y="3440296"/>
-            <a:ext cx="2011680" cy="248502"/>
+            <a:ext cx="1783080" cy="248502"/>
           </a:xfrm>
           <a:prstGeom prst="rect">
             <a:avLst/>
@@ -7100,7 +8114,7 @@
               <a:buNone/>
             </a:pPr>
             <a:r>
-              <a:rPr lang="en-US" sz="1300" dirty="0">
+              <a:rPr lang="en-US" sz="1200" dirty="0">
                 <a:solidFill>
                   <a:srgbClr val="1A1A1A"/>
                 </a:solidFill>
@@ -7110,20 +8124,20 @@
               </a:rPr>
               <a:t>HONDA FLAGSTAFF</a:t>
             </a:r>
-            <a:endParaRPr lang="en-US" sz="1300" dirty="0"/>
-          </a:p>
-        </p:txBody>
-      </p:sp>
-      <p:sp>
-        <p:nvSpPr>
-          <p:cNvPr id="137" name="Shape 135"/>
+            <a:endParaRPr lang="en-US" sz="1200" dirty="0"/>
+          </a:p>
+        </p:txBody>
+      </p:sp>
+      <p:sp>
+        <p:nvSpPr>
+          <p:cNvPr id="163" name="Shape 161"/>
           <p:cNvSpPr/>
           <p:nvPr/>
         </p:nvSpPr>
         <p:spPr>
           <a:xfrm>
-            <a:off x="8861519" y="3496208"/>
-            <a:ext cx="123885" cy="136676"/>
+            <a:off x="8487198" y="3496208"/>
+            <a:ext cx="38447" cy="136676"/>
           </a:xfrm>
           <a:prstGeom prst="rect">
             <a:avLst/>
@@ -7136,13 +8150,13 @@
       </p:sp>
       <p:sp>
         <p:nvSpPr>
-          <p:cNvPr id="138" name="Text 136"/>
-          <p:cNvSpPr txBox="1"/>
-          <p:nvPr/>
-        </p:nvSpPr>
-        <p:spPr>
-          <a:xfrm>
-            <a:off x="9500616" y="3440296"/>
+          <p:cNvPr id="164" name="Text 162"/>
+          <p:cNvSpPr txBox="1"/>
+          <p:nvPr/>
+        </p:nvSpPr>
+        <p:spPr>
+          <a:xfrm>
+            <a:off x="8723376" y="3440296"/>
             <a:ext cx="1097280" cy="248502"/>
           </a:xfrm>
           <a:prstGeom prst="rect">
@@ -7175,13 +8189,13 @@
       </p:sp>
       <p:sp>
         <p:nvSpPr>
-          <p:cNvPr id="139" name="Text 137"/>
-          <p:cNvSpPr txBox="1"/>
-          <p:nvPr/>
-        </p:nvSpPr>
-        <p:spPr>
-          <a:xfrm>
-            <a:off x="10597896" y="3440296"/>
+          <p:cNvPr id="165" name="Text 163"/>
+          <p:cNvSpPr txBox="1"/>
+          <p:nvPr/>
+        </p:nvSpPr>
+        <p:spPr>
+          <a:xfrm>
+            <a:off x="9820656" y="3440296"/>
             <a:ext cx="868680" cy="248502"/>
           </a:xfrm>
           <a:prstGeom prst="rect">
@@ -7214,7 +8228,46 @@
       </p:sp>
       <p:sp>
         <p:nvSpPr>
-          <p:cNvPr id="140" name="Text 138"/>
+          <p:cNvPr id="166" name="Text 164"/>
+          <p:cNvSpPr txBox="1"/>
+          <p:nvPr/>
+        </p:nvSpPr>
+        <p:spPr>
+          <a:xfrm>
+            <a:off x="10689336" y="3440296"/>
+            <a:ext cx="777240" cy="248502"/>
+          </a:xfrm>
+          <a:prstGeom prst="rect">
+            <a:avLst/>
+          </a:prstGeom>
+          <a:noFill/>
+          <a:ln/>
+        </p:spPr>
+        <p:txBody>
+          <a:bodyPr wrap="square" lIns="0" tIns="0" rIns="0" bIns="0" rtlCol="0" anchor="ctr"/>
+          <a:lstStyle/>
+          <a:p>
+            <a:pPr algn="r" indent="0" marL="0">
+              <a:buNone/>
+            </a:pPr>
+            <a:r>
+              <a:rPr lang="en-US" sz="1300" dirty="0">
+                <a:solidFill>
+                  <a:srgbClr val="595959"/>
+                </a:solidFill>
+                <a:latin typeface="Inter" pitchFamily="34" charset="0"/>
+                <a:ea typeface="Inter" pitchFamily="34" charset="-122"/>
+                <a:cs typeface="Inter" pitchFamily="34" charset="-120"/>
+              </a:rPr>
+              <a:t>4 of 4</a:t>
+            </a:r>
+            <a:endParaRPr lang="en-US" sz="1300" dirty="0"/>
+          </a:p>
+        </p:txBody>
+      </p:sp>
+      <p:sp>
+        <p:nvSpPr>
+          <p:cNvPr id="167" name="Text 165"/>
           <p:cNvSpPr txBox="1"/>
           <p:nvPr/>
         </p:nvSpPr>
@@ -7253,14 +8306,14 @@
       </p:sp>
       <p:sp>
         <p:nvSpPr>
-          <p:cNvPr id="141" name="Text 139"/>
+          <p:cNvPr id="168" name="Text 166"/>
           <p:cNvSpPr txBox="1"/>
           <p:nvPr/>
         </p:nvSpPr>
         <p:spPr>
           <a:xfrm>
             <a:off x="6565392" y="3688797"/>
-            <a:ext cx="2011680" cy="248502"/>
+            <a:ext cx="1783080" cy="248502"/>
           </a:xfrm>
           <a:prstGeom prst="rect">
             <a:avLst/>
@@ -7276,7 +8329,7 @@
               <a:buNone/>
             </a:pPr>
             <a:r>
-              <a:rPr lang="en-US" sz="1300" dirty="0">
+              <a:rPr lang="en-US" sz="1200" dirty="0">
                 <a:solidFill>
                   <a:srgbClr val="1A1A1A"/>
                 </a:solidFill>
@@ -7286,20 +8339,20 @@
               </a:rPr>
               <a:t>AUDI RENO</a:t>
             </a:r>
-            <a:endParaRPr lang="en-US" sz="1300" dirty="0"/>
-          </a:p>
-        </p:txBody>
-      </p:sp>
-      <p:sp>
-        <p:nvSpPr>
-          <p:cNvPr id="142" name="Shape 140"/>
+            <a:endParaRPr lang="en-US" sz="1200" dirty="0"/>
+          </a:p>
+        </p:txBody>
+      </p:sp>
+      <p:sp>
+        <p:nvSpPr>
+          <p:cNvPr id="169" name="Shape 167"/>
           <p:cNvSpPr/>
           <p:nvPr/>
         </p:nvSpPr>
         <p:spPr>
           <a:xfrm>
-            <a:off x="8851844" y="3744710"/>
-            <a:ext cx="133560" cy="136676"/>
+            <a:off x="8484196" y="3744710"/>
+            <a:ext cx="41450" cy="136676"/>
           </a:xfrm>
           <a:prstGeom prst="rect">
             <a:avLst/>
@@ -7312,13 +8365,13 @@
       </p:sp>
       <p:sp>
         <p:nvSpPr>
-          <p:cNvPr id="143" name="Text 141"/>
-          <p:cNvSpPr txBox="1"/>
-          <p:nvPr/>
-        </p:nvSpPr>
-        <p:spPr>
-          <a:xfrm>
-            <a:off x="9500616" y="3688797"/>
+          <p:cNvPr id="170" name="Text 168"/>
+          <p:cNvSpPr txBox="1"/>
+          <p:nvPr/>
+        </p:nvSpPr>
+        <p:spPr>
+          <a:xfrm>
+            <a:off x="8723376" y="3688797"/>
             <a:ext cx="1097280" cy="248502"/>
           </a:xfrm>
           <a:prstGeom prst="rect">
@@ -7351,13 +8404,13 @@
       </p:sp>
       <p:sp>
         <p:nvSpPr>
-          <p:cNvPr id="144" name="Text 142"/>
-          <p:cNvSpPr txBox="1"/>
-          <p:nvPr/>
-        </p:nvSpPr>
-        <p:spPr>
-          <a:xfrm>
-            <a:off x="10597896" y="3688797"/>
+          <p:cNvPr id="171" name="Text 169"/>
+          <p:cNvSpPr txBox="1"/>
+          <p:nvPr/>
+        </p:nvSpPr>
+        <p:spPr>
+          <a:xfrm>
+            <a:off x="9820656" y="3688797"/>
             <a:ext cx="868680" cy="248502"/>
           </a:xfrm>
           <a:prstGeom prst="rect">
@@ -7390,7 +8443,46 @@
       </p:sp>
       <p:sp>
         <p:nvSpPr>
-          <p:cNvPr id="145" name="Text 143"/>
+          <p:cNvPr id="172" name="Text 170"/>
+          <p:cNvSpPr txBox="1"/>
+          <p:nvPr/>
+        </p:nvSpPr>
+        <p:spPr>
+          <a:xfrm>
+            <a:off x="10689336" y="3688797"/>
+            <a:ext cx="777240" cy="248502"/>
+          </a:xfrm>
+          <a:prstGeom prst="rect">
+            <a:avLst/>
+          </a:prstGeom>
+          <a:noFill/>
+          <a:ln/>
+        </p:spPr>
+        <p:txBody>
+          <a:bodyPr wrap="square" lIns="0" tIns="0" rIns="0" bIns="0" rtlCol="0" anchor="ctr"/>
+          <a:lstStyle/>
+          <a:p>
+            <a:pPr algn="r" indent="0" marL="0">
+              <a:buNone/>
+            </a:pPr>
+            <a:r>
+              <a:rPr lang="en-US" sz="1300" dirty="0">
+                <a:solidFill>
+                  <a:srgbClr val="595959"/>
+                </a:solidFill>
+                <a:latin typeface="Inter" pitchFamily="34" charset="0"/>
+                <a:ea typeface="Inter" pitchFamily="34" charset="-122"/>
+                <a:cs typeface="Inter" pitchFamily="34" charset="-120"/>
+              </a:rPr>
+              <a:t>2 of 2</a:t>
+            </a:r>
+            <a:endParaRPr lang="en-US" sz="1300" dirty="0"/>
+          </a:p>
+        </p:txBody>
+      </p:sp>
+      <p:sp>
+        <p:nvSpPr>
+          <p:cNvPr id="173" name="Text 171"/>
           <p:cNvSpPr txBox="1"/>
           <p:nvPr/>
         </p:nvSpPr>
@@ -7429,14 +8521,14 @@
       </p:sp>
       <p:sp>
         <p:nvSpPr>
-          <p:cNvPr id="146" name="Text 144"/>
+          <p:cNvPr id="174" name="Text 172"/>
           <p:cNvSpPr txBox="1"/>
           <p:nvPr/>
         </p:nvSpPr>
         <p:spPr>
           <a:xfrm>
             <a:off x="6565392" y="3937299"/>
-            <a:ext cx="2011680" cy="248502"/>
+            <a:ext cx="1783080" cy="248502"/>
           </a:xfrm>
           <a:prstGeom prst="rect">
             <a:avLst/>
@@ -7452,7 +8544,7 @@
               <a:buNone/>
             </a:pPr>
             <a:r>
-              <a:rPr lang="en-US" sz="1300" dirty="0">
+              <a:rPr lang="en-US" sz="1200" dirty="0">
                 <a:solidFill>
                   <a:srgbClr val="1A1A1A"/>
                 </a:solidFill>
@@ -7462,20 +8554,20 @@
               </a:rPr>
               <a:t>TOYOTA PRESCOTT</a:t>
             </a:r>
-            <a:endParaRPr lang="en-US" sz="1300" dirty="0"/>
-          </a:p>
-        </p:txBody>
-      </p:sp>
-      <p:sp>
-        <p:nvSpPr>
-          <p:cNvPr id="147" name="Shape 145"/>
+            <a:endParaRPr lang="en-US" sz="1200" dirty="0"/>
+          </a:p>
+        </p:txBody>
+      </p:sp>
+      <p:sp>
+        <p:nvSpPr>
+          <p:cNvPr id="175" name="Shape 173"/>
           <p:cNvSpPr/>
           <p:nvPr/>
         </p:nvSpPr>
         <p:spPr>
           <a:xfrm>
-            <a:off x="8841233" y="3993212"/>
-            <a:ext cx="144171" cy="136676"/>
+            <a:off x="8480903" y="3993212"/>
+            <a:ext cx="44743" cy="136676"/>
           </a:xfrm>
           <a:prstGeom prst="rect">
             <a:avLst/>
@@ -7488,13 +8580,13 @@
       </p:sp>
       <p:sp>
         <p:nvSpPr>
-          <p:cNvPr id="148" name="Text 146"/>
-          <p:cNvSpPr txBox="1"/>
-          <p:nvPr/>
-        </p:nvSpPr>
-        <p:spPr>
-          <a:xfrm>
-            <a:off x="9500616" y="3937299"/>
+          <p:cNvPr id="176" name="Text 174"/>
+          <p:cNvSpPr txBox="1"/>
+          <p:nvPr/>
+        </p:nvSpPr>
+        <p:spPr>
+          <a:xfrm>
+            <a:off x="8723376" y="3937299"/>
             <a:ext cx="1097280" cy="248502"/>
           </a:xfrm>
           <a:prstGeom prst="rect">
@@ -7527,13 +8619,13 @@
       </p:sp>
       <p:sp>
         <p:nvSpPr>
-          <p:cNvPr id="149" name="Text 147"/>
-          <p:cNvSpPr txBox="1"/>
-          <p:nvPr/>
-        </p:nvSpPr>
-        <p:spPr>
-          <a:xfrm>
-            <a:off x="10597896" y="3937299"/>
+          <p:cNvPr id="177" name="Text 175"/>
+          <p:cNvSpPr txBox="1"/>
+          <p:nvPr/>
+        </p:nvSpPr>
+        <p:spPr>
+          <a:xfrm>
+            <a:off x="9820656" y="3937299"/>
             <a:ext cx="868680" cy="248502"/>
           </a:xfrm>
           <a:prstGeom prst="rect">
@@ -7566,7 +8658,46 @@
       </p:sp>
       <p:sp>
         <p:nvSpPr>
-          <p:cNvPr id="150" name="Text 148"/>
+          <p:cNvPr id="178" name="Text 176"/>
+          <p:cNvSpPr txBox="1"/>
+          <p:nvPr/>
+        </p:nvSpPr>
+        <p:spPr>
+          <a:xfrm>
+            <a:off x="10689336" y="3937299"/>
+            <a:ext cx="777240" cy="248502"/>
+          </a:xfrm>
+          <a:prstGeom prst="rect">
+            <a:avLst/>
+          </a:prstGeom>
+          <a:noFill/>
+          <a:ln/>
+        </p:spPr>
+        <p:txBody>
+          <a:bodyPr wrap="square" lIns="0" tIns="0" rIns="0" bIns="0" rtlCol="0" anchor="ctr"/>
+          <a:lstStyle/>
+          <a:p>
+            <a:pPr algn="r" indent="0" marL="0">
+              <a:buNone/>
+            </a:pPr>
+            <a:r>
+              <a:rPr lang="en-US" sz="1300" dirty="0">
+                <a:solidFill>
+                  <a:srgbClr val="595959"/>
+                </a:solidFill>
+                <a:latin typeface="Inter" pitchFamily="34" charset="0"/>
+                <a:ea typeface="Inter" pitchFamily="34" charset="-122"/>
+                <a:cs typeface="Inter" pitchFamily="34" charset="-120"/>
+              </a:rPr>
+              <a:t>4 of 4</a:t>
+            </a:r>
+            <a:endParaRPr lang="en-US" sz="1300" dirty="0"/>
+          </a:p>
+        </p:txBody>
+      </p:sp>
+      <p:sp>
+        <p:nvSpPr>
+          <p:cNvPr id="179" name="Text 177"/>
           <p:cNvSpPr txBox="1"/>
           <p:nvPr/>
         </p:nvSpPr>
@@ -7605,14 +8736,14 @@
       </p:sp>
       <p:sp>
         <p:nvSpPr>
-          <p:cNvPr id="151" name="Text 149"/>
+          <p:cNvPr id="180" name="Text 178"/>
           <p:cNvSpPr txBox="1"/>
           <p:nvPr/>
         </p:nvSpPr>
         <p:spPr>
           <a:xfrm>
             <a:off x="6565392" y="4185800"/>
-            <a:ext cx="2011680" cy="248502"/>
+            <a:ext cx="1783080" cy="248502"/>
           </a:xfrm>
           <a:prstGeom prst="rect">
             <a:avLst/>
@@ -7628,7 +8759,7 @@
               <a:buNone/>
             </a:pPr>
             <a:r>
-              <a:rPr lang="en-US" sz="1300" dirty="0">
+              <a:rPr lang="en-US" sz="1200" dirty="0">
                 <a:solidFill>
                   <a:srgbClr val="1A1A1A"/>
                 </a:solidFill>
@@ -7638,20 +8769,20 @@
               </a:rPr>
               <a:t>CDJR POST FALLS</a:t>
             </a:r>
-            <a:endParaRPr lang="en-US" sz="1300" dirty="0"/>
-          </a:p>
-        </p:txBody>
-      </p:sp>
-      <p:sp>
-        <p:nvSpPr>
-          <p:cNvPr id="152" name="Shape 150"/>
+            <a:endParaRPr lang="en-US" sz="1200" dirty="0"/>
+          </a:p>
+        </p:txBody>
+      </p:sp>
+      <p:sp>
+        <p:nvSpPr>
+          <p:cNvPr id="181" name="Shape 179"/>
           <p:cNvSpPr/>
           <p:nvPr/>
         </p:nvSpPr>
         <p:spPr>
           <a:xfrm>
-            <a:off x="8833790" y="4241713"/>
-            <a:ext cx="151614" cy="136676"/>
+            <a:off x="8478593" y="4241713"/>
+            <a:ext cx="47053" cy="136676"/>
           </a:xfrm>
           <a:prstGeom prst="rect">
             <a:avLst/>
@@ -7664,13 +8795,13 @@
       </p:sp>
       <p:sp>
         <p:nvSpPr>
-          <p:cNvPr id="153" name="Text 151"/>
-          <p:cNvSpPr txBox="1"/>
-          <p:nvPr/>
-        </p:nvSpPr>
-        <p:spPr>
-          <a:xfrm>
-            <a:off x="9500616" y="4185800"/>
+          <p:cNvPr id="182" name="Text 180"/>
+          <p:cNvSpPr txBox="1"/>
+          <p:nvPr/>
+        </p:nvSpPr>
+        <p:spPr>
+          <a:xfrm>
+            <a:off x="8723376" y="4185800"/>
             <a:ext cx="1097280" cy="248502"/>
           </a:xfrm>
           <a:prstGeom prst="rect">
@@ -7703,13 +8834,13 @@
       </p:sp>
       <p:sp>
         <p:nvSpPr>
-          <p:cNvPr id="154" name="Text 152"/>
-          <p:cNvSpPr txBox="1"/>
-          <p:nvPr/>
-        </p:nvSpPr>
-        <p:spPr>
-          <a:xfrm>
-            <a:off x="10597896" y="4185800"/>
+          <p:cNvPr id="183" name="Text 181"/>
+          <p:cNvSpPr txBox="1"/>
+          <p:nvPr/>
+        </p:nvSpPr>
+        <p:spPr>
+          <a:xfrm>
+            <a:off x="9820656" y="4185800"/>
             <a:ext cx="868680" cy="248502"/>
           </a:xfrm>
           <a:prstGeom prst="rect">
@@ -7742,7 +8873,46 @@
       </p:sp>
       <p:sp>
         <p:nvSpPr>
-          <p:cNvPr id="155" name="Text 153"/>
+          <p:cNvPr id="184" name="Text 182"/>
+          <p:cNvSpPr txBox="1"/>
+          <p:nvPr/>
+        </p:nvSpPr>
+        <p:spPr>
+          <a:xfrm>
+            <a:off x="10689336" y="4185800"/>
+            <a:ext cx="777240" cy="248502"/>
+          </a:xfrm>
+          <a:prstGeom prst="rect">
+            <a:avLst/>
+          </a:prstGeom>
+          <a:noFill/>
+          <a:ln/>
+        </p:spPr>
+        <p:txBody>
+          <a:bodyPr wrap="square" lIns="0" tIns="0" rIns="0" bIns="0" rtlCol="0" anchor="ctr"/>
+          <a:lstStyle/>
+          <a:p>
+            <a:pPr algn="r" indent="0" marL="0">
+              <a:buNone/>
+            </a:pPr>
+            <a:r>
+              <a:rPr lang="en-US" sz="1300" dirty="0">
+                <a:solidFill>
+                  <a:srgbClr val="595959"/>
+                </a:solidFill>
+                <a:latin typeface="Inter" pitchFamily="34" charset="0"/>
+                <a:ea typeface="Inter" pitchFamily="34" charset="-122"/>
+                <a:cs typeface="Inter" pitchFamily="34" charset="-120"/>
+              </a:rPr>
+              <a:t>4 of 4</a:t>
+            </a:r>
+            <a:endParaRPr lang="en-US" sz="1300" dirty="0"/>
+          </a:p>
+        </p:txBody>
+      </p:sp>
+      <p:sp>
+        <p:nvSpPr>
+          <p:cNvPr id="185" name="Text 183"/>
           <p:cNvSpPr txBox="1"/>
           <p:nvPr/>
         </p:nvSpPr>
@@ -7781,14 +8951,14 @@
       </p:sp>
       <p:sp>
         <p:nvSpPr>
-          <p:cNvPr id="156" name="Text 154"/>
+          <p:cNvPr id="186" name="Text 184"/>
           <p:cNvSpPr txBox="1"/>
           <p:nvPr/>
         </p:nvSpPr>
         <p:spPr>
           <a:xfrm>
             <a:off x="6565392" y="4434302"/>
-            <a:ext cx="2011680" cy="248502"/>
+            <a:ext cx="1783080" cy="248502"/>
           </a:xfrm>
           <a:prstGeom prst="rect">
             <a:avLst/>
@@ -7804,7 +8974,7 @@
               <a:buNone/>
             </a:pPr>
             <a:r>
-              <a:rPr lang="en-US" sz="1300" dirty="0">
+              <a:rPr lang="en-US" sz="1200" dirty="0">
                 <a:solidFill>
                   <a:srgbClr val="1A1A1A"/>
                 </a:solidFill>
@@ -7814,20 +8984,20 @@
               </a:rPr>
               <a:t>KIA LV</a:t>
             </a:r>
-            <a:endParaRPr lang="en-US" sz="1300" dirty="0"/>
-          </a:p>
-        </p:txBody>
-      </p:sp>
-      <p:sp>
-        <p:nvSpPr>
-          <p:cNvPr id="157" name="Shape 155"/>
+            <a:endParaRPr lang="en-US" sz="1200" dirty="0"/>
+          </a:p>
+        </p:txBody>
+      </p:sp>
+      <p:sp>
+        <p:nvSpPr>
+          <p:cNvPr id="187" name="Shape 185"/>
           <p:cNvSpPr/>
           <p:nvPr/>
         </p:nvSpPr>
         <p:spPr>
           <a:xfrm>
-            <a:off x="8832658" y="4490215"/>
-            <a:ext cx="152747" cy="136676"/>
+            <a:off x="8478241" y="4490215"/>
+            <a:ext cx="47404" cy="136676"/>
           </a:xfrm>
           <a:prstGeom prst="rect">
             <a:avLst/>
@@ -7840,13 +9010,13 @@
       </p:sp>
       <p:sp>
         <p:nvSpPr>
-          <p:cNvPr id="158" name="Text 156"/>
-          <p:cNvSpPr txBox="1"/>
-          <p:nvPr/>
-        </p:nvSpPr>
-        <p:spPr>
-          <a:xfrm>
-            <a:off x="9500616" y="4434302"/>
+          <p:cNvPr id="188" name="Text 186"/>
+          <p:cNvSpPr txBox="1"/>
+          <p:nvPr/>
+        </p:nvSpPr>
+        <p:spPr>
+          <a:xfrm>
+            <a:off x="8723376" y="4434302"/>
             <a:ext cx="1097280" cy="248502"/>
           </a:xfrm>
           <a:prstGeom prst="rect">
@@ -7879,13 +9049,13 @@
       </p:sp>
       <p:sp>
         <p:nvSpPr>
-          <p:cNvPr id="159" name="Text 157"/>
-          <p:cNvSpPr txBox="1"/>
-          <p:nvPr/>
-        </p:nvSpPr>
-        <p:spPr>
-          <a:xfrm>
-            <a:off x="10597896" y="4434302"/>
+          <p:cNvPr id="189" name="Text 187"/>
+          <p:cNvSpPr txBox="1"/>
+          <p:nvPr/>
+        </p:nvSpPr>
+        <p:spPr>
+          <a:xfrm>
+            <a:off x="9820656" y="4434302"/>
             <a:ext cx="868680" cy="248502"/>
           </a:xfrm>
           <a:prstGeom prst="rect">
@@ -7918,7 +9088,46 @@
       </p:sp>
       <p:sp>
         <p:nvSpPr>
-          <p:cNvPr id="160" name="Text 158"/>
+          <p:cNvPr id="190" name="Text 188"/>
+          <p:cNvSpPr txBox="1"/>
+          <p:nvPr/>
+        </p:nvSpPr>
+        <p:spPr>
+          <a:xfrm>
+            <a:off x="10689336" y="4434302"/>
+            <a:ext cx="777240" cy="248502"/>
+          </a:xfrm>
+          <a:prstGeom prst="rect">
+            <a:avLst/>
+          </a:prstGeom>
+          <a:noFill/>
+          <a:ln/>
+        </p:spPr>
+        <p:txBody>
+          <a:bodyPr wrap="square" lIns="0" tIns="0" rIns="0" bIns="0" rtlCol="0" anchor="ctr"/>
+          <a:lstStyle/>
+          <a:p>
+            <a:pPr algn="r" indent="0" marL="0">
+              <a:buNone/>
+            </a:pPr>
+            <a:r>
+              <a:rPr lang="en-US" sz="1300" dirty="0">
+                <a:solidFill>
+                  <a:srgbClr val="595959"/>
+                </a:solidFill>
+                <a:latin typeface="Inter" pitchFamily="34" charset="0"/>
+                <a:ea typeface="Inter" pitchFamily="34" charset="-122"/>
+                <a:cs typeface="Inter" pitchFamily="34" charset="-120"/>
+              </a:rPr>
+              <a:t>4 of 4</a:t>
+            </a:r>
+            <a:endParaRPr lang="en-US" sz="1300" dirty="0"/>
+          </a:p>
+        </p:txBody>
+      </p:sp>
+      <p:sp>
+        <p:nvSpPr>
+          <p:cNvPr id="191" name="Text 189"/>
           <p:cNvSpPr txBox="1"/>
           <p:nvPr/>
         </p:nvSpPr>
@@ -7957,14 +9166,14 @@
       </p:sp>
       <p:sp>
         <p:nvSpPr>
-          <p:cNvPr id="161" name="Text 159"/>
+          <p:cNvPr id="192" name="Text 190"/>
           <p:cNvSpPr txBox="1"/>
           <p:nvPr/>
         </p:nvSpPr>
         <p:spPr>
           <a:xfrm>
             <a:off x="6565392" y="4682804"/>
-            <a:ext cx="2011680" cy="248502"/>
+            <a:ext cx="1783080" cy="248502"/>
           </a:xfrm>
           <a:prstGeom prst="rect">
             <a:avLst/>
@@ -7980,7 +9189,7 @@
               <a:buNone/>
             </a:pPr>
             <a:r>
-              <a:rPr lang="en-US" sz="1300" dirty="0">
+              <a:rPr lang="en-US" sz="1200" dirty="0">
                 <a:solidFill>
                   <a:srgbClr val="1A1A1A"/>
                 </a:solidFill>
@@ -7990,20 +9199,20 @@
               </a:rPr>
               <a:t>TOYOTA HENDERSON</a:t>
             </a:r>
-            <a:endParaRPr lang="en-US" sz="1300" dirty="0"/>
-          </a:p>
-        </p:txBody>
-      </p:sp>
-      <p:sp>
-        <p:nvSpPr>
-          <p:cNvPr id="162" name="Shape 160"/>
+            <a:endParaRPr lang="en-US" sz="1200" dirty="0"/>
+          </a:p>
+        </p:txBody>
+      </p:sp>
+      <p:sp>
+        <p:nvSpPr>
+          <p:cNvPr id="193" name="Shape 191"/>
           <p:cNvSpPr/>
           <p:nvPr/>
         </p:nvSpPr>
         <p:spPr>
           <a:xfrm>
-            <a:off x="8798077" y="4738717"/>
-            <a:ext cx="187327" cy="136676"/>
+            <a:off x="8467509" y="4738717"/>
+            <a:ext cx="58136" cy="136676"/>
           </a:xfrm>
           <a:prstGeom prst="rect">
             <a:avLst/>
@@ -8016,13 +9225,13 @@
       </p:sp>
       <p:sp>
         <p:nvSpPr>
-          <p:cNvPr id="163" name="Text 161"/>
-          <p:cNvSpPr txBox="1"/>
-          <p:nvPr/>
-        </p:nvSpPr>
-        <p:spPr>
-          <a:xfrm>
-            <a:off x="9500616" y="4682804"/>
+          <p:cNvPr id="194" name="Text 192"/>
+          <p:cNvSpPr txBox="1"/>
+          <p:nvPr/>
+        </p:nvSpPr>
+        <p:spPr>
+          <a:xfrm>
+            <a:off x="8723376" y="4682804"/>
             <a:ext cx="1097280" cy="248502"/>
           </a:xfrm>
           <a:prstGeom prst="rect">
@@ -8055,13 +9264,13 @@
       </p:sp>
       <p:sp>
         <p:nvSpPr>
-          <p:cNvPr id="164" name="Text 162"/>
-          <p:cNvSpPr txBox="1"/>
-          <p:nvPr/>
-        </p:nvSpPr>
-        <p:spPr>
-          <a:xfrm>
-            <a:off x="10597896" y="4682804"/>
+          <p:cNvPr id="195" name="Text 193"/>
+          <p:cNvSpPr txBox="1"/>
+          <p:nvPr/>
+        </p:nvSpPr>
+        <p:spPr>
+          <a:xfrm>
+            <a:off x="9820656" y="4682804"/>
             <a:ext cx="868680" cy="248502"/>
           </a:xfrm>
           <a:prstGeom prst="rect">
@@ -8094,7 +9303,46 @@
       </p:sp>
       <p:sp>
         <p:nvSpPr>
-          <p:cNvPr id="165" name="Text 163"/>
+          <p:cNvPr id="196" name="Text 194"/>
+          <p:cNvSpPr txBox="1"/>
+          <p:nvPr/>
+        </p:nvSpPr>
+        <p:spPr>
+          <a:xfrm>
+            <a:off x="10689336" y="4682804"/>
+            <a:ext cx="777240" cy="248502"/>
+          </a:xfrm>
+          <a:prstGeom prst="rect">
+            <a:avLst/>
+          </a:prstGeom>
+          <a:noFill/>
+          <a:ln/>
+        </p:spPr>
+        <p:txBody>
+          <a:bodyPr wrap="square" lIns="0" tIns="0" rIns="0" bIns="0" rtlCol="0" anchor="ctr"/>
+          <a:lstStyle/>
+          <a:p>
+            <a:pPr algn="r" indent="0" marL="0">
+              <a:buNone/>
+            </a:pPr>
+            <a:r>
+              <a:rPr lang="en-US" sz="1300" dirty="0">
+                <a:solidFill>
+                  <a:srgbClr val="595959"/>
+                </a:solidFill>
+                <a:latin typeface="Inter" pitchFamily="34" charset="0"/>
+                <a:ea typeface="Inter" pitchFamily="34" charset="-122"/>
+                <a:cs typeface="Inter" pitchFamily="34" charset="-120"/>
+              </a:rPr>
+              <a:t>3 of 4</a:t>
+            </a:r>
+            <a:endParaRPr lang="en-US" sz="1300" dirty="0"/>
+          </a:p>
+        </p:txBody>
+      </p:sp>
+      <p:sp>
+        <p:nvSpPr>
+          <p:cNvPr id="197" name="Text 195"/>
           <p:cNvSpPr txBox="1"/>
           <p:nvPr/>
         </p:nvSpPr>
@@ -8133,14 +9381,14 @@
       </p:sp>
       <p:sp>
         <p:nvSpPr>
-          <p:cNvPr id="166" name="Text 164"/>
+          <p:cNvPr id="198" name="Text 196"/>
           <p:cNvSpPr txBox="1"/>
           <p:nvPr/>
         </p:nvSpPr>
         <p:spPr>
           <a:xfrm>
             <a:off x="6565392" y="4931305"/>
-            <a:ext cx="2011680" cy="248502"/>
+            <a:ext cx="1783080" cy="248502"/>
           </a:xfrm>
           <a:prstGeom prst="rect">
             <a:avLst/>
@@ -8156,7 +9404,7 @@
               <a:buNone/>
             </a:pPr>
             <a:r>
-              <a:rPr lang="en-US" sz="1300" dirty="0">
+              <a:rPr lang="en-US" sz="1200" dirty="0">
                 <a:solidFill>
                   <a:srgbClr val="1A1A1A"/>
                 </a:solidFill>
@@ -8166,20 +9414,20 @@
               </a:rPr>
               <a:t>TOYOTA FLAGSTAFF</a:t>
             </a:r>
-            <a:endParaRPr lang="en-US" sz="1300" dirty="0"/>
-          </a:p>
-        </p:txBody>
-      </p:sp>
-      <p:sp>
-        <p:nvSpPr>
-          <p:cNvPr id="167" name="Shape 165"/>
+            <a:endParaRPr lang="en-US" sz="1200" dirty="0"/>
+          </a:p>
+        </p:txBody>
+      </p:sp>
+      <p:sp>
+        <p:nvSpPr>
+          <p:cNvPr id="199" name="Shape 197"/>
           <p:cNvSpPr/>
           <p:nvPr/>
         </p:nvSpPr>
         <p:spPr>
           <a:xfrm>
-            <a:off x="8765072" y="4987218"/>
-            <a:ext cx="220332" cy="136676"/>
+            <a:off x="8457267" y="4987218"/>
+            <a:ext cx="68379" cy="136676"/>
           </a:xfrm>
           <a:prstGeom prst="rect">
             <a:avLst/>
@@ -8192,13 +9440,13 @@
       </p:sp>
       <p:sp>
         <p:nvSpPr>
-          <p:cNvPr id="168" name="Text 166"/>
-          <p:cNvSpPr txBox="1"/>
-          <p:nvPr/>
-        </p:nvSpPr>
-        <p:spPr>
-          <a:xfrm>
-            <a:off x="9500616" y="4931305"/>
+          <p:cNvPr id="200" name="Text 198"/>
+          <p:cNvSpPr txBox="1"/>
+          <p:nvPr/>
+        </p:nvSpPr>
+        <p:spPr>
+          <a:xfrm>
+            <a:off x="8723376" y="4931305"/>
             <a:ext cx="1097280" cy="248502"/>
           </a:xfrm>
           <a:prstGeom prst="rect">
@@ -8231,13 +9479,13 @@
       </p:sp>
       <p:sp>
         <p:nvSpPr>
-          <p:cNvPr id="169" name="Text 167"/>
-          <p:cNvSpPr txBox="1"/>
-          <p:nvPr/>
-        </p:nvSpPr>
-        <p:spPr>
-          <a:xfrm>
-            <a:off x="10597896" y="4931305"/>
+          <p:cNvPr id="201" name="Text 199"/>
+          <p:cNvSpPr txBox="1"/>
+          <p:nvPr/>
+        </p:nvSpPr>
+        <p:spPr>
+          <a:xfrm>
+            <a:off x="9820656" y="4931305"/>
             <a:ext cx="868680" cy="248502"/>
           </a:xfrm>
           <a:prstGeom prst="rect">
@@ -8270,13 +9518,13 @@
       </p:sp>
       <p:sp>
         <p:nvSpPr>
-          <p:cNvPr id="170" name="Shape 168"/>
+          <p:cNvPr id="202" name="Shape 200"/>
           <p:cNvSpPr/>
           <p:nvPr/>
         </p:nvSpPr>
         <p:spPr>
           <a:xfrm>
-            <a:off x="11521440" y="4977025"/>
+            <a:off x="10744200" y="4977025"/>
             <a:ext cx="54864" cy="157062"/>
           </a:xfrm>
           <a:prstGeom prst="rect">
@@ -8290,7 +9538,46 @@
       </p:sp>
       <p:sp>
         <p:nvSpPr>
-          <p:cNvPr id="171" name="Text 169"/>
+          <p:cNvPr id="203" name="Text 201"/>
+          <p:cNvSpPr txBox="1"/>
+          <p:nvPr/>
+        </p:nvSpPr>
+        <p:spPr>
+          <a:xfrm>
+            <a:off x="10689336" y="4931305"/>
+            <a:ext cx="777240" cy="248502"/>
+          </a:xfrm>
+          <a:prstGeom prst="rect">
+            <a:avLst/>
+          </a:prstGeom>
+          <a:noFill/>
+          <a:ln/>
+        </p:spPr>
+        <p:txBody>
+          <a:bodyPr wrap="square" lIns="0" tIns="0" rIns="0" bIns="0" rtlCol="0" anchor="ctr"/>
+          <a:lstStyle/>
+          <a:p>
+            <a:pPr algn="r" indent="0" marL="0">
+              <a:buNone/>
+            </a:pPr>
+            <a:r>
+              <a:rPr lang="en-US" sz="1300" dirty="0">
+                <a:solidFill>
+                  <a:srgbClr val="595959"/>
+                </a:solidFill>
+                <a:latin typeface="Inter" pitchFamily="34" charset="0"/>
+                <a:ea typeface="Inter" pitchFamily="34" charset="-122"/>
+                <a:cs typeface="Inter" pitchFamily="34" charset="-120"/>
+              </a:rPr>
+              <a:t>4 of 4</a:t>
+            </a:r>
+            <a:endParaRPr lang="en-US" sz="1300" dirty="0"/>
+          </a:p>
+        </p:txBody>
+      </p:sp>
+      <p:sp>
+        <p:nvSpPr>
+          <p:cNvPr id="204" name="Text 202"/>
           <p:cNvSpPr txBox="1"/>
           <p:nvPr/>
         </p:nvSpPr>
@@ -8329,14 +9616,14 @@
       </p:sp>
       <p:sp>
         <p:nvSpPr>
-          <p:cNvPr id="172" name="Text 170"/>
+          <p:cNvPr id="205" name="Text 203"/>
           <p:cNvSpPr txBox="1"/>
           <p:nvPr/>
         </p:nvSpPr>
         <p:spPr>
           <a:xfrm>
             <a:off x="6565392" y="5179807"/>
-            <a:ext cx="2011680" cy="248502"/>
+            <a:ext cx="1783080" cy="248502"/>
           </a:xfrm>
           <a:prstGeom prst="rect">
             <a:avLst/>
@@ -8352,7 +9639,7 @@
               <a:buNone/>
             </a:pPr>
             <a:r>
-              <a:rPr lang="en-US" sz="1300" dirty="0">
+              <a:rPr lang="en-US" sz="1200" dirty="0">
                 <a:solidFill>
                   <a:srgbClr val="1A1A1A"/>
                 </a:solidFill>
@@ -8362,20 +9649,20 @@
               </a:rPr>
               <a:t>CHEVY LV</a:t>
             </a:r>
-            <a:endParaRPr lang="en-US" sz="1300" dirty="0"/>
-          </a:p>
-        </p:txBody>
-      </p:sp>
-      <p:sp>
-        <p:nvSpPr>
-          <p:cNvPr id="173" name="Shape 171"/>
+            <a:endParaRPr lang="en-US" sz="1200" dirty="0"/>
+          </a:p>
+        </p:txBody>
+      </p:sp>
+      <p:sp>
+        <p:nvSpPr>
+          <p:cNvPr id="206" name="Shape 204"/>
           <p:cNvSpPr/>
           <p:nvPr/>
         </p:nvSpPr>
         <p:spPr>
           <a:xfrm>
-            <a:off x="8691210" y="5235720"/>
-            <a:ext cx="294194" cy="136676"/>
+            <a:off x="8434344" y="5235720"/>
+            <a:ext cx="91302" cy="136676"/>
           </a:xfrm>
           <a:prstGeom prst="rect">
             <a:avLst/>
@@ -8388,13 +9675,13 @@
       </p:sp>
       <p:sp>
         <p:nvSpPr>
-          <p:cNvPr id="174" name="Text 172"/>
-          <p:cNvSpPr txBox="1"/>
-          <p:nvPr/>
-        </p:nvSpPr>
-        <p:spPr>
-          <a:xfrm>
-            <a:off x="9500616" y="5179807"/>
+          <p:cNvPr id="207" name="Text 205"/>
+          <p:cNvSpPr txBox="1"/>
+          <p:nvPr/>
+        </p:nvSpPr>
+        <p:spPr>
+          <a:xfrm>
+            <a:off x="8723376" y="5179807"/>
             <a:ext cx="1097280" cy="248502"/>
           </a:xfrm>
           <a:prstGeom prst="rect">
@@ -8427,13 +9714,13 @@
       </p:sp>
       <p:sp>
         <p:nvSpPr>
-          <p:cNvPr id="175" name="Text 173"/>
-          <p:cNvSpPr txBox="1"/>
-          <p:nvPr/>
-        </p:nvSpPr>
-        <p:spPr>
-          <a:xfrm>
-            <a:off x="10597896" y="5179807"/>
+          <p:cNvPr id="208" name="Text 206"/>
+          <p:cNvSpPr txBox="1"/>
+          <p:nvPr/>
+        </p:nvSpPr>
+        <p:spPr>
+          <a:xfrm>
+            <a:off x="9820656" y="5179807"/>
             <a:ext cx="868680" cy="248502"/>
           </a:xfrm>
           <a:prstGeom prst="rect">
@@ -8466,13 +9753,13 @@
       </p:sp>
       <p:sp>
         <p:nvSpPr>
-          <p:cNvPr id="176" name="Shape 174"/>
+          <p:cNvPr id="209" name="Shape 207"/>
           <p:cNvSpPr/>
           <p:nvPr/>
         </p:nvSpPr>
         <p:spPr>
           <a:xfrm>
-            <a:off x="11521440" y="5225527"/>
+            <a:off x="10744200" y="5225527"/>
             <a:ext cx="54864" cy="157062"/>
           </a:xfrm>
           <a:prstGeom prst="rect">
@@ -8486,7 +9773,46 @@
       </p:sp>
       <p:sp>
         <p:nvSpPr>
-          <p:cNvPr id="177" name="Text 175"/>
+          <p:cNvPr id="210" name="Text 208"/>
+          <p:cNvSpPr txBox="1"/>
+          <p:nvPr/>
+        </p:nvSpPr>
+        <p:spPr>
+          <a:xfrm>
+            <a:off x="10689336" y="5179807"/>
+            <a:ext cx="777240" cy="248502"/>
+          </a:xfrm>
+          <a:prstGeom prst="rect">
+            <a:avLst/>
+          </a:prstGeom>
+          <a:noFill/>
+          <a:ln/>
+        </p:spPr>
+        <p:txBody>
+          <a:bodyPr wrap="square" lIns="0" tIns="0" rIns="0" bIns="0" rtlCol="0" anchor="ctr"/>
+          <a:lstStyle/>
+          <a:p>
+            <a:pPr algn="r" indent="0" marL="0">
+              <a:buNone/>
+            </a:pPr>
+            <a:r>
+              <a:rPr lang="en-US" sz="1300" dirty="0">
+                <a:solidFill>
+                  <a:srgbClr val="595959"/>
+                </a:solidFill>
+                <a:latin typeface="Inter" pitchFamily="34" charset="0"/>
+                <a:ea typeface="Inter" pitchFamily="34" charset="-122"/>
+                <a:cs typeface="Inter" pitchFamily="34" charset="-120"/>
+              </a:rPr>
+              <a:t>4 of 4</a:t>
+            </a:r>
+            <a:endParaRPr lang="en-US" sz="1300" dirty="0"/>
+          </a:p>
+        </p:txBody>
+      </p:sp>
+      <p:sp>
+        <p:nvSpPr>
+          <p:cNvPr id="211" name="Text 209"/>
           <p:cNvSpPr txBox="1"/>
           <p:nvPr/>
         </p:nvSpPr>
@@ -8525,14 +9851,14 @@
       </p:sp>
       <p:sp>
         <p:nvSpPr>
-          <p:cNvPr id="178" name="Text 176"/>
+          <p:cNvPr id="212" name="Text 210"/>
           <p:cNvSpPr txBox="1"/>
           <p:nvPr/>
         </p:nvSpPr>
         <p:spPr>
           <a:xfrm>
             <a:off x="6565392" y="5428309"/>
-            <a:ext cx="2011680" cy="248502"/>
+            <a:ext cx="1783080" cy="248502"/>
           </a:xfrm>
           <a:prstGeom prst="rect">
             <a:avLst/>
@@ -8548,7 +9874,7 @@
               <a:buNone/>
             </a:pPr>
             <a:r>
-              <a:rPr lang="en-US" sz="1300" dirty="0">
+              <a:rPr lang="en-US" sz="1200" dirty="0">
                 <a:solidFill>
                   <a:srgbClr val="1A1A1A"/>
                 </a:solidFill>
@@ -8558,20 +9884,20 @@
               </a:rPr>
               <a:t>TOYOTA SPOKANE</a:t>
             </a:r>
-            <a:endParaRPr lang="en-US" sz="1300" dirty="0"/>
-          </a:p>
-        </p:txBody>
-      </p:sp>
-      <p:sp>
-        <p:nvSpPr>
-          <p:cNvPr id="179" name="Shape 177"/>
+            <a:endParaRPr lang="en-US" sz="1200" dirty="0"/>
+          </a:p>
+        </p:txBody>
+      </p:sp>
+      <p:sp>
+        <p:nvSpPr>
+          <p:cNvPr id="213" name="Shape 211"/>
           <p:cNvSpPr/>
           <p:nvPr/>
         </p:nvSpPr>
         <p:spPr>
           <a:xfrm>
-            <a:off x="8650224" y="5484222"/>
-            <a:ext cx="335180" cy="136676"/>
+            <a:off x="8421624" y="5484222"/>
+            <a:ext cx="104021" cy="136676"/>
           </a:xfrm>
           <a:prstGeom prst="rect">
             <a:avLst/>
@@ -8584,13 +9910,13 @@
       </p:sp>
       <p:sp>
         <p:nvSpPr>
-          <p:cNvPr id="180" name="Text 178"/>
-          <p:cNvSpPr txBox="1"/>
-          <p:nvPr/>
-        </p:nvSpPr>
-        <p:spPr>
-          <a:xfrm>
-            <a:off x="9500616" y="5428309"/>
+          <p:cNvPr id="214" name="Text 212"/>
+          <p:cNvSpPr txBox="1"/>
+          <p:nvPr/>
+        </p:nvSpPr>
+        <p:spPr>
+          <a:xfrm>
+            <a:off x="8723376" y="5428309"/>
             <a:ext cx="1097280" cy="248502"/>
           </a:xfrm>
           <a:prstGeom prst="rect">
@@ -8623,13 +9949,13 @@
       </p:sp>
       <p:sp>
         <p:nvSpPr>
-          <p:cNvPr id="181" name="Text 179"/>
-          <p:cNvSpPr txBox="1"/>
-          <p:nvPr/>
-        </p:nvSpPr>
-        <p:spPr>
-          <a:xfrm>
-            <a:off x="10597896" y="5428309"/>
+          <p:cNvPr id="215" name="Text 213"/>
+          <p:cNvSpPr txBox="1"/>
+          <p:nvPr/>
+        </p:nvSpPr>
+        <p:spPr>
+          <a:xfrm>
+            <a:off x="9820656" y="5428309"/>
             <a:ext cx="868680" cy="248502"/>
           </a:xfrm>
           <a:prstGeom prst="rect">
@@ -8662,13 +9988,13 @@
       </p:sp>
       <p:sp>
         <p:nvSpPr>
-          <p:cNvPr id="182" name="Shape 180"/>
+          <p:cNvPr id="216" name="Shape 214"/>
           <p:cNvSpPr/>
           <p:nvPr/>
         </p:nvSpPr>
         <p:spPr>
           <a:xfrm>
-            <a:off x="11521440" y="5474029"/>
+            <a:off x="10744200" y="5474029"/>
             <a:ext cx="54864" cy="157062"/>
           </a:xfrm>
           <a:prstGeom prst="rect">
@@ -8682,7 +10008,46 @@
       </p:sp>
       <p:sp>
         <p:nvSpPr>
-          <p:cNvPr id="183" name="Shape 181"/>
+          <p:cNvPr id="217" name="Text 215"/>
+          <p:cNvSpPr txBox="1"/>
+          <p:nvPr/>
+        </p:nvSpPr>
+        <p:spPr>
+          <a:xfrm>
+            <a:off x="10689336" y="5428309"/>
+            <a:ext cx="777240" cy="248502"/>
+          </a:xfrm>
+          <a:prstGeom prst="rect">
+            <a:avLst/>
+          </a:prstGeom>
+          <a:noFill/>
+          <a:ln/>
+        </p:spPr>
+        <p:txBody>
+          <a:bodyPr wrap="square" lIns="0" tIns="0" rIns="0" bIns="0" rtlCol="0" anchor="ctr"/>
+          <a:lstStyle/>
+          <a:p>
+            <a:pPr algn="r" indent="0" marL="0">
+              <a:buNone/>
+            </a:pPr>
+            <a:r>
+              <a:rPr lang="en-US" sz="1300" dirty="0">
+                <a:solidFill>
+                  <a:srgbClr val="595959"/>
+                </a:solidFill>
+                <a:latin typeface="Inter" pitchFamily="34" charset="0"/>
+                <a:ea typeface="Inter" pitchFamily="34" charset="-122"/>
+                <a:cs typeface="Inter" pitchFamily="34" charset="-120"/>
+              </a:rPr>
+              <a:t>4 of 4</a:t>
+            </a:r>
+            <a:endParaRPr lang="en-US" sz="1300" dirty="0"/>
+          </a:p>
+        </p:txBody>
+      </p:sp>
+      <p:sp>
+        <p:nvSpPr>
+          <p:cNvPr id="218" name="Shape 216"/>
           <p:cNvSpPr/>
           <p:nvPr/>
         </p:nvSpPr>
@@ -8702,14 +10067,14 @@
       </p:sp>
       <p:sp>
         <p:nvSpPr>
-          <p:cNvPr id="185" name="Shape 182"/>
+          <p:cNvPr id="220" name="Shape 217"/>
           <p:cNvSpPr/>
           <p:nvPr/>
         </p:nvSpPr>
         <p:spPr>
           <a:xfrm>
             <a:off x="457200" y="6126480"/>
-            <a:ext cx="11274552" cy="364236"/>
+            <a:ext cx="11274552" cy="615696"/>
           </a:xfrm>
           <a:prstGeom prst="rect">
             <a:avLst/>
@@ -8722,14 +10087,14 @@
       </p:sp>
       <p:sp>
         <p:nvSpPr>
-          <p:cNvPr id="186" name="Text 183"/>
+          <p:cNvPr id="221" name="Text 218"/>
           <p:cNvSpPr txBox="1"/>
           <p:nvPr/>
         </p:nvSpPr>
         <p:spPr>
           <a:xfrm>
             <a:off x="658368" y="6144768"/>
-            <a:ext cx="10927080" cy="327660"/>
+            <a:ext cx="10927080" cy="579120"/>
           </a:xfrm>
           <a:prstGeom prst="rect">
             <a:avLst/>
@@ -8745,7 +10110,7 @@
               <a:buNone/>
             </a:pPr>
             <a:r>
-              <a:rPr lang="en-US" sz="1550" b="1" dirty="0">
+              <a:rPr lang="en-US" sz="1600" b="1" dirty="0">
                 <a:solidFill>
                   <a:srgbClr val="A82B26"/>
                 </a:solidFill>
@@ -8753,9 +10118,9 @@
                 <a:ea typeface="Inter" pitchFamily="34" charset="-122"/>
                 <a:cs typeface="Inter" pitchFamily="34" charset="-120"/>
               </a:rPr>
-              <a:t>7 of 33 stores are ahead of benchmark on net across the four services. 15 stores are under all four.</a:t>
-            </a:r>
-            <a:endParaRPr lang="en-US" sz="1550" dirty="0"/>
+              <a:t>7 of 33 stores are ahead of benchmark on net across the four services. 15 stores miss every benchmark that applies to them; 1 store misses none.</a:t>
+            </a:r>
+            <a:endParaRPr lang="en-US" sz="1600" dirty="0"/>
           </a:p>
         </p:txBody>
       </p:sp>

--- a/day2-deck/decks/Op Code Missed Opportunity - Review.pptx
+++ b/day2-deck/decks/Op Code Missed Opportunity - Review.pptx
@@ -2604,6 +2604,45 @@
         <p:spPr>
           <a:xfrm>
             <a:off x="4270248" y="1316736"/>
+            <a:ext cx="777240" cy="329184"/>
+          </a:xfrm>
+          <a:prstGeom prst="rect">
+            <a:avLst/>
+          </a:prstGeom>
+          <a:noFill/>
+          <a:ln/>
+        </p:spPr>
+        <p:txBody>
+          <a:bodyPr wrap="square" lIns="0" tIns="0" rIns="0" bIns="0" rtlCol="0" anchor="ctr"/>
+          <a:lstStyle/>
+          <a:p>
+            <a:pPr algn="r" indent="0" marL="0">
+              <a:buNone/>
+            </a:pPr>
+            <a:r>
+              <a:rPr lang="en-US" sz="1400" b="1" dirty="0">
+                <a:solidFill>
+                  <a:srgbClr val="595959"/>
+                </a:solidFill>
+                <a:latin typeface="Inter" pitchFamily="34" charset="0"/>
+                <a:ea typeface="Inter" pitchFamily="34" charset="-122"/>
+                <a:cs typeface="Inter" pitchFamily="34" charset="-120"/>
+              </a:rPr>
+              <a:t>Missed</a:t>
+            </a:r>
+            <a:endParaRPr lang="en-US" sz="1400" dirty="0"/>
+          </a:p>
+        </p:txBody>
+      </p:sp>
+      <p:sp>
+        <p:nvSpPr>
+          <p:cNvPr id="8" name="Text 6"/>
+          <p:cNvSpPr txBox="1"/>
+          <p:nvPr/>
+        </p:nvSpPr>
+        <p:spPr>
+          <a:xfrm>
+            <a:off x="5047488" y="1316736"/>
             <a:ext cx="868680" cy="329184"/>
           </a:xfrm>
           <a:prstGeom prst="rect">
@@ -2629,45 +2668,6 @@
                 <a:cs typeface="Inter" pitchFamily="34" charset="-120"/>
               </a:rPr>
               <a:t>Opcodes</a:t>
-            </a:r>
-            <a:endParaRPr lang="en-US" sz="1400" dirty="0"/>
-          </a:p>
-        </p:txBody>
-      </p:sp>
-      <p:sp>
-        <p:nvSpPr>
-          <p:cNvPr id="8" name="Text 6"/>
-          <p:cNvSpPr txBox="1"/>
-          <p:nvPr/>
-        </p:nvSpPr>
-        <p:spPr>
-          <a:xfrm>
-            <a:off x="5138928" y="1316736"/>
-            <a:ext cx="777240" cy="329184"/>
-          </a:xfrm>
-          <a:prstGeom prst="rect">
-            <a:avLst/>
-          </a:prstGeom>
-          <a:noFill/>
-          <a:ln/>
-        </p:spPr>
-        <p:txBody>
-          <a:bodyPr wrap="square" lIns="0" tIns="0" rIns="0" bIns="0" rtlCol="0" anchor="ctr"/>
-          <a:lstStyle/>
-          <a:p>
-            <a:pPr algn="r" indent="0" marL="0">
-              <a:buNone/>
-            </a:pPr>
-            <a:r>
-              <a:rPr lang="en-US" sz="1400" b="1" dirty="0">
-                <a:solidFill>
-                  <a:srgbClr val="595959"/>
-                </a:solidFill>
-                <a:latin typeface="Inter" pitchFamily="34" charset="0"/>
-                <a:ea typeface="Inter" pitchFamily="34" charset="-122"/>
-                <a:cs typeface="Inter" pitchFamily="34" charset="-120"/>
-              </a:rPr>
-              <a:t>Missed</a:t>
             </a:r>
             <a:endParaRPr lang="en-US" sz="1400" dirty="0"/>
           </a:p>
@@ -2741,6 +2741,45 @@
         <p:spPr>
           <a:xfrm>
             <a:off x="9820656" y="1316736"/>
+            <a:ext cx="777240" cy="329184"/>
+          </a:xfrm>
+          <a:prstGeom prst="rect">
+            <a:avLst/>
+          </a:prstGeom>
+          <a:noFill/>
+          <a:ln/>
+        </p:spPr>
+        <p:txBody>
+          <a:bodyPr wrap="square" lIns="0" tIns="0" rIns="0" bIns="0" rtlCol="0" anchor="ctr"/>
+          <a:lstStyle/>
+          <a:p>
+            <a:pPr algn="r" indent="0" marL="0">
+              <a:buNone/>
+            </a:pPr>
+            <a:r>
+              <a:rPr lang="en-US" sz="1400" b="1" dirty="0">
+                <a:solidFill>
+                  <a:srgbClr val="595959"/>
+                </a:solidFill>
+                <a:latin typeface="Inter" pitchFamily="34" charset="0"/>
+                <a:ea typeface="Inter" pitchFamily="34" charset="-122"/>
+                <a:cs typeface="Inter" pitchFamily="34" charset="-120"/>
+              </a:rPr>
+              <a:t>Missed</a:t>
+            </a:r>
+            <a:endParaRPr lang="en-US" sz="1400" dirty="0"/>
+          </a:p>
+        </p:txBody>
+      </p:sp>
+      <p:sp>
+        <p:nvSpPr>
+          <p:cNvPr id="12" name="Text 10"/>
+          <p:cNvSpPr txBox="1"/>
+          <p:nvPr/>
+        </p:nvSpPr>
+        <p:spPr>
+          <a:xfrm>
+            <a:off x="10597896" y="1316736"/>
             <a:ext cx="868680" cy="329184"/>
           </a:xfrm>
           <a:prstGeom prst="rect">
@@ -2766,45 +2805,6 @@
                 <a:cs typeface="Inter" pitchFamily="34" charset="-120"/>
               </a:rPr>
               <a:t>Opcodes</a:t>
-            </a:r>
-            <a:endParaRPr lang="en-US" sz="1400" dirty="0"/>
-          </a:p>
-        </p:txBody>
-      </p:sp>
-      <p:sp>
-        <p:nvSpPr>
-          <p:cNvPr id="12" name="Text 10"/>
-          <p:cNvSpPr txBox="1"/>
-          <p:nvPr/>
-        </p:nvSpPr>
-        <p:spPr>
-          <a:xfrm>
-            <a:off x="10689336" y="1316736"/>
-            <a:ext cx="777240" cy="329184"/>
-          </a:xfrm>
-          <a:prstGeom prst="rect">
-            <a:avLst/>
-          </a:prstGeom>
-          <a:noFill/>
-          <a:ln/>
-        </p:spPr>
-        <p:txBody>
-          <a:bodyPr wrap="square" lIns="0" tIns="0" rIns="0" bIns="0" rtlCol="0" anchor="ctr"/>
-          <a:lstStyle/>
-          <a:p>
-            <a:pPr algn="r" indent="0" marL="0">
-              <a:buNone/>
-            </a:pPr>
-            <a:r>
-              <a:rPr lang="en-US" sz="1400" b="1" dirty="0">
-                <a:solidFill>
-                  <a:srgbClr val="595959"/>
-                </a:solidFill>
-                <a:latin typeface="Inter" pitchFamily="34" charset="0"/>
-                <a:ea typeface="Inter" pitchFamily="34" charset="-122"/>
-                <a:cs typeface="Inter" pitchFamily="34" charset="-120"/>
-              </a:rPr>
-              <a:t>Missed</a:t>
             </a:r>
             <a:endParaRPr lang="en-US" sz="1400" dirty="0"/>
           </a:p>
@@ -2976,6 +2976,45 @@
         <p:spPr>
           <a:xfrm>
             <a:off x="4270248" y="1700784"/>
+            <a:ext cx="777240" cy="248502"/>
+          </a:xfrm>
+          <a:prstGeom prst="rect">
+            <a:avLst/>
+          </a:prstGeom>
+          <a:noFill/>
+          <a:ln/>
+        </p:spPr>
+        <p:txBody>
+          <a:bodyPr wrap="square" lIns="0" tIns="0" rIns="0" bIns="0" rtlCol="0" anchor="ctr"/>
+          <a:lstStyle/>
+          <a:p>
+            <a:pPr algn="r" indent="0" marL="0">
+              <a:buNone/>
+            </a:pPr>
+            <a:r>
+              <a:rPr lang="en-US" sz="1300" dirty="0">
+                <a:solidFill>
+                  <a:srgbClr val="595959"/>
+                </a:solidFill>
+                <a:latin typeface="Inter" pitchFamily="34" charset="0"/>
+                <a:ea typeface="Inter" pitchFamily="34" charset="-122"/>
+                <a:cs typeface="Inter" pitchFamily="34" charset="-120"/>
+              </a:rPr>
+              <a:t>0 of 4</a:t>
+            </a:r>
+            <a:endParaRPr lang="en-US" sz="1300" dirty="0"/>
+          </a:p>
+        </p:txBody>
+      </p:sp>
+      <p:sp>
+        <p:nvSpPr>
+          <p:cNvPr id="19" name="Text 17"/>
+          <p:cNvSpPr txBox="1"/>
+          <p:nvPr/>
+        </p:nvSpPr>
+        <p:spPr>
+          <a:xfrm>
+            <a:off x="5047488" y="1700784"/>
             <a:ext cx="868680" cy="248502"/>
           </a:xfrm>
           <a:prstGeom prst="rect">
@@ -3008,13 +3047,13 @@
       </p:sp>
       <p:sp>
         <p:nvSpPr>
-          <p:cNvPr id="19" name="Shape 17"/>
+          <p:cNvPr id="20" name="Shape 18"/>
           <p:cNvSpPr/>
           <p:nvPr/>
         </p:nvSpPr>
         <p:spPr>
           <a:xfrm>
-            <a:off x="5193792" y="1746504"/>
+            <a:off x="5971032" y="1746504"/>
             <a:ext cx="54864" cy="157062"/>
           </a:xfrm>
           <a:prstGeom prst="rect">
@@ -3028,45 +3067,6 @@
       </p:sp>
       <p:sp>
         <p:nvSpPr>
-          <p:cNvPr id="20" name="Text 18"/>
-          <p:cNvSpPr txBox="1"/>
-          <p:nvPr/>
-        </p:nvSpPr>
-        <p:spPr>
-          <a:xfrm>
-            <a:off x="5138928" y="1700784"/>
-            <a:ext cx="777240" cy="248502"/>
-          </a:xfrm>
-          <a:prstGeom prst="rect">
-            <a:avLst/>
-          </a:prstGeom>
-          <a:noFill/>
-          <a:ln/>
-        </p:spPr>
-        <p:txBody>
-          <a:bodyPr wrap="square" lIns="0" tIns="0" rIns="0" bIns="0" rtlCol="0" anchor="ctr"/>
-          <a:lstStyle/>
-          <a:p>
-            <a:pPr algn="r" indent="0" marL="0">
-              <a:buNone/>
-            </a:pPr>
-            <a:r>
-              <a:rPr lang="en-US" sz="1300" dirty="0">
-                <a:solidFill>
-                  <a:srgbClr val="595959"/>
-                </a:solidFill>
-                <a:latin typeface="Inter" pitchFamily="34" charset="0"/>
-                <a:ea typeface="Inter" pitchFamily="34" charset="-122"/>
-                <a:cs typeface="Inter" pitchFamily="34" charset="-120"/>
-              </a:rPr>
-              <a:t>0 of 4</a:t>
-            </a:r>
-            <a:endParaRPr lang="en-US" sz="1300" dirty="0"/>
-          </a:p>
-        </p:txBody>
-      </p:sp>
-      <p:sp>
-        <p:nvSpPr>
           <p:cNvPr id="21" name="Text 19"/>
           <p:cNvSpPr txBox="1"/>
           <p:nvPr/>
@@ -3211,6 +3211,45 @@
         <p:spPr>
           <a:xfrm>
             <a:off x="4270248" y="1949286"/>
+            <a:ext cx="777240" cy="248502"/>
+          </a:xfrm>
+          <a:prstGeom prst="rect">
+            <a:avLst/>
+          </a:prstGeom>
+          <a:noFill/>
+          <a:ln/>
+        </p:spPr>
+        <p:txBody>
+          <a:bodyPr wrap="square" lIns="0" tIns="0" rIns="0" bIns="0" rtlCol="0" anchor="ctr"/>
+          <a:lstStyle/>
+          <a:p>
+            <a:pPr algn="r" indent="0" marL="0">
+              <a:buNone/>
+            </a:pPr>
+            <a:r>
+              <a:rPr lang="en-US" sz="1300" dirty="0">
+                <a:solidFill>
+                  <a:srgbClr val="595959"/>
+                </a:solidFill>
+                <a:latin typeface="Inter" pitchFamily="34" charset="0"/>
+                <a:ea typeface="Inter" pitchFamily="34" charset="-122"/>
+                <a:cs typeface="Inter" pitchFamily="34" charset="-120"/>
+              </a:rPr>
+              <a:t>1 of 4</a:t>
+            </a:r>
+            <a:endParaRPr lang="en-US" sz="1300" dirty="0"/>
+          </a:p>
+        </p:txBody>
+      </p:sp>
+      <p:sp>
+        <p:nvSpPr>
+          <p:cNvPr id="26" name="Text 24"/>
+          <p:cNvSpPr txBox="1"/>
+          <p:nvPr/>
+        </p:nvSpPr>
+        <p:spPr>
+          <a:xfrm>
+            <a:off x="5047488" y="1949286"/>
             <a:ext cx="868680" cy="248502"/>
           </a:xfrm>
           <a:prstGeom prst="rect">
@@ -3243,13 +3282,13 @@
       </p:sp>
       <p:sp>
         <p:nvSpPr>
-          <p:cNvPr id="26" name="Shape 24"/>
+          <p:cNvPr id="27" name="Shape 25"/>
           <p:cNvSpPr/>
           <p:nvPr/>
         </p:nvSpPr>
         <p:spPr>
           <a:xfrm>
-            <a:off x="5193792" y="1995006"/>
+            <a:off x="5971032" y="1995006"/>
             <a:ext cx="54864" cy="157062"/>
           </a:xfrm>
           <a:prstGeom prst="rect">
@@ -3263,45 +3302,6 @@
       </p:sp>
       <p:sp>
         <p:nvSpPr>
-          <p:cNvPr id="27" name="Text 25"/>
-          <p:cNvSpPr txBox="1"/>
-          <p:nvPr/>
-        </p:nvSpPr>
-        <p:spPr>
-          <a:xfrm>
-            <a:off x="5138928" y="1949286"/>
-            <a:ext cx="777240" cy="248502"/>
-          </a:xfrm>
-          <a:prstGeom prst="rect">
-            <a:avLst/>
-          </a:prstGeom>
-          <a:noFill/>
-          <a:ln/>
-        </p:spPr>
-        <p:txBody>
-          <a:bodyPr wrap="square" lIns="0" tIns="0" rIns="0" bIns="0" rtlCol="0" anchor="ctr"/>
-          <a:lstStyle/>
-          <a:p>
-            <a:pPr algn="r" indent="0" marL="0">
-              <a:buNone/>
-            </a:pPr>
-            <a:r>
-              <a:rPr lang="en-US" sz="1300" dirty="0">
-                <a:solidFill>
-                  <a:srgbClr val="595959"/>
-                </a:solidFill>
-                <a:latin typeface="Inter" pitchFamily="34" charset="0"/>
-                <a:ea typeface="Inter" pitchFamily="34" charset="-122"/>
-                <a:cs typeface="Inter" pitchFamily="34" charset="-120"/>
-              </a:rPr>
-              <a:t>1 of 4</a:t>
-            </a:r>
-            <a:endParaRPr lang="en-US" sz="1300" dirty="0"/>
-          </a:p>
-        </p:txBody>
-      </p:sp>
-      <p:sp>
-        <p:nvSpPr>
           <p:cNvPr id="28" name="Text 26"/>
           <p:cNvSpPr txBox="1"/>
           <p:nvPr/>
@@ -3446,6 +3446,45 @@
         <p:spPr>
           <a:xfrm>
             <a:off x="4270248" y="2197787"/>
+            <a:ext cx="777240" cy="248502"/>
+          </a:xfrm>
+          <a:prstGeom prst="rect">
+            <a:avLst/>
+          </a:prstGeom>
+          <a:noFill/>
+          <a:ln/>
+        </p:spPr>
+        <p:txBody>
+          <a:bodyPr wrap="square" lIns="0" tIns="0" rIns="0" bIns="0" rtlCol="0" anchor="ctr"/>
+          <a:lstStyle/>
+          <a:p>
+            <a:pPr algn="r" indent="0" marL="0">
+              <a:buNone/>
+            </a:pPr>
+            <a:r>
+              <a:rPr lang="en-US" sz="1300" dirty="0">
+                <a:solidFill>
+                  <a:srgbClr val="595959"/>
+                </a:solidFill>
+                <a:latin typeface="Inter" pitchFamily="34" charset="0"/>
+                <a:ea typeface="Inter" pitchFamily="34" charset="-122"/>
+                <a:cs typeface="Inter" pitchFamily="34" charset="-120"/>
+              </a:rPr>
+              <a:t>1 of 4</a:t>
+            </a:r>
+            <a:endParaRPr lang="en-US" sz="1300" dirty="0"/>
+          </a:p>
+        </p:txBody>
+      </p:sp>
+      <p:sp>
+        <p:nvSpPr>
+          <p:cNvPr id="33" name="Text 31"/>
+          <p:cNvSpPr txBox="1"/>
+          <p:nvPr/>
+        </p:nvSpPr>
+        <p:spPr>
+          <a:xfrm>
+            <a:off x="5047488" y="2197787"/>
             <a:ext cx="868680" cy="248502"/>
           </a:xfrm>
           <a:prstGeom prst="rect">
@@ -3478,13 +3517,13 @@
       </p:sp>
       <p:sp>
         <p:nvSpPr>
-          <p:cNvPr id="33" name="Shape 31"/>
+          <p:cNvPr id="34" name="Shape 32"/>
           <p:cNvSpPr/>
           <p:nvPr/>
         </p:nvSpPr>
         <p:spPr>
           <a:xfrm>
-            <a:off x="5193792" y="2243507"/>
+            <a:off x="5971032" y="2243507"/>
             <a:ext cx="54864" cy="157062"/>
           </a:xfrm>
           <a:prstGeom prst="rect">
@@ -3498,45 +3537,6 @@
       </p:sp>
       <p:sp>
         <p:nvSpPr>
-          <p:cNvPr id="34" name="Text 32"/>
-          <p:cNvSpPr txBox="1"/>
-          <p:nvPr/>
-        </p:nvSpPr>
-        <p:spPr>
-          <a:xfrm>
-            <a:off x="5138928" y="2197787"/>
-            <a:ext cx="777240" cy="248502"/>
-          </a:xfrm>
-          <a:prstGeom prst="rect">
-            <a:avLst/>
-          </a:prstGeom>
-          <a:noFill/>
-          <a:ln/>
-        </p:spPr>
-        <p:txBody>
-          <a:bodyPr wrap="square" lIns="0" tIns="0" rIns="0" bIns="0" rtlCol="0" anchor="ctr"/>
-          <a:lstStyle/>
-          <a:p>
-            <a:pPr algn="r" indent="0" marL="0">
-              <a:buNone/>
-            </a:pPr>
-            <a:r>
-              <a:rPr lang="en-US" sz="1300" dirty="0">
-                <a:solidFill>
-                  <a:srgbClr val="595959"/>
-                </a:solidFill>
-                <a:latin typeface="Inter" pitchFamily="34" charset="0"/>
-                <a:ea typeface="Inter" pitchFamily="34" charset="-122"/>
-                <a:cs typeface="Inter" pitchFamily="34" charset="-120"/>
-              </a:rPr>
-              <a:t>1 of 4</a:t>
-            </a:r>
-            <a:endParaRPr lang="en-US" sz="1300" dirty="0"/>
-          </a:p>
-        </p:txBody>
-      </p:sp>
-      <p:sp>
-        <p:nvSpPr>
           <p:cNvPr id="35" name="Text 33"/>
           <p:cNvSpPr txBox="1"/>
           <p:nvPr/>
@@ -3681,6 +3681,45 @@
         <p:spPr>
           <a:xfrm>
             <a:off x="4270248" y="2446289"/>
+            <a:ext cx="777240" cy="248502"/>
+          </a:xfrm>
+          <a:prstGeom prst="rect">
+            <a:avLst/>
+          </a:prstGeom>
+          <a:noFill/>
+          <a:ln/>
+        </p:spPr>
+        <p:txBody>
+          <a:bodyPr wrap="square" lIns="0" tIns="0" rIns="0" bIns="0" rtlCol="0" anchor="ctr"/>
+          <a:lstStyle/>
+          <a:p>
+            <a:pPr algn="r" indent="0" marL="0">
+              <a:buNone/>
+            </a:pPr>
+            <a:r>
+              <a:rPr lang="en-US" sz="1300" dirty="0">
+                <a:solidFill>
+                  <a:srgbClr val="595959"/>
+                </a:solidFill>
+                <a:latin typeface="Inter" pitchFamily="34" charset="0"/>
+                <a:ea typeface="Inter" pitchFamily="34" charset="-122"/>
+                <a:cs typeface="Inter" pitchFamily="34" charset="-120"/>
+              </a:rPr>
+              <a:t>1 of 4</a:t>
+            </a:r>
+            <a:endParaRPr lang="en-US" sz="1300" dirty="0"/>
+          </a:p>
+        </p:txBody>
+      </p:sp>
+      <p:sp>
+        <p:nvSpPr>
+          <p:cNvPr id="40" name="Text 38"/>
+          <p:cNvSpPr txBox="1"/>
+          <p:nvPr/>
+        </p:nvSpPr>
+        <p:spPr>
+          <a:xfrm>
+            <a:off x="5047488" y="2446289"/>
             <a:ext cx="868680" cy="248502"/>
           </a:xfrm>
           <a:prstGeom prst="rect">
@@ -3706,45 +3745,6 @@
                 <a:cs typeface="Inter" pitchFamily="34" charset="-120"/>
               </a:rPr>
               <a:t>+70</a:t>
-            </a:r>
-            <a:endParaRPr lang="en-US" sz="1300" dirty="0"/>
-          </a:p>
-        </p:txBody>
-      </p:sp>
-      <p:sp>
-        <p:nvSpPr>
-          <p:cNvPr id="40" name="Text 38"/>
-          <p:cNvSpPr txBox="1"/>
-          <p:nvPr/>
-        </p:nvSpPr>
-        <p:spPr>
-          <a:xfrm>
-            <a:off x="5138928" y="2446289"/>
-            <a:ext cx="777240" cy="248502"/>
-          </a:xfrm>
-          <a:prstGeom prst="rect">
-            <a:avLst/>
-          </a:prstGeom>
-          <a:noFill/>
-          <a:ln/>
-        </p:spPr>
-        <p:txBody>
-          <a:bodyPr wrap="square" lIns="0" tIns="0" rIns="0" bIns="0" rtlCol="0" anchor="ctr"/>
-          <a:lstStyle/>
-          <a:p>
-            <a:pPr algn="r" indent="0" marL="0">
-              <a:buNone/>
-            </a:pPr>
-            <a:r>
-              <a:rPr lang="en-US" sz="1300" dirty="0">
-                <a:solidFill>
-                  <a:srgbClr val="595959"/>
-                </a:solidFill>
-                <a:latin typeface="Inter" pitchFamily="34" charset="0"/>
-                <a:ea typeface="Inter" pitchFamily="34" charset="-122"/>
-                <a:cs typeface="Inter" pitchFamily="34" charset="-120"/>
-              </a:rPr>
-              <a:t>1 of 4</a:t>
             </a:r>
             <a:endParaRPr lang="en-US" sz="1300" dirty="0"/>
           </a:p>
@@ -3896,6 +3896,45 @@
         <p:spPr>
           <a:xfrm>
             <a:off x="4270248" y="2694791"/>
+            <a:ext cx="777240" cy="248502"/>
+          </a:xfrm>
+          <a:prstGeom prst="rect">
+            <a:avLst/>
+          </a:prstGeom>
+          <a:noFill/>
+          <a:ln/>
+        </p:spPr>
+        <p:txBody>
+          <a:bodyPr wrap="square" lIns="0" tIns="0" rIns="0" bIns="0" rtlCol="0" anchor="ctr"/>
+          <a:lstStyle/>
+          <a:p>
+            <a:pPr algn="r" indent="0" marL="0">
+              <a:buNone/>
+            </a:pPr>
+            <a:r>
+              <a:rPr lang="en-US" sz="1300" dirty="0">
+                <a:solidFill>
+                  <a:srgbClr val="595959"/>
+                </a:solidFill>
+                <a:latin typeface="Inter" pitchFamily="34" charset="0"/>
+                <a:ea typeface="Inter" pitchFamily="34" charset="-122"/>
+                <a:cs typeface="Inter" pitchFamily="34" charset="-120"/>
+              </a:rPr>
+              <a:t>2 of 4</a:t>
+            </a:r>
+            <a:endParaRPr lang="en-US" sz="1300" dirty="0"/>
+          </a:p>
+        </p:txBody>
+      </p:sp>
+      <p:sp>
+        <p:nvSpPr>
+          <p:cNvPr id="46" name="Text 44"/>
+          <p:cNvSpPr txBox="1"/>
+          <p:nvPr/>
+        </p:nvSpPr>
+        <p:spPr>
+          <a:xfrm>
+            <a:off x="5047488" y="2694791"/>
             <a:ext cx="868680" cy="248502"/>
           </a:xfrm>
           <a:prstGeom prst="rect">
@@ -3921,45 +3960,6 @@
                 <a:cs typeface="Inter" pitchFamily="34" charset="-120"/>
               </a:rPr>
               <a:t>+24</a:t>
-            </a:r>
-            <a:endParaRPr lang="en-US" sz="1300" dirty="0"/>
-          </a:p>
-        </p:txBody>
-      </p:sp>
-      <p:sp>
-        <p:nvSpPr>
-          <p:cNvPr id="46" name="Text 44"/>
-          <p:cNvSpPr txBox="1"/>
-          <p:nvPr/>
-        </p:nvSpPr>
-        <p:spPr>
-          <a:xfrm>
-            <a:off x="5138928" y="2694791"/>
-            <a:ext cx="777240" cy="248502"/>
-          </a:xfrm>
-          <a:prstGeom prst="rect">
-            <a:avLst/>
-          </a:prstGeom>
-          <a:noFill/>
-          <a:ln/>
-        </p:spPr>
-        <p:txBody>
-          <a:bodyPr wrap="square" lIns="0" tIns="0" rIns="0" bIns="0" rtlCol="0" anchor="ctr"/>
-          <a:lstStyle/>
-          <a:p>
-            <a:pPr algn="r" indent="0" marL="0">
-              <a:buNone/>
-            </a:pPr>
-            <a:r>
-              <a:rPr lang="en-US" sz="1300" dirty="0">
-                <a:solidFill>
-                  <a:srgbClr val="595959"/>
-                </a:solidFill>
-                <a:latin typeface="Inter" pitchFamily="34" charset="0"/>
-                <a:ea typeface="Inter" pitchFamily="34" charset="-122"/>
-                <a:cs typeface="Inter" pitchFamily="34" charset="-120"/>
-              </a:rPr>
-              <a:t>2 of 4</a:t>
             </a:r>
             <a:endParaRPr lang="en-US" sz="1300" dirty="0"/>
           </a:p>
@@ -4111,6 +4111,45 @@
         <p:spPr>
           <a:xfrm>
             <a:off x="4270248" y="2943292"/>
+            <a:ext cx="777240" cy="248502"/>
+          </a:xfrm>
+          <a:prstGeom prst="rect">
+            <a:avLst/>
+          </a:prstGeom>
+          <a:noFill/>
+          <a:ln/>
+        </p:spPr>
+        <p:txBody>
+          <a:bodyPr wrap="square" lIns="0" tIns="0" rIns="0" bIns="0" rtlCol="0" anchor="ctr"/>
+          <a:lstStyle/>
+          <a:p>
+            <a:pPr algn="r" indent="0" marL="0">
+              <a:buNone/>
+            </a:pPr>
+            <a:r>
+              <a:rPr lang="en-US" sz="1300" dirty="0">
+                <a:solidFill>
+                  <a:srgbClr val="595959"/>
+                </a:solidFill>
+                <a:latin typeface="Inter" pitchFamily="34" charset="0"/>
+                <a:ea typeface="Inter" pitchFamily="34" charset="-122"/>
+                <a:cs typeface="Inter" pitchFamily="34" charset="-120"/>
+              </a:rPr>
+              <a:t>1 of 4</a:t>
+            </a:r>
+            <a:endParaRPr lang="en-US" sz="1300" dirty="0"/>
+          </a:p>
+        </p:txBody>
+      </p:sp>
+      <p:sp>
+        <p:nvSpPr>
+          <p:cNvPr id="52" name="Text 50"/>
+          <p:cNvSpPr txBox="1"/>
+          <p:nvPr/>
+        </p:nvSpPr>
+        <p:spPr>
+          <a:xfrm>
+            <a:off x="5047488" y="2943292"/>
             <a:ext cx="868680" cy="248502"/>
           </a:xfrm>
           <a:prstGeom prst="rect">
@@ -4136,45 +4175,6 @@
                 <a:cs typeface="Inter" pitchFamily="34" charset="-120"/>
               </a:rPr>
               <a:t>+228</a:t>
-            </a:r>
-            <a:endParaRPr lang="en-US" sz="1300" dirty="0"/>
-          </a:p>
-        </p:txBody>
-      </p:sp>
-      <p:sp>
-        <p:nvSpPr>
-          <p:cNvPr id="52" name="Text 50"/>
-          <p:cNvSpPr txBox="1"/>
-          <p:nvPr/>
-        </p:nvSpPr>
-        <p:spPr>
-          <a:xfrm>
-            <a:off x="5138928" y="2943292"/>
-            <a:ext cx="777240" cy="248502"/>
-          </a:xfrm>
-          <a:prstGeom prst="rect">
-            <a:avLst/>
-          </a:prstGeom>
-          <a:noFill/>
-          <a:ln/>
-        </p:spPr>
-        <p:txBody>
-          <a:bodyPr wrap="square" lIns="0" tIns="0" rIns="0" bIns="0" rtlCol="0" anchor="ctr"/>
-          <a:lstStyle/>
-          <a:p>
-            <a:pPr algn="r" indent="0" marL="0">
-              <a:buNone/>
-            </a:pPr>
-            <a:r>
-              <a:rPr lang="en-US" sz="1300" dirty="0">
-                <a:solidFill>
-                  <a:srgbClr val="595959"/>
-                </a:solidFill>
-                <a:latin typeface="Inter" pitchFamily="34" charset="0"/>
-                <a:ea typeface="Inter" pitchFamily="34" charset="-122"/>
-                <a:cs typeface="Inter" pitchFamily="34" charset="-120"/>
-              </a:rPr>
-              <a:t>1 of 4</a:t>
             </a:r>
             <a:endParaRPr lang="en-US" sz="1300" dirty="0"/>
           </a:p>
@@ -4326,6 +4326,45 @@
         <p:spPr>
           <a:xfrm>
             <a:off x="4270248" y="3191794"/>
+            <a:ext cx="777240" cy="248502"/>
+          </a:xfrm>
+          <a:prstGeom prst="rect">
+            <a:avLst/>
+          </a:prstGeom>
+          <a:noFill/>
+          <a:ln/>
+        </p:spPr>
+        <p:txBody>
+          <a:bodyPr wrap="square" lIns="0" tIns="0" rIns="0" bIns="0" rtlCol="0" anchor="ctr"/>
+          <a:lstStyle/>
+          <a:p>
+            <a:pPr algn="r" indent="0" marL="0">
+              <a:buNone/>
+            </a:pPr>
+            <a:r>
+              <a:rPr lang="en-US" sz="1300" dirty="0">
+                <a:solidFill>
+                  <a:srgbClr val="595959"/>
+                </a:solidFill>
+                <a:latin typeface="Inter" pitchFamily="34" charset="0"/>
+                <a:ea typeface="Inter" pitchFamily="34" charset="-122"/>
+                <a:cs typeface="Inter" pitchFamily="34" charset="-120"/>
+              </a:rPr>
+              <a:t>3 of 4</a:t>
+            </a:r>
+            <a:endParaRPr lang="en-US" sz="1300" dirty="0"/>
+          </a:p>
+        </p:txBody>
+      </p:sp>
+      <p:sp>
+        <p:nvSpPr>
+          <p:cNvPr id="58" name="Text 56"/>
+          <p:cNvSpPr txBox="1"/>
+          <p:nvPr/>
+        </p:nvSpPr>
+        <p:spPr>
+          <a:xfrm>
+            <a:off x="5047488" y="3191794"/>
             <a:ext cx="868680" cy="248502"/>
           </a:xfrm>
           <a:prstGeom prst="rect">
@@ -4351,45 +4390,6 @@
                 <a:cs typeface="Inter" pitchFamily="34" charset="-120"/>
               </a:rPr>
               <a:t>+97</a:t>
-            </a:r>
-            <a:endParaRPr lang="en-US" sz="1300" dirty="0"/>
-          </a:p>
-        </p:txBody>
-      </p:sp>
-      <p:sp>
-        <p:nvSpPr>
-          <p:cNvPr id="58" name="Text 56"/>
-          <p:cNvSpPr txBox="1"/>
-          <p:nvPr/>
-        </p:nvSpPr>
-        <p:spPr>
-          <a:xfrm>
-            <a:off x="5138928" y="3191794"/>
-            <a:ext cx="777240" cy="248502"/>
-          </a:xfrm>
-          <a:prstGeom prst="rect">
-            <a:avLst/>
-          </a:prstGeom>
-          <a:noFill/>
-          <a:ln/>
-        </p:spPr>
-        <p:txBody>
-          <a:bodyPr wrap="square" lIns="0" tIns="0" rIns="0" bIns="0" rtlCol="0" anchor="ctr"/>
-          <a:lstStyle/>
-          <a:p>
-            <a:pPr algn="r" indent="0" marL="0">
-              <a:buNone/>
-            </a:pPr>
-            <a:r>
-              <a:rPr lang="en-US" sz="1300" dirty="0">
-                <a:solidFill>
-                  <a:srgbClr val="595959"/>
-                </a:solidFill>
-                <a:latin typeface="Inter" pitchFamily="34" charset="0"/>
-                <a:ea typeface="Inter" pitchFamily="34" charset="-122"/>
-                <a:cs typeface="Inter" pitchFamily="34" charset="-120"/>
-              </a:rPr>
-              <a:t>3 of 4</a:t>
             </a:r>
             <a:endParaRPr lang="en-US" sz="1300" dirty="0"/>
           </a:p>
@@ -4541,6 +4541,45 @@
         <p:spPr>
           <a:xfrm>
             <a:off x="4270248" y="3440296"/>
+            <a:ext cx="777240" cy="248502"/>
+          </a:xfrm>
+          <a:prstGeom prst="rect">
+            <a:avLst/>
+          </a:prstGeom>
+          <a:noFill/>
+          <a:ln/>
+        </p:spPr>
+        <p:txBody>
+          <a:bodyPr wrap="square" lIns="0" tIns="0" rIns="0" bIns="0" rtlCol="0" anchor="ctr"/>
+          <a:lstStyle/>
+          <a:p>
+            <a:pPr algn="r" indent="0" marL="0">
+              <a:buNone/>
+            </a:pPr>
+            <a:r>
+              <a:rPr lang="en-US" sz="1300" dirty="0">
+                <a:solidFill>
+                  <a:srgbClr val="595959"/>
+                </a:solidFill>
+                <a:latin typeface="Inter" pitchFamily="34" charset="0"/>
+                <a:ea typeface="Inter" pitchFamily="34" charset="-122"/>
+                <a:cs typeface="Inter" pitchFamily="34" charset="-120"/>
+              </a:rPr>
+              <a:t>1 of 2</a:t>
+            </a:r>
+            <a:endParaRPr lang="en-US" sz="1300" dirty="0"/>
+          </a:p>
+        </p:txBody>
+      </p:sp>
+      <p:sp>
+        <p:nvSpPr>
+          <p:cNvPr id="64" name="Text 62"/>
+          <p:cNvSpPr txBox="1"/>
+          <p:nvPr/>
+        </p:nvSpPr>
+        <p:spPr>
+          <a:xfrm>
+            <a:off x="5047488" y="3440296"/>
             <a:ext cx="868680" cy="248502"/>
           </a:xfrm>
           <a:prstGeom prst="rect">
@@ -4566,45 +4605,6 @@
                 <a:cs typeface="Inter" pitchFamily="34" charset="-120"/>
               </a:rPr>
               <a:t>−661</a:t>
-            </a:r>
-            <a:endParaRPr lang="en-US" sz="1300" dirty="0"/>
-          </a:p>
-        </p:txBody>
-      </p:sp>
-      <p:sp>
-        <p:nvSpPr>
-          <p:cNvPr id="64" name="Text 62"/>
-          <p:cNvSpPr txBox="1"/>
-          <p:nvPr/>
-        </p:nvSpPr>
-        <p:spPr>
-          <a:xfrm>
-            <a:off x="5138928" y="3440296"/>
-            <a:ext cx="777240" cy="248502"/>
-          </a:xfrm>
-          <a:prstGeom prst="rect">
-            <a:avLst/>
-          </a:prstGeom>
-          <a:noFill/>
-          <a:ln/>
-        </p:spPr>
-        <p:txBody>
-          <a:bodyPr wrap="square" lIns="0" tIns="0" rIns="0" bIns="0" rtlCol="0" anchor="ctr"/>
-          <a:lstStyle/>
-          <a:p>
-            <a:pPr algn="r" indent="0" marL="0">
-              <a:buNone/>
-            </a:pPr>
-            <a:r>
-              <a:rPr lang="en-US" sz="1300" dirty="0">
-                <a:solidFill>
-                  <a:srgbClr val="595959"/>
-                </a:solidFill>
-                <a:latin typeface="Inter" pitchFamily="34" charset="0"/>
-                <a:ea typeface="Inter" pitchFamily="34" charset="-122"/>
-                <a:cs typeface="Inter" pitchFamily="34" charset="-120"/>
-              </a:rPr>
-              <a:t>1 of 2</a:t>
             </a:r>
             <a:endParaRPr lang="en-US" sz="1300" dirty="0"/>
           </a:p>
@@ -4756,6 +4756,45 @@
         <p:spPr>
           <a:xfrm>
             <a:off x="4270248" y="3688797"/>
+            <a:ext cx="777240" cy="248502"/>
+          </a:xfrm>
+          <a:prstGeom prst="rect">
+            <a:avLst/>
+          </a:prstGeom>
+          <a:noFill/>
+          <a:ln/>
+        </p:spPr>
+        <p:txBody>
+          <a:bodyPr wrap="square" lIns="0" tIns="0" rIns="0" bIns="0" rtlCol="0" anchor="ctr"/>
+          <a:lstStyle/>
+          <a:p>
+            <a:pPr algn="r" indent="0" marL="0">
+              <a:buNone/>
+            </a:pPr>
+            <a:r>
+              <a:rPr lang="en-US" sz="1300" dirty="0">
+                <a:solidFill>
+                  <a:srgbClr val="595959"/>
+                </a:solidFill>
+                <a:latin typeface="Inter" pitchFamily="34" charset="0"/>
+                <a:ea typeface="Inter" pitchFamily="34" charset="-122"/>
+                <a:cs typeface="Inter" pitchFamily="34" charset="-120"/>
+              </a:rPr>
+              <a:t>3 of 4</a:t>
+            </a:r>
+            <a:endParaRPr lang="en-US" sz="1300" dirty="0"/>
+          </a:p>
+        </p:txBody>
+      </p:sp>
+      <p:sp>
+        <p:nvSpPr>
+          <p:cNvPr id="70" name="Text 68"/>
+          <p:cNvSpPr txBox="1"/>
+          <p:nvPr/>
+        </p:nvSpPr>
+        <p:spPr>
+          <a:xfrm>
+            <a:off x="5047488" y="3688797"/>
             <a:ext cx="868680" cy="248502"/>
           </a:xfrm>
           <a:prstGeom prst="rect">
@@ -4781,45 +4820,6 @@
                 <a:cs typeface="Inter" pitchFamily="34" charset="-120"/>
               </a:rPr>
               <a:t>−223</a:t>
-            </a:r>
-            <a:endParaRPr lang="en-US" sz="1300" dirty="0"/>
-          </a:p>
-        </p:txBody>
-      </p:sp>
-      <p:sp>
-        <p:nvSpPr>
-          <p:cNvPr id="70" name="Text 68"/>
-          <p:cNvSpPr txBox="1"/>
-          <p:nvPr/>
-        </p:nvSpPr>
-        <p:spPr>
-          <a:xfrm>
-            <a:off x="5138928" y="3688797"/>
-            <a:ext cx="777240" cy="248502"/>
-          </a:xfrm>
-          <a:prstGeom prst="rect">
-            <a:avLst/>
-          </a:prstGeom>
-          <a:noFill/>
-          <a:ln/>
-        </p:spPr>
-        <p:txBody>
-          <a:bodyPr wrap="square" lIns="0" tIns="0" rIns="0" bIns="0" rtlCol="0" anchor="ctr"/>
-          <a:lstStyle/>
-          <a:p>
-            <a:pPr algn="r" indent="0" marL="0">
-              <a:buNone/>
-            </a:pPr>
-            <a:r>
-              <a:rPr lang="en-US" sz="1300" dirty="0">
-                <a:solidFill>
-                  <a:srgbClr val="595959"/>
-                </a:solidFill>
-                <a:latin typeface="Inter" pitchFamily="34" charset="0"/>
-                <a:ea typeface="Inter" pitchFamily="34" charset="-122"/>
-                <a:cs typeface="Inter" pitchFamily="34" charset="-120"/>
-              </a:rPr>
-              <a:t>3 of 4</a:t>
             </a:r>
             <a:endParaRPr lang="en-US" sz="1300" dirty="0"/>
           </a:p>
@@ -4971,6 +4971,45 @@
         <p:spPr>
           <a:xfrm>
             <a:off x="4270248" y="3937299"/>
+            <a:ext cx="777240" cy="248502"/>
+          </a:xfrm>
+          <a:prstGeom prst="rect">
+            <a:avLst/>
+          </a:prstGeom>
+          <a:noFill/>
+          <a:ln/>
+        </p:spPr>
+        <p:txBody>
+          <a:bodyPr wrap="square" lIns="0" tIns="0" rIns="0" bIns="0" rtlCol="0" anchor="ctr"/>
+          <a:lstStyle/>
+          <a:p>
+            <a:pPr algn="r" indent="0" marL="0">
+              <a:buNone/>
+            </a:pPr>
+            <a:r>
+              <a:rPr lang="en-US" sz="1300" dirty="0">
+                <a:solidFill>
+                  <a:srgbClr val="595959"/>
+                </a:solidFill>
+                <a:latin typeface="Inter" pitchFamily="34" charset="0"/>
+                <a:ea typeface="Inter" pitchFamily="34" charset="-122"/>
+                <a:cs typeface="Inter" pitchFamily="34" charset="-120"/>
+              </a:rPr>
+              <a:t>2 of 3</a:t>
+            </a:r>
+            <a:endParaRPr lang="en-US" sz="1300" dirty="0"/>
+          </a:p>
+        </p:txBody>
+      </p:sp>
+      <p:sp>
+        <p:nvSpPr>
+          <p:cNvPr id="76" name="Text 74"/>
+          <p:cNvSpPr txBox="1"/>
+          <p:nvPr/>
+        </p:nvSpPr>
+        <p:spPr>
+          <a:xfrm>
+            <a:off x="5047488" y="3937299"/>
             <a:ext cx="868680" cy="248502"/>
           </a:xfrm>
           <a:prstGeom prst="rect">
@@ -4996,45 +5035,6 @@
                 <a:cs typeface="Inter" pitchFamily="34" charset="-120"/>
               </a:rPr>
               <a:t>−340</a:t>
-            </a:r>
-            <a:endParaRPr lang="en-US" sz="1300" dirty="0"/>
-          </a:p>
-        </p:txBody>
-      </p:sp>
-      <p:sp>
-        <p:nvSpPr>
-          <p:cNvPr id="76" name="Text 74"/>
-          <p:cNvSpPr txBox="1"/>
-          <p:nvPr/>
-        </p:nvSpPr>
-        <p:spPr>
-          <a:xfrm>
-            <a:off x="5138928" y="3937299"/>
-            <a:ext cx="777240" cy="248502"/>
-          </a:xfrm>
-          <a:prstGeom prst="rect">
-            <a:avLst/>
-          </a:prstGeom>
-          <a:noFill/>
-          <a:ln/>
-        </p:spPr>
-        <p:txBody>
-          <a:bodyPr wrap="square" lIns="0" tIns="0" rIns="0" bIns="0" rtlCol="0" anchor="ctr"/>
-          <a:lstStyle/>
-          <a:p>
-            <a:pPr algn="r" indent="0" marL="0">
-              <a:buNone/>
-            </a:pPr>
-            <a:r>
-              <a:rPr lang="en-US" sz="1300" dirty="0">
-                <a:solidFill>
-                  <a:srgbClr val="595959"/>
-                </a:solidFill>
-                <a:latin typeface="Inter" pitchFamily="34" charset="0"/>
-                <a:ea typeface="Inter" pitchFamily="34" charset="-122"/>
-                <a:cs typeface="Inter" pitchFamily="34" charset="-120"/>
-              </a:rPr>
-              <a:t>2 of 3</a:t>
             </a:r>
             <a:endParaRPr lang="en-US" sz="1300" dirty="0"/>
           </a:p>
@@ -5186,6 +5186,45 @@
         <p:spPr>
           <a:xfrm>
             <a:off x="4270248" y="4185800"/>
+            <a:ext cx="777240" cy="248502"/>
+          </a:xfrm>
+          <a:prstGeom prst="rect">
+            <a:avLst/>
+          </a:prstGeom>
+          <a:noFill/>
+          <a:ln/>
+        </p:spPr>
+        <p:txBody>
+          <a:bodyPr wrap="square" lIns="0" tIns="0" rIns="0" bIns="0" rtlCol="0" anchor="ctr"/>
+          <a:lstStyle/>
+          <a:p>
+            <a:pPr algn="r" indent="0" marL="0">
+              <a:buNone/>
+            </a:pPr>
+            <a:r>
+              <a:rPr lang="en-US" sz="1300" dirty="0">
+                <a:solidFill>
+                  <a:srgbClr val="595959"/>
+                </a:solidFill>
+                <a:latin typeface="Inter" pitchFamily="34" charset="0"/>
+                <a:ea typeface="Inter" pitchFamily="34" charset="-122"/>
+                <a:cs typeface="Inter" pitchFamily="34" charset="-120"/>
+              </a:rPr>
+              <a:t>3 of 4</a:t>
+            </a:r>
+            <a:endParaRPr lang="en-US" sz="1300" dirty="0"/>
+          </a:p>
+        </p:txBody>
+      </p:sp>
+      <p:sp>
+        <p:nvSpPr>
+          <p:cNvPr id="82" name="Text 80"/>
+          <p:cNvSpPr txBox="1"/>
+          <p:nvPr/>
+        </p:nvSpPr>
+        <p:spPr>
+          <a:xfrm>
+            <a:off x="5047488" y="4185800"/>
             <a:ext cx="868680" cy="248502"/>
           </a:xfrm>
           <a:prstGeom prst="rect">
@@ -5211,45 +5250,6 @@
                 <a:cs typeface="Inter" pitchFamily="34" charset="-120"/>
               </a:rPr>
               <a:t>−83</a:t>
-            </a:r>
-            <a:endParaRPr lang="en-US" sz="1300" dirty="0"/>
-          </a:p>
-        </p:txBody>
-      </p:sp>
-      <p:sp>
-        <p:nvSpPr>
-          <p:cNvPr id="82" name="Text 80"/>
-          <p:cNvSpPr txBox="1"/>
-          <p:nvPr/>
-        </p:nvSpPr>
-        <p:spPr>
-          <a:xfrm>
-            <a:off x="5138928" y="4185800"/>
-            <a:ext cx="777240" cy="248502"/>
-          </a:xfrm>
-          <a:prstGeom prst="rect">
-            <a:avLst/>
-          </a:prstGeom>
-          <a:noFill/>
-          <a:ln/>
-        </p:spPr>
-        <p:txBody>
-          <a:bodyPr wrap="square" lIns="0" tIns="0" rIns="0" bIns="0" rtlCol="0" anchor="ctr"/>
-          <a:lstStyle/>
-          <a:p>
-            <a:pPr algn="r" indent="0" marL="0">
-              <a:buNone/>
-            </a:pPr>
-            <a:r>
-              <a:rPr lang="en-US" sz="1300" dirty="0">
-                <a:solidFill>
-                  <a:srgbClr val="595959"/>
-                </a:solidFill>
-                <a:latin typeface="Inter" pitchFamily="34" charset="0"/>
-                <a:ea typeface="Inter" pitchFamily="34" charset="-122"/>
-                <a:cs typeface="Inter" pitchFamily="34" charset="-120"/>
-              </a:rPr>
-              <a:t>3 of 4</a:t>
             </a:r>
             <a:endParaRPr lang="en-US" sz="1300" dirty="0"/>
           </a:p>
@@ -5401,6 +5401,45 @@
         <p:spPr>
           <a:xfrm>
             <a:off x="4270248" y="4434302"/>
+            <a:ext cx="777240" cy="248502"/>
+          </a:xfrm>
+          <a:prstGeom prst="rect">
+            <a:avLst/>
+          </a:prstGeom>
+          <a:noFill/>
+          <a:ln/>
+        </p:spPr>
+        <p:txBody>
+          <a:bodyPr wrap="square" lIns="0" tIns="0" rIns="0" bIns="0" rtlCol="0" anchor="ctr"/>
+          <a:lstStyle/>
+          <a:p>
+            <a:pPr algn="r" indent="0" marL="0">
+              <a:buNone/>
+            </a:pPr>
+            <a:r>
+              <a:rPr lang="en-US" sz="1300" dirty="0">
+                <a:solidFill>
+                  <a:srgbClr val="595959"/>
+                </a:solidFill>
+                <a:latin typeface="Inter" pitchFamily="34" charset="0"/>
+                <a:ea typeface="Inter" pitchFamily="34" charset="-122"/>
+                <a:cs typeface="Inter" pitchFamily="34" charset="-120"/>
+              </a:rPr>
+              <a:t>2 of 4</a:t>
+            </a:r>
+            <a:endParaRPr lang="en-US" sz="1300" dirty="0"/>
+          </a:p>
+        </p:txBody>
+      </p:sp>
+      <p:sp>
+        <p:nvSpPr>
+          <p:cNvPr id="88" name="Text 86"/>
+          <p:cNvSpPr txBox="1"/>
+          <p:nvPr/>
+        </p:nvSpPr>
+        <p:spPr>
+          <a:xfrm>
+            <a:off x="5047488" y="4434302"/>
             <a:ext cx="868680" cy="248502"/>
           </a:xfrm>
           <a:prstGeom prst="rect">
@@ -5426,45 +5465,6 @@
                 <a:cs typeface="Inter" pitchFamily="34" charset="-120"/>
               </a:rPr>
               <a:t>−452</a:t>
-            </a:r>
-            <a:endParaRPr lang="en-US" sz="1300" dirty="0"/>
-          </a:p>
-        </p:txBody>
-      </p:sp>
-      <p:sp>
-        <p:nvSpPr>
-          <p:cNvPr id="88" name="Text 86"/>
-          <p:cNvSpPr txBox="1"/>
-          <p:nvPr/>
-        </p:nvSpPr>
-        <p:spPr>
-          <a:xfrm>
-            <a:off x="5138928" y="4434302"/>
-            <a:ext cx="777240" cy="248502"/>
-          </a:xfrm>
-          <a:prstGeom prst="rect">
-            <a:avLst/>
-          </a:prstGeom>
-          <a:noFill/>
-          <a:ln/>
-        </p:spPr>
-        <p:txBody>
-          <a:bodyPr wrap="square" lIns="0" tIns="0" rIns="0" bIns="0" rtlCol="0" anchor="ctr"/>
-          <a:lstStyle/>
-          <a:p>
-            <a:pPr algn="r" indent="0" marL="0">
-              <a:buNone/>
-            </a:pPr>
-            <a:r>
-              <a:rPr lang="en-US" sz="1300" dirty="0">
-                <a:solidFill>
-                  <a:srgbClr val="595959"/>
-                </a:solidFill>
-                <a:latin typeface="Inter" pitchFamily="34" charset="0"/>
-                <a:ea typeface="Inter" pitchFamily="34" charset="-122"/>
-                <a:cs typeface="Inter" pitchFamily="34" charset="-120"/>
-              </a:rPr>
-              <a:t>2 of 4</a:t>
             </a:r>
             <a:endParaRPr lang="en-US" sz="1300" dirty="0"/>
           </a:p>
@@ -5616,6 +5616,45 @@
         <p:spPr>
           <a:xfrm>
             <a:off x="4270248" y="4682804"/>
+            <a:ext cx="777240" cy="248502"/>
+          </a:xfrm>
+          <a:prstGeom prst="rect">
+            <a:avLst/>
+          </a:prstGeom>
+          <a:noFill/>
+          <a:ln/>
+        </p:spPr>
+        <p:txBody>
+          <a:bodyPr wrap="square" lIns="0" tIns="0" rIns="0" bIns="0" rtlCol="0" anchor="ctr"/>
+          <a:lstStyle/>
+          <a:p>
+            <a:pPr algn="r" indent="0" marL="0">
+              <a:buNone/>
+            </a:pPr>
+            <a:r>
+              <a:rPr lang="en-US" sz="1300" dirty="0">
+                <a:solidFill>
+                  <a:srgbClr val="595959"/>
+                </a:solidFill>
+                <a:latin typeface="Inter" pitchFamily="34" charset="0"/>
+                <a:ea typeface="Inter" pitchFamily="34" charset="-122"/>
+                <a:cs typeface="Inter" pitchFamily="34" charset="-120"/>
+              </a:rPr>
+              <a:t>3 of 4</a:t>
+            </a:r>
+            <a:endParaRPr lang="en-US" sz="1300" dirty="0"/>
+          </a:p>
+        </p:txBody>
+      </p:sp>
+      <p:sp>
+        <p:nvSpPr>
+          <p:cNvPr id="94" name="Text 92"/>
+          <p:cNvSpPr txBox="1"/>
+          <p:nvPr/>
+        </p:nvSpPr>
+        <p:spPr>
+          <a:xfrm>
+            <a:off x="5047488" y="4682804"/>
             <a:ext cx="868680" cy="248502"/>
           </a:xfrm>
           <a:prstGeom prst="rect">
@@ -5641,45 +5680,6 @@
                 <a:cs typeface="Inter" pitchFamily="34" charset="-120"/>
               </a:rPr>
               <a:t>−569</a:t>
-            </a:r>
-            <a:endParaRPr lang="en-US" sz="1300" dirty="0"/>
-          </a:p>
-        </p:txBody>
-      </p:sp>
-      <p:sp>
-        <p:nvSpPr>
-          <p:cNvPr id="94" name="Text 92"/>
-          <p:cNvSpPr txBox="1"/>
-          <p:nvPr/>
-        </p:nvSpPr>
-        <p:spPr>
-          <a:xfrm>
-            <a:off x="5138928" y="4682804"/>
-            <a:ext cx="777240" cy="248502"/>
-          </a:xfrm>
-          <a:prstGeom prst="rect">
-            <a:avLst/>
-          </a:prstGeom>
-          <a:noFill/>
-          <a:ln/>
-        </p:spPr>
-        <p:txBody>
-          <a:bodyPr wrap="square" lIns="0" tIns="0" rIns="0" bIns="0" rtlCol="0" anchor="ctr"/>
-          <a:lstStyle/>
-          <a:p>
-            <a:pPr algn="r" indent="0" marL="0">
-              <a:buNone/>
-            </a:pPr>
-            <a:r>
-              <a:rPr lang="en-US" sz="1300" dirty="0">
-                <a:solidFill>
-                  <a:srgbClr val="595959"/>
-                </a:solidFill>
-                <a:latin typeface="Inter" pitchFamily="34" charset="0"/>
-                <a:ea typeface="Inter" pitchFamily="34" charset="-122"/>
-                <a:cs typeface="Inter" pitchFamily="34" charset="-120"/>
-              </a:rPr>
-              <a:t>3 of 4</a:t>
             </a:r>
             <a:endParaRPr lang="en-US" sz="1300" dirty="0"/>
           </a:p>
@@ -5831,6 +5831,45 @@
         <p:spPr>
           <a:xfrm>
             <a:off x="4270248" y="4931305"/>
+            <a:ext cx="777240" cy="248502"/>
+          </a:xfrm>
+          <a:prstGeom prst="rect">
+            <a:avLst/>
+          </a:prstGeom>
+          <a:noFill/>
+          <a:ln/>
+        </p:spPr>
+        <p:txBody>
+          <a:bodyPr wrap="square" lIns="0" tIns="0" rIns="0" bIns="0" rtlCol="0" anchor="ctr"/>
+          <a:lstStyle/>
+          <a:p>
+            <a:pPr algn="r" indent="0" marL="0">
+              <a:buNone/>
+            </a:pPr>
+            <a:r>
+              <a:rPr lang="en-US" sz="1300" dirty="0">
+                <a:solidFill>
+                  <a:srgbClr val="595959"/>
+                </a:solidFill>
+                <a:latin typeface="Inter" pitchFamily="34" charset="0"/>
+                <a:ea typeface="Inter" pitchFamily="34" charset="-122"/>
+                <a:cs typeface="Inter" pitchFamily="34" charset="-120"/>
+              </a:rPr>
+              <a:t>3 of 4</a:t>
+            </a:r>
+            <a:endParaRPr lang="en-US" sz="1300" dirty="0"/>
+          </a:p>
+        </p:txBody>
+      </p:sp>
+      <p:sp>
+        <p:nvSpPr>
+          <p:cNvPr id="100" name="Text 98"/>
+          <p:cNvSpPr txBox="1"/>
+          <p:nvPr/>
+        </p:nvSpPr>
+        <p:spPr>
+          <a:xfrm>
+            <a:off x="5047488" y="4931305"/>
             <a:ext cx="868680" cy="248502"/>
           </a:xfrm>
           <a:prstGeom prst="rect">
@@ -5856,45 +5895,6 @@
                 <a:cs typeface="Inter" pitchFamily="34" charset="-120"/>
               </a:rPr>
               <a:t>−660</a:t>
-            </a:r>
-            <a:endParaRPr lang="en-US" sz="1300" dirty="0"/>
-          </a:p>
-        </p:txBody>
-      </p:sp>
-      <p:sp>
-        <p:nvSpPr>
-          <p:cNvPr id="100" name="Text 98"/>
-          <p:cNvSpPr txBox="1"/>
-          <p:nvPr/>
-        </p:nvSpPr>
-        <p:spPr>
-          <a:xfrm>
-            <a:off x="5138928" y="4931305"/>
-            <a:ext cx="777240" cy="248502"/>
-          </a:xfrm>
-          <a:prstGeom prst="rect">
-            <a:avLst/>
-          </a:prstGeom>
-          <a:noFill/>
-          <a:ln/>
-        </p:spPr>
-        <p:txBody>
-          <a:bodyPr wrap="square" lIns="0" tIns="0" rIns="0" bIns="0" rtlCol="0" anchor="ctr"/>
-          <a:lstStyle/>
-          <a:p>
-            <a:pPr algn="r" indent="0" marL="0">
-              <a:buNone/>
-            </a:pPr>
-            <a:r>
-              <a:rPr lang="en-US" sz="1300" dirty="0">
-                <a:solidFill>
-                  <a:srgbClr val="595959"/>
-                </a:solidFill>
-                <a:latin typeface="Inter" pitchFamily="34" charset="0"/>
-                <a:ea typeface="Inter" pitchFamily="34" charset="-122"/>
-                <a:cs typeface="Inter" pitchFamily="34" charset="-120"/>
-              </a:rPr>
-              <a:t>3 of 4</a:t>
             </a:r>
             <a:endParaRPr lang="en-US" sz="1300" dirty="0"/>
           </a:p>
@@ -6046,6 +6046,45 @@
         <p:spPr>
           <a:xfrm>
             <a:off x="4270248" y="5179807"/>
+            <a:ext cx="777240" cy="248502"/>
+          </a:xfrm>
+          <a:prstGeom prst="rect">
+            <a:avLst/>
+          </a:prstGeom>
+          <a:noFill/>
+          <a:ln/>
+        </p:spPr>
+        <p:txBody>
+          <a:bodyPr wrap="square" lIns="0" tIns="0" rIns="0" bIns="0" rtlCol="0" anchor="ctr"/>
+          <a:lstStyle/>
+          <a:p>
+            <a:pPr algn="r" indent="0" marL="0">
+              <a:buNone/>
+            </a:pPr>
+            <a:r>
+              <a:rPr lang="en-US" sz="1300" dirty="0">
+                <a:solidFill>
+                  <a:srgbClr val="595959"/>
+                </a:solidFill>
+                <a:latin typeface="Inter" pitchFamily="34" charset="0"/>
+                <a:ea typeface="Inter" pitchFamily="34" charset="-122"/>
+                <a:cs typeface="Inter" pitchFamily="34" charset="-120"/>
+              </a:rPr>
+              <a:t>3 of 4</a:t>
+            </a:r>
+            <a:endParaRPr lang="en-US" sz="1300" dirty="0"/>
+          </a:p>
+        </p:txBody>
+      </p:sp>
+      <p:sp>
+        <p:nvSpPr>
+          <p:cNvPr id="106" name="Text 104"/>
+          <p:cNvSpPr txBox="1"/>
+          <p:nvPr/>
+        </p:nvSpPr>
+        <p:spPr>
+          <a:xfrm>
+            <a:off x="5047488" y="5179807"/>
             <a:ext cx="868680" cy="248502"/>
           </a:xfrm>
           <a:prstGeom prst="rect">
@@ -6071,45 +6110,6 @@
                 <a:cs typeface="Inter" pitchFamily="34" charset="-120"/>
               </a:rPr>
               <a:t>−783</a:t>
-            </a:r>
-            <a:endParaRPr lang="en-US" sz="1300" dirty="0"/>
-          </a:p>
-        </p:txBody>
-      </p:sp>
-      <p:sp>
-        <p:nvSpPr>
-          <p:cNvPr id="106" name="Text 104"/>
-          <p:cNvSpPr txBox="1"/>
-          <p:nvPr/>
-        </p:nvSpPr>
-        <p:spPr>
-          <a:xfrm>
-            <a:off x="5138928" y="5179807"/>
-            <a:ext cx="777240" cy="248502"/>
-          </a:xfrm>
-          <a:prstGeom prst="rect">
-            <a:avLst/>
-          </a:prstGeom>
-          <a:noFill/>
-          <a:ln/>
-        </p:spPr>
-        <p:txBody>
-          <a:bodyPr wrap="square" lIns="0" tIns="0" rIns="0" bIns="0" rtlCol="0" anchor="ctr"/>
-          <a:lstStyle/>
-          <a:p>
-            <a:pPr algn="r" indent="0" marL="0">
-              <a:buNone/>
-            </a:pPr>
-            <a:r>
-              <a:rPr lang="en-US" sz="1300" dirty="0">
-                <a:solidFill>
-                  <a:srgbClr val="595959"/>
-                </a:solidFill>
-                <a:latin typeface="Inter" pitchFamily="34" charset="0"/>
-                <a:ea typeface="Inter" pitchFamily="34" charset="-122"/>
-                <a:cs typeface="Inter" pitchFamily="34" charset="-120"/>
-              </a:rPr>
-              <a:t>3 of 4</a:t>
             </a:r>
             <a:endParaRPr lang="en-US" sz="1300" dirty="0"/>
           </a:p>
@@ -6261,6 +6261,45 @@
         <p:spPr>
           <a:xfrm>
             <a:off x="4270248" y="5428309"/>
+            <a:ext cx="777240" cy="248502"/>
+          </a:xfrm>
+          <a:prstGeom prst="rect">
+            <a:avLst/>
+          </a:prstGeom>
+          <a:noFill/>
+          <a:ln/>
+        </p:spPr>
+        <p:txBody>
+          <a:bodyPr wrap="square" lIns="0" tIns="0" rIns="0" bIns="0" rtlCol="0" anchor="ctr"/>
+          <a:lstStyle/>
+          <a:p>
+            <a:pPr algn="r" indent="0" marL="0">
+              <a:buNone/>
+            </a:pPr>
+            <a:r>
+              <a:rPr lang="en-US" sz="1300" dirty="0">
+                <a:solidFill>
+                  <a:srgbClr val="595959"/>
+                </a:solidFill>
+                <a:latin typeface="Inter" pitchFamily="34" charset="0"/>
+                <a:ea typeface="Inter" pitchFamily="34" charset="-122"/>
+                <a:cs typeface="Inter" pitchFamily="34" charset="-120"/>
+              </a:rPr>
+              <a:t>4 of 4</a:t>
+            </a:r>
+            <a:endParaRPr lang="en-US" sz="1300" dirty="0"/>
+          </a:p>
+        </p:txBody>
+      </p:sp>
+      <p:sp>
+        <p:nvSpPr>
+          <p:cNvPr id="112" name="Text 110"/>
+          <p:cNvSpPr txBox="1"/>
+          <p:nvPr/>
+        </p:nvSpPr>
+        <p:spPr>
+          <a:xfrm>
+            <a:off x="5047488" y="5428309"/>
             <a:ext cx="868680" cy="248502"/>
           </a:xfrm>
           <a:prstGeom prst="rect">
@@ -6286,45 +6325,6 @@
                 <a:cs typeface="Inter" pitchFamily="34" charset="-120"/>
               </a:rPr>
               <a:t>−568</a:t>
-            </a:r>
-            <a:endParaRPr lang="en-US" sz="1300" dirty="0"/>
-          </a:p>
-        </p:txBody>
-      </p:sp>
-      <p:sp>
-        <p:nvSpPr>
-          <p:cNvPr id="112" name="Text 110"/>
-          <p:cNvSpPr txBox="1"/>
-          <p:nvPr/>
-        </p:nvSpPr>
-        <p:spPr>
-          <a:xfrm>
-            <a:off x="5138928" y="5428309"/>
-            <a:ext cx="777240" cy="248502"/>
-          </a:xfrm>
-          <a:prstGeom prst="rect">
-            <a:avLst/>
-          </a:prstGeom>
-          <a:noFill/>
-          <a:ln/>
-        </p:spPr>
-        <p:txBody>
-          <a:bodyPr wrap="square" lIns="0" tIns="0" rIns="0" bIns="0" rtlCol="0" anchor="ctr"/>
-          <a:lstStyle/>
-          <a:p>
-            <a:pPr algn="r" indent="0" marL="0">
-              <a:buNone/>
-            </a:pPr>
-            <a:r>
-              <a:rPr lang="en-US" sz="1300" dirty="0">
-                <a:solidFill>
-                  <a:srgbClr val="595959"/>
-                </a:solidFill>
-                <a:latin typeface="Inter" pitchFamily="34" charset="0"/>
-                <a:ea typeface="Inter" pitchFamily="34" charset="-122"/>
-                <a:cs typeface="Inter" pitchFamily="34" charset="-120"/>
-              </a:rPr>
-              <a:t>4 of 4</a:t>
             </a:r>
             <a:endParaRPr lang="en-US" sz="1300" dirty="0"/>
           </a:p>
@@ -6476,6 +6476,45 @@
         <p:spPr>
           <a:xfrm>
             <a:off x="4270248" y="5676810"/>
+            <a:ext cx="777240" cy="248502"/>
+          </a:xfrm>
+          <a:prstGeom prst="rect">
+            <a:avLst/>
+          </a:prstGeom>
+          <a:noFill/>
+          <a:ln/>
+        </p:spPr>
+        <p:txBody>
+          <a:bodyPr wrap="square" lIns="0" tIns="0" rIns="0" bIns="0" rtlCol="0" anchor="ctr"/>
+          <a:lstStyle/>
+          <a:p>
+            <a:pPr algn="r" indent="0" marL="0">
+              <a:buNone/>
+            </a:pPr>
+            <a:r>
+              <a:rPr lang="en-US" sz="1300" dirty="0">
+                <a:solidFill>
+                  <a:srgbClr val="595959"/>
+                </a:solidFill>
+                <a:latin typeface="Inter" pitchFamily="34" charset="0"/>
+                <a:ea typeface="Inter" pitchFamily="34" charset="-122"/>
+                <a:cs typeface="Inter" pitchFamily="34" charset="-120"/>
+              </a:rPr>
+              <a:t>4 of 4</a:t>
+            </a:r>
+            <a:endParaRPr lang="en-US" sz="1300" dirty="0"/>
+          </a:p>
+        </p:txBody>
+      </p:sp>
+      <p:sp>
+        <p:nvSpPr>
+          <p:cNvPr id="118" name="Text 116"/>
+          <p:cNvSpPr txBox="1"/>
+          <p:nvPr/>
+        </p:nvSpPr>
+        <p:spPr>
+          <a:xfrm>
+            <a:off x="5047488" y="5676810"/>
             <a:ext cx="868680" cy="248502"/>
           </a:xfrm>
           <a:prstGeom prst="rect">
@@ -6501,45 +6540,6 @@
                 <a:cs typeface="Inter" pitchFamily="34" charset="-120"/>
               </a:rPr>
               <a:t>−697</a:t>
-            </a:r>
-            <a:endParaRPr lang="en-US" sz="1300" dirty="0"/>
-          </a:p>
-        </p:txBody>
-      </p:sp>
-      <p:sp>
-        <p:nvSpPr>
-          <p:cNvPr id="118" name="Text 116"/>
-          <p:cNvSpPr txBox="1"/>
-          <p:nvPr/>
-        </p:nvSpPr>
-        <p:spPr>
-          <a:xfrm>
-            <a:off x="5138928" y="5676810"/>
-            <a:ext cx="777240" cy="248502"/>
-          </a:xfrm>
-          <a:prstGeom prst="rect">
-            <a:avLst/>
-          </a:prstGeom>
-          <a:noFill/>
-          <a:ln/>
-        </p:spPr>
-        <p:txBody>
-          <a:bodyPr wrap="square" lIns="0" tIns="0" rIns="0" bIns="0" rtlCol="0" anchor="ctr"/>
-          <a:lstStyle/>
-          <a:p>
-            <a:pPr algn="r" indent="0" marL="0">
-              <a:buNone/>
-            </a:pPr>
-            <a:r>
-              <a:rPr lang="en-US" sz="1300" dirty="0">
-                <a:solidFill>
-                  <a:srgbClr val="595959"/>
-                </a:solidFill>
-                <a:latin typeface="Inter" pitchFamily="34" charset="0"/>
-                <a:ea typeface="Inter" pitchFamily="34" charset="-122"/>
-                <a:cs typeface="Inter" pitchFamily="34" charset="-120"/>
-              </a:rPr>
-              <a:t>4 of 4</a:t>
             </a:r>
             <a:endParaRPr lang="en-US" sz="1300" dirty="0"/>
           </a:p>
@@ -6691,6 +6691,45 @@
         <p:spPr>
           <a:xfrm>
             <a:off x="9820656" y="1700784"/>
+            <a:ext cx="777240" cy="248502"/>
+          </a:xfrm>
+          <a:prstGeom prst="rect">
+            <a:avLst/>
+          </a:prstGeom>
+          <a:noFill/>
+          <a:ln/>
+        </p:spPr>
+        <p:txBody>
+          <a:bodyPr wrap="square" lIns="0" tIns="0" rIns="0" bIns="0" rtlCol="0" anchor="ctr"/>
+          <a:lstStyle/>
+          <a:p>
+            <a:pPr algn="r" indent="0" marL="0">
+              <a:buNone/>
+            </a:pPr>
+            <a:r>
+              <a:rPr lang="en-US" sz="1300" dirty="0">
+                <a:solidFill>
+                  <a:srgbClr val="595959"/>
+                </a:solidFill>
+                <a:latin typeface="Inter" pitchFamily="34" charset="0"/>
+                <a:ea typeface="Inter" pitchFamily="34" charset="-122"/>
+                <a:cs typeface="Inter" pitchFamily="34" charset="-120"/>
+              </a:rPr>
+              <a:t>4 of 4</a:t>
+            </a:r>
+            <a:endParaRPr lang="en-US" sz="1300" dirty="0"/>
+          </a:p>
+        </p:txBody>
+      </p:sp>
+      <p:sp>
+        <p:nvSpPr>
+          <p:cNvPr id="124" name="Text 122"/>
+          <p:cNvSpPr txBox="1"/>
+          <p:nvPr/>
+        </p:nvSpPr>
+        <p:spPr>
+          <a:xfrm>
+            <a:off x="10597896" y="1700784"/>
             <a:ext cx="868680" cy="248502"/>
           </a:xfrm>
           <a:prstGeom prst="rect">
@@ -6716,45 +6755,6 @@
                 <a:cs typeface="Inter" pitchFamily="34" charset="-120"/>
               </a:rPr>
               <a:t>−640</a:t>
-            </a:r>
-            <a:endParaRPr lang="en-US" sz="1300" dirty="0"/>
-          </a:p>
-        </p:txBody>
-      </p:sp>
-      <p:sp>
-        <p:nvSpPr>
-          <p:cNvPr id="124" name="Text 122"/>
-          <p:cNvSpPr txBox="1"/>
-          <p:nvPr/>
-        </p:nvSpPr>
-        <p:spPr>
-          <a:xfrm>
-            <a:off x="10689336" y="1700784"/>
-            <a:ext cx="777240" cy="248502"/>
-          </a:xfrm>
-          <a:prstGeom prst="rect">
-            <a:avLst/>
-          </a:prstGeom>
-          <a:noFill/>
-          <a:ln/>
-        </p:spPr>
-        <p:txBody>
-          <a:bodyPr wrap="square" lIns="0" tIns="0" rIns="0" bIns="0" rtlCol="0" anchor="ctr"/>
-          <a:lstStyle/>
-          <a:p>
-            <a:pPr algn="r" indent="0" marL="0">
-              <a:buNone/>
-            </a:pPr>
-            <a:r>
-              <a:rPr lang="en-US" sz="1300" dirty="0">
-                <a:solidFill>
-                  <a:srgbClr val="595959"/>
-                </a:solidFill>
-                <a:latin typeface="Inter" pitchFamily="34" charset="0"/>
-                <a:ea typeface="Inter" pitchFamily="34" charset="-122"/>
-                <a:cs typeface="Inter" pitchFamily="34" charset="-120"/>
-              </a:rPr>
-              <a:t>4 of 4</a:t>
             </a:r>
             <a:endParaRPr lang="en-US" sz="1300" dirty="0"/>
           </a:p>
@@ -6906,6 +6906,45 @@
         <p:spPr>
           <a:xfrm>
             <a:off x="9820656" y="1949286"/>
+            <a:ext cx="777240" cy="248502"/>
+          </a:xfrm>
+          <a:prstGeom prst="rect">
+            <a:avLst/>
+          </a:prstGeom>
+          <a:noFill/>
+          <a:ln/>
+        </p:spPr>
+        <p:txBody>
+          <a:bodyPr wrap="square" lIns="0" tIns="0" rIns="0" bIns="0" rtlCol="0" anchor="ctr"/>
+          <a:lstStyle/>
+          <a:p>
+            <a:pPr algn="r" indent="0" marL="0">
+              <a:buNone/>
+            </a:pPr>
+            <a:r>
+              <a:rPr lang="en-US" sz="1300" dirty="0">
+                <a:solidFill>
+                  <a:srgbClr val="595959"/>
+                </a:solidFill>
+                <a:latin typeface="Inter" pitchFamily="34" charset="0"/>
+                <a:ea typeface="Inter" pitchFamily="34" charset="-122"/>
+                <a:cs typeface="Inter" pitchFamily="34" charset="-120"/>
+              </a:rPr>
+              <a:t>4 of 4</a:t>
+            </a:r>
+            <a:endParaRPr lang="en-US" sz="1300" dirty="0"/>
+          </a:p>
+        </p:txBody>
+      </p:sp>
+      <p:sp>
+        <p:nvSpPr>
+          <p:cNvPr id="130" name="Text 128"/>
+          <p:cNvSpPr txBox="1"/>
+          <p:nvPr/>
+        </p:nvSpPr>
+        <p:spPr>
+          <a:xfrm>
+            <a:off x="10597896" y="1949286"/>
             <a:ext cx="868680" cy="248502"/>
           </a:xfrm>
           <a:prstGeom prst="rect">
@@ -6931,45 +6970,6 @@
                 <a:cs typeface="Inter" pitchFamily="34" charset="-120"/>
               </a:rPr>
               <a:t>−954</a:t>
-            </a:r>
-            <a:endParaRPr lang="en-US" sz="1300" dirty="0"/>
-          </a:p>
-        </p:txBody>
-      </p:sp>
-      <p:sp>
-        <p:nvSpPr>
-          <p:cNvPr id="130" name="Text 128"/>
-          <p:cNvSpPr txBox="1"/>
-          <p:nvPr/>
-        </p:nvSpPr>
-        <p:spPr>
-          <a:xfrm>
-            <a:off x="10689336" y="1949286"/>
-            <a:ext cx="777240" cy="248502"/>
-          </a:xfrm>
-          <a:prstGeom prst="rect">
-            <a:avLst/>
-          </a:prstGeom>
-          <a:noFill/>
-          <a:ln/>
-        </p:spPr>
-        <p:txBody>
-          <a:bodyPr wrap="square" lIns="0" tIns="0" rIns="0" bIns="0" rtlCol="0" anchor="ctr"/>
-          <a:lstStyle/>
-          <a:p>
-            <a:pPr algn="r" indent="0" marL="0">
-              <a:buNone/>
-            </a:pPr>
-            <a:r>
-              <a:rPr lang="en-US" sz="1300" dirty="0">
-                <a:solidFill>
-                  <a:srgbClr val="595959"/>
-                </a:solidFill>
-                <a:latin typeface="Inter" pitchFamily="34" charset="0"/>
-                <a:ea typeface="Inter" pitchFamily="34" charset="-122"/>
-                <a:cs typeface="Inter" pitchFamily="34" charset="-120"/>
-              </a:rPr>
-              <a:t>4 of 4</a:t>
             </a:r>
             <a:endParaRPr lang="en-US" sz="1300" dirty="0"/>
           </a:p>
@@ -7121,6 +7121,45 @@
         <p:spPr>
           <a:xfrm>
             <a:off x="9820656" y="2197787"/>
+            <a:ext cx="777240" cy="248502"/>
+          </a:xfrm>
+          <a:prstGeom prst="rect">
+            <a:avLst/>
+          </a:prstGeom>
+          <a:noFill/>
+          <a:ln/>
+        </p:spPr>
+        <p:txBody>
+          <a:bodyPr wrap="square" lIns="0" tIns="0" rIns="0" bIns="0" rtlCol="0" anchor="ctr"/>
+          <a:lstStyle/>
+          <a:p>
+            <a:pPr algn="r" indent="0" marL="0">
+              <a:buNone/>
+            </a:pPr>
+            <a:r>
+              <a:rPr lang="en-US" sz="1300" dirty="0">
+                <a:solidFill>
+                  <a:srgbClr val="595959"/>
+                </a:solidFill>
+                <a:latin typeface="Inter" pitchFamily="34" charset="0"/>
+                <a:ea typeface="Inter" pitchFamily="34" charset="-122"/>
+                <a:cs typeface="Inter" pitchFamily="34" charset="-120"/>
+              </a:rPr>
+              <a:t>4 of 4</a:t>
+            </a:r>
+            <a:endParaRPr lang="en-US" sz="1300" dirty="0"/>
+          </a:p>
+        </p:txBody>
+      </p:sp>
+      <p:sp>
+        <p:nvSpPr>
+          <p:cNvPr id="136" name="Text 134"/>
+          <p:cNvSpPr txBox="1"/>
+          <p:nvPr/>
+        </p:nvSpPr>
+        <p:spPr>
+          <a:xfrm>
+            <a:off x="10597896" y="2197787"/>
             <a:ext cx="868680" cy="248502"/>
           </a:xfrm>
           <a:prstGeom prst="rect">
@@ -7146,45 +7185,6 @@
                 <a:cs typeface="Inter" pitchFamily="34" charset="-120"/>
               </a:rPr>
               <a:t>−1,100</a:t>
-            </a:r>
-            <a:endParaRPr lang="en-US" sz="1300" dirty="0"/>
-          </a:p>
-        </p:txBody>
-      </p:sp>
-      <p:sp>
-        <p:nvSpPr>
-          <p:cNvPr id="136" name="Text 134"/>
-          <p:cNvSpPr txBox="1"/>
-          <p:nvPr/>
-        </p:nvSpPr>
-        <p:spPr>
-          <a:xfrm>
-            <a:off x="10689336" y="2197787"/>
-            <a:ext cx="777240" cy="248502"/>
-          </a:xfrm>
-          <a:prstGeom prst="rect">
-            <a:avLst/>
-          </a:prstGeom>
-          <a:noFill/>
-          <a:ln/>
-        </p:spPr>
-        <p:txBody>
-          <a:bodyPr wrap="square" lIns="0" tIns="0" rIns="0" bIns="0" rtlCol="0" anchor="ctr"/>
-          <a:lstStyle/>
-          <a:p>
-            <a:pPr algn="r" indent="0" marL="0">
-              <a:buNone/>
-            </a:pPr>
-            <a:r>
-              <a:rPr lang="en-US" sz="1300" dirty="0">
-                <a:solidFill>
-                  <a:srgbClr val="595959"/>
-                </a:solidFill>
-                <a:latin typeface="Inter" pitchFamily="34" charset="0"/>
-                <a:ea typeface="Inter" pitchFamily="34" charset="-122"/>
-                <a:cs typeface="Inter" pitchFamily="34" charset="-120"/>
-              </a:rPr>
-              <a:t>4 of 4</a:t>
             </a:r>
             <a:endParaRPr lang="en-US" sz="1300" dirty="0"/>
           </a:p>
@@ -7336,6 +7336,45 @@
         <p:spPr>
           <a:xfrm>
             <a:off x="9820656" y="2446289"/>
+            <a:ext cx="777240" cy="248502"/>
+          </a:xfrm>
+          <a:prstGeom prst="rect">
+            <a:avLst/>
+          </a:prstGeom>
+          <a:noFill/>
+          <a:ln/>
+        </p:spPr>
+        <p:txBody>
+          <a:bodyPr wrap="square" lIns="0" tIns="0" rIns="0" bIns="0" rtlCol="0" anchor="ctr"/>
+          <a:lstStyle/>
+          <a:p>
+            <a:pPr algn="r" indent="0" marL="0">
+              <a:buNone/>
+            </a:pPr>
+            <a:r>
+              <a:rPr lang="en-US" sz="1300" dirty="0">
+                <a:solidFill>
+                  <a:srgbClr val="595959"/>
+                </a:solidFill>
+                <a:latin typeface="Inter" pitchFamily="34" charset="0"/>
+                <a:ea typeface="Inter" pitchFamily="34" charset="-122"/>
+                <a:cs typeface="Inter" pitchFamily="34" charset="-120"/>
+              </a:rPr>
+              <a:t>3 of 3</a:t>
+            </a:r>
+            <a:endParaRPr lang="en-US" sz="1300" dirty="0"/>
+          </a:p>
+        </p:txBody>
+      </p:sp>
+      <p:sp>
+        <p:nvSpPr>
+          <p:cNvPr id="142" name="Text 140"/>
+          <p:cNvSpPr txBox="1"/>
+          <p:nvPr/>
+        </p:nvSpPr>
+        <p:spPr>
+          <a:xfrm>
+            <a:off x="10597896" y="2446289"/>
             <a:ext cx="868680" cy="248502"/>
           </a:xfrm>
           <a:prstGeom prst="rect">
@@ -7361,45 +7400,6 @@
                 <a:cs typeface="Inter" pitchFamily="34" charset="-120"/>
               </a:rPr>
               <a:t>−827</a:t>
-            </a:r>
-            <a:endParaRPr lang="en-US" sz="1300" dirty="0"/>
-          </a:p>
-        </p:txBody>
-      </p:sp>
-      <p:sp>
-        <p:nvSpPr>
-          <p:cNvPr id="142" name="Text 140"/>
-          <p:cNvSpPr txBox="1"/>
-          <p:nvPr/>
-        </p:nvSpPr>
-        <p:spPr>
-          <a:xfrm>
-            <a:off x="10689336" y="2446289"/>
-            <a:ext cx="777240" cy="248502"/>
-          </a:xfrm>
-          <a:prstGeom prst="rect">
-            <a:avLst/>
-          </a:prstGeom>
-          <a:noFill/>
-          <a:ln/>
-        </p:spPr>
-        <p:txBody>
-          <a:bodyPr wrap="square" lIns="0" tIns="0" rIns="0" bIns="0" rtlCol="0" anchor="ctr"/>
-          <a:lstStyle/>
-          <a:p>
-            <a:pPr algn="r" indent="0" marL="0">
-              <a:buNone/>
-            </a:pPr>
-            <a:r>
-              <a:rPr lang="en-US" sz="1300" dirty="0">
-                <a:solidFill>
-                  <a:srgbClr val="595959"/>
-                </a:solidFill>
-                <a:latin typeface="Inter" pitchFamily="34" charset="0"/>
-                <a:ea typeface="Inter" pitchFamily="34" charset="-122"/>
-                <a:cs typeface="Inter" pitchFamily="34" charset="-120"/>
-              </a:rPr>
-              <a:t>3 of 3</a:t>
             </a:r>
             <a:endParaRPr lang="en-US" sz="1300" dirty="0"/>
           </a:p>
@@ -7551,6 +7551,45 @@
         <p:spPr>
           <a:xfrm>
             <a:off x="9820656" y="2694791"/>
+            <a:ext cx="777240" cy="248502"/>
+          </a:xfrm>
+          <a:prstGeom prst="rect">
+            <a:avLst/>
+          </a:prstGeom>
+          <a:noFill/>
+          <a:ln/>
+        </p:spPr>
+        <p:txBody>
+          <a:bodyPr wrap="square" lIns="0" tIns="0" rIns="0" bIns="0" rtlCol="0" anchor="ctr"/>
+          <a:lstStyle/>
+          <a:p>
+            <a:pPr algn="r" indent="0" marL="0">
+              <a:buNone/>
+            </a:pPr>
+            <a:r>
+              <a:rPr lang="en-US" sz="1300" dirty="0">
+                <a:solidFill>
+                  <a:srgbClr val="595959"/>
+                </a:solidFill>
+                <a:latin typeface="Inter" pitchFamily="34" charset="0"/>
+                <a:ea typeface="Inter" pitchFamily="34" charset="-122"/>
+                <a:cs typeface="Inter" pitchFamily="34" charset="-120"/>
+              </a:rPr>
+              <a:t>4 of 4</a:t>
+            </a:r>
+            <a:endParaRPr lang="en-US" sz="1300" dirty="0"/>
+          </a:p>
+        </p:txBody>
+      </p:sp>
+      <p:sp>
+        <p:nvSpPr>
+          <p:cNvPr id="148" name="Text 146"/>
+          <p:cNvSpPr txBox="1"/>
+          <p:nvPr/>
+        </p:nvSpPr>
+        <p:spPr>
+          <a:xfrm>
+            <a:off x="10597896" y="2694791"/>
             <a:ext cx="868680" cy="248502"/>
           </a:xfrm>
           <a:prstGeom prst="rect">
@@ -7576,45 +7615,6 @@
                 <a:cs typeface="Inter" pitchFamily="34" charset="-120"/>
               </a:rPr>
               <a:t>−1,068</a:t>
-            </a:r>
-            <a:endParaRPr lang="en-US" sz="1300" dirty="0"/>
-          </a:p>
-        </p:txBody>
-      </p:sp>
-      <p:sp>
-        <p:nvSpPr>
-          <p:cNvPr id="148" name="Text 146"/>
-          <p:cNvSpPr txBox="1"/>
-          <p:nvPr/>
-        </p:nvSpPr>
-        <p:spPr>
-          <a:xfrm>
-            <a:off x="10689336" y="2694791"/>
-            <a:ext cx="777240" cy="248502"/>
-          </a:xfrm>
-          <a:prstGeom prst="rect">
-            <a:avLst/>
-          </a:prstGeom>
-          <a:noFill/>
-          <a:ln/>
-        </p:spPr>
-        <p:txBody>
-          <a:bodyPr wrap="square" lIns="0" tIns="0" rIns="0" bIns="0" rtlCol="0" anchor="ctr"/>
-          <a:lstStyle/>
-          <a:p>
-            <a:pPr algn="r" indent="0" marL="0">
-              <a:buNone/>
-            </a:pPr>
-            <a:r>
-              <a:rPr lang="en-US" sz="1300" dirty="0">
-                <a:solidFill>
-                  <a:srgbClr val="595959"/>
-                </a:solidFill>
-                <a:latin typeface="Inter" pitchFamily="34" charset="0"/>
-                <a:ea typeface="Inter" pitchFamily="34" charset="-122"/>
-                <a:cs typeface="Inter" pitchFamily="34" charset="-120"/>
-              </a:rPr>
-              <a:t>4 of 4</a:t>
             </a:r>
             <a:endParaRPr lang="en-US" sz="1300" dirty="0"/>
           </a:p>
@@ -7766,6 +7766,45 @@
         <p:spPr>
           <a:xfrm>
             <a:off x="9820656" y="2943292"/>
+            <a:ext cx="777240" cy="248502"/>
+          </a:xfrm>
+          <a:prstGeom prst="rect">
+            <a:avLst/>
+          </a:prstGeom>
+          <a:noFill/>
+          <a:ln/>
+        </p:spPr>
+        <p:txBody>
+          <a:bodyPr wrap="square" lIns="0" tIns="0" rIns="0" bIns="0" rtlCol="0" anchor="ctr"/>
+          <a:lstStyle/>
+          <a:p>
+            <a:pPr algn="r" indent="0" marL="0">
+              <a:buNone/>
+            </a:pPr>
+            <a:r>
+              <a:rPr lang="en-US" sz="1300" dirty="0">
+                <a:solidFill>
+                  <a:srgbClr val="595959"/>
+                </a:solidFill>
+                <a:latin typeface="Inter" pitchFamily="34" charset="0"/>
+                <a:ea typeface="Inter" pitchFamily="34" charset="-122"/>
+                <a:cs typeface="Inter" pitchFamily="34" charset="-120"/>
+              </a:rPr>
+              <a:t>3 of 4</a:t>
+            </a:r>
+            <a:endParaRPr lang="en-US" sz="1300" dirty="0"/>
+          </a:p>
+        </p:txBody>
+      </p:sp>
+      <p:sp>
+        <p:nvSpPr>
+          <p:cNvPr id="154" name="Text 152"/>
+          <p:cNvSpPr txBox="1"/>
+          <p:nvPr/>
+        </p:nvSpPr>
+        <p:spPr>
+          <a:xfrm>
+            <a:off x="10597896" y="2943292"/>
             <a:ext cx="868680" cy="248502"/>
           </a:xfrm>
           <a:prstGeom prst="rect">
@@ -7791,45 +7830,6 @@
                 <a:cs typeface="Inter" pitchFamily="34" charset="-120"/>
               </a:rPr>
               <a:t>−1,717</a:t>
-            </a:r>
-            <a:endParaRPr lang="en-US" sz="1300" dirty="0"/>
-          </a:p>
-        </p:txBody>
-      </p:sp>
-      <p:sp>
-        <p:nvSpPr>
-          <p:cNvPr id="154" name="Text 152"/>
-          <p:cNvSpPr txBox="1"/>
-          <p:nvPr/>
-        </p:nvSpPr>
-        <p:spPr>
-          <a:xfrm>
-            <a:off x="10689336" y="2943292"/>
-            <a:ext cx="777240" cy="248502"/>
-          </a:xfrm>
-          <a:prstGeom prst="rect">
-            <a:avLst/>
-          </a:prstGeom>
-          <a:noFill/>
-          <a:ln/>
-        </p:spPr>
-        <p:txBody>
-          <a:bodyPr wrap="square" lIns="0" tIns="0" rIns="0" bIns="0" rtlCol="0" anchor="ctr"/>
-          <a:lstStyle/>
-          <a:p>
-            <a:pPr algn="r" indent="0" marL="0">
-              <a:buNone/>
-            </a:pPr>
-            <a:r>
-              <a:rPr lang="en-US" sz="1300" dirty="0">
-                <a:solidFill>
-                  <a:srgbClr val="595959"/>
-                </a:solidFill>
-                <a:latin typeface="Inter" pitchFamily="34" charset="0"/>
-                <a:ea typeface="Inter" pitchFamily="34" charset="-122"/>
-                <a:cs typeface="Inter" pitchFamily="34" charset="-120"/>
-              </a:rPr>
-              <a:t>3 of 4</a:t>
             </a:r>
             <a:endParaRPr lang="en-US" sz="1300" dirty="0"/>
           </a:p>
@@ -7981,6 +7981,45 @@
         <p:spPr>
           <a:xfrm>
             <a:off x="9820656" y="3191794"/>
+            <a:ext cx="777240" cy="248502"/>
+          </a:xfrm>
+          <a:prstGeom prst="rect">
+            <a:avLst/>
+          </a:prstGeom>
+          <a:noFill/>
+          <a:ln/>
+        </p:spPr>
+        <p:txBody>
+          <a:bodyPr wrap="square" lIns="0" tIns="0" rIns="0" bIns="0" rtlCol="0" anchor="ctr"/>
+          <a:lstStyle/>
+          <a:p>
+            <a:pPr algn="r" indent="0" marL="0">
+              <a:buNone/>
+            </a:pPr>
+            <a:r>
+              <a:rPr lang="en-US" sz="1300" dirty="0">
+                <a:solidFill>
+                  <a:srgbClr val="595959"/>
+                </a:solidFill>
+                <a:latin typeface="Inter" pitchFamily="34" charset="0"/>
+                <a:ea typeface="Inter" pitchFamily="34" charset="-122"/>
+                <a:cs typeface="Inter" pitchFamily="34" charset="-120"/>
+              </a:rPr>
+              <a:t>3 of 4</a:t>
+            </a:r>
+            <a:endParaRPr lang="en-US" sz="1300" dirty="0"/>
+          </a:p>
+        </p:txBody>
+      </p:sp>
+      <p:sp>
+        <p:nvSpPr>
+          <p:cNvPr id="160" name="Text 158"/>
+          <p:cNvSpPr txBox="1"/>
+          <p:nvPr/>
+        </p:nvSpPr>
+        <p:spPr>
+          <a:xfrm>
+            <a:off x="10597896" y="3191794"/>
             <a:ext cx="868680" cy="248502"/>
           </a:xfrm>
           <a:prstGeom prst="rect">
@@ -8006,45 +8045,6 @@
                 <a:cs typeface="Inter" pitchFamily="34" charset="-120"/>
               </a:rPr>
               <a:t>−1,613</a:t>
-            </a:r>
-            <a:endParaRPr lang="en-US" sz="1300" dirty="0"/>
-          </a:p>
-        </p:txBody>
-      </p:sp>
-      <p:sp>
-        <p:nvSpPr>
-          <p:cNvPr id="160" name="Text 158"/>
-          <p:cNvSpPr txBox="1"/>
-          <p:nvPr/>
-        </p:nvSpPr>
-        <p:spPr>
-          <a:xfrm>
-            <a:off x="10689336" y="3191794"/>
-            <a:ext cx="777240" cy="248502"/>
-          </a:xfrm>
-          <a:prstGeom prst="rect">
-            <a:avLst/>
-          </a:prstGeom>
-          <a:noFill/>
-          <a:ln/>
-        </p:spPr>
-        <p:txBody>
-          <a:bodyPr wrap="square" lIns="0" tIns="0" rIns="0" bIns="0" rtlCol="0" anchor="ctr"/>
-          <a:lstStyle/>
-          <a:p>
-            <a:pPr algn="r" indent="0" marL="0">
-              <a:buNone/>
-            </a:pPr>
-            <a:r>
-              <a:rPr lang="en-US" sz="1300" dirty="0">
-                <a:solidFill>
-                  <a:srgbClr val="595959"/>
-                </a:solidFill>
-                <a:latin typeface="Inter" pitchFamily="34" charset="0"/>
-                <a:ea typeface="Inter" pitchFamily="34" charset="-122"/>
-                <a:cs typeface="Inter" pitchFamily="34" charset="-120"/>
-              </a:rPr>
-              <a:t>3 of 4</a:t>
             </a:r>
             <a:endParaRPr lang="en-US" sz="1300" dirty="0"/>
           </a:p>
@@ -8196,6 +8196,45 @@
         <p:spPr>
           <a:xfrm>
             <a:off x="9820656" y="3440296"/>
+            <a:ext cx="777240" cy="248502"/>
+          </a:xfrm>
+          <a:prstGeom prst="rect">
+            <a:avLst/>
+          </a:prstGeom>
+          <a:noFill/>
+          <a:ln/>
+        </p:spPr>
+        <p:txBody>
+          <a:bodyPr wrap="square" lIns="0" tIns="0" rIns="0" bIns="0" rtlCol="0" anchor="ctr"/>
+          <a:lstStyle/>
+          <a:p>
+            <a:pPr algn="r" indent="0" marL="0">
+              <a:buNone/>
+            </a:pPr>
+            <a:r>
+              <a:rPr lang="en-US" sz="1300" dirty="0">
+                <a:solidFill>
+                  <a:srgbClr val="595959"/>
+                </a:solidFill>
+                <a:latin typeface="Inter" pitchFamily="34" charset="0"/>
+                <a:ea typeface="Inter" pitchFamily="34" charset="-122"/>
+                <a:cs typeface="Inter" pitchFamily="34" charset="-120"/>
+              </a:rPr>
+              <a:t>4 of 4</a:t>
+            </a:r>
+            <a:endParaRPr lang="en-US" sz="1300" dirty="0"/>
+          </a:p>
+        </p:txBody>
+      </p:sp>
+      <p:sp>
+        <p:nvSpPr>
+          <p:cNvPr id="166" name="Text 164"/>
+          <p:cNvSpPr txBox="1"/>
+          <p:nvPr/>
+        </p:nvSpPr>
+        <p:spPr>
+          <a:xfrm>
+            <a:off x="10597896" y="3440296"/>
             <a:ext cx="868680" cy="248502"/>
           </a:xfrm>
           <a:prstGeom prst="rect">
@@ -8221,45 +8260,6 @@
                 <a:cs typeface="Inter" pitchFamily="34" charset="-120"/>
               </a:rPr>
               <a:t>−1,257</a:t>
-            </a:r>
-            <a:endParaRPr lang="en-US" sz="1300" dirty="0"/>
-          </a:p>
-        </p:txBody>
-      </p:sp>
-      <p:sp>
-        <p:nvSpPr>
-          <p:cNvPr id="166" name="Text 164"/>
-          <p:cNvSpPr txBox="1"/>
-          <p:nvPr/>
-        </p:nvSpPr>
-        <p:spPr>
-          <a:xfrm>
-            <a:off x="10689336" y="3440296"/>
-            <a:ext cx="777240" cy="248502"/>
-          </a:xfrm>
-          <a:prstGeom prst="rect">
-            <a:avLst/>
-          </a:prstGeom>
-          <a:noFill/>
-          <a:ln/>
-        </p:spPr>
-        <p:txBody>
-          <a:bodyPr wrap="square" lIns="0" tIns="0" rIns="0" bIns="0" rtlCol="0" anchor="ctr"/>
-          <a:lstStyle/>
-          <a:p>
-            <a:pPr algn="r" indent="0" marL="0">
-              <a:buNone/>
-            </a:pPr>
-            <a:r>
-              <a:rPr lang="en-US" sz="1300" dirty="0">
-                <a:solidFill>
-                  <a:srgbClr val="595959"/>
-                </a:solidFill>
-                <a:latin typeface="Inter" pitchFamily="34" charset="0"/>
-                <a:ea typeface="Inter" pitchFamily="34" charset="-122"/>
-                <a:cs typeface="Inter" pitchFamily="34" charset="-120"/>
-              </a:rPr>
-              <a:t>4 of 4</a:t>
             </a:r>
             <a:endParaRPr lang="en-US" sz="1300" dirty="0"/>
           </a:p>
@@ -8411,6 +8411,45 @@
         <p:spPr>
           <a:xfrm>
             <a:off x="9820656" y="3688797"/>
+            <a:ext cx="777240" cy="248502"/>
+          </a:xfrm>
+          <a:prstGeom prst="rect">
+            <a:avLst/>
+          </a:prstGeom>
+          <a:noFill/>
+          <a:ln/>
+        </p:spPr>
+        <p:txBody>
+          <a:bodyPr wrap="square" lIns="0" tIns="0" rIns="0" bIns="0" rtlCol="0" anchor="ctr"/>
+          <a:lstStyle/>
+          <a:p>
+            <a:pPr algn="r" indent="0" marL="0">
+              <a:buNone/>
+            </a:pPr>
+            <a:r>
+              <a:rPr lang="en-US" sz="1300" dirty="0">
+                <a:solidFill>
+                  <a:srgbClr val="595959"/>
+                </a:solidFill>
+                <a:latin typeface="Inter" pitchFamily="34" charset="0"/>
+                <a:ea typeface="Inter" pitchFamily="34" charset="-122"/>
+                <a:cs typeface="Inter" pitchFamily="34" charset="-120"/>
+              </a:rPr>
+              <a:t>2 of 2</a:t>
+            </a:r>
+            <a:endParaRPr lang="en-US" sz="1300" dirty="0"/>
+          </a:p>
+        </p:txBody>
+      </p:sp>
+      <p:sp>
+        <p:nvSpPr>
+          <p:cNvPr id="172" name="Text 170"/>
+          <p:cNvSpPr txBox="1"/>
+          <p:nvPr/>
+        </p:nvSpPr>
+        <p:spPr>
+          <a:xfrm>
+            <a:off x="10597896" y="3688797"/>
             <a:ext cx="868680" cy="248502"/>
           </a:xfrm>
           <a:prstGeom prst="rect">
@@ -8436,45 +8475,6 @@
                 <a:cs typeface="Inter" pitchFamily="34" charset="-120"/>
               </a:rPr>
               <a:t>−1,152</a:t>
-            </a:r>
-            <a:endParaRPr lang="en-US" sz="1300" dirty="0"/>
-          </a:p>
-        </p:txBody>
-      </p:sp>
-      <p:sp>
-        <p:nvSpPr>
-          <p:cNvPr id="172" name="Text 170"/>
-          <p:cNvSpPr txBox="1"/>
-          <p:nvPr/>
-        </p:nvSpPr>
-        <p:spPr>
-          <a:xfrm>
-            <a:off x="10689336" y="3688797"/>
-            <a:ext cx="777240" cy="248502"/>
-          </a:xfrm>
-          <a:prstGeom prst="rect">
-            <a:avLst/>
-          </a:prstGeom>
-          <a:noFill/>
-          <a:ln/>
-        </p:spPr>
-        <p:txBody>
-          <a:bodyPr wrap="square" lIns="0" tIns="0" rIns="0" bIns="0" rtlCol="0" anchor="ctr"/>
-          <a:lstStyle/>
-          <a:p>
-            <a:pPr algn="r" indent="0" marL="0">
-              <a:buNone/>
-            </a:pPr>
-            <a:r>
-              <a:rPr lang="en-US" sz="1300" dirty="0">
-                <a:solidFill>
-                  <a:srgbClr val="595959"/>
-                </a:solidFill>
-                <a:latin typeface="Inter" pitchFamily="34" charset="0"/>
-                <a:ea typeface="Inter" pitchFamily="34" charset="-122"/>
-                <a:cs typeface="Inter" pitchFamily="34" charset="-120"/>
-              </a:rPr>
-              <a:t>2 of 2</a:t>
             </a:r>
             <a:endParaRPr lang="en-US" sz="1300" dirty="0"/>
           </a:p>
@@ -8626,6 +8626,45 @@
         <p:spPr>
           <a:xfrm>
             <a:off x="9820656" y="3937299"/>
+            <a:ext cx="777240" cy="248502"/>
+          </a:xfrm>
+          <a:prstGeom prst="rect">
+            <a:avLst/>
+          </a:prstGeom>
+          <a:noFill/>
+          <a:ln/>
+        </p:spPr>
+        <p:txBody>
+          <a:bodyPr wrap="square" lIns="0" tIns="0" rIns="0" bIns="0" rtlCol="0" anchor="ctr"/>
+          <a:lstStyle/>
+          <a:p>
+            <a:pPr algn="r" indent="0" marL="0">
+              <a:buNone/>
+            </a:pPr>
+            <a:r>
+              <a:rPr lang="en-US" sz="1300" dirty="0">
+                <a:solidFill>
+                  <a:srgbClr val="595959"/>
+                </a:solidFill>
+                <a:latin typeface="Inter" pitchFamily="34" charset="0"/>
+                <a:ea typeface="Inter" pitchFamily="34" charset="-122"/>
+                <a:cs typeface="Inter" pitchFamily="34" charset="-120"/>
+              </a:rPr>
+              <a:t>4 of 4</a:t>
+            </a:r>
+            <a:endParaRPr lang="en-US" sz="1300" dirty="0"/>
+          </a:p>
+        </p:txBody>
+      </p:sp>
+      <p:sp>
+        <p:nvSpPr>
+          <p:cNvPr id="178" name="Text 176"/>
+          <p:cNvSpPr txBox="1"/>
+          <p:nvPr/>
+        </p:nvSpPr>
+        <p:spPr>
+          <a:xfrm>
+            <a:off x="10597896" y="3937299"/>
             <a:ext cx="868680" cy="248502"/>
           </a:xfrm>
           <a:prstGeom prst="rect">
@@ -8651,45 +8690,6 @@
                 <a:cs typeface="Inter" pitchFamily="34" charset="-120"/>
               </a:rPr>
               <a:t>−1,906</a:t>
-            </a:r>
-            <a:endParaRPr lang="en-US" sz="1300" dirty="0"/>
-          </a:p>
-        </p:txBody>
-      </p:sp>
-      <p:sp>
-        <p:nvSpPr>
-          <p:cNvPr id="178" name="Text 176"/>
-          <p:cNvSpPr txBox="1"/>
-          <p:nvPr/>
-        </p:nvSpPr>
-        <p:spPr>
-          <a:xfrm>
-            <a:off x="10689336" y="3937299"/>
-            <a:ext cx="777240" cy="248502"/>
-          </a:xfrm>
-          <a:prstGeom prst="rect">
-            <a:avLst/>
-          </a:prstGeom>
-          <a:noFill/>
-          <a:ln/>
-        </p:spPr>
-        <p:txBody>
-          <a:bodyPr wrap="square" lIns="0" tIns="0" rIns="0" bIns="0" rtlCol="0" anchor="ctr"/>
-          <a:lstStyle/>
-          <a:p>
-            <a:pPr algn="r" indent="0" marL="0">
-              <a:buNone/>
-            </a:pPr>
-            <a:r>
-              <a:rPr lang="en-US" sz="1300" dirty="0">
-                <a:solidFill>
-                  <a:srgbClr val="595959"/>
-                </a:solidFill>
-                <a:latin typeface="Inter" pitchFamily="34" charset="0"/>
-                <a:ea typeface="Inter" pitchFamily="34" charset="-122"/>
-                <a:cs typeface="Inter" pitchFamily="34" charset="-120"/>
-              </a:rPr>
-              <a:t>4 of 4</a:t>
             </a:r>
             <a:endParaRPr lang="en-US" sz="1300" dirty="0"/>
           </a:p>
@@ -8841,6 +8841,45 @@
         <p:spPr>
           <a:xfrm>
             <a:off x="9820656" y="4185800"/>
+            <a:ext cx="777240" cy="248502"/>
+          </a:xfrm>
+          <a:prstGeom prst="rect">
+            <a:avLst/>
+          </a:prstGeom>
+          <a:noFill/>
+          <a:ln/>
+        </p:spPr>
+        <p:txBody>
+          <a:bodyPr wrap="square" lIns="0" tIns="0" rIns="0" bIns="0" rtlCol="0" anchor="ctr"/>
+          <a:lstStyle/>
+          <a:p>
+            <a:pPr algn="r" indent="0" marL="0">
+              <a:buNone/>
+            </a:pPr>
+            <a:r>
+              <a:rPr lang="en-US" sz="1300" dirty="0">
+                <a:solidFill>
+                  <a:srgbClr val="595959"/>
+                </a:solidFill>
+                <a:latin typeface="Inter" pitchFamily="34" charset="0"/>
+                <a:ea typeface="Inter" pitchFamily="34" charset="-122"/>
+                <a:cs typeface="Inter" pitchFamily="34" charset="-120"/>
+              </a:rPr>
+              <a:t>4 of 4</a:t>
+            </a:r>
+            <a:endParaRPr lang="en-US" sz="1300" dirty="0"/>
+          </a:p>
+        </p:txBody>
+      </p:sp>
+      <p:sp>
+        <p:nvSpPr>
+          <p:cNvPr id="184" name="Text 182"/>
+          <p:cNvSpPr txBox="1"/>
+          <p:nvPr/>
+        </p:nvSpPr>
+        <p:spPr>
+          <a:xfrm>
+            <a:off x="10597896" y="4185800"/>
             <a:ext cx="868680" cy="248502"/>
           </a:xfrm>
           <a:prstGeom prst="rect">
@@ -8866,45 +8905,6 @@
                 <a:cs typeface="Inter" pitchFamily="34" charset="-120"/>
               </a:rPr>
               <a:t>−1,863</a:t>
-            </a:r>
-            <a:endParaRPr lang="en-US" sz="1300" dirty="0"/>
-          </a:p>
-        </p:txBody>
-      </p:sp>
-      <p:sp>
-        <p:nvSpPr>
-          <p:cNvPr id="184" name="Text 182"/>
-          <p:cNvSpPr txBox="1"/>
-          <p:nvPr/>
-        </p:nvSpPr>
-        <p:spPr>
-          <a:xfrm>
-            <a:off x="10689336" y="4185800"/>
-            <a:ext cx="777240" cy="248502"/>
-          </a:xfrm>
-          <a:prstGeom prst="rect">
-            <a:avLst/>
-          </a:prstGeom>
-          <a:noFill/>
-          <a:ln/>
-        </p:spPr>
-        <p:txBody>
-          <a:bodyPr wrap="square" lIns="0" tIns="0" rIns="0" bIns="0" rtlCol="0" anchor="ctr"/>
-          <a:lstStyle/>
-          <a:p>
-            <a:pPr algn="r" indent="0" marL="0">
-              <a:buNone/>
-            </a:pPr>
-            <a:r>
-              <a:rPr lang="en-US" sz="1300" dirty="0">
-                <a:solidFill>
-                  <a:srgbClr val="595959"/>
-                </a:solidFill>
-                <a:latin typeface="Inter" pitchFamily="34" charset="0"/>
-                <a:ea typeface="Inter" pitchFamily="34" charset="-122"/>
-                <a:cs typeface="Inter" pitchFamily="34" charset="-120"/>
-              </a:rPr>
-              <a:t>4 of 4</a:t>
             </a:r>
             <a:endParaRPr lang="en-US" sz="1300" dirty="0"/>
           </a:p>
@@ -9056,6 +9056,45 @@
         <p:spPr>
           <a:xfrm>
             <a:off x="9820656" y="4434302"/>
+            <a:ext cx="777240" cy="248502"/>
+          </a:xfrm>
+          <a:prstGeom prst="rect">
+            <a:avLst/>
+          </a:prstGeom>
+          <a:noFill/>
+          <a:ln/>
+        </p:spPr>
+        <p:txBody>
+          <a:bodyPr wrap="square" lIns="0" tIns="0" rIns="0" bIns="0" rtlCol="0" anchor="ctr"/>
+          <a:lstStyle/>
+          <a:p>
+            <a:pPr algn="r" indent="0" marL="0">
+              <a:buNone/>
+            </a:pPr>
+            <a:r>
+              <a:rPr lang="en-US" sz="1300" dirty="0">
+                <a:solidFill>
+                  <a:srgbClr val="595959"/>
+                </a:solidFill>
+                <a:latin typeface="Inter" pitchFamily="34" charset="0"/>
+                <a:ea typeface="Inter" pitchFamily="34" charset="-122"/>
+                <a:cs typeface="Inter" pitchFamily="34" charset="-120"/>
+              </a:rPr>
+              <a:t>4 of 4</a:t>
+            </a:r>
+            <a:endParaRPr lang="en-US" sz="1300" dirty="0"/>
+          </a:p>
+        </p:txBody>
+      </p:sp>
+      <p:sp>
+        <p:nvSpPr>
+          <p:cNvPr id="190" name="Text 188"/>
+          <p:cNvSpPr txBox="1"/>
+          <p:nvPr/>
+        </p:nvSpPr>
+        <p:spPr>
+          <a:xfrm>
+            <a:off x="10597896" y="4434302"/>
             <a:ext cx="868680" cy="248502"/>
           </a:xfrm>
           <a:prstGeom prst="rect">
@@ -9081,45 +9120,6 @@
                 <a:cs typeface="Inter" pitchFamily="34" charset="-120"/>
               </a:rPr>
               <a:t>−1,708</a:t>
-            </a:r>
-            <a:endParaRPr lang="en-US" sz="1300" dirty="0"/>
-          </a:p>
-        </p:txBody>
-      </p:sp>
-      <p:sp>
-        <p:nvSpPr>
-          <p:cNvPr id="190" name="Text 188"/>
-          <p:cNvSpPr txBox="1"/>
-          <p:nvPr/>
-        </p:nvSpPr>
-        <p:spPr>
-          <a:xfrm>
-            <a:off x="10689336" y="4434302"/>
-            <a:ext cx="777240" cy="248502"/>
-          </a:xfrm>
-          <a:prstGeom prst="rect">
-            <a:avLst/>
-          </a:prstGeom>
-          <a:noFill/>
-          <a:ln/>
-        </p:spPr>
-        <p:txBody>
-          <a:bodyPr wrap="square" lIns="0" tIns="0" rIns="0" bIns="0" rtlCol="0" anchor="ctr"/>
-          <a:lstStyle/>
-          <a:p>
-            <a:pPr algn="r" indent="0" marL="0">
-              <a:buNone/>
-            </a:pPr>
-            <a:r>
-              <a:rPr lang="en-US" sz="1300" dirty="0">
-                <a:solidFill>
-                  <a:srgbClr val="595959"/>
-                </a:solidFill>
-                <a:latin typeface="Inter" pitchFamily="34" charset="0"/>
-                <a:ea typeface="Inter" pitchFamily="34" charset="-122"/>
-                <a:cs typeface="Inter" pitchFamily="34" charset="-120"/>
-              </a:rPr>
-              <a:t>4 of 4</a:t>
             </a:r>
             <a:endParaRPr lang="en-US" sz="1300" dirty="0"/>
           </a:p>
@@ -9271,6 +9271,45 @@
         <p:spPr>
           <a:xfrm>
             <a:off x="9820656" y="4682804"/>
+            <a:ext cx="777240" cy="248502"/>
+          </a:xfrm>
+          <a:prstGeom prst="rect">
+            <a:avLst/>
+          </a:prstGeom>
+          <a:noFill/>
+          <a:ln/>
+        </p:spPr>
+        <p:txBody>
+          <a:bodyPr wrap="square" lIns="0" tIns="0" rIns="0" bIns="0" rtlCol="0" anchor="ctr"/>
+          <a:lstStyle/>
+          <a:p>
+            <a:pPr algn="r" indent="0" marL="0">
+              <a:buNone/>
+            </a:pPr>
+            <a:r>
+              <a:rPr lang="en-US" sz="1300" dirty="0">
+                <a:solidFill>
+                  <a:srgbClr val="595959"/>
+                </a:solidFill>
+                <a:latin typeface="Inter" pitchFamily="34" charset="0"/>
+                <a:ea typeface="Inter" pitchFamily="34" charset="-122"/>
+                <a:cs typeface="Inter" pitchFamily="34" charset="-120"/>
+              </a:rPr>
+              <a:t>3 of 4</a:t>
+            </a:r>
+            <a:endParaRPr lang="en-US" sz="1300" dirty="0"/>
+          </a:p>
+        </p:txBody>
+      </p:sp>
+      <p:sp>
+        <p:nvSpPr>
+          <p:cNvPr id="196" name="Text 194"/>
+          <p:cNvSpPr txBox="1"/>
+          <p:nvPr/>
+        </p:nvSpPr>
+        <p:spPr>
+          <a:xfrm>
+            <a:off x="10597896" y="4682804"/>
             <a:ext cx="868680" cy="248502"/>
           </a:xfrm>
           <a:prstGeom prst="rect">
@@ -9296,45 +9335,6 @@
                 <a:cs typeface="Inter" pitchFamily="34" charset="-120"/>
               </a:rPr>
               <a:t>−3,005</a:t>
-            </a:r>
-            <a:endParaRPr lang="en-US" sz="1300" dirty="0"/>
-          </a:p>
-        </p:txBody>
-      </p:sp>
-      <p:sp>
-        <p:nvSpPr>
-          <p:cNvPr id="196" name="Text 194"/>
-          <p:cNvSpPr txBox="1"/>
-          <p:nvPr/>
-        </p:nvSpPr>
-        <p:spPr>
-          <a:xfrm>
-            <a:off x="10689336" y="4682804"/>
-            <a:ext cx="777240" cy="248502"/>
-          </a:xfrm>
-          <a:prstGeom prst="rect">
-            <a:avLst/>
-          </a:prstGeom>
-          <a:noFill/>
-          <a:ln/>
-        </p:spPr>
-        <p:txBody>
-          <a:bodyPr wrap="square" lIns="0" tIns="0" rIns="0" bIns="0" rtlCol="0" anchor="ctr"/>
-          <a:lstStyle/>
-          <a:p>
-            <a:pPr algn="r" indent="0" marL="0">
-              <a:buNone/>
-            </a:pPr>
-            <a:r>
-              <a:rPr lang="en-US" sz="1300" dirty="0">
-                <a:solidFill>
-                  <a:srgbClr val="595959"/>
-                </a:solidFill>
-                <a:latin typeface="Inter" pitchFamily="34" charset="0"/>
-                <a:ea typeface="Inter" pitchFamily="34" charset="-122"/>
-                <a:cs typeface="Inter" pitchFamily="34" charset="-120"/>
-              </a:rPr>
-              <a:t>3 of 4</a:t>
             </a:r>
             <a:endParaRPr lang="en-US" sz="1300" dirty="0"/>
           </a:p>
@@ -9486,6 +9486,45 @@
         <p:spPr>
           <a:xfrm>
             <a:off x="9820656" y="4931305"/>
+            <a:ext cx="777240" cy="248502"/>
+          </a:xfrm>
+          <a:prstGeom prst="rect">
+            <a:avLst/>
+          </a:prstGeom>
+          <a:noFill/>
+          <a:ln/>
+        </p:spPr>
+        <p:txBody>
+          <a:bodyPr wrap="square" lIns="0" tIns="0" rIns="0" bIns="0" rtlCol="0" anchor="ctr"/>
+          <a:lstStyle/>
+          <a:p>
+            <a:pPr algn="r" indent="0" marL="0">
+              <a:buNone/>
+            </a:pPr>
+            <a:r>
+              <a:rPr lang="en-US" sz="1300" dirty="0">
+                <a:solidFill>
+                  <a:srgbClr val="595959"/>
+                </a:solidFill>
+                <a:latin typeface="Inter" pitchFamily="34" charset="0"/>
+                <a:ea typeface="Inter" pitchFamily="34" charset="-122"/>
+                <a:cs typeface="Inter" pitchFamily="34" charset="-120"/>
+              </a:rPr>
+              <a:t>4 of 4</a:t>
+            </a:r>
+            <a:endParaRPr lang="en-US" sz="1300" dirty="0"/>
+          </a:p>
+        </p:txBody>
+      </p:sp>
+      <p:sp>
+        <p:nvSpPr>
+          <p:cNvPr id="202" name="Text 200"/>
+          <p:cNvSpPr txBox="1"/>
+          <p:nvPr/>
+        </p:nvSpPr>
+        <p:spPr>
+          <a:xfrm>
+            <a:off x="10597896" y="4931305"/>
             <a:ext cx="868680" cy="248502"/>
           </a:xfrm>
           <a:prstGeom prst="rect">
@@ -9518,13 +9557,13 @@
       </p:sp>
       <p:sp>
         <p:nvSpPr>
-          <p:cNvPr id="202" name="Shape 200"/>
+          <p:cNvPr id="203" name="Shape 201"/>
           <p:cNvSpPr/>
           <p:nvPr/>
         </p:nvSpPr>
         <p:spPr>
           <a:xfrm>
-            <a:off x="10744200" y="4977025"/>
+            <a:off x="11521440" y="4977025"/>
             <a:ext cx="54864" cy="157062"/>
           </a:xfrm>
           <a:prstGeom prst="rect">
@@ -9538,45 +9577,6 @@
       </p:sp>
       <p:sp>
         <p:nvSpPr>
-          <p:cNvPr id="203" name="Text 201"/>
-          <p:cNvSpPr txBox="1"/>
-          <p:nvPr/>
-        </p:nvSpPr>
-        <p:spPr>
-          <a:xfrm>
-            <a:off x="10689336" y="4931305"/>
-            <a:ext cx="777240" cy="248502"/>
-          </a:xfrm>
-          <a:prstGeom prst="rect">
-            <a:avLst/>
-          </a:prstGeom>
-          <a:noFill/>
-          <a:ln/>
-        </p:spPr>
-        <p:txBody>
-          <a:bodyPr wrap="square" lIns="0" tIns="0" rIns="0" bIns="0" rtlCol="0" anchor="ctr"/>
-          <a:lstStyle/>
-          <a:p>
-            <a:pPr algn="r" indent="0" marL="0">
-              <a:buNone/>
-            </a:pPr>
-            <a:r>
-              <a:rPr lang="en-US" sz="1300" dirty="0">
-                <a:solidFill>
-                  <a:srgbClr val="595959"/>
-                </a:solidFill>
-                <a:latin typeface="Inter" pitchFamily="34" charset="0"/>
-                <a:ea typeface="Inter" pitchFamily="34" charset="-122"/>
-                <a:cs typeface="Inter" pitchFamily="34" charset="-120"/>
-              </a:rPr>
-              <a:t>4 of 4</a:t>
-            </a:r>
-            <a:endParaRPr lang="en-US" sz="1300" dirty="0"/>
-          </a:p>
-        </p:txBody>
-      </p:sp>
-      <p:sp>
-        <p:nvSpPr>
           <p:cNvPr id="204" name="Text 202"/>
           <p:cNvSpPr txBox="1"/>
           <p:nvPr/>
@@ -9721,6 +9721,45 @@
         <p:spPr>
           <a:xfrm>
             <a:off x="9820656" y="5179807"/>
+            <a:ext cx="777240" cy="248502"/>
+          </a:xfrm>
+          <a:prstGeom prst="rect">
+            <a:avLst/>
+          </a:prstGeom>
+          <a:noFill/>
+          <a:ln/>
+        </p:spPr>
+        <p:txBody>
+          <a:bodyPr wrap="square" lIns="0" tIns="0" rIns="0" bIns="0" rtlCol="0" anchor="ctr"/>
+          <a:lstStyle/>
+          <a:p>
+            <a:pPr algn="r" indent="0" marL="0">
+              <a:buNone/>
+            </a:pPr>
+            <a:r>
+              <a:rPr lang="en-US" sz="1300" dirty="0">
+                <a:solidFill>
+                  <a:srgbClr val="595959"/>
+                </a:solidFill>
+                <a:latin typeface="Inter" pitchFamily="34" charset="0"/>
+                <a:ea typeface="Inter" pitchFamily="34" charset="-122"/>
+                <a:cs typeface="Inter" pitchFamily="34" charset="-120"/>
+              </a:rPr>
+              <a:t>4 of 4</a:t>
+            </a:r>
+            <a:endParaRPr lang="en-US" sz="1300" dirty="0"/>
+          </a:p>
+        </p:txBody>
+      </p:sp>
+      <p:sp>
+        <p:nvSpPr>
+          <p:cNvPr id="209" name="Text 207"/>
+          <p:cNvSpPr txBox="1"/>
+          <p:nvPr/>
+        </p:nvSpPr>
+        <p:spPr>
+          <a:xfrm>
+            <a:off x="10597896" y="5179807"/>
             <a:ext cx="868680" cy="248502"/>
           </a:xfrm>
           <a:prstGeom prst="rect">
@@ -9753,13 +9792,13 @@
       </p:sp>
       <p:sp>
         <p:nvSpPr>
-          <p:cNvPr id="209" name="Shape 207"/>
+          <p:cNvPr id="210" name="Shape 208"/>
           <p:cNvSpPr/>
           <p:nvPr/>
         </p:nvSpPr>
         <p:spPr>
           <a:xfrm>
-            <a:off x="10744200" y="5225527"/>
+            <a:off x="11521440" y="5225527"/>
             <a:ext cx="54864" cy="157062"/>
           </a:xfrm>
           <a:prstGeom prst="rect">
@@ -9773,45 +9812,6 @@
       </p:sp>
       <p:sp>
         <p:nvSpPr>
-          <p:cNvPr id="210" name="Text 208"/>
-          <p:cNvSpPr txBox="1"/>
-          <p:nvPr/>
-        </p:nvSpPr>
-        <p:spPr>
-          <a:xfrm>
-            <a:off x="10689336" y="5179807"/>
-            <a:ext cx="777240" cy="248502"/>
-          </a:xfrm>
-          <a:prstGeom prst="rect">
-            <a:avLst/>
-          </a:prstGeom>
-          <a:noFill/>
-          <a:ln/>
-        </p:spPr>
-        <p:txBody>
-          <a:bodyPr wrap="square" lIns="0" tIns="0" rIns="0" bIns="0" rtlCol="0" anchor="ctr"/>
-          <a:lstStyle/>
-          <a:p>
-            <a:pPr algn="r" indent="0" marL="0">
-              <a:buNone/>
-            </a:pPr>
-            <a:r>
-              <a:rPr lang="en-US" sz="1300" dirty="0">
-                <a:solidFill>
-                  <a:srgbClr val="595959"/>
-                </a:solidFill>
-                <a:latin typeface="Inter" pitchFamily="34" charset="0"/>
-                <a:ea typeface="Inter" pitchFamily="34" charset="-122"/>
-                <a:cs typeface="Inter" pitchFamily="34" charset="-120"/>
-              </a:rPr>
-              <a:t>4 of 4</a:t>
-            </a:r>
-            <a:endParaRPr lang="en-US" sz="1300" dirty="0"/>
-          </a:p>
-        </p:txBody>
-      </p:sp>
-      <p:sp>
-        <p:nvSpPr>
           <p:cNvPr id="211" name="Text 209"/>
           <p:cNvSpPr txBox="1"/>
           <p:nvPr/>
@@ -9956,6 +9956,45 @@
         <p:spPr>
           <a:xfrm>
             <a:off x="9820656" y="5428309"/>
+            <a:ext cx="777240" cy="248502"/>
+          </a:xfrm>
+          <a:prstGeom prst="rect">
+            <a:avLst/>
+          </a:prstGeom>
+          <a:noFill/>
+          <a:ln/>
+        </p:spPr>
+        <p:txBody>
+          <a:bodyPr wrap="square" lIns="0" tIns="0" rIns="0" bIns="0" rtlCol="0" anchor="ctr"/>
+          <a:lstStyle/>
+          <a:p>
+            <a:pPr algn="r" indent="0" marL="0">
+              <a:buNone/>
+            </a:pPr>
+            <a:r>
+              <a:rPr lang="en-US" sz="1300" dirty="0">
+                <a:solidFill>
+                  <a:srgbClr val="595959"/>
+                </a:solidFill>
+                <a:latin typeface="Inter" pitchFamily="34" charset="0"/>
+                <a:ea typeface="Inter" pitchFamily="34" charset="-122"/>
+                <a:cs typeface="Inter" pitchFamily="34" charset="-120"/>
+              </a:rPr>
+              <a:t>4 of 4</a:t>
+            </a:r>
+            <a:endParaRPr lang="en-US" sz="1300" dirty="0"/>
+          </a:p>
+        </p:txBody>
+      </p:sp>
+      <p:sp>
+        <p:nvSpPr>
+          <p:cNvPr id="216" name="Text 214"/>
+          <p:cNvSpPr txBox="1"/>
+          <p:nvPr/>
+        </p:nvSpPr>
+        <p:spPr>
+          <a:xfrm>
+            <a:off x="10597896" y="5428309"/>
             <a:ext cx="868680" cy="248502"/>
           </a:xfrm>
           <a:prstGeom prst="rect">
@@ -9988,13 +10027,13 @@
       </p:sp>
       <p:sp>
         <p:nvSpPr>
-          <p:cNvPr id="216" name="Shape 214"/>
+          <p:cNvPr id="217" name="Shape 215"/>
           <p:cNvSpPr/>
           <p:nvPr/>
         </p:nvSpPr>
         <p:spPr>
           <a:xfrm>
-            <a:off x="10744200" y="5474029"/>
+            <a:off x="11521440" y="5474029"/>
             <a:ext cx="54864" cy="157062"/>
           </a:xfrm>
           <a:prstGeom prst="rect">
@@ -10005,45 +10044,6 @@
           </a:solidFill>
           <a:ln/>
         </p:spPr>
-      </p:sp>
-      <p:sp>
-        <p:nvSpPr>
-          <p:cNvPr id="217" name="Text 215"/>
-          <p:cNvSpPr txBox="1"/>
-          <p:nvPr/>
-        </p:nvSpPr>
-        <p:spPr>
-          <a:xfrm>
-            <a:off x="10689336" y="5428309"/>
-            <a:ext cx="777240" cy="248502"/>
-          </a:xfrm>
-          <a:prstGeom prst="rect">
-            <a:avLst/>
-          </a:prstGeom>
-          <a:noFill/>
-          <a:ln/>
-        </p:spPr>
-        <p:txBody>
-          <a:bodyPr wrap="square" lIns="0" tIns="0" rIns="0" bIns="0" rtlCol="0" anchor="ctr"/>
-          <a:lstStyle/>
-          <a:p>
-            <a:pPr algn="r" indent="0" marL="0">
-              <a:buNone/>
-            </a:pPr>
-            <a:r>
-              <a:rPr lang="en-US" sz="1300" dirty="0">
-                <a:solidFill>
-                  <a:srgbClr val="595959"/>
-                </a:solidFill>
-                <a:latin typeface="Inter" pitchFamily="34" charset="0"/>
-                <a:ea typeface="Inter" pitchFamily="34" charset="-122"/>
-                <a:cs typeface="Inter" pitchFamily="34" charset="-120"/>
-              </a:rPr>
-              <a:t>4 of 4</a:t>
-            </a:r>
-            <a:endParaRPr lang="en-US" sz="1300" dirty="0"/>
-          </a:p>
-        </p:txBody>
       </p:sp>
       <p:sp>
         <p:nvSpPr>

--- a/day2-deck/decks/Op Code Missed Opportunity - Review.pptx
+++ b/day2-deck/decks/Op Code Missed Opportunity - Review.pptx
@@ -2400,7 +2400,7 @@
                 <a:ea typeface="Inter" pitchFamily="34" charset="-122"/>
                 <a:cs typeface="Inter" pitchFamily="34" charset="-120"/>
               </a:rPr>
-              <a:t>50,442 more services a year on cars already in our drives. No new customers needed.</a:t>
+              <a:t>50,443 more services a year on cars already in our drives. No new customers needed.</a:t>
             </a:r>
             <a:endParaRPr lang="en-US" sz="1600" dirty="0"/>
           </a:p>
